--- a/showtime-2/final/biglab-b-final-yang-kaisen.pptx
+++ b/showtime-2/final/biglab-b-final-yang-kaisen.pptx
@@ -2,30 +2,30 @@
 <file path=ppt/presentation.xml><?xml version="1.0" encoding="utf-8"?>
 <p:presentation xmlns:p="http://schemas.openxmlformats.org/presentationml/2006/main">
   <p:sldMasterIdLst>
-    <p:sldMasterId xmlns:r="http://schemas.openxmlformats.org/officeDocument/2006/relationships" id="2147483648" r:id="R88244e8afb294339"/>
+    <p:sldMasterId xmlns:r="http://schemas.openxmlformats.org/officeDocument/2006/relationships" id="2147483648" r:id="R519d6fc8ff93481d"/>
   </p:sldMasterIdLst>
   <p:notesMasterIdLst>
-    <p:notesMasterId xmlns:r="http://schemas.openxmlformats.org/officeDocument/2006/relationships" r:id="R739e4dfe9e0e4498"/>
+    <p:notesMasterId xmlns:r="http://schemas.openxmlformats.org/officeDocument/2006/relationships" r:id="Re541d074473e4f0e"/>
   </p:notesMasterIdLst>
   <p:sldIdLst>
-    <p:sldId xmlns:r="http://schemas.openxmlformats.org/officeDocument/2006/relationships" id="256" r:id="R7e99404fb63d4569"/>
-    <p:sldId xmlns:r="http://schemas.openxmlformats.org/officeDocument/2006/relationships" id="257" r:id="R6edaba0eca8c403c"/>
-    <p:sldId xmlns:r="http://schemas.openxmlformats.org/officeDocument/2006/relationships" id="258" r:id="Rb959a0cbf3ad4aa7"/>
-    <p:sldId xmlns:r="http://schemas.openxmlformats.org/officeDocument/2006/relationships" id="259" r:id="R0309659bd52d4bc7"/>
-    <p:sldId xmlns:r="http://schemas.openxmlformats.org/officeDocument/2006/relationships" id="260" r:id="Rdc66cdd1d3c5425b"/>
-    <p:sldId xmlns:r="http://schemas.openxmlformats.org/officeDocument/2006/relationships" id="261" r:id="Rd5fb1114d84b4f9e"/>
-    <p:sldId xmlns:r="http://schemas.openxmlformats.org/officeDocument/2006/relationships" id="262" r:id="R7d183846da1646d6"/>
-    <p:sldId xmlns:r="http://schemas.openxmlformats.org/officeDocument/2006/relationships" id="263" r:id="Rfcad1ff381a048db"/>
-    <p:sldId xmlns:r="http://schemas.openxmlformats.org/officeDocument/2006/relationships" id="264" r:id="R51adc0462a164486"/>
-    <p:sldId xmlns:r="http://schemas.openxmlformats.org/officeDocument/2006/relationships" id="265" r:id="Ree62d04d49da4f4d"/>
-    <p:sldId xmlns:r="http://schemas.openxmlformats.org/officeDocument/2006/relationships" id="266" r:id="R34fb6ffa758947d3"/>
-    <p:sldId xmlns:r="http://schemas.openxmlformats.org/officeDocument/2006/relationships" id="267" r:id="R182b483552754571"/>
-    <p:sldId xmlns:r="http://schemas.openxmlformats.org/officeDocument/2006/relationships" id="268" r:id="R9b26f18d85bd49e9"/>
-    <p:sldId xmlns:r="http://schemas.openxmlformats.org/officeDocument/2006/relationships" id="269" r:id="R3fadda6a4aae4b93"/>
-    <p:sldId xmlns:r="http://schemas.openxmlformats.org/officeDocument/2006/relationships" id="270" r:id="Rd59bb529e2b34dc0"/>
-    <p:sldId xmlns:r="http://schemas.openxmlformats.org/officeDocument/2006/relationships" id="271" r:id="R3e387947c93f445e"/>
-    <p:sldId xmlns:r="http://schemas.openxmlformats.org/officeDocument/2006/relationships" id="272" r:id="R9afb0bd9669f436a"/>
-    <p:sldId xmlns:r="http://schemas.openxmlformats.org/officeDocument/2006/relationships" id="273" r:id="Rbd91b61986d8481b"/>
+    <p:sldId xmlns:r="http://schemas.openxmlformats.org/officeDocument/2006/relationships" id="256" r:id="Racd2a761470b497d"/>
+    <p:sldId xmlns:r="http://schemas.openxmlformats.org/officeDocument/2006/relationships" id="257" r:id="R446975d6209649c3"/>
+    <p:sldId xmlns:r="http://schemas.openxmlformats.org/officeDocument/2006/relationships" id="258" r:id="R78e67e406453499c"/>
+    <p:sldId xmlns:r="http://schemas.openxmlformats.org/officeDocument/2006/relationships" id="259" r:id="Rc1c9578751184ef9"/>
+    <p:sldId xmlns:r="http://schemas.openxmlformats.org/officeDocument/2006/relationships" id="260" r:id="Rcc466dbd9ee840df"/>
+    <p:sldId xmlns:r="http://schemas.openxmlformats.org/officeDocument/2006/relationships" id="261" r:id="Rc543bdb5d2ec41d6"/>
+    <p:sldId xmlns:r="http://schemas.openxmlformats.org/officeDocument/2006/relationships" id="262" r:id="R70d9a41b27294466"/>
+    <p:sldId xmlns:r="http://schemas.openxmlformats.org/officeDocument/2006/relationships" id="263" r:id="R07065b82605244a2"/>
+    <p:sldId xmlns:r="http://schemas.openxmlformats.org/officeDocument/2006/relationships" id="264" r:id="R37e278cf2d1340a0"/>
+    <p:sldId xmlns:r="http://schemas.openxmlformats.org/officeDocument/2006/relationships" id="265" r:id="R6e64d77de6ff4b5b"/>
+    <p:sldId xmlns:r="http://schemas.openxmlformats.org/officeDocument/2006/relationships" id="266" r:id="Rb498a64987684cfb"/>
+    <p:sldId xmlns:r="http://schemas.openxmlformats.org/officeDocument/2006/relationships" id="267" r:id="R365c0f406f134087"/>
+    <p:sldId xmlns:r="http://schemas.openxmlformats.org/officeDocument/2006/relationships" id="268" r:id="R008f1c9adafc4591"/>
+    <p:sldId xmlns:r="http://schemas.openxmlformats.org/officeDocument/2006/relationships" id="269" r:id="R6618b6d63ef44526"/>
+    <p:sldId xmlns:r="http://schemas.openxmlformats.org/officeDocument/2006/relationships" id="270" r:id="R24fab3bf1e53446c"/>
+    <p:sldId xmlns:r="http://schemas.openxmlformats.org/officeDocument/2006/relationships" id="271" r:id="R54f4f191eac24363"/>
+    <p:sldId xmlns:r="http://schemas.openxmlformats.org/officeDocument/2006/relationships" id="272" r:id="R0e83ff66418c484b"/>
+    <p:sldId xmlns:r="http://schemas.openxmlformats.org/officeDocument/2006/relationships" id="273" r:id="R4bebc1028fea4f1f"/>
   </p:sldIdLst>
   <p:sldSz cx="12192000" cy="6858000"/>
   <p:notesSz cx="6858000" cy="9144000"/>
@@ -1694,7 +1694,7 @@
   </p:cSld>
   <p:clrMap bg1="lt1" tx1="dk1" bg2="lt2" tx2="dk2" accent1="accent1" accent2="accent2" accent3="accent3" accent4="accent4" accent5="accent5" accent6="accent6" hlink="hlink" folHlink="folHlink"/>
   <p:sldLayoutIdLst>
-    <p:sldLayoutId xmlns:r="http://schemas.openxmlformats.org/officeDocument/2006/relationships" id="2147483649" r:id="R3eb5ee6bb12f46f9"/>
+    <p:sldLayoutId xmlns:r="http://schemas.openxmlformats.org/officeDocument/2006/relationships" id="2147483649" r:id="R7b68b58964024047"/>
   </p:sldLayoutIdLst>
   <p:txStyles>
     <p:titleStyle>
@@ -2000,7 +2000,7 @@
           <p:cNvPr id="1" name="">
             <a:extLst xmlns:a="http://schemas.openxmlformats.org/drawingml/2006/main">
               <a:ext uri="{FF2B5EF4-FFF2-40B4-BE49-F238E27FC236}">
-                <a16:creationId xmlns:a16="http://schemas.microsoft.com/office/drawing/2014/main" id="{20AFD96F-DD4A-40B7-BBF8-F3132BD3AE1A}"/>
+                <a16:creationId xmlns:a16="http://schemas.microsoft.com/office/drawing/2014/main" id="{9A6C9C81-2412-4754-A95D-4DDF4FE31064}"/>
               </a:ext>
             </a:extLst>
           </p:cNvPr>
@@ -2035,7 +2035,7 @@
           <p:cNvPr id="2" name="">
             <a:extLst xmlns:a="http://schemas.openxmlformats.org/drawingml/2006/main">
               <a:ext uri="{FF2B5EF4-FFF2-40B4-BE49-F238E27FC236}">
-                <a16:creationId xmlns:a16="http://schemas.microsoft.com/office/drawing/2014/main" id="{AF8DB623-50F7-4BA5-B874-FC93B2F6EFBD}"/>
+                <a16:creationId xmlns:a16="http://schemas.microsoft.com/office/drawing/2014/main" id="{E5D81F94-C0A5-4BD4-BFA2-F6A581321D19}"/>
               </a:ext>
             </a:extLst>
           </p:cNvPr>
@@ -2099,7 +2099,7 @@
           <p:cNvPr id="3" name="">
             <a:extLst xmlns:a="http://schemas.openxmlformats.org/drawingml/2006/main">
               <a:ext uri="{FF2B5EF4-FFF2-40B4-BE49-F238E27FC236}">
-                <a16:creationId xmlns:a16="http://schemas.microsoft.com/office/drawing/2014/main" id="{4837CDBD-7957-4F17-856A-611E3F1314D6}"/>
+                <a16:creationId xmlns:a16="http://schemas.microsoft.com/office/drawing/2014/main" id="{56D66A25-E606-4F48-981D-E9C963822600}"/>
               </a:ext>
             </a:extLst>
           </p:cNvPr>
@@ -2163,7 +2163,7 @@
           <p:cNvPr id="4" name="">
             <a:extLst xmlns:a="http://schemas.openxmlformats.org/drawingml/2006/main">
               <a:ext uri="{FF2B5EF4-FFF2-40B4-BE49-F238E27FC236}">
-                <a16:creationId xmlns:a16="http://schemas.microsoft.com/office/drawing/2014/main" id="{2BFFF246-0092-4AD6-B3F1-5A48EC76BAFE}"/>
+                <a16:creationId xmlns:a16="http://schemas.microsoft.com/office/drawing/2014/main" id="{5B3A45D7-5948-40A0-BFB4-7910EC4056DF}"/>
               </a:ext>
             </a:extLst>
           </p:cNvPr>
@@ -2227,7 +2227,7 @@
           <p:cNvPr id="5" name="">
             <a:extLst xmlns:a="http://schemas.openxmlformats.org/drawingml/2006/main">
               <a:ext uri="{FF2B5EF4-FFF2-40B4-BE49-F238E27FC236}">
-                <a16:creationId xmlns:a16="http://schemas.microsoft.com/office/drawing/2014/main" id="{5F041BE4-8EC3-4241-88A9-110539857F38}"/>
+                <a16:creationId xmlns:a16="http://schemas.microsoft.com/office/drawing/2014/main" id="{C389E400-49F4-4177-950E-F8957D9CEA6A}"/>
               </a:ext>
             </a:extLst>
           </p:cNvPr>
@@ -2291,7 +2291,7 @@
           <p:cNvPr id="6" name="">
             <a:extLst xmlns:a="http://schemas.openxmlformats.org/drawingml/2006/main">
               <a:ext uri="{FF2B5EF4-FFF2-40B4-BE49-F238E27FC236}">
-                <a16:creationId xmlns:a16="http://schemas.microsoft.com/office/drawing/2014/main" id="{BEF249C9-EE74-41E0-BD69-645B2D1C5113}"/>
+                <a16:creationId xmlns:a16="http://schemas.microsoft.com/office/drawing/2014/main" id="{16A84FAE-B9D8-444B-9D61-C16A363F1B7A}"/>
               </a:ext>
             </a:extLst>
           </p:cNvPr>
@@ -2326,7 +2326,7 @@
           <p:cNvPr id="7" name="">
             <a:extLst xmlns:a="http://schemas.openxmlformats.org/drawingml/2006/main">
               <a:ext uri="{FF2B5EF4-FFF2-40B4-BE49-F238E27FC236}">
-                <a16:creationId xmlns:a16="http://schemas.microsoft.com/office/drawing/2014/main" id="{2DFD392B-7D3A-4942-B02B-38FD6D9FC1FB}"/>
+                <a16:creationId xmlns:a16="http://schemas.microsoft.com/office/drawing/2014/main" id="{2A442439-5F3B-4432-B7BE-4B74CF80A446}"/>
               </a:ext>
             </a:extLst>
           </p:cNvPr>
@@ -2390,7 +2390,7 @@
           <p:cNvPr id="8" name="">
             <a:extLst xmlns:a="http://schemas.openxmlformats.org/drawingml/2006/main">
               <a:ext uri="{FF2B5EF4-FFF2-40B4-BE49-F238E27FC236}">
-                <a16:creationId xmlns:a16="http://schemas.microsoft.com/office/drawing/2014/main" id="{68442D88-9294-4D22-BB26-0C4F732593EB}"/>
+                <a16:creationId xmlns:a16="http://schemas.microsoft.com/office/drawing/2014/main" id="{B713E763-DFBA-456E-A020-C77CC6A5912A}"/>
               </a:ext>
             </a:extLst>
           </p:cNvPr>
@@ -2425,7 +2425,7 @@
           <p:cNvPr id="9" name="">
             <a:extLst xmlns:a="http://schemas.openxmlformats.org/drawingml/2006/main">
               <a:ext uri="{FF2B5EF4-FFF2-40B4-BE49-F238E27FC236}">
-                <a16:creationId xmlns:a16="http://schemas.microsoft.com/office/drawing/2014/main" id="{C79954F6-F21C-45D7-9A10-04A8C1FABB65}"/>
+                <a16:creationId xmlns:a16="http://schemas.microsoft.com/office/drawing/2014/main" id="{3A303158-8C9F-421A-A371-16A687DE8001}"/>
               </a:ext>
             </a:extLst>
           </p:cNvPr>
@@ -2489,7 +2489,7 @@
           <p:cNvPr id="10" name="">
             <a:extLst xmlns:a="http://schemas.openxmlformats.org/drawingml/2006/main">
               <a:ext uri="{FF2B5EF4-FFF2-40B4-BE49-F238E27FC236}">
-                <a16:creationId xmlns:a16="http://schemas.microsoft.com/office/drawing/2014/main" id="{48309D3C-59EE-4012-994B-0C3CBCB577C3}"/>
+                <a16:creationId xmlns:a16="http://schemas.microsoft.com/office/drawing/2014/main" id="{DF71CB77-0837-45C9-8385-AAEB06117922}"/>
               </a:ext>
             </a:extLst>
           </p:cNvPr>
@@ -2524,7 +2524,7 @@
           <p:cNvPr id="11" name="">
             <a:extLst xmlns:a="http://schemas.openxmlformats.org/drawingml/2006/main">
               <a:ext uri="{FF2B5EF4-FFF2-40B4-BE49-F238E27FC236}">
-                <a16:creationId xmlns:a16="http://schemas.microsoft.com/office/drawing/2014/main" id="{751B0851-7488-4CA6-ABA1-34FDA6DCD574}"/>
+                <a16:creationId xmlns:a16="http://schemas.microsoft.com/office/drawing/2014/main" id="{BCAF5ACD-09CD-4AF5-8ECF-E912D6C9CA7C}"/>
               </a:ext>
             </a:extLst>
           </p:cNvPr>
@@ -2588,7 +2588,7 @@
           <p:cNvPr id="12" name="">
             <a:extLst xmlns:a="http://schemas.openxmlformats.org/drawingml/2006/main">
               <a:ext uri="{FF2B5EF4-FFF2-40B4-BE49-F238E27FC236}">
-                <a16:creationId xmlns:a16="http://schemas.microsoft.com/office/drawing/2014/main" id="{A037F343-88AC-4F49-8212-CD7A7090ED65}"/>
+                <a16:creationId xmlns:a16="http://schemas.microsoft.com/office/drawing/2014/main" id="{64581F2B-D043-4B4B-BDD6-DCB639EAA18B}"/>
               </a:ext>
             </a:extLst>
           </p:cNvPr>
@@ -2621,7 +2621,7 @@
           <p:cNvPr id="13" name="">
             <a:extLst xmlns:a="http://schemas.openxmlformats.org/drawingml/2006/main">
               <a:ext uri="{FF2B5EF4-FFF2-40B4-BE49-F238E27FC236}">
-                <a16:creationId xmlns:a16="http://schemas.microsoft.com/office/drawing/2014/main" id="{F9BBA609-6B1C-4578-BBC9-1AB88410CC73}"/>
+                <a16:creationId xmlns:a16="http://schemas.microsoft.com/office/drawing/2014/main" id="{3BA7C44E-3C6F-4F58-9CF6-E863650EE34E}"/>
               </a:ext>
             </a:extLst>
           </p:cNvPr>
@@ -2685,7 +2685,7 @@
           <p:cNvPr id="14" name="">
             <a:extLst xmlns:a="http://schemas.openxmlformats.org/drawingml/2006/main">
               <a:ext uri="{FF2B5EF4-FFF2-40B4-BE49-F238E27FC236}">
-                <a16:creationId xmlns:a16="http://schemas.microsoft.com/office/drawing/2014/main" id="{C23660B1-FC28-4C2D-B8B7-4EC55DEB0F2C}"/>
+                <a16:creationId xmlns:a16="http://schemas.microsoft.com/office/drawing/2014/main" id="{1539592D-1E16-4FDC-B47C-90A332737E1E}"/>
               </a:ext>
             </a:extLst>
           </p:cNvPr>
@@ -2816,7 +2816,7 @@
     </p:spTree>
     <p:extLst>
       <p:ext uri="{BB962C8B-B14F-4D97-AF65-F5344CB8AC3E}">
-        <p14:creationId xmlns:p14="http://schemas.microsoft.com/office/powerpoint/2010/main" val="328986569"/>
+        <p14:creationId xmlns:p14="http://schemas.microsoft.com/office/powerpoint/2010/main" val="2023439355"/>
       </p:ext>
     </p:extLst>
   </p:cSld>
@@ -2847,7 +2847,7 @@
           <p:cNvPr id="1" name="">
             <a:extLst xmlns:a="http://schemas.openxmlformats.org/drawingml/2006/main">
               <a:ext uri="{FF2B5EF4-FFF2-40B4-BE49-F238E27FC236}">
-                <a16:creationId xmlns:a16="http://schemas.microsoft.com/office/drawing/2014/main" id="{19B29317-5E72-43C1-8671-3E04AA31F8FF}"/>
+                <a16:creationId xmlns:a16="http://schemas.microsoft.com/office/drawing/2014/main" id="{CDDFC76C-3ABC-4777-AF5C-BDD8D586BE36}"/>
               </a:ext>
             </a:extLst>
           </p:cNvPr>
@@ -2882,7 +2882,7 @@
           <p:cNvPr id="2" name="">
             <a:extLst xmlns:a="http://schemas.openxmlformats.org/drawingml/2006/main">
               <a:ext uri="{FF2B5EF4-FFF2-40B4-BE49-F238E27FC236}">
-                <a16:creationId xmlns:a16="http://schemas.microsoft.com/office/drawing/2014/main" id="{D63D0375-6E4B-4115-B591-81668F22CFD4}"/>
+                <a16:creationId xmlns:a16="http://schemas.microsoft.com/office/drawing/2014/main" id="{96D1038F-0732-4A70-BF24-0CACBC544DE1}"/>
               </a:ext>
             </a:extLst>
           </p:cNvPr>
@@ -2946,7 +2946,7 @@
           <p:cNvPr id="3" name="">
             <a:extLst xmlns:a="http://schemas.openxmlformats.org/drawingml/2006/main">
               <a:ext uri="{FF2B5EF4-FFF2-40B4-BE49-F238E27FC236}">
-                <a16:creationId xmlns:a16="http://schemas.microsoft.com/office/drawing/2014/main" id="{FB3E40E4-A626-47E5-9E14-88D82E6CAC54}"/>
+                <a16:creationId xmlns:a16="http://schemas.microsoft.com/office/drawing/2014/main" id="{E003ED2B-00D7-48CB-BA09-763192717A5C}"/>
               </a:ext>
             </a:extLst>
           </p:cNvPr>
@@ -3010,7 +3010,7 @@
           <p:cNvPr id="4" name="">
             <a:extLst xmlns:a="http://schemas.openxmlformats.org/drawingml/2006/main">
               <a:ext uri="{FF2B5EF4-FFF2-40B4-BE49-F238E27FC236}">
-                <a16:creationId xmlns:a16="http://schemas.microsoft.com/office/drawing/2014/main" id="{2B07EDE5-FA2D-49BF-BFEF-B07D2208EF02}"/>
+                <a16:creationId xmlns:a16="http://schemas.microsoft.com/office/drawing/2014/main" id="{8ED70E52-E180-4E7F-AEF7-907DD97FA69E}"/>
               </a:ext>
             </a:extLst>
           </p:cNvPr>
@@ -3074,7 +3074,7 @@
           <p:cNvPr id="5" name="">
             <a:extLst xmlns:a="http://schemas.openxmlformats.org/drawingml/2006/main">
               <a:ext uri="{FF2B5EF4-FFF2-40B4-BE49-F238E27FC236}">
-                <a16:creationId xmlns:a16="http://schemas.microsoft.com/office/drawing/2014/main" id="{7EC3ECD8-F318-4A83-B67E-0A12F837439D}"/>
+                <a16:creationId xmlns:a16="http://schemas.microsoft.com/office/drawing/2014/main" id="{BD0DC3C6-6AA7-47FE-AFFF-BA08BF653251}"/>
               </a:ext>
             </a:extLst>
           </p:cNvPr>
@@ -3138,7 +3138,7 @@
           <p:cNvPr id="6" name="">
             <a:extLst xmlns:a="http://schemas.openxmlformats.org/drawingml/2006/main">
               <a:ext uri="{FF2B5EF4-FFF2-40B4-BE49-F238E27FC236}">
-                <a16:creationId xmlns:a16="http://schemas.microsoft.com/office/drawing/2014/main" id="{EB33A154-8281-4A51-A46D-2D11972B8EFC}"/>
+                <a16:creationId xmlns:a16="http://schemas.microsoft.com/office/drawing/2014/main" id="{E69ABFAC-6D69-4790-BF30-6534B558C627}"/>
               </a:ext>
             </a:extLst>
           </p:cNvPr>
@@ -3171,7 +3171,7 @@
           <p:cNvPr id="7" name="">
             <a:extLst xmlns:a="http://schemas.openxmlformats.org/drawingml/2006/main">
               <a:ext uri="{FF2B5EF4-FFF2-40B4-BE49-F238E27FC236}">
-                <a16:creationId xmlns:a16="http://schemas.microsoft.com/office/drawing/2014/main" id="{E8F0ED4B-C17C-4BB8-8C4B-7BCFFEEB0FB8}"/>
+                <a16:creationId xmlns:a16="http://schemas.microsoft.com/office/drawing/2014/main" id="{5CB473FA-8887-44C2-B3DF-5DB2F57AAB14}"/>
               </a:ext>
             </a:extLst>
           </p:cNvPr>
@@ -3206,7 +3206,7 @@
           <p:cNvPr id="8" name="">
             <a:extLst xmlns:a="http://schemas.openxmlformats.org/drawingml/2006/main">
               <a:ext uri="{FF2B5EF4-FFF2-40B4-BE49-F238E27FC236}">
-                <a16:creationId xmlns:a16="http://schemas.microsoft.com/office/drawing/2014/main" id="{0C50811A-C686-440A-A4CE-74D16743BDA6}"/>
+                <a16:creationId xmlns:a16="http://schemas.microsoft.com/office/drawing/2014/main" id="{E51EEB9B-0C65-45BD-B11E-3E5BE9DFD36F}"/>
               </a:ext>
             </a:extLst>
           </p:cNvPr>
@@ -3270,7 +3270,7 @@
           <p:cNvPr id="9" name="">
             <a:extLst xmlns:a="http://schemas.openxmlformats.org/drawingml/2006/main">
               <a:ext uri="{FF2B5EF4-FFF2-40B4-BE49-F238E27FC236}">
-                <a16:creationId xmlns:a16="http://schemas.microsoft.com/office/drawing/2014/main" id="{4FDBAA66-023C-478D-BADA-386D7713443A}"/>
+                <a16:creationId xmlns:a16="http://schemas.microsoft.com/office/drawing/2014/main" id="{68A188B9-A340-4750-9D13-4936A878D9A6}"/>
               </a:ext>
             </a:extLst>
           </p:cNvPr>
@@ -3316,7 +3316,7 @@
           <p:cNvPr id="10" name="">
             <a:extLst xmlns:a="http://schemas.openxmlformats.org/drawingml/2006/main">
               <a:ext uri="{FF2B5EF4-FFF2-40B4-BE49-F238E27FC236}">
-                <a16:creationId xmlns:a16="http://schemas.microsoft.com/office/drawing/2014/main" id="{D052939E-A9B4-403D-9072-96B65301AEA2}"/>
+                <a16:creationId xmlns:a16="http://schemas.microsoft.com/office/drawing/2014/main" id="{581E3F89-1806-4F58-9D38-A4B34CF1CEB2}"/>
               </a:ext>
             </a:extLst>
           </p:cNvPr>
@@ -3349,7 +3349,7 @@
           <p:cNvPr id="11" name="">
             <a:extLst xmlns:a="http://schemas.openxmlformats.org/drawingml/2006/main">
               <a:ext uri="{FF2B5EF4-FFF2-40B4-BE49-F238E27FC236}">
-                <a16:creationId xmlns:a16="http://schemas.microsoft.com/office/drawing/2014/main" id="{0379FFB0-AFFA-4506-B710-7F4470C3C3A1}"/>
+                <a16:creationId xmlns:a16="http://schemas.microsoft.com/office/drawing/2014/main" id="{7BDE112A-F991-4084-8B14-681C642E180A}"/>
               </a:ext>
             </a:extLst>
           </p:cNvPr>
@@ -3384,7 +3384,7 @@
           <p:cNvPr id="12" name="">
             <a:extLst xmlns:a="http://schemas.openxmlformats.org/drawingml/2006/main">
               <a:ext uri="{FF2B5EF4-FFF2-40B4-BE49-F238E27FC236}">
-                <a16:creationId xmlns:a16="http://schemas.microsoft.com/office/drawing/2014/main" id="{E661CB4A-73B9-4E92-A999-86B2EBB72457}"/>
+                <a16:creationId xmlns:a16="http://schemas.microsoft.com/office/drawing/2014/main" id="{46F4B4FE-A1B4-4BF7-8A2D-6F40D9C54574}"/>
               </a:ext>
             </a:extLst>
           </p:cNvPr>
@@ -3448,7 +3448,7 @@
           <p:cNvPr id="13" name="">
             <a:extLst xmlns:a="http://schemas.openxmlformats.org/drawingml/2006/main">
               <a:ext uri="{FF2B5EF4-FFF2-40B4-BE49-F238E27FC236}">
-                <a16:creationId xmlns:a16="http://schemas.microsoft.com/office/drawing/2014/main" id="{43D22976-F8FF-45EB-92FF-6C65617B8AB9}"/>
+                <a16:creationId xmlns:a16="http://schemas.microsoft.com/office/drawing/2014/main" id="{AADA52E6-8A9C-46E0-890E-96B5203A587E}"/>
               </a:ext>
             </a:extLst>
           </p:cNvPr>
@@ -3494,7 +3494,7 @@
           <p:cNvPr id="14" name="">
             <a:extLst xmlns:a="http://schemas.openxmlformats.org/drawingml/2006/main">
               <a:ext uri="{FF2B5EF4-FFF2-40B4-BE49-F238E27FC236}">
-                <a16:creationId xmlns:a16="http://schemas.microsoft.com/office/drawing/2014/main" id="{4DBBF5E8-6659-4528-B805-6E5FF55CEEEA}"/>
+                <a16:creationId xmlns:a16="http://schemas.microsoft.com/office/drawing/2014/main" id="{D776F405-1BEA-4602-80A9-DD123B5DD824}"/>
               </a:ext>
             </a:extLst>
           </p:cNvPr>
@@ -3529,7 +3529,7 @@
           <p:cNvPr id="15" name="">
             <a:extLst xmlns:a="http://schemas.openxmlformats.org/drawingml/2006/main">
               <a:ext uri="{FF2B5EF4-FFF2-40B4-BE49-F238E27FC236}">
-                <a16:creationId xmlns:a16="http://schemas.microsoft.com/office/drawing/2014/main" id="{ACFC176B-CF36-403E-8ECD-5E530CBAA6CF}"/>
+                <a16:creationId xmlns:a16="http://schemas.microsoft.com/office/drawing/2014/main" id="{91D5A3AC-6AEB-462B-8D80-103F551D38BD}"/>
               </a:ext>
             </a:extLst>
           </p:cNvPr>
@@ -3593,7 +3593,7 @@
           <p:cNvPr id="16" name="">
             <a:extLst xmlns:a="http://schemas.openxmlformats.org/drawingml/2006/main">
               <a:ext uri="{FF2B5EF4-FFF2-40B4-BE49-F238E27FC236}">
-                <a16:creationId xmlns:a16="http://schemas.microsoft.com/office/drawing/2014/main" id="{EDFE78EE-553D-4A57-B27C-DE25D0039F07}"/>
+                <a16:creationId xmlns:a16="http://schemas.microsoft.com/office/drawing/2014/main" id="{3A3DC27C-239B-454F-B61B-8394AC457FD0}"/>
               </a:ext>
             </a:extLst>
           </p:cNvPr>
@@ -3628,7 +3628,7 @@
           <p:cNvPr id="17" name="">
             <a:extLst xmlns:a="http://schemas.openxmlformats.org/drawingml/2006/main">
               <a:ext uri="{FF2B5EF4-FFF2-40B4-BE49-F238E27FC236}">
-                <a16:creationId xmlns:a16="http://schemas.microsoft.com/office/drawing/2014/main" id="{75429D27-417F-4E4E-80AC-1A185DB7E7F7}"/>
+                <a16:creationId xmlns:a16="http://schemas.microsoft.com/office/drawing/2014/main" id="{53E6ADFA-7233-4FAD-8F05-2ED5D48CED14}"/>
               </a:ext>
             </a:extLst>
           </p:cNvPr>
@@ -3692,7 +3692,7 @@
           <p:cNvPr id="18" name="">
             <a:extLst xmlns:a="http://schemas.openxmlformats.org/drawingml/2006/main">
               <a:ext uri="{FF2B5EF4-FFF2-40B4-BE49-F238E27FC236}">
-                <a16:creationId xmlns:a16="http://schemas.microsoft.com/office/drawing/2014/main" id="{72313F47-F0BB-47AA-B833-D4DCC18E30B9}"/>
+                <a16:creationId xmlns:a16="http://schemas.microsoft.com/office/drawing/2014/main" id="{FB2D22F5-B1DA-4549-BF00-53B72A591D2A}"/>
               </a:ext>
             </a:extLst>
           </p:cNvPr>
@@ -3727,7 +3727,7 @@
           <p:cNvPr id="19" name="">
             <a:extLst xmlns:a="http://schemas.openxmlformats.org/drawingml/2006/main">
               <a:ext uri="{FF2B5EF4-FFF2-40B4-BE49-F238E27FC236}">
-                <a16:creationId xmlns:a16="http://schemas.microsoft.com/office/drawing/2014/main" id="{B5D7658C-4386-43B7-B6D8-723591468085}"/>
+                <a16:creationId xmlns:a16="http://schemas.microsoft.com/office/drawing/2014/main" id="{31F7F905-323D-41C5-947A-B9E3367CD4A5}"/>
               </a:ext>
             </a:extLst>
           </p:cNvPr>
@@ -3791,7 +3791,7 @@
           <p:cNvPr id="20" name="">
             <a:extLst xmlns:a="http://schemas.openxmlformats.org/drawingml/2006/main">
               <a:ext uri="{FF2B5EF4-FFF2-40B4-BE49-F238E27FC236}">
-                <a16:creationId xmlns:a16="http://schemas.microsoft.com/office/drawing/2014/main" id="{205BF0F2-5E15-44D4-8578-05C677B1BF78}"/>
+                <a16:creationId xmlns:a16="http://schemas.microsoft.com/office/drawing/2014/main" id="{DFA31FCE-1730-4E23-BEFA-787573090B36}"/>
               </a:ext>
             </a:extLst>
           </p:cNvPr>
@@ -3826,7 +3826,7 @@
           <p:cNvPr id="21" name="">
             <a:extLst xmlns:a="http://schemas.openxmlformats.org/drawingml/2006/main">
               <a:ext uri="{FF2B5EF4-FFF2-40B4-BE49-F238E27FC236}">
-                <a16:creationId xmlns:a16="http://schemas.microsoft.com/office/drawing/2014/main" id="{A867BF32-29EC-4D82-9D2D-92189D511A17}"/>
+                <a16:creationId xmlns:a16="http://schemas.microsoft.com/office/drawing/2014/main" id="{274CB16F-8775-45BA-9F7A-040EA7494FBC}"/>
               </a:ext>
             </a:extLst>
           </p:cNvPr>
@@ -3890,7 +3890,7 @@
           <p:cNvPr id="22" name="">
             <a:extLst xmlns:a="http://schemas.openxmlformats.org/drawingml/2006/main">
               <a:ext uri="{FF2B5EF4-FFF2-40B4-BE49-F238E27FC236}">
-                <a16:creationId xmlns:a16="http://schemas.microsoft.com/office/drawing/2014/main" id="{FE8EACC9-1604-454F-8528-841D787862A5}"/>
+                <a16:creationId xmlns:a16="http://schemas.microsoft.com/office/drawing/2014/main" id="{13C255DE-BDC4-42ED-B997-E7E741D0AA9C}"/>
               </a:ext>
             </a:extLst>
           </p:cNvPr>
@@ -3925,7 +3925,7 @@
           <p:cNvPr id="23" name="">
             <a:extLst xmlns:a="http://schemas.openxmlformats.org/drawingml/2006/main">
               <a:ext uri="{FF2B5EF4-FFF2-40B4-BE49-F238E27FC236}">
-                <a16:creationId xmlns:a16="http://schemas.microsoft.com/office/drawing/2014/main" id="{34349FAD-B6EB-4D36-B945-67AE2FA2B8A1}"/>
+                <a16:creationId xmlns:a16="http://schemas.microsoft.com/office/drawing/2014/main" id="{F1710F53-FF06-40DD-820B-046B172A09ED}"/>
               </a:ext>
             </a:extLst>
           </p:cNvPr>
@@ -3989,7 +3989,7 @@
           <p:cNvPr id="24" name="">
             <a:extLst xmlns:a="http://schemas.openxmlformats.org/drawingml/2006/main">
               <a:ext uri="{FF2B5EF4-FFF2-40B4-BE49-F238E27FC236}">
-                <a16:creationId xmlns:a16="http://schemas.microsoft.com/office/drawing/2014/main" id="{8E9C0381-DC1F-4287-A7A3-91CD717E7733}"/>
+                <a16:creationId xmlns:a16="http://schemas.microsoft.com/office/drawing/2014/main" id="{485EB984-F765-467A-8814-FE158924481F}"/>
               </a:ext>
             </a:extLst>
           </p:cNvPr>
@@ -4049,7 +4049,7 @@
     </p:spTree>
     <p:extLst>
       <p:ext uri="{BB962C8B-B14F-4D97-AF65-F5344CB8AC3E}">
-        <p14:creationId xmlns:p14="http://schemas.microsoft.com/office/powerpoint/2010/main" val="1841307694"/>
+        <p14:creationId xmlns:p14="http://schemas.microsoft.com/office/powerpoint/2010/main" val="651776602"/>
       </p:ext>
     </p:extLst>
   </p:cSld>
@@ -4080,7 +4080,7 @@
           <p:cNvPr id="1" name="">
             <a:extLst xmlns:a="http://schemas.openxmlformats.org/drawingml/2006/main">
               <a:ext uri="{FF2B5EF4-FFF2-40B4-BE49-F238E27FC236}">
-                <a16:creationId xmlns:a16="http://schemas.microsoft.com/office/drawing/2014/main" id="{94C3D90F-3785-4780-8478-2122082CFD8E}"/>
+                <a16:creationId xmlns:a16="http://schemas.microsoft.com/office/drawing/2014/main" id="{29A296CD-A5EF-4C58-BC8E-353390AB11A9}"/>
               </a:ext>
             </a:extLst>
           </p:cNvPr>
@@ -4115,7 +4115,7 @@
           <p:cNvPr id="2" name="">
             <a:extLst xmlns:a="http://schemas.openxmlformats.org/drawingml/2006/main">
               <a:ext uri="{FF2B5EF4-FFF2-40B4-BE49-F238E27FC236}">
-                <a16:creationId xmlns:a16="http://schemas.microsoft.com/office/drawing/2014/main" id="{4AF554BD-838C-4925-9485-DC3F1873EBEC}"/>
+                <a16:creationId xmlns:a16="http://schemas.microsoft.com/office/drawing/2014/main" id="{B0DFF7F8-B5ED-4B6C-B3E9-7A57B9DBDB95}"/>
               </a:ext>
             </a:extLst>
           </p:cNvPr>
@@ -4179,7 +4179,7 @@
           <p:cNvPr id="3" name="">
             <a:extLst xmlns:a="http://schemas.openxmlformats.org/drawingml/2006/main">
               <a:ext uri="{FF2B5EF4-FFF2-40B4-BE49-F238E27FC236}">
-                <a16:creationId xmlns:a16="http://schemas.microsoft.com/office/drawing/2014/main" id="{CB882B91-6199-4A38-A6D3-F444C4C4B87E}"/>
+                <a16:creationId xmlns:a16="http://schemas.microsoft.com/office/drawing/2014/main" id="{71B6027D-F702-4541-AEAC-CF8CAF5F53B8}"/>
               </a:ext>
             </a:extLst>
           </p:cNvPr>
@@ -4243,7 +4243,7 @@
           <p:cNvPr id="4" name="">
             <a:extLst xmlns:a="http://schemas.openxmlformats.org/drawingml/2006/main">
               <a:ext uri="{FF2B5EF4-FFF2-40B4-BE49-F238E27FC236}">
-                <a16:creationId xmlns:a16="http://schemas.microsoft.com/office/drawing/2014/main" id="{442837C8-31D1-4061-96A1-1BF94C7326B5}"/>
+                <a16:creationId xmlns:a16="http://schemas.microsoft.com/office/drawing/2014/main" id="{1737D1D6-10BE-4D3E-96DD-91FF7785B8BA}"/>
               </a:ext>
             </a:extLst>
           </p:cNvPr>
@@ -4307,7 +4307,7 @@
           <p:cNvPr id="5" name="">
             <a:extLst xmlns:a="http://schemas.openxmlformats.org/drawingml/2006/main">
               <a:ext uri="{FF2B5EF4-FFF2-40B4-BE49-F238E27FC236}">
-                <a16:creationId xmlns:a16="http://schemas.microsoft.com/office/drawing/2014/main" id="{3C7DF447-9839-4C4C-A7BC-92A91679D609}"/>
+                <a16:creationId xmlns:a16="http://schemas.microsoft.com/office/drawing/2014/main" id="{D4FF6CA9-AC00-4572-8F5F-1CF1451DEC1D}"/>
               </a:ext>
             </a:extLst>
           </p:cNvPr>
@@ -4371,7 +4371,7 @@
           <p:cNvPr id="6" name="">
             <a:extLst xmlns:a="http://schemas.openxmlformats.org/drawingml/2006/main">
               <a:ext uri="{FF2B5EF4-FFF2-40B4-BE49-F238E27FC236}">
-                <a16:creationId xmlns:a16="http://schemas.microsoft.com/office/drawing/2014/main" id="{6C507616-E7A5-4FF9-BC22-8A3434A2AB75}"/>
+                <a16:creationId xmlns:a16="http://schemas.microsoft.com/office/drawing/2014/main" id="{CFA5825D-EE65-48DB-94DA-2189B468B742}"/>
               </a:ext>
             </a:extLst>
           </p:cNvPr>
@@ -4404,7 +4404,7 @@
           <p:cNvPr id="7" name="">
             <a:extLst xmlns:a="http://schemas.openxmlformats.org/drawingml/2006/main">
               <a:ext uri="{FF2B5EF4-FFF2-40B4-BE49-F238E27FC236}">
-                <a16:creationId xmlns:a16="http://schemas.microsoft.com/office/drawing/2014/main" id="{DCD2D57F-F015-4FCB-8897-6D35087765A0}"/>
+                <a16:creationId xmlns:a16="http://schemas.microsoft.com/office/drawing/2014/main" id="{D27EF678-A3B9-4CC2-AC88-958266F8BC9A}"/>
               </a:ext>
             </a:extLst>
           </p:cNvPr>
@@ -4439,7 +4439,7 @@
           <p:cNvPr id="8" name="">
             <a:extLst xmlns:a="http://schemas.openxmlformats.org/drawingml/2006/main">
               <a:ext uri="{FF2B5EF4-FFF2-40B4-BE49-F238E27FC236}">
-                <a16:creationId xmlns:a16="http://schemas.microsoft.com/office/drawing/2014/main" id="{2347B610-401E-4210-9260-3A31C3D667A4}"/>
+                <a16:creationId xmlns:a16="http://schemas.microsoft.com/office/drawing/2014/main" id="{BE9FF7A7-D342-4030-905F-19D602C19710}"/>
               </a:ext>
             </a:extLst>
           </p:cNvPr>
@@ -4503,7 +4503,7 @@
           <p:cNvPr id="9" name="">
             <a:extLst xmlns:a="http://schemas.openxmlformats.org/drawingml/2006/main">
               <a:ext uri="{FF2B5EF4-FFF2-40B4-BE49-F238E27FC236}">
-                <a16:creationId xmlns:a16="http://schemas.microsoft.com/office/drawing/2014/main" id="{E9000C31-E273-46E3-A80B-F1C73054EC52}"/>
+                <a16:creationId xmlns:a16="http://schemas.microsoft.com/office/drawing/2014/main" id="{4283EDA9-257D-40EE-B02C-E5D340ADFA50}"/>
               </a:ext>
             </a:extLst>
           </p:cNvPr>
@@ -4567,7 +4567,7 @@
           <p:cNvPr id="10" name="">
             <a:extLst xmlns:a="http://schemas.openxmlformats.org/drawingml/2006/main">
               <a:ext uri="{FF2B5EF4-FFF2-40B4-BE49-F238E27FC236}">
-                <a16:creationId xmlns:a16="http://schemas.microsoft.com/office/drawing/2014/main" id="{ACC98696-6A8E-4111-BCC4-C40410271ED3}"/>
+                <a16:creationId xmlns:a16="http://schemas.microsoft.com/office/drawing/2014/main" id="{A4007A5B-3ABC-488D-A6A7-A9BB7658722B}"/>
               </a:ext>
             </a:extLst>
           </p:cNvPr>
@@ -4600,7 +4600,7 @@
           <p:cNvPr id="11" name="">
             <a:extLst xmlns:a="http://schemas.openxmlformats.org/drawingml/2006/main">
               <a:ext uri="{FF2B5EF4-FFF2-40B4-BE49-F238E27FC236}">
-                <a16:creationId xmlns:a16="http://schemas.microsoft.com/office/drawing/2014/main" id="{D7BA1A0B-2AE4-44BE-87E2-6BDF4647F031}"/>
+                <a16:creationId xmlns:a16="http://schemas.microsoft.com/office/drawing/2014/main" id="{C1BDF7EC-0D86-4E61-BD3F-3768D2CF44BD}"/>
               </a:ext>
             </a:extLst>
           </p:cNvPr>
@@ -4635,7 +4635,7 @@
           <p:cNvPr id="12" name="">
             <a:extLst xmlns:a="http://schemas.openxmlformats.org/drawingml/2006/main">
               <a:ext uri="{FF2B5EF4-FFF2-40B4-BE49-F238E27FC236}">
-                <a16:creationId xmlns:a16="http://schemas.microsoft.com/office/drawing/2014/main" id="{BA9CE9C8-C8D3-47AD-8E98-91D884660922}"/>
+                <a16:creationId xmlns:a16="http://schemas.microsoft.com/office/drawing/2014/main" id="{FB20AF26-E9E6-456D-A8FA-B52BC3CA80C3}"/>
               </a:ext>
             </a:extLst>
           </p:cNvPr>
@@ -4699,7 +4699,7 @@
           <p:cNvPr id="13" name="">
             <a:extLst xmlns:a="http://schemas.openxmlformats.org/drawingml/2006/main">
               <a:ext uri="{FF2B5EF4-FFF2-40B4-BE49-F238E27FC236}">
-                <a16:creationId xmlns:a16="http://schemas.microsoft.com/office/drawing/2014/main" id="{818F0206-0D19-44EA-BD1F-53EE9ED08D97}"/>
+                <a16:creationId xmlns:a16="http://schemas.microsoft.com/office/drawing/2014/main" id="{BA1FA59D-5906-481D-ABA1-4F4A7383F676}"/>
               </a:ext>
             </a:extLst>
           </p:cNvPr>
@@ -4763,7 +4763,7 @@
           <p:cNvPr id="14" name="">
             <a:extLst xmlns:a="http://schemas.openxmlformats.org/drawingml/2006/main">
               <a:ext uri="{FF2B5EF4-FFF2-40B4-BE49-F238E27FC236}">
-                <a16:creationId xmlns:a16="http://schemas.microsoft.com/office/drawing/2014/main" id="{045E6A18-3115-403C-8E71-9C6F962567BD}"/>
+                <a16:creationId xmlns:a16="http://schemas.microsoft.com/office/drawing/2014/main" id="{EBC7C418-2DBB-40CA-9595-E5DCFAF37927}"/>
               </a:ext>
             </a:extLst>
           </p:cNvPr>
@@ -4796,7 +4796,7 @@
           <p:cNvPr id="15" name="">
             <a:extLst xmlns:a="http://schemas.openxmlformats.org/drawingml/2006/main">
               <a:ext uri="{FF2B5EF4-FFF2-40B4-BE49-F238E27FC236}">
-                <a16:creationId xmlns:a16="http://schemas.microsoft.com/office/drawing/2014/main" id="{27C47893-B126-41A3-82A5-8AAEC8C9BC23}"/>
+                <a16:creationId xmlns:a16="http://schemas.microsoft.com/office/drawing/2014/main" id="{3DBF7AD6-E2CF-4596-8A8C-7022ABEC2EC9}"/>
               </a:ext>
             </a:extLst>
           </p:cNvPr>
@@ -4831,7 +4831,7 @@
           <p:cNvPr id="16" name="">
             <a:extLst xmlns:a="http://schemas.openxmlformats.org/drawingml/2006/main">
               <a:ext uri="{FF2B5EF4-FFF2-40B4-BE49-F238E27FC236}">
-                <a16:creationId xmlns:a16="http://schemas.microsoft.com/office/drawing/2014/main" id="{F31F63C3-3FB0-4EB9-BD1F-1E34B125EC57}"/>
+                <a16:creationId xmlns:a16="http://schemas.microsoft.com/office/drawing/2014/main" id="{2ABA2059-AF4E-44D0-9E63-47D5463D858E}"/>
               </a:ext>
             </a:extLst>
           </p:cNvPr>
@@ -4895,7 +4895,7 @@
           <p:cNvPr id="17" name="">
             <a:extLst xmlns:a="http://schemas.openxmlformats.org/drawingml/2006/main">
               <a:ext uri="{FF2B5EF4-FFF2-40B4-BE49-F238E27FC236}">
-                <a16:creationId xmlns:a16="http://schemas.microsoft.com/office/drawing/2014/main" id="{65B56753-6FD4-48F7-B460-C6C9A34189E2}"/>
+                <a16:creationId xmlns:a16="http://schemas.microsoft.com/office/drawing/2014/main" id="{961018CA-FBC9-4548-AD19-8E27B1605048}"/>
               </a:ext>
             </a:extLst>
           </p:cNvPr>
@@ -4959,7 +4959,7 @@
           <p:cNvPr id="18" name="">
             <a:extLst xmlns:a="http://schemas.openxmlformats.org/drawingml/2006/main">
               <a:ext uri="{FF2B5EF4-FFF2-40B4-BE49-F238E27FC236}">
-                <a16:creationId xmlns:a16="http://schemas.microsoft.com/office/drawing/2014/main" id="{EED34B60-BF6C-4794-BAE6-7206C52E0164}"/>
+                <a16:creationId xmlns:a16="http://schemas.microsoft.com/office/drawing/2014/main" id="{5E5CBB23-3EF9-46AF-838B-457E9BAD0966}"/>
               </a:ext>
             </a:extLst>
           </p:cNvPr>
@@ -4994,7 +4994,7 @@
           <p:cNvPr id="19" name="">
             <a:extLst xmlns:a="http://schemas.openxmlformats.org/drawingml/2006/main">
               <a:ext uri="{FF2B5EF4-FFF2-40B4-BE49-F238E27FC236}">
-                <a16:creationId xmlns:a16="http://schemas.microsoft.com/office/drawing/2014/main" id="{901FA34A-3A1C-413C-ABEB-40D1C3454181}"/>
+                <a16:creationId xmlns:a16="http://schemas.microsoft.com/office/drawing/2014/main" id="{6323AFF2-21C5-4093-97D0-2840C746725A}"/>
               </a:ext>
             </a:extLst>
           </p:cNvPr>
@@ -5058,7 +5058,7 @@
           <p:cNvPr id="20" name="">
             <a:extLst xmlns:a="http://schemas.openxmlformats.org/drawingml/2006/main">
               <a:ext uri="{FF2B5EF4-FFF2-40B4-BE49-F238E27FC236}">
-                <a16:creationId xmlns:a16="http://schemas.microsoft.com/office/drawing/2014/main" id="{8A968A51-773B-4828-9BA0-F8BD0FDF60ED}"/>
+                <a16:creationId xmlns:a16="http://schemas.microsoft.com/office/drawing/2014/main" id="{9C5B9154-BF66-4CF7-9131-F319AAACD3C4}"/>
               </a:ext>
             </a:extLst>
           </p:cNvPr>
@@ -5093,7 +5093,7 @@
           <p:cNvPr id="21" name="">
             <a:extLst xmlns:a="http://schemas.openxmlformats.org/drawingml/2006/main">
               <a:ext uri="{FF2B5EF4-FFF2-40B4-BE49-F238E27FC236}">
-                <a16:creationId xmlns:a16="http://schemas.microsoft.com/office/drawing/2014/main" id="{65489A35-E6FA-43A7-830C-52741A319BC7}"/>
+                <a16:creationId xmlns:a16="http://schemas.microsoft.com/office/drawing/2014/main" id="{D3F952C5-29FD-417D-9E90-0BEC404277EE}"/>
               </a:ext>
             </a:extLst>
           </p:cNvPr>
@@ -5155,7 +5155,7 @@
     </p:spTree>
     <p:extLst>
       <p:ext uri="{BB962C8B-B14F-4D97-AF65-F5344CB8AC3E}">
-        <p14:creationId xmlns:p14="http://schemas.microsoft.com/office/powerpoint/2010/main" val="190724199"/>
+        <p14:creationId xmlns:p14="http://schemas.microsoft.com/office/powerpoint/2010/main" val="366242448"/>
       </p:ext>
     </p:extLst>
   </p:cSld>
@@ -5186,7 +5186,7 @@
           <p:cNvPr id="1" name="">
             <a:extLst xmlns:a="http://schemas.openxmlformats.org/drawingml/2006/main">
               <a:ext uri="{FF2B5EF4-FFF2-40B4-BE49-F238E27FC236}">
-                <a16:creationId xmlns:a16="http://schemas.microsoft.com/office/drawing/2014/main" id="{B95BEDFE-E35E-4B62-9906-35EC577826DB}"/>
+                <a16:creationId xmlns:a16="http://schemas.microsoft.com/office/drawing/2014/main" id="{C43CB2A4-C542-4556-8D6C-FD1B170F7DB7}"/>
               </a:ext>
             </a:extLst>
           </p:cNvPr>
@@ -5221,7 +5221,7 @@
           <p:cNvPr id="2" name="">
             <a:extLst xmlns:a="http://schemas.openxmlformats.org/drawingml/2006/main">
               <a:ext uri="{FF2B5EF4-FFF2-40B4-BE49-F238E27FC236}">
-                <a16:creationId xmlns:a16="http://schemas.microsoft.com/office/drawing/2014/main" id="{D9BC033C-869B-4C6B-8A81-092E295DA532}"/>
+                <a16:creationId xmlns:a16="http://schemas.microsoft.com/office/drawing/2014/main" id="{E5A51A18-512E-4A23-9BB1-2A8A86F13D34}"/>
               </a:ext>
             </a:extLst>
           </p:cNvPr>
@@ -5285,7 +5285,7 @@
           <p:cNvPr id="3" name="">
             <a:extLst xmlns:a="http://schemas.openxmlformats.org/drawingml/2006/main">
               <a:ext uri="{FF2B5EF4-FFF2-40B4-BE49-F238E27FC236}">
-                <a16:creationId xmlns:a16="http://schemas.microsoft.com/office/drawing/2014/main" id="{49ECFCA2-1F9C-41C0-8846-4BCF05B9D912}"/>
+                <a16:creationId xmlns:a16="http://schemas.microsoft.com/office/drawing/2014/main" id="{38B008F1-EA17-4235-8190-CA3302BB222A}"/>
               </a:ext>
             </a:extLst>
           </p:cNvPr>
@@ -5349,7 +5349,7 @@
           <p:cNvPr id="4" name="">
             <a:extLst xmlns:a="http://schemas.openxmlformats.org/drawingml/2006/main">
               <a:ext uri="{FF2B5EF4-FFF2-40B4-BE49-F238E27FC236}">
-                <a16:creationId xmlns:a16="http://schemas.microsoft.com/office/drawing/2014/main" id="{ABA0B82A-52B5-40DE-B134-27E7D0D2B723}"/>
+                <a16:creationId xmlns:a16="http://schemas.microsoft.com/office/drawing/2014/main" id="{88364B63-F681-4FFF-8DF9-11FD4E8AD12C}"/>
               </a:ext>
             </a:extLst>
           </p:cNvPr>
@@ -5413,7 +5413,7 @@
           <p:cNvPr id="5" name="">
             <a:extLst xmlns:a="http://schemas.openxmlformats.org/drawingml/2006/main">
               <a:ext uri="{FF2B5EF4-FFF2-40B4-BE49-F238E27FC236}">
-                <a16:creationId xmlns:a16="http://schemas.microsoft.com/office/drawing/2014/main" id="{77CA54A4-5DF6-4767-9233-82E68ABFCD9B}"/>
+                <a16:creationId xmlns:a16="http://schemas.microsoft.com/office/drawing/2014/main" id="{8A4392AA-DDB7-45CA-ABF4-C059E79ECEFD}"/>
               </a:ext>
             </a:extLst>
           </p:cNvPr>
@@ -5477,7 +5477,7 @@
           <p:cNvPr id="6" name="">
             <a:extLst xmlns:a="http://schemas.openxmlformats.org/drawingml/2006/main">
               <a:ext uri="{FF2B5EF4-FFF2-40B4-BE49-F238E27FC236}">
-                <a16:creationId xmlns:a16="http://schemas.microsoft.com/office/drawing/2014/main" id="{F5B51729-9D75-42F2-BD8A-22126746A857}"/>
+                <a16:creationId xmlns:a16="http://schemas.microsoft.com/office/drawing/2014/main" id="{D8F66B5C-6564-4437-B429-32701B5E3D4A}"/>
               </a:ext>
             </a:extLst>
           </p:cNvPr>
@@ -5510,7 +5510,7 @@
           <p:cNvPr id="7" name="">
             <a:extLst xmlns:a="http://schemas.openxmlformats.org/drawingml/2006/main">
               <a:ext uri="{FF2B5EF4-FFF2-40B4-BE49-F238E27FC236}">
-                <a16:creationId xmlns:a16="http://schemas.microsoft.com/office/drawing/2014/main" id="{E59ACAFD-AEA1-4A47-81A8-D06E26E4C1F8}"/>
+                <a16:creationId xmlns:a16="http://schemas.microsoft.com/office/drawing/2014/main" id="{598DE687-6033-4FFC-B4F9-9114B3483390}"/>
               </a:ext>
             </a:extLst>
           </p:cNvPr>
@@ -5545,7 +5545,7 @@
           <p:cNvPr id="8" name="">
             <a:extLst xmlns:a="http://schemas.openxmlformats.org/drawingml/2006/main">
               <a:ext uri="{FF2B5EF4-FFF2-40B4-BE49-F238E27FC236}">
-                <a16:creationId xmlns:a16="http://schemas.microsoft.com/office/drawing/2014/main" id="{17786A6B-3228-40F2-9476-3084BF5C0476}"/>
+                <a16:creationId xmlns:a16="http://schemas.microsoft.com/office/drawing/2014/main" id="{79E3D69F-E534-41EB-A8AE-BDC4D07A67AD}"/>
               </a:ext>
             </a:extLst>
           </p:cNvPr>
@@ -5609,7 +5609,7 @@
           <p:cNvPr id="9" name="">
             <a:extLst xmlns:a="http://schemas.openxmlformats.org/drawingml/2006/main">
               <a:ext uri="{FF2B5EF4-FFF2-40B4-BE49-F238E27FC236}">
-                <a16:creationId xmlns:a16="http://schemas.microsoft.com/office/drawing/2014/main" id="{5469CDE8-7DD4-4BFC-9EC4-3B46D49396DC}"/>
+                <a16:creationId xmlns:a16="http://schemas.microsoft.com/office/drawing/2014/main" id="{AE8BE841-A454-446D-994F-1D9634C5931A}"/>
               </a:ext>
             </a:extLst>
           </p:cNvPr>
@@ -5673,7 +5673,7 @@
           <p:cNvPr id="10" name="">
             <a:extLst xmlns:a="http://schemas.openxmlformats.org/drawingml/2006/main">
               <a:ext uri="{FF2B5EF4-FFF2-40B4-BE49-F238E27FC236}">
-                <a16:creationId xmlns:a16="http://schemas.microsoft.com/office/drawing/2014/main" id="{B99F3C12-47A8-45D0-A5BB-FEA680CAC1BF}"/>
+                <a16:creationId xmlns:a16="http://schemas.microsoft.com/office/drawing/2014/main" id="{65FAAB1A-A9FD-44CE-86E2-DF7052EE3B04}"/>
               </a:ext>
             </a:extLst>
           </p:cNvPr>
@@ -5706,7 +5706,7 @@
           <p:cNvPr id="11" name="">
             <a:extLst xmlns:a="http://schemas.openxmlformats.org/drawingml/2006/main">
               <a:ext uri="{FF2B5EF4-FFF2-40B4-BE49-F238E27FC236}">
-                <a16:creationId xmlns:a16="http://schemas.microsoft.com/office/drawing/2014/main" id="{D9FB157D-A992-4B5E-BB0D-BB71074B4E78}"/>
+                <a16:creationId xmlns:a16="http://schemas.microsoft.com/office/drawing/2014/main" id="{31C1908E-12D8-4B5B-A8DD-963E5F86B3C5}"/>
               </a:ext>
             </a:extLst>
           </p:cNvPr>
@@ -5741,7 +5741,7 @@
           <p:cNvPr id="12" name="">
             <a:extLst xmlns:a="http://schemas.openxmlformats.org/drawingml/2006/main">
               <a:ext uri="{FF2B5EF4-FFF2-40B4-BE49-F238E27FC236}">
-                <a16:creationId xmlns:a16="http://schemas.microsoft.com/office/drawing/2014/main" id="{EDA66237-A6AB-4573-BE9E-17DE57A6A6CA}"/>
+                <a16:creationId xmlns:a16="http://schemas.microsoft.com/office/drawing/2014/main" id="{E8456BC4-89E2-44D0-B2B3-2E4D1B34339E}"/>
               </a:ext>
             </a:extLst>
           </p:cNvPr>
@@ -5805,7 +5805,7 @@
           <p:cNvPr id="13" name="">
             <a:extLst xmlns:a="http://schemas.openxmlformats.org/drawingml/2006/main">
               <a:ext uri="{FF2B5EF4-FFF2-40B4-BE49-F238E27FC236}">
-                <a16:creationId xmlns:a16="http://schemas.microsoft.com/office/drawing/2014/main" id="{9B7B3B47-3306-455F-807F-31E91C3901F8}"/>
+                <a16:creationId xmlns:a16="http://schemas.microsoft.com/office/drawing/2014/main" id="{F06293CF-87AF-4938-A743-D7F5A7E61B84}"/>
               </a:ext>
             </a:extLst>
           </p:cNvPr>
@@ -5869,7 +5869,7 @@
           <p:cNvPr id="14" name="">
             <a:extLst xmlns:a="http://schemas.openxmlformats.org/drawingml/2006/main">
               <a:ext uri="{FF2B5EF4-FFF2-40B4-BE49-F238E27FC236}">
-                <a16:creationId xmlns:a16="http://schemas.microsoft.com/office/drawing/2014/main" id="{00212E5E-0F8F-4BA7-9F7D-60F03E018072}"/>
+                <a16:creationId xmlns:a16="http://schemas.microsoft.com/office/drawing/2014/main" id="{E202D98E-2372-4032-8F7C-3533A2B519C3}"/>
               </a:ext>
             </a:extLst>
           </p:cNvPr>
@@ -5902,7 +5902,7 @@
           <p:cNvPr id="15" name="">
             <a:extLst xmlns:a="http://schemas.openxmlformats.org/drawingml/2006/main">
               <a:ext uri="{FF2B5EF4-FFF2-40B4-BE49-F238E27FC236}">
-                <a16:creationId xmlns:a16="http://schemas.microsoft.com/office/drawing/2014/main" id="{BB3049EB-5191-43BE-8FC5-C2D39900D601}"/>
+                <a16:creationId xmlns:a16="http://schemas.microsoft.com/office/drawing/2014/main" id="{471545B8-FDE1-4599-8015-8F4C46A5B545}"/>
               </a:ext>
             </a:extLst>
           </p:cNvPr>
@@ -5937,7 +5937,7 @@
           <p:cNvPr id="16" name="">
             <a:extLst xmlns:a="http://schemas.openxmlformats.org/drawingml/2006/main">
               <a:ext uri="{FF2B5EF4-FFF2-40B4-BE49-F238E27FC236}">
-                <a16:creationId xmlns:a16="http://schemas.microsoft.com/office/drawing/2014/main" id="{5F11C498-ADF1-4819-9C77-BFAAAB860B8A}"/>
+                <a16:creationId xmlns:a16="http://schemas.microsoft.com/office/drawing/2014/main" id="{FC5BEFB8-9E0B-4E69-9200-2C310C1ECC12}"/>
               </a:ext>
             </a:extLst>
           </p:cNvPr>
@@ -6001,7 +6001,7 @@
           <p:cNvPr id="17" name="">
             <a:extLst xmlns:a="http://schemas.openxmlformats.org/drawingml/2006/main">
               <a:ext uri="{FF2B5EF4-FFF2-40B4-BE49-F238E27FC236}">
-                <a16:creationId xmlns:a16="http://schemas.microsoft.com/office/drawing/2014/main" id="{B3F55815-30E6-4CF7-8271-D6AC73E5599C}"/>
+                <a16:creationId xmlns:a16="http://schemas.microsoft.com/office/drawing/2014/main" id="{73F41624-1263-4EF6-B48F-B6401DB4B32F}"/>
               </a:ext>
             </a:extLst>
           </p:cNvPr>
@@ -6065,7 +6065,7 @@
           <p:cNvPr id="18" name="">
             <a:extLst xmlns:a="http://schemas.openxmlformats.org/drawingml/2006/main">
               <a:ext uri="{FF2B5EF4-FFF2-40B4-BE49-F238E27FC236}">
-                <a16:creationId xmlns:a16="http://schemas.microsoft.com/office/drawing/2014/main" id="{E33C0F6B-F398-4645-9119-B39A930760EE}"/>
+                <a16:creationId xmlns:a16="http://schemas.microsoft.com/office/drawing/2014/main" id="{5DD36247-CADC-4A79-B2EE-FBCAB3518B7B}"/>
               </a:ext>
             </a:extLst>
           </p:cNvPr>
@@ -6125,7 +6125,7 @@
     </p:spTree>
     <p:extLst>
       <p:ext uri="{BB962C8B-B14F-4D97-AF65-F5344CB8AC3E}">
-        <p14:creationId xmlns:p14="http://schemas.microsoft.com/office/powerpoint/2010/main" val="573010313"/>
+        <p14:creationId xmlns:p14="http://schemas.microsoft.com/office/powerpoint/2010/main" val="902986509"/>
       </p:ext>
     </p:extLst>
   </p:cSld>
@@ -6156,7 +6156,7 @@
           <p:cNvPr id="1" name="">
             <a:extLst xmlns:a="http://schemas.openxmlformats.org/drawingml/2006/main">
               <a:ext uri="{FF2B5EF4-FFF2-40B4-BE49-F238E27FC236}">
-                <a16:creationId xmlns:a16="http://schemas.microsoft.com/office/drawing/2014/main" id="{0C2E4A33-398B-4EF1-816E-4FDE98CF94C1}"/>
+                <a16:creationId xmlns:a16="http://schemas.microsoft.com/office/drawing/2014/main" id="{7EFC40BB-EC6C-4872-A486-D2464F983584}"/>
               </a:ext>
             </a:extLst>
           </p:cNvPr>
@@ -6191,7 +6191,7 @@
           <p:cNvPr id="2" name="">
             <a:extLst xmlns:a="http://schemas.openxmlformats.org/drawingml/2006/main">
               <a:ext uri="{FF2B5EF4-FFF2-40B4-BE49-F238E27FC236}">
-                <a16:creationId xmlns:a16="http://schemas.microsoft.com/office/drawing/2014/main" id="{86980CC0-61A3-4BCE-BCA3-28CA77EDA4C2}"/>
+                <a16:creationId xmlns:a16="http://schemas.microsoft.com/office/drawing/2014/main" id="{304A0736-60B7-41AF-A712-A8FECA89786E}"/>
               </a:ext>
             </a:extLst>
           </p:cNvPr>
@@ -6255,7 +6255,7 @@
           <p:cNvPr id="3" name="">
             <a:extLst xmlns:a="http://schemas.openxmlformats.org/drawingml/2006/main">
               <a:ext uri="{FF2B5EF4-FFF2-40B4-BE49-F238E27FC236}">
-                <a16:creationId xmlns:a16="http://schemas.microsoft.com/office/drawing/2014/main" id="{DB039611-3E3A-465E-AE52-53CEA81056FC}"/>
+                <a16:creationId xmlns:a16="http://schemas.microsoft.com/office/drawing/2014/main" id="{FAAC9567-FF03-4851-88C3-DD7FE16881C5}"/>
               </a:ext>
             </a:extLst>
           </p:cNvPr>
@@ -6319,7 +6319,7 @@
           <p:cNvPr id="4" name="">
             <a:extLst xmlns:a="http://schemas.openxmlformats.org/drawingml/2006/main">
               <a:ext uri="{FF2B5EF4-FFF2-40B4-BE49-F238E27FC236}">
-                <a16:creationId xmlns:a16="http://schemas.microsoft.com/office/drawing/2014/main" id="{48765E84-0516-4C7C-B730-8C0A92ACEC5F}"/>
+                <a16:creationId xmlns:a16="http://schemas.microsoft.com/office/drawing/2014/main" id="{A8411E1D-0903-45FD-82CE-52A3425A32E7}"/>
               </a:ext>
             </a:extLst>
           </p:cNvPr>
@@ -6383,7 +6383,7 @@
           <p:cNvPr id="5" name="">
             <a:extLst xmlns:a="http://schemas.openxmlformats.org/drawingml/2006/main">
               <a:ext uri="{FF2B5EF4-FFF2-40B4-BE49-F238E27FC236}">
-                <a16:creationId xmlns:a16="http://schemas.microsoft.com/office/drawing/2014/main" id="{8E7D1ADE-ED62-44D7-A994-A71B327A601A}"/>
+                <a16:creationId xmlns:a16="http://schemas.microsoft.com/office/drawing/2014/main" id="{429DA504-27C7-42A5-BB84-90B7298234FB}"/>
               </a:ext>
             </a:extLst>
           </p:cNvPr>
@@ -6447,7 +6447,7 @@
           <p:cNvPr id="6" name="">
             <a:extLst xmlns:a="http://schemas.openxmlformats.org/drawingml/2006/main">
               <a:ext uri="{FF2B5EF4-FFF2-40B4-BE49-F238E27FC236}">
-                <a16:creationId xmlns:a16="http://schemas.microsoft.com/office/drawing/2014/main" id="{53179F3C-FDE7-4380-B738-D395796A4A9D}"/>
+                <a16:creationId xmlns:a16="http://schemas.microsoft.com/office/drawing/2014/main" id="{C78B3570-651A-4BB8-9605-3CC5060769A5}"/>
               </a:ext>
             </a:extLst>
           </p:cNvPr>
@@ -6480,7 +6480,7 @@
           <p:cNvPr id="7" name="">
             <a:extLst xmlns:a="http://schemas.openxmlformats.org/drawingml/2006/main">
               <a:ext uri="{FF2B5EF4-FFF2-40B4-BE49-F238E27FC236}">
-                <a16:creationId xmlns:a16="http://schemas.microsoft.com/office/drawing/2014/main" id="{DA4246DC-33B0-4189-BF0F-EAF4688A0C84}"/>
+                <a16:creationId xmlns:a16="http://schemas.microsoft.com/office/drawing/2014/main" id="{8C0A8D29-F91D-4B1C-9B8D-BB13FA87A86A}"/>
               </a:ext>
             </a:extLst>
           </p:cNvPr>
@@ -6544,7 +6544,7 @@
           <p:cNvPr id="8" name="">
             <a:extLst xmlns:a="http://schemas.openxmlformats.org/drawingml/2006/main">
               <a:ext uri="{FF2B5EF4-FFF2-40B4-BE49-F238E27FC236}">
-                <a16:creationId xmlns:a16="http://schemas.microsoft.com/office/drawing/2014/main" id="{EDBCE6C5-49A5-426B-B575-ABD32B036873}"/>
+                <a16:creationId xmlns:a16="http://schemas.microsoft.com/office/drawing/2014/main" id="{2EB916AD-FDB2-44A4-8D6E-3D7CD80DCF4E}"/>
               </a:ext>
             </a:extLst>
           </p:cNvPr>
@@ -6579,7 +6579,7 @@
           <p:cNvPr id="9" name="">
             <a:extLst xmlns:a="http://schemas.openxmlformats.org/drawingml/2006/main">
               <a:ext uri="{FF2B5EF4-FFF2-40B4-BE49-F238E27FC236}">
-                <a16:creationId xmlns:a16="http://schemas.microsoft.com/office/drawing/2014/main" id="{02F35055-697F-41F6-BEF0-CF5837DFDA59}"/>
+                <a16:creationId xmlns:a16="http://schemas.microsoft.com/office/drawing/2014/main" id="{6E58B248-82DA-455F-89CB-CB8B123C940F}"/>
               </a:ext>
             </a:extLst>
           </p:cNvPr>
@@ -6612,7 +6612,7 @@
           <p:cNvPr id="10" name="">
             <a:extLst xmlns:a="http://schemas.openxmlformats.org/drawingml/2006/main">
               <a:ext uri="{FF2B5EF4-FFF2-40B4-BE49-F238E27FC236}">
-                <a16:creationId xmlns:a16="http://schemas.microsoft.com/office/drawing/2014/main" id="{3E13D946-B559-4833-8C7C-3631B9CF85FC}"/>
+                <a16:creationId xmlns:a16="http://schemas.microsoft.com/office/drawing/2014/main" id="{F1E6DB97-EB0E-4DAC-BFA5-711A15B98DB2}"/>
               </a:ext>
             </a:extLst>
           </p:cNvPr>
@@ -6676,7 +6676,7 @@
           <p:cNvPr id="11" name="">
             <a:extLst xmlns:a="http://schemas.openxmlformats.org/drawingml/2006/main">
               <a:ext uri="{FF2B5EF4-FFF2-40B4-BE49-F238E27FC236}">
-                <a16:creationId xmlns:a16="http://schemas.microsoft.com/office/drawing/2014/main" id="{3F61745F-89C0-4C5A-A01F-4CB8C4F5C811}"/>
+                <a16:creationId xmlns:a16="http://schemas.microsoft.com/office/drawing/2014/main" id="{53E07D0E-905D-4EE8-98F3-1427BDAA56E0}"/>
               </a:ext>
             </a:extLst>
           </p:cNvPr>
@@ -6711,7 +6711,7 @@
           <p:cNvPr id="12" name="">
             <a:extLst xmlns:a="http://schemas.openxmlformats.org/drawingml/2006/main">
               <a:ext uri="{FF2B5EF4-FFF2-40B4-BE49-F238E27FC236}">
-                <a16:creationId xmlns:a16="http://schemas.microsoft.com/office/drawing/2014/main" id="{AC9D576D-E30E-4E15-B300-AD7921AE9FF9}"/>
+                <a16:creationId xmlns:a16="http://schemas.microsoft.com/office/drawing/2014/main" id="{D7AADC8A-DB2C-4764-94D2-D5AA3EF617E6}"/>
               </a:ext>
             </a:extLst>
           </p:cNvPr>
@@ -6744,7 +6744,7 @@
           <p:cNvPr id="13" name="">
             <a:extLst xmlns:a="http://schemas.openxmlformats.org/drawingml/2006/main">
               <a:ext uri="{FF2B5EF4-FFF2-40B4-BE49-F238E27FC236}">
-                <a16:creationId xmlns:a16="http://schemas.microsoft.com/office/drawing/2014/main" id="{EC88BDC0-0442-429C-A779-5C060F5A1ACE}"/>
+                <a16:creationId xmlns:a16="http://schemas.microsoft.com/office/drawing/2014/main" id="{50FDBB4E-0102-47C3-BC10-06CBF5938349}"/>
               </a:ext>
             </a:extLst>
           </p:cNvPr>
@@ -6808,7 +6808,7 @@
           <p:cNvPr id="14" name="">
             <a:extLst xmlns:a="http://schemas.openxmlformats.org/drawingml/2006/main">
               <a:ext uri="{FF2B5EF4-FFF2-40B4-BE49-F238E27FC236}">
-                <a16:creationId xmlns:a16="http://schemas.microsoft.com/office/drawing/2014/main" id="{A76F1BDD-46B3-46F2-8B14-E4ED8BB5E638}"/>
+                <a16:creationId xmlns:a16="http://schemas.microsoft.com/office/drawing/2014/main" id="{6BF9A0DA-2591-45E6-A80A-B5B7BB174084}"/>
               </a:ext>
             </a:extLst>
           </p:cNvPr>
@@ -6843,7 +6843,7 @@
           <p:cNvPr id="15" name="">
             <a:extLst xmlns:a="http://schemas.openxmlformats.org/drawingml/2006/main">
               <a:ext uri="{FF2B5EF4-FFF2-40B4-BE49-F238E27FC236}">
-                <a16:creationId xmlns:a16="http://schemas.microsoft.com/office/drawing/2014/main" id="{FF21E29D-FB0C-4C8F-896A-A973C60D0A35}"/>
+                <a16:creationId xmlns:a16="http://schemas.microsoft.com/office/drawing/2014/main" id="{61A5BDF7-7021-430E-B012-5D14B9F65667}"/>
               </a:ext>
             </a:extLst>
           </p:cNvPr>
@@ -6876,7 +6876,7 @@
           <p:cNvPr id="16" name="">
             <a:extLst xmlns:a="http://schemas.openxmlformats.org/drawingml/2006/main">
               <a:ext uri="{FF2B5EF4-FFF2-40B4-BE49-F238E27FC236}">
-                <a16:creationId xmlns:a16="http://schemas.microsoft.com/office/drawing/2014/main" id="{F12542C3-AAEA-43B3-B5D8-2C705883CD18}"/>
+                <a16:creationId xmlns:a16="http://schemas.microsoft.com/office/drawing/2014/main" id="{6B3D049A-A53B-4FF3-B140-F3F15C45D62F}"/>
               </a:ext>
             </a:extLst>
           </p:cNvPr>
@@ -6940,7 +6940,7 @@
           <p:cNvPr id="17" name="">
             <a:extLst xmlns:a="http://schemas.openxmlformats.org/drawingml/2006/main">
               <a:ext uri="{FF2B5EF4-FFF2-40B4-BE49-F238E27FC236}">
-                <a16:creationId xmlns:a16="http://schemas.microsoft.com/office/drawing/2014/main" id="{5A0AF46E-8C99-4D4F-B8F7-CA0DD079BDF8}"/>
+                <a16:creationId xmlns:a16="http://schemas.microsoft.com/office/drawing/2014/main" id="{A29BE665-F082-403C-BC88-43D2F18C6ACE}"/>
               </a:ext>
             </a:extLst>
           </p:cNvPr>
@@ -6975,7 +6975,7 @@
           <p:cNvPr id="18" name="">
             <a:extLst xmlns:a="http://schemas.openxmlformats.org/drawingml/2006/main">
               <a:ext uri="{FF2B5EF4-FFF2-40B4-BE49-F238E27FC236}">
-                <a16:creationId xmlns:a16="http://schemas.microsoft.com/office/drawing/2014/main" id="{0C0C123C-CD55-45E3-978C-1E37A3E5F283}"/>
+                <a16:creationId xmlns:a16="http://schemas.microsoft.com/office/drawing/2014/main" id="{129ED82D-E616-4797-B642-E7A890348DAF}"/>
               </a:ext>
             </a:extLst>
           </p:cNvPr>
@@ -7008,7 +7008,7 @@
           <p:cNvPr id="19" name="">
             <a:extLst xmlns:a="http://schemas.openxmlformats.org/drawingml/2006/main">
               <a:ext uri="{FF2B5EF4-FFF2-40B4-BE49-F238E27FC236}">
-                <a16:creationId xmlns:a16="http://schemas.microsoft.com/office/drawing/2014/main" id="{B073F3A7-1E95-4865-A29E-75CA09D9B9D8}"/>
+                <a16:creationId xmlns:a16="http://schemas.microsoft.com/office/drawing/2014/main" id="{CE2D17BE-09A8-4DB9-9C99-E21CB25D59A6}"/>
               </a:ext>
             </a:extLst>
           </p:cNvPr>
@@ -7072,7 +7072,7 @@
           <p:cNvPr id="20" name="">
             <a:extLst xmlns:a="http://schemas.openxmlformats.org/drawingml/2006/main">
               <a:ext uri="{FF2B5EF4-FFF2-40B4-BE49-F238E27FC236}">
-                <a16:creationId xmlns:a16="http://schemas.microsoft.com/office/drawing/2014/main" id="{B9DAC38A-4663-4339-B32D-4780B8C14D4B}"/>
+                <a16:creationId xmlns:a16="http://schemas.microsoft.com/office/drawing/2014/main" id="{38AF9A4B-98DC-4436-82A1-F5BB7C8D95D4}"/>
               </a:ext>
             </a:extLst>
           </p:cNvPr>
@@ -7107,7 +7107,7 @@
           <p:cNvPr id="21" name="">
             <a:extLst xmlns:a="http://schemas.openxmlformats.org/drawingml/2006/main">
               <a:ext uri="{FF2B5EF4-FFF2-40B4-BE49-F238E27FC236}">
-                <a16:creationId xmlns:a16="http://schemas.microsoft.com/office/drawing/2014/main" id="{FDA38EB5-2C1C-47DD-8F03-5FAFEA665295}"/>
+                <a16:creationId xmlns:a16="http://schemas.microsoft.com/office/drawing/2014/main" id="{07BE1D9C-542C-4FCF-B5BB-ECBA354A0221}"/>
               </a:ext>
             </a:extLst>
           </p:cNvPr>
@@ -7171,7 +7171,7 @@
           <p:cNvPr id="22" name="">
             <a:extLst xmlns:a="http://schemas.openxmlformats.org/drawingml/2006/main">
               <a:ext uri="{FF2B5EF4-FFF2-40B4-BE49-F238E27FC236}">
-                <a16:creationId xmlns:a16="http://schemas.microsoft.com/office/drawing/2014/main" id="{E86C3DD2-4C95-4B46-9E90-F2A5B1440645}"/>
+                <a16:creationId xmlns:a16="http://schemas.microsoft.com/office/drawing/2014/main" id="{2D31198E-25C1-49FD-AFE9-CCA3B1D8E0D8}"/>
               </a:ext>
             </a:extLst>
           </p:cNvPr>
@@ -7206,7 +7206,7 @@
           <p:cNvPr id="23" name="">
             <a:extLst xmlns:a="http://schemas.openxmlformats.org/drawingml/2006/main">
               <a:ext uri="{FF2B5EF4-FFF2-40B4-BE49-F238E27FC236}">
-                <a16:creationId xmlns:a16="http://schemas.microsoft.com/office/drawing/2014/main" id="{4FFF9FF7-5D4C-47DF-B584-7867D32A98D4}"/>
+                <a16:creationId xmlns:a16="http://schemas.microsoft.com/office/drawing/2014/main" id="{62D6926B-B435-485C-A0D2-0850729D772F}"/>
               </a:ext>
             </a:extLst>
           </p:cNvPr>
@@ -7270,7 +7270,7 @@
           <p:cNvPr id="24" name="">
             <a:extLst xmlns:a="http://schemas.openxmlformats.org/drawingml/2006/main">
               <a:ext uri="{FF2B5EF4-FFF2-40B4-BE49-F238E27FC236}">
-                <a16:creationId xmlns:a16="http://schemas.microsoft.com/office/drawing/2014/main" id="{A6E144E5-A1AC-4AB7-898B-70C5653BB7B2}"/>
+                <a16:creationId xmlns:a16="http://schemas.microsoft.com/office/drawing/2014/main" id="{37DEE9BC-BB33-4BE0-A918-09710AF3D201}"/>
               </a:ext>
             </a:extLst>
           </p:cNvPr>
@@ -7305,7 +7305,7 @@
           <p:cNvPr id="25" name="">
             <a:extLst xmlns:a="http://schemas.openxmlformats.org/drawingml/2006/main">
               <a:ext uri="{FF2B5EF4-FFF2-40B4-BE49-F238E27FC236}">
-                <a16:creationId xmlns:a16="http://schemas.microsoft.com/office/drawing/2014/main" id="{686084D2-F4A3-4CE7-B255-71E7E997C8D3}"/>
+                <a16:creationId xmlns:a16="http://schemas.microsoft.com/office/drawing/2014/main" id="{CFDE0D3E-7F61-4040-ABA4-BDADDFA434E3}"/>
               </a:ext>
             </a:extLst>
           </p:cNvPr>
@@ -7367,7 +7367,7 @@
     </p:spTree>
     <p:extLst>
       <p:ext uri="{BB962C8B-B14F-4D97-AF65-F5344CB8AC3E}">
-        <p14:creationId xmlns:p14="http://schemas.microsoft.com/office/powerpoint/2010/main" val="2102730919"/>
+        <p14:creationId xmlns:p14="http://schemas.microsoft.com/office/powerpoint/2010/main" val="111026253"/>
       </p:ext>
     </p:extLst>
   </p:cSld>
@@ -7398,7 +7398,7 @@
           <p:cNvPr id="1" name="">
             <a:extLst xmlns:a="http://schemas.openxmlformats.org/drawingml/2006/main">
               <a:ext uri="{FF2B5EF4-FFF2-40B4-BE49-F238E27FC236}">
-                <a16:creationId xmlns:a16="http://schemas.microsoft.com/office/drawing/2014/main" id="{6CC9E271-0A5A-4DC6-BACF-73E822BCE49B}"/>
+                <a16:creationId xmlns:a16="http://schemas.microsoft.com/office/drawing/2014/main" id="{76D600CC-5D4B-4837-A460-474A3D9013AB}"/>
               </a:ext>
             </a:extLst>
           </p:cNvPr>
@@ -7433,7 +7433,7 @@
           <p:cNvPr id="2" name="">
             <a:extLst xmlns:a="http://schemas.openxmlformats.org/drawingml/2006/main">
               <a:ext uri="{FF2B5EF4-FFF2-40B4-BE49-F238E27FC236}">
-                <a16:creationId xmlns:a16="http://schemas.microsoft.com/office/drawing/2014/main" id="{277A4152-64A1-4AE1-A379-E40BE08B1F3D}"/>
+                <a16:creationId xmlns:a16="http://schemas.microsoft.com/office/drawing/2014/main" id="{1236CF0F-3D65-486D-BAC2-1D9B24753F0E}"/>
               </a:ext>
             </a:extLst>
           </p:cNvPr>
@@ -7497,7 +7497,7 @@
           <p:cNvPr id="3" name="">
             <a:extLst xmlns:a="http://schemas.openxmlformats.org/drawingml/2006/main">
               <a:ext uri="{FF2B5EF4-FFF2-40B4-BE49-F238E27FC236}">
-                <a16:creationId xmlns:a16="http://schemas.microsoft.com/office/drawing/2014/main" id="{E29A58BA-8BE4-4C4F-AC7B-E30CFAA994B6}"/>
+                <a16:creationId xmlns:a16="http://schemas.microsoft.com/office/drawing/2014/main" id="{25E192D2-208A-42EF-9E0C-5E1C7E4CD4E3}"/>
               </a:ext>
             </a:extLst>
           </p:cNvPr>
@@ -7561,7 +7561,7 @@
           <p:cNvPr id="4" name="">
             <a:extLst xmlns:a="http://schemas.openxmlformats.org/drawingml/2006/main">
               <a:ext uri="{FF2B5EF4-FFF2-40B4-BE49-F238E27FC236}">
-                <a16:creationId xmlns:a16="http://schemas.microsoft.com/office/drawing/2014/main" id="{107142F4-53E0-479B-94E9-8899656B4707}"/>
+                <a16:creationId xmlns:a16="http://schemas.microsoft.com/office/drawing/2014/main" id="{610DAB9F-8AD5-4856-B53C-3E244FB57AF9}"/>
               </a:ext>
             </a:extLst>
           </p:cNvPr>
@@ -7625,7 +7625,7 @@
           <p:cNvPr id="5" name="">
             <a:extLst xmlns:a="http://schemas.openxmlformats.org/drawingml/2006/main">
               <a:ext uri="{FF2B5EF4-FFF2-40B4-BE49-F238E27FC236}">
-                <a16:creationId xmlns:a16="http://schemas.microsoft.com/office/drawing/2014/main" id="{1EFE5F99-F97D-4AFD-A30F-AFCD31C21502}"/>
+                <a16:creationId xmlns:a16="http://schemas.microsoft.com/office/drawing/2014/main" id="{35648CF2-0B8C-444D-9D34-EB589EE72FF4}"/>
               </a:ext>
             </a:extLst>
           </p:cNvPr>
@@ -7689,7 +7689,7 @@
           <p:cNvPr id="6" name="">
             <a:extLst xmlns:a="http://schemas.openxmlformats.org/drawingml/2006/main">
               <a:ext uri="{FF2B5EF4-FFF2-40B4-BE49-F238E27FC236}">
-                <a16:creationId xmlns:a16="http://schemas.microsoft.com/office/drawing/2014/main" id="{04900432-0047-4FF1-9F49-04DBDF9CDDF5}"/>
+                <a16:creationId xmlns:a16="http://schemas.microsoft.com/office/drawing/2014/main" id="{480CA461-F4EE-47E3-BCEB-BD28332933B6}"/>
               </a:ext>
             </a:extLst>
           </p:cNvPr>
@@ -7722,7 +7722,7 @@
           <p:cNvPr id="7" name="">
             <a:extLst xmlns:a="http://schemas.openxmlformats.org/drawingml/2006/main">
               <a:ext uri="{FF2B5EF4-FFF2-40B4-BE49-F238E27FC236}">
-                <a16:creationId xmlns:a16="http://schemas.microsoft.com/office/drawing/2014/main" id="{C953E9D1-8E00-4DB8-AC30-E694E27659B7}"/>
+                <a16:creationId xmlns:a16="http://schemas.microsoft.com/office/drawing/2014/main" id="{5BED2A08-E225-46A3-8801-FBCA58BAF773}"/>
               </a:ext>
             </a:extLst>
           </p:cNvPr>
@@ -7757,7 +7757,7 @@
           <p:cNvPr id="8" name="">
             <a:extLst xmlns:a="http://schemas.openxmlformats.org/drawingml/2006/main">
               <a:ext uri="{FF2B5EF4-FFF2-40B4-BE49-F238E27FC236}">
-                <a16:creationId xmlns:a16="http://schemas.microsoft.com/office/drawing/2014/main" id="{16D9D9D4-DB93-4860-9CEE-C6A054E97A4F}"/>
+                <a16:creationId xmlns:a16="http://schemas.microsoft.com/office/drawing/2014/main" id="{A90F1F30-6D0F-41A9-AE8F-E6CD67432024}"/>
               </a:ext>
             </a:extLst>
           </p:cNvPr>
@@ -7821,7 +7821,7 @@
           <p:cNvPr id="9" name="">
             <a:extLst xmlns:a="http://schemas.openxmlformats.org/drawingml/2006/main">
               <a:ext uri="{FF2B5EF4-FFF2-40B4-BE49-F238E27FC236}">
-                <a16:creationId xmlns:a16="http://schemas.microsoft.com/office/drawing/2014/main" id="{A3550B23-F2CF-4F32-9954-80C59824A91F}"/>
+                <a16:creationId xmlns:a16="http://schemas.microsoft.com/office/drawing/2014/main" id="{0E5EE598-83F9-4F98-B57A-9A18CA829AD9}"/>
               </a:ext>
             </a:extLst>
           </p:cNvPr>
@@ -7885,7 +7885,7 @@
           <p:cNvPr id="10" name="">
             <a:extLst xmlns:a="http://schemas.openxmlformats.org/drawingml/2006/main">
               <a:ext uri="{FF2B5EF4-FFF2-40B4-BE49-F238E27FC236}">
-                <a16:creationId xmlns:a16="http://schemas.microsoft.com/office/drawing/2014/main" id="{FF609FD6-75B3-4ADC-A3CD-CB6B23B40CCA}"/>
+                <a16:creationId xmlns:a16="http://schemas.microsoft.com/office/drawing/2014/main" id="{5C8D33E8-7917-4F49-A88F-06F0BCD481C3}"/>
               </a:ext>
             </a:extLst>
           </p:cNvPr>
@@ -7918,7 +7918,7 @@
           <p:cNvPr id="11" name="">
             <a:extLst xmlns:a="http://schemas.openxmlformats.org/drawingml/2006/main">
               <a:ext uri="{FF2B5EF4-FFF2-40B4-BE49-F238E27FC236}">
-                <a16:creationId xmlns:a16="http://schemas.microsoft.com/office/drawing/2014/main" id="{DA40F388-0579-4AD7-ABF3-A4B79F90D76E}"/>
+                <a16:creationId xmlns:a16="http://schemas.microsoft.com/office/drawing/2014/main" id="{6C75CCC0-4601-4CDA-97B6-B3D9907F0DF3}"/>
               </a:ext>
             </a:extLst>
           </p:cNvPr>
@@ -7953,7 +7953,7 @@
           <p:cNvPr id="12" name="">
             <a:extLst xmlns:a="http://schemas.openxmlformats.org/drawingml/2006/main">
               <a:ext uri="{FF2B5EF4-FFF2-40B4-BE49-F238E27FC236}">
-                <a16:creationId xmlns:a16="http://schemas.microsoft.com/office/drawing/2014/main" id="{D7099876-DC05-4ED4-97B8-2838FEF4F8EE}"/>
+                <a16:creationId xmlns:a16="http://schemas.microsoft.com/office/drawing/2014/main" id="{05ACCA39-B3F5-4BBB-896B-A70A662BE2B7}"/>
               </a:ext>
             </a:extLst>
           </p:cNvPr>
@@ -8017,7 +8017,7 @@
           <p:cNvPr id="13" name="">
             <a:extLst xmlns:a="http://schemas.openxmlformats.org/drawingml/2006/main">
               <a:ext uri="{FF2B5EF4-FFF2-40B4-BE49-F238E27FC236}">
-                <a16:creationId xmlns:a16="http://schemas.microsoft.com/office/drawing/2014/main" id="{CFA27207-5A4F-49A1-AC8F-D318F469D532}"/>
+                <a16:creationId xmlns:a16="http://schemas.microsoft.com/office/drawing/2014/main" id="{52949E0E-4AA2-4CA8-AC2E-645C53E390BE}"/>
               </a:ext>
             </a:extLst>
           </p:cNvPr>
@@ -8081,7 +8081,7 @@
           <p:cNvPr id="14" name="">
             <a:extLst xmlns:a="http://schemas.openxmlformats.org/drawingml/2006/main">
               <a:ext uri="{FF2B5EF4-FFF2-40B4-BE49-F238E27FC236}">
-                <a16:creationId xmlns:a16="http://schemas.microsoft.com/office/drawing/2014/main" id="{E1C6E46B-6A5F-4884-A74B-2604CE85CA5B}"/>
+                <a16:creationId xmlns:a16="http://schemas.microsoft.com/office/drawing/2014/main" id="{3134BB53-259D-4809-AB8B-994E2BB3ED18}"/>
               </a:ext>
             </a:extLst>
           </p:cNvPr>
@@ -8114,7 +8114,7 @@
           <p:cNvPr id="15" name="">
             <a:extLst xmlns:a="http://schemas.openxmlformats.org/drawingml/2006/main">
               <a:ext uri="{FF2B5EF4-FFF2-40B4-BE49-F238E27FC236}">
-                <a16:creationId xmlns:a16="http://schemas.microsoft.com/office/drawing/2014/main" id="{F5F1F9BC-F5BD-41DF-B845-E51B9F5D6BC2}"/>
+                <a16:creationId xmlns:a16="http://schemas.microsoft.com/office/drawing/2014/main" id="{69702922-9EFD-48B8-815A-367EE547F027}"/>
               </a:ext>
             </a:extLst>
           </p:cNvPr>
@@ -8149,7 +8149,7 @@
           <p:cNvPr id="16" name="">
             <a:extLst xmlns:a="http://schemas.openxmlformats.org/drawingml/2006/main">
               <a:ext uri="{FF2B5EF4-FFF2-40B4-BE49-F238E27FC236}">
-                <a16:creationId xmlns:a16="http://schemas.microsoft.com/office/drawing/2014/main" id="{02F9CD71-E32A-4AE3-9772-7E827C492ED4}"/>
+                <a16:creationId xmlns:a16="http://schemas.microsoft.com/office/drawing/2014/main" id="{DEBDDC7B-0889-4E14-8DE2-87131F59AD99}"/>
               </a:ext>
             </a:extLst>
           </p:cNvPr>
@@ -8213,7 +8213,7 @@
           <p:cNvPr id="17" name="">
             <a:extLst xmlns:a="http://schemas.openxmlformats.org/drawingml/2006/main">
               <a:ext uri="{FF2B5EF4-FFF2-40B4-BE49-F238E27FC236}">
-                <a16:creationId xmlns:a16="http://schemas.microsoft.com/office/drawing/2014/main" id="{5B006177-E29D-457C-9140-769CF7F62EA7}"/>
+                <a16:creationId xmlns:a16="http://schemas.microsoft.com/office/drawing/2014/main" id="{68B37CD3-EA85-4D56-BFD3-592D611EEAFE}"/>
               </a:ext>
             </a:extLst>
           </p:cNvPr>
@@ -8277,7 +8277,7 @@
           <p:cNvPr id="18" name="">
             <a:extLst xmlns:a="http://schemas.openxmlformats.org/drawingml/2006/main">
               <a:ext uri="{FF2B5EF4-FFF2-40B4-BE49-F238E27FC236}">
-                <a16:creationId xmlns:a16="http://schemas.microsoft.com/office/drawing/2014/main" id="{505D44D6-AEB6-4077-9A1D-A04481AE08E5}"/>
+                <a16:creationId xmlns:a16="http://schemas.microsoft.com/office/drawing/2014/main" id="{B500963D-8179-4A3A-B756-33855153D393}"/>
               </a:ext>
             </a:extLst>
           </p:cNvPr>
@@ -8310,7 +8310,7 @@
           <p:cNvPr id="19" name="">
             <a:extLst xmlns:a="http://schemas.openxmlformats.org/drawingml/2006/main">
               <a:ext uri="{FF2B5EF4-FFF2-40B4-BE49-F238E27FC236}">
-                <a16:creationId xmlns:a16="http://schemas.microsoft.com/office/drawing/2014/main" id="{E2B55C7A-25A7-4ABD-A041-682B3CA2D28C}"/>
+                <a16:creationId xmlns:a16="http://schemas.microsoft.com/office/drawing/2014/main" id="{796E5475-CF4F-45E3-B34B-45545B1EBBE1}"/>
               </a:ext>
             </a:extLst>
           </p:cNvPr>
@@ -8345,7 +8345,7 @@
           <p:cNvPr id="20" name="">
             <a:extLst xmlns:a="http://schemas.openxmlformats.org/drawingml/2006/main">
               <a:ext uri="{FF2B5EF4-FFF2-40B4-BE49-F238E27FC236}">
-                <a16:creationId xmlns:a16="http://schemas.microsoft.com/office/drawing/2014/main" id="{231CAB0D-44D0-473A-BCAC-BF54DED08E60}"/>
+                <a16:creationId xmlns:a16="http://schemas.microsoft.com/office/drawing/2014/main" id="{ABFF57F3-AC8C-426B-B392-ACDF8651E4A3}"/>
               </a:ext>
             </a:extLst>
           </p:cNvPr>
@@ -8409,7 +8409,7 @@
           <p:cNvPr id="21" name="">
             <a:extLst xmlns:a="http://schemas.openxmlformats.org/drawingml/2006/main">
               <a:ext uri="{FF2B5EF4-FFF2-40B4-BE49-F238E27FC236}">
-                <a16:creationId xmlns:a16="http://schemas.microsoft.com/office/drawing/2014/main" id="{2F2B4EF4-3C5A-44F9-85C3-CEF9C243888E}"/>
+                <a16:creationId xmlns:a16="http://schemas.microsoft.com/office/drawing/2014/main" id="{E1AB15F1-8AA4-4E8C-AA92-2D999AFFDF51}"/>
               </a:ext>
             </a:extLst>
           </p:cNvPr>
@@ -8473,7 +8473,7 @@
           <p:cNvPr id="22" name="">
             <a:extLst xmlns:a="http://schemas.openxmlformats.org/drawingml/2006/main">
               <a:ext uri="{FF2B5EF4-FFF2-40B4-BE49-F238E27FC236}">
-                <a16:creationId xmlns:a16="http://schemas.microsoft.com/office/drawing/2014/main" id="{DCC8EDCE-5353-42B4-AE26-BEED89A146FB}"/>
+                <a16:creationId xmlns:a16="http://schemas.microsoft.com/office/drawing/2014/main" id="{E2606FFE-E014-48E8-B5C0-E216D7E4FBE8}"/>
               </a:ext>
             </a:extLst>
           </p:cNvPr>
@@ -8506,7 +8506,7 @@
           <p:cNvPr id="23" name="">
             <a:extLst xmlns:a="http://schemas.openxmlformats.org/drawingml/2006/main">
               <a:ext uri="{FF2B5EF4-FFF2-40B4-BE49-F238E27FC236}">
-                <a16:creationId xmlns:a16="http://schemas.microsoft.com/office/drawing/2014/main" id="{FF73AFF4-6798-4318-9FA3-E48A3324016C}"/>
+                <a16:creationId xmlns:a16="http://schemas.microsoft.com/office/drawing/2014/main" id="{110FD838-BDCB-413A-84BB-F9AC2AD3A1E8}"/>
               </a:ext>
             </a:extLst>
           </p:cNvPr>
@@ -8541,7 +8541,7 @@
           <p:cNvPr id="24" name="">
             <a:extLst xmlns:a="http://schemas.openxmlformats.org/drawingml/2006/main">
               <a:ext uri="{FF2B5EF4-FFF2-40B4-BE49-F238E27FC236}">
-                <a16:creationId xmlns:a16="http://schemas.microsoft.com/office/drawing/2014/main" id="{662E8AB0-CABD-4620-A4EE-FA1F6284721B}"/>
+                <a16:creationId xmlns:a16="http://schemas.microsoft.com/office/drawing/2014/main" id="{1897308D-0BC0-4619-AFC5-C0EF569C8824}"/>
               </a:ext>
             </a:extLst>
           </p:cNvPr>
@@ -8605,7 +8605,7 @@
           <p:cNvPr id="25" name="">
             <a:extLst xmlns:a="http://schemas.openxmlformats.org/drawingml/2006/main">
               <a:ext uri="{FF2B5EF4-FFF2-40B4-BE49-F238E27FC236}">
-                <a16:creationId xmlns:a16="http://schemas.microsoft.com/office/drawing/2014/main" id="{39193199-1C55-4910-8CF4-4962C1A590F2}"/>
+                <a16:creationId xmlns:a16="http://schemas.microsoft.com/office/drawing/2014/main" id="{D2FFEED8-74F3-472E-8B8A-116DCAC1EEB9}"/>
               </a:ext>
             </a:extLst>
           </p:cNvPr>
@@ -8669,7 +8669,7 @@
           <p:cNvPr id="26" name="">
             <a:extLst xmlns:a="http://schemas.openxmlformats.org/drawingml/2006/main">
               <a:ext uri="{FF2B5EF4-FFF2-40B4-BE49-F238E27FC236}">
-                <a16:creationId xmlns:a16="http://schemas.microsoft.com/office/drawing/2014/main" id="{7A43C618-B571-4DB7-9D53-A513CE61B977}"/>
+                <a16:creationId xmlns:a16="http://schemas.microsoft.com/office/drawing/2014/main" id="{A330EBF6-D40A-4397-A078-59EA0493A09F}"/>
               </a:ext>
             </a:extLst>
           </p:cNvPr>
@@ -8702,7 +8702,7 @@
           <p:cNvPr id="27" name="">
             <a:extLst xmlns:a="http://schemas.openxmlformats.org/drawingml/2006/main">
               <a:ext uri="{FF2B5EF4-FFF2-40B4-BE49-F238E27FC236}">
-                <a16:creationId xmlns:a16="http://schemas.microsoft.com/office/drawing/2014/main" id="{F00B9A3A-9AEA-4F19-80C0-53FD8011B493}"/>
+                <a16:creationId xmlns:a16="http://schemas.microsoft.com/office/drawing/2014/main" id="{DD1C8127-E89E-4D3C-986C-E87FB843577C}"/>
               </a:ext>
             </a:extLst>
           </p:cNvPr>
@@ -8766,7 +8766,7 @@
           <p:cNvPr id="28" name="">
             <a:extLst xmlns:a="http://schemas.openxmlformats.org/drawingml/2006/main">
               <a:ext uri="{FF2B5EF4-FFF2-40B4-BE49-F238E27FC236}">
-                <a16:creationId xmlns:a16="http://schemas.microsoft.com/office/drawing/2014/main" id="{668CF32D-DD55-44A1-9FE8-A149EEF896BD}"/>
+                <a16:creationId xmlns:a16="http://schemas.microsoft.com/office/drawing/2014/main" id="{3544C657-498B-4728-A906-3255509B8211}"/>
               </a:ext>
             </a:extLst>
           </p:cNvPr>
@@ -8830,7 +8830,7 @@
           <p:cNvPr id="29" name="">
             <a:extLst xmlns:a="http://schemas.openxmlformats.org/drawingml/2006/main">
               <a:ext uri="{FF2B5EF4-FFF2-40B4-BE49-F238E27FC236}">
-                <a16:creationId xmlns:a16="http://schemas.microsoft.com/office/drawing/2014/main" id="{362577DE-0CB7-473A-B001-BDD0427AF72F}"/>
+                <a16:creationId xmlns:a16="http://schemas.microsoft.com/office/drawing/2014/main" id="{13F493CE-6A21-45B5-9F9E-4E1DD82708F6}"/>
               </a:ext>
             </a:extLst>
           </p:cNvPr>
@@ -8894,7 +8894,7 @@
           <p:cNvPr id="30" name="">
             <a:extLst xmlns:a="http://schemas.openxmlformats.org/drawingml/2006/main">
               <a:ext uri="{FF2B5EF4-FFF2-40B4-BE49-F238E27FC236}">
-                <a16:creationId xmlns:a16="http://schemas.microsoft.com/office/drawing/2014/main" id="{BD8DF06F-3762-4AD8-9A1E-F79EFA834B15}"/>
+                <a16:creationId xmlns:a16="http://schemas.microsoft.com/office/drawing/2014/main" id="{95A53AD5-16AC-4F65-ACF5-88439B74172E}"/>
               </a:ext>
             </a:extLst>
           </p:cNvPr>
@@ -8958,7 +8958,7 @@
           <p:cNvPr id="31" name="">
             <a:extLst xmlns:a="http://schemas.openxmlformats.org/drawingml/2006/main">
               <a:ext uri="{FF2B5EF4-FFF2-40B4-BE49-F238E27FC236}">
-                <a16:creationId xmlns:a16="http://schemas.microsoft.com/office/drawing/2014/main" id="{1389E23D-BEBD-46B4-BF93-A6F8983A8502}"/>
+                <a16:creationId xmlns:a16="http://schemas.microsoft.com/office/drawing/2014/main" id="{C670050C-3E7B-495E-8AFF-93B107FCFC8F}"/>
               </a:ext>
             </a:extLst>
           </p:cNvPr>
@@ -9022,7 +9022,7 @@
           <p:cNvPr id="32" name="">
             <a:extLst xmlns:a="http://schemas.openxmlformats.org/drawingml/2006/main">
               <a:ext uri="{FF2B5EF4-FFF2-40B4-BE49-F238E27FC236}">
-                <a16:creationId xmlns:a16="http://schemas.microsoft.com/office/drawing/2014/main" id="{DC274477-5424-468F-9CF4-22E6626265B1}"/>
+                <a16:creationId xmlns:a16="http://schemas.microsoft.com/office/drawing/2014/main" id="{D6A5126A-BB25-4D11-8C4F-0EF9057E603E}"/>
               </a:ext>
             </a:extLst>
           </p:cNvPr>
@@ -9082,7 +9082,7 @@
     </p:spTree>
     <p:extLst>
       <p:ext uri="{BB962C8B-B14F-4D97-AF65-F5344CB8AC3E}">
-        <p14:creationId xmlns:p14="http://schemas.microsoft.com/office/powerpoint/2010/main" val="1091017788"/>
+        <p14:creationId xmlns:p14="http://schemas.microsoft.com/office/powerpoint/2010/main" val="1752523957"/>
       </p:ext>
     </p:extLst>
   </p:cSld>
@@ -9113,7 +9113,7 @@
           <p:cNvPr id="1" name="">
             <a:extLst xmlns:a="http://schemas.openxmlformats.org/drawingml/2006/main">
               <a:ext uri="{FF2B5EF4-FFF2-40B4-BE49-F238E27FC236}">
-                <a16:creationId xmlns:a16="http://schemas.microsoft.com/office/drawing/2014/main" id="{BE54E648-BE87-4DC4-911F-86070009BF0E}"/>
+                <a16:creationId xmlns:a16="http://schemas.microsoft.com/office/drawing/2014/main" id="{6087FFE3-AD78-4002-8FAD-D9B58337B89D}"/>
               </a:ext>
             </a:extLst>
           </p:cNvPr>
@@ -9148,7 +9148,7 @@
           <p:cNvPr id="2" name="">
             <a:extLst xmlns:a="http://schemas.openxmlformats.org/drawingml/2006/main">
               <a:ext uri="{FF2B5EF4-FFF2-40B4-BE49-F238E27FC236}">
-                <a16:creationId xmlns:a16="http://schemas.microsoft.com/office/drawing/2014/main" id="{FC7038E6-D227-4850-A4DB-CB55C51A4A87}"/>
+                <a16:creationId xmlns:a16="http://schemas.microsoft.com/office/drawing/2014/main" id="{96004DC5-8F01-4DD0-9BCC-231E5C9A87E1}"/>
               </a:ext>
             </a:extLst>
           </p:cNvPr>
@@ -9212,7 +9212,7 @@
           <p:cNvPr id="3" name="">
             <a:extLst xmlns:a="http://schemas.openxmlformats.org/drawingml/2006/main">
               <a:ext uri="{FF2B5EF4-FFF2-40B4-BE49-F238E27FC236}">
-                <a16:creationId xmlns:a16="http://schemas.microsoft.com/office/drawing/2014/main" id="{B79CC37E-D2FF-4A1B-B3DD-AFEC54525B3A}"/>
+                <a16:creationId xmlns:a16="http://schemas.microsoft.com/office/drawing/2014/main" id="{DB7DE707-1ECF-4F65-8C29-32F47D7D5A91}"/>
               </a:ext>
             </a:extLst>
           </p:cNvPr>
@@ -9276,7 +9276,7 @@
           <p:cNvPr id="4" name="">
             <a:extLst xmlns:a="http://schemas.openxmlformats.org/drawingml/2006/main">
               <a:ext uri="{FF2B5EF4-FFF2-40B4-BE49-F238E27FC236}">
-                <a16:creationId xmlns:a16="http://schemas.microsoft.com/office/drawing/2014/main" id="{CDCBC892-A9F3-4441-9AF0-6F58B2E480CC}"/>
+                <a16:creationId xmlns:a16="http://schemas.microsoft.com/office/drawing/2014/main" id="{633A9E80-D7E2-4C3D-B31B-321577D4D199}"/>
               </a:ext>
             </a:extLst>
           </p:cNvPr>
@@ -9340,7 +9340,7 @@
           <p:cNvPr id="5" name="">
             <a:extLst xmlns:a="http://schemas.openxmlformats.org/drawingml/2006/main">
               <a:ext uri="{FF2B5EF4-FFF2-40B4-BE49-F238E27FC236}">
-                <a16:creationId xmlns:a16="http://schemas.microsoft.com/office/drawing/2014/main" id="{EDCE8414-4A24-4E26-B07F-4B4B2A68BE0A}"/>
+                <a16:creationId xmlns:a16="http://schemas.microsoft.com/office/drawing/2014/main" id="{228A7ADE-C4B6-4AF9-9765-12A9E732C56D}"/>
               </a:ext>
             </a:extLst>
           </p:cNvPr>
@@ -9404,7 +9404,7 @@
           <p:cNvPr id="6" name="">
             <a:extLst xmlns:a="http://schemas.openxmlformats.org/drawingml/2006/main">
               <a:ext uri="{FF2B5EF4-FFF2-40B4-BE49-F238E27FC236}">
-                <a16:creationId xmlns:a16="http://schemas.microsoft.com/office/drawing/2014/main" id="{DCD7F309-763E-4ABE-B044-AE720D9676DC}"/>
+                <a16:creationId xmlns:a16="http://schemas.microsoft.com/office/drawing/2014/main" id="{6540F7C1-2398-4EE9-B6BE-87A4054DE1D3}"/>
               </a:ext>
             </a:extLst>
           </p:cNvPr>
@@ -9466,7 +9466,7 @@
           <p:cNvPr id="7" name="">
             <a:extLst xmlns:a="http://schemas.openxmlformats.org/drawingml/2006/main">
               <a:ext uri="{FF2B5EF4-FFF2-40B4-BE49-F238E27FC236}">
-                <a16:creationId xmlns:a16="http://schemas.microsoft.com/office/drawing/2014/main" id="{5B218752-E454-4F0C-9397-2C646E2F7E05}"/>
+                <a16:creationId xmlns:a16="http://schemas.microsoft.com/office/drawing/2014/main" id="{1F4F46D8-E002-456C-8979-90C00C889D4C}"/>
               </a:ext>
             </a:extLst>
           </p:cNvPr>
@@ -9499,7 +9499,7 @@
           <p:cNvPr id="8" name="">
             <a:extLst xmlns:a="http://schemas.openxmlformats.org/drawingml/2006/main">
               <a:ext uri="{FF2B5EF4-FFF2-40B4-BE49-F238E27FC236}">
-                <a16:creationId xmlns:a16="http://schemas.microsoft.com/office/drawing/2014/main" id="{07E08228-5DB3-4772-B6A2-A01D425D76A3}"/>
+                <a16:creationId xmlns:a16="http://schemas.microsoft.com/office/drawing/2014/main" id="{6878A271-B74F-4228-934A-15F68E385DFA}"/>
               </a:ext>
             </a:extLst>
           </p:cNvPr>
@@ -9534,7 +9534,7 @@
           <p:cNvPr id="9" name="">
             <a:extLst xmlns:a="http://schemas.openxmlformats.org/drawingml/2006/main">
               <a:ext uri="{FF2B5EF4-FFF2-40B4-BE49-F238E27FC236}">
-                <a16:creationId xmlns:a16="http://schemas.microsoft.com/office/drawing/2014/main" id="{AB713F29-2205-4C32-A6CB-BF1361B96069}"/>
+                <a16:creationId xmlns:a16="http://schemas.microsoft.com/office/drawing/2014/main" id="{B7F47C03-B839-4FCD-91FC-19707D2BB6B0}"/>
               </a:ext>
             </a:extLst>
           </p:cNvPr>
@@ -9598,7 +9598,7 @@
           <p:cNvPr id="10" name="">
             <a:extLst xmlns:a="http://schemas.openxmlformats.org/drawingml/2006/main">
               <a:ext uri="{FF2B5EF4-FFF2-40B4-BE49-F238E27FC236}">
-                <a16:creationId xmlns:a16="http://schemas.microsoft.com/office/drawing/2014/main" id="{179E8188-29C9-4491-B980-177161B4DA1F}"/>
+                <a16:creationId xmlns:a16="http://schemas.microsoft.com/office/drawing/2014/main" id="{859CBDF6-0343-427E-A9CD-393E6A26EBDF}"/>
               </a:ext>
             </a:extLst>
           </p:cNvPr>
@@ -9662,7 +9662,7 @@
           <p:cNvPr id="11" name="">
             <a:extLst xmlns:a="http://schemas.openxmlformats.org/drawingml/2006/main">
               <a:ext uri="{FF2B5EF4-FFF2-40B4-BE49-F238E27FC236}">
-                <a16:creationId xmlns:a16="http://schemas.microsoft.com/office/drawing/2014/main" id="{F9AD3AF9-F46C-40D0-960E-4D0ECE86EB24}"/>
+                <a16:creationId xmlns:a16="http://schemas.microsoft.com/office/drawing/2014/main" id="{DD0E7E2D-A2DE-4878-AC99-50E43376B2C6}"/>
               </a:ext>
             </a:extLst>
           </p:cNvPr>
@@ -9695,7 +9695,7 @@
           <p:cNvPr id="12" name="">
             <a:extLst xmlns:a="http://schemas.openxmlformats.org/drawingml/2006/main">
               <a:ext uri="{FF2B5EF4-FFF2-40B4-BE49-F238E27FC236}">
-                <a16:creationId xmlns:a16="http://schemas.microsoft.com/office/drawing/2014/main" id="{AE0BBD89-378E-447B-B2DE-56A65791C458}"/>
+                <a16:creationId xmlns:a16="http://schemas.microsoft.com/office/drawing/2014/main" id="{83680F46-2737-4850-8589-8538FE01C8FC}"/>
               </a:ext>
             </a:extLst>
           </p:cNvPr>
@@ -9730,7 +9730,7 @@
           <p:cNvPr id="13" name="">
             <a:extLst xmlns:a="http://schemas.openxmlformats.org/drawingml/2006/main">
               <a:ext uri="{FF2B5EF4-FFF2-40B4-BE49-F238E27FC236}">
-                <a16:creationId xmlns:a16="http://schemas.microsoft.com/office/drawing/2014/main" id="{58F11EDD-BF11-4A47-B37D-A805337A83F6}"/>
+                <a16:creationId xmlns:a16="http://schemas.microsoft.com/office/drawing/2014/main" id="{522D2BE5-E91F-41A4-A422-268BA4A885B6}"/>
               </a:ext>
             </a:extLst>
           </p:cNvPr>
@@ -9794,7 +9794,7 @@
           <p:cNvPr id="14" name="">
             <a:extLst xmlns:a="http://schemas.openxmlformats.org/drawingml/2006/main">
               <a:ext uri="{FF2B5EF4-FFF2-40B4-BE49-F238E27FC236}">
-                <a16:creationId xmlns:a16="http://schemas.microsoft.com/office/drawing/2014/main" id="{1E7B5319-A3CA-4D4E-BE26-B23557B2DF9B}"/>
+                <a16:creationId xmlns:a16="http://schemas.microsoft.com/office/drawing/2014/main" id="{B055467A-78B8-4542-8CB6-7E1F555C0198}"/>
               </a:ext>
             </a:extLst>
           </p:cNvPr>
@@ -9858,7 +9858,7 @@
           <p:cNvPr id="15" name="">
             <a:extLst xmlns:a="http://schemas.openxmlformats.org/drawingml/2006/main">
               <a:ext uri="{FF2B5EF4-FFF2-40B4-BE49-F238E27FC236}">
-                <a16:creationId xmlns:a16="http://schemas.microsoft.com/office/drawing/2014/main" id="{6E82A3A8-3D26-43F0-A6A6-B2363B624C9F}"/>
+                <a16:creationId xmlns:a16="http://schemas.microsoft.com/office/drawing/2014/main" id="{4106F979-D0B0-4C76-A1C7-5687D9E53CE4}"/>
               </a:ext>
             </a:extLst>
           </p:cNvPr>
@@ -9891,7 +9891,7 @@
           <p:cNvPr id="16" name="">
             <a:extLst xmlns:a="http://schemas.openxmlformats.org/drawingml/2006/main">
               <a:ext uri="{FF2B5EF4-FFF2-40B4-BE49-F238E27FC236}">
-                <a16:creationId xmlns:a16="http://schemas.microsoft.com/office/drawing/2014/main" id="{CC209589-0DFA-4147-87CE-4E3BD3E84858}"/>
+                <a16:creationId xmlns:a16="http://schemas.microsoft.com/office/drawing/2014/main" id="{4DF94481-4689-4373-A0CC-9D62CA725F83}"/>
               </a:ext>
             </a:extLst>
           </p:cNvPr>
@@ -9926,7 +9926,7 @@
           <p:cNvPr id="17" name="">
             <a:extLst xmlns:a="http://schemas.openxmlformats.org/drawingml/2006/main">
               <a:ext uri="{FF2B5EF4-FFF2-40B4-BE49-F238E27FC236}">
-                <a16:creationId xmlns:a16="http://schemas.microsoft.com/office/drawing/2014/main" id="{9DDCEE7B-FEEF-4CD9-A9EF-C574327BEC25}"/>
+                <a16:creationId xmlns:a16="http://schemas.microsoft.com/office/drawing/2014/main" id="{4CE49D05-BA40-4CC4-8BD8-6B86F3EE1C42}"/>
               </a:ext>
             </a:extLst>
           </p:cNvPr>
@@ -9990,7 +9990,7 @@
           <p:cNvPr id="18" name="">
             <a:extLst xmlns:a="http://schemas.openxmlformats.org/drawingml/2006/main">
               <a:ext uri="{FF2B5EF4-FFF2-40B4-BE49-F238E27FC236}">
-                <a16:creationId xmlns:a16="http://schemas.microsoft.com/office/drawing/2014/main" id="{15E553EA-5D0F-4E65-B071-2F910B52C647}"/>
+                <a16:creationId xmlns:a16="http://schemas.microsoft.com/office/drawing/2014/main" id="{1B2F4832-C322-4FEA-8521-6E2328381060}"/>
               </a:ext>
             </a:extLst>
           </p:cNvPr>
@@ -10054,7 +10054,7 @@
           <p:cNvPr id="19" name="">
             <a:extLst xmlns:a="http://schemas.openxmlformats.org/drawingml/2006/main">
               <a:ext uri="{FF2B5EF4-FFF2-40B4-BE49-F238E27FC236}">
-                <a16:creationId xmlns:a16="http://schemas.microsoft.com/office/drawing/2014/main" id="{3D1C7FE9-EA69-49EC-B882-4BB294C66487}"/>
+                <a16:creationId xmlns:a16="http://schemas.microsoft.com/office/drawing/2014/main" id="{77313518-9F97-4382-B31A-64D06271F267}"/>
               </a:ext>
             </a:extLst>
           </p:cNvPr>
@@ -10087,7 +10087,7 @@
           <p:cNvPr id="20" name="">
             <a:extLst xmlns:a="http://schemas.openxmlformats.org/drawingml/2006/main">
               <a:ext uri="{FF2B5EF4-FFF2-40B4-BE49-F238E27FC236}">
-                <a16:creationId xmlns:a16="http://schemas.microsoft.com/office/drawing/2014/main" id="{AAE8DE2F-07A4-4D83-A034-61DD003F6A1F}"/>
+                <a16:creationId xmlns:a16="http://schemas.microsoft.com/office/drawing/2014/main" id="{2E06BD69-ECC5-4698-830D-43D948A55322}"/>
               </a:ext>
             </a:extLst>
           </p:cNvPr>
@@ -10122,7 +10122,7 @@
           <p:cNvPr id="21" name="">
             <a:extLst xmlns:a="http://schemas.openxmlformats.org/drawingml/2006/main">
               <a:ext uri="{FF2B5EF4-FFF2-40B4-BE49-F238E27FC236}">
-                <a16:creationId xmlns:a16="http://schemas.microsoft.com/office/drawing/2014/main" id="{E288E477-E97F-4E30-B69A-682460BF3968}"/>
+                <a16:creationId xmlns:a16="http://schemas.microsoft.com/office/drawing/2014/main" id="{3599FFD7-C395-4E36-B9DF-4B6F5BB2A2E9}"/>
               </a:ext>
             </a:extLst>
           </p:cNvPr>
@@ -10186,7 +10186,7 @@
           <p:cNvPr id="22" name="">
             <a:extLst xmlns:a="http://schemas.openxmlformats.org/drawingml/2006/main">
               <a:ext uri="{FF2B5EF4-FFF2-40B4-BE49-F238E27FC236}">
-                <a16:creationId xmlns:a16="http://schemas.microsoft.com/office/drawing/2014/main" id="{1D4529F7-99F7-4C66-9356-7B201AC5753A}"/>
+                <a16:creationId xmlns:a16="http://schemas.microsoft.com/office/drawing/2014/main" id="{884B86B2-08AA-42C9-A8DE-EE83CC014F49}"/>
               </a:ext>
             </a:extLst>
           </p:cNvPr>
@@ -10250,7 +10250,7 @@
           <p:cNvPr id="23" name="">
             <a:extLst xmlns:a="http://schemas.openxmlformats.org/drawingml/2006/main">
               <a:ext uri="{FF2B5EF4-FFF2-40B4-BE49-F238E27FC236}">
-                <a16:creationId xmlns:a16="http://schemas.microsoft.com/office/drawing/2014/main" id="{607E707C-50E0-4210-B0EF-E0A9ABF25BFE}"/>
+                <a16:creationId xmlns:a16="http://schemas.microsoft.com/office/drawing/2014/main" id="{27CFE366-3ED9-4F68-853A-E6B4977D422C}"/>
               </a:ext>
             </a:extLst>
           </p:cNvPr>
@@ -10312,7 +10312,7 @@
     </p:spTree>
     <p:extLst>
       <p:ext uri="{BB962C8B-B14F-4D97-AF65-F5344CB8AC3E}">
-        <p14:creationId xmlns:p14="http://schemas.microsoft.com/office/powerpoint/2010/main" val="965584139"/>
+        <p14:creationId xmlns:p14="http://schemas.microsoft.com/office/powerpoint/2010/main" val="882572724"/>
       </p:ext>
     </p:extLst>
   </p:cSld>
@@ -10343,7 +10343,7 @@
           <p:cNvPr id="1" name="">
             <a:extLst xmlns:a="http://schemas.openxmlformats.org/drawingml/2006/main">
               <a:ext uri="{FF2B5EF4-FFF2-40B4-BE49-F238E27FC236}">
-                <a16:creationId xmlns:a16="http://schemas.microsoft.com/office/drawing/2014/main" id="{F8ABC757-8F1F-48B8-B5B7-46A8020BB9CD}"/>
+                <a16:creationId xmlns:a16="http://schemas.microsoft.com/office/drawing/2014/main" id="{8E676A0C-33C7-4A04-8CD2-38198DD40B5F}"/>
               </a:ext>
             </a:extLst>
           </p:cNvPr>
@@ -10378,7 +10378,7 @@
           <p:cNvPr id="2" name="">
             <a:extLst xmlns:a="http://schemas.openxmlformats.org/drawingml/2006/main">
               <a:ext uri="{FF2B5EF4-FFF2-40B4-BE49-F238E27FC236}">
-                <a16:creationId xmlns:a16="http://schemas.microsoft.com/office/drawing/2014/main" id="{ADF82874-3F09-4F71-9C35-5A50448B798F}"/>
+                <a16:creationId xmlns:a16="http://schemas.microsoft.com/office/drawing/2014/main" id="{8F38EC7F-40D9-4DBE-91DE-B55C2FAA750E}"/>
               </a:ext>
             </a:extLst>
           </p:cNvPr>
@@ -10442,7 +10442,7 @@
           <p:cNvPr id="3" name="">
             <a:extLst xmlns:a="http://schemas.openxmlformats.org/drawingml/2006/main">
               <a:ext uri="{FF2B5EF4-FFF2-40B4-BE49-F238E27FC236}">
-                <a16:creationId xmlns:a16="http://schemas.microsoft.com/office/drawing/2014/main" id="{3AE33B91-E204-4FA9-92A9-33798460F175}"/>
+                <a16:creationId xmlns:a16="http://schemas.microsoft.com/office/drawing/2014/main" id="{1CBA1499-CF1C-4CDC-9FEE-0F112ACD54E5}"/>
               </a:ext>
             </a:extLst>
           </p:cNvPr>
@@ -10506,7 +10506,7 @@
           <p:cNvPr id="4" name="">
             <a:extLst xmlns:a="http://schemas.openxmlformats.org/drawingml/2006/main">
               <a:ext uri="{FF2B5EF4-FFF2-40B4-BE49-F238E27FC236}">
-                <a16:creationId xmlns:a16="http://schemas.microsoft.com/office/drawing/2014/main" id="{9C497E92-5DE8-4D29-8567-DEC2D3BA0797}"/>
+                <a16:creationId xmlns:a16="http://schemas.microsoft.com/office/drawing/2014/main" id="{EA4AAD28-E3D0-4E85-8273-A74FB705D367}"/>
               </a:ext>
             </a:extLst>
           </p:cNvPr>
@@ -10570,7 +10570,7 @@
           <p:cNvPr id="5" name="">
             <a:extLst xmlns:a="http://schemas.openxmlformats.org/drawingml/2006/main">
               <a:ext uri="{FF2B5EF4-FFF2-40B4-BE49-F238E27FC236}">
-                <a16:creationId xmlns:a16="http://schemas.microsoft.com/office/drawing/2014/main" id="{A26D6584-F874-47E4-ADAC-72EBE7983E48}"/>
+                <a16:creationId xmlns:a16="http://schemas.microsoft.com/office/drawing/2014/main" id="{1370AC7E-1B32-4A25-AD44-E1D5EB451172}"/>
               </a:ext>
             </a:extLst>
           </p:cNvPr>
@@ -10634,7 +10634,7 @@
           <p:cNvPr id="6" name="">
             <a:extLst xmlns:a="http://schemas.openxmlformats.org/drawingml/2006/main">
               <a:ext uri="{FF2B5EF4-FFF2-40B4-BE49-F238E27FC236}">
-                <a16:creationId xmlns:a16="http://schemas.microsoft.com/office/drawing/2014/main" id="{D9606003-06C3-4EE5-B70C-C356BE5688F6}"/>
+                <a16:creationId xmlns:a16="http://schemas.microsoft.com/office/drawing/2014/main" id="{7F3E8221-DFB0-471F-BAA0-F116D9A2A742}"/>
               </a:ext>
             </a:extLst>
           </p:cNvPr>
@@ -10667,7 +10667,7 @@
           <p:cNvPr id="7" name="">
             <a:extLst xmlns:a="http://schemas.openxmlformats.org/drawingml/2006/main">
               <a:ext uri="{FF2B5EF4-FFF2-40B4-BE49-F238E27FC236}">
-                <a16:creationId xmlns:a16="http://schemas.microsoft.com/office/drawing/2014/main" id="{3E530E14-AF06-4D91-97D8-AC4D9FF40CF9}"/>
+                <a16:creationId xmlns:a16="http://schemas.microsoft.com/office/drawing/2014/main" id="{1450CA1E-FF4A-4561-BF42-3C98601CCB62}"/>
               </a:ext>
             </a:extLst>
           </p:cNvPr>
@@ -10702,7 +10702,7 @@
           <p:cNvPr id="8" name="">
             <a:extLst xmlns:a="http://schemas.openxmlformats.org/drawingml/2006/main">
               <a:ext uri="{FF2B5EF4-FFF2-40B4-BE49-F238E27FC236}">
-                <a16:creationId xmlns:a16="http://schemas.microsoft.com/office/drawing/2014/main" id="{4B7EECE4-A37D-484A-812F-339B46B9C897}"/>
+                <a16:creationId xmlns:a16="http://schemas.microsoft.com/office/drawing/2014/main" id="{31AC75A1-404D-4750-89EF-268213CD7C40}"/>
               </a:ext>
             </a:extLst>
           </p:cNvPr>
@@ -10766,7 +10766,7 @@
           <p:cNvPr id="9" name="">
             <a:extLst xmlns:a="http://schemas.openxmlformats.org/drawingml/2006/main">
               <a:ext uri="{FF2B5EF4-FFF2-40B4-BE49-F238E27FC236}">
-                <a16:creationId xmlns:a16="http://schemas.microsoft.com/office/drawing/2014/main" id="{A389EF73-95C8-4882-BB5E-77BE68280623}"/>
+                <a16:creationId xmlns:a16="http://schemas.microsoft.com/office/drawing/2014/main" id="{39411AEE-E49A-4604-85FA-2FB01C4E7013}"/>
               </a:ext>
             </a:extLst>
           </p:cNvPr>
@@ -10801,7 +10801,7 @@
           <p:cNvPr id="10" name="">
             <a:extLst xmlns:a="http://schemas.openxmlformats.org/drawingml/2006/main">
               <a:ext uri="{FF2B5EF4-FFF2-40B4-BE49-F238E27FC236}">
-                <a16:creationId xmlns:a16="http://schemas.microsoft.com/office/drawing/2014/main" id="{B9707ECA-55E7-404F-85DE-BDACF6648189}"/>
+                <a16:creationId xmlns:a16="http://schemas.microsoft.com/office/drawing/2014/main" id="{38D121C4-70E3-48F0-9D53-1258A097E308}"/>
               </a:ext>
             </a:extLst>
           </p:cNvPr>
@@ -10865,7 +10865,7 @@
           <p:cNvPr id="11" name="">
             <a:extLst xmlns:a="http://schemas.openxmlformats.org/drawingml/2006/main">
               <a:ext uri="{FF2B5EF4-FFF2-40B4-BE49-F238E27FC236}">
-                <a16:creationId xmlns:a16="http://schemas.microsoft.com/office/drawing/2014/main" id="{D17A03E1-D747-4EA4-9F03-B0B914A25FE0}"/>
+                <a16:creationId xmlns:a16="http://schemas.microsoft.com/office/drawing/2014/main" id="{475D0CAD-6B5C-4CCD-A257-4B2A74B37E3B}"/>
               </a:ext>
             </a:extLst>
           </p:cNvPr>
@@ -10900,7 +10900,7 @@
           <p:cNvPr id="12" name="">
             <a:extLst xmlns:a="http://schemas.openxmlformats.org/drawingml/2006/main">
               <a:ext uri="{FF2B5EF4-FFF2-40B4-BE49-F238E27FC236}">
-                <a16:creationId xmlns:a16="http://schemas.microsoft.com/office/drawing/2014/main" id="{F63AB8FC-7DC8-459D-B808-BEAE9D902482}"/>
+                <a16:creationId xmlns:a16="http://schemas.microsoft.com/office/drawing/2014/main" id="{69CE5956-642D-4EF7-9B61-6917B288EBD7}"/>
               </a:ext>
             </a:extLst>
           </p:cNvPr>
@@ -10964,7 +10964,7 @@
           <p:cNvPr id="13" name="">
             <a:extLst xmlns:a="http://schemas.openxmlformats.org/drawingml/2006/main">
               <a:ext uri="{FF2B5EF4-FFF2-40B4-BE49-F238E27FC236}">
-                <a16:creationId xmlns:a16="http://schemas.microsoft.com/office/drawing/2014/main" id="{5E80C2E7-6790-4CCF-B4D8-E54E15246E7D}"/>
+                <a16:creationId xmlns:a16="http://schemas.microsoft.com/office/drawing/2014/main" id="{9F78C7DF-E87A-4499-B0AF-1C960BC5FCEB}"/>
               </a:ext>
             </a:extLst>
           </p:cNvPr>
@@ -10999,7 +10999,7 @@
           <p:cNvPr id="14" name="">
             <a:extLst xmlns:a="http://schemas.openxmlformats.org/drawingml/2006/main">
               <a:ext uri="{FF2B5EF4-FFF2-40B4-BE49-F238E27FC236}">
-                <a16:creationId xmlns:a16="http://schemas.microsoft.com/office/drawing/2014/main" id="{4DC56B20-9308-4B4B-B2C8-6FF1DA11CD71}"/>
+                <a16:creationId xmlns:a16="http://schemas.microsoft.com/office/drawing/2014/main" id="{EA2D7B88-C9F0-4DB1-9F74-A7FCBC614A1F}"/>
               </a:ext>
             </a:extLst>
           </p:cNvPr>
@@ -11063,7 +11063,7 @@
           <p:cNvPr id="15" name="">
             <a:extLst xmlns:a="http://schemas.openxmlformats.org/drawingml/2006/main">
               <a:ext uri="{FF2B5EF4-FFF2-40B4-BE49-F238E27FC236}">
-                <a16:creationId xmlns:a16="http://schemas.microsoft.com/office/drawing/2014/main" id="{FADB05D3-B30F-41A1-9A91-4B526E19E5E6}"/>
+                <a16:creationId xmlns:a16="http://schemas.microsoft.com/office/drawing/2014/main" id="{CA8BDA53-DE84-4873-A2A2-33593D57A7FB}"/>
               </a:ext>
             </a:extLst>
           </p:cNvPr>
@@ -11098,7 +11098,7 @@
           <p:cNvPr id="16" name="">
             <a:extLst xmlns:a="http://schemas.openxmlformats.org/drawingml/2006/main">
               <a:ext uri="{FF2B5EF4-FFF2-40B4-BE49-F238E27FC236}">
-                <a16:creationId xmlns:a16="http://schemas.microsoft.com/office/drawing/2014/main" id="{649B2A84-1E1E-4927-B931-B1DBB90B7652}"/>
+                <a16:creationId xmlns:a16="http://schemas.microsoft.com/office/drawing/2014/main" id="{0C889FC7-11BB-4B1C-8E53-3BE0097E995B}"/>
               </a:ext>
             </a:extLst>
           </p:cNvPr>
@@ -11162,7 +11162,7 @@
           <p:cNvPr id="17" name="">
             <a:extLst xmlns:a="http://schemas.openxmlformats.org/drawingml/2006/main">
               <a:ext uri="{FF2B5EF4-FFF2-40B4-BE49-F238E27FC236}">
-                <a16:creationId xmlns:a16="http://schemas.microsoft.com/office/drawing/2014/main" id="{98F6CE7E-4533-4CB2-BEC0-9A874F13337D}"/>
+                <a16:creationId xmlns:a16="http://schemas.microsoft.com/office/drawing/2014/main" id="{33BECCE5-A5F3-42F3-883C-DF4301CEDA2E}"/>
               </a:ext>
             </a:extLst>
           </p:cNvPr>
@@ -11197,7 +11197,7 @@
           <p:cNvPr id="18" name="">
             <a:extLst xmlns:a="http://schemas.openxmlformats.org/drawingml/2006/main">
               <a:ext uri="{FF2B5EF4-FFF2-40B4-BE49-F238E27FC236}">
-                <a16:creationId xmlns:a16="http://schemas.microsoft.com/office/drawing/2014/main" id="{3B839669-FDDF-4512-8B01-58A18C056A73}"/>
+                <a16:creationId xmlns:a16="http://schemas.microsoft.com/office/drawing/2014/main" id="{F3DFBC1C-5492-4006-A294-463F5DF02314}"/>
               </a:ext>
             </a:extLst>
           </p:cNvPr>
@@ -11261,7 +11261,7 @@
           <p:cNvPr id="19" name="">
             <a:extLst xmlns:a="http://schemas.openxmlformats.org/drawingml/2006/main">
               <a:ext uri="{FF2B5EF4-FFF2-40B4-BE49-F238E27FC236}">
-                <a16:creationId xmlns:a16="http://schemas.microsoft.com/office/drawing/2014/main" id="{FC71B757-14B1-4830-98AD-0D73664827AB}"/>
+                <a16:creationId xmlns:a16="http://schemas.microsoft.com/office/drawing/2014/main" id="{910D1474-C7B4-4E63-835C-AC469EB2B616}"/>
               </a:ext>
             </a:extLst>
           </p:cNvPr>
@@ -11325,7 +11325,7 @@
           <p:cNvPr id="20" name="">
             <a:extLst xmlns:a="http://schemas.openxmlformats.org/drawingml/2006/main">
               <a:ext uri="{FF2B5EF4-FFF2-40B4-BE49-F238E27FC236}">
-                <a16:creationId xmlns:a16="http://schemas.microsoft.com/office/drawing/2014/main" id="{99E0E58E-65A3-4062-8C67-1FA3186E8723}"/>
+                <a16:creationId xmlns:a16="http://schemas.microsoft.com/office/drawing/2014/main" id="{050427ED-0615-4BC0-BF56-2E32EABE08CE}"/>
               </a:ext>
             </a:extLst>
           </p:cNvPr>
@@ -11389,7 +11389,7 @@
           <p:cNvPr id="21" name="">
             <a:extLst xmlns:a="http://schemas.openxmlformats.org/drawingml/2006/main">
               <a:ext uri="{FF2B5EF4-FFF2-40B4-BE49-F238E27FC236}">
-                <a16:creationId xmlns:a16="http://schemas.microsoft.com/office/drawing/2014/main" id="{62EA20C0-8D59-497E-9490-A27C3620AC89}"/>
+                <a16:creationId xmlns:a16="http://schemas.microsoft.com/office/drawing/2014/main" id="{CBA19745-F2DA-4B53-AA93-89B314F8399A}"/>
               </a:ext>
             </a:extLst>
           </p:cNvPr>
@@ -11424,7 +11424,7 @@
           <p:cNvPr id="22" name="">
             <a:extLst xmlns:a="http://schemas.openxmlformats.org/drawingml/2006/main">
               <a:ext uri="{FF2B5EF4-FFF2-40B4-BE49-F238E27FC236}">
-                <a16:creationId xmlns:a16="http://schemas.microsoft.com/office/drawing/2014/main" id="{3D147AF0-295E-45C2-94A3-D0E856930FFF}"/>
+                <a16:creationId xmlns:a16="http://schemas.microsoft.com/office/drawing/2014/main" id="{6253FCC2-E5DC-4322-A1E8-FE6DAF4BDC85}"/>
               </a:ext>
             </a:extLst>
           </p:cNvPr>
@@ -11488,7 +11488,7 @@
           <p:cNvPr id="23" name="">
             <a:extLst xmlns:a="http://schemas.openxmlformats.org/drawingml/2006/main">
               <a:ext uri="{FF2B5EF4-FFF2-40B4-BE49-F238E27FC236}">
-                <a16:creationId xmlns:a16="http://schemas.microsoft.com/office/drawing/2014/main" id="{6654E79E-4BD0-4137-BC53-B6ACEF041247}"/>
+                <a16:creationId xmlns:a16="http://schemas.microsoft.com/office/drawing/2014/main" id="{9B1D6848-282B-4F83-BF63-3D4481448D55}"/>
               </a:ext>
             </a:extLst>
           </p:cNvPr>
@@ -11552,7 +11552,7 @@
           <p:cNvPr id="24" name="">
             <a:extLst xmlns:a="http://schemas.openxmlformats.org/drawingml/2006/main">
               <a:ext uri="{FF2B5EF4-FFF2-40B4-BE49-F238E27FC236}">
-                <a16:creationId xmlns:a16="http://schemas.microsoft.com/office/drawing/2014/main" id="{E4661DF7-B718-4E8B-849C-2956394C83F0}"/>
+                <a16:creationId xmlns:a16="http://schemas.microsoft.com/office/drawing/2014/main" id="{47F9764E-5F59-44DC-9A26-ED792406DD36}"/>
               </a:ext>
             </a:extLst>
           </p:cNvPr>
@@ -11616,7 +11616,7 @@
           <p:cNvPr id="25" name="">
             <a:extLst xmlns:a="http://schemas.openxmlformats.org/drawingml/2006/main">
               <a:ext uri="{FF2B5EF4-FFF2-40B4-BE49-F238E27FC236}">
-                <a16:creationId xmlns:a16="http://schemas.microsoft.com/office/drawing/2014/main" id="{C7F3D24B-4FFB-4011-9BC9-271D6DFEB419}"/>
+                <a16:creationId xmlns:a16="http://schemas.microsoft.com/office/drawing/2014/main" id="{104DDEC9-92D7-47CE-84CF-9142A6BA2218}"/>
               </a:ext>
             </a:extLst>
           </p:cNvPr>
@@ -11651,7 +11651,7 @@
           <p:cNvPr id="26" name="">
             <a:extLst xmlns:a="http://schemas.openxmlformats.org/drawingml/2006/main">
               <a:ext uri="{FF2B5EF4-FFF2-40B4-BE49-F238E27FC236}">
-                <a16:creationId xmlns:a16="http://schemas.microsoft.com/office/drawing/2014/main" id="{5AA00954-9C18-455A-9B7E-51E22E2A46AD}"/>
+                <a16:creationId xmlns:a16="http://schemas.microsoft.com/office/drawing/2014/main" id="{5B27E235-440B-475D-94FB-3FAD23E4BFC3}"/>
               </a:ext>
             </a:extLst>
           </p:cNvPr>
@@ -11715,7 +11715,7 @@
           <p:cNvPr id="27" name="">
             <a:extLst xmlns:a="http://schemas.openxmlformats.org/drawingml/2006/main">
               <a:ext uri="{FF2B5EF4-FFF2-40B4-BE49-F238E27FC236}">
-                <a16:creationId xmlns:a16="http://schemas.microsoft.com/office/drawing/2014/main" id="{642CB55F-C392-48FD-8AF6-642D0CFBFDF0}"/>
+                <a16:creationId xmlns:a16="http://schemas.microsoft.com/office/drawing/2014/main" id="{05A9C1B5-E2A0-4D5F-9A92-8BA605D62619}"/>
               </a:ext>
             </a:extLst>
           </p:cNvPr>
@@ -11779,7 +11779,7 @@
           <p:cNvPr id="28" name="">
             <a:extLst xmlns:a="http://schemas.openxmlformats.org/drawingml/2006/main">
               <a:ext uri="{FF2B5EF4-FFF2-40B4-BE49-F238E27FC236}">
-                <a16:creationId xmlns:a16="http://schemas.microsoft.com/office/drawing/2014/main" id="{4D22F986-7A0E-4575-BB38-1EDEAA67514A}"/>
+                <a16:creationId xmlns:a16="http://schemas.microsoft.com/office/drawing/2014/main" id="{80A64FB4-FF98-431B-ABEC-9A37F1B592B8}"/>
               </a:ext>
             </a:extLst>
           </p:cNvPr>
@@ -11843,7 +11843,7 @@
           <p:cNvPr id="29" name="">
             <a:extLst xmlns:a="http://schemas.openxmlformats.org/drawingml/2006/main">
               <a:ext uri="{FF2B5EF4-FFF2-40B4-BE49-F238E27FC236}">
-                <a16:creationId xmlns:a16="http://schemas.microsoft.com/office/drawing/2014/main" id="{4EB560E0-699E-4613-8A59-74167BF3C104}"/>
+                <a16:creationId xmlns:a16="http://schemas.microsoft.com/office/drawing/2014/main" id="{1D032C80-510E-47E2-8AAC-AD60CDCDFD31}"/>
               </a:ext>
             </a:extLst>
           </p:cNvPr>
@@ -11878,7 +11878,7 @@
           <p:cNvPr id="30" name="">
             <a:extLst xmlns:a="http://schemas.openxmlformats.org/drawingml/2006/main">
               <a:ext uri="{FF2B5EF4-FFF2-40B4-BE49-F238E27FC236}">
-                <a16:creationId xmlns:a16="http://schemas.microsoft.com/office/drawing/2014/main" id="{532C4B4C-2317-4ED8-8506-1355D2DE2E68}"/>
+                <a16:creationId xmlns:a16="http://schemas.microsoft.com/office/drawing/2014/main" id="{F470B2EF-81D6-4AF2-A308-E705E5FB4C1A}"/>
               </a:ext>
             </a:extLst>
           </p:cNvPr>
@@ -11942,7 +11942,7 @@
           <p:cNvPr id="31" name="">
             <a:extLst xmlns:a="http://schemas.openxmlformats.org/drawingml/2006/main">
               <a:ext uri="{FF2B5EF4-FFF2-40B4-BE49-F238E27FC236}">
-                <a16:creationId xmlns:a16="http://schemas.microsoft.com/office/drawing/2014/main" id="{93E19D4C-0FAD-4C9A-883B-8B1775BBFB1A}"/>
+                <a16:creationId xmlns:a16="http://schemas.microsoft.com/office/drawing/2014/main" id="{134E4C2E-599A-42E8-844D-130565F4C536}"/>
               </a:ext>
             </a:extLst>
           </p:cNvPr>
@@ -12006,7 +12006,7 @@
           <p:cNvPr id="32" name="">
             <a:extLst xmlns:a="http://schemas.openxmlformats.org/drawingml/2006/main">
               <a:ext uri="{FF2B5EF4-FFF2-40B4-BE49-F238E27FC236}">
-                <a16:creationId xmlns:a16="http://schemas.microsoft.com/office/drawing/2014/main" id="{7D29B5A6-D1D1-424C-91C1-6644050F4341}"/>
+                <a16:creationId xmlns:a16="http://schemas.microsoft.com/office/drawing/2014/main" id="{B69D3414-186C-4827-8E2E-9E97D03DB45C}"/>
               </a:ext>
             </a:extLst>
           </p:cNvPr>
@@ -12070,7 +12070,7 @@
           <p:cNvPr id="33" name="">
             <a:extLst xmlns:a="http://schemas.openxmlformats.org/drawingml/2006/main">
               <a:ext uri="{FF2B5EF4-FFF2-40B4-BE49-F238E27FC236}">
-                <a16:creationId xmlns:a16="http://schemas.microsoft.com/office/drawing/2014/main" id="{728D2838-7660-4224-8A96-464433F2F472}"/>
+                <a16:creationId xmlns:a16="http://schemas.microsoft.com/office/drawing/2014/main" id="{E32CB3B0-78B3-45DE-8066-E0FDD6D13149}"/>
               </a:ext>
             </a:extLst>
           </p:cNvPr>
@@ -12105,7 +12105,7 @@
           <p:cNvPr id="34" name="">
             <a:extLst xmlns:a="http://schemas.openxmlformats.org/drawingml/2006/main">
               <a:ext uri="{FF2B5EF4-FFF2-40B4-BE49-F238E27FC236}">
-                <a16:creationId xmlns:a16="http://schemas.microsoft.com/office/drawing/2014/main" id="{125D5BED-4D4C-4CE2-B60A-78A613B1B935}"/>
+                <a16:creationId xmlns:a16="http://schemas.microsoft.com/office/drawing/2014/main" id="{2DC8326B-895C-4CCB-9250-ED19D089C153}"/>
               </a:ext>
             </a:extLst>
           </p:cNvPr>
@@ -12169,7 +12169,7 @@
           <p:cNvPr id="35" name="">
             <a:extLst xmlns:a="http://schemas.openxmlformats.org/drawingml/2006/main">
               <a:ext uri="{FF2B5EF4-FFF2-40B4-BE49-F238E27FC236}">
-                <a16:creationId xmlns:a16="http://schemas.microsoft.com/office/drawing/2014/main" id="{27CF736A-961C-460B-93DB-BCBBFCAC1CF3}"/>
+                <a16:creationId xmlns:a16="http://schemas.microsoft.com/office/drawing/2014/main" id="{78ED76A2-22CF-43F6-98ED-F88CDC1ECFEA}"/>
               </a:ext>
             </a:extLst>
           </p:cNvPr>
@@ -12233,7 +12233,7 @@
           <p:cNvPr id="36" name="">
             <a:extLst xmlns:a="http://schemas.openxmlformats.org/drawingml/2006/main">
               <a:ext uri="{FF2B5EF4-FFF2-40B4-BE49-F238E27FC236}">
-                <a16:creationId xmlns:a16="http://schemas.microsoft.com/office/drawing/2014/main" id="{BF643F1D-5B55-43C9-AE0A-AC6CF9C57E4B}"/>
+                <a16:creationId xmlns:a16="http://schemas.microsoft.com/office/drawing/2014/main" id="{D3844DC3-4DF8-4393-BC1F-CC678E4ADF9B}"/>
               </a:ext>
             </a:extLst>
           </p:cNvPr>
@@ -12297,7 +12297,7 @@
           <p:cNvPr id="37" name="">
             <a:extLst xmlns:a="http://schemas.openxmlformats.org/drawingml/2006/main">
               <a:ext uri="{FF2B5EF4-FFF2-40B4-BE49-F238E27FC236}">
-                <a16:creationId xmlns:a16="http://schemas.microsoft.com/office/drawing/2014/main" id="{24930458-45E8-4542-ACB2-5F45970D5347}"/>
+                <a16:creationId xmlns:a16="http://schemas.microsoft.com/office/drawing/2014/main" id="{9D07DF4B-7BF2-4D62-897B-9F963EE3E190}"/>
               </a:ext>
             </a:extLst>
           </p:cNvPr>
@@ -12330,7 +12330,7 @@
           <p:cNvPr id="38" name="">
             <a:extLst xmlns:a="http://schemas.openxmlformats.org/drawingml/2006/main">
               <a:ext uri="{FF2B5EF4-FFF2-40B4-BE49-F238E27FC236}">
-                <a16:creationId xmlns:a16="http://schemas.microsoft.com/office/drawing/2014/main" id="{11CF61BF-203B-44EE-8034-4733391DB235}"/>
+                <a16:creationId xmlns:a16="http://schemas.microsoft.com/office/drawing/2014/main" id="{050981BA-8F87-4D82-98A0-3B52EDAE7866}"/>
               </a:ext>
             </a:extLst>
           </p:cNvPr>
@@ -12365,7 +12365,7 @@
           <p:cNvPr id="39" name="">
             <a:extLst xmlns:a="http://schemas.openxmlformats.org/drawingml/2006/main">
               <a:ext uri="{FF2B5EF4-FFF2-40B4-BE49-F238E27FC236}">
-                <a16:creationId xmlns:a16="http://schemas.microsoft.com/office/drawing/2014/main" id="{1EB69DAC-9196-4B20-973F-7A1EA91550C0}"/>
+                <a16:creationId xmlns:a16="http://schemas.microsoft.com/office/drawing/2014/main" id="{B655D8A2-A004-4715-A538-12DCF39C722A}"/>
               </a:ext>
             </a:extLst>
           </p:cNvPr>
@@ -12429,7 +12429,7 @@
           <p:cNvPr id="40" name="">
             <a:extLst xmlns:a="http://schemas.openxmlformats.org/drawingml/2006/main">
               <a:ext uri="{FF2B5EF4-FFF2-40B4-BE49-F238E27FC236}">
-                <a16:creationId xmlns:a16="http://schemas.microsoft.com/office/drawing/2014/main" id="{B2B705DC-4F97-4B17-803A-A97EC874A55B}"/>
+                <a16:creationId xmlns:a16="http://schemas.microsoft.com/office/drawing/2014/main" id="{EFE66F19-72C1-4942-81E2-5EAABD1EEAD3}"/>
               </a:ext>
             </a:extLst>
           </p:cNvPr>
@@ -12493,7 +12493,7 @@
           <p:cNvPr id="41" name="">
             <a:extLst xmlns:a="http://schemas.openxmlformats.org/drawingml/2006/main">
               <a:ext uri="{FF2B5EF4-FFF2-40B4-BE49-F238E27FC236}">
-                <a16:creationId xmlns:a16="http://schemas.microsoft.com/office/drawing/2014/main" id="{30EF354E-837A-4DEB-8C93-25E1BDEC3B13}"/>
+                <a16:creationId xmlns:a16="http://schemas.microsoft.com/office/drawing/2014/main" id="{A12BB445-1976-498A-A285-44053BB47810}"/>
               </a:ext>
             </a:extLst>
           </p:cNvPr>
@@ -12526,7 +12526,7 @@
           <p:cNvPr id="42" name="">
             <a:extLst xmlns:a="http://schemas.openxmlformats.org/drawingml/2006/main">
               <a:ext uri="{FF2B5EF4-FFF2-40B4-BE49-F238E27FC236}">
-                <a16:creationId xmlns:a16="http://schemas.microsoft.com/office/drawing/2014/main" id="{55B23D71-0C9D-4FB1-9124-115EF83C21DF}"/>
+                <a16:creationId xmlns:a16="http://schemas.microsoft.com/office/drawing/2014/main" id="{7CA604D3-A923-47BA-A7FA-0BE6243668D2}"/>
               </a:ext>
             </a:extLst>
           </p:cNvPr>
@@ -12561,7 +12561,7 @@
           <p:cNvPr id="43" name="">
             <a:extLst xmlns:a="http://schemas.openxmlformats.org/drawingml/2006/main">
               <a:ext uri="{FF2B5EF4-FFF2-40B4-BE49-F238E27FC236}">
-                <a16:creationId xmlns:a16="http://schemas.microsoft.com/office/drawing/2014/main" id="{D6C5EEA6-9385-4378-93A1-CDB8C5C7B711}"/>
+                <a16:creationId xmlns:a16="http://schemas.microsoft.com/office/drawing/2014/main" id="{FC8D5C80-07E2-4697-A53D-7295651686EC}"/>
               </a:ext>
             </a:extLst>
           </p:cNvPr>
@@ -12625,7 +12625,7 @@
           <p:cNvPr id="44" name="">
             <a:extLst xmlns:a="http://schemas.openxmlformats.org/drawingml/2006/main">
               <a:ext uri="{FF2B5EF4-FFF2-40B4-BE49-F238E27FC236}">
-                <a16:creationId xmlns:a16="http://schemas.microsoft.com/office/drawing/2014/main" id="{7CAC8CE3-E5CD-478F-AEC1-E541A8A78DC9}"/>
+                <a16:creationId xmlns:a16="http://schemas.microsoft.com/office/drawing/2014/main" id="{64A21478-66E3-4F36-9CAB-07DB8D723502}"/>
               </a:ext>
             </a:extLst>
           </p:cNvPr>
@@ -12689,7 +12689,7 @@
           <p:cNvPr id="45" name="">
             <a:extLst xmlns:a="http://schemas.openxmlformats.org/drawingml/2006/main">
               <a:ext uri="{FF2B5EF4-FFF2-40B4-BE49-F238E27FC236}">
-                <a16:creationId xmlns:a16="http://schemas.microsoft.com/office/drawing/2014/main" id="{71D428A3-D369-43B7-950F-8FFBF5AEA4A2}"/>
+                <a16:creationId xmlns:a16="http://schemas.microsoft.com/office/drawing/2014/main" id="{1882825E-B74F-4B99-B926-C2FF3A79C764}"/>
               </a:ext>
             </a:extLst>
           </p:cNvPr>
@@ -12749,7 +12749,7 @@
     </p:spTree>
     <p:extLst>
       <p:ext uri="{BB962C8B-B14F-4D97-AF65-F5344CB8AC3E}">
-        <p14:creationId xmlns:p14="http://schemas.microsoft.com/office/powerpoint/2010/main" val="1206202539"/>
+        <p14:creationId xmlns:p14="http://schemas.microsoft.com/office/powerpoint/2010/main" val="2076332122"/>
       </p:ext>
     </p:extLst>
   </p:cSld>
@@ -12780,7 +12780,7 @@
           <p:cNvPr id="1" name="">
             <a:extLst xmlns:a="http://schemas.openxmlformats.org/drawingml/2006/main">
               <a:ext uri="{FF2B5EF4-FFF2-40B4-BE49-F238E27FC236}">
-                <a16:creationId xmlns:a16="http://schemas.microsoft.com/office/drawing/2014/main" id="{34BC5D4F-EBF5-4904-8704-7251D7FB7DDD}"/>
+                <a16:creationId xmlns:a16="http://schemas.microsoft.com/office/drawing/2014/main" id="{2C665835-3BA6-4046-B54C-BA9DE47167BF}"/>
               </a:ext>
             </a:extLst>
           </p:cNvPr>
@@ -12815,7 +12815,7 @@
           <p:cNvPr id="2" name="">
             <a:extLst xmlns:a="http://schemas.openxmlformats.org/drawingml/2006/main">
               <a:ext uri="{FF2B5EF4-FFF2-40B4-BE49-F238E27FC236}">
-                <a16:creationId xmlns:a16="http://schemas.microsoft.com/office/drawing/2014/main" id="{F1CE4FD3-CE75-4C90-AFD7-14E2CB5299BC}"/>
+                <a16:creationId xmlns:a16="http://schemas.microsoft.com/office/drawing/2014/main" id="{178DC794-4C17-4534-8BB7-529093F56198}"/>
               </a:ext>
             </a:extLst>
           </p:cNvPr>
@@ -12879,7 +12879,7 @@
           <p:cNvPr id="3" name="">
             <a:extLst xmlns:a="http://schemas.openxmlformats.org/drawingml/2006/main">
               <a:ext uri="{FF2B5EF4-FFF2-40B4-BE49-F238E27FC236}">
-                <a16:creationId xmlns:a16="http://schemas.microsoft.com/office/drawing/2014/main" id="{C7F2998D-9909-4F2B-8D21-55D96F8755F0}"/>
+                <a16:creationId xmlns:a16="http://schemas.microsoft.com/office/drawing/2014/main" id="{9453E8A4-F1DF-422C-9E87-97FFB9BE515E}"/>
               </a:ext>
             </a:extLst>
           </p:cNvPr>
@@ -12943,7 +12943,7 @@
           <p:cNvPr id="4" name="">
             <a:extLst xmlns:a="http://schemas.openxmlformats.org/drawingml/2006/main">
               <a:ext uri="{FF2B5EF4-FFF2-40B4-BE49-F238E27FC236}">
-                <a16:creationId xmlns:a16="http://schemas.microsoft.com/office/drawing/2014/main" id="{3550FF32-8226-44A9-84C9-DBDCD0402378}"/>
+                <a16:creationId xmlns:a16="http://schemas.microsoft.com/office/drawing/2014/main" id="{FF82688E-7EA8-4CE2-914F-D8686833EE36}"/>
               </a:ext>
             </a:extLst>
           </p:cNvPr>
@@ -13007,7 +13007,7 @@
           <p:cNvPr id="5" name="">
             <a:extLst xmlns:a="http://schemas.openxmlformats.org/drawingml/2006/main">
               <a:ext uri="{FF2B5EF4-FFF2-40B4-BE49-F238E27FC236}">
-                <a16:creationId xmlns:a16="http://schemas.microsoft.com/office/drawing/2014/main" id="{4FE7B7C7-5DA2-46C7-8DD7-36FD5A13DA1E}"/>
+                <a16:creationId xmlns:a16="http://schemas.microsoft.com/office/drawing/2014/main" id="{EA1F9E55-E345-4D64-A9A2-64508575407E}"/>
               </a:ext>
             </a:extLst>
           </p:cNvPr>
@@ -13071,7 +13071,7 @@
           <p:cNvPr id="6" name="">
             <a:extLst xmlns:a="http://schemas.openxmlformats.org/drawingml/2006/main">
               <a:ext uri="{FF2B5EF4-FFF2-40B4-BE49-F238E27FC236}">
-                <a16:creationId xmlns:a16="http://schemas.microsoft.com/office/drawing/2014/main" id="{45A2E3C4-7B02-4319-9C95-293D97681F9D}"/>
+                <a16:creationId xmlns:a16="http://schemas.microsoft.com/office/drawing/2014/main" id="{6AAC3139-B1B3-470E-A733-903B0E5EAB03}"/>
               </a:ext>
             </a:extLst>
           </p:cNvPr>
@@ -13104,7 +13104,7 @@
           <p:cNvPr id="7" name="">
             <a:extLst xmlns:a="http://schemas.openxmlformats.org/drawingml/2006/main">
               <a:ext uri="{FF2B5EF4-FFF2-40B4-BE49-F238E27FC236}">
-                <a16:creationId xmlns:a16="http://schemas.microsoft.com/office/drawing/2014/main" id="{A67D7739-D898-4A99-9BDC-4CDE4BCED4EA}"/>
+                <a16:creationId xmlns:a16="http://schemas.microsoft.com/office/drawing/2014/main" id="{35A0B8CE-1054-440F-A3FD-21B5EA82D4AC}"/>
               </a:ext>
             </a:extLst>
           </p:cNvPr>
@@ -13139,7 +13139,7 @@
           <p:cNvPr id="8" name="">
             <a:extLst xmlns:a="http://schemas.openxmlformats.org/drawingml/2006/main">
               <a:ext uri="{FF2B5EF4-FFF2-40B4-BE49-F238E27FC236}">
-                <a16:creationId xmlns:a16="http://schemas.microsoft.com/office/drawing/2014/main" id="{B1F93E55-6012-460B-AA5A-133E0061773A}"/>
+                <a16:creationId xmlns:a16="http://schemas.microsoft.com/office/drawing/2014/main" id="{3FB6B340-4CB3-4DC3-BDD0-09FB9CC2DBC7}"/>
               </a:ext>
             </a:extLst>
           </p:cNvPr>
@@ -13203,7 +13203,7 @@
           <p:cNvPr id="9" name="">
             <a:extLst xmlns:a="http://schemas.openxmlformats.org/drawingml/2006/main">
               <a:ext uri="{FF2B5EF4-FFF2-40B4-BE49-F238E27FC236}">
-                <a16:creationId xmlns:a16="http://schemas.microsoft.com/office/drawing/2014/main" id="{B6801F7A-C197-43FB-997F-12F98148E165}"/>
+                <a16:creationId xmlns:a16="http://schemas.microsoft.com/office/drawing/2014/main" id="{6610B267-E137-4943-A1A0-ACC3A322B924}"/>
               </a:ext>
             </a:extLst>
           </p:cNvPr>
@@ -13267,7 +13267,7 @@
           <p:cNvPr id="10" name="">
             <a:extLst xmlns:a="http://schemas.openxmlformats.org/drawingml/2006/main">
               <a:ext uri="{FF2B5EF4-FFF2-40B4-BE49-F238E27FC236}">
-                <a16:creationId xmlns:a16="http://schemas.microsoft.com/office/drawing/2014/main" id="{B3B68E3A-4C45-4630-A782-28ADDE8B4765}"/>
+                <a16:creationId xmlns:a16="http://schemas.microsoft.com/office/drawing/2014/main" id="{D5B5AD47-2C11-4D8D-88D8-FD5256EF38C3}"/>
               </a:ext>
             </a:extLst>
           </p:cNvPr>
@@ -13300,7 +13300,7 @@
           <p:cNvPr id="11" name="">
             <a:extLst xmlns:a="http://schemas.openxmlformats.org/drawingml/2006/main">
               <a:ext uri="{FF2B5EF4-FFF2-40B4-BE49-F238E27FC236}">
-                <a16:creationId xmlns:a16="http://schemas.microsoft.com/office/drawing/2014/main" id="{276D87AA-FFC6-483E-874D-97A7CDFA5FD3}"/>
+                <a16:creationId xmlns:a16="http://schemas.microsoft.com/office/drawing/2014/main" id="{1935141A-9574-41C7-9CDE-80C0919D4359}"/>
               </a:ext>
             </a:extLst>
           </p:cNvPr>
@@ -13335,7 +13335,7 @@
           <p:cNvPr id="12" name="">
             <a:extLst xmlns:a="http://schemas.openxmlformats.org/drawingml/2006/main">
               <a:ext uri="{FF2B5EF4-FFF2-40B4-BE49-F238E27FC236}">
-                <a16:creationId xmlns:a16="http://schemas.microsoft.com/office/drawing/2014/main" id="{D8E9981D-AD1A-4CF9-A794-9506E729D09B}"/>
+                <a16:creationId xmlns:a16="http://schemas.microsoft.com/office/drawing/2014/main" id="{FEFCC252-9E08-4D16-9A3F-C03DF508EC95}"/>
               </a:ext>
             </a:extLst>
           </p:cNvPr>
@@ -13399,7 +13399,7 @@
           <p:cNvPr id="13" name="">
             <a:extLst xmlns:a="http://schemas.openxmlformats.org/drawingml/2006/main">
               <a:ext uri="{FF2B5EF4-FFF2-40B4-BE49-F238E27FC236}">
-                <a16:creationId xmlns:a16="http://schemas.microsoft.com/office/drawing/2014/main" id="{2F9CA176-9E7C-49C0-AE2E-63A31CBC5E8A}"/>
+                <a16:creationId xmlns:a16="http://schemas.microsoft.com/office/drawing/2014/main" id="{3D02C820-0293-4392-B586-3DAB7C732A96}"/>
               </a:ext>
             </a:extLst>
           </p:cNvPr>
@@ -13463,7 +13463,7 @@
           <p:cNvPr id="14" name="">
             <a:extLst xmlns:a="http://schemas.openxmlformats.org/drawingml/2006/main">
               <a:ext uri="{FF2B5EF4-FFF2-40B4-BE49-F238E27FC236}">
-                <a16:creationId xmlns:a16="http://schemas.microsoft.com/office/drawing/2014/main" id="{FCDAAFD6-2D60-472B-8262-BE1AF4B9EBE7}"/>
+                <a16:creationId xmlns:a16="http://schemas.microsoft.com/office/drawing/2014/main" id="{8ADB2B6F-F905-4275-968D-31147265B7F7}"/>
               </a:ext>
             </a:extLst>
           </p:cNvPr>
@@ -13496,7 +13496,7 @@
           <p:cNvPr id="15" name="">
             <a:extLst xmlns:a="http://schemas.openxmlformats.org/drawingml/2006/main">
               <a:ext uri="{FF2B5EF4-FFF2-40B4-BE49-F238E27FC236}">
-                <a16:creationId xmlns:a16="http://schemas.microsoft.com/office/drawing/2014/main" id="{524564A6-F7CA-4D1B-8824-DC5933AB6BCB}"/>
+                <a16:creationId xmlns:a16="http://schemas.microsoft.com/office/drawing/2014/main" id="{FF3B941E-ED65-402A-91DF-0B5E5CA3F89E}"/>
               </a:ext>
             </a:extLst>
           </p:cNvPr>
@@ -13531,7 +13531,7 @@
           <p:cNvPr id="16" name="">
             <a:extLst xmlns:a="http://schemas.openxmlformats.org/drawingml/2006/main">
               <a:ext uri="{FF2B5EF4-FFF2-40B4-BE49-F238E27FC236}">
-                <a16:creationId xmlns:a16="http://schemas.microsoft.com/office/drawing/2014/main" id="{9025539E-B12A-44AC-9595-F89B4613C3BF}"/>
+                <a16:creationId xmlns:a16="http://schemas.microsoft.com/office/drawing/2014/main" id="{775D7AEF-AB41-44CE-9B6E-6F12BDB104EF}"/>
               </a:ext>
             </a:extLst>
           </p:cNvPr>
@@ -13595,7 +13595,7 @@
           <p:cNvPr id="17" name="">
             <a:extLst xmlns:a="http://schemas.openxmlformats.org/drawingml/2006/main">
               <a:ext uri="{FF2B5EF4-FFF2-40B4-BE49-F238E27FC236}">
-                <a16:creationId xmlns:a16="http://schemas.microsoft.com/office/drawing/2014/main" id="{19B7ACF3-ED47-4697-8930-8F14FF4B3F85}"/>
+                <a16:creationId xmlns:a16="http://schemas.microsoft.com/office/drawing/2014/main" id="{ABD71FED-25CB-4DE4-AFB6-9AFBA7C70745}"/>
               </a:ext>
             </a:extLst>
           </p:cNvPr>
@@ -13659,7 +13659,7 @@
           <p:cNvPr id="18" name="">
             <a:extLst xmlns:a="http://schemas.openxmlformats.org/drawingml/2006/main">
               <a:ext uri="{FF2B5EF4-FFF2-40B4-BE49-F238E27FC236}">
-                <a16:creationId xmlns:a16="http://schemas.microsoft.com/office/drawing/2014/main" id="{8AB73DA9-B2B3-4DA3-B326-66F4F11A3C37}"/>
+                <a16:creationId xmlns:a16="http://schemas.microsoft.com/office/drawing/2014/main" id="{5DF85D9E-17DF-4C81-96B2-D2E1D8CC0850}"/>
               </a:ext>
             </a:extLst>
           </p:cNvPr>
@@ -13692,7 +13692,7 @@
           <p:cNvPr id="19" name="">
             <a:extLst xmlns:a="http://schemas.openxmlformats.org/drawingml/2006/main">
               <a:ext uri="{FF2B5EF4-FFF2-40B4-BE49-F238E27FC236}">
-                <a16:creationId xmlns:a16="http://schemas.microsoft.com/office/drawing/2014/main" id="{7DE10E56-6CDF-498E-9EC0-567C5A71BC0E}"/>
+                <a16:creationId xmlns:a16="http://schemas.microsoft.com/office/drawing/2014/main" id="{7CBF718B-25AB-4A16-BD6C-6F817C673C76}"/>
               </a:ext>
             </a:extLst>
           </p:cNvPr>
@@ -13727,7 +13727,7 @@
           <p:cNvPr id="20" name="">
             <a:extLst xmlns:a="http://schemas.openxmlformats.org/drawingml/2006/main">
               <a:ext uri="{FF2B5EF4-FFF2-40B4-BE49-F238E27FC236}">
-                <a16:creationId xmlns:a16="http://schemas.microsoft.com/office/drawing/2014/main" id="{054EE301-AAB1-4882-ABFF-3B362F8B78B7}"/>
+                <a16:creationId xmlns:a16="http://schemas.microsoft.com/office/drawing/2014/main" id="{859CB054-80DD-455A-A271-4F29DFAFC2A6}"/>
               </a:ext>
             </a:extLst>
           </p:cNvPr>
@@ -13791,7 +13791,7 @@
           <p:cNvPr id="21" name="">
             <a:extLst xmlns:a="http://schemas.openxmlformats.org/drawingml/2006/main">
               <a:ext uri="{FF2B5EF4-FFF2-40B4-BE49-F238E27FC236}">
-                <a16:creationId xmlns:a16="http://schemas.microsoft.com/office/drawing/2014/main" id="{CC682BE7-D64C-465C-9CA4-55F4C306D9EE}"/>
+                <a16:creationId xmlns:a16="http://schemas.microsoft.com/office/drawing/2014/main" id="{2A08D828-82E4-48F2-908E-C3412012329D}"/>
               </a:ext>
             </a:extLst>
           </p:cNvPr>
@@ -13855,7 +13855,7 @@
           <p:cNvPr id="22" name="">
             <a:extLst xmlns:a="http://schemas.openxmlformats.org/drawingml/2006/main">
               <a:ext uri="{FF2B5EF4-FFF2-40B4-BE49-F238E27FC236}">
-                <a16:creationId xmlns:a16="http://schemas.microsoft.com/office/drawing/2014/main" id="{14CC99A7-C9A9-43FE-8A6C-1AFE69B076A0}"/>
+                <a16:creationId xmlns:a16="http://schemas.microsoft.com/office/drawing/2014/main" id="{3725896E-061E-4759-87DA-F066FCCFCD06}"/>
               </a:ext>
             </a:extLst>
           </p:cNvPr>
@@ -13888,7 +13888,7 @@
           <p:cNvPr id="23" name="">
             <a:extLst xmlns:a="http://schemas.openxmlformats.org/drawingml/2006/main">
               <a:ext uri="{FF2B5EF4-FFF2-40B4-BE49-F238E27FC236}">
-                <a16:creationId xmlns:a16="http://schemas.microsoft.com/office/drawing/2014/main" id="{761904F9-9EEA-4E69-9E18-5E564E0119EE}"/>
+                <a16:creationId xmlns:a16="http://schemas.microsoft.com/office/drawing/2014/main" id="{006EA0D0-67A3-4FA2-A0EC-E0A20955756E}"/>
               </a:ext>
             </a:extLst>
           </p:cNvPr>
@@ -13923,7 +13923,7 @@
           <p:cNvPr id="24" name="">
             <a:extLst xmlns:a="http://schemas.openxmlformats.org/drawingml/2006/main">
               <a:ext uri="{FF2B5EF4-FFF2-40B4-BE49-F238E27FC236}">
-                <a16:creationId xmlns:a16="http://schemas.microsoft.com/office/drawing/2014/main" id="{50DA50F2-D5D0-4243-884E-9AEE6DFB7F21}"/>
+                <a16:creationId xmlns:a16="http://schemas.microsoft.com/office/drawing/2014/main" id="{313D3442-B840-4F88-B874-A9644D65FC97}"/>
               </a:ext>
             </a:extLst>
           </p:cNvPr>
@@ -13987,7 +13987,7 @@
           <p:cNvPr id="25" name="">
             <a:extLst xmlns:a="http://schemas.openxmlformats.org/drawingml/2006/main">
               <a:ext uri="{FF2B5EF4-FFF2-40B4-BE49-F238E27FC236}">
-                <a16:creationId xmlns:a16="http://schemas.microsoft.com/office/drawing/2014/main" id="{0064EE83-1CD2-4BA0-8E76-8183495BADEB}"/>
+                <a16:creationId xmlns:a16="http://schemas.microsoft.com/office/drawing/2014/main" id="{23CBDFDB-1729-4123-ADE2-D88377E0FBAC}"/>
               </a:ext>
             </a:extLst>
           </p:cNvPr>
@@ -14051,7 +14051,7 @@
           <p:cNvPr id="26" name="">
             <a:extLst xmlns:a="http://schemas.openxmlformats.org/drawingml/2006/main">
               <a:ext uri="{FF2B5EF4-FFF2-40B4-BE49-F238E27FC236}">
-                <a16:creationId xmlns:a16="http://schemas.microsoft.com/office/drawing/2014/main" id="{A7D8B83A-D802-4FDA-9251-5152F53CDD9D}"/>
+                <a16:creationId xmlns:a16="http://schemas.microsoft.com/office/drawing/2014/main" id="{D48F3D7A-D99C-4670-8ABC-B49195217C33}"/>
               </a:ext>
             </a:extLst>
           </p:cNvPr>
@@ -14084,7 +14084,7 @@
           <p:cNvPr id="27" name="">
             <a:extLst xmlns:a="http://schemas.openxmlformats.org/drawingml/2006/main">
               <a:ext uri="{FF2B5EF4-FFF2-40B4-BE49-F238E27FC236}">
-                <a16:creationId xmlns:a16="http://schemas.microsoft.com/office/drawing/2014/main" id="{0CD9DB42-C0A0-4A0C-BBBC-473E67E98E62}"/>
+                <a16:creationId xmlns:a16="http://schemas.microsoft.com/office/drawing/2014/main" id="{EDC0847E-62D2-446C-9597-5A9CA0138F47}"/>
               </a:ext>
             </a:extLst>
           </p:cNvPr>
@@ -14119,7 +14119,7 @@
           <p:cNvPr id="28" name="">
             <a:extLst xmlns:a="http://schemas.openxmlformats.org/drawingml/2006/main">
               <a:ext uri="{FF2B5EF4-FFF2-40B4-BE49-F238E27FC236}">
-                <a16:creationId xmlns:a16="http://schemas.microsoft.com/office/drawing/2014/main" id="{00CC5E56-EE10-4B43-8ACD-6AA7939B1007}"/>
+                <a16:creationId xmlns:a16="http://schemas.microsoft.com/office/drawing/2014/main" id="{561FCDFD-8384-4B03-ACB2-74E388EF3F3C}"/>
               </a:ext>
             </a:extLst>
           </p:cNvPr>
@@ -14183,7 +14183,7 @@
           <p:cNvPr id="29" name="">
             <a:extLst xmlns:a="http://schemas.openxmlformats.org/drawingml/2006/main">
               <a:ext uri="{FF2B5EF4-FFF2-40B4-BE49-F238E27FC236}">
-                <a16:creationId xmlns:a16="http://schemas.microsoft.com/office/drawing/2014/main" id="{CC0A3BD7-D0A6-491D-83D3-CED983B837EC}"/>
+                <a16:creationId xmlns:a16="http://schemas.microsoft.com/office/drawing/2014/main" id="{FC215777-CEB6-4BE8-9242-95A25D77C059}"/>
               </a:ext>
             </a:extLst>
           </p:cNvPr>
@@ -14247,7 +14247,7 @@
           <p:cNvPr id="30" name="">
             <a:extLst xmlns:a="http://schemas.openxmlformats.org/drawingml/2006/main">
               <a:ext uri="{FF2B5EF4-FFF2-40B4-BE49-F238E27FC236}">
-                <a16:creationId xmlns:a16="http://schemas.microsoft.com/office/drawing/2014/main" id="{12B4DF3E-DCC1-4108-B5C6-3D4405706BF4}"/>
+                <a16:creationId xmlns:a16="http://schemas.microsoft.com/office/drawing/2014/main" id="{B98BA148-8B50-4E55-B7F7-60441EF6EEAE}"/>
               </a:ext>
             </a:extLst>
           </p:cNvPr>
@@ -14307,7 +14307,7 @@
     </p:spTree>
     <p:extLst>
       <p:ext uri="{BB962C8B-B14F-4D97-AF65-F5344CB8AC3E}">
-        <p14:creationId xmlns:p14="http://schemas.microsoft.com/office/powerpoint/2010/main" val="195839446"/>
+        <p14:creationId xmlns:p14="http://schemas.microsoft.com/office/powerpoint/2010/main" val="1227684482"/>
       </p:ext>
     </p:extLst>
   </p:cSld>
@@ -14338,7 +14338,7 @@
           <p:cNvPr id="1" name="">
             <a:extLst xmlns:a="http://schemas.openxmlformats.org/drawingml/2006/main">
               <a:ext uri="{FF2B5EF4-FFF2-40B4-BE49-F238E27FC236}">
-                <a16:creationId xmlns:a16="http://schemas.microsoft.com/office/drawing/2014/main" id="{355333EF-49BE-4DFC-AB03-7545E4E63C18}"/>
+                <a16:creationId xmlns:a16="http://schemas.microsoft.com/office/drawing/2014/main" id="{7A9CEB31-CBAF-4F24-99BD-46517627F101}"/>
               </a:ext>
             </a:extLst>
           </p:cNvPr>
@@ -14373,7 +14373,7 @@
           <p:cNvPr id="2" name="">
             <a:extLst xmlns:a="http://schemas.openxmlformats.org/drawingml/2006/main">
               <a:ext uri="{FF2B5EF4-FFF2-40B4-BE49-F238E27FC236}">
-                <a16:creationId xmlns:a16="http://schemas.microsoft.com/office/drawing/2014/main" id="{CBADDFB8-8938-4BFB-8134-1ECEE02DF089}"/>
+                <a16:creationId xmlns:a16="http://schemas.microsoft.com/office/drawing/2014/main" id="{81BA01EE-7F2A-44BA-B34F-7A19C129117F}"/>
               </a:ext>
             </a:extLst>
           </p:cNvPr>
@@ -14437,7 +14437,7 @@
           <p:cNvPr id="3" name="">
             <a:extLst xmlns:a="http://schemas.openxmlformats.org/drawingml/2006/main">
               <a:ext uri="{FF2B5EF4-FFF2-40B4-BE49-F238E27FC236}">
-                <a16:creationId xmlns:a16="http://schemas.microsoft.com/office/drawing/2014/main" id="{88605F4F-D604-43FE-AA89-1246B92F22B3}"/>
+                <a16:creationId xmlns:a16="http://schemas.microsoft.com/office/drawing/2014/main" id="{E29A6DFC-D199-49B1-91AF-09411DF08215}"/>
               </a:ext>
             </a:extLst>
           </p:cNvPr>
@@ -14501,7 +14501,7 @@
           <p:cNvPr id="4" name="">
             <a:extLst xmlns:a="http://schemas.openxmlformats.org/drawingml/2006/main">
               <a:ext uri="{FF2B5EF4-FFF2-40B4-BE49-F238E27FC236}">
-                <a16:creationId xmlns:a16="http://schemas.microsoft.com/office/drawing/2014/main" id="{ED4C7B68-A8C6-46EA-9DB1-B5B2C79B8735}"/>
+                <a16:creationId xmlns:a16="http://schemas.microsoft.com/office/drawing/2014/main" id="{5CDDE2E4-1123-434B-B7DB-CC9575F69D5A}"/>
               </a:ext>
             </a:extLst>
           </p:cNvPr>
@@ -14565,7 +14565,7 @@
           <p:cNvPr id="5" name="">
             <a:extLst xmlns:a="http://schemas.openxmlformats.org/drawingml/2006/main">
               <a:ext uri="{FF2B5EF4-FFF2-40B4-BE49-F238E27FC236}">
-                <a16:creationId xmlns:a16="http://schemas.microsoft.com/office/drawing/2014/main" id="{C12C62C2-2BC4-47CE-BCC9-EFD63D81E344}"/>
+                <a16:creationId xmlns:a16="http://schemas.microsoft.com/office/drawing/2014/main" id="{1715B29F-CC48-45C3-A8A1-62A4D88474B1}"/>
               </a:ext>
             </a:extLst>
           </p:cNvPr>
@@ -14629,7 +14629,7 @@
           <p:cNvPr id="6" name="">
             <a:extLst xmlns:a="http://schemas.openxmlformats.org/drawingml/2006/main">
               <a:ext uri="{FF2B5EF4-FFF2-40B4-BE49-F238E27FC236}">
-                <a16:creationId xmlns:a16="http://schemas.microsoft.com/office/drawing/2014/main" id="{D5DDAB96-F9BE-454D-B757-F0658A64832B}"/>
+                <a16:creationId xmlns:a16="http://schemas.microsoft.com/office/drawing/2014/main" id="{13E2E56B-162E-4034-B3FB-84164B3283EF}"/>
               </a:ext>
             </a:extLst>
           </p:cNvPr>
@@ -14693,7 +14693,7 @@
           <p:cNvPr id="7" name="">
             <a:extLst xmlns:a="http://schemas.openxmlformats.org/drawingml/2006/main">
               <a:ext uri="{FF2B5EF4-FFF2-40B4-BE49-F238E27FC236}">
-                <a16:creationId xmlns:a16="http://schemas.microsoft.com/office/drawing/2014/main" id="{C8F24B5E-88F5-4EC5-AC60-0C3F9F746ADB}"/>
+                <a16:creationId xmlns:a16="http://schemas.microsoft.com/office/drawing/2014/main" id="{4263B1F2-974D-4788-B21E-2F2B5FA4A925}"/>
               </a:ext>
             </a:extLst>
           </p:cNvPr>
@@ -14757,7 +14757,7 @@
           <p:cNvPr id="8" name="">
             <a:extLst xmlns:a="http://schemas.openxmlformats.org/drawingml/2006/main">
               <a:ext uri="{FF2B5EF4-FFF2-40B4-BE49-F238E27FC236}">
-                <a16:creationId xmlns:a16="http://schemas.microsoft.com/office/drawing/2014/main" id="{80C78EEB-3783-47B8-8DF7-5919475B40CB}"/>
+                <a16:creationId xmlns:a16="http://schemas.microsoft.com/office/drawing/2014/main" id="{14CBDFE2-CCE7-418C-868C-86CA60FF5FF2}"/>
               </a:ext>
             </a:extLst>
           </p:cNvPr>
@@ -14821,7 +14821,7 @@
           <p:cNvPr id="9" name="">
             <a:extLst xmlns:a="http://schemas.openxmlformats.org/drawingml/2006/main">
               <a:ext uri="{FF2B5EF4-FFF2-40B4-BE49-F238E27FC236}">
-                <a16:creationId xmlns:a16="http://schemas.microsoft.com/office/drawing/2014/main" id="{A03DC774-6995-47E5-B796-198EBDD27988}"/>
+                <a16:creationId xmlns:a16="http://schemas.microsoft.com/office/drawing/2014/main" id="{C397CC02-83BE-4940-8422-FD94FC279179}"/>
               </a:ext>
             </a:extLst>
           </p:cNvPr>
@@ -14854,7 +14854,7 @@
           <p:cNvPr id="10" name="">
             <a:extLst xmlns:a="http://schemas.openxmlformats.org/drawingml/2006/main">
               <a:ext uri="{FF2B5EF4-FFF2-40B4-BE49-F238E27FC236}">
-                <a16:creationId xmlns:a16="http://schemas.microsoft.com/office/drawing/2014/main" id="{A497E946-099B-4C14-8014-1E9449662C96}"/>
+                <a16:creationId xmlns:a16="http://schemas.microsoft.com/office/drawing/2014/main" id="{4EF0EB6D-1ACF-49D7-8C74-643199645035}"/>
               </a:ext>
             </a:extLst>
           </p:cNvPr>
@@ -14889,7 +14889,7 @@
           <p:cNvPr id="11" name="">
             <a:extLst xmlns:a="http://schemas.openxmlformats.org/drawingml/2006/main">
               <a:ext uri="{FF2B5EF4-FFF2-40B4-BE49-F238E27FC236}">
-                <a16:creationId xmlns:a16="http://schemas.microsoft.com/office/drawing/2014/main" id="{8A5C8288-B2DC-4F70-A101-5BB3C168A59E}"/>
+                <a16:creationId xmlns:a16="http://schemas.microsoft.com/office/drawing/2014/main" id="{961FE079-2673-4173-BD45-1CC4692E06D4}"/>
               </a:ext>
             </a:extLst>
           </p:cNvPr>
@@ -14976,7 +14976,7 @@
           <p:cNvPr id="12" name="">
             <a:extLst xmlns:a="http://schemas.openxmlformats.org/drawingml/2006/main">
               <a:ext uri="{FF2B5EF4-FFF2-40B4-BE49-F238E27FC236}">
-                <a16:creationId xmlns:a16="http://schemas.microsoft.com/office/drawing/2014/main" id="{3BA51E9E-EE35-48D8-9740-AA5E758296F9}"/>
+                <a16:creationId xmlns:a16="http://schemas.microsoft.com/office/drawing/2014/main" id="{E0E4C400-E295-4EC8-9103-C524DB944626}"/>
               </a:ext>
             </a:extLst>
           </p:cNvPr>
@@ -15011,7 +15011,7 @@
           <p:cNvPr id="13" name="">
             <a:extLst xmlns:a="http://schemas.openxmlformats.org/drawingml/2006/main">
               <a:ext uri="{FF2B5EF4-FFF2-40B4-BE49-F238E27FC236}">
-                <a16:creationId xmlns:a16="http://schemas.microsoft.com/office/drawing/2014/main" id="{79AAB6AE-673A-4D90-A4DE-1EAA149D5296}"/>
+                <a16:creationId xmlns:a16="http://schemas.microsoft.com/office/drawing/2014/main" id="{BE3246C9-3F52-425E-894B-2B02FD397D9C}"/>
               </a:ext>
             </a:extLst>
           </p:cNvPr>
@@ -15075,7 +15075,7 @@
           <p:cNvPr id="14" name="">
             <a:extLst xmlns:a="http://schemas.openxmlformats.org/drawingml/2006/main">
               <a:ext uri="{FF2B5EF4-FFF2-40B4-BE49-F238E27FC236}">
-                <a16:creationId xmlns:a16="http://schemas.microsoft.com/office/drawing/2014/main" id="{791D018D-7287-49FA-8990-568DB7BC2869}"/>
+                <a16:creationId xmlns:a16="http://schemas.microsoft.com/office/drawing/2014/main" id="{9FF75F51-D65B-4D38-866B-BB4EC2CB723F}"/>
               </a:ext>
             </a:extLst>
           </p:cNvPr>
@@ -15110,7 +15110,7 @@
           <p:cNvPr id="15" name="">
             <a:extLst xmlns:a="http://schemas.openxmlformats.org/drawingml/2006/main">
               <a:ext uri="{FF2B5EF4-FFF2-40B4-BE49-F238E27FC236}">
-                <a16:creationId xmlns:a16="http://schemas.microsoft.com/office/drawing/2014/main" id="{46E3EC87-C0EF-4CCC-B94B-EA2F9FA8CED6}"/>
+                <a16:creationId xmlns:a16="http://schemas.microsoft.com/office/drawing/2014/main" id="{BC6D9C1D-F31C-4BF5-BF7E-5CDCCD6C48C0}"/>
               </a:ext>
             </a:extLst>
           </p:cNvPr>
@@ -15174,7 +15174,7 @@
           <p:cNvPr id="16" name="">
             <a:extLst xmlns:a="http://schemas.openxmlformats.org/drawingml/2006/main">
               <a:ext uri="{FF2B5EF4-FFF2-40B4-BE49-F238E27FC236}">
-                <a16:creationId xmlns:a16="http://schemas.microsoft.com/office/drawing/2014/main" id="{3DDA4FC2-8474-49AB-B49A-FF1E5743EBFD}"/>
+                <a16:creationId xmlns:a16="http://schemas.microsoft.com/office/drawing/2014/main" id="{280BB749-FD59-451C-8A22-06016855C0DD}"/>
               </a:ext>
             </a:extLst>
           </p:cNvPr>
@@ -15207,7 +15207,7 @@
           <p:cNvPr id="17" name="">
             <a:extLst xmlns:a="http://schemas.openxmlformats.org/drawingml/2006/main">
               <a:ext uri="{FF2B5EF4-FFF2-40B4-BE49-F238E27FC236}">
-                <a16:creationId xmlns:a16="http://schemas.microsoft.com/office/drawing/2014/main" id="{8D3D14B5-F3E7-44B3-A7BC-976D08F5EABF}"/>
+                <a16:creationId xmlns:a16="http://schemas.microsoft.com/office/drawing/2014/main" id="{9976DE89-BF03-4E81-8961-ACE68A7EDB94}"/>
               </a:ext>
             </a:extLst>
           </p:cNvPr>
@@ -15242,7 +15242,7 @@
           <p:cNvPr id="18" name="">
             <a:extLst xmlns:a="http://schemas.openxmlformats.org/drawingml/2006/main">
               <a:ext uri="{FF2B5EF4-FFF2-40B4-BE49-F238E27FC236}">
-                <a16:creationId xmlns:a16="http://schemas.microsoft.com/office/drawing/2014/main" id="{51AC8E2D-EE7A-473B-9B96-ECA700D65F8B}"/>
+                <a16:creationId xmlns:a16="http://schemas.microsoft.com/office/drawing/2014/main" id="{E7D24B4F-DD86-473B-B24D-AC4976AD9F1E}"/>
               </a:ext>
             </a:extLst>
           </p:cNvPr>
@@ -15329,7 +15329,7 @@
           <p:cNvPr id="19" name="">
             <a:extLst xmlns:a="http://schemas.openxmlformats.org/drawingml/2006/main">
               <a:ext uri="{FF2B5EF4-FFF2-40B4-BE49-F238E27FC236}">
-                <a16:creationId xmlns:a16="http://schemas.microsoft.com/office/drawing/2014/main" id="{553C4F2C-BC0E-40F7-BA32-CE75301BC673}"/>
+                <a16:creationId xmlns:a16="http://schemas.microsoft.com/office/drawing/2014/main" id="{AB901918-0B76-4566-B959-E3840DD70A4D}"/>
               </a:ext>
             </a:extLst>
           </p:cNvPr>
@@ -15364,7 +15364,7 @@
           <p:cNvPr id="20" name="">
             <a:extLst xmlns:a="http://schemas.openxmlformats.org/drawingml/2006/main">
               <a:ext uri="{FF2B5EF4-FFF2-40B4-BE49-F238E27FC236}">
-                <a16:creationId xmlns:a16="http://schemas.microsoft.com/office/drawing/2014/main" id="{2E7679E4-0D92-471D-AC20-E90981CB3F96}"/>
+                <a16:creationId xmlns:a16="http://schemas.microsoft.com/office/drawing/2014/main" id="{C38FEF97-C1EC-4AF6-B082-03B83DBD6FA0}"/>
               </a:ext>
             </a:extLst>
           </p:cNvPr>
@@ -15428,7 +15428,7 @@
           <p:cNvPr id="21" name="">
             <a:extLst xmlns:a="http://schemas.openxmlformats.org/drawingml/2006/main">
               <a:ext uri="{FF2B5EF4-FFF2-40B4-BE49-F238E27FC236}">
-                <a16:creationId xmlns:a16="http://schemas.microsoft.com/office/drawing/2014/main" id="{C12922C4-29DD-42AB-9355-68478F0710CE}"/>
+                <a16:creationId xmlns:a16="http://schemas.microsoft.com/office/drawing/2014/main" id="{888E7A23-0F64-4F42-A2F7-BC8918B88D82}"/>
               </a:ext>
             </a:extLst>
           </p:cNvPr>
@@ -15463,7 +15463,7 @@
           <p:cNvPr id="22" name="">
             <a:extLst xmlns:a="http://schemas.openxmlformats.org/drawingml/2006/main">
               <a:ext uri="{FF2B5EF4-FFF2-40B4-BE49-F238E27FC236}">
-                <a16:creationId xmlns:a16="http://schemas.microsoft.com/office/drawing/2014/main" id="{FB137AFD-A57D-4504-AE6D-1C89FC61FB13}"/>
+                <a16:creationId xmlns:a16="http://schemas.microsoft.com/office/drawing/2014/main" id="{A68BE16A-DDC9-4A83-B317-6DEE10EE5E07}"/>
               </a:ext>
             </a:extLst>
           </p:cNvPr>
@@ -15527,7 +15527,7 @@
           <p:cNvPr id="23" name="">
             <a:extLst xmlns:a="http://schemas.openxmlformats.org/drawingml/2006/main">
               <a:ext uri="{FF2B5EF4-FFF2-40B4-BE49-F238E27FC236}">
-                <a16:creationId xmlns:a16="http://schemas.microsoft.com/office/drawing/2014/main" id="{0B581053-78DB-4D75-92B7-48302F43B2F5}"/>
+                <a16:creationId xmlns:a16="http://schemas.microsoft.com/office/drawing/2014/main" id="{2CCF2418-1FCE-4A6F-BD00-9F63A526695E}"/>
               </a:ext>
             </a:extLst>
           </p:cNvPr>
@@ -15560,7 +15560,7 @@
           <p:cNvPr id="24" name="">
             <a:extLst xmlns:a="http://schemas.openxmlformats.org/drawingml/2006/main">
               <a:ext uri="{FF2B5EF4-FFF2-40B4-BE49-F238E27FC236}">
-                <a16:creationId xmlns:a16="http://schemas.microsoft.com/office/drawing/2014/main" id="{721092A6-0523-495E-B16A-862BD5C65633}"/>
+                <a16:creationId xmlns:a16="http://schemas.microsoft.com/office/drawing/2014/main" id="{3ACCE544-33BF-43C9-B687-E88A4AB2F451}"/>
               </a:ext>
             </a:extLst>
           </p:cNvPr>
@@ -15595,7 +15595,7 @@
           <p:cNvPr id="25" name="">
             <a:extLst xmlns:a="http://schemas.openxmlformats.org/drawingml/2006/main">
               <a:ext uri="{FF2B5EF4-FFF2-40B4-BE49-F238E27FC236}">
-                <a16:creationId xmlns:a16="http://schemas.microsoft.com/office/drawing/2014/main" id="{7737AB21-1239-47C6-B953-897516D2FD4F}"/>
+                <a16:creationId xmlns:a16="http://schemas.microsoft.com/office/drawing/2014/main" id="{78BBC56D-E313-4359-ADCF-52CF85981729}"/>
               </a:ext>
             </a:extLst>
           </p:cNvPr>
@@ -15682,7 +15682,7 @@
           <p:cNvPr id="26" name="">
             <a:extLst xmlns:a="http://schemas.openxmlformats.org/drawingml/2006/main">
               <a:ext uri="{FF2B5EF4-FFF2-40B4-BE49-F238E27FC236}">
-                <a16:creationId xmlns:a16="http://schemas.microsoft.com/office/drawing/2014/main" id="{1A77A285-B321-4544-A721-A8615589590B}"/>
+                <a16:creationId xmlns:a16="http://schemas.microsoft.com/office/drawing/2014/main" id="{4010DC91-C49A-4DF8-ADA3-AADBA50CDF1C}"/>
               </a:ext>
             </a:extLst>
           </p:cNvPr>
@@ -15717,7 +15717,7 @@
           <p:cNvPr id="27" name="">
             <a:extLst xmlns:a="http://schemas.openxmlformats.org/drawingml/2006/main">
               <a:ext uri="{FF2B5EF4-FFF2-40B4-BE49-F238E27FC236}">
-                <a16:creationId xmlns:a16="http://schemas.microsoft.com/office/drawing/2014/main" id="{D46FAD7C-B228-42A4-A81A-07CD14C93F6A}"/>
+                <a16:creationId xmlns:a16="http://schemas.microsoft.com/office/drawing/2014/main" id="{AA598E61-DDE3-43FD-A385-B9FDCDBD5173}"/>
               </a:ext>
             </a:extLst>
           </p:cNvPr>
@@ -15781,7 +15781,7 @@
           <p:cNvPr id="28" name="">
             <a:extLst xmlns:a="http://schemas.openxmlformats.org/drawingml/2006/main">
               <a:ext uri="{FF2B5EF4-FFF2-40B4-BE49-F238E27FC236}">
-                <a16:creationId xmlns:a16="http://schemas.microsoft.com/office/drawing/2014/main" id="{3CB06E4C-9144-4D01-84F2-4AA048FBE0C8}"/>
+                <a16:creationId xmlns:a16="http://schemas.microsoft.com/office/drawing/2014/main" id="{B3BE9740-C868-49F9-A0B0-427F3BDCF19D}"/>
               </a:ext>
             </a:extLst>
           </p:cNvPr>
@@ -15816,7 +15816,7 @@
           <p:cNvPr id="29" name="">
             <a:extLst xmlns:a="http://schemas.openxmlformats.org/drawingml/2006/main">
               <a:ext uri="{FF2B5EF4-FFF2-40B4-BE49-F238E27FC236}">
-                <a16:creationId xmlns:a16="http://schemas.microsoft.com/office/drawing/2014/main" id="{3D4DD059-154D-4DBF-AD9E-4A8EBEC8A346}"/>
+                <a16:creationId xmlns:a16="http://schemas.microsoft.com/office/drawing/2014/main" id="{7066D026-C64D-4582-8A57-5719E8BDEBF9}"/>
               </a:ext>
             </a:extLst>
           </p:cNvPr>
@@ -15880,7 +15880,7 @@
           <p:cNvPr id="30" name="">
             <a:extLst xmlns:a="http://schemas.openxmlformats.org/drawingml/2006/main">
               <a:ext uri="{FF2B5EF4-FFF2-40B4-BE49-F238E27FC236}">
-                <a16:creationId xmlns:a16="http://schemas.microsoft.com/office/drawing/2014/main" id="{DCF350F3-DFFA-41DD-999E-521BFBC39E40}"/>
+                <a16:creationId xmlns:a16="http://schemas.microsoft.com/office/drawing/2014/main" id="{54DAC199-3AD8-4C3E-89DD-9C07047C7F4C}"/>
               </a:ext>
             </a:extLst>
           </p:cNvPr>
@@ -15913,7 +15913,7 @@
           <p:cNvPr id="31" name="">
             <a:extLst xmlns:a="http://schemas.openxmlformats.org/drawingml/2006/main">
               <a:ext uri="{FF2B5EF4-FFF2-40B4-BE49-F238E27FC236}">
-                <a16:creationId xmlns:a16="http://schemas.microsoft.com/office/drawing/2014/main" id="{8781C67A-9E69-4D11-867A-21DD4EEA6E19}"/>
+                <a16:creationId xmlns:a16="http://schemas.microsoft.com/office/drawing/2014/main" id="{FA767CC0-C204-498B-8449-45700A8AA16E}"/>
               </a:ext>
             </a:extLst>
           </p:cNvPr>
@@ -15948,7 +15948,7 @@
           <p:cNvPr id="32" name="">
             <a:extLst xmlns:a="http://schemas.openxmlformats.org/drawingml/2006/main">
               <a:ext uri="{FF2B5EF4-FFF2-40B4-BE49-F238E27FC236}">
-                <a16:creationId xmlns:a16="http://schemas.microsoft.com/office/drawing/2014/main" id="{B3023EF4-9C59-4D5B-AB96-64F9EF498190}"/>
+                <a16:creationId xmlns:a16="http://schemas.microsoft.com/office/drawing/2014/main" id="{67337664-1671-4ABB-AE0C-F8711EBFECE5}"/>
               </a:ext>
             </a:extLst>
           </p:cNvPr>
@@ -16035,7 +16035,7 @@
           <p:cNvPr id="33" name="">
             <a:extLst xmlns:a="http://schemas.openxmlformats.org/drawingml/2006/main">
               <a:ext uri="{FF2B5EF4-FFF2-40B4-BE49-F238E27FC236}">
-                <a16:creationId xmlns:a16="http://schemas.microsoft.com/office/drawing/2014/main" id="{39F34415-D49A-4037-BD74-F1C95500BA15}"/>
+                <a16:creationId xmlns:a16="http://schemas.microsoft.com/office/drawing/2014/main" id="{AB8E07B7-0499-442A-9A7F-6814BEC16E9E}"/>
               </a:ext>
             </a:extLst>
           </p:cNvPr>
@@ -16070,7 +16070,7 @@
           <p:cNvPr id="34" name="">
             <a:extLst xmlns:a="http://schemas.openxmlformats.org/drawingml/2006/main">
               <a:ext uri="{FF2B5EF4-FFF2-40B4-BE49-F238E27FC236}">
-                <a16:creationId xmlns:a16="http://schemas.microsoft.com/office/drawing/2014/main" id="{FE441513-C0C8-4D57-B89F-F4F36D09BC86}"/>
+                <a16:creationId xmlns:a16="http://schemas.microsoft.com/office/drawing/2014/main" id="{F3903184-1ED1-42EA-829C-9B442AEBC065}"/>
               </a:ext>
             </a:extLst>
           </p:cNvPr>
@@ -16134,7 +16134,7 @@
           <p:cNvPr id="35" name="">
             <a:extLst xmlns:a="http://schemas.openxmlformats.org/drawingml/2006/main">
               <a:ext uri="{FF2B5EF4-FFF2-40B4-BE49-F238E27FC236}">
-                <a16:creationId xmlns:a16="http://schemas.microsoft.com/office/drawing/2014/main" id="{3F7D9E87-4167-47D0-8ED0-8DA74DC70CDF}"/>
+                <a16:creationId xmlns:a16="http://schemas.microsoft.com/office/drawing/2014/main" id="{5AFACE84-4583-4431-98C0-22DCB2FDCAAB}"/>
               </a:ext>
             </a:extLst>
           </p:cNvPr>
@@ -16169,7 +16169,7 @@
           <p:cNvPr id="36" name="">
             <a:extLst xmlns:a="http://schemas.openxmlformats.org/drawingml/2006/main">
               <a:ext uri="{FF2B5EF4-FFF2-40B4-BE49-F238E27FC236}">
-                <a16:creationId xmlns:a16="http://schemas.microsoft.com/office/drawing/2014/main" id="{83E58534-6B04-477B-9619-BA0D4D1646B3}"/>
+                <a16:creationId xmlns:a16="http://schemas.microsoft.com/office/drawing/2014/main" id="{577E9717-4769-4C9A-9265-1E97E4F7961F}"/>
               </a:ext>
             </a:extLst>
           </p:cNvPr>
@@ -16233,7 +16233,7 @@
           <p:cNvPr id="37" name="">
             <a:extLst xmlns:a="http://schemas.openxmlformats.org/drawingml/2006/main">
               <a:ext uri="{FF2B5EF4-FFF2-40B4-BE49-F238E27FC236}">
-                <a16:creationId xmlns:a16="http://schemas.microsoft.com/office/drawing/2014/main" id="{45AC7291-DBF9-47AD-BBCB-599BACF557B2}"/>
+                <a16:creationId xmlns:a16="http://schemas.microsoft.com/office/drawing/2014/main" id="{C06E35CC-CBCE-4A8C-AC6B-44FE933E3151}"/>
               </a:ext>
             </a:extLst>
           </p:cNvPr>
@@ -16268,7 +16268,7 @@
           <p:cNvPr id="38" name="">
             <a:extLst xmlns:a="http://schemas.openxmlformats.org/drawingml/2006/main">
               <a:ext uri="{FF2B5EF4-FFF2-40B4-BE49-F238E27FC236}">
-                <a16:creationId xmlns:a16="http://schemas.microsoft.com/office/drawing/2014/main" id="{B4BAB524-E44E-47E2-9849-3448DB361745}"/>
+                <a16:creationId xmlns:a16="http://schemas.microsoft.com/office/drawing/2014/main" id="{BCDE0FF1-B2E8-4C65-8B67-5D5A3A712BC4}"/>
               </a:ext>
             </a:extLst>
           </p:cNvPr>
@@ -16330,7 +16330,7 @@
     </p:spTree>
     <p:extLst>
       <p:ext uri="{BB962C8B-B14F-4D97-AF65-F5344CB8AC3E}">
-        <p14:creationId xmlns:p14="http://schemas.microsoft.com/office/powerpoint/2010/main" val="1296871681"/>
+        <p14:creationId xmlns:p14="http://schemas.microsoft.com/office/powerpoint/2010/main" val="1116633312"/>
       </p:ext>
     </p:extLst>
   </p:cSld>
@@ -16361,7 +16361,7 @@
           <p:cNvPr id="1" name="">
             <a:extLst xmlns:a="http://schemas.openxmlformats.org/drawingml/2006/main">
               <a:ext uri="{FF2B5EF4-FFF2-40B4-BE49-F238E27FC236}">
-                <a16:creationId xmlns:a16="http://schemas.microsoft.com/office/drawing/2014/main" id="{C518D5CF-AA29-40D5-8D39-CAEDA3DB8666}"/>
+                <a16:creationId xmlns:a16="http://schemas.microsoft.com/office/drawing/2014/main" id="{1771A373-BDE4-4F3E-B8CF-08139092ACFD}"/>
               </a:ext>
             </a:extLst>
           </p:cNvPr>
@@ -16396,7 +16396,7 @@
           <p:cNvPr id="2" name="">
             <a:extLst xmlns:a="http://schemas.openxmlformats.org/drawingml/2006/main">
               <a:ext uri="{FF2B5EF4-FFF2-40B4-BE49-F238E27FC236}">
-                <a16:creationId xmlns:a16="http://schemas.microsoft.com/office/drawing/2014/main" id="{04AF4C22-6A50-4BBE-B68C-1EBBAFC05BA3}"/>
+                <a16:creationId xmlns:a16="http://schemas.microsoft.com/office/drawing/2014/main" id="{05ABACCD-4D6E-44F1-88DF-342D8E46B0F1}"/>
               </a:ext>
             </a:extLst>
           </p:cNvPr>
@@ -16460,7 +16460,7 @@
           <p:cNvPr id="3" name="">
             <a:extLst xmlns:a="http://schemas.openxmlformats.org/drawingml/2006/main">
               <a:ext uri="{FF2B5EF4-FFF2-40B4-BE49-F238E27FC236}">
-                <a16:creationId xmlns:a16="http://schemas.microsoft.com/office/drawing/2014/main" id="{DA4D67BC-33F2-4A2C-A77B-2EE6F50DDEE8}"/>
+                <a16:creationId xmlns:a16="http://schemas.microsoft.com/office/drawing/2014/main" id="{4E03BA1E-DF63-4CD7-84CB-EB9B9DBC8CCB}"/>
               </a:ext>
             </a:extLst>
           </p:cNvPr>
@@ -16524,7 +16524,7 @@
           <p:cNvPr id="4" name="">
             <a:extLst xmlns:a="http://schemas.openxmlformats.org/drawingml/2006/main">
               <a:ext uri="{FF2B5EF4-FFF2-40B4-BE49-F238E27FC236}">
-                <a16:creationId xmlns:a16="http://schemas.microsoft.com/office/drawing/2014/main" id="{3026EFCF-DC93-4ECB-9AE4-A0CC9DA7EE8C}"/>
+                <a16:creationId xmlns:a16="http://schemas.microsoft.com/office/drawing/2014/main" id="{B086A3AC-D5F9-43CD-B4E3-9F3887093BC0}"/>
               </a:ext>
             </a:extLst>
           </p:cNvPr>
@@ -16578,7 +16578,7 @@
                 <a:ea typeface="PingFang SC"/>
                 <a:cs typeface="PingFang SC"/>
               </a:rPr>
-              <a:t>BigLab-A：AI4OSE Lab1 基础训练</a:t>
+              <a:t>BigLab-A：ArceOS 小实验与系统能力训练</a:t>
             </a:r>
           </a:p>
         </p:txBody>
@@ -16588,7 +16588,7 @@
           <p:cNvPr id="5" name="">
             <a:extLst xmlns:a="http://schemas.openxmlformats.org/drawingml/2006/main">
               <a:ext uri="{FF2B5EF4-FFF2-40B4-BE49-F238E27FC236}">
-                <a16:creationId xmlns:a16="http://schemas.microsoft.com/office/drawing/2014/main" id="{DD2FBD6D-FA41-4A8F-91FF-ECF83E0DC42D}"/>
+                <a16:creationId xmlns:a16="http://schemas.microsoft.com/office/drawing/2014/main" id="{BB4E9E8B-5DDF-4C96-B393-B7051F8309DB}"/>
               </a:ext>
             </a:extLst>
           </p:cNvPr>
@@ -16642,7 +16642,7 @@
                 <a:ea typeface="PingFang SC"/>
                 <a:cs typeface="PingFang SC"/>
               </a:rPr>
-              <a:t>BigLab-A 是前 7 周的基础训练，目标是把 OS 概念、Rust 工程和可复现实验交付串起来。</a:t>
+              <a:t>BigLab-A 里我主要完成 tg-arceos-tutorial/test 分支上的 ArceOS 小实验，从单个组件逐步走到应用、文件系统和虚拟化路径。</a:t>
             </a:r>
           </a:p>
         </p:txBody>
@@ -16652,19 +16652,19 @@
           <p:cNvPr id="6" name="">
             <a:extLst xmlns:a="http://schemas.openxmlformats.org/drawingml/2006/main">
               <a:ext uri="{FF2B5EF4-FFF2-40B4-BE49-F238E27FC236}">
-                <a16:creationId xmlns:a16="http://schemas.microsoft.com/office/drawing/2014/main" id="{750E1180-7EF0-4EA1-9901-31BD2064C90A}"/>
-              </a:ext>
-            </a:extLst>
-          </p:cNvPr>
-          <p:cNvSpPr>
-            <a:spLocks xmlns:a="http://schemas.openxmlformats.org/drawingml/2006/main" noGrp="1"/>
-          </p:cNvSpPr>
-          <p:nvPr/>
-        </p:nvSpPr>
-        <p:spPr>
-          <a:xfrm xmlns:a="http://schemas.openxmlformats.org/drawingml/2006/main">
-            <a:off x="704850" y="2133600"/>
-            <a:ext cx="3238500" cy="2381250"/>
+                <a16:creationId xmlns:a16="http://schemas.microsoft.com/office/drawing/2014/main" id="{0AEF31BF-8A80-47EE-9F10-BAFC1CACB1FD}"/>
+              </a:ext>
+            </a:extLst>
+          </p:cNvPr>
+          <p:cNvSpPr>
+            <a:spLocks xmlns:a="http://schemas.openxmlformats.org/drawingml/2006/main" noGrp="1"/>
+          </p:cNvSpPr>
+          <p:nvPr/>
+        </p:nvSpPr>
+        <p:spPr>
+          <a:xfrm xmlns:a="http://schemas.openxmlformats.org/drawingml/2006/main">
+            <a:off x="704850" y="2076450"/>
+            <a:ext cx="4953000" cy="1638300"/>
           </a:xfrm>
           <a:prstGeom xmlns:a="http://schemas.openxmlformats.org/drawingml/2006/main" prst="rect">
             <a:avLst/>
@@ -16685,19 +16685,19 @@
           <p:cNvPr id="7" name="">
             <a:extLst xmlns:a="http://schemas.openxmlformats.org/drawingml/2006/main">
               <a:ext uri="{FF2B5EF4-FFF2-40B4-BE49-F238E27FC236}">
-                <a16:creationId xmlns:a16="http://schemas.microsoft.com/office/drawing/2014/main" id="{C0513E98-ED28-4361-9EE2-C901C7D2BFDA}"/>
-              </a:ext>
-            </a:extLst>
-          </p:cNvPr>
-          <p:cNvSpPr>
-            <a:spLocks xmlns:a="http://schemas.openxmlformats.org/drawingml/2006/main" noGrp="1"/>
-          </p:cNvSpPr>
-          <p:nvPr/>
-        </p:nvSpPr>
-        <p:spPr>
-          <a:xfrm xmlns:a="http://schemas.openxmlformats.org/drawingml/2006/main">
-            <a:off x="704850" y="2133600"/>
-            <a:ext cx="47625" cy="2381250"/>
+                <a16:creationId xmlns:a16="http://schemas.microsoft.com/office/drawing/2014/main" id="{07F93A17-F45D-4FA9-9EC1-8DCDCA63DD3A}"/>
+              </a:ext>
+            </a:extLst>
+          </p:cNvPr>
+          <p:cNvSpPr>
+            <a:spLocks xmlns:a="http://schemas.openxmlformats.org/drawingml/2006/main" noGrp="1"/>
+          </p:cNvSpPr>
+          <p:nvPr/>
+        </p:nvSpPr>
+        <p:spPr>
+          <a:xfrm xmlns:a="http://schemas.openxmlformats.org/drawingml/2006/main">
+            <a:off x="704850" y="2076450"/>
+            <a:ext cx="47625" cy="1638300"/>
           </a:xfrm>
           <a:prstGeom xmlns:a="http://schemas.openxmlformats.org/drawingml/2006/main" prst="rect">
             <a:avLst/>
@@ -16720,19 +16720,19 @@
           <p:cNvPr id="8" name="">
             <a:extLst xmlns:a="http://schemas.openxmlformats.org/drawingml/2006/main">
               <a:ext uri="{FF2B5EF4-FFF2-40B4-BE49-F238E27FC236}">
-                <a16:creationId xmlns:a16="http://schemas.microsoft.com/office/drawing/2014/main" id="{6E4B1E08-4EA8-473F-980A-233AC45D4399}"/>
-              </a:ext>
-            </a:extLst>
-          </p:cNvPr>
-          <p:cNvSpPr>
-            <a:spLocks xmlns:a="http://schemas.openxmlformats.org/drawingml/2006/main" noGrp="1"/>
-          </p:cNvSpPr>
-          <p:nvPr/>
-        </p:nvSpPr>
-        <p:spPr>
-          <a:xfrm xmlns:a="http://schemas.openxmlformats.org/drawingml/2006/main">
-            <a:off x="933450" y="2343150"/>
-            <a:ext cx="2781300" cy="304800"/>
+                <a16:creationId xmlns:a16="http://schemas.microsoft.com/office/drawing/2014/main" id="{45DF5E8A-C7FA-47D0-A415-A3898CBF5EB3}"/>
+              </a:ext>
+            </a:extLst>
+          </p:cNvPr>
+          <p:cNvSpPr>
+            <a:spLocks xmlns:a="http://schemas.openxmlformats.org/drawingml/2006/main" noGrp="1"/>
+          </p:cNvSpPr>
+          <p:nvPr/>
+        </p:nvSpPr>
+        <p:spPr>
+          <a:xfrm xmlns:a="http://schemas.openxmlformats.org/drawingml/2006/main">
+            <a:off x="933450" y="2286000"/>
+            <a:ext cx="4495800" cy="304800"/>
           </a:xfrm>
           <a:prstGeom xmlns:a="http://schemas.openxmlformats.org/drawingml/2006/main" prst="rect">
             <a:avLst/>
@@ -16774,7 +16774,7 @@
                 <a:ea typeface="PingFang SC"/>
                 <a:cs typeface="PingFang SC"/>
               </a:rPr>
-              <a:t>任务结构</a:t>
+              <a:t>基础 OS app</a:t>
             </a:r>
           </a:p>
         </p:txBody>
@@ -16784,19 +16784,19 @@
           <p:cNvPr id="9" name="">
             <a:extLst xmlns:a="http://schemas.openxmlformats.org/drawingml/2006/main">
               <a:ext uri="{FF2B5EF4-FFF2-40B4-BE49-F238E27FC236}">
-                <a16:creationId xmlns:a16="http://schemas.microsoft.com/office/drawing/2014/main" id="{91EEBF6A-F5B5-4FE1-AC32-B97D11D55F63}"/>
-              </a:ext>
-            </a:extLst>
-          </p:cNvPr>
-          <p:cNvSpPr>
-            <a:spLocks xmlns:a="http://schemas.openxmlformats.org/drawingml/2006/main" noGrp="1"/>
-          </p:cNvSpPr>
-          <p:nvPr/>
-        </p:nvSpPr>
-        <p:spPr>
-          <a:xfrm xmlns:a="http://schemas.openxmlformats.org/drawingml/2006/main">
-            <a:off x="933450" y="2762250"/>
-            <a:ext cx="2781300" cy="1638300"/>
+                <a16:creationId xmlns:a16="http://schemas.microsoft.com/office/drawing/2014/main" id="{0B8246F3-B69D-4D96-906F-89FC3DDE7A3C}"/>
+              </a:ext>
+            </a:extLst>
+          </p:cNvPr>
+          <p:cNvSpPr>
+            <a:spLocks xmlns:a="http://schemas.openxmlformats.org/drawingml/2006/main" noGrp="1"/>
+          </p:cNvSpPr>
+          <p:nvPr/>
+        </p:nvSpPr>
+        <p:spPr>
+          <a:xfrm xmlns:a="http://schemas.openxmlformats.org/drawingml/2006/main">
+            <a:off x="933450" y="2705100"/>
+            <a:ext cx="4495800" cy="895350"/>
           </a:xfrm>
           <a:prstGeom xmlns:a="http://schemas.openxmlformats.org/drawingml/2006/main" prst="rect">
             <a:avLst/>
@@ -16838,7 +16838,7 @@
                 <a:ea typeface="PingFang SC"/>
                 <a:cs typeface="PingFang SC"/>
               </a:rPr>
-              <a:t>Task 1：5 个基础小实验全部完成。</a:t>
+              <a:t>完成 app-helloworld / app-collections</a:t>
             </a:r>
           </a:p>
           <a:p xmlns:a="http://schemas.openxmlformats.org/drawingml/2006/main">
@@ -16861,7 +16861,12 @@
                 <a:ea typeface="PingFang SC"/>
                 <a:cs typeface="PingFang SC"/>
               </a:rPr>
-              <a:t>Task 2：至少完成 2 个个性化实验。</a:t>
+              <a:t>完成 exercise-printcolor / hashmap / altalloc</a:t>
+            </a:r>
+          </a:p>
+          <a:p xmlns:a="http://schemas.openxmlformats.org/drawingml/2006/main">
+            <a:r>
+              <a:t/>
             </a:r>
           </a:p>
           <a:p xmlns:a="http://schemas.openxmlformats.org/drawingml/2006/main">
@@ -16884,30 +16889,7 @@
                 <a:ea typeface="PingFang SC"/>
                 <a:cs typeface="PingFang SC"/>
               </a:rPr>
-              <a:t>Task 3：至少完成 3 个扩展实验，且包含 T3L1 与 T3L8。</a:t>
-            </a:r>
-          </a:p>
-          <a:p xmlns:a="http://schemas.openxmlformats.org/drawingml/2006/main">
-            <a:pPr algn="l">
-              <a:defRPr sz="1275" b="0">
-                <a:solidFill>
-                  <a:srgbClr val="5B6472"/>
-                </a:solidFill>
-                <a:latin typeface="PingFang SC"/>
-                <a:ea typeface="PingFang SC"/>
-                <a:cs typeface="PingFang SC"/>
-              </a:defRPr>
-            </a:pPr>
-            <a:r>
-              <a:rPr sz="1275" b="0">
-                <a:solidFill>
-                  <a:srgbClr val="5B6472"/>
-                </a:solidFill>
-                <a:latin typeface="PingFang SC"/>
-                <a:ea typeface="PingFang SC"/>
-                <a:cs typeface="PingFang SC"/>
-              </a:rPr>
-              <a:t>Task 4：在完成总结报告后申请检查。</a:t>
+              <a:t>熟悉 no_std Rust、axstd、allocator、集合结构和 QEMU 启动调试。</a:t>
             </a:r>
           </a:p>
         </p:txBody>
@@ -16917,19 +16899,19 @@
           <p:cNvPr id="10" name="">
             <a:extLst xmlns:a="http://schemas.openxmlformats.org/drawingml/2006/main">
               <a:ext uri="{FF2B5EF4-FFF2-40B4-BE49-F238E27FC236}">
-                <a16:creationId xmlns:a16="http://schemas.microsoft.com/office/drawing/2014/main" id="{8C4293D0-1006-495A-B610-60FD816B1C3A}"/>
-              </a:ext>
-            </a:extLst>
-          </p:cNvPr>
-          <p:cNvSpPr>
-            <a:spLocks xmlns:a="http://schemas.openxmlformats.org/drawingml/2006/main" noGrp="1"/>
-          </p:cNvSpPr>
-          <p:nvPr/>
-        </p:nvSpPr>
-        <p:spPr>
-          <a:xfrm xmlns:a="http://schemas.openxmlformats.org/drawingml/2006/main">
-            <a:off x="4476750" y="2133600"/>
-            <a:ext cx="3238500" cy="2381250"/>
+                <a16:creationId xmlns:a16="http://schemas.microsoft.com/office/drawing/2014/main" id="{5134B238-B084-498F-920C-18998E315702}"/>
+              </a:ext>
+            </a:extLst>
+          </p:cNvPr>
+          <p:cNvSpPr>
+            <a:spLocks xmlns:a="http://schemas.openxmlformats.org/drawingml/2006/main" noGrp="1"/>
+          </p:cNvSpPr>
+          <p:nvPr/>
+        </p:nvSpPr>
+        <p:spPr>
+          <a:xfrm xmlns:a="http://schemas.openxmlformats.org/drawingml/2006/main">
+            <a:off x="6534150" y="2076450"/>
+            <a:ext cx="4953000" cy="1638300"/>
           </a:xfrm>
           <a:prstGeom xmlns:a="http://schemas.openxmlformats.org/drawingml/2006/main" prst="rect">
             <a:avLst/>
@@ -16950,19 +16932,19 @@
           <p:cNvPr id="11" name="">
             <a:extLst xmlns:a="http://schemas.openxmlformats.org/drawingml/2006/main">
               <a:ext uri="{FF2B5EF4-FFF2-40B4-BE49-F238E27FC236}">
-                <a16:creationId xmlns:a16="http://schemas.microsoft.com/office/drawing/2014/main" id="{BA3340B7-D23F-4D21-B02C-9E8DF775B668}"/>
-              </a:ext>
-            </a:extLst>
-          </p:cNvPr>
-          <p:cNvSpPr>
-            <a:spLocks xmlns:a="http://schemas.openxmlformats.org/drawingml/2006/main" noGrp="1"/>
-          </p:cNvSpPr>
-          <p:nvPr/>
-        </p:nvSpPr>
-        <p:spPr>
-          <a:xfrm xmlns:a="http://schemas.openxmlformats.org/drawingml/2006/main">
-            <a:off x="4476750" y="2133600"/>
-            <a:ext cx="47625" cy="2381250"/>
+                <a16:creationId xmlns:a16="http://schemas.microsoft.com/office/drawing/2014/main" id="{441D1510-A715-49DB-9EA3-AD36825339E7}"/>
+              </a:ext>
+            </a:extLst>
+          </p:cNvPr>
+          <p:cNvSpPr>
+            <a:spLocks xmlns:a="http://schemas.openxmlformats.org/drawingml/2006/main" noGrp="1"/>
+          </p:cNvSpPr>
+          <p:nvPr/>
+        </p:nvSpPr>
+        <p:spPr>
+          <a:xfrm xmlns:a="http://schemas.openxmlformats.org/drawingml/2006/main">
+            <a:off x="6534150" y="2076450"/>
+            <a:ext cx="47625" cy="1638300"/>
           </a:xfrm>
           <a:prstGeom xmlns:a="http://schemas.openxmlformats.org/drawingml/2006/main" prst="rect">
             <a:avLst/>
@@ -16985,19 +16967,19 @@
           <p:cNvPr id="12" name="">
             <a:extLst xmlns:a="http://schemas.openxmlformats.org/drawingml/2006/main">
               <a:ext uri="{FF2B5EF4-FFF2-40B4-BE49-F238E27FC236}">
-                <a16:creationId xmlns:a16="http://schemas.microsoft.com/office/drawing/2014/main" id="{60561E7B-1ADB-4964-9674-2F2B99D68E26}"/>
-              </a:ext>
-            </a:extLst>
-          </p:cNvPr>
-          <p:cNvSpPr>
-            <a:spLocks xmlns:a="http://schemas.openxmlformats.org/drawingml/2006/main" noGrp="1"/>
-          </p:cNvSpPr>
-          <p:nvPr/>
-        </p:nvSpPr>
-        <p:spPr>
-          <a:xfrm xmlns:a="http://schemas.openxmlformats.org/drawingml/2006/main">
-            <a:off x="4705350" y="2343150"/>
-            <a:ext cx="2781300" cy="304800"/>
+                <a16:creationId xmlns:a16="http://schemas.microsoft.com/office/drawing/2014/main" id="{B8413507-92C1-4464-9462-0E5219C5CFEB}"/>
+              </a:ext>
+            </a:extLst>
+          </p:cNvPr>
+          <p:cNvSpPr>
+            <a:spLocks xmlns:a="http://schemas.openxmlformats.org/drawingml/2006/main" noGrp="1"/>
+          </p:cNvSpPr>
+          <p:nvPr/>
+        </p:nvSpPr>
+        <p:spPr>
+          <a:xfrm xmlns:a="http://schemas.openxmlformats.org/drawingml/2006/main">
+            <a:off x="6762750" y="2286000"/>
+            <a:ext cx="4495800" cy="304800"/>
           </a:xfrm>
           <a:prstGeom xmlns:a="http://schemas.openxmlformats.org/drawingml/2006/main" prst="rect">
             <a:avLst/>
@@ -17039,7 +17021,7 @@
                 <a:ea typeface="PingFang SC"/>
                 <a:cs typeface="PingFang SC"/>
               </a:rPr>
-              <a:t>交付方式</a:t>
+              <a:t>任务、调度与内存</a:t>
             </a:r>
           </a:p>
         </p:txBody>
@@ -17049,19 +17031,19 @@
           <p:cNvPr id="13" name="">
             <a:extLst xmlns:a="http://schemas.openxmlformats.org/drawingml/2006/main">
               <a:ext uri="{FF2B5EF4-FFF2-40B4-BE49-F238E27FC236}">
-                <a16:creationId xmlns:a16="http://schemas.microsoft.com/office/drawing/2014/main" id="{5167AE16-107D-4E5A-BEB3-642E1DD95D88}"/>
-              </a:ext>
-            </a:extLst>
-          </p:cNvPr>
-          <p:cNvSpPr>
-            <a:spLocks xmlns:a="http://schemas.openxmlformats.org/drawingml/2006/main" noGrp="1"/>
-          </p:cNvSpPr>
-          <p:nvPr/>
-        </p:nvSpPr>
-        <p:spPr>
-          <a:xfrm xmlns:a="http://schemas.openxmlformats.org/drawingml/2006/main">
-            <a:off x="4705350" y="2762250"/>
-            <a:ext cx="2781300" cy="1638300"/>
+                <a16:creationId xmlns:a16="http://schemas.microsoft.com/office/drawing/2014/main" id="{48DE3325-4A14-41DC-910E-4A050DE0DE7E}"/>
+              </a:ext>
+            </a:extLst>
+          </p:cNvPr>
+          <p:cNvSpPr>
+            <a:spLocks xmlns:a="http://schemas.openxmlformats.org/drawingml/2006/main" noGrp="1"/>
+          </p:cNvSpPr>
+          <p:nvPr/>
+        </p:nvSpPr>
+        <p:spPr>
+          <a:xfrm xmlns:a="http://schemas.openxmlformats.org/drawingml/2006/main">
+            <a:off x="6762750" y="2705100"/>
+            <a:ext cx="4495800" cy="895350"/>
           </a:xfrm>
           <a:prstGeom xmlns:a="http://schemas.openxmlformats.org/drawingml/2006/main" prst="rect">
             <a:avLst/>
@@ -17103,7 +17085,58 @@
                 <a:ea typeface="PingFang SC"/>
                 <a:cs typeface="PingFang SC"/>
               </a:rPr>
-              <a:t>每个实验形成可运行 crate，发布到 crates.io，并带上 #ai #ai4ose #kernel #learning #os 关键词；同时保留 GitHub repo、tag、README 和复现命令。</a:t>
+              <a:t>完成 app-childtask / app-fairsched</a:t>
+            </a:r>
+          </a:p>
+          <a:p xmlns:a="http://schemas.openxmlformats.org/drawingml/2006/main">
+            <a:pPr algn="l">
+              <a:defRPr sz="1275" b="0">
+                <a:solidFill>
+                  <a:srgbClr val="5B6472"/>
+                </a:solidFill>
+                <a:latin typeface="PingFang SC"/>
+                <a:ea typeface="PingFang SC"/>
+                <a:cs typeface="PingFang SC"/>
+              </a:defRPr>
+            </a:pPr>
+            <a:r>
+              <a:rPr sz="1275" b="0">
+                <a:solidFill>
+                  <a:srgbClr val="5B6472"/>
+                </a:solidFill>
+                <a:latin typeface="PingFang SC"/>
+                <a:ea typeface="PingFang SC"/>
+                <a:cs typeface="PingFang SC"/>
+              </a:rPr>
+              <a:t>完成 app-lazymapping / exercise-sysmap</a:t>
+            </a:r>
+          </a:p>
+          <a:p xmlns:a="http://schemas.openxmlformats.org/drawingml/2006/main">
+            <a:r>
+              <a:t/>
+            </a:r>
+          </a:p>
+          <a:p xmlns:a="http://schemas.openxmlformats.org/drawingml/2006/main">
+            <a:pPr algn="l">
+              <a:defRPr sz="1275" b="0">
+                <a:solidFill>
+                  <a:srgbClr val="5B6472"/>
+                </a:solidFill>
+                <a:latin typeface="PingFang SC"/>
+                <a:ea typeface="PingFang SC"/>
+                <a:cs typeface="PingFang SC"/>
+              </a:defRPr>
+            </a:pPr>
+            <a:r>
+              <a:rPr sz="1275" b="0">
+                <a:solidFill>
+                  <a:srgbClr val="5B6472"/>
+                </a:solidFill>
+                <a:latin typeface="PingFang SC"/>
+                <a:ea typeface="PingFang SC"/>
+                <a:cs typeface="PingFang SC"/>
+              </a:rPr>
+              <a:t>覆盖任务创建、调度公平性、lazy mapping、符号/地址映射和异常定位。</a:t>
             </a:r>
           </a:p>
         </p:txBody>
@@ -17113,19 +17146,19 @@
           <p:cNvPr id="14" name="">
             <a:extLst xmlns:a="http://schemas.openxmlformats.org/drawingml/2006/main">
               <a:ext uri="{FF2B5EF4-FFF2-40B4-BE49-F238E27FC236}">
-                <a16:creationId xmlns:a16="http://schemas.microsoft.com/office/drawing/2014/main" id="{03AAB7A3-5EA8-4EC7-AD3A-C7781D9FDF08}"/>
-              </a:ext>
-            </a:extLst>
-          </p:cNvPr>
-          <p:cNvSpPr>
-            <a:spLocks xmlns:a="http://schemas.openxmlformats.org/drawingml/2006/main" noGrp="1"/>
-          </p:cNvSpPr>
-          <p:nvPr/>
-        </p:nvSpPr>
-        <p:spPr>
-          <a:xfrm xmlns:a="http://schemas.openxmlformats.org/drawingml/2006/main">
-            <a:off x="8248650" y="2133600"/>
-            <a:ext cx="3238500" cy="2381250"/>
+                <a16:creationId xmlns:a16="http://schemas.microsoft.com/office/drawing/2014/main" id="{05C38327-6F87-47B3-A97E-5E36F692BCEF}"/>
+              </a:ext>
+            </a:extLst>
+          </p:cNvPr>
+          <p:cNvSpPr>
+            <a:spLocks xmlns:a="http://schemas.openxmlformats.org/drawingml/2006/main" noGrp="1"/>
+          </p:cNvSpPr>
+          <p:nvPr/>
+        </p:nvSpPr>
+        <p:spPr>
+          <a:xfrm xmlns:a="http://schemas.openxmlformats.org/drawingml/2006/main">
+            <a:off x="704850" y="4171950"/>
+            <a:ext cx="4953000" cy="1638300"/>
           </a:xfrm>
           <a:prstGeom xmlns:a="http://schemas.openxmlformats.org/drawingml/2006/main" prst="rect">
             <a:avLst/>
@@ -17146,19 +17179,19 @@
           <p:cNvPr id="15" name="">
             <a:extLst xmlns:a="http://schemas.openxmlformats.org/drawingml/2006/main">
               <a:ext uri="{FF2B5EF4-FFF2-40B4-BE49-F238E27FC236}">
-                <a16:creationId xmlns:a16="http://schemas.microsoft.com/office/drawing/2014/main" id="{22CED127-389F-4BAA-8616-B472CF5B5B27}"/>
-              </a:ext>
-            </a:extLst>
-          </p:cNvPr>
-          <p:cNvSpPr>
-            <a:spLocks xmlns:a="http://schemas.openxmlformats.org/drawingml/2006/main" noGrp="1"/>
-          </p:cNvSpPr>
-          <p:nvPr/>
-        </p:nvSpPr>
-        <p:spPr>
-          <a:xfrm xmlns:a="http://schemas.openxmlformats.org/drawingml/2006/main">
-            <a:off x="8248650" y="2133600"/>
-            <a:ext cx="47625" cy="2381250"/>
+                <a16:creationId xmlns:a16="http://schemas.microsoft.com/office/drawing/2014/main" id="{885996ED-57BC-48B5-87D0-C358422C56BB}"/>
+              </a:ext>
+            </a:extLst>
+          </p:cNvPr>
+          <p:cNvSpPr>
+            <a:spLocks xmlns:a="http://schemas.openxmlformats.org/drawingml/2006/main" noGrp="1"/>
+          </p:cNvSpPr>
+          <p:nvPr/>
+        </p:nvSpPr>
+        <p:spPr>
+          <a:xfrm xmlns:a="http://schemas.openxmlformats.org/drawingml/2006/main">
+            <a:off x="704850" y="4171950"/>
+            <a:ext cx="47625" cy="1638300"/>
           </a:xfrm>
           <a:prstGeom xmlns:a="http://schemas.openxmlformats.org/drawingml/2006/main" prst="rect">
             <a:avLst/>
@@ -17181,19 +17214,19 @@
           <p:cNvPr id="16" name="">
             <a:extLst xmlns:a="http://schemas.openxmlformats.org/drawingml/2006/main">
               <a:ext uri="{FF2B5EF4-FFF2-40B4-BE49-F238E27FC236}">
-                <a16:creationId xmlns:a16="http://schemas.microsoft.com/office/drawing/2014/main" id="{FF35E9BE-2817-4E91-A946-81C11B91719B}"/>
-              </a:ext>
-            </a:extLst>
-          </p:cNvPr>
-          <p:cNvSpPr>
-            <a:spLocks xmlns:a="http://schemas.openxmlformats.org/drawingml/2006/main" noGrp="1"/>
-          </p:cNvSpPr>
-          <p:nvPr/>
-        </p:nvSpPr>
-        <p:spPr>
-          <a:xfrm xmlns:a="http://schemas.openxmlformats.org/drawingml/2006/main">
-            <a:off x="8477250" y="2343150"/>
-            <a:ext cx="2781300" cy="304800"/>
+                <a16:creationId xmlns:a16="http://schemas.microsoft.com/office/drawing/2014/main" id="{1D7CF049-145B-4936-A141-45BAA1DB5453}"/>
+              </a:ext>
+            </a:extLst>
+          </p:cNvPr>
+          <p:cNvSpPr>
+            <a:spLocks xmlns:a="http://schemas.openxmlformats.org/drawingml/2006/main" noGrp="1"/>
+          </p:cNvSpPr>
+          <p:nvPr/>
+        </p:nvSpPr>
+        <p:spPr>
+          <a:xfrm xmlns:a="http://schemas.openxmlformats.org/drawingml/2006/main">
+            <a:off x="933450" y="4381500"/>
+            <a:ext cx="4495800" cy="304800"/>
           </a:xfrm>
           <a:prstGeom xmlns:a="http://schemas.openxmlformats.org/drawingml/2006/main" prst="rect">
             <a:avLst/>
@@ -17235,7 +17268,7 @@
                 <a:ea typeface="PingFang SC"/>
                 <a:cs typeface="PingFang SC"/>
               </a:rPr>
-              <a:t>对后续的作用</a:t>
+              <a:t>文件系统与设备</a:t>
             </a:r>
           </a:p>
         </p:txBody>
@@ -17245,19 +17278,19 @@
           <p:cNvPr id="17" name="">
             <a:extLst xmlns:a="http://schemas.openxmlformats.org/drawingml/2006/main">
               <a:ext uri="{FF2B5EF4-FFF2-40B4-BE49-F238E27FC236}">
-                <a16:creationId xmlns:a16="http://schemas.microsoft.com/office/drawing/2014/main" id="{39FE24E4-ACD6-42F3-95B4-2940C3BAA1F2}"/>
-              </a:ext>
-            </a:extLst>
-          </p:cNvPr>
-          <p:cNvSpPr>
-            <a:spLocks xmlns:a="http://schemas.openxmlformats.org/drawingml/2006/main" noGrp="1"/>
-          </p:cNvSpPr>
-          <p:nvPr/>
-        </p:nvSpPr>
-        <p:spPr>
-          <a:xfrm xmlns:a="http://schemas.openxmlformats.org/drawingml/2006/main">
-            <a:off x="8477250" y="2762250"/>
-            <a:ext cx="2781300" cy="1638300"/>
+                <a16:creationId xmlns:a16="http://schemas.microsoft.com/office/drawing/2014/main" id="{5DF53B87-8E9C-44DB-9D80-EE69042CC00A}"/>
+              </a:ext>
+            </a:extLst>
+          </p:cNvPr>
+          <p:cNvSpPr>
+            <a:spLocks xmlns:a="http://schemas.openxmlformats.org/drawingml/2006/main" noGrp="1"/>
+          </p:cNvSpPr>
+          <p:nvPr/>
+        </p:nvSpPr>
+        <p:spPr>
+          <a:xfrm xmlns:a="http://schemas.openxmlformats.org/drawingml/2006/main">
+            <a:off x="933450" y="4800600"/>
+            <a:ext cx="4495800" cy="895350"/>
           </a:xfrm>
           <a:prstGeom xmlns:a="http://schemas.openxmlformats.org/drawingml/2006/main" prst="rect">
             <a:avLst/>
@@ -17299,7 +17332,58 @@
                 <a:ea typeface="PingFang SC"/>
                 <a:cs typeface="PingFang SC"/>
               </a:rPr>
-              <a:t>BigLab-A 训练的是小规模、可复现、可讲清楚的 OS 实验；BigLab-B 把这个方法迁移到 TGOSKit/StarryOS 的真实内核 PR 和大型 workload。</a:t>
+              <a:t>完成 app-readblk / app-readpflash</a:t>
+            </a:r>
+          </a:p>
+          <a:p xmlns:a="http://schemas.openxmlformats.org/drawingml/2006/main">
+            <a:pPr algn="l">
+              <a:defRPr sz="1275" b="0">
+                <a:solidFill>
+                  <a:srgbClr val="5B6472"/>
+                </a:solidFill>
+                <a:latin typeface="PingFang SC"/>
+                <a:ea typeface="PingFang SC"/>
+                <a:cs typeface="PingFang SC"/>
+              </a:defRPr>
+            </a:pPr>
+            <a:r>
+              <a:rPr sz="1275" b="0">
+                <a:solidFill>
+                  <a:srgbClr val="5B6472"/>
+                </a:solidFill>
+                <a:latin typeface="PingFang SC"/>
+                <a:ea typeface="PingFang SC"/>
+                <a:cs typeface="PingFang SC"/>
+              </a:rPr>
+              <a:t>完成 exercise-ramfs-rename / app-msgqueue</a:t>
+            </a:r>
+          </a:p>
+          <a:p xmlns:a="http://schemas.openxmlformats.org/drawingml/2006/main">
+            <a:r>
+              <a:t/>
+            </a:r>
+          </a:p>
+          <a:p xmlns:a="http://schemas.openxmlformats.org/drawingml/2006/main">
+            <a:pPr algn="l">
+              <a:defRPr sz="1275" b="0">
+                <a:solidFill>
+                  <a:srgbClr val="5B6472"/>
+                </a:solidFill>
+                <a:latin typeface="PingFang SC"/>
+                <a:ea typeface="PingFang SC"/>
+                <a:cs typeface="PingFang SC"/>
+              </a:defRPr>
+            </a:pPr>
+            <a:r>
+              <a:rPr sz="1275" b="0">
+                <a:solidFill>
+                  <a:srgbClr val="5B6472"/>
+                </a:solidFill>
+                <a:latin typeface="PingFang SC"/>
+                <a:ea typeface="PingFang SC"/>
+                <a:cs typeface="PingFang SC"/>
+              </a:rPr>
+              <a:t>练习块设备、pflash、RAMFS rename、消息队列和文件/设备抽象。</a:t>
             </a:r>
           </a:p>
         </p:txBody>
@@ -17309,59 +17393,244 @@
           <p:cNvPr id="18" name="">
             <a:extLst xmlns:a="http://schemas.openxmlformats.org/drawingml/2006/main">
               <a:ext uri="{FF2B5EF4-FFF2-40B4-BE49-F238E27FC236}">
-                <a16:creationId xmlns:a16="http://schemas.microsoft.com/office/drawing/2014/main" id="{F4692E0E-42D3-4C95-971B-60D97CB48986}"/>
-              </a:ext>
-            </a:extLst>
-          </p:cNvPr>
-          <p:cNvSpPr>
-            <a:spLocks xmlns:a="http://schemas.openxmlformats.org/drawingml/2006/main" noGrp="1"/>
-          </p:cNvSpPr>
-          <p:nvPr/>
-        </p:nvSpPr>
-        <p:spPr>
-          <a:xfrm xmlns:a="http://schemas.openxmlformats.org/drawingml/2006/main">
-            <a:off x="857250" y="6096000"/>
-            <a:ext cx="10477500" cy="400050"/>
-          </a:xfrm>
-          <a:prstGeom xmlns:a="http://schemas.openxmlformats.org/drawingml/2006/main" prst="rect">
-            <a:avLst/>
-          </a:prstGeom>
-          <a:solidFill xmlns:a="http://schemas.openxmlformats.org/drawingml/2006/main">
-            <a:srgbClr val="0B1220"/>
-          </a:solidFill>
-          <a:ln xmlns:a="http://schemas.openxmlformats.org/drawingml/2006/main" w="0">
-            <a:solidFill>
-              <a:srgbClr val="000000">
-                <a:alpha val="0"/>
-              </a:srgbClr>
-            </a:solidFill>
-            <a:prstDash val="solid"/>
-          </a:ln>
-        </p:spPr>
-        <p:txBody>
-          <a:bodyPr xmlns:a="http://schemas.openxmlformats.org/drawingml/2006/main" lIns="76200" tIns="76200" rIns="76200" bIns="76200" anchor="ctr"/>
-          <a:lstStyle xmlns:a="http://schemas.openxmlformats.org/drawingml/2006/main"/>
-          <a:p xmlns:a="http://schemas.openxmlformats.org/drawingml/2006/main">
-            <a:pPr algn="ctr">
-              <a:defRPr sz="1350" b="1">
-                <a:solidFill>
-                  <a:srgbClr val="FFFFFF"/>
-                </a:solidFill>
-                <a:latin typeface="PingFang SC"/>
-                <a:ea typeface="PingFang SC"/>
-                <a:cs typeface="PingFang SC"/>
-              </a:defRPr>
-            </a:pPr>
-            <a:r>
-              <a:rPr sz="1350" b="1">
-                <a:solidFill>
-                  <a:srgbClr val="FFFFFF"/>
-                </a:solidFill>
-                <a:latin typeface="PingFang SC"/>
-                <a:ea typeface="PingFang SC"/>
-                <a:cs typeface="PingFang SC"/>
-              </a:rPr>
-              <a:t>杨凯森：BigLab-B 汇报重点承接 BigLab-A 的工程化训练，进一步展示真实内核问题定位、修复、测例和 PR 合入。</a:t>
+                <a16:creationId xmlns:a16="http://schemas.microsoft.com/office/drawing/2014/main" id="{E6C1A067-A6AB-4FC6-8224-0B13CDBD5EED}"/>
+              </a:ext>
+            </a:extLst>
+          </p:cNvPr>
+          <p:cNvSpPr>
+            <a:spLocks xmlns:a="http://schemas.openxmlformats.org/drawingml/2006/main" noGrp="1"/>
+          </p:cNvSpPr>
+          <p:nvPr/>
+        </p:nvSpPr>
+        <p:spPr>
+          <a:xfrm xmlns:a="http://schemas.openxmlformats.org/drawingml/2006/main">
+            <a:off x="6534150" y="4171950"/>
+            <a:ext cx="4953000" cy="1638300"/>
+          </a:xfrm>
+          <a:prstGeom xmlns:a="http://schemas.openxmlformats.org/drawingml/2006/main" prst="rect">
+            <a:avLst/>
+          </a:prstGeom>
+          <a:solidFill xmlns:a="http://schemas.openxmlformats.org/drawingml/2006/main">
+            <a:srgbClr val="FFFFFF"/>
+          </a:solidFill>
+          <a:ln xmlns:a="http://schemas.openxmlformats.org/drawingml/2006/main" w="9525">
+            <a:solidFill>
+              <a:srgbClr val="D8DEE8"/>
+            </a:solidFill>
+            <a:prstDash val="solid"/>
+          </a:ln>
+        </p:spPr>
+      </p:sp>
+      <p:sp>
+        <p:nvSpPr>
+          <p:cNvPr id="19" name="">
+            <a:extLst xmlns:a="http://schemas.openxmlformats.org/drawingml/2006/main">
+              <a:ext uri="{FF2B5EF4-FFF2-40B4-BE49-F238E27FC236}">
+                <a16:creationId xmlns:a16="http://schemas.microsoft.com/office/drawing/2014/main" id="{6FFB2BCD-EAAC-491B-BABF-18465F63EFBE}"/>
+              </a:ext>
+            </a:extLst>
+          </p:cNvPr>
+          <p:cNvSpPr>
+            <a:spLocks xmlns:a="http://schemas.openxmlformats.org/drawingml/2006/main" noGrp="1"/>
+          </p:cNvSpPr>
+          <p:nvPr/>
+        </p:nvSpPr>
+        <p:spPr>
+          <a:xfrm xmlns:a="http://schemas.openxmlformats.org/drawingml/2006/main">
+            <a:off x="6534150" y="4171950"/>
+            <a:ext cx="47625" cy="1638300"/>
+          </a:xfrm>
+          <a:prstGeom xmlns:a="http://schemas.openxmlformats.org/drawingml/2006/main" prst="rect">
+            <a:avLst/>
+          </a:prstGeom>
+          <a:solidFill xmlns:a="http://schemas.openxmlformats.org/drawingml/2006/main">
+            <a:srgbClr val="6A42B8"/>
+          </a:solidFill>
+          <a:ln xmlns:a="http://schemas.openxmlformats.org/drawingml/2006/main" w="0">
+            <a:solidFill>
+              <a:srgbClr val="000000">
+                <a:alpha val="0"/>
+              </a:srgbClr>
+            </a:solidFill>
+            <a:prstDash val="solid"/>
+          </a:ln>
+        </p:spPr>
+      </p:sp>
+      <p:sp>
+        <p:nvSpPr>
+          <p:cNvPr id="20" name="">
+            <a:extLst xmlns:a="http://schemas.openxmlformats.org/drawingml/2006/main">
+              <a:ext uri="{FF2B5EF4-FFF2-40B4-BE49-F238E27FC236}">
+                <a16:creationId xmlns:a16="http://schemas.microsoft.com/office/drawing/2014/main" id="{5981A57D-A2EA-45DE-BA82-04B5DB2A0EF9}"/>
+              </a:ext>
+            </a:extLst>
+          </p:cNvPr>
+          <p:cNvSpPr>
+            <a:spLocks xmlns:a="http://schemas.openxmlformats.org/drawingml/2006/main" noGrp="1"/>
+          </p:cNvSpPr>
+          <p:nvPr/>
+        </p:nvSpPr>
+        <p:spPr>
+          <a:xfrm xmlns:a="http://schemas.openxmlformats.org/drawingml/2006/main">
+            <a:off x="6762750" y="4381500"/>
+            <a:ext cx="4495800" cy="304800"/>
+          </a:xfrm>
+          <a:prstGeom xmlns:a="http://schemas.openxmlformats.org/drawingml/2006/main" prst="rect">
+            <a:avLst/>
+          </a:prstGeom>
+          <a:solidFill xmlns:a="http://schemas.openxmlformats.org/drawingml/2006/main">
+            <a:srgbClr val="000000">
+              <a:alpha val="0"/>
+            </a:srgbClr>
+          </a:solidFill>
+          <a:ln xmlns:a="http://schemas.openxmlformats.org/drawingml/2006/main" w="0">
+            <a:solidFill>
+              <a:srgbClr val="000000">
+                <a:alpha val="0"/>
+              </a:srgbClr>
+            </a:solidFill>
+            <a:prstDash val="solid"/>
+          </a:ln>
+        </p:spPr>
+        <p:txBody>
+          <a:bodyPr xmlns:a="http://schemas.openxmlformats.org/drawingml/2006/main" lIns="0" tIns="0" rIns="0" bIns="0" anchor="t"/>
+          <a:lstStyle xmlns:a="http://schemas.openxmlformats.org/drawingml/2006/main"/>
+          <a:p xmlns:a="http://schemas.openxmlformats.org/drawingml/2006/main">
+            <a:pPr algn="l">
+              <a:defRPr sz="1650" b="1">
+                <a:solidFill>
+                  <a:srgbClr val="111827"/>
+                </a:solidFill>
+                <a:latin typeface="PingFang SC"/>
+                <a:ea typeface="PingFang SC"/>
+                <a:cs typeface="PingFang SC"/>
+              </a:defRPr>
+            </a:pPr>
+            <a:r>
+              <a:rPr sz="1650" b="1">
+                <a:solidFill>
+                  <a:srgbClr val="111827"/>
+                </a:solidFill>
+                <a:latin typeface="PingFang SC"/>
+                <a:ea typeface="PingFang SC"/>
+                <a:cs typeface="PingFang SC"/>
+              </a:rPr>
+              <a:t>用户态与虚拟化</a:t>
+            </a:r>
+          </a:p>
+        </p:txBody>
+      </p:sp>
+      <p:sp>
+        <p:nvSpPr>
+          <p:cNvPr id="21" name="">
+            <a:extLst xmlns:a="http://schemas.openxmlformats.org/drawingml/2006/main">
+              <a:ext uri="{FF2B5EF4-FFF2-40B4-BE49-F238E27FC236}">
+                <a16:creationId xmlns:a16="http://schemas.microsoft.com/office/drawing/2014/main" id="{D4629EA4-6452-4464-88D6-846F5B6DDC5F}"/>
+              </a:ext>
+            </a:extLst>
+          </p:cNvPr>
+          <p:cNvSpPr>
+            <a:spLocks xmlns:a="http://schemas.openxmlformats.org/drawingml/2006/main" noGrp="1"/>
+          </p:cNvSpPr>
+          <p:nvPr/>
+        </p:nvSpPr>
+        <p:spPr>
+          <a:xfrm xmlns:a="http://schemas.openxmlformats.org/drawingml/2006/main">
+            <a:off x="6762750" y="4800600"/>
+            <a:ext cx="4495800" cy="895350"/>
+          </a:xfrm>
+          <a:prstGeom xmlns:a="http://schemas.openxmlformats.org/drawingml/2006/main" prst="rect">
+            <a:avLst/>
+          </a:prstGeom>
+          <a:solidFill xmlns:a="http://schemas.openxmlformats.org/drawingml/2006/main">
+            <a:srgbClr val="000000">
+              <a:alpha val="0"/>
+            </a:srgbClr>
+          </a:solidFill>
+          <a:ln xmlns:a="http://schemas.openxmlformats.org/drawingml/2006/main" w="0">
+            <a:solidFill>
+              <a:srgbClr val="000000">
+                <a:alpha val="0"/>
+              </a:srgbClr>
+            </a:solidFill>
+            <a:prstDash val="solid"/>
+          </a:ln>
+        </p:spPr>
+        <p:txBody>
+          <a:bodyPr xmlns:a="http://schemas.openxmlformats.org/drawingml/2006/main" lIns="0" tIns="0" rIns="0" bIns="0" anchor="t"/>
+          <a:lstStyle xmlns:a="http://schemas.openxmlformats.org/drawingml/2006/main"/>
+          <a:p xmlns:a="http://schemas.openxmlformats.org/drawingml/2006/main">
+            <a:pPr algn="l">
+              <a:defRPr sz="1275" b="0">
+                <a:solidFill>
+                  <a:srgbClr val="5B6472"/>
+                </a:solidFill>
+                <a:latin typeface="PingFang SC"/>
+                <a:ea typeface="PingFang SC"/>
+                <a:cs typeface="PingFang SC"/>
+              </a:defRPr>
+            </a:pPr>
+            <a:r>
+              <a:rPr sz="1275" b="0">
+                <a:solidFill>
+                  <a:srgbClr val="5B6472"/>
+                </a:solidFill>
+                <a:latin typeface="PingFang SC"/>
+                <a:ea typeface="PingFang SC"/>
+                <a:cs typeface="PingFang SC"/>
+              </a:rPr>
+              <a:t>完成 app-runlinuxapp / app-userprivilege</a:t>
+            </a:r>
+          </a:p>
+          <a:p xmlns:a="http://schemas.openxmlformats.org/drawingml/2006/main">
+            <a:pPr algn="l">
+              <a:defRPr sz="1275" b="0">
+                <a:solidFill>
+                  <a:srgbClr val="5B6472"/>
+                </a:solidFill>
+                <a:latin typeface="PingFang SC"/>
+                <a:ea typeface="PingFang SC"/>
+                <a:cs typeface="PingFang SC"/>
+              </a:defRPr>
+            </a:pPr>
+            <a:r>
+              <a:rPr sz="1275" b="0">
+                <a:solidFill>
+                  <a:srgbClr val="5B6472"/>
+                </a:solidFill>
+                <a:latin typeface="PingFang SC"/>
+                <a:ea typeface="PingFang SC"/>
+                <a:cs typeface="PingFang SC"/>
+              </a:rPr>
+              <a:t>完成 app-guestmode / app-guestaspace / app-guestvdev</a:t>
+            </a:r>
+          </a:p>
+          <a:p xmlns:a="http://schemas.openxmlformats.org/drawingml/2006/main">
+            <a:r>
+              <a:t/>
+            </a:r>
+          </a:p>
+          <a:p xmlns:a="http://schemas.openxmlformats.org/drawingml/2006/main">
+            <a:pPr algn="l">
+              <a:defRPr sz="1275" b="0">
+                <a:solidFill>
+                  <a:srgbClr val="5B6472"/>
+                </a:solidFill>
+                <a:latin typeface="PingFang SC"/>
+                <a:ea typeface="PingFang SC"/>
+                <a:cs typeface="PingFang SC"/>
+              </a:defRPr>
+            </a:pPr>
+            <a:r>
+              <a:rPr sz="1275" b="0">
+                <a:solidFill>
+                  <a:srgbClr val="5B6472"/>
+                </a:solidFill>
+                <a:latin typeface="PingFang SC"/>
+                <a:ea typeface="PingFang SC"/>
+                <a:cs typeface="PingFang SC"/>
+              </a:rPr>
+              <a:t>接触用户态加载、权限切换、guest 地址空间和虚拟设备路径。</a:t>
             </a:r>
           </a:p>
         </p:txBody>
@@ -17369,7 +17638,7 @@
     </p:spTree>
     <p:extLst>
       <p:ext uri="{BB962C8B-B14F-4D97-AF65-F5344CB8AC3E}">
-        <p14:creationId xmlns:p14="http://schemas.microsoft.com/office/powerpoint/2010/main" val="1133048580"/>
+        <p14:creationId xmlns:p14="http://schemas.microsoft.com/office/powerpoint/2010/main" val="202627860"/>
       </p:ext>
     </p:extLst>
   </p:cSld>
@@ -17400,7 +17669,7 @@
           <p:cNvPr id="1" name="">
             <a:extLst xmlns:a="http://schemas.openxmlformats.org/drawingml/2006/main">
               <a:ext uri="{FF2B5EF4-FFF2-40B4-BE49-F238E27FC236}">
-                <a16:creationId xmlns:a16="http://schemas.microsoft.com/office/drawing/2014/main" id="{911C5F31-B5F8-453B-BDA2-BF90F2076C88}"/>
+                <a16:creationId xmlns:a16="http://schemas.microsoft.com/office/drawing/2014/main" id="{2551BBAB-174F-43B1-9629-D15802A99EFC}"/>
               </a:ext>
             </a:extLst>
           </p:cNvPr>
@@ -17435,7 +17704,7 @@
           <p:cNvPr id="2" name="">
             <a:extLst xmlns:a="http://schemas.openxmlformats.org/drawingml/2006/main">
               <a:ext uri="{FF2B5EF4-FFF2-40B4-BE49-F238E27FC236}">
-                <a16:creationId xmlns:a16="http://schemas.microsoft.com/office/drawing/2014/main" id="{552DA10A-7655-40B3-B938-08A601FED475}"/>
+                <a16:creationId xmlns:a16="http://schemas.microsoft.com/office/drawing/2014/main" id="{C91319EC-F184-496D-90C8-C1A7E544B6B1}"/>
               </a:ext>
             </a:extLst>
           </p:cNvPr>
@@ -17499,7 +17768,7 @@
           <p:cNvPr id="3" name="">
             <a:extLst xmlns:a="http://schemas.openxmlformats.org/drawingml/2006/main">
               <a:ext uri="{FF2B5EF4-FFF2-40B4-BE49-F238E27FC236}">
-                <a16:creationId xmlns:a16="http://schemas.microsoft.com/office/drawing/2014/main" id="{8451B9EC-5E6D-48C5-AC29-1BE9F4D8356C}"/>
+                <a16:creationId xmlns:a16="http://schemas.microsoft.com/office/drawing/2014/main" id="{CF711345-2F75-49C1-97BD-F5E67138A121}"/>
               </a:ext>
             </a:extLst>
           </p:cNvPr>
@@ -17563,7 +17832,7 @@
           <p:cNvPr id="4" name="">
             <a:extLst xmlns:a="http://schemas.openxmlformats.org/drawingml/2006/main">
               <a:ext uri="{FF2B5EF4-FFF2-40B4-BE49-F238E27FC236}">
-                <a16:creationId xmlns:a16="http://schemas.microsoft.com/office/drawing/2014/main" id="{A8D89BFF-2EFA-42A4-A2CC-D24B68A4AF60}"/>
+                <a16:creationId xmlns:a16="http://schemas.microsoft.com/office/drawing/2014/main" id="{8A5823AF-791B-45BE-AE90-A3C1D538218F}"/>
               </a:ext>
             </a:extLst>
           </p:cNvPr>
@@ -17627,7 +17896,7 @@
           <p:cNvPr id="5" name="">
             <a:extLst xmlns:a="http://schemas.openxmlformats.org/drawingml/2006/main">
               <a:ext uri="{FF2B5EF4-FFF2-40B4-BE49-F238E27FC236}">
-                <a16:creationId xmlns:a16="http://schemas.microsoft.com/office/drawing/2014/main" id="{EFA4171F-6AFA-49BD-A585-9989C42064B8}"/>
+                <a16:creationId xmlns:a16="http://schemas.microsoft.com/office/drawing/2014/main" id="{74122C7A-66AB-4E1A-AF8B-03780331EDB1}"/>
               </a:ext>
             </a:extLst>
           </p:cNvPr>
@@ -17691,7 +17960,7 @@
           <p:cNvPr id="6" name="">
             <a:extLst xmlns:a="http://schemas.openxmlformats.org/drawingml/2006/main">
               <a:ext uri="{FF2B5EF4-FFF2-40B4-BE49-F238E27FC236}">
-                <a16:creationId xmlns:a16="http://schemas.microsoft.com/office/drawing/2014/main" id="{31179B11-E167-46D5-804A-13544B6B2EBD}"/>
+                <a16:creationId xmlns:a16="http://schemas.microsoft.com/office/drawing/2014/main" id="{C135A419-3CE4-4005-8C2C-54D3BD249998}"/>
               </a:ext>
             </a:extLst>
           </p:cNvPr>
@@ -17724,7 +17993,7 @@
           <p:cNvPr id="7" name="">
             <a:extLst xmlns:a="http://schemas.openxmlformats.org/drawingml/2006/main">
               <a:ext uri="{FF2B5EF4-FFF2-40B4-BE49-F238E27FC236}">
-                <a16:creationId xmlns:a16="http://schemas.microsoft.com/office/drawing/2014/main" id="{3C354107-8D59-4813-92D4-3B712A93EF5E}"/>
+                <a16:creationId xmlns:a16="http://schemas.microsoft.com/office/drawing/2014/main" id="{2EF6B84B-FC7A-4EC1-906F-833A7573CACA}"/>
               </a:ext>
             </a:extLst>
           </p:cNvPr>
@@ -17759,7 +18028,7 @@
           <p:cNvPr id="8" name="">
             <a:extLst xmlns:a="http://schemas.openxmlformats.org/drawingml/2006/main">
               <a:ext uri="{FF2B5EF4-FFF2-40B4-BE49-F238E27FC236}">
-                <a16:creationId xmlns:a16="http://schemas.microsoft.com/office/drawing/2014/main" id="{ED5ABF4B-835A-4F68-9BEB-87E0D8732535}"/>
+                <a16:creationId xmlns:a16="http://schemas.microsoft.com/office/drawing/2014/main" id="{C9E25E75-B4B1-4800-9868-98A57891A0E2}"/>
               </a:ext>
             </a:extLst>
           </p:cNvPr>
@@ -17823,7 +18092,7 @@
           <p:cNvPr id="9" name="">
             <a:extLst xmlns:a="http://schemas.openxmlformats.org/drawingml/2006/main">
               <a:ext uri="{FF2B5EF4-FFF2-40B4-BE49-F238E27FC236}">
-                <a16:creationId xmlns:a16="http://schemas.microsoft.com/office/drawing/2014/main" id="{5BFDE276-E080-4FDD-9376-9B6884DC2604}"/>
+                <a16:creationId xmlns:a16="http://schemas.microsoft.com/office/drawing/2014/main" id="{6F156EEB-4AFE-4CEE-BE0D-E948B082A029}"/>
               </a:ext>
             </a:extLst>
           </p:cNvPr>
@@ -17887,7 +18156,7 @@
           <p:cNvPr id="10" name="">
             <a:extLst xmlns:a="http://schemas.openxmlformats.org/drawingml/2006/main">
               <a:ext uri="{FF2B5EF4-FFF2-40B4-BE49-F238E27FC236}">
-                <a16:creationId xmlns:a16="http://schemas.microsoft.com/office/drawing/2014/main" id="{1A610293-D773-4D6E-9443-695B32AA2758}"/>
+                <a16:creationId xmlns:a16="http://schemas.microsoft.com/office/drawing/2014/main" id="{CD636934-E110-48D0-B1C2-B3B496C0B09F}"/>
               </a:ext>
             </a:extLst>
           </p:cNvPr>
@@ -17920,7 +18189,7 @@
           <p:cNvPr id="11" name="">
             <a:extLst xmlns:a="http://schemas.openxmlformats.org/drawingml/2006/main">
               <a:ext uri="{FF2B5EF4-FFF2-40B4-BE49-F238E27FC236}">
-                <a16:creationId xmlns:a16="http://schemas.microsoft.com/office/drawing/2014/main" id="{F4974567-7CE1-4CC5-A8D4-132DEDB876D4}"/>
+                <a16:creationId xmlns:a16="http://schemas.microsoft.com/office/drawing/2014/main" id="{91C795DA-F06B-4D7C-B50F-B69D29A474C5}"/>
               </a:ext>
             </a:extLst>
           </p:cNvPr>
@@ -17955,7 +18224,7 @@
           <p:cNvPr id="12" name="">
             <a:extLst xmlns:a="http://schemas.openxmlformats.org/drawingml/2006/main">
               <a:ext uri="{FF2B5EF4-FFF2-40B4-BE49-F238E27FC236}">
-                <a16:creationId xmlns:a16="http://schemas.microsoft.com/office/drawing/2014/main" id="{0414B005-8D7E-4D09-BB43-141399581D44}"/>
+                <a16:creationId xmlns:a16="http://schemas.microsoft.com/office/drawing/2014/main" id="{B3E36F0D-3B22-4D21-9A3F-172AD5FF1F13}"/>
               </a:ext>
             </a:extLst>
           </p:cNvPr>
@@ -18019,7 +18288,7 @@
           <p:cNvPr id="13" name="">
             <a:extLst xmlns:a="http://schemas.openxmlformats.org/drawingml/2006/main">
               <a:ext uri="{FF2B5EF4-FFF2-40B4-BE49-F238E27FC236}">
-                <a16:creationId xmlns:a16="http://schemas.microsoft.com/office/drawing/2014/main" id="{F5524CC9-90C5-4A2D-A4BF-85DB4D7576DC}"/>
+                <a16:creationId xmlns:a16="http://schemas.microsoft.com/office/drawing/2014/main" id="{325A1F26-5E4C-4221-A8E2-72600DD1133D}"/>
               </a:ext>
             </a:extLst>
           </p:cNvPr>
@@ -18083,7 +18352,7 @@
           <p:cNvPr id="14" name="">
             <a:extLst xmlns:a="http://schemas.openxmlformats.org/drawingml/2006/main">
               <a:ext uri="{FF2B5EF4-FFF2-40B4-BE49-F238E27FC236}">
-                <a16:creationId xmlns:a16="http://schemas.microsoft.com/office/drawing/2014/main" id="{0907B2FB-766B-481F-BF65-6A55C3720015}"/>
+                <a16:creationId xmlns:a16="http://schemas.microsoft.com/office/drawing/2014/main" id="{504E5A0B-560C-4F7B-A982-6AA7240DE7FF}"/>
               </a:ext>
             </a:extLst>
           </p:cNvPr>
@@ -18116,7 +18385,7 @@
           <p:cNvPr id="15" name="">
             <a:extLst xmlns:a="http://schemas.openxmlformats.org/drawingml/2006/main">
               <a:ext uri="{FF2B5EF4-FFF2-40B4-BE49-F238E27FC236}">
-                <a16:creationId xmlns:a16="http://schemas.microsoft.com/office/drawing/2014/main" id="{A6023F9D-1E50-4FEC-8D85-1321D89C98C8}"/>
+                <a16:creationId xmlns:a16="http://schemas.microsoft.com/office/drawing/2014/main" id="{242919CE-D581-4C90-8756-2737235A24F9}"/>
               </a:ext>
             </a:extLst>
           </p:cNvPr>
@@ -18151,7 +18420,7 @@
           <p:cNvPr id="16" name="">
             <a:extLst xmlns:a="http://schemas.openxmlformats.org/drawingml/2006/main">
               <a:ext uri="{FF2B5EF4-FFF2-40B4-BE49-F238E27FC236}">
-                <a16:creationId xmlns:a16="http://schemas.microsoft.com/office/drawing/2014/main" id="{C2DF2E12-133B-4768-89E2-74A224EEE399}"/>
+                <a16:creationId xmlns:a16="http://schemas.microsoft.com/office/drawing/2014/main" id="{F3154DFD-A61A-4BCD-A339-805B656BBF1B}"/>
               </a:ext>
             </a:extLst>
           </p:cNvPr>
@@ -18215,7 +18484,7 @@
           <p:cNvPr id="17" name="">
             <a:extLst xmlns:a="http://schemas.openxmlformats.org/drawingml/2006/main">
               <a:ext uri="{FF2B5EF4-FFF2-40B4-BE49-F238E27FC236}">
-                <a16:creationId xmlns:a16="http://schemas.microsoft.com/office/drawing/2014/main" id="{6955DC33-E07C-4B4B-9344-519A8F9EC879}"/>
+                <a16:creationId xmlns:a16="http://schemas.microsoft.com/office/drawing/2014/main" id="{1419D96B-8F1F-491E-9E88-BBBFDA0B7361}"/>
               </a:ext>
             </a:extLst>
           </p:cNvPr>
@@ -18279,7 +18548,7 @@
           <p:cNvPr id="18" name="">
             <a:extLst xmlns:a="http://schemas.openxmlformats.org/drawingml/2006/main">
               <a:ext uri="{FF2B5EF4-FFF2-40B4-BE49-F238E27FC236}">
-                <a16:creationId xmlns:a16="http://schemas.microsoft.com/office/drawing/2014/main" id="{BD242C6B-1970-4A61-A95B-172AD5A8B7D8}"/>
+                <a16:creationId xmlns:a16="http://schemas.microsoft.com/office/drawing/2014/main" id="{C0CED310-59A4-4F4F-A11C-775F40B26708}"/>
               </a:ext>
             </a:extLst>
           </p:cNvPr>
@@ -18314,7 +18583,7 @@
           <p:cNvPr id="19" name="">
             <a:extLst xmlns:a="http://schemas.openxmlformats.org/drawingml/2006/main">
               <a:ext uri="{FF2B5EF4-FFF2-40B4-BE49-F238E27FC236}">
-                <a16:creationId xmlns:a16="http://schemas.microsoft.com/office/drawing/2014/main" id="{E008311E-8F54-4D04-B510-4E999FA6F46B}"/>
+                <a16:creationId xmlns:a16="http://schemas.microsoft.com/office/drawing/2014/main" id="{3F14FAC9-CEB1-4D3B-AFAF-E6140C1D449B}"/>
               </a:ext>
             </a:extLst>
           </p:cNvPr>
@@ -18378,7 +18647,7 @@
           <p:cNvPr id="20" name="">
             <a:extLst xmlns:a="http://schemas.openxmlformats.org/drawingml/2006/main">
               <a:ext uri="{FF2B5EF4-FFF2-40B4-BE49-F238E27FC236}">
-                <a16:creationId xmlns:a16="http://schemas.microsoft.com/office/drawing/2014/main" id="{D0710D6A-5A0F-4774-937E-0557E2290A8C}"/>
+                <a16:creationId xmlns:a16="http://schemas.microsoft.com/office/drawing/2014/main" id="{057DF3A2-2C63-4FF3-976A-B982DD58D746}"/>
               </a:ext>
             </a:extLst>
           </p:cNvPr>
@@ -18413,7 +18682,7 @@
           <p:cNvPr id="21" name="">
             <a:extLst xmlns:a="http://schemas.openxmlformats.org/drawingml/2006/main">
               <a:ext uri="{FF2B5EF4-FFF2-40B4-BE49-F238E27FC236}">
-                <a16:creationId xmlns:a16="http://schemas.microsoft.com/office/drawing/2014/main" id="{F2030FCB-1B86-44C3-9769-BBCF4B3C1BD4}"/>
+                <a16:creationId xmlns:a16="http://schemas.microsoft.com/office/drawing/2014/main" id="{BC599B2A-6496-486A-8708-F7F409A1687E}"/>
               </a:ext>
             </a:extLst>
           </p:cNvPr>
@@ -18477,7 +18746,7 @@
           <p:cNvPr id="22" name="">
             <a:extLst xmlns:a="http://schemas.openxmlformats.org/drawingml/2006/main">
               <a:ext uri="{FF2B5EF4-FFF2-40B4-BE49-F238E27FC236}">
-                <a16:creationId xmlns:a16="http://schemas.microsoft.com/office/drawing/2014/main" id="{F23A8185-1331-4A64-B443-64AD7BBB98E9}"/>
+                <a16:creationId xmlns:a16="http://schemas.microsoft.com/office/drawing/2014/main" id="{5706D2E7-1A09-4785-8EFA-9370CD44286B}"/>
               </a:ext>
             </a:extLst>
           </p:cNvPr>
@@ -18512,7 +18781,7 @@
           <p:cNvPr id="23" name="">
             <a:extLst xmlns:a="http://schemas.openxmlformats.org/drawingml/2006/main">
               <a:ext uri="{FF2B5EF4-FFF2-40B4-BE49-F238E27FC236}">
-                <a16:creationId xmlns:a16="http://schemas.microsoft.com/office/drawing/2014/main" id="{5070E1F2-667E-4675-B958-60AC5BDCD68F}"/>
+                <a16:creationId xmlns:a16="http://schemas.microsoft.com/office/drawing/2014/main" id="{2D9D5551-CE24-4043-9C02-5E2F3E59CD23}"/>
               </a:ext>
             </a:extLst>
           </p:cNvPr>
@@ -18574,7 +18843,7 @@
     </p:spTree>
     <p:extLst>
       <p:ext uri="{BB962C8B-B14F-4D97-AF65-F5344CB8AC3E}">
-        <p14:creationId xmlns:p14="http://schemas.microsoft.com/office/powerpoint/2010/main" val="1716150123"/>
+        <p14:creationId xmlns:p14="http://schemas.microsoft.com/office/powerpoint/2010/main" val="510416341"/>
       </p:ext>
     </p:extLst>
   </p:cSld>
@@ -18605,7 +18874,7 @@
           <p:cNvPr id="1" name="">
             <a:extLst xmlns:a="http://schemas.openxmlformats.org/drawingml/2006/main">
               <a:ext uri="{FF2B5EF4-FFF2-40B4-BE49-F238E27FC236}">
-                <a16:creationId xmlns:a16="http://schemas.microsoft.com/office/drawing/2014/main" id="{119B93F0-631C-4D35-8DB4-82D546BA9E24}"/>
+                <a16:creationId xmlns:a16="http://schemas.microsoft.com/office/drawing/2014/main" id="{F01CAE03-89D2-4B16-87D1-A14B1403F64D}"/>
               </a:ext>
             </a:extLst>
           </p:cNvPr>
@@ -18640,7 +18909,7 @@
           <p:cNvPr id="2" name="">
             <a:extLst xmlns:a="http://schemas.openxmlformats.org/drawingml/2006/main">
               <a:ext uri="{FF2B5EF4-FFF2-40B4-BE49-F238E27FC236}">
-                <a16:creationId xmlns:a16="http://schemas.microsoft.com/office/drawing/2014/main" id="{09D06255-3287-473B-89D5-2AB7A2DB21AA}"/>
+                <a16:creationId xmlns:a16="http://schemas.microsoft.com/office/drawing/2014/main" id="{506D9C5C-1E37-4B79-AFA1-A883AD1337D6}"/>
               </a:ext>
             </a:extLst>
           </p:cNvPr>
@@ -18704,7 +18973,7 @@
           <p:cNvPr id="3" name="">
             <a:extLst xmlns:a="http://schemas.openxmlformats.org/drawingml/2006/main">
               <a:ext uri="{FF2B5EF4-FFF2-40B4-BE49-F238E27FC236}">
-                <a16:creationId xmlns:a16="http://schemas.microsoft.com/office/drawing/2014/main" id="{9637C710-B374-4A04-B56A-7A3F5F04B9F9}"/>
+                <a16:creationId xmlns:a16="http://schemas.microsoft.com/office/drawing/2014/main" id="{06E0DCCF-1132-4C8D-9EC0-F9B025EDB0A5}"/>
               </a:ext>
             </a:extLst>
           </p:cNvPr>
@@ -18768,7 +19037,7 @@
           <p:cNvPr id="4" name="">
             <a:extLst xmlns:a="http://schemas.openxmlformats.org/drawingml/2006/main">
               <a:ext uri="{FF2B5EF4-FFF2-40B4-BE49-F238E27FC236}">
-                <a16:creationId xmlns:a16="http://schemas.microsoft.com/office/drawing/2014/main" id="{B877AB8A-CBA3-4DD7-A196-F8F356B39A08}"/>
+                <a16:creationId xmlns:a16="http://schemas.microsoft.com/office/drawing/2014/main" id="{4C0CE204-F3F3-4672-A5EE-CBA5C2036314}"/>
               </a:ext>
             </a:extLst>
           </p:cNvPr>
@@ -18832,7 +19101,7 @@
           <p:cNvPr id="5" name="">
             <a:extLst xmlns:a="http://schemas.openxmlformats.org/drawingml/2006/main">
               <a:ext uri="{FF2B5EF4-FFF2-40B4-BE49-F238E27FC236}">
-                <a16:creationId xmlns:a16="http://schemas.microsoft.com/office/drawing/2014/main" id="{EA328F83-D560-462D-808B-F82F011C6BA9}"/>
+                <a16:creationId xmlns:a16="http://schemas.microsoft.com/office/drawing/2014/main" id="{50775308-2FCC-49F3-A871-464C02DB28B0}"/>
               </a:ext>
             </a:extLst>
           </p:cNvPr>
@@ -18896,7 +19165,7 @@
           <p:cNvPr id="6" name="">
             <a:extLst xmlns:a="http://schemas.openxmlformats.org/drawingml/2006/main">
               <a:ext uri="{FF2B5EF4-FFF2-40B4-BE49-F238E27FC236}">
-                <a16:creationId xmlns:a16="http://schemas.microsoft.com/office/drawing/2014/main" id="{6A76BDE3-D255-461D-B9A3-1F3C3C51019D}"/>
+                <a16:creationId xmlns:a16="http://schemas.microsoft.com/office/drawing/2014/main" id="{885A28D0-DACC-4F96-8DA7-3E196FA93B4C}"/>
               </a:ext>
             </a:extLst>
           </p:cNvPr>
@@ -18929,7 +19198,7 @@
           <p:cNvPr id="7" name="">
             <a:extLst xmlns:a="http://schemas.openxmlformats.org/drawingml/2006/main">
               <a:ext uri="{FF2B5EF4-FFF2-40B4-BE49-F238E27FC236}">
-                <a16:creationId xmlns:a16="http://schemas.microsoft.com/office/drawing/2014/main" id="{34D4F735-E12C-45DB-8870-21FE7A74EFA4}"/>
+                <a16:creationId xmlns:a16="http://schemas.microsoft.com/office/drawing/2014/main" id="{5D1C6293-E86F-4CBC-B4A3-FD7B806AF63F}"/>
               </a:ext>
             </a:extLst>
           </p:cNvPr>
@@ -18964,7 +19233,7 @@
           <p:cNvPr id="8" name="">
             <a:extLst xmlns:a="http://schemas.openxmlformats.org/drawingml/2006/main">
               <a:ext uri="{FF2B5EF4-FFF2-40B4-BE49-F238E27FC236}">
-                <a16:creationId xmlns:a16="http://schemas.microsoft.com/office/drawing/2014/main" id="{55AA66D4-6C7A-4998-8FDA-42EE5099E44E}"/>
+                <a16:creationId xmlns:a16="http://schemas.microsoft.com/office/drawing/2014/main" id="{1C3AD44C-6A7B-4586-9FE2-A8BFFB04D253}"/>
               </a:ext>
             </a:extLst>
           </p:cNvPr>
@@ -19028,7 +19297,7 @@
           <p:cNvPr id="9" name="">
             <a:extLst xmlns:a="http://schemas.openxmlformats.org/drawingml/2006/main">
               <a:ext uri="{FF2B5EF4-FFF2-40B4-BE49-F238E27FC236}">
-                <a16:creationId xmlns:a16="http://schemas.microsoft.com/office/drawing/2014/main" id="{B0347A43-977F-44D6-A2ED-27847F23813D}"/>
+                <a16:creationId xmlns:a16="http://schemas.microsoft.com/office/drawing/2014/main" id="{2976FEA6-94E2-40FC-87EA-AC2E39DDED5F}"/>
               </a:ext>
             </a:extLst>
           </p:cNvPr>
@@ -19074,7 +19343,7 @@
           <p:cNvPr id="10" name="">
             <a:extLst xmlns:a="http://schemas.openxmlformats.org/drawingml/2006/main">
               <a:ext uri="{FF2B5EF4-FFF2-40B4-BE49-F238E27FC236}">
-                <a16:creationId xmlns:a16="http://schemas.microsoft.com/office/drawing/2014/main" id="{5A2B2E29-6E7C-4854-9969-A40FFFD012CC}"/>
+                <a16:creationId xmlns:a16="http://schemas.microsoft.com/office/drawing/2014/main" id="{2194A47A-7E88-42B9-B679-356A4C6543B4}"/>
               </a:ext>
             </a:extLst>
           </p:cNvPr>
@@ -19107,7 +19376,7 @@
           <p:cNvPr id="11" name="">
             <a:extLst xmlns:a="http://schemas.openxmlformats.org/drawingml/2006/main">
               <a:ext uri="{FF2B5EF4-FFF2-40B4-BE49-F238E27FC236}">
-                <a16:creationId xmlns:a16="http://schemas.microsoft.com/office/drawing/2014/main" id="{54668105-635F-4461-9EED-12F365903D3B}"/>
+                <a16:creationId xmlns:a16="http://schemas.microsoft.com/office/drawing/2014/main" id="{968DF523-DCDD-48C2-9830-62A5D6A71514}"/>
               </a:ext>
             </a:extLst>
           </p:cNvPr>
@@ -19142,7 +19411,7 @@
           <p:cNvPr id="12" name="">
             <a:extLst xmlns:a="http://schemas.openxmlformats.org/drawingml/2006/main">
               <a:ext uri="{FF2B5EF4-FFF2-40B4-BE49-F238E27FC236}">
-                <a16:creationId xmlns:a16="http://schemas.microsoft.com/office/drawing/2014/main" id="{4F1227F2-5E3E-4F7D-964C-DB7038CBEFAF}"/>
+                <a16:creationId xmlns:a16="http://schemas.microsoft.com/office/drawing/2014/main" id="{6D776A1B-48B8-41C9-937A-A0BB310170BF}"/>
               </a:ext>
             </a:extLst>
           </p:cNvPr>
@@ -19206,7 +19475,7 @@
           <p:cNvPr id="13" name="">
             <a:extLst xmlns:a="http://schemas.openxmlformats.org/drawingml/2006/main">
               <a:ext uri="{FF2B5EF4-FFF2-40B4-BE49-F238E27FC236}">
-                <a16:creationId xmlns:a16="http://schemas.microsoft.com/office/drawing/2014/main" id="{B36D6CB5-6631-4BB4-A663-BE0FE22833D1}"/>
+                <a16:creationId xmlns:a16="http://schemas.microsoft.com/office/drawing/2014/main" id="{93C66FC3-1D6A-44D0-AD41-4B31BB06904F}"/>
               </a:ext>
             </a:extLst>
           </p:cNvPr>
@@ -19252,7 +19521,7 @@
           <p:cNvPr id="14" name="">
             <a:extLst xmlns:a="http://schemas.openxmlformats.org/drawingml/2006/main">
               <a:ext uri="{FF2B5EF4-FFF2-40B4-BE49-F238E27FC236}">
-                <a16:creationId xmlns:a16="http://schemas.microsoft.com/office/drawing/2014/main" id="{B1B34053-0688-487A-B972-9408422EFAD7}"/>
+                <a16:creationId xmlns:a16="http://schemas.microsoft.com/office/drawing/2014/main" id="{ED121A7B-47FF-4ABA-AFD1-B0B732120232}"/>
               </a:ext>
             </a:extLst>
           </p:cNvPr>
@@ -19287,7 +19556,7 @@
           <p:cNvPr id="15" name="">
             <a:extLst xmlns:a="http://schemas.openxmlformats.org/drawingml/2006/main">
               <a:ext uri="{FF2B5EF4-FFF2-40B4-BE49-F238E27FC236}">
-                <a16:creationId xmlns:a16="http://schemas.microsoft.com/office/drawing/2014/main" id="{EF11F3BD-E217-4919-841C-C04E962F4871}"/>
+                <a16:creationId xmlns:a16="http://schemas.microsoft.com/office/drawing/2014/main" id="{59F5D502-9333-45B5-816B-86F5250F48EC}"/>
               </a:ext>
             </a:extLst>
           </p:cNvPr>
@@ -19351,7 +19620,7 @@
           <p:cNvPr id="16" name="">
             <a:extLst xmlns:a="http://schemas.openxmlformats.org/drawingml/2006/main">
               <a:ext uri="{FF2B5EF4-FFF2-40B4-BE49-F238E27FC236}">
-                <a16:creationId xmlns:a16="http://schemas.microsoft.com/office/drawing/2014/main" id="{BB2628C7-D28B-4B76-952A-5BE2835A5112}"/>
+                <a16:creationId xmlns:a16="http://schemas.microsoft.com/office/drawing/2014/main" id="{447FF0DE-63A9-4730-BE68-9A21B3485495}"/>
               </a:ext>
             </a:extLst>
           </p:cNvPr>
@@ -19386,7 +19655,7 @@
           <p:cNvPr id="17" name="">
             <a:extLst xmlns:a="http://schemas.openxmlformats.org/drawingml/2006/main">
               <a:ext uri="{FF2B5EF4-FFF2-40B4-BE49-F238E27FC236}">
-                <a16:creationId xmlns:a16="http://schemas.microsoft.com/office/drawing/2014/main" id="{242D00C0-2BF2-40FC-A429-B2F1BBBD2B1E}"/>
+                <a16:creationId xmlns:a16="http://schemas.microsoft.com/office/drawing/2014/main" id="{04C237CB-CBFB-4144-A26B-A3E1F7882E9D}"/>
               </a:ext>
             </a:extLst>
           </p:cNvPr>
@@ -19450,7 +19719,7 @@
           <p:cNvPr id="18" name="">
             <a:extLst xmlns:a="http://schemas.openxmlformats.org/drawingml/2006/main">
               <a:ext uri="{FF2B5EF4-FFF2-40B4-BE49-F238E27FC236}">
-                <a16:creationId xmlns:a16="http://schemas.microsoft.com/office/drawing/2014/main" id="{B8619EC7-FEDB-4CB3-9A93-77D8CC47044A}"/>
+                <a16:creationId xmlns:a16="http://schemas.microsoft.com/office/drawing/2014/main" id="{8995B164-72F8-4423-A376-C7E973D56C91}"/>
               </a:ext>
             </a:extLst>
           </p:cNvPr>
@@ -19485,7 +19754,7 @@
           <p:cNvPr id="19" name="">
             <a:extLst xmlns:a="http://schemas.openxmlformats.org/drawingml/2006/main">
               <a:ext uri="{FF2B5EF4-FFF2-40B4-BE49-F238E27FC236}">
-                <a16:creationId xmlns:a16="http://schemas.microsoft.com/office/drawing/2014/main" id="{D36B943F-E31B-4598-BE5E-662839C633A3}"/>
+                <a16:creationId xmlns:a16="http://schemas.microsoft.com/office/drawing/2014/main" id="{FA000A0D-57BC-48DD-BA5D-79C0D02B98AA}"/>
               </a:ext>
             </a:extLst>
           </p:cNvPr>
@@ -19549,7 +19818,7 @@
           <p:cNvPr id="20" name="">
             <a:extLst xmlns:a="http://schemas.openxmlformats.org/drawingml/2006/main">
               <a:ext uri="{FF2B5EF4-FFF2-40B4-BE49-F238E27FC236}">
-                <a16:creationId xmlns:a16="http://schemas.microsoft.com/office/drawing/2014/main" id="{745B1210-7C71-4F0B-B27E-297AF32AA737}"/>
+                <a16:creationId xmlns:a16="http://schemas.microsoft.com/office/drawing/2014/main" id="{99CBBFC5-96E8-40CF-A74B-5C2365F19828}"/>
               </a:ext>
             </a:extLst>
           </p:cNvPr>
@@ -19584,7 +19853,7 @@
           <p:cNvPr id="21" name="">
             <a:extLst xmlns:a="http://schemas.openxmlformats.org/drawingml/2006/main">
               <a:ext uri="{FF2B5EF4-FFF2-40B4-BE49-F238E27FC236}">
-                <a16:creationId xmlns:a16="http://schemas.microsoft.com/office/drawing/2014/main" id="{0D935976-D1ED-4A1F-81BE-EE9C1596ECA7}"/>
+                <a16:creationId xmlns:a16="http://schemas.microsoft.com/office/drawing/2014/main" id="{F9A43307-EE28-4F19-B0FB-C75DC11581AD}"/>
               </a:ext>
             </a:extLst>
           </p:cNvPr>
@@ -19648,7 +19917,7 @@
           <p:cNvPr id="22" name="">
             <a:extLst xmlns:a="http://schemas.openxmlformats.org/drawingml/2006/main">
               <a:ext uri="{FF2B5EF4-FFF2-40B4-BE49-F238E27FC236}">
-                <a16:creationId xmlns:a16="http://schemas.microsoft.com/office/drawing/2014/main" id="{CA300045-61A6-46FA-91BD-3ACDBF22C9D3}"/>
+                <a16:creationId xmlns:a16="http://schemas.microsoft.com/office/drawing/2014/main" id="{40A82050-7FDB-4D79-90BF-584BCCA9BD16}"/>
               </a:ext>
             </a:extLst>
           </p:cNvPr>
@@ -19708,7 +19977,7 @@
     </p:spTree>
     <p:extLst>
       <p:ext uri="{BB962C8B-B14F-4D97-AF65-F5344CB8AC3E}">
-        <p14:creationId xmlns:p14="http://schemas.microsoft.com/office/powerpoint/2010/main" val="1861733781"/>
+        <p14:creationId xmlns:p14="http://schemas.microsoft.com/office/powerpoint/2010/main" val="1899932613"/>
       </p:ext>
     </p:extLst>
   </p:cSld>
@@ -19739,7 +20008,7 @@
           <p:cNvPr id="1" name="">
             <a:extLst xmlns:a="http://schemas.openxmlformats.org/drawingml/2006/main">
               <a:ext uri="{FF2B5EF4-FFF2-40B4-BE49-F238E27FC236}">
-                <a16:creationId xmlns:a16="http://schemas.microsoft.com/office/drawing/2014/main" id="{DAD499DA-1FC2-46AF-865D-C439D4C2E16B}"/>
+                <a16:creationId xmlns:a16="http://schemas.microsoft.com/office/drawing/2014/main" id="{C6C632DE-4740-4436-A9B8-7B9F7369EEC5}"/>
               </a:ext>
             </a:extLst>
           </p:cNvPr>
@@ -19774,7 +20043,7 @@
           <p:cNvPr id="2" name="">
             <a:extLst xmlns:a="http://schemas.openxmlformats.org/drawingml/2006/main">
               <a:ext uri="{FF2B5EF4-FFF2-40B4-BE49-F238E27FC236}">
-                <a16:creationId xmlns:a16="http://schemas.microsoft.com/office/drawing/2014/main" id="{CE890645-06A8-48A7-A9B3-ED76E5816AD7}"/>
+                <a16:creationId xmlns:a16="http://schemas.microsoft.com/office/drawing/2014/main" id="{CBA519FB-9DB9-4776-9D03-E6A60B0A4BEF}"/>
               </a:ext>
             </a:extLst>
           </p:cNvPr>
@@ -19838,7 +20107,7 @@
           <p:cNvPr id="3" name="">
             <a:extLst xmlns:a="http://schemas.openxmlformats.org/drawingml/2006/main">
               <a:ext uri="{FF2B5EF4-FFF2-40B4-BE49-F238E27FC236}">
-                <a16:creationId xmlns:a16="http://schemas.microsoft.com/office/drawing/2014/main" id="{6020F537-B36C-4145-92B5-FC04F95719BE}"/>
+                <a16:creationId xmlns:a16="http://schemas.microsoft.com/office/drawing/2014/main" id="{E83F3B6E-F790-4590-B824-223EF9763C7A}"/>
               </a:ext>
             </a:extLst>
           </p:cNvPr>
@@ -19902,7 +20171,7 @@
           <p:cNvPr id="4" name="">
             <a:extLst xmlns:a="http://schemas.openxmlformats.org/drawingml/2006/main">
               <a:ext uri="{FF2B5EF4-FFF2-40B4-BE49-F238E27FC236}">
-                <a16:creationId xmlns:a16="http://schemas.microsoft.com/office/drawing/2014/main" id="{C87A812E-E80F-4239-A904-132D7A0C8672}"/>
+                <a16:creationId xmlns:a16="http://schemas.microsoft.com/office/drawing/2014/main" id="{925F2919-C1D1-48AA-A238-56A126F501C2}"/>
               </a:ext>
             </a:extLst>
           </p:cNvPr>
@@ -19966,7 +20235,7 @@
           <p:cNvPr id="5" name="">
             <a:extLst xmlns:a="http://schemas.openxmlformats.org/drawingml/2006/main">
               <a:ext uri="{FF2B5EF4-FFF2-40B4-BE49-F238E27FC236}">
-                <a16:creationId xmlns:a16="http://schemas.microsoft.com/office/drawing/2014/main" id="{8936280D-7BAB-4626-83C9-378E0C843AB5}"/>
+                <a16:creationId xmlns:a16="http://schemas.microsoft.com/office/drawing/2014/main" id="{0CB9C1E2-4E96-4DFC-999B-88F8248251ED}"/>
               </a:ext>
             </a:extLst>
           </p:cNvPr>
@@ -20030,7 +20299,7 @@
           <p:cNvPr id="6" name="">
             <a:extLst xmlns:a="http://schemas.openxmlformats.org/drawingml/2006/main">
               <a:ext uri="{FF2B5EF4-FFF2-40B4-BE49-F238E27FC236}">
-                <a16:creationId xmlns:a16="http://schemas.microsoft.com/office/drawing/2014/main" id="{33583CA9-DB8B-4233-9309-B5BD00B93637}"/>
+                <a16:creationId xmlns:a16="http://schemas.microsoft.com/office/drawing/2014/main" id="{886C1296-FD5D-434D-B586-A2DF57A10572}"/>
               </a:ext>
             </a:extLst>
           </p:cNvPr>
@@ -20063,7 +20332,7 @@
           <p:cNvPr id="7" name="">
             <a:extLst xmlns:a="http://schemas.openxmlformats.org/drawingml/2006/main">
               <a:ext uri="{FF2B5EF4-FFF2-40B4-BE49-F238E27FC236}">
-                <a16:creationId xmlns:a16="http://schemas.microsoft.com/office/drawing/2014/main" id="{588BB715-A8B4-492B-BA9A-67F1307837FA}"/>
+                <a16:creationId xmlns:a16="http://schemas.microsoft.com/office/drawing/2014/main" id="{65A207FD-FDD6-4A71-A8CF-F48244A2CDA9}"/>
               </a:ext>
             </a:extLst>
           </p:cNvPr>
@@ -20127,7 +20396,7 @@
           <p:cNvPr id="8" name="">
             <a:extLst xmlns:a="http://schemas.openxmlformats.org/drawingml/2006/main">
               <a:ext uri="{FF2B5EF4-FFF2-40B4-BE49-F238E27FC236}">
-                <a16:creationId xmlns:a16="http://schemas.microsoft.com/office/drawing/2014/main" id="{2BFF54BF-B4EE-46FE-B9DF-21220DFF8A26}"/>
+                <a16:creationId xmlns:a16="http://schemas.microsoft.com/office/drawing/2014/main" id="{B0A441F7-DEBE-4241-8FB8-9D37BD7B4E0D}"/>
               </a:ext>
             </a:extLst>
           </p:cNvPr>
@@ -20191,7 +20460,7 @@
           <p:cNvPr id="9" name="">
             <a:extLst xmlns:a="http://schemas.openxmlformats.org/drawingml/2006/main">
               <a:ext uri="{FF2B5EF4-FFF2-40B4-BE49-F238E27FC236}">
-                <a16:creationId xmlns:a16="http://schemas.microsoft.com/office/drawing/2014/main" id="{2E98C092-49E8-4D59-BC95-C509588331DD}"/>
+                <a16:creationId xmlns:a16="http://schemas.microsoft.com/office/drawing/2014/main" id="{DAECB04A-9C5D-47C6-B537-7A4711537492}"/>
               </a:ext>
             </a:extLst>
           </p:cNvPr>
@@ -20226,7 +20495,7 @@
           <p:cNvPr id="10" name="">
             <a:extLst xmlns:a="http://schemas.openxmlformats.org/drawingml/2006/main">
               <a:ext uri="{FF2B5EF4-FFF2-40B4-BE49-F238E27FC236}">
-                <a16:creationId xmlns:a16="http://schemas.microsoft.com/office/drawing/2014/main" id="{5717CB11-A692-473C-8027-CCF678F2E6FE}"/>
+                <a16:creationId xmlns:a16="http://schemas.microsoft.com/office/drawing/2014/main" id="{14A3991D-C793-4D35-B72A-971D08E5228A}"/>
               </a:ext>
             </a:extLst>
           </p:cNvPr>
@@ -20259,7 +20528,7 @@
           <p:cNvPr id="11" name="">
             <a:extLst xmlns:a="http://schemas.openxmlformats.org/drawingml/2006/main">
               <a:ext uri="{FF2B5EF4-FFF2-40B4-BE49-F238E27FC236}">
-                <a16:creationId xmlns:a16="http://schemas.microsoft.com/office/drawing/2014/main" id="{C0DD31DD-8129-434F-ABC1-317AA96EFB17}"/>
+                <a16:creationId xmlns:a16="http://schemas.microsoft.com/office/drawing/2014/main" id="{9E5C9248-773C-463E-9438-E0CEE0000653}"/>
               </a:ext>
             </a:extLst>
           </p:cNvPr>
@@ -20323,7 +20592,7 @@
           <p:cNvPr id="12" name="">
             <a:extLst xmlns:a="http://schemas.openxmlformats.org/drawingml/2006/main">
               <a:ext uri="{FF2B5EF4-FFF2-40B4-BE49-F238E27FC236}">
-                <a16:creationId xmlns:a16="http://schemas.microsoft.com/office/drawing/2014/main" id="{0002D420-C724-4C69-9FC8-05A071D146EF}"/>
+                <a16:creationId xmlns:a16="http://schemas.microsoft.com/office/drawing/2014/main" id="{3A6BB6B3-F738-40B4-B19F-1014BAEDD5F8}"/>
               </a:ext>
             </a:extLst>
           </p:cNvPr>
@@ -20387,7 +20656,7 @@
           <p:cNvPr id="13" name="">
             <a:extLst xmlns:a="http://schemas.openxmlformats.org/drawingml/2006/main">
               <a:ext uri="{FF2B5EF4-FFF2-40B4-BE49-F238E27FC236}">
-                <a16:creationId xmlns:a16="http://schemas.microsoft.com/office/drawing/2014/main" id="{B0BCCCD9-6AAF-472F-9908-C27D208E3C7F}"/>
+                <a16:creationId xmlns:a16="http://schemas.microsoft.com/office/drawing/2014/main" id="{424DD769-296D-4067-817A-5EC4B916539C}"/>
               </a:ext>
             </a:extLst>
           </p:cNvPr>
@@ -20422,7 +20691,7 @@
           <p:cNvPr id="14" name="">
             <a:extLst xmlns:a="http://schemas.openxmlformats.org/drawingml/2006/main">
               <a:ext uri="{FF2B5EF4-FFF2-40B4-BE49-F238E27FC236}">
-                <a16:creationId xmlns:a16="http://schemas.microsoft.com/office/drawing/2014/main" id="{642019A4-4310-4E82-BA2E-21B059291FE7}"/>
+                <a16:creationId xmlns:a16="http://schemas.microsoft.com/office/drawing/2014/main" id="{BCCB9B19-7861-49EB-ACA8-04B53DF3A8D8}"/>
               </a:ext>
             </a:extLst>
           </p:cNvPr>
@@ -20455,7 +20724,7 @@
           <p:cNvPr id="15" name="">
             <a:extLst xmlns:a="http://schemas.openxmlformats.org/drawingml/2006/main">
               <a:ext uri="{FF2B5EF4-FFF2-40B4-BE49-F238E27FC236}">
-                <a16:creationId xmlns:a16="http://schemas.microsoft.com/office/drawing/2014/main" id="{C1867B79-DDAA-4321-AE24-8FCF55AF636D}"/>
+                <a16:creationId xmlns:a16="http://schemas.microsoft.com/office/drawing/2014/main" id="{1B4F7B24-F6DC-4321-9332-DD1E5D84EE86}"/>
               </a:ext>
             </a:extLst>
           </p:cNvPr>
@@ -20519,7 +20788,7 @@
           <p:cNvPr id="16" name="">
             <a:extLst xmlns:a="http://schemas.openxmlformats.org/drawingml/2006/main">
               <a:ext uri="{FF2B5EF4-FFF2-40B4-BE49-F238E27FC236}">
-                <a16:creationId xmlns:a16="http://schemas.microsoft.com/office/drawing/2014/main" id="{168A1605-91D7-4B37-B01C-2B9A931AF04F}"/>
+                <a16:creationId xmlns:a16="http://schemas.microsoft.com/office/drawing/2014/main" id="{D2428E32-0075-4C47-A40D-CF00E244FAB7}"/>
               </a:ext>
             </a:extLst>
           </p:cNvPr>
@@ -20583,7 +20852,7 @@
           <p:cNvPr id="17" name="">
             <a:extLst xmlns:a="http://schemas.openxmlformats.org/drawingml/2006/main">
               <a:ext uri="{FF2B5EF4-FFF2-40B4-BE49-F238E27FC236}">
-                <a16:creationId xmlns:a16="http://schemas.microsoft.com/office/drawing/2014/main" id="{6AF8F487-8AD3-4CDF-BCE3-12D69298E8B6}"/>
+                <a16:creationId xmlns:a16="http://schemas.microsoft.com/office/drawing/2014/main" id="{67A1B934-DB9B-4DD3-97A8-7D02B6758B5F}"/>
               </a:ext>
             </a:extLst>
           </p:cNvPr>
@@ -20618,7 +20887,7 @@
           <p:cNvPr id="18" name="">
             <a:extLst xmlns:a="http://schemas.openxmlformats.org/drawingml/2006/main">
               <a:ext uri="{FF2B5EF4-FFF2-40B4-BE49-F238E27FC236}">
-                <a16:creationId xmlns:a16="http://schemas.microsoft.com/office/drawing/2014/main" id="{C099040F-DDFD-49BF-BCD9-F11BF1F7277E}"/>
+                <a16:creationId xmlns:a16="http://schemas.microsoft.com/office/drawing/2014/main" id="{9BAF84BE-E22B-4DBE-AEEF-F3C3904A9AE7}"/>
               </a:ext>
             </a:extLst>
           </p:cNvPr>
@@ -20651,7 +20920,7 @@
           <p:cNvPr id="19" name="">
             <a:extLst xmlns:a="http://schemas.openxmlformats.org/drawingml/2006/main">
               <a:ext uri="{FF2B5EF4-FFF2-40B4-BE49-F238E27FC236}">
-                <a16:creationId xmlns:a16="http://schemas.microsoft.com/office/drawing/2014/main" id="{3C5C1860-8B64-4AE9-ADC1-301AD301042B}"/>
+                <a16:creationId xmlns:a16="http://schemas.microsoft.com/office/drawing/2014/main" id="{A56BCE8E-BD73-4DA9-8EBE-23EA50877306}"/>
               </a:ext>
             </a:extLst>
           </p:cNvPr>
@@ -20715,7 +20984,7 @@
           <p:cNvPr id="20" name="">
             <a:extLst xmlns:a="http://schemas.openxmlformats.org/drawingml/2006/main">
               <a:ext uri="{FF2B5EF4-FFF2-40B4-BE49-F238E27FC236}">
-                <a16:creationId xmlns:a16="http://schemas.microsoft.com/office/drawing/2014/main" id="{A85800F1-6DA5-42EC-A4F3-7375EAAE0B9D}"/>
+                <a16:creationId xmlns:a16="http://schemas.microsoft.com/office/drawing/2014/main" id="{B8B81B66-654B-4107-82F2-62AD300A534A}"/>
               </a:ext>
             </a:extLst>
           </p:cNvPr>
@@ -20779,7 +21048,7 @@
           <p:cNvPr id="21" name="">
             <a:extLst xmlns:a="http://schemas.openxmlformats.org/drawingml/2006/main">
               <a:ext uri="{FF2B5EF4-FFF2-40B4-BE49-F238E27FC236}">
-                <a16:creationId xmlns:a16="http://schemas.microsoft.com/office/drawing/2014/main" id="{5CED4A90-51B9-4EA9-ADA1-53A213DA844E}"/>
+                <a16:creationId xmlns:a16="http://schemas.microsoft.com/office/drawing/2014/main" id="{D03A69E0-5D65-4446-8FB7-B5AE03CC8784}"/>
               </a:ext>
             </a:extLst>
           </p:cNvPr>
@@ -20814,7 +21083,7 @@
           <p:cNvPr id="22" name="">
             <a:extLst xmlns:a="http://schemas.openxmlformats.org/drawingml/2006/main">
               <a:ext uri="{FF2B5EF4-FFF2-40B4-BE49-F238E27FC236}">
-                <a16:creationId xmlns:a16="http://schemas.microsoft.com/office/drawing/2014/main" id="{1D6C93A2-BFD0-48E8-B9F6-E3286926E567}"/>
+                <a16:creationId xmlns:a16="http://schemas.microsoft.com/office/drawing/2014/main" id="{E0C69035-99B7-41C5-B5D7-CA75EF5FAC3A}"/>
               </a:ext>
             </a:extLst>
           </p:cNvPr>
@@ -20847,7 +21116,7 @@
           <p:cNvPr id="23" name="">
             <a:extLst xmlns:a="http://schemas.openxmlformats.org/drawingml/2006/main">
               <a:ext uri="{FF2B5EF4-FFF2-40B4-BE49-F238E27FC236}">
-                <a16:creationId xmlns:a16="http://schemas.microsoft.com/office/drawing/2014/main" id="{4EA9E672-86A6-4A02-A796-52F890DC0EEA}"/>
+                <a16:creationId xmlns:a16="http://schemas.microsoft.com/office/drawing/2014/main" id="{6778B8A7-121C-4B8A-ACC1-AD7D45FA83A7}"/>
               </a:ext>
             </a:extLst>
           </p:cNvPr>
@@ -20911,7 +21180,7 @@
           <p:cNvPr id="24" name="">
             <a:extLst xmlns:a="http://schemas.openxmlformats.org/drawingml/2006/main">
               <a:ext uri="{FF2B5EF4-FFF2-40B4-BE49-F238E27FC236}">
-                <a16:creationId xmlns:a16="http://schemas.microsoft.com/office/drawing/2014/main" id="{3E8D313D-D558-4472-82B3-065459D3EA69}"/>
+                <a16:creationId xmlns:a16="http://schemas.microsoft.com/office/drawing/2014/main" id="{802C617A-B7E2-4278-B3D5-D5DFC0B4F26A}"/>
               </a:ext>
             </a:extLst>
           </p:cNvPr>
@@ -20975,7 +21244,7 @@
           <p:cNvPr id="25" name="">
             <a:extLst xmlns:a="http://schemas.openxmlformats.org/drawingml/2006/main">
               <a:ext uri="{FF2B5EF4-FFF2-40B4-BE49-F238E27FC236}">
-                <a16:creationId xmlns:a16="http://schemas.microsoft.com/office/drawing/2014/main" id="{E16E52EF-4719-4B6F-AB52-917B2482590E}"/>
+                <a16:creationId xmlns:a16="http://schemas.microsoft.com/office/drawing/2014/main" id="{F8591B6D-7BA2-4DF1-BE51-96067E7961F5}"/>
               </a:ext>
             </a:extLst>
           </p:cNvPr>
@@ -21008,7 +21277,7 @@
           <p:cNvPr id="26" name="">
             <a:extLst xmlns:a="http://schemas.openxmlformats.org/drawingml/2006/main">
               <a:ext uri="{FF2B5EF4-FFF2-40B4-BE49-F238E27FC236}">
-                <a16:creationId xmlns:a16="http://schemas.microsoft.com/office/drawing/2014/main" id="{F0FCDBAD-74C2-441C-911F-5B6E0E8C0946}"/>
+                <a16:creationId xmlns:a16="http://schemas.microsoft.com/office/drawing/2014/main" id="{A95DC64C-E827-4DA7-941C-51EBDC6CACE5}"/>
               </a:ext>
             </a:extLst>
           </p:cNvPr>
@@ -21043,7 +21312,7 @@
           <p:cNvPr id="27" name="">
             <a:extLst xmlns:a="http://schemas.openxmlformats.org/drawingml/2006/main">
               <a:ext uri="{FF2B5EF4-FFF2-40B4-BE49-F238E27FC236}">
-                <a16:creationId xmlns:a16="http://schemas.microsoft.com/office/drawing/2014/main" id="{B0B3D94C-7FC4-4AAA-94C0-02F83767BBB2}"/>
+                <a16:creationId xmlns:a16="http://schemas.microsoft.com/office/drawing/2014/main" id="{32840F60-4602-41AB-8ECF-F39D1AA8891A}"/>
               </a:ext>
             </a:extLst>
           </p:cNvPr>
@@ -21107,7 +21376,7 @@
           <p:cNvPr id="28" name="">
             <a:extLst xmlns:a="http://schemas.openxmlformats.org/drawingml/2006/main">
               <a:ext uri="{FF2B5EF4-FFF2-40B4-BE49-F238E27FC236}">
-                <a16:creationId xmlns:a16="http://schemas.microsoft.com/office/drawing/2014/main" id="{B31CCFEF-BE46-49EB-80FE-C810E86E51DB}"/>
+                <a16:creationId xmlns:a16="http://schemas.microsoft.com/office/drawing/2014/main" id="{F8E10F26-65E8-4CA0-B4F8-257B3F0CDE1D}"/>
               </a:ext>
             </a:extLst>
           </p:cNvPr>
@@ -21171,7 +21440,7 @@
           <p:cNvPr id="29" name="">
             <a:extLst xmlns:a="http://schemas.openxmlformats.org/drawingml/2006/main">
               <a:ext uri="{FF2B5EF4-FFF2-40B4-BE49-F238E27FC236}">
-                <a16:creationId xmlns:a16="http://schemas.microsoft.com/office/drawing/2014/main" id="{66A889BA-BFF8-4577-B903-B2DD4454ED89}"/>
+                <a16:creationId xmlns:a16="http://schemas.microsoft.com/office/drawing/2014/main" id="{F005581C-FAD5-492C-935B-3ACA82B879A0}"/>
               </a:ext>
             </a:extLst>
           </p:cNvPr>
@@ -21204,7 +21473,7 @@
           <p:cNvPr id="30" name="">
             <a:extLst xmlns:a="http://schemas.openxmlformats.org/drawingml/2006/main">
               <a:ext uri="{FF2B5EF4-FFF2-40B4-BE49-F238E27FC236}">
-                <a16:creationId xmlns:a16="http://schemas.microsoft.com/office/drawing/2014/main" id="{A455BFBE-7A37-48E8-B72F-286110B34776}"/>
+                <a16:creationId xmlns:a16="http://schemas.microsoft.com/office/drawing/2014/main" id="{C2C81932-7048-41D0-8C49-987645237E32}"/>
               </a:ext>
             </a:extLst>
           </p:cNvPr>
@@ -21239,7 +21508,7 @@
           <p:cNvPr id="31" name="">
             <a:extLst xmlns:a="http://schemas.openxmlformats.org/drawingml/2006/main">
               <a:ext uri="{FF2B5EF4-FFF2-40B4-BE49-F238E27FC236}">
-                <a16:creationId xmlns:a16="http://schemas.microsoft.com/office/drawing/2014/main" id="{397A5CE6-23FE-49CA-A732-9EB491C59F0E}"/>
+                <a16:creationId xmlns:a16="http://schemas.microsoft.com/office/drawing/2014/main" id="{FB58BBEA-7137-4278-8A22-66BC6A38C808}"/>
               </a:ext>
             </a:extLst>
           </p:cNvPr>
@@ -21303,7 +21572,7 @@
           <p:cNvPr id="32" name="">
             <a:extLst xmlns:a="http://schemas.openxmlformats.org/drawingml/2006/main">
               <a:ext uri="{FF2B5EF4-FFF2-40B4-BE49-F238E27FC236}">
-                <a16:creationId xmlns:a16="http://schemas.microsoft.com/office/drawing/2014/main" id="{AB36B033-0C2E-4DBE-ABB8-845E78D7086F}"/>
+                <a16:creationId xmlns:a16="http://schemas.microsoft.com/office/drawing/2014/main" id="{4966D6A2-E816-45EA-BAB2-E533A9697C53}"/>
               </a:ext>
             </a:extLst>
           </p:cNvPr>
@@ -21367,7 +21636,7 @@
           <p:cNvPr id="33" name="">
             <a:extLst xmlns:a="http://schemas.openxmlformats.org/drawingml/2006/main">
               <a:ext uri="{FF2B5EF4-FFF2-40B4-BE49-F238E27FC236}">
-                <a16:creationId xmlns:a16="http://schemas.microsoft.com/office/drawing/2014/main" id="{233FE948-BDCB-45FA-B32F-61B2F4247632}"/>
+                <a16:creationId xmlns:a16="http://schemas.microsoft.com/office/drawing/2014/main" id="{949C95F7-9F69-405C-8520-ACAB2ADD78E4}"/>
               </a:ext>
             </a:extLst>
           </p:cNvPr>
@@ -21400,7 +21669,7 @@
           <p:cNvPr id="34" name="">
             <a:extLst xmlns:a="http://schemas.openxmlformats.org/drawingml/2006/main">
               <a:ext uri="{FF2B5EF4-FFF2-40B4-BE49-F238E27FC236}">
-                <a16:creationId xmlns:a16="http://schemas.microsoft.com/office/drawing/2014/main" id="{2650B9FB-F878-4BC6-BC55-07C15F1C8AC4}"/>
+                <a16:creationId xmlns:a16="http://schemas.microsoft.com/office/drawing/2014/main" id="{A3AB9792-2D68-42B2-82DE-702029F1E4CF}"/>
               </a:ext>
             </a:extLst>
           </p:cNvPr>
@@ -21435,7 +21704,7 @@
           <p:cNvPr id="35" name="">
             <a:extLst xmlns:a="http://schemas.openxmlformats.org/drawingml/2006/main">
               <a:ext uri="{FF2B5EF4-FFF2-40B4-BE49-F238E27FC236}">
-                <a16:creationId xmlns:a16="http://schemas.microsoft.com/office/drawing/2014/main" id="{88DF1D00-191A-4893-B896-4DDFBEB6D770}"/>
+                <a16:creationId xmlns:a16="http://schemas.microsoft.com/office/drawing/2014/main" id="{717908E5-A5D6-4C11-9DF7-0EA2610ADEC4}"/>
               </a:ext>
             </a:extLst>
           </p:cNvPr>
@@ -21499,7 +21768,7 @@
           <p:cNvPr id="36" name="">
             <a:extLst xmlns:a="http://schemas.openxmlformats.org/drawingml/2006/main">
               <a:ext uri="{FF2B5EF4-FFF2-40B4-BE49-F238E27FC236}">
-                <a16:creationId xmlns:a16="http://schemas.microsoft.com/office/drawing/2014/main" id="{66D3EA65-DEDB-46A9-85C7-CDA0B3F89AE0}"/>
+                <a16:creationId xmlns:a16="http://schemas.microsoft.com/office/drawing/2014/main" id="{F6C86B87-06BC-4B28-9086-06039A6C99B0}"/>
               </a:ext>
             </a:extLst>
           </p:cNvPr>
@@ -21561,7 +21830,7 @@
     </p:spTree>
     <p:extLst>
       <p:ext uri="{BB962C8B-B14F-4D97-AF65-F5344CB8AC3E}">
-        <p14:creationId xmlns:p14="http://schemas.microsoft.com/office/powerpoint/2010/main" val="619804760"/>
+        <p14:creationId xmlns:p14="http://schemas.microsoft.com/office/powerpoint/2010/main" val="1857115650"/>
       </p:ext>
     </p:extLst>
   </p:cSld>
@@ -21592,7 +21861,7 @@
           <p:cNvPr id="1" name="">
             <a:extLst xmlns:a="http://schemas.openxmlformats.org/drawingml/2006/main">
               <a:ext uri="{FF2B5EF4-FFF2-40B4-BE49-F238E27FC236}">
-                <a16:creationId xmlns:a16="http://schemas.microsoft.com/office/drawing/2014/main" id="{A078E7E1-5990-46FE-88CF-72E027C8DB6A}"/>
+                <a16:creationId xmlns:a16="http://schemas.microsoft.com/office/drawing/2014/main" id="{85B45926-B999-4F7F-8571-AE126F50AE66}"/>
               </a:ext>
             </a:extLst>
           </p:cNvPr>
@@ -21627,7 +21896,7 @@
           <p:cNvPr id="2" name="">
             <a:extLst xmlns:a="http://schemas.openxmlformats.org/drawingml/2006/main">
               <a:ext uri="{FF2B5EF4-FFF2-40B4-BE49-F238E27FC236}">
-                <a16:creationId xmlns:a16="http://schemas.microsoft.com/office/drawing/2014/main" id="{DA8112F4-D9A4-4F7D-A0AA-90D088053333}"/>
+                <a16:creationId xmlns:a16="http://schemas.microsoft.com/office/drawing/2014/main" id="{4CDABA2F-EAFB-478A-B9F4-84EDAD17F01F}"/>
               </a:ext>
             </a:extLst>
           </p:cNvPr>
@@ -21691,7 +21960,7 @@
           <p:cNvPr id="3" name="">
             <a:extLst xmlns:a="http://schemas.openxmlformats.org/drawingml/2006/main">
               <a:ext uri="{FF2B5EF4-FFF2-40B4-BE49-F238E27FC236}">
-                <a16:creationId xmlns:a16="http://schemas.microsoft.com/office/drawing/2014/main" id="{88CAA08A-FF94-429C-95DA-4B99A2CB0ACA}"/>
+                <a16:creationId xmlns:a16="http://schemas.microsoft.com/office/drawing/2014/main" id="{818E13D4-2B31-4BE6-940D-A44DF0695321}"/>
               </a:ext>
             </a:extLst>
           </p:cNvPr>
@@ -21755,7 +22024,7 @@
           <p:cNvPr id="4" name="">
             <a:extLst xmlns:a="http://schemas.openxmlformats.org/drawingml/2006/main">
               <a:ext uri="{FF2B5EF4-FFF2-40B4-BE49-F238E27FC236}">
-                <a16:creationId xmlns:a16="http://schemas.microsoft.com/office/drawing/2014/main" id="{81DB9985-E769-427D-8698-1829B6F39E24}"/>
+                <a16:creationId xmlns:a16="http://schemas.microsoft.com/office/drawing/2014/main" id="{CC272CFD-6450-4D40-BC51-DE529090CC4A}"/>
               </a:ext>
             </a:extLst>
           </p:cNvPr>
@@ -21819,7 +22088,7 @@
           <p:cNvPr id="5" name="">
             <a:extLst xmlns:a="http://schemas.openxmlformats.org/drawingml/2006/main">
               <a:ext uri="{FF2B5EF4-FFF2-40B4-BE49-F238E27FC236}">
-                <a16:creationId xmlns:a16="http://schemas.microsoft.com/office/drawing/2014/main" id="{608942A1-6786-4196-A6D2-D618A56F27B7}"/>
+                <a16:creationId xmlns:a16="http://schemas.microsoft.com/office/drawing/2014/main" id="{C1A568C2-512E-4430-AEFD-D7777CB77F3F}"/>
               </a:ext>
             </a:extLst>
           </p:cNvPr>
@@ -21883,7 +22152,7 @@
           <p:cNvPr id="6" name="">
             <a:extLst xmlns:a="http://schemas.openxmlformats.org/drawingml/2006/main">
               <a:ext uri="{FF2B5EF4-FFF2-40B4-BE49-F238E27FC236}">
-                <a16:creationId xmlns:a16="http://schemas.microsoft.com/office/drawing/2014/main" id="{EFB37B26-E50C-476C-A42E-A9CF9E217D7C}"/>
+                <a16:creationId xmlns:a16="http://schemas.microsoft.com/office/drawing/2014/main" id="{C2E7AAC7-7D1D-49DF-A79F-5833E966AAEA}"/>
               </a:ext>
             </a:extLst>
           </p:cNvPr>
@@ -21916,7 +22185,7 @@
           <p:cNvPr id="7" name="">
             <a:extLst xmlns:a="http://schemas.openxmlformats.org/drawingml/2006/main">
               <a:ext uri="{FF2B5EF4-FFF2-40B4-BE49-F238E27FC236}">
-                <a16:creationId xmlns:a16="http://schemas.microsoft.com/office/drawing/2014/main" id="{46EB1FCB-BDF7-42A3-B04B-E0AE53FD4C82}"/>
+                <a16:creationId xmlns:a16="http://schemas.microsoft.com/office/drawing/2014/main" id="{172FB9D3-E915-4E98-AFB8-8A392321B6D9}"/>
               </a:ext>
             </a:extLst>
           </p:cNvPr>
@@ -21951,7 +22220,7 @@
           <p:cNvPr id="8" name="">
             <a:extLst xmlns:a="http://schemas.openxmlformats.org/drawingml/2006/main">
               <a:ext uri="{FF2B5EF4-FFF2-40B4-BE49-F238E27FC236}">
-                <a16:creationId xmlns:a16="http://schemas.microsoft.com/office/drawing/2014/main" id="{A2F50DDE-7B63-4393-86C8-6359BE0C6E6D}"/>
+                <a16:creationId xmlns:a16="http://schemas.microsoft.com/office/drawing/2014/main" id="{FD3EDA9E-5152-4504-89EC-7EAB7C952CF7}"/>
               </a:ext>
             </a:extLst>
           </p:cNvPr>
@@ -22015,7 +22284,7 @@
           <p:cNvPr id="9" name="">
             <a:extLst xmlns:a="http://schemas.openxmlformats.org/drawingml/2006/main">
               <a:ext uri="{FF2B5EF4-FFF2-40B4-BE49-F238E27FC236}">
-                <a16:creationId xmlns:a16="http://schemas.microsoft.com/office/drawing/2014/main" id="{BAA63AAD-5A4E-4149-9808-7FC8987828EA}"/>
+                <a16:creationId xmlns:a16="http://schemas.microsoft.com/office/drawing/2014/main" id="{EE146DFF-F1EC-4BDB-A96B-02D2B2BF82B0}"/>
               </a:ext>
             </a:extLst>
           </p:cNvPr>
@@ -22125,7 +22394,7 @@
           <p:cNvPr id="10" name="">
             <a:extLst xmlns:a="http://schemas.openxmlformats.org/drawingml/2006/main">
               <a:ext uri="{FF2B5EF4-FFF2-40B4-BE49-F238E27FC236}">
-                <a16:creationId xmlns:a16="http://schemas.microsoft.com/office/drawing/2014/main" id="{36FF038D-02B8-49DA-8E8C-983BF5B66828}"/>
+                <a16:creationId xmlns:a16="http://schemas.microsoft.com/office/drawing/2014/main" id="{15D2E4BF-A0CB-47D6-8223-990D5FE1BEA3}"/>
               </a:ext>
             </a:extLst>
           </p:cNvPr>
@@ -22158,7 +22427,7 @@
           <p:cNvPr id="11" name="">
             <a:extLst xmlns:a="http://schemas.openxmlformats.org/drawingml/2006/main">
               <a:ext uri="{FF2B5EF4-FFF2-40B4-BE49-F238E27FC236}">
-                <a16:creationId xmlns:a16="http://schemas.microsoft.com/office/drawing/2014/main" id="{751CB914-239A-40C4-BC86-72668C8AEBF5}"/>
+                <a16:creationId xmlns:a16="http://schemas.microsoft.com/office/drawing/2014/main" id="{B5DA50EE-3C74-4FE5-BFDB-4A5F07656E67}"/>
               </a:ext>
             </a:extLst>
           </p:cNvPr>
@@ -22193,7 +22462,7 @@
           <p:cNvPr id="12" name="">
             <a:extLst xmlns:a="http://schemas.openxmlformats.org/drawingml/2006/main">
               <a:ext uri="{FF2B5EF4-FFF2-40B4-BE49-F238E27FC236}">
-                <a16:creationId xmlns:a16="http://schemas.microsoft.com/office/drawing/2014/main" id="{4E8E1FE8-F05E-49AB-982D-C3510B77F191}"/>
+                <a16:creationId xmlns:a16="http://schemas.microsoft.com/office/drawing/2014/main" id="{7AB676AC-E3EA-4D76-9C1D-616F93C16878}"/>
               </a:ext>
             </a:extLst>
           </p:cNvPr>
@@ -22257,7 +22526,7 @@
           <p:cNvPr id="13" name="">
             <a:extLst xmlns:a="http://schemas.openxmlformats.org/drawingml/2006/main">
               <a:ext uri="{FF2B5EF4-FFF2-40B4-BE49-F238E27FC236}">
-                <a16:creationId xmlns:a16="http://schemas.microsoft.com/office/drawing/2014/main" id="{89003C58-4C4D-460C-82EA-7192F69E32F0}"/>
+                <a16:creationId xmlns:a16="http://schemas.microsoft.com/office/drawing/2014/main" id="{E22188DB-BCE3-412B-9870-83616CB1A97F}"/>
               </a:ext>
             </a:extLst>
           </p:cNvPr>
@@ -22367,7 +22636,7 @@
           <p:cNvPr id="14" name="">
             <a:extLst xmlns:a="http://schemas.openxmlformats.org/drawingml/2006/main">
               <a:ext uri="{FF2B5EF4-FFF2-40B4-BE49-F238E27FC236}">
-                <a16:creationId xmlns:a16="http://schemas.microsoft.com/office/drawing/2014/main" id="{4CF8447D-6BC0-4D83-917E-660FF3E98CF0}"/>
+                <a16:creationId xmlns:a16="http://schemas.microsoft.com/office/drawing/2014/main" id="{DB44911F-9A0D-4436-A815-7DCB92352BE0}"/>
               </a:ext>
             </a:extLst>
           </p:cNvPr>
@@ -22400,7 +22669,7 @@
           <p:cNvPr id="15" name="">
             <a:extLst xmlns:a="http://schemas.openxmlformats.org/drawingml/2006/main">
               <a:ext uri="{FF2B5EF4-FFF2-40B4-BE49-F238E27FC236}">
-                <a16:creationId xmlns:a16="http://schemas.microsoft.com/office/drawing/2014/main" id="{7197C868-FD69-401F-B254-797C08F9C5B6}"/>
+                <a16:creationId xmlns:a16="http://schemas.microsoft.com/office/drawing/2014/main" id="{C0526A51-1C6F-4007-AA2B-1268AC5DB24B}"/>
               </a:ext>
             </a:extLst>
           </p:cNvPr>
@@ -22435,7 +22704,7 @@
           <p:cNvPr id="16" name="">
             <a:extLst xmlns:a="http://schemas.openxmlformats.org/drawingml/2006/main">
               <a:ext uri="{FF2B5EF4-FFF2-40B4-BE49-F238E27FC236}">
-                <a16:creationId xmlns:a16="http://schemas.microsoft.com/office/drawing/2014/main" id="{4FA3BEC9-5219-47FE-AFFF-6EE304A345E4}"/>
+                <a16:creationId xmlns:a16="http://schemas.microsoft.com/office/drawing/2014/main" id="{69E5F5B3-5C8C-45D3-9CBD-D7EBE50F68C1}"/>
               </a:ext>
             </a:extLst>
           </p:cNvPr>
@@ -22499,7 +22768,7 @@
           <p:cNvPr id="17" name="">
             <a:extLst xmlns:a="http://schemas.openxmlformats.org/drawingml/2006/main">
               <a:ext uri="{FF2B5EF4-FFF2-40B4-BE49-F238E27FC236}">
-                <a16:creationId xmlns:a16="http://schemas.microsoft.com/office/drawing/2014/main" id="{7A5A5F71-84E4-402B-8ED6-4A2BD22085F0}"/>
+                <a16:creationId xmlns:a16="http://schemas.microsoft.com/office/drawing/2014/main" id="{ED1828E3-0841-44A6-B8E4-098E0F19C80D}"/>
               </a:ext>
             </a:extLst>
           </p:cNvPr>
@@ -22632,7 +22901,7 @@
           <p:cNvPr id="18" name="">
             <a:extLst xmlns:a="http://schemas.openxmlformats.org/drawingml/2006/main">
               <a:ext uri="{FF2B5EF4-FFF2-40B4-BE49-F238E27FC236}">
-                <a16:creationId xmlns:a16="http://schemas.microsoft.com/office/drawing/2014/main" id="{007185FF-AE04-430E-A888-277B8F0740C6}"/>
+                <a16:creationId xmlns:a16="http://schemas.microsoft.com/office/drawing/2014/main" id="{2093BE0E-950D-4E5D-93A1-0A81ECF51A13}"/>
               </a:ext>
             </a:extLst>
           </p:cNvPr>
@@ -22665,7 +22934,7 @@
           <p:cNvPr id="19" name="">
             <a:extLst xmlns:a="http://schemas.openxmlformats.org/drawingml/2006/main">
               <a:ext uri="{FF2B5EF4-FFF2-40B4-BE49-F238E27FC236}">
-                <a16:creationId xmlns:a16="http://schemas.microsoft.com/office/drawing/2014/main" id="{23D7E590-B311-4EAE-B33B-1675D480D5F2}"/>
+                <a16:creationId xmlns:a16="http://schemas.microsoft.com/office/drawing/2014/main" id="{E8F65242-D5B1-48F3-9C83-ABF573F3F55C}"/>
               </a:ext>
             </a:extLst>
           </p:cNvPr>
@@ -22700,7 +22969,7 @@
           <p:cNvPr id="20" name="">
             <a:extLst xmlns:a="http://schemas.openxmlformats.org/drawingml/2006/main">
               <a:ext uri="{FF2B5EF4-FFF2-40B4-BE49-F238E27FC236}">
-                <a16:creationId xmlns:a16="http://schemas.microsoft.com/office/drawing/2014/main" id="{31272891-DB5B-42DE-A22A-FD8564A6EBD6}"/>
+                <a16:creationId xmlns:a16="http://schemas.microsoft.com/office/drawing/2014/main" id="{A62383CD-8492-438D-8BF9-B924CAAE3360}"/>
               </a:ext>
             </a:extLst>
           </p:cNvPr>
@@ -22764,7 +23033,7 @@
           <p:cNvPr id="21" name="">
             <a:extLst xmlns:a="http://schemas.openxmlformats.org/drawingml/2006/main">
               <a:ext uri="{FF2B5EF4-FFF2-40B4-BE49-F238E27FC236}">
-                <a16:creationId xmlns:a16="http://schemas.microsoft.com/office/drawing/2014/main" id="{2984675F-E96A-4C97-9267-E298BC4A28C3}"/>
+                <a16:creationId xmlns:a16="http://schemas.microsoft.com/office/drawing/2014/main" id="{6F10EB6B-49A3-42DC-9B3D-A210E938A33E}"/>
               </a:ext>
             </a:extLst>
           </p:cNvPr>
@@ -22851,7 +23120,7 @@
           <p:cNvPr id="22" name="">
             <a:extLst xmlns:a="http://schemas.openxmlformats.org/drawingml/2006/main">
               <a:ext uri="{FF2B5EF4-FFF2-40B4-BE49-F238E27FC236}">
-                <a16:creationId xmlns:a16="http://schemas.microsoft.com/office/drawing/2014/main" id="{D5B22465-EA3F-425B-94CB-EBB5C1A1ADC7}"/>
+                <a16:creationId xmlns:a16="http://schemas.microsoft.com/office/drawing/2014/main" id="{9FAF1C59-D021-484F-A897-FF8DC977DDD2}"/>
               </a:ext>
             </a:extLst>
           </p:cNvPr>
@@ -22884,7 +23153,7 @@
           <p:cNvPr id="23" name="">
             <a:extLst xmlns:a="http://schemas.openxmlformats.org/drawingml/2006/main">
               <a:ext uri="{FF2B5EF4-FFF2-40B4-BE49-F238E27FC236}">
-                <a16:creationId xmlns:a16="http://schemas.microsoft.com/office/drawing/2014/main" id="{E91B00AE-4264-4722-A837-B64C973B2D5C}"/>
+                <a16:creationId xmlns:a16="http://schemas.microsoft.com/office/drawing/2014/main" id="{8990CC80-FE94-462E-BAFB-96ADD1FEBD4A}"/>
               </a:ext>
             </a:extLst>
           </p:cNvPr>
@@ -22919,7 +23188,7 @@
           <p:cNvPr id="24" name="">
             <a:extLst xmlns:a="http://schemas.openxmlformats.org/drawingml/2006/main">
               <a:ext uri="{FF2B5EF4-FFF2-40B4-BE49-F238E27FC236}">
-                <a16:creationId xmlns:a16="http://schemas.microsoft.com/office/drawing/2014/main" id="{650CDA3C-18FF-4099-82E1-86E4E20923CF}"/>
+                <a16:creationId xmlns:a16="http://schemas.microsoft.com/office/drawing/2014/main" id="{CA536691-5EA5-4F21-A170-9443D7D5A8E7}"/>
               </a:ext>
             </a:extLst>
           </p:cNvPr>
@@ -22983,7 +23252,7 @@
           <p:cNvPr id="25" name="">
             <a:extLst xmlns:a="http://schemas.openxmlformats.org/drawingml/2006/main">
               <a:ext uri="{FF2B5EF4-FFF2-40B4-BE49-F238E27FC236}">
-                <a16:creationId xmlns:a16="http://schemas.microsoft.com/office/drawing/2014/main" id="{37226AB8-4181-42F5-A2BB-007F62ACFAFA}"/>
+                <a16:creationId xmlns:a16="http://schemas.microsoft.com/office/drawing/2014/main" id="{1106F023-2C2D-434E-ABFC-E4FBC50BD8DB}"/>
               </a:ext>
             </a:extLst>
           </p:cNvPr>
@@ -23045,7 +23314,7 @@
     </p:spTree>
     <p:extLst>
       <p:ext uri="{BB962C8B-B14F-4D97-AF65-F5344CB8AC3E}">
-        <p14:creationId xmlns:p14="http://schemas.microsoft.com/office/powerpoint/2010/main" val="1294693133"/>
+        <p14:creationId xmlns:p14="http://schemas.microsoft.com/office/powerpoint/2010/main" val="474639623"/>
       </p:ext>
     </p:extLst>
   </p:cSld>
@@ -23076,7 +23345,7 @@
           <p:cNvPr id="1" name="">
             <a:extLst xmlns:a="http://schemas.openxmlformats.org/drawingml/2006/main">
               <a:ext uri="{FF2B5EF4-FFF2-40B4-BE49-F238E27FC236}">
-                <a16:creationId xmlns:a16="http://schemas.microsoft.com/office/drawing/2014/main" id="{F220B5E2-7CD0-4265-A504-3346D238C667}"/>
+                <a16:creationId xmlns:a16="http://schemas.microsoft.com/office/drawing/2014/main" id="{87B4CC0F-7CE8-4B4A-8330-BDF1458CD077}"/>
               </a:ext>
             </a:extLst>
           </p:cNvPr>
@@ -23111,7 +23380,7 @@
           <p:cNvPr id="2" name="">
             <a:extLst xmlns:a="http://schemas.openxmlformats.org/drawingml/2006/main">
               <a:ext uri="{FF2B5EF4-FFF2-40B4-BE49-F238E27FC236}">
-                <a16:creationId xmlns:a16="http://schemas.microsoft.com/office/drawing/2014/main" id="{2C209DD7-2233-498C-AD26-25A8F0AA0475}"/>
+                <a16:creationId xmlns:a16="http://schemas.microsoft.com/office/drawing/2014/main" id="{1FADD913-36C5-47FB-9FEB-05D935BDF065}"/>
               </a:ext>
             </a:extLst>
           </p:cNvPr>
@@ -23175,7 +23444,7 @@
           <p:cNvPr id="3" name="">
             <a:extLst xmlns:a="http://schemas.openxmlformats.org/drawingml/2006/main">
               <a:ext uri="{FF2B5EF4-FFF2-40B4-BE49-F238E27FC236}">
-                <a16:creationId xmlns:a16="http://schemas.microsoft.com/office/drawing/2014/main" id="{5D158A2C-12B4-4E7E-9C76-D170F998D16A}"/>
+                <a16:creationId xmlns:a16="http://schemas.microsoft.com/office/drawing/2014/main" id="{7F5B4545-DF0A-4E84-854C-7F365B18D95F}"/>
               </a:ext>
             </a:extLst>
           </p:cNvPr>
@@ -23239,7 +23508,7 @@
           <p:cNvPr id="4" name="">
             <a:extLst xmlns:a="http://schemas.openxmlformats.org/drawingml/2006/main">
               <a:ext uri="{FF2B5EF4-FFF2-40B4-BE49-F238E27FC236}">
-                <a16:creationId xmlns:a16="http://schemas.microsoft.com/office/drawing/2014/main" id="{FBEDFB29-7479-4FD7-B553-3F42D58993D8}"/>
+                <a16:creationId xmlns:a16="http://schemas.microsoft.com/office/drawing/2014/main" id="{91F7AB2B-C5B6-43AA-9A1D-3F71FBD657D1}"/>
               </a:ext>
             </a:extLst>
           </p:cNvPr>
@@ -23303,7 +23572,7 @@
           <p:cNvPr id="5" name="">
             <a:extLst xmlns:a="http://schemas.openxmlformats.org/drawingml/2006/main">
               <a:ext uri="{FF2B5EF4-FFF2-40B4-BE49-F238E27FC236}">
-                <a16:creationId xmlns:a16="http://schemas.microsoft.com/office/drawing/2014/main" id="{D70AA626-EF26-4478-8FFE-AEB7392B4134}"/>
+                <a16:creationId xmlns:a16="http://schemas.microsoft.com/office/drawing/2014/main" id="{4927C75A-BE47-4273-91F8-6F45BAA0B8EF}"/>
               </a:ext>
             </a:extLst>
           </p:cNvPr>
@@ -23367,7 +23636,7 @@
           <p:cNvPr id="6" name="">
             <a:extLst xmlns:a="http://schemas.openxmlformats.org/drawingml/2006/main">
               <a:ext uri="{FF2B5EF4-FFF2-40B4-BE49-F238E27FC236}">
-                <a16:creationId xmlns:a16="http://schemas.microsoft.com/office/drawing/2014/main" id="{E452785D-3C8D-43AB-ACE0-F6D7C12A6D81}"/>
+                <a16:creationId xmlns:a16="http://schemas.microsoft.com/office/drawing/2014/main" id="{C303A097-5402-4922-8DC5-462B39848F3B}"/>
               </a:ext>
             </a:extLst>
           </p:cNvPr>
@@ -23400,7 +23669,7 @@
           <p:cNvPr id="7" name="">
             <a:extLst xmlns:a="http://schemas.openxmlformats.org/drawingml/2006/main">
               <a:ext uri="{FF2B5EF4-FFF2-40B4-BE49-F238E27FC236}">
-                <a16:creationId xmlns:a16="http://schemas.microsoft.com/office/drawing/2014/main" id="{87B63242-2FF4-4489-B599-186E5E4A3802}"/>
+                <a16:creationId xmlns:a16="http://schemas.microsoft.com/office/drawing/2014/main" id="{6B972033-17F2-4C6E-A207-35B1067DAFA6}"/>
               </a:ext>
             </a:extLst>
           </p:cNvPr>
@@ -23435,7 +23704,7 @@
           <p:cNvPr id="8" name="">
             <a:extLst xmlns:a="http://schemas.openxmlformats.org/drawingml/2006/main">
               <a:ext uri="{FF2B5EF4-FFF2-40B4-BE49-F238E27FC236}">
-                <a16:creationId xmlns:a16="http://schemas.microsoft.com/office/drawing/2014/main" id="{4E9C6237-B44C-4E4B-BC28-AAC1E961DBFE}"/>
+                <a16:creationId xmlns:a16="http://schemas.microsoft.com/office/drawing/2014/main" id="{7EDBF261-397C-445B-90EB-50D17DBFF623}"/>
               </a:ext>
             </a:extLst>
           </p:cNvPr>
@@ -23499,7 +23768,7 @@
           <p:cNvPr id="9" name="">
             <a:extLst xmlns:a="http://schemas.openxmlformats.org/drawingml/2006/main">
               <a:ext uri="{FF2B5EF4-FFF2-40B4-BE49-F238E27FC236}">
-                <a16:creationId xmlns:a16="http://schemas.microsoft.com/office/drawing/2014/main" id="{D4BCF4D8-CA8E-4FE3-901C-8ADFC772CFEC}"/>
+                <a16:creationId xmlns:a16="http://schemas.microsoft.com/office/drawing/2014/main" id="{B8B050B1-9396-45C8-AF99-1EFF7B383DD4}"/>
               </a:ext>
             </a:extLst>
           </p:cNvPr>
@@ -23563,7 +23832,7 @@
           <p:cNvPr id="10" name="">
             <a:extLst xmlns:a="http://schemas.openxmlformats.org/drawingml/2006/main">
               <a:ext uri="{FF2B5EF4-FFF2-40B4-BE49-F238E27FC236}">
-                <a16:creationId xmlns:a16="http://schemas.microsoft.com/office/drawing/2014/main" id="{118E3D00-A9F9-41DE-8EE0-898A67239ECB}"/>
+                <a16:creationId xmlns:a16="http://schemas.microsoft.com/office/drawing/2014/main" id="{E6C52629-FD79-4D0A-A08D-823F2028E25A}"/>
               </a:ext>
             </a:extLst>
           </p:cNvPr>
@@ -23596,7 +23865,7 @@
           <p:cNvPr id="11" name="">
             <a:extLst xmlns:a="http://schemas.openxmlformats.org/drawingml/2006/main">
               <a:ext uri="{FF2B5EF4-FFF2-40B4-BE49-F238E27FC236}">
-                <a16:creationId xmlns:a16="http://schemas.microsoft.com/office/drawing/2014/main" id="{6D17D29B-D934-4B8C-BEC5-37862306A8A7}"/>
+                <a16:creationId xmlns:a16="http://schemas.microsoft.com/office/drawing/2014/main" id="{9818E5A5-ABCB-447B-AADC-2DD83F418D17}"/>
               </a:ext>
             </a:extLst>
           </p:cNvPr>
@@ -23631,7 +23900,7 @@
           <p:cNvPr id="12" name="">
             <a:extLst xmlns:a="http://schemas.openxmlformats.org/drawingml/2006/main">
               <a:ext uri="{FF2B5EF4-FFF2-40B4-BE49-F238E27FC236}">
-                <a16:creationId xmlns:a16="http://schemas.microsoft.com/office/drawing/2014/main" id="{3DFD96C0-1EE6-46A3-B67C-4B52DD324298}"/>
+                <a16:creationId xmlns:a16="http://schemas.microsoft.com/office/drawing/2014/main" id="{89B6539C-48C6-4650-9EC1-EA72AAD01E95}"/>
               </a:ext>
             </a:extLst>
           </p:cNvPr>
@@ -23695,7 +23964,7 @@
           <p:cNvPr id="13" name="">
             <a:extLst xmlns:a="http://schemas.openxmlformats.org/drawingml/2006/main">
               <a:ext uri="{FF2B5EF4-FFF2-40B4-BE49-F238E27FC236}">
-                <a16:creationId xmlns:a16="http://schemas.microsoft.com/office/drawing/2014/main" id="{4B737154-A54C-407A-82F8-B13A6904192F}"/>
+                <a16:creationId xmlns:a16="http://schemas.microsoft.com/office/drawing/2014/main" id="{8A4BC86D-33E3-4AA6-B233-8ECE48EA3A9E}"/>
               </a:ext>
             </a:extLst>
           </p:cNvPr>
@@ -23759,7 +24028,7 @@
           <p:cNvPr id="14" name="">
             <a:extLst xmlns:a="http://schemas.openxmlformats.org/drawingml/2006/main">
               <a:ext uri="{FF2B5EF4-FFF2-40B4-BE49-F238E27FC236}">
-                <a16:creationId xmlns:a16="http://schemas.microsoft.com/office/drawing/2014/main" id="{609C5F01-0CA9-431C-85AC-2624E1E7D4B8}"/>
+                <a16:creationId xmlns:a16="http://schemas.microsoft.com/office/drawing/2014/main" id="{401358D9-CCBD-4916-84B9-C3F292905D90}"/>
               </a:ext>
             </a:extLst>
           </p:cNvPr>
@@ -23792,7 +24061,7 @@
           <p:cNvPr id="15" name="">
             <a:extLst xmlns:a="http://schemas.openxmlformats.org/drawingml/2006/main">
               <a:ext uri="{FF2B5EF4-FFF2-40B4-BE49-F238E27FC236}">
-                <a16:creationId xmlns:a16="http://schemas.microsoft.com/office/drawing/2014/main" id="{6D77756A-65F3-4415-B8BD-33D6CA56D63B}"/>
+                <a16:creationId xmlns:a16="http://schemas.microsoft.com/office/drawing/2014/main" id="{D12AFB6D-61C8-4B53-B4EF-46BB54E31A30}"/>
               </a:ext>
             </a:extLst>
           </p:cNvPr>
@@ -23827,7 +24096,7 @@
           <p:cNvPr id="16" name="">
             <a:extLst xmlns:a="http://schemas.openxmlformats.org/drawingml/2006/main">
               <a:ext uri="{FF2B5EF4-FFF2-40B4-BE49-F238E27FC236}">
-                <a16:creationId xmlns:a16="http://schemas.microsoft.com/office/drawing/2014/main" id="{4A28D810-704A-4A7E-8092-4CF5F92CC3CF}"/>
+                <a16:creationId xmlns:a16="http://schemas.microsoft.com/office/drawing/2014/main" id="{E6BCE692-627F-4C25-8C80-DF98DB9AF1D8}"/>
               </a:ext>
             </a:extLst>
           </p:cNvPr>
@@ -23891,7 +24160,7 @@
           <p:cNvPr id="17" name="">
             <a:extLst xmlns:a="http://schemas.openxmlformats.org/drawingml/2006/main">
               <a:ext uri="{FF2B5EF4-FFF2-40B4-BE49-F238E27FC236}">
-                <a16:creationId xmlns:a16="http://schemas.microsoft.com/office/drawing/2014/main" id="{662FFA35-494B-4296-A93C-C83E42D4D073}"/>
+                <a16:creationId xmlns:a16="http://schemas.microsoft.com/office/drawing/2014/main" id="{48990DD8-9D9E-4D17-890F-22659818F039}"/>
               </a:ext>
             </a:extLst>
           </p:cNvPr>
@@ -23955,7 +24224,7 @@
           <p:cNvPr id="18" name="">
             <a:extLst xmlns:a="http://schemas.openxmlformats.org/drawingml/2006/main">
               <a:ext uri="{FF2B5EF4-FFF2-40B4-BE49-F238E27FC236}">
-                <a16:creationId xmlns:a16="http://schemas.microsoft.com/office/drawing/2014/main" id="{E69280EC-3DDB-4CDB-BD6E-E3C49A354ECB}"/>
+                <a16:creationId xmlns:a16="http://schemas.microsoft.com/office/drawing/2014/main" id="{E254DB6E-ABAD-445F-B4FF-FD5B56641747}"/>
               </a:ext>
             </a:extLst>
           </p:cNvPr>
@@ -23990,7 +24259,7 @@
           <p:cNvPr id="19" name="">
             <a:extLst xmlns:a="http://schemas.openxmlformats.org/drawingml/2006/main">
               <a:ext uri="{FF2B5EF4-FFF2-40B4-BE49-F238E27FC236}">
-                <a16:creationId xmlns:a16="http://schemas.microsoft.com/office/drawing/2014/main" id="{D34E2A65-C443-4876-BB79-1800C23A0B9B}"/>
+                <a16:creationId xmlns:a16="http://schemas.microsoft.com/office/drawing/2014/main" id="{9A45A670-1506-4E5A-B432-923CA7748F7C}"/>
               </a:ext>
             </a:extLst>
           </p:cNvPr>
@@ -24054,7 +24323,7 @@
           <p:cNvPr id="20" name="">
             <a:extLst xmlns:a="http://schemas.openxmlformats.org/drawingml/2006/main">
               <a:ext uri="{FF2B5EF4-FFF2-40B4-BE49-F238E27FC236}">
-                <a16:creationId xmlns:a16="http://schemas.microsoft.com/office/drawing/2014/main" id="{7448D7E3-1B49-4FDB-93D5-F04D6840EB15}"/>
+                <a16:creationId xmlns:a16="http://schemas.microsoft.com/office/drawing/2014/main" id="{E85C63DD-932C-4ECF-9D3F-E47794624928}"/>
               </a:ext>
             </a:extLst>
           </p:cNvPr>
@@ -24089,7 +24358,7 @@
           <p:cNvPr id="21" name="">
             <a:extLst xmlns:a="http://schemas.openxmlformats.org/drawingml/2006/main">
               <a:ext uri="{FF2B5EF4-FFF2-40B4-BE49-F238E27FC236}">
-                <a16:creationId xmlns:a16="http://schemas.microsoft.com/office/drawing/2014/main" id="{1EBC030E-5D22-4FED-BAE2-73FD2D7B328C}"/>
+                <a16:creationId xmlns:a16="http://schemas.microsoft.com/office/drawing/2014/main" id="{41D05143-D2DF-4CFE-AEAD-13CFC852E3DC}"/>
               </a:ext>
             </a:extLst>
           </p:cNvPr>
@@ -24151,7 +24420,7 @@
     </p:spTree>
     <p:extLst>
       <p:ext uri="{BB962C8B-B14F-4D97-AF65-F5344CB8AC3E}">
-        <p14:creationId xmlns:p14="http://schemas.microsoft.com/office/powerpoint/2010/main" val="157521601"/>
+        <p14:creationId xmlns:p14="http://schemas.microsoft.com/office/powerpoint/2010/main" val="461820114"/>
       </p:ext>
     </p:extLst>
   </p:cSld>
@@ -24182,7 +24451,7 @@
           <p:cNvPr id="1" name="">
             <a:extLst xmlns:a="http://schemas.openxmlformats.org/drawingml/2006/main">
               <a:ext uri="{FF2B5EF4-FFF2-40B4-BE49-F238E27FC236}">
-                <a16:creationId xmlns:a16="http://schemas.microsoft.com/office/drawing/2014/main" id="{3E8E1CD6-79CA-42BE-95FB-DEE2392939BB}"/>
+                <a16:creationId xmlns:a16="http://schemas.microsoft.com/office/drawing/2014/main" id="{C2692300-D229-4240-B1BF-C47DA8E00120}"/>
               </a:ext>
             </a:extLst>
           </p:cNvPr>
@@ -24217,7 +24486,7 @@
           <p:cNvPr id="2" name="">
             <a:extLst xmlns:a="http://schemas.openxmlformats.org/drawingml/2006/main">
               <a:ext uri="{FF2B5EF4-FFF2-40B4-BE49-F238E27FC236}">
-                <a16:creationId xmlns:a16="http://schemas.microsoft.com/office/drawing/2014/main" id="{B38B2478-707E-4855-8C52-F92641D4570A}"/>
+                <a16:creationId xmlns:a16="http://schemas.microsoft.com/office/drawing/2014/main" id="{5457F86A-B436-4F94-81FB-3951DCECFFBE}"/>
               </a:ext>
             </a:extLst>
           </p:cNvPr>
@@ -24281,7 +24550,7 @@
           <p:cNvPr id="3" name="">
             <a:extLst xmlns:a="http://schemas.openxmlformats.org/drawingml/2006/main">
               <a:ext uri="{FF2B5EF4-FFF2-40B4-BE49-F238E27FC236}">
-                <a16:creationId xmlns:a16="http://schemas.microsoft.com/office/drawing/2014/main" id="{885CF2EC-DAB4-4CFD-BC8C-8B84332EAB90}"/>
+                <a16:creationId xmlns:a16="http://schemas.microsoft.com/office/drawing/2014/main" id="{838A37A5-EB87-4DFF-947B-3BE3FAE04700}"/>
               </a:ext>
             </a:extLst>
           </p:cNvPr>
@@ -24345,7 +24614,7 @@
           <p:cNvPr id="4" name="">
             <a:extLst xmlns:a="http://schemas.openxmlformats.org/drawingml/2006/main">
               <a:ext uri="{FF2B5EF4-FFF2-40B4-BE49-F238E27FC236}">
-                <a16:creationId xmlns:a16="http://schemas.microsoft.com/office/drawing/2014/main" id="{28159B00-7C40-476A-95F6-D651D0C093D5}"/>
+                <a16:creationId xmlns:a16="http://schemas.microsoft.com/office/drawing/2014/main" id="{742CFEAD-1B95-404D-A13F-4759AB42676B}"/>
               </a:ext>
             </a:extLst>
           </p:cNvPr>
@@ -24409,7 +24678,7 @@
           <p:cNvPr id="5" name="">
             <a:extLst xmlns:a="http://schemas.openxmlformats.org/drawingml/2006/main">
               <a:ext uri="{FF2B5EF4-FFF2-40B4-BE49-F238E27FC236}">
-                <a16:creationId xmlns:a16="http://schemas.microsoft.com/office/drawing/2014/main" id="{5902C7E9-BE93-4495-87D1-D637583938F2}"/>
+                <a16:creationId xmlns:a16="http://schemas.microsoft.com/office/drawing/2014/main" id="{BDE85490-7681-4E6A-972F-44CE2EF1DBB2}"/>
               </a:ext>
             </a:extLst>
           </p:cNvPr>
@@ -24473,7 +24742,7 @@
           <p:cNvPr id="6" name="">
             <a:extLst xmlns:a="http://schemas.openxmlformats.org/drawingml/2006/main">
               <a:ext uri="{FF2B5EF4-FFF2-40B4-BE49-F238E27FC236}">
-                <a16:creationId xmlns:a16="http://schemas.microsoft.com/office/drawing/2014/main" id="{CA06B65E-4E36-47BD-BC7A-4C3CAB00FF7D}"/>
+                <a16:creationId xmlns:a16="http://schemas.microsoft.com/office/drawing/2014/main" id="{6D88A7A8-38E6-4A4F-95EB-37B9D91C63D6}"/>
               </a:ext>
             </a:extLst>
           </p:cNvPr>
@@ -24506,7 +24775,7 @@
           <p:cNvPr id="7" name="">
             <a:extLst xmlns:a="http://schemas.openxmlformats.org/drawingml/2006/main">
               <a:ext uri="{FF2B5EF4-FFF2-40B4-BE49-F238E27FC236}">
-                <a16:creationId xmlns:a16="http://schemas.microsoft.com/office/drawing/2014/main" id="{39FCD51F-5918-4CFD-90B0-203CEA7F4CD4}"/>
+                <a16:creationId xmlns:a16="http://schemas.microsoft.com/office/drawing/2014/main" id="{B2925A78-B651-499E-9D08-3A4A5E6AA2F9}"/>
               </a:ext>
             </a:extLst>
           </p:cNvPr>
@@ -24541,7 +24810,7 @@
           <p:cNvPr id="8" name="">
             <a:extLst xmlns:a="http://schemas.openxmlformats.org/drawingml/2006/main">
               <a:ext uri="{FF2B5EF4-FFF2-40B4-BE49-F238E27FC236}">
-                <a16:creationId xmlns:a16="http://schemas.microsoft.com/office/drawing/2014/main" id="{24BD91B1-8425-4A92-A879-83FAA6E8DBC8}"/>
+                <a16:creationId xmlns:a16="http://schemas.microsoft.com/office/drawing/2014/main" id="{70E51B33-5DD1-4B2F-BDC7-700BE199B3C5}"/>
               </a:ext>
             </a:extLst>
           </p:cNvPr>
@@ -24605,7 +24874,7 @@
           <p:cNvPr id="9" name="">
             <a:extLst xmlns:a="http://schemas.openxmlformats.org/drawingml/2006/main">
               <a:ext uri="{FF2B5EF4-FFF2-40B4-BE49-F238E27FC236}">
-                <a16:creationId xmlns:a16="http://schemas.microsoft.com/office/drawing/2014/main" id="{07F5505C-C1AB-42F3-A645-50AD406BD673}"/>
+                <a16:creationId xmlns:a16="http://schemas.microsoft.com/office/drawing/2014/main" id="{17B117A4-0B9C-41CC-94BB-C14CF31B8725}"/>
               </a:ext>
             </a:extLst>
           </p:cNvPr>
@@ -24651,7 +24920,7 @@
           <p:cNvPr id="10" name="">
             <a:extLst xmlns:a="http://schemas.openxmlformats.org/drawingml/2006/main">
               <a:ext uri="{FF2B5EF4-FFF2-40B4-BE49-F238E27FC236}">
-                <a16:creationId xmlns:a16="http://schemas.microsoft.com/office/drawing/2014/main" id="{FC9E2081-60F4-4C7D-B4D2-17B6A8D25F22}"/>
+                <a16:creationId xmlns:a16="http://schemas.microsoft.com/office/drawing/2014/main" id="{A56B32CD-923F-4D15-951E-21083EFD4554}"/>
               </a:ext>
             </a:extLst>
           </p:cNvPr>
@@ -24684,7 +24953,7 @@
           <p:cNvPr id="11" name="">
             <a:extLst xmlns:a="http://schemas.openxmlformats.org/drawingml/2006/main">
               <a:ext uri="{FF2B5EF4-FFF2-40B4-BE49-F238E27FC236}">
-                <a16:creationId xmlns:a16="http://schemas.microsoft.com/office/drawing/2014/main" id="{AEDCB879-1CAC-443A-B7DB-16E6860C2EDA}"/>
+                <a16:creationId xmlns:a16="http://schemas.microsoft.com/office/drawing/2014/main" id="{ECA9AFE6-D7A2-424A-AD52-BC0B6A5AB246}"/>
               </a:ext>
             </a:extLst>
           </p:cNvPr>
@@ -24719,7 +24988,7 @@
           <p:cNvPr id="12" name="">
             <a:extLst xmlns:a="http://schemas.openxmlformats.org/drawingml/2006/main">
               <a:ext uri="{FF2B5EF4-FFF2-40B4-BE49-F238E27FC236}">
-                <a16:creationId xmlns:a16="http://schemas.microsoft.com/office/drawing/2014/main" id="{67277202-876A-4EDC-88EE-BE2BB385AD75}"/>
+                <a16:creationId xmlns:a16="http://schemas.microsoft.com/office/drawing/2014/main" id="{2EC67BCF-9D34-437E-A267-F803B539F152}"/>
               </a:ext>
             </a:extLst>
           </p:cNvPr>
@@ -24783,7 +25052,7 @@
           <p:cNvPr id="13" name="">
             <a:extLst xmlns:a="http://schemas.openxmlformats.org/drawingml/2006/main">
               <a:ext uri="{FF2B5EF4-FFF2-40B4-BE49-F238E27FC236}">
-                <a16:creationId xmlns:a16="http://schemas.microsoft.com/office/drawing/2014/main" id="{A4B19BFC-57E8-47DF-8118-6AF3AA42F552}"/>
+                <a16:creationId xmlns:a16="http://schemas.microsoft.com/office/drawing/2014/main" id="{6C43F793-D899-48D6-A8BB-DF4D27AD29C2}"/>
               </a:ext>
             </a:extLst>
           </p:cNvPr>
@@ -24829,7 +25098,7 @@
           <p:cNvPr id="14" name="">
             <a:extLst xmlns:a="http://schemas.openxmlformats.org/drawingml/2006/main">
               <a:ext uri="{FF2B5EF4-FFF2-40B4-BE49-F238E27FC236}">
-                <a16:creationId xmlns:a16="http://schemas.microsoft.com/office/drawing/2014/main" id="{910DA234-11A6-44F7-8D16-DB9AD38CAE0F}"/>
+                <a16:creationId xmlns:a16="http://schemas.microsoft.com/office/drawing/2014/main" id="{19FE6E15-EE16-4FFC-9874-40D678BE18C3}"/>
               </a:ext>
             </a:extLst>
           </p:cNvPr>
@@ -24864,7 +25133,7 @@
           <p:cNvPr id="15" name="">
             <a:extLst xmlns:a="http://schemas.openxmlformats.org/drawingml/2006/main">
               <a:ext uri="{FF2B5EF4-FFF2-40B4-BE49-F238E27FC236}">
-                <a16:creationId xmlns:a16="http://schemas.microsoft.com/office/drawing/2014/main" id="{AEDD9952-0173-4813-A1AB-FF35B587414C}"/>
+                <a16:creationId xmlns:a16="http://schemas.microsoft.com/office/drawing/2014/main" id="{C71843EA-B54D-4EE6-A888-EDC5EDC06836}"/>
               </a:ext>
             </a:extLst>
           </p:cNvPr>
@@ -24928,7 +25197,7 @@
           <p:cNvPr id="16" name="">
             <a:extLst xmlns:a="http://schemas.openxmlformats.org/drawingml/2006/main">
               <a:ext uri="{FF2B5EF4-FFF2-40B4-BE49-F238E27FC236}">
-                <a16:creationId xmlns:a16="http://schemas.microsoft.com/office/drawing/2014/main" id="{177C2532-51E7-45AE-95E3-E9A1C55307CE}"/>
+                <a16:creationId xmlns:a16="http://schemas.microsoft.com/office/drawing/2014/main" id="{3CF3E8EB-71DE-4A4C-B161-BB85914B22E0}"/>
               </a:ext>
             </a:extLst>
           </p:cNvPr>
@@ -24963,7 +25232,7 @@
           <p:cNvPr id="17" name="">
             <a:extLst xmlns:a="http://schemas.openxmlformats.org/drawingml/2006/main">
               <a:ext uri="{FF2B5EF4-FFF2-40B4-BE49-F238E27FC236}">
-                <a16:creationId xmlns:a16="http://schemas.microsoft.com/office/drawing/2014/main" id="{0CF7FAE2-FCE8-42D2-8DE8-1F0811DBC3D9}"/>
+                <a16:creationId xmlns:a16="http://schemas.microsoft.com/office/drawing/2014/main" id="{61C4BE39-329B-4557-A5BE-97FBFB22E827}"/>
               </a:ext>
             </a:extLst>
           </p:cNvPr>
@@ -25027,7 +25296,7 @@
           <p:cNvPr id="18" name="">
             <a:extLst xmlns:a="http://schemas.openxmlformats.org/drawingml/2006/main">
               <a:ext uri="{FF2B5EF4-FFF2-40B4-BE49-F238E27FC236}">
-                <a16:creationId xmlns:a16="http://schemas.microsoft.com/office/drawing/2014/main" id="{AB7650CA-80AA-448A-BEAC-E29F792063BC}"/>
+                <a16:creationId xmlns:a16="http://schemas.microsoft.com/office/drawing/2014/main" id="{79FC5E01-5BA0-4B96-8DB5-34246964F5A1}"/>
               </a:ext>
             </a:extLst>
           </p:cNvPr>
@@ -25062,7 +25331,7 @@
           <p:cNvPr id="19" name="">
             <a:extLst xmlns:a="http://schemas.openxmlformats.org/drawingml/2006/main">
               <a:ext uri="{FF2B5EF4-FFF2-40B4-BE49-F238E27FC236}">
-                <a16:creationId xmlns:a16="http://schemas.microsoft.com/office/drawing/2014/main" id="{79DE1E80-3C97-4DE5-8197-80704D16BF30}"/>
+                <a16:creationId xmlns:a16="http://schemas.microsoft.com/office/drawing/2014/main" id="{D33B7130-F3CA-4624-B20D-82CC90720CF3}"/>
               </a:ext>
             </a:extLst>
           </p:cNvPr>
@@ -25126,7 +25395,7 @@
           <p:cNvPr id="20" name="">
             <a:extLst xmlns:a="http://schemas.openxmlformats.org/drawingml/2006/main">
               <a:ext uri="{FF2B5EF4-FFF2-40B4-BE49-F238E27FC236}">
-                <a16:creationId xmlns:a16="http://schemas.microsoft.com/office/drawing/2014/main" id="{82C5F221-567F-4A9F-BBE2-C4350947D436}"/>
+                <a16:creationId xmlns:a16="http://schemas.microsoft.com/office/drawing/2014/main" id="{62781B1C-16AF-4C10-ABC5-0CA015ABA0B5}"/>
               </a:ext>
             </a:extLst>
           </p:cNvPr>
@@ -25161,7 +25430,7 @@
           <p:cNvPr id="21" name="">
             <a:extLst xmlns:a="http://schemas.openxmlformats.org/drawingml/2006/main">
               <a:ext uri="{FF2B5EF4-FFF2-40B4-BE49-F238E27FC236}">
-                <a16:creationId xmlns:a16="http://schemas.microsoft.com/office/drawing/2014/main" id="{110C3EEA-9CB5-47EA-A3D1-EDC718EE9322}"/>
+                <a16:creationId xmlns:a16="http://schemas.microsoft.com/office/drawing/2014/main" id="{060EFEEA-CED6-4923-9F74-3998FC05B778}"/>
               </a:ext>
             </a:extLst>
           </p:cNvPr>
@@ -25225,7 +25494,7 @@
           <p:cNvPr id="22" name="">
             <a:extLst xmlns:a="http://schemas.openxmlformats.org/drawingml/2006/main">
               <a:ext uri="{FF2B5EF4-FFF2-40B4-BE49-F238E27FC236}">
-                <a16:creationId xmlns:a16="http://schemas.microsoft.com/office/drawing/2014/main" id="{5BF6FE3A-831E-4904-A3F5-B566F66AAF97}"/>
+                <a16:creationId xmlns:a16="http://schemas.microsoft.com/office/drawing/2014/main" id="{144EAB9C-974C-404B-991D-ABE2525A3C84}"/>
               </a:ext>
             </a:extLst>
           </p:cNvPr>
@@ -25260,7 +25529,7 @@
           <p:cNvPr id="23" name="">
             <a:extLst xmlns:a="http://schemas.openxmlformats.org/drawingml/2006/main">
               <a:ext uri="{FF2B5EF4-FFF2-40B4-BE49-F238E27FC236}">
-                <a16:creationId xmlns:a16="http://schemas.microsoft.com/office/drawing/2014/main" id="{E447C2A8-6E0C-44AA-9851-FE3A992BB6EB}"/>
+                <a16:creationId xmlns:a16="http://schemas.microsoft.com/office/drawing/2014/main" id="{B6C23408-04F5-4C1A-B034-DE4E1434FC00}"/>
               </a:ext>
             </a:extLst>
           </p:cNvPr>
@@ -25324,7 +25593,7 @@
           <p:cNvPr id="24" name="">
             <a:extLst xmlns:a="http://schemas.openxmlformats.org/drawingml/2006/main">
               <a:ext uri="{FF2B5EF4-FFF2-40B4-BE49-F238E27FC236}">
-                <a16:creationId xmlns:a16="http://schemas.microsoft.com/office/drawing/2014/main" id="{3581AC56-DF9C-46C3-913B-34560EFE8EF2}"/>
+                <a16:creationId xmlns:a16="http://schemas.microsoft.com/office/drawing/2014/main" id="{C3A077DA-C3A9-4324-92C7-2CFA006EF60D}"/>
               </a:ext>
             </a:extLst>
           </p:cNvPr>
@@ -25384,7 +25653,7 @@
     </p:spTree>
     <p:extLst>
       <p:ext uri="{BB962C8B-B14F-4D97-AF65-F5344CB8AC3E}">
-        <p14:creationId xmlns:p14="http://schemas.microsoft.com/office/powerpoint/2010/main" val="792389078"/>
+        <p14:creationId xmlns:p14="http://schemas.microsoft.com/office/powerpoint/2010/main" val="1889346797"/>
       </p:ext>
     </p:extLst>
   </p:cSld>
@@ -25415,7 +25684,7 @@
           <p:cNvPr id="1" name="">
             <a:extLst xmlns:a="http://schemas.openxmlformats.org/drawingml/2006/main">
               <a:ext uri="{FF2B5EF4-FFF2-40B4-BE49-F238E27FC236}">
-                <a16:creationId xmlns:a16="http://schemas.microsoft.com/office/drawing/2014/main" id="{6A2E9517-95DB-4E77-B7DE-7F873B0FAEC5}"/>
+                <a16:creationId xmlns:a16="http://schemas.microsoft.com/office/drawing/2014/main" id="{8152E557-7ED7-41CC-B52B-F6EED16049BE}"/>
               </a:ext>
             </a:extLst>
           </p:cNvPr>
@@ -25450,7 +25719,7 @@
           <p:cNvPr id="2" name="">
             <a:extLst xmlns:a="http://schemas.openxmlformats.org/drawingml/2006/main">
               <a:ext uri="{FF2B5EF4-FFF2-40B4-BE49-F238E27FC236}">
-                <a16:creationId xmlns:a16="http://schemas.microsoft.com/office/drawing/2014/main" id="{5641C098-B49B-4206-A6E5-2232AF04D210}"/>
+                <a16:creationId xmlns:a16="http://schemas.microsoft.com/office/drawing/2014/main" id="{6827C4BD-1D2D-4028-BB34-EEFC4FC8BF6F}"/>
               </a:ext>
             </a:extLst>
           </p:cNvPr>
@@ -25514,7 +25783,7 @@
           <p:cNvPr id="3" name="">
             <a:extLst xmlns:a="http://schemas.openxmlformats.org/drawingml/2006/main">
               <a:ext uri="{FF2B5EF4-FFF2-40B4-BE49-F238E27FC236}">
-                <a16:creationId xmlns:a16="http://schemas.microsoft.com/office/drawing/2014/main" id="{43FED5F7-72C6-4642-BD57-28AA6B8708FA}"/>
+                <a16:creationId xmlns:a16="http://schemas.microsoft.com/office/drawing/2014/main" id="{9C802FD1-6961-4203-B067-C40A98B07D28}"/>
               </a:ext>
             </a:extLst>
           </p:cNvPr>
@@ -25578,7 +25847,7 @@
           <p:cNvPr id="4" name="">
             <a:extLst xmlns:a="http://schemas.openxmlformats.org/drawingml/2006/main">
               <a:ext uri="{FF2B5EF4-FFF2-40B4-BE49-F238E27FC236}">
-                <a16:creationId xmlns:a16="http://schemas.microsoft.com/office/drawing/2014/main" id="{EF062B15-5760-4601-A850-254C4EDA4094}"/>
+                <a16:creationId xmlns:a16="http://schemas.microsoft.com/office/drawing/2014/main" id="{263C6A5C-0632-405C-8E4D-2EB4E70EC3C4}"/>
               </a:ext>
             </a:extLst>
           </p:cNvPr>
@@ -25642,7 +25911,7 @@
           <p:cNvPr id="5" name="">
             <a:extLst xmlns:a="http://schemas.openxmlformats.org/drawingml/2006/main">
               <a:ext uri="{FF2B5EF4-FFF2-40B4-BE49-F238E27FC236}">
-                <a16:creationId xmlns:a16="http://schemas.microsoft.com/office/drawing/2014/main" id="{C871A5A2-376B-4134-AE98-08E129F1B92B}"/>
+                <a16:creationId xmlns:a16="http://schemas.microsoft.com/office/drawing/2014/main" id="{3C7C1DDF-3559-4C3F-A27A-22DEFC72F6FF}"/>
               </a:ext>
             </a:extLst>
           </p:cNvPr>
@@ -25706,7 +25975,7 @@
           <p:cNvPr id="6" name="">
             <a:extLst xmlns:a="http://schemas.openxmlformats.org/drawingml/2006/main">
               <a:ext uri="{FF2B5EF4-FFF2-40B4-BE49-F238E27FC236}">
-                <a16:creationId xmlns:a16="http://schemas.microsoft.com/office/drawing/2014/main" id="{A5E1DD2E-0623-428E-94C4-5F7140174EC2}"/>
+                <a16:creationId xmlns:a16="http://schemas.microsoft.com/office/drawing/2014/main" id="{BBF6A636-9851-454E-8A80-A0DB9F953B4E}"/>
               </a:ext>
             </a:extLst>
           </p:cNvPr>
@@ -25739,7 +26008,7 @@
           <p:cNvPr id="7" name="">
             <a:extLst xmlns:a="http://schemas.openxmlformats.org/drawingml/2006/main">
               <a:ext uri="{FF2B5EF4-FFF2-40B4-BE49-F238E27FC236}">
-                <a16:creationId xmlns:a16="http://schemas.microsoft.com/office/drawing/2014/main" id="{B5EDB201-8795-4633-A5FB-8AA2596647FD}"/>
+                <a16:creationId xmlns:a16="http://schemas.microsoft.com/office/drawing/2014/main" id="{5394E859-5C29-4BE8-9273-824DDDC00AA8}"/>
               </a:ext>
             </a:extLst>
           </p:cNvPr>
@@ -25774,7 +26043,7 @@
           <p:cNvPr id="8" name="">
             <a:extLst xmlns:a="http://schemas.openxmlformats.org/drawingml/2006/main">
               <a:ext uri="{FF2B5EF4-FFF2-40B4-BE49-F238E27FC236}">
-                <a16:creationId xmlns:a16="http://schemas.microsoft.com/office/drawing/2014/main" id="{C48828C3-0787-4956-9315-6EF722A1EFDC}"/>
+                <a16:creationId xmlns:a16="http://schemas.microsoft.com/office/drawing/2014/main" id="{6A78F9E6-CDD5-438F-B88B-36D50D667F5C}"/>
               </a:ext>
             </a:extLst>
           </p:cNvPr>
@@ -25838,7 +26107,7 @@
           <p:cNvPr id="9" name="">
             <a:extLst xmlns:a="http://schemas.openxmlformats.org/drawingml/2006/main">
               <a:ext uri="{FF2B5EF4-FFF2-40B4-BE49-F238E27FC236}">
-                <a16:creationId xmlns:a16="http://schemas.microsoft.com/office/drawing/2014/main" id="{3BABB2DE-2C14-48C7-9D9C-CDDDBAAB4C50}"/>
+                <a16:creationId xmlns:a16="http://schemas.microsoft.com/office/drawing/2014/main" id="{F6C72368-30A4-495A-8529-C8D6C275F0B3}"/>
               </a:ext>
             </a:extLst>
           </p:cNvPr>
@@ -25902,7 +26171,7 @@
           <p:cNvPr id="10" name="">
             <a:extLst xmlns:a="http://schemas.openxmlformats.org/drawingml/2006/main">
               <a:ext uri="{FF2B5EF4-FFF2-40B4-BE49-F238E27FC236}">
-                <a16:creationId xmlns:a16="http://schemas.microsoft.com/office/drawing/2014/main" id="{9DB17CC2-CF2E-4B5B-87F5-BD1B2E86B152}"/>
+                <a16:creationId xmlns:a16="http://schemas.microsoft.com/office/drawing/2014/main" id="{57A00C99-205E-4AA5-8BCA-A1B505C377DA}"/>
               </a:ext>
             </a:extLst>
           </p:cNvPr>
@@ -25935,7 +26204,7 @@
           <p:cNvPr id="11" name="">
             <a:extLst xmlns:a="http://schemas.openxmlformats.org/drawingml/2006/main">
               <a:ext uri="{FF2B5EF4-FFF2-40B4-BE49-F238E27FC236}">
-                <a16:creationId xmlns:a16="http://schemas.microsoft.com/office/drawing/2014/main" id="{6206837F-6A5D-47CE-8BFD-085588D15347}"/>
+                <a16:creationId xmlns:a16="http://schemas.microsoft.com/office/drawing/2014/main" id="{6A51FE65-3274-44B2-AEFD-FCFC051858A0}"/>
               </a:ext>
             </a:extLst>
           </p:cNvPr>
@@ -25970,7 +26239,7 @@
           <p:cNvPr id="12" name="">
             <a:extLst xmlns:a="http://schemas.openxmlformats.org/drawingml/2006/main">
               <a:ext uri="{FF2B5EF4-FFF2-40B4-BE49-F238E27FC236}">
-                <a16:creationId xmlns:a16="http://schemas.microsoft.com/office/drawing/2014/main" id="{EBEBA838-EA94-4177-BF9B-99B55B886CDE}"/>
+                <a16:creationId xmlns:a16="http://schemas.microsoft.com/office/drawing/2014/main" id="{D7286161-EDCA-4D85-AA3E-CE13E3EFDF1F}"/>
               </a:ext>
             </a:extLst>
           </p:cNvPr>
@@ -26034,7 +26303,7 @@
           <p:cNvPr id="13" name="">
             <a:extLst xmlns:a="http://schemas.openxmlformats.org/drawingml/2006/main">
               <a:ext uri="{FF2B5EF4-FFF2-40B4-BE49-F238E27FC236}">
-                <a16:creationId xmlns:a16="http://schemas.microsoft.com/office/drawing/2014/main" id="{99281AD6-B522-4967-9F2A-D73E2B47D69B}"/>
+                <a16:creationId xmlns:a16="http://schemas.microsoft.com/office/drawing/2014/main" id="{6B5577FB-5305-4C64-8E70-ECF9E736D6D8}"/>
               </a:ext>
             </a:extLst>
           </p:cNvPr>
@@ -26098,7 +26367,7 @@
           <p:cNvPr id="14" name="">
             <a:extLst xmlns:a="http://schemas.openxmlformats.org/drawingml/2006/main">
               <a:ext uri="{FF2B5EF4-FFF2-40B4-BE49-F238E27FC236}">
-                <a16:creationId xmlns:a16="http://schemas.microsoft.com/office/drawing/2014/main" id="{AEF4DFC8-C1EB-4AD8-8052-FB741D751782}"/>
+                <a16:creationId xmlns:a16="http://schemas.microsoft.com/office/drawing/2014/main" id="{B57FC128-1588-4272-A5B2-1C0FD7C49DD5}"/>
               </a:ext>
             </a:extLst>
           </p:cNvPr>
@@ -26131,7 +26400,7 @@
           <p:cNvPr id="15" name="">
             <a:extLst xmlns:a="http://schemas.openxmlformats.org/drawingml/2006/main">
               <a:ext uri="{FF2B5EF4-FFF2-40B4-BE49-F238E27FC236}">
-                <a16:creationId xmlns:a16="http://schemas.microsoft.com/office/drawing/2014/main" id="{FC300F3A-E78F-4041-8620-665958983D52}"/>
+                <a16:creationId xmlns:a16="http://schemas.microsoft.com/office/drawing/2014/main" id="{55011402-3309-46F4-A8E9-376F36C84E35}"/>
               </a:ext>
             </a:extLst>
           </p:cNvPr>
@@ -26166,7 +26435,7 @@
           <p:cNvPr id="16" name="">
             <a:extLst xmlns:a="http://schemas.openxmlformats.org/drawingml/2006/main">
               <a:ext uri="{FF2B5EF4-FFF2-40B4-BE49-F238E27FC236}">
-                <a16:creationId xmlns:a16="http://schemas.microsoft.com/office/drawing/2014/main" id="{3C2F406E-5F50-4AF3-A450-886CBC043068}"/>
+                <a16:creationId xmlns:a16="http://schemas.microsoft.com/office/drawing/2014/main" id="{B43616A2-46FF-49FD-A940-E4E954AB0D08}"/>
               </a:ext>
             </a:extLst>
           </p:cNvPr>
@@ -26230,7 +26499,7 @@
           <p:cNvPr id="17" name="">
             <a:extLst xmlns:a="http://schemas.openxmlformats.org/drawingml/2006/main">
               <a:ext uri="{FF2B5EF4-FFF2-40B4-BE49-F238E27FC236}">
-                <a16:creationId xmlns:a16="http://schemas.microsoft.com/office/drawing/2014/main" id="{CA94BA91-B9F3-4582-8EC1-9052A6F799DF}"/>
+                <a16:creationId xmlns:a16="http://schemas.microsoft.com/office/drawing/2014/main" id="{0A7AD01A-D0A4-4C8A-AC82-11809F32D6FD}"/>
               </a:ext>
             </a:extLst>
           </p:cNvPr>
@@ -26294,7 +26563,7 @@
           <p:cNvPr id="18" name="">
             <a:extLst xmlns:a="http://schemas.openxmlformats.org/drawingml/2006/main">
               <a:ext uri="{FF2B5EF4-FFF2-40B4-BE49-F238E27FC236}">
-                <a16:creationId xmlns:a16="http://schemas.microsoft.com/office/drawing/2014/main" id="{BE4ED014-290B-4AB3-BF26-48350BD27557}"/>
+                <a16:creationId xmlns:a16="http://schemas.microsoft.com/office/drawing/2014/main" id="{885D44CD-C6B1-42D8-BAD2-61D56C4A719B}"/>
               </a:ext>
             </a:extLst>
           </p:cNvPr>
@@ -26329,7 +26598,7 @@
           <p:cNvPr id="19" name="">
             <a:extLst xmlns:a="http://schemas.openxmlformats.org/drawingml/2006/main">
               <a:ext uri="{FF2B5EF4-FFF2-40B4-BE49-F238E27FC236}">
-                <a16:creationId xmlns:a16="http://schemas.microsoft.com/office/drawing/2014/main" id="{5BAE04C9-A04E-49EC-A8A8-C6DA40B20A49}"/>
+                <a16:creationId xmlns:a16="http://schemas.microsoft.com/office/drawing/2014/main" id="{57F2FEBE-A96A-42DF-BC53-230022E8F769}"/>
               </a:ext>
             </a:extLst>
           </p:cNvPr>
@@ -26393,7 +26662,7 @@
           <p:cNvPr id="20" name="">
             <a:extLst xmlns:a="http://schemas.openxmlformats.org/drawingml/2006/main">
               <a:ext uri="{FF2B5EF4-FFF2-40B4-BE49-F238E27FC236}">
-                <a16:creationId xmlns:a16="http://schemas.microsoft.com/office/drawing/2014/main" id="{213B16ED-A78D-4A9D-A682-C474A209A512}"/>
+                <a16:creationId xmlns:a16="http://schemas.microsoft.com/office/drawing/2014/main" id="{C0B9AE5A-840B-4174-BE60-30E64FCF0467}"/>
               </a:ext>
             </a:extLst>
           </p:cNvPr>
@@ -26428,7 +26697,7 @@
           <p:cNvPr id="21" name="">
             <a:extLst xmlns:a="http://schemas.openxmlformats.org/drawingml/2006/main">
               <a:ext uri="{FF2B5EF4-FFF2-40B4-BE49-F238E27FC236}">
-                <a16:creationId xmlns:a16="http://schemas.microsoft.com/office/drawing/2014/main" id="{516AE107-2D79-426F-8DF4-60431427AFD7}"/>
+                <a16:creationId xmlns:a16="http://schemas.microsoft.com/office/drawing/2014/main" id="{FA012815-D764-4BBE-B7C6-DA29B8B88E45}"/>
               </a:ext>
             </a:extLst>
           </p:cNvPr>
@@ -26490,7 +26759,7 @@
     </p:spTree>
     <p:extLst>
       <p:ext uri="{BB962C8B-B14F-4D97-AF65-F5344CB8AC3E}">
-        <p14:creationId xmlns:p14="http://schemas.microsoft.com/office/powerpoint/2010/main" val="1434246117"/>
+        <p14:creationId xmlns:p14="http://schemas.microsoft.com/office/powerpoint/2010/main" val="2071660063"/>
       </p:ext>
     </p:extLst>
   </p:cSld>

--- a/showtime-2/final/biglab-b-final-yang-kaisen.pptx
+++ b/showtime-2/final/biglab-b-final-yang-kaisen.pptx
@@ -2,30 +2,30 @@
 <file path=ppt/presentation.xml><?xml version="1.0" encoding="utf-8"?>
 <p:presentation xmlns:p="http://schemas.openxmlformats.org/presentationml/2006/main">
   <p:sldMasterIdLst>
-    <p:sldMasterId xmlns:r="http://schemas.openxmlformats.org/officeDocument/2006/relationships" id="2147483648" r:id="R519d6fc8ff93481d"/>
+    <p:sldMasterId xmlns:r="http://schemas.openxmlformats.org/officeDocument/2006/relationships" id="2147483648" r:id="R1f9a1193bb784848"/>
   </p:sldMasterIdLst>
   <p:notesMasterIdLst>
-    <p:notesMasterId xmlns:r="http://schemas.openxmlformats.org/officeDocument/2006/relationships" r:id="Re541d074473e4f0e"/>
+    <p:notesMasterId xmlns:r="http://schemas.openxmlformats.org/officeDocument/2006/relationships" r:id="R43d0a552cd404b0e"/>
   </p:notesMasterIdLst>
   <p:sldIdLst>
-    <p:sldId xmlns:r="http://schemas.openxmlformats.org/officeDocument/2006/relationships" id="256" r:id="Racd2a761470b497d"/>
-    <p:sldId xmlns:r="http://schemas.openxmlformats.org/officeDocument/2006/relationships" id="257" r:id="R446975d6209649c3"/>
-    <p:sldId xmlns:r="http://schemas.openxmlformats.org/officeDocument/2006/relationships" id="258" r:id="R78e67e406453499c"/>
-    <p:sldId xmlns:r="http://schemas.openxmlformats.org/officeDocument/2006/relationships" id="259" r:id="Rc1c9578751184ef9"/>
-    <p:sldId xmlns:r="http://schemas.openxmlformats.org/officeDocument/2006/relationships" id="260" r:id="Rcc466dbd9ee840df"/>
-    <p:sldId xmlns:r="http://schemas.openxmlformats.org/officeDocument/2006/relationships" id="261" r:id="Rc543bdb5d2ec41d6"/>
-    <p:sldId xmlns:r="http://schemas.openxmlformats.org/officeDocument/2006/relationships" id="262" r:id="R70d9a41b27294466"/>
-    <p:sldId xmlns:r="http://schemas.openxmlformats.org/officeDocument/2006/relationships" id="263" r:id="R07065b82605244a2"/>
-    <p:sldId xmlns:r="http://schemas.openxmlformats.org/officeDocument/2006/relationships" id="264" r:id="R37e278cf2d1340a0"/>
-    <p:sldId xmlns:r="http://schemas.openxmlformats.org/officeDocument/2006/relationships" id="265" r:id="R6e64d77de6ff4b5b"/>
-    <p:sldId xmlns:r="http://schemas.openxmlformats.org/officeDocument/2006/relationships" id="266" r:id="Rb498a64987684cfb"/>
-    <p:sldId xmlns:r="http://schemas.openxmlformats.org/officeDocument/2006/relationships" id="267" r:id="R365c0f406f134087"/>
-    <p:sldId xmlns:r="http://schemas.openxmlformats.org/officeDocument/2006/relationships" id="268" r:id="R008f1c9adafc4591"/>
-    <p:sldId xmlns:r="http://schemas.openxmlformats.org/officeDocument/2006/relationships" id="269" r:id="R6618b6d63ef44526"/>
-    <p:sldId xmlns:r="http://schemas.openxmlformats.org/officeDocument/2006/relationships" id="270" r:id="R24fab3bf1e53446c"/>
-    <p:sldId xmlns:r="http://schemas.openxmlformats.org/officeDocument/2006/relationships" id="271" r:id="R54f4f191eac24363"/>
-    <p:sldId xmlns:r="http://schemas.openxmlformats.org/officeDocument/2006/relationships" id="272" r:id="R0e83ff66418c484b"/>
-    <p:sldId xmlns:r="http://schemas.openxmlformats.org/officeDocument/2006/relationships" id="273" r:id="R4bebc1028fea4f1f"/>
+    <p:sldId xmlns:r="http://schemas.openxmlformats.org/officeDocument/2006/relationships" id="256" r:id="R7ed1ecba95a64284"/>
+    <p:sldId xmlns:r="http://schemas.openxmlformats.org/officeDocument/2006/relationships" id="257" r:id="Rc6252496effd40f0"/>
+    <p:sldId xmlns:r="http://schemas.openxmlformats.org/officeDocument/2006/relationships" id="258" r:id="Rf07640a33de94eda"/>
+    <p:sldId xmlns:r="http://schemas.openxmlformats.org/officeDocument/2006/relationships" id="259" r:id="Rfd3b665c0cdd4fd8"/>
+    <p:sldId xmlns:r="http://schemas.openxmlformats.org/officeDocument/2006/relationships" id="260" r:id="R7f161ba273be498a"/>
+    <p:sldId xmlns:r="http://schemas.openxmlformats.org/officeDocument/2006/relationships" id="261" r:id="Rbe04f1dca9de4d40"/>
+    <p:sldId xmlns:r="http://schemas.openxmlformats.org/officeDocument/2006/relationships" id="262" r:id="R1a739e9c126c429a"/>
+    <p:sldId xmlns:r="http://schemas.openxmlformats.org/officeDocument/2006/relationships" id="263" r:id="R3094795fdc454276"/>
+    <p:sldId xmlns:r="http://schemas.openxmlformats.org/officeDocument/2006/relationships" id="264" r:id="R421c6a0aa56845c5"/>
+    <p:sldId xmlns:r="http://schemas.openxmlformats.org/officeDocument/2006/relationships" id="265" r:id="Rc9c525bf95b94851"/>
+    <p:sldId xmlns:r="http://schemas.openxmlformats.org/officeDocument/2006/relationships" id="266" r:id="R73f67351a2904fb9"/>
+    <p:sldId xmlns:r="http://schemas.openxmlformats.org/officeDocument/2006/relationships" id="267" r:id="Rbe660fffc68c4d96"/>
+    <p:sldId xmlns:r="http://schemas.openxmlformats.org/officeDocument/2006/relationships" id="268" r:id="Rebf38849ef6642bc"/>
+    <p:sldId xmlns:r="http://schemas.openxmlformats.org/officeDocument/2006/relationships" id="269" r:id="Rb08d27d19bd541b6"/>
+    <p:sldId xmlns:r="http://schemas.openxmlformats.org/officeDocument/2006/relationships" id="270" r:id="R82e3f2926c33403d"/>
+    <p:sldId xmlns:r="http://schemas.openxmlformats.org/officeDocument/2006/relationships" id="271" r:id="R7213a6b12a8a48ca"/>
+    <p:sldId xmlns:r="http://schemas.openxmlformats.org/officeDocument/2006/relationships" id="272" r:id="R600c5a905b8b44a4"/>
+    <p:sldId xmlns:r="http://schemas.openxmlformats.org/officeDocument/2006/relationships" id="273" r:id="R4dd17e02c54744ac"/>
   </p:sldIdLst>
   <p:sldSz cx="12192000" cy="6858000"/>
   <p:notesSz cx="6858000" cy="9144000"/>
@@ -1694,7 +1694,7 @@
   </p:cSld>
   <p:clrMap bg1="lt1" tx1="dk1" bg2="lt2" tx2="dk2" accent1="accent1" accent2="accent2" accent3="accent3" accent4="accent4" accent5="accent5" accent6="accent6" hlink="hlink" folHlink="folHlink"/>
   <p:sldLayoutIdLst>
-    <p:sldLayoutId xmlns:r="http://schemas.openxmlformats.org/officeDocument/2006/relationships" id="2147483649" r:id="R7b68b58964024047"/>
+    <p:sldLayoutId xmlns:r="http://schemas.openxmlformats.org/officeDocument/2006/relationships" id="2147483649" r:id="R32739f9706c3487e"/>
   </p:sldLayoutIdLst>
   <p:txStyles>
     <p:titleStyle>
@@ -2000,7 +2000,7 @@
           <p:cNvPr id="1" name="">
             <a:extLst xmlns:a="http://schemas.openxmlformats.org/drawingml/2006/main">
               <a:ext uri="{FF2B5EF4-FFF2-40B4-BE49-F238E27FC236}">
-                <a16:creationId xmlns:a16="http://schemas.microsoft.com/office/drawing/2014/main" id="{9A6C9C81-2412-4754-A95D-4DDF4FE31064}"/>
+                <a16:creationId xmlns:a16="http://schemas.microsoft.com/office/drawing/2014/main" id="{091B41B5-FD6A-49E8-8DCB-BEC2C4FF36AF}"/>
               </a:ext>
             </a:extLst>
           </p:cNvPr>
@@ -2035,7 +2035,7 @@
           <p:cNvPr id="2" name="">
             <a:extLst xmlns:a="http://schemas.openxmlformats.org/drawingml/2006/main">
               <a:ext uri="{FF2B5EF4-FFF2-40B4-BE49-F238E27FC236}">
-                <a16:creationId xmlns:a16="http://schemas.microsoft.com/office/drawing/2014/main" id="{E5D81F94-C0A5-4BD4-BFA2-F6A581321D19}"/>
+                <a16:creationId xmlns:a16="http://schemas.microsoft.com/office/drawing/2014/main" id="{C12CAE91-5D53-4931-9D4B-821794AE437C}"/>
               </a:ext>
             </a:extLst>
           </p:cNvPr>
@@ -2099,7 +2099,7 @@
           <p:cNvPr id="3" name="">
             <a:extLst xmlns:a="http://schemas.openxmlformats.org/drawingml/2006/main">
               <a:ext uri="{FF2B5EF4-FFF2-40B4-BE49-F238E27FC236}">
-                <a16:creationId xmlns:a16="http://schemas.microsoft.com/office/drawing/2014/main" id="{56D66A25-E606-4F48-981D-E9C963822600}"/>
+                <a16:creationId xmlns:a16="http://schemas.microsoft.com/office/drawing/2014/main" id="{8B4215EF-6D2A-4DC5-8ED1-8C32E78FD380}"/>
               </a:ext>
             </a:extLst>
           </p:cNvPr>
@@ -2163,7 +2163,7 @@
           <p:cNvPr id="4" name="">
             <a:extLst xmlns:a="http://schemas.openxmlformats.org/drawingml/2006/main">
               <a:ext uri="{FF2B5EF4-FFF2-40B4-BE49-F238E27FC236}">
-                <a16:creationId xmlns:a16="http://schemas.microsoft.com/office/drawing/2014/main" id="{5B3A45D7-5948-40A0-BFB4-7910EC4056DF}"/>
+                <a16:creationId xmlns:a16="http://schemas.microsoft.com/office/drawing/2014/main" id="{A8D71BEA-5F18-4375-B1DB-26EF777E0A9F}"/>
               </a:ext>
             </a:extLst>
           </p:cNvPr>
@@ -2227,7 +2227,7 @@
           <p:cNvPr id="5" name="">
             <a:extLst xmlns:a="http://schemas.openxmlformats.org/drawingml/2006/main">
               <a:ext uri="{FF2B5EF4-FFF2-40B4-BE49-F238E27FC236}">
-                <a16:creationId xmlns:a16="http://schemas.microsoft.com/office/drawing/2014/main" id="{C389E400-49F4-4177-950E-F8957D9CEA6A}"/>
+                <a16:creationId xmlns:a16="http://schemas.microsoft.com/office/drawing/2014/main" id="{1F51B4D1-4986-4104-AF68-0E9DAB3571C2}"/>
               </a:ext>
             </a:extLst>
           </p:cNvPr>
@@ -2291,7 +2291,7 @@
           <p:cNvPr id="6" name="">
             <a:extLst xmlns:a="http://schemas.openxmlformats.org/drawingml/2006/main">
               <a:ext uri="{FF2B5EF4-FFF2-40B4-BE49-F238E27FC236}">
-                <a16:creationId xmlns:a16="http://schemas.microsoft.com/office/drawing/2014/main" id="{16A84FAE-B9D8-444B-9D61-C16A363F1B7A}"/>
+                <a16:creationId xmlns:a16="http://schemas.microsoft.com/office/drawing/2014/main" id="{FCF1F638-9CAA-4C5B-B281-20469F5BA3E3}"/>
               </a:ext>
             </a:extLst>
           </p:cNvPr>
@@ -2326,7 +2326,7 @@
           <p:cNvPr id="7" name="">
             <a:extLst xmlns:a="http://schemas.openxmlformats.org/drawingml/2006/main">
               <a:ext uri="{FF2B5EF4-FFF2-40B4-BE49-F238E27FC236}">
-                <a16:creationId xmlns:a16="http://schemas.microsoft.com/office/drawing/2014/main" id="{2A442439-5F3B-4432-B7BE-4B74CF80A446}"/>
+                <a16:creationId xmlns:a16="http://schemas.microsoft.com/office/drawing/2014/main" id="{3857AB8C-E9FE-4004-AEEB-8DDA887C9178}"/>
               </a:ext>
             </a:extLst>
           </p:cNvPr>
@@ -2390,7 +2390,7 @@
           <p:cNvPr id="8" name="">
             <a:extLst xmlns:a="http://schemas.openxmlformats.org/drawingml/2006/main">
               <a:ext uri="{FF2B5EF4-FFF2-40B4-BE49-F238E27FC236}">
-                <a16:creationId xmlns:a16="http://schemas.microsoft.com/office/drawing/2014/main" id="{B713E763-DFBA-456E-A020-C77CC6A5912A}"/>
+                <a16:creationId xmlns:a16="http://schemas.microsoft.com/office/drawing/2014/main" id="{F85CEC34-0CD2-476E-A1C0-E6F3EF5CB88B}"/>
               </a:ext>
             </a:extLst>
           </p:cNvPr>
@@ -2425,7 +2425,7 @@
           <p:cNvPr id="9" name="">
             <a:extLst xmlns:a="http://schemas.openxmlformats.org/drawingml/2006/main">
               <a:ext uri="{FF2B5EF4-FFF2-40B4-BE49-F238E27FC236}">
-                <a16:creationId xmlns:a16="http://schemas.microsoft.com/office/drawing/2014/main" id="{3A303158-8C9F-421A-A371-16A687DE8001}"/>
+                <a16:creationId xmlns:a16="http://schemas.microsoft.com/office/drawing/2014/main" id="{4B57DAA7-C9CD-46C9-B926-874E53F958F6}"/>
               </a:ext>
             </a:extLst>
           </p:cNvPr>
@@ -2489,7 +2489,7 @@
           <p:cNvPr id="10" name="">
             <a:extLst xmlns:a="http://schemas.openxmlformats.org/drawingml/2006/main">
               <a:ext uri="{FF2B5EF4-FFF2-40B4-BE49-F238E27FC236}">
-                <a16:creationId xmlns:a16="http://schemas.microsoft.com/office/drawing/2014/main" id="{DF71CB77-0837-45C9-8385-AAEB06117922}"/>
+                <a16:creationId xmlns:a16="http://schemas.microsoft.com/office/drawing/2014/main" id="{F8197100-8F57-4404-A363-81818CC6E6BD}"/>
               </a:ext>
             </a:extLst>
           </p:cNvPr>
@@ -2524,7 +2524,7 @@
           <p:cNvPr id="11" name="">
             <a:extLst xmlns:a="http://schemas.openxmlformats.org/drawingml/2006/main">
               <a:ext uri="{FF2B5EF4-FFF2-40B4-BE49-F238E27FC236}">
-                <a16:creationId xmlns:a16="http://schemas.microsoft.com/office/drawing/2014/main" id="{BCAF5ACD-09CD-4AF5-8ECF-E912D6C9CA7C}"/>
+                <a16:creationId xmlns:a16="http://schemas.microsoft.com/office/drawing/2014/main" id="{3B55D87A-8DBB-4B88-81BB-6C3D07989E84}"/>
               </a:ext>
             </a:extLst>
           </p:cNvPr>
@@ -2588,7 +2588,7 @@
           <p:cNvPr id="12" name="">
             <a:extLst xmlns:a="http://schemas.openxmlformats.org/drawingml/2006/main">
               <a:ext uri="{FF2B5EF4-FFF2-40B4-BE49-F238E27FC236}">
-                <a16:creationId xmlns:a16="http://schemas.microsoft.com/office/drawing/2014/main" id="{64581F2B-D043-4B4B-BDD6-DCB639EAA18B}"/>
+                <a16:creationId xmlns:a16="http://schemas.microsoft.com/office/drawing/2014/main" id="{7A4D3D61-BD5A-4B7E-97AB-677E82810A3F}"/>
               </a:ext>
             </a:extLst>
           </p:cNvPr>
@@ -2621,7 +2621,7 @@
           <p:cNvPr id="13" name="">
             <a:extLst xmlns:a="http://schemas.openxmlformats.org/drawingml/2006/main">
               <a:ext uri="{FF2B5EF4-FFF2-40B4-BE49-F238E27FC236}">
-                <a16:creationId xmlns:a16="http://schemas.microsoft.com/office/drawing/2014/main" id="{3BA7C44E-3C6F-4F58-9CF6-E863650EE34E}"/>
+                <a16:creationId xmlns:a16="http://schemas.microsoft.com/office/drawing/2014/main" id="{FF5F2F55-F938-427D-B5C1-42313ACDA661}"/>
               </a:ext>
             </a:extLst>
           </p:cNvPr>
@@ -2685,7 +2685,7 @@
           <p:cNvPr id="14" name="">
             <a:extLst xmlns:a="http://schemas.openxmlformats.org/drawingml/2006/main">
               <a:ext uri="{FF2B5EF4-FFF2-40B4-BE49-F238E27FC236}">
-                <a16:creationId xmlns:a16="http://schemas.microsoft.com/office/drawing/2014/main" id="{1539592D-1E16-4FDC-B47C-90A332737E1E}"/>
+                <a16:creationId xmlns:a16="http://schemas.microsoft.com/office/drawing/2014/main" id="{638F26A3-2F6E-46FC-9C92-4D7A6050B8D0}"/>
               </a:ext>
             </a:extLst>
           </p:cNvPr>
@@ -2816,7 +2816,7 @@
     </p:spTree>
     <p:extLst>
       <p:ext uri="{BB962C8B-B14F-4D97-AF65-F5344CB8AC3E}">
-        <p14:creationId xmlns:p14="http://schemas.microsoft.com/office/powerpoint/2010/main" val="2023439355"/>
+        <p14:creationId xmlns:p14="http://schemas.microsoft.com/office/powerpoint/2010/main" val="1664206819"/>
       </p:ext>
     </p:extLst>
   </p:cSld>
@@ -2847,7 +2847,7 @@
           <p:cNvPr id="1" name="">
             <a:extLst xmlns:a="http://schemas.openxmlformats.org/drawingml/2006/main">
               <a:ext uri="{FF2B5EF4-FFF2-40B4-BE49-F238E27FC236}">
-                <a16:creationId xmlns:a16="http://schemas.microsoft.com/office/drawing/2014/main" id="{CDDFC76C-3ABC-4777-AF5C-BDD8D586BE36}"/>
+                <a16:creationId xmlns:a16="http://schemas.microsoft.com/office/drawing/2014/main" id="{D78192C2-B0D5-4AF5-9CF4-873034CC94D2}"/>
               </a:ext>
             </a:extLst>
           </p:cNvPr>
@@ -2882,7 +2882,7 @@
           <p:cNvPr id="2" name="">
             <a:extLst xmlns:a="http://schemas.openxmlformats.org/drawingml/2006/main">
               <a:ext uri="{FF2B5EF4-FFF2-40B4-BE49-F238E27FC236}">
-                <a16:creationId xmlns:a16="http://schemas.microsoft.com/office/drawing/2014/main" id="{96D1038F-0732-4A70-BF24-0CACBC544DE1}"/>
+                <a16:creationId xmlns:a16="http://schemas.microsoft.com/office/drawing/2014/main" id="{39ADFDD2-4F93-4CEA-9C9B-2F188BE5C5B7}"/>
               </a:ext>
             </a:extLst>
           </p:cNvPr>
@@ -2946,7 +2946,7 @@
           <p:cNvPr id="3" name="">
             <a:extLst xmlns:a="http://schemas.openxmlformats.org/drawingml/2006/main">
               <a:ext uri="{FF2B5EF4-FFF2-40B4-BE49-F238E27FC236}">
-                <a16:creationId xmlns:a16="http://schemas.microsoft.com/office/drawing/2014/main" id="{E003ED2B-00D7-48CB-BA09-763192717A5C}"/>
+                <a16:creationId xmlns:a16="http://schemas.microsoft.com/office/drawing/2014/main" id="{0B5D77F7-8DCC-4F1B-B81E-5004D2EE15D2}"/>
               </a:ext>
             </a:extLst>
           </p:cNvPr>
@@ -3010,7 +3010,7 @@
           <p:cNvPr id="4" name="">
             <a:extLst xmlns:a="http://schemas.openxmlformats.org/drawingml/2006/main">
               <a:ext uri="{FF2B5EF4-FFF2-40B4-BE49-F238E27FC236}">
-                <a16:creationId xmlns:a16="http://schemas.microsoft.com/office/drawing/2014/main" id="{8ED70E52-E180-4E7F-AEF7-907DD97FA69E}"/>
+                <a16:creationId xmlns:a16="http://schemas.microsoft.com/office/drawing/2014/main" id="{B1B7C298-111E-4E14-936B-84B6D25E6A25}"/>
               </a:ext>
             </a:extLst>
           </p:cNvPr>
@@ -3074,7 +3074,7 @@
           <p:cNvPr id="5" name="">
             <a:extLst xmlns:a="http://schemas.openxmlformats.org/drawingml/2006/main">
               <a:ext uri="{FF2B5EF4-FFF2-40B4-BE49-F238E27FC236}">
-                <a16:creationId xmlns:a16="http://schemas.microsoft.com/office/drawing/2014/main" id="{BD0DC3C6-6AA7-47FE-AFFF-BA08BF653251}"/>
+                <a16:creationId xmlns:a16="http://schemas.microsoft.com/office/drawing/2014/main" id="{EEC21961-5322-47BD-8CBF-DAE884C87F5E}"/>
               </a:ext>
             </a:extLst>
           </p:cNvPr>
@@ -3138,7 +3138,7 @@
           <p:cNvPr id="6" name="">
             <a:extLst xmlns:a="http://schemas.openxmlformats.org/drawingml/2006/main">
               <a:ext uri="{FF2B5EF4-FFF2-40B4-BE49-F238E27FC236}">
-                <a16:creationId xmlns:a16="http://schemas.microsoft.com/office/drawing/2014/main" id="{E69ABFAC-6D69-4790-BF30-6534B558C627}"/>
+                <a16:creationId xmlns:a16="http://schemas.microsoft.com/office/drawing/2014/main" id="{B78004A5-8556-4B02-9D6B-C4D57907DC9A}"/>
               </a:ext>
             </a:extLst>
           </p:cNvPr>
@@ -3171,7 +3171,7 @@
           <p:cNvPr id="7" name="">
             <a:extLst xmlns:a="http://schemas.openxmlformats.org/drawingml/2006/main">
               <a:ext uri="{FF2B5EF4-FFF2-40B4-BE49-F238E27FC236}">
-                <a16:creationId xmlns:a16="http://schemas.microsoft.com/office/drawing/2014/main" id="{5CB473FA-8887-44C2-B3DF-5DB2F57AAB14}"/>
+                <a16:creationId xmlns:a16="http://schemas.microsoft.com/office/drawing/2014/main" id="{D393C0BC-DA29-44DE-84C9-874B58D86481}"/>
               </a:ext>
             </a:extLst>
           </p:cNvPr>
@@ -3206,7 +3206,7 @@
           <p:cNvPr id="8" name="">
             <a:extLst xmlns:a="http://schemas.openxmlformats.org/drawingml/2006/main">
               <a:ext uri="{FF2B5EF4-FFF2-40B4-BE49-F238E27FC236}">
-                <a16:creationId xmlns:a16="http://schemas.microsoft.com/office/drawing/2014/main" id="{E51EEB9B-0C65-45BD-B11E-3E5BE9DFD36F}"/>
+                <a16:creationId xmlns:a16="http://schemas.microsoft.com/office/drawing/2014/main" id="{AFA415DD-C448-40E3-96A4-E4B6D5BFC72B}"/>
               </a:ext>
             </a:extLst>
           </p:cNvPr>
@@ -3270,7 +3270,7 @@
           <p:cNvPr id="9" name="">
             <a:extLst xmlns:a="http://schemas.openxmlformats.org/drawingml/2006/main">
               <a:ext uri="{FF2B5EF4-FFF2-40B4-BE49-F238E27FC236}">
-                <a16:creationId xmlns:a16="http://schemas.microsoft.com/office/drawing/2014/main" id="{68A188B9-A340-4750-9D13-4936A878D9A6}"/>
+                <a16:creationId xmlns:a16="http://schemas.microsoft.com/office/drawing/2014/main" id="{06DDBAF9-C39B-40BA-A1E2-D8166FFD5BE9}"/>
               </a:ext>
             </a:extLst>
           </p:cNvPr>
@@ -3316,7 +3316,7 @@
           <p:cNvPr id="10" name="">
             <a:extLst xmlns:a="http://schemas.openxmlformats.org/drawingml/2006/main">
               <a:ext uri="{FF2B5EF4-FFF2-40B4-BE49-F238E27FC236}">
-                <a16:creationId xmlns:a16="http://schemas.microsoft.com/office/drawing/2014/main" id="{581E3F89-1806-4F58-9D38-A4B34CF1CEB2}"/>
+                <a16:creationId xmlns:a16="http://schemas.microsoft.com/office/drawing/2014/main" id="{E06637E2-F66F-4953-82C2-8166E3716A3D}"/>
               </a:ext>
             </a:extLst>
           </p:cNvPr>
@@ -3349,7 +3349,7 @@
           <p:cNvPr id="11" name="">
             <a:extLst xmlns:a="http://schemas.openxmlformats.org/drawingml/2006/main">
               <a:ext uri="{FF2B5EF4-FFF2-40B4-BE49-F238E27FC236}">
-                <a16:creationId xmlns:a16="http://schemas.microsoft.com/office/drawing/2014/main" id="{7BDE112A-F991-4084-8B14-681C642E180A}"/>
+                <a16:creationId xmlns:a16="http://schemas.microsoft.com/office/drawing/2014/main" id="{73B1CCAD-4F23-44D1-A682-5951C621E5CC}"/>
               </a:ext>
             </a:extLst>
           </p:cNvPr>
@@ -3384,7 +3384,7 @@
           <p:cNvPr id="12" name="">
             <a:extLst xmlns:a="http://schemas.openxmlformats.org/drawingml/2006/main">
               <a:ext uri="{FF2B5EF4-FFF2-40B4-BE49-F238E27FC236}">
-                <a16:creationId xmlns:a16="http://schemas.microsoft.com/office/drawing/2014/main" id="{46F4B4FE-A1B4-4BF7-8A2D-6F40D9C54574}"/>
+                <a16:creationId xmlns:a16="http://schemas.microsoft.com/office/drawing/2014/main" id="{65D7278F-D56F-4CF4-8284-550CD8EAEC82}"/>
               </a:ext>
             </a:extLst>
           </p:cNvPr>
@@ -3448,7 +3448,7 @@
           <p:cNvPr id="13" name="">
             <a:extLst xmlns:a="http://schemas.openxmlformats.org/drawingml/2006/main">
               <a:ext uri="{FF2B5EF4-FFF2-40B4-BE49-F238E27FC236}">
-                <a16:creationId xmlns:a16="http://schemas.microsoft.com/office/drawing/2014/main" id="{AADA52E6-8A9C-46E0-890E-96B5203A587E}"/>
+                <a16:creationId xmlns:a16="http://schemas.microsoft.com/office/drawing/2014/main" id="{BC8DFD64-C36E-4801-8422-1DDBEA5E3D49}"/>
               </a:ext>
             </a:extLst>
           </p:cNvPr>
@@ -3494,7 +3494,7 @@
           <p:cNvPr id="14" name="">
             <a:extLst xmlns:a="http://schemas.openxmlformats.org/drawingml/2006/main">
               <a:ext uri="{FF2B5EF4-FFF2-40B4-BE49-F238E27FC236}">
-                <a16:creationId xmlns:a16="http://schemas.microsoft.com/office/drawing/2014/main" id="{D776F405-1BEA-4602-80A9-DD123B5DD824}"/>
+                <a16:creationId xmlns:a16="http://schemas.microsoft.com/office/drawing/2014/main" id="{382360A5-6604-4FD3-A835-22BEC1B56A68}"/>
               </a:ext>
             </a:extLst>
           </p:cNvPr>
@@ -3529,7 +3529,7 @@
           <p:cNvPr id="15" name="">
             <a:extLst xmlns:a="http://schemas.openxmlformats.org/drawingml/2006/main">
               <a:ext uri="{FF2B5EF4-FFF2-40B4-BE49-F238E27FC236}">
-                <a16:creationId xmlns:a16="http://schemas.microsoft.com/office/drawing/2014/main" id="{91D5A3AC-6AEB-462B-8D80-103F551D38BD}"/>
+                <a16:creationId xmlns:a16="http://schemas.microsoft.com/office/drawing/2014/main" id="{E744DFC2-EEF6-4336-986A-D01729726743}"/>
               </a:ext>
             </a:extLst>
           </p:cNvPr>
@@ -3593,7 +3593,7 @@
           <p:cNvPr id="16" name="">
             <a:extLst xmlns:a="http://schemas.openxmlformats.org/drawingml/2006/main">
               <a:ext uri="{FF2B5EF4-FFF2-40B4-BE49-F238E27FC236}">
-                <a16:creationId xmlns:a16="http://schemas.microsoft.com/office/drawing/2014/main" id="{3A3DC27C-239B-454F-B61B-8394AC457FD0}"/>
+                <a16:creationId xmlns:a16="http://schemas.microsoft.com/office/drawing/2014/main" id="{4AFDDD92-0F8E-4C80-AF71-ED3B26452D94}"/>
               </a:ext>
             </a:extLst>
           </p:cNvPr>
@@ -3628,7 +3628,7 @@
           <p:cNvPr id="17" name="">
             <a:extLst xmlns:a="http://schemas.openxmlformats.org/drawingml/2006/main">
               <a:ext uri="{FF2B5EF4-FFF2-40B4-BE49-F238E27FC236}">
-                <a16:creationId xmlns:a16="http://schemas.microsoft.com/office/drawing/2014/main" id="{53E6ADFA-7233-4FAD-8F05-2ED5D48CED14}"/>
+                <a16:creationId xmlns:a16="http://schemas.microsoft.com/office/drawing/2014/main" id="{0B91806D-637A-4A74-9F12-9B8836DDC8E2}"/>
               </a:ext>
             </a:extLst>
           </p:cNvPr>
@@ -3692,7 +3692,7 @@
           <p:cNvPr id="18" name="">
             <a:extLst xmlns:a="http://schemas.openxmlformats.org/drawingml/2006/main">
               <a:ext uri="{FF2B5EF4-FFF2-40B4-BE49-F238E27FC236}">
-                <a16:creationId xmlns:a16="http://schemas.microsoft.com/office/drawing/2014/main" id="{FB2D22F5-B1DA-4549-BF00-53B72A591D2A}"/>
+                <a16:creationId xmlns:a16="http://schemas.microsoft.com/office/drawing/2014/main" id="{B46CFC9A-6190-4063-B9DA-D0C081909113}"/>
               </a:ext>
             </a:extLst>
           </p:cNvPr>
@@ -3727,7 +3727,7 @@
           <p:cNvPr id="19" name="">
             <a:extLst xmlns:a="http://schemas.openxmlformats.org/drawingml/2006/main">
               <a:ext uri="{FF2B5EF4-FFF2-40B4-BE49-F238E27FC236}">
-                <a16:creationId xmlns:a16="http://schemas.microsoft.com/office/drawing/2014/main" id="{31F7F905-323D-41C5-947A-B9E3367CD4A5}"/>
+                <a16:creationId xmlns:a16="http://schemas.microsoft.com/office/drawing/2014/main" id="{12A45ACD-5A09-4856-9CF8-9E903ED549A9}"/>
               </a:ext>
             </a:extLst>
           </p:cNvPr>
@@ -3791,7 +3791,7 @@
           <p:cNvPr id="20" name="">
             <a:extLst xmlns:a="http://schemas.openxmlformats.org/drawingml/2006/main">
               <a:ext uri="{FF2B5EF4-FFF2-40B4-BE49-F238E27FC236}">
-                <a16:creationId xmlns:a16="http://schemas.microsoft.com/office/drawing/2014/main" id="{DFA31FCE-1730-4E23-BEFA-787573090B36}"/>
+                <a16:creationId xmlns:a16="http://schemas.microsoft.com/office/drawing/2014/main" id="{1BDB1B3C-E891-44A4-B1C0-3A5994AF2430}"/>
               </a:ext>
             </a:extLst>
           </p:cNvPr>
@@ -3826,7 +3826,7 @@
           <p:cNvPr id="21" name="">
             <a:extLst xmlns:a="http://schemas.openxmlformats.org/drawingml/2006/main">
               <a:ext uri="{FF2B5EF4-FFF2-40B4-BE49-F238E27FC236}">
-                <a16:creationId xmlns:a16="http://schemas.microsoft.com/office/drawing/2014/main" id="{274CB16F-8775-45BA-9F7A-040EA7494FBC}"/>
+                <a16:creationId xmlns:a16="http://schemas.microsoft.com/office/drawing/2014/main" id="{F1C3B15D-6157-4F09-B131-891D1515C2CF}"/>
               </a:ext>
             </a:extLst>
           </p:cNvPr>
@@ -3890,7 +3890,7 @@
           <p:cNvPr id="22" name="">
             <a:extLst xmlns:a="http://schemas.openxmlformats.org/drawingml/2006/main">
               <a:ext uri="{FF2B5EF4-FFF2-40B4-BE49-F238E27FC236}">
-                <a16:creationId xmlns:a16="http://schemas.microsoft.com/office/drawing/2014/main" id="{13C255DE-BDC4-42ED-B997-E7E741D0AA9C}"/>
+                <a16:creationId xmlns:a16="http://schemas.microsoft.com/office/drawing/2014/main" id="{D177CFF0-0284-4A9A-8A4F-1D5580B39677}"/>
               </a:ext>
             </a:extLst>
           </p:cNvPr>
@@ -3925,7 +3925,7 @@
           <p:cNvPr id="23" name="">
             <a:extLst xmlns:a="http://schemas.openxmlformats.org/drawingml/2006/main">
               <a:ext uri="{FF2B5EF4-FFF2-40B4-BE49-F238E27FC236}">
-                <a16:creationId xmlns:a16="http://schemas.microsoft.com/office/drawing/2014/main" id="{F1710F53-FF06-40DD-820B-046B172A09ED}"/>
+                <a16:creationId xmlns:a16="http://schemas.microsoft.com/office/drawing/2014/main" id="{4F027D98-48AF-4C13-850F-612B43D69DAD}"/>
               </a:ext>
             </a:extLst>
           </p:cNvPr>
@@ -3989,7 +3989,7 @@
           <p:cNvPr id="24" name="">
             <a:extLst xmlns:a="http://schemas.openxmlformats.org/drawingml/2006/main">
               <a:ext uri="{FF2B5EF4-FFF2-40B4-BE49-F238E27FC236}">
-                <a16:creationId xmlns:a16="http://schemas.microsoft.com/office/drawing/2014/main" id="{485EB984-F765-467A-8814-FE158924481F}"/>
+                <a16:creationId xmlns:a16="http://schemas.microsoft.com/office/drawing/2014/main" id="{EFDA237E-3785-4F56-BA88-223C2F54D1AE}"/>
               </a:ext>
             </a:extLst>
           </p:cNvPr>
@@ -4049,7 +4049,7 @@
     </p:spTree>
     <p:extLst>
       <p:ext uri="{BB962C8B-B14F-4D97-AF65-F5344CB8AC3E}">
-        <p14:creationId xmlns:p14="http://schemas.microsoft.com/office/powerpoint/2010/main" val="651776602"/>
+        <p14:creationId xmlns:p14="http://schemas.microsoft.com/office/powerpoint/2010/main" val="1797054301"/>
       </p:ext>
     </p:extLst>
   </p:cSld>
@@ -4080,7 +4080,7 @@
           <p:cNvPr id="1" name="">
             <a:extLst xmlns:a="http://schemas.openxmlformats.org/drawingml/2006/main">
               <a:ext uri="{FF2B5EF4-FFF2-40B4-BE49-F238E27FC236}">
-                <a16:creationId xmlns:a16="http://schemas.microsoft.com/office/drawing/2014/main" id="{29A296CD-A5EF-4C58-BC8E-353390AB11A9}"/>
+                <a16:creationId xmlns:a16="http://schemas.microsoft.com/office/drawing/2014/main" id="{67DE8684-4929-45AE-861F-E877FE608C61}"/>
               </a:ext>
             </a:extLst>
           </p:cNvPr>
@@ -4115,7 +4115,7 @@
           <p:cNvPr id="2" name="">
             <a:extLst xmlns:a="http://schemas.openxmlformats.org/drawingml/2006/main">
               <a:ext uri="{FF2B5EF4-FFF2-40B4-BE49-F238E27FC236}">
-                <a16:creationId xmlns:a16="http://schemas.microsoft.com/office/drawing/2014/main" id="{B0DFF7F8-B5ED-4B6C-B3E9-7A57B9DBDB95}"/>
+                <a16:creationId xmlns:a16="http://schemas.microsoft.com/office/drawing/2014/main" id="{98885BF1-170F-402D-8202-AEBD9DD235D9}"/>
               </a:ext>
             </a:extLst>
           </p:cNvPr>
@@ -4179,7 +4179,7 @@
           <p:cNvPr id="3" name="">
             <a:extLst xmlns:a="http://schemas.openxmlformats.org/drawingml/2006/main">
               <a:ext uri="{FF2B5EF4-FFF2-40B4-BE49-F238E27FC236}">
-                <a16:creationId xmlns:a16="http://schemas.microsoft.com/office/drawing/2014/main" id="{71B6027D-F702-4541-AEAC-CF8CAF5F53B8}"/>
+                <a16:creationId xmlns:a16="http://schemas.microsoft.com/office/drawing/2014/main" id="{4EAD774A-7B6F-4863-8F8C-E34CFAE06906}"/>
               </a:ext>
             </a:extLst>
           </p:cNvPr>
@@ -4243,7 +4243,7 @@
           <p:cNvPr id="4" name="">
             <a:extLst xmlns:a="http://schemas.openxmlformats.org/drawingml/2006/main">
               <a:ext uri="{FF2B5EF4-FFF2-40B4-BE49-F238E27FC236}">
-                <a16:creationId xmlns:a16="http://schemas.microsoft.com/office/drawing/2014/main" id="{1737D1D6-10BE-4D3E-96DD-91FF7785B8BA}"/>
+                <a16:creationId xmlns:a16="http://schemas.microsoft.com/office/drawing/2014/main" id="{50064858-1A08-48F0-8050-E492895A9293}"/>
               </a:ext>
             </a:extLst>
           </p:cNvPr>
@@ -4307,7 +4307,7 @@
           <p:cNvPr id="5" name="">
             <a:extLst xmlns:a="http://schemas.openxmlformats.org/drawingml/2006/main">
               <a:ext uri="{FF2B5EF4-FFF2-40B4-BE49-F238E27FC236}">
-                <a16:creationId xmlns:a16="http://schemas.microsoft.com/office/drawing/2014/main" id="{D4FF6CA9-AC00-4572-8F5F-1CF1451DEC1D}"/>
+                <a16:creationId xmlns:a16="http://schemas.microsoft.com/office/drawing/2014/main" id="{20FF4C3C-40BC-4FC5-812E-CB4FF9648A4C}"/>
               </a:ext>
             </a:extLst>
           </p:cNvPr>
@@ -4371,7 +4371,7 @@
           <p:cNvPr id="6" name="">
             <a:extLst xmlns:a="http://schemas.openxmlformats.org/drawingml/2006/main">
               <a:ext uri="{FF2B5EF4-FFF2-40B4-BE49-F238E27FC236}">
-                <a16:creationId xmlns:a16="http://schemas.microsoft.com/office/drawing/2014/main" id="{CFA5825D-EE65-48DB-94DA-2189B468B742}"/>
+                <a16:creationId xmlns:a16="http://schemas.microsoft.com/office/drawing/2014/main" id="{CBABED9D-A3C0-4E58-BCDD-6DDDBDF9697D}"/>
               </a:ext>
             </a:extLst>
           </p:cNvPr>
@@ -4404,7 +4404,7 @@
           <p:cNvPr id="7" name="">
             <a:extLst xmlns:a="http://schemas.openxmlformats.org/drawingml/2006/main">
               <a:ext uri="{FF2B5EF4-FFF2-40B4-BE49-F238E27FC236}">
-                <a16:creationId xmlns:a16="http://schemas.microsoft.com/office/drawing/2014/main" id="{D27EF678-A3B9-4CC2-AC88-958266F8BC9A}"/>
+                <a16:creationId xmlns:a16="http://schemas.microsoft.com/office/drawing/2014/main" id="{B8CEFA5C-97BA-4B62-8B3F-5F544113576D}"/>
               </a:ext>
             </a:extLst>
           </p:cNvPr>
@@ -4439,7 +4439,7 @@
           <p:cNvPr id="8" name="">
             <a:extLst xmlns:a="http://schemas.openxmlformats.org/drawingml/2006/main">
               <a:ext uri="{FF2B5EF4-FFF2-40B4-BE49-F238E27FC236}">
-                <a16:creationId xmlns:a16="http://schemas.microsoft.com/office/drawing/2014/main" id="{BE9FF7A7-D342-4030-905F-19D602C19710}"/>
+                <a16:creationId xmlns:a16="http://schemas.microsoft.com/office/drawing/2014/main" id="{4D1C3FE3-2A6C-4CD7-AD55-46E9C551CFF5}"/>
               </a:ext>
             </a:extLst>
           </p:cNvPr>
@@ -4503,7 +4503,7 @@
           <p:cNvPr id="9" name="">
             <a:extLst xmlns:a="http://schemas.openxmlformats.org/drawingml/2006/main">
               <a:ext uri="{FF2B5EF4-FFF2-40B4-BE49-F238E27FC236}">
-                <a16:creationId xmlns:a16="http://schemas.microsoft.com/office/drawing/2014/main" id="{4283EDA9-257D-40EE-B02C-E5D340ADFA50}"/>
+                <a16:creationId xmlns:a16="http://schemas.microsoft.com/office/drawing/2014/main" id="{3C3D96FB-7923-4CF4-8D68-39289113FC9F}"/>
               </a:ext>
             </a:extLst>
           </p:cNvPr>
@@ -4567,7 +4567,7 @@
           <p:cNvPr id="10" name="">
             <a:extLst xmlns:a="http://schemas.openxmlformats.org/drawingml/2006/main">
               <a:ext uri="{FF2B5EF4-FFF2-40B4-BE49-F238E27FC236}">
-                <a16:creationId xmlns:a16="http://schemas.microsoft.com/office/drawing/2014/main" id="{A4007A5B-3ABC-488D-A6A7-A9BB7658722B}"/>
+                <a16:creationId xmlns:a16="http://schemas.microsoft.com/office/drawing/2014/main" id="{8CF68335-A279-4D63-AF86-2CD55A0F234C}"/>
               </a:ext>
             </a:extLst>
           </p:cNvPr>
@@ -4600,7 +4600,7 @@
           <p:cNvPr id="11" name="">
             <a:extLst xmlns:a="http://schemas.openxmlformats.org/drawingml/2006/main">
               <a:ext uri="{FF2B5EF4-FFF2-40B4-BE49-F238E27FC236}">
-                <a16:creationId xmlns:a16="http://schemas.microsoft.com/office/drawing/2014/main" id="{C1BDF7EC-0D86-4E61-BD3F-3768D2CF44BD}"/>
+                <a16:creationId xmlns:a16="http://schemas.microsoft.com/office/drawing/2014/main" id="{3585F1B7-2223-43AC-BC5F-46D10BC4E2CB}"/>
               </a:ext>
             </a:extLst>
           </p:cNvPr>
@@ -4635,7 +4635,7 @@
           <p:cNvPr id="12" name="">
             <a:extLst xmlns:a="http://schemas.openxmlformats.org/drawingml/2006/main">
               <a:ext uri="{FF2B5EF4-FFF2-40B4-BE49-F238E27FC236}">
-                <a16:creationId xmlns:a16="http://schemas.microsoft.com/office/drawing/2014/main" id="{FB20AF26-E9E6-456D-A8FA-B52BC3CA80C3}"/>
+                <a16:creationId xmlns:a16="http://schemas.microsoft.com/office/drawing/2014/main" id="{CC7164D3-B50C-4FEA-B2F8-A0B46E2A2676}"/>
               </a:ext>
             </a:extLst>
           </p:cNvPr>
@@ -4699,7 +4699,7 @@
           <p:cNvPr id="13" name="">
             <a:extLst xmlns:a="http://schemas.openxmlformats.org/drawingml/2006/main">
               <a:ext uri="{FF2B5EF4-FFF2-40B4-BE49-F238E27FC236}">
-                <a16:creationId xmlns:a16="http://schemas.microsoft.com/office/drawing/2014/main" id="{BA1FA59D-5906-481D-ABA1-4F4A7383F676}"/>
+                <a16:creationId xmlns:a16="http://schemas.microsoft.com/office/drawing/2014/main" id="{E3A73E35-3012-4E4F-ADE7-048205114B36}"/>
               </a:ext>
             </a:extLst>
           </p:cNvPr>
@@ -4763,7 +4763,7 @@
           <p:cNvPr id="14" name="">
             <a:extLst xmlns:a="http://schemas.openxmlformats.org/drawingml/2006/main">
               <a:ext uri="{FF2B5EF4-FFF2-40B4-BE49-F238E27FC236}">
-                <a16:creationId xmlns:a16="http://schemas.microsoft.com/office/drawing/2014/main" id="{EBC7C418-2DBB-40CA-9595-E5DCFAF37927}"/>
+                <a16:creationId xmlns:a16="http://schemas.microsoft.com/office/drawing/2014/main" id="{120C3266-B7F5-4C76-8B67-E234F029E45F}"/>
               </a:ext>
             </a:extLst>
           </p:cNvPr>
@@ -4796,7 +4796,7 @@
           <p:cNvPr id="15" name="">
             <a:extLst xmlns:a="http://schemas.openxmlformats.org/drawingml/2006/main">
               <a:ext uri="{FF2B5EF4-FFF2-40B4-BE49-F238E27FC236}">
-                <a16:creationId xmlns:a16="http://schemas.microsoft.com/office/drawing/2014/main" id="{3DBF7AD6-E2CF-4596-8A8C-7022ABEC2EC9}"/>
+                <a16:creationId xmlns:a16="http://schemas.microsoft.com/office/drawing/2014/main" id="{404B8CD5-5996-498F-9027-252D71607D0C}"/>
               </a:ext>
             </a:extLst>
           </p:cNvPr>
@@ -4831,7 +4831,7 @@
           <p:cNvPr id="16" name="">
             <a:extLst xmlns:a="http://schemas.openxmlformats.org/drawingml/2006/main">
               <a:ext uri="{FF2B5EF4-FFF2-40B4-BE49-F238E27FC236}">
-                <a16:creationId xmlns:a16="http://schemas.microsoft.com/office/drawing/2014/main" id="{2ABA2059-AF4E-44D0-9E63-47D5463D858E}"/>
+                <a16:creationId xmlns:a16="http://schemas.microsoft.com/office/drawing/2014/main" id="{57E4A9F1-4045-4AD3-9927-F96C4109B6CE}"/>
               </a:ext>
             </a:extLst>
           </p:cNvPr>
@@ -4895,7 +4895,7 @@
           <p:cNvPr id="17" name="">
             <a:extLst xmlns:a="http://schemas.openxmlformats.org/drawingml/2006/main">
               <a:ext uri="{FF2B5EF4-FFF2-40B4-BE49-F238E27FC236}">
-                <a16:creationId xmlns:a16="http://schemas.microsoft.com/office/drawing/2014/main" id="{961018CA-FBC9-4548-AD19-8E27B1605048}"/>
+                <a16:creationId xmlns:a16="http://schemas.microsoft.com/office/drawing/2014/main" id="{BC9934DF-5C2C-470A-8080-9BE1986168B4}"/>
               </a:ext>
             </a:extLst>
           </p:cNvPr>
@@ -4959,7 +4959,7 @@
           <p:cNvPr id="18" name="">
             <a:extLst xmlns:a="http://schemas.openxmlformats.org/drawingml/2006/main">
               <a:ext uri="{FF2B5EF4-FFF2-40B4-BE49-F238E27FC236}">
-                <a16:creationId xmlns:a16="http://schemas.microsoft.com/office/drawing/2014/main" id="{5E5CBB23-3EF9-46AF-838B-457E9BAD0966}"/>
+                <a16:creationId xmlns:a16="http://schemas.microsoft.com/office/drawing/2014/main" id="{605601E8-92E9-4826-A30D-AE6DD3349266}"/>
               </a:ext>
             </a:extLst>
           </p:cNvPr>
@@ -4994,7 +4994,7 @@
           <p:cNvPr id="19" name="">
             <a:extLst xmlns:a="http://schemas.openxmlformats.org/drawingml/2006/main">
               <a:ext uri="{FF2B5EF4-FFF2-40B4-BE49-F238E27FC236}">
-                <a16:creationId xmlns:a16="http://schemas.microsoft.com/office/drawing/2014/main" id="{6323AFF2-21C5-4093-97D0-2840C746725A}"/>
+                <a16:creationId xmlns:a16="http://schemas.microsoft.com/office/drawing/2014/main" id="{C3C77E57-B39E-46B7-A3A6-5D22BBB79959}"/>
               </a:ext>
             </a:extLst>
           </p:cNvPr>
@@ -5058,7 +5058,7 @@
           <p:cNvPr id="20" name="">
             <a:extLst xmlns:a="http://schemas.openxmlformats.org/drawingml/2006/main">
               <a:ext uri="{FF2B5EF4-FFF2-40B4-BE49-F238E27FC236}">
-                <a16:creationId xmlns:a16="http://schemas.microsoft.com/office/drawing/2014/main" id="{9C5B9154-BF66-4CF7-9131-F319AAACD3C4}"/>
+                <a16:creationId xmlns:a16="http://schemas.microsoft.com/office/drawing/2014/main" id="{F0B062F2-C0BC-4ECF-A686-87F339573586}"/>
               </a:ext>
             </a:extLst>
           </p:cNvPr>
@@ -5093,7 +5093,7 @@
           <p:cNvPr id="21" name="">
             <a:extLst xmlns:a="http://schemas.openxmlformats.org/drawingml/2006/main">
               <a:ext uri="{FF2B5EF4-FFF2-40B4-BE49-F238E27FC236}">
-                <a16:creationId xmlns:a16="http://schemas.microsoft.com/office/drawing/2014/main" id="{D3F952C5-29FD-417D-9E90-0BEC404277EE}"/>
+                <a16:creationId xmlns:a16="http://schemas.microsoft.com/office/drawing/2014/main" id="{95FC5CC8-5E09-4913-AA89-194295437604}"/>
               </a:ext>
             </a:extLst>
           </p:cNvPr>
@@ -5155,7 +5155,7 @@
     </p:spTree>
     <p:extLst>
       <p:ext uri="{BB962C8B-B14F-4D97-AF65-F5344CB8AC3E}">
-        <p14:creationId xmlns:p14="http://schemas.microsoft.com/office/powerpoint/2010/main" val="366242448"/>
+        <p14:creationId xmlns:p14="http://schemas.microsoft.com/office/powerpoint/2010/main" val="2108944804"/>
       </p:ext>
     </p:extLst>
   </p:cSld>
@@ -5186,7 +5186,7 @@
           <p:cNvPr id="1" name="">
             <a:extLst xmlns:a="http://schemas.openxmlformats.org/drawingml/2006/main">
               <a:ext uri="{FF2B5EF4-FFF2-40B4-BE49-F238E27FC236}">
-                <a16:creationId xmlns:a16="http://schemas.microsoft.com/office/drawing/2014/main" id="{C43CB2A4-C542-4556-8D6C-FD1B170F7DB7}"/>
+                <a16:creationId xmlns:a16="http://schemas.microsoft.com/office/drawing/2014/main" id="{2087F6A6-073E-4307-9F2E-0EB32021BB3E}"/>
               </a:ext>
             </a:extLst>
           </p:cNvPr>
@@ -5221,7 +5221,7 @@
           <p:cNvPr id="2" name="">
             <a:extLst xmlns:a="http://schemas.openxmlformats.org/drawingml/2006/main">
               <a:ext uri="{FF2B5EF4-FFF2-40B4-BE49-F238E27FC236}">
-                <a16:creationId xmlns:a16="http://schemas.microsoft.com/office/drawing/2014/main" id="{E5A51A18-512E-4A23-9BB1-2A8A86F13D34}"/>
+                <a16:creationId xmlns:a16="http://schemas.microsoft.com/office/drawing/2014/main" id="{A4F2E562-65F0-4461-A579-EE68A9B85B1F}"/>
               </a:ext>
             </a:extLst>
           </p:cNvPr>
@@ -5285,7 +5285,7 @@
           <p:cNvPr id="3" name="">
             <a:extLst xmlns:a="http://schemas.openxmlformats.org/drawingml/2006/main">
               <a:ext uri="{FF2B5EF4-FFF2-40B4-BE49-F238E27FC236}">
-                <a16:creationId xmlns:a16="http://schemas.microsoft.com/office/drawing/2014/main" id="{38B008F1-EA17-4235-8190-CA3302BB222A}"/>
+                <a16:creationId xmlns:a16="http://schemas.microsoft.com/office/drawing/2014/main" id="{F3FFB316-E746-4C4E-B924-CC988537124C}"/>
               </a:ext>
             </a:extLst>
           </p:cNvPr>
@@ -5349,7 +5349,7 @@
           <p:cNvPr id="4" name="">
             <a:extLst xmlns:a="http://schemas.openxmlformats.org/drawingml/2006/main">
               <a:ext uri="{FF2B5EF4-FFF2-40B4-BE49-F238E27FC236}">
-                <a16:creationId xmlns:a16="http://schemas.microsoft.com/office/drawing/2014/main" id="{88364B63-F681-4FFF-8DF9-11FD4E8AD12C}"/>
+                <a16:creationId xmlns:a16="http://schemas.microsoft.com/office/drawing/2014/main" id="{61DE0977-6CAF-4AAB-A430-4F260F786B7C}"/>
               </a:ext>
             </a:extLst>
           </p:cNvPr>
@@ -5413,7 +5413,7 @@
           <p:cNvPr id="5" name="">
             <a:extLst xmlns:a="http://schemas.openxmlformats.org/drawingml/2006/main">
               <a:ext uri="{FF2B5EF4-FFF2-40B4-BE49-F238E27FC236}">
-                <a16:creationId xmlns:a16="http://schemas.microsoft.com/office/drawing/2014/main" id="{8A4392AA-DDB7-45CA-ABF4-C059E79ECEFD}"/>
+                <a16:creationId xmlns:a16="http://schemas.microsoft.com/office/drawing/2014/main" id="{8838748D-F9A7-40DB-BFD6-9926E71E81FD}"/>
               </a:ext>
             </a:extLst>
           </p:cNvPr>
@@ -5477,7 +5477,7 @@
           <p:cNvPr id="6" name="">
             <a:extLst xmlns:a="http://schemas.openxmlformats.org/drawingml/2006/main">
               <a:ext uri="{FF2B5EF4-FFF2-40B4-BE49-F238E27FC236}">
-                <a16:creationId xmlns:a16="http://schemas.microsoft.com/office/drawing/2014/main" id="{D8F66B5C-6564-4437-B429-32701B5E3D4A}"/>
+                <a16:creationId xmlns:a16="http://schemas.microsoft.com/office/drawing/2014/main" id="{63C034BF-8720-4928-A605-B0A9BB19BCBA}"/>
               </a:ext>
             </a:extLst>
           </p:cNvPr>
@@ -5510,7 +5510,7 @@
           <p:cNvPr id="7" name="">
             <a:extLst xmlns:a="http://schemas.openxmlformats.org/drawingml/2006/main">
               <a:ext uri="{FF2B5EF4-FFF2-40B4-BE49-F238E27FC236}">
-                <a16:creationId xmlns:a16="http://schemas.microsoft.com/office/drawing/2014/main" id="{598DE687-6033-4FFC-B4F9-9114B3483390}"/>
+                <a16:creationId xmlns:a16="http://schemas.microsoft.com/office/drawing/2014/main" id="{82D02E94-C17B-44EB-8C99-C7FBD6F09904}"/>
               </a:ext>
             </a:extLst>
           </p:cNvPr>
@@ -5545,7 +5545,7 @@
           <p:cNvPr id="8" name="">
             <a:extLst xmlns:a="http://schemas.openxmlformats.org/drawingml/2006/main">
               <a:ext uri="{FF2B5EF4-FFF2-40B4-BE49-F238E27FC236}">
-                <a16:creationId xmlns:a16="http://schemas.microsoft.com/office/drawing/2014/main" id="{79E3D69F-E534-41EB-A8AE-BDC4D07A67AD}"/>
+                <a16:creationId xmlns:a16="http://schemas.microsoft.com/office/drawing/2014/main" id="{98139B51-A2BD-4060-B541-43A71F03B6FE}"/>
               </a:ext>
             </a:extLst>
           </p:cNvPr>
@@ -5609,7 +5609,7 @@
           <p:cNvPr id="9" name="">
             <a:extLst xmlns:a="http://schemas.openxmlformats.org/drawingml/2006/main">
               <a:ext uri="{FF2B5EF4-FFF2-40B4-BE49-F238E27FC236}">
-                <a16:creationId xmlns:a16="http://schemas.microsoft.com/office/drawing/2014/main" id="{AE8BE841-A454-446D-994F-1D9634C5931A}"/>
+                <a16:creationId xmlns:a16="http://schemas.microsoft.com/office/drawing/2014/main" id="{D43AAF67-BCAB-456C-8432-B4067FFCC7BD}"/>
               </a:ext>
             </a:extLst>
           </p:cNvPr>
@@ -5673,7 +5673,7 @@
           <p:cNvPr id="10" name="">
             <a:extLst xmlns:a="http://schemas.openxmlformats.org/drawingml/2006/main">
               <a:ext uri="{FF2B5EF4-FFF2-40B4-BE49-F238E27FC236}">
-                <a16:creationId xmlns:a16="http://schemas.microsoft.com/office/drawing/2014/main" id="{65FAAB1A-A9FD-44CE-86E2-DF7052EE3B04}"/>
+                <a16:creationId xmlns:a16="http://schemas.microsoft.com/office/drawing/2014/main" id="{F0984846-9942-4D23-9619-890D73B7BEA7}"/>
               </a:ext>
             </a:extLst>
           </p:cNvPr>
@@ -5706,7 +5706,7 @@
           <p:cNvPr id="11" name="">
             <a:extLst xmlns:a="http://schemas.openxmlformats.org/drawingml/2006/main">
               <a:ext uri="{FF2B5EF4-FFF2-40B4-BE49-F238E27FC236}">
-                <a16:creationId xmlns:a16="http://schemas.microsoft.com/office/drawing/2014/main" id="{31C1908E-12D8-4B5B-A8DD-963E5F86B3C5}"/>
+                <a16:creationId xmlns:a16="http://schemas.microsoft.com/office/drawing/2014/main" id="{A2708972-E126-486A-8825-0BE11E7A733A}"/>
               </a:ext>
             </a:extLst>
           </p:cNvPr>
@@ -5741,7 +5741,7 @@
           <p:cNvPr id="12" name="">
             <a:extLst xmlns:a="http://schemas.openxmlformats.org/drawingml/2006/main">
               <a:ext uri="{FF2B5EF4-FFF2-40B4-BE49-F238E27FC236}">
-                <a16:creationId xmlns:a16="http://schemas.microsoft.com/office/drawing/2014/main" id="{E8456BC4-89E2-44D0-B2B3-2E4D1B34339E}"/>
+                <a16:creationId xmlns:a16="http://schemas.microsoft.com/office/drawing/2014/main" id="{964ED3FC-C44A-4470-91E4-E4F4CD8E6556}"/>
               </a:ext>
             </a:extLst>
           </p:cNvPr>
@@ -5805,7 +5805,7 @@
           <p:cNvPr id="13" name="">
             <a:extLst xmlns:a="http://schemas.openxmlformats.org/drawingml/2006/main">
               <a:ext uri="{FF2B5EF4-FFF2-40B4-BE49-F238E27FC236}">
-                <a16:creationId xmlns:a16="http://schemas.microsoft.com/office/drawing/2014/main" id="{F06293CF-87AF-4938-A743-D7F5A7E61B84}"/>
+                <a16:creationId xmlns:a16="http://schemas.microsoft.com/office/drawing/2014/main" id="{EF909E1E-840A-4A27-ADD7-871A9D946FE3}"/>
               </a:ext>
             </a:extLst>
           </p:cNvPr>
@@ -5869,7 +5869,7 @@
           <p:cNvPr id="14" name="">
             <a:extLst xmlns:a="http://schemas.openxmlformats.org/drawingml/2006/main">
               <a:ext uri="{FF2B5EF4-FFF2-40B4-BE49-F238E27FC236}">
-                <a16:creationId xmlns:a16="http://schemas.microsoft.com/office/drawing/2014/main" id="{E202D98E-2372-4032-8F7C-3533A2B519C3}"/>
+                <a16:creationId xmlns:a16="http://schemas.microsoft.com/office/drawing/2014/main" id="{24189CAB-5A35-43FD-985F-6DE807810B86}"/>
               </a:ext>
             </a:extLst>
           </p:cNvPr>
@@ -5902,7 +5902,7 @@
           <p:cNvPr id="15" name="">
             <a:extLst xmlns:a="http://schemas.openxmlformats.org/drawingml/2006/main">
               <a:ext uri="{FF2B5EF4-FFF2-40B4-BE49-F238E27FC236}">
-                <a16:creationId xmlns:a16="http://schemas.microsoft.com/office/drawing/2014/main" id="{471545B8-FDE1-4599-8015-8F4C46A5B545}"/>
+                <a16:creationId xmlns:a16="http://schemas.microsoft.com/office/drawing/2014/main" id="{7D94AFB7-A3A3-43A5-A6B3-5653840E2F2E}"/>
               </a:ext>
             </a:extLst>
           </p:cNvPr>
@@ -5937,7 +5937,7 @@
           <p:cNvPr id="16" name="">
             <a:extLst xmlns:a="http://schemas.openxmlformats.org/drawingml/2006/main">
               <a:ext uri="{FF2B5EF4-FFF2-40B4-BE49-F238E27FC236}">
-                <a16:creationId xmlns:a16="http://schemas.microsoft.com/office/drawing/2014/main" id="{FC5BEFB8-9E0B-4E69-9200-2C310C1ECC12}"/>
+                <a16:creationId xmlns:a16="http://schemas.microsoft.com/office/drawing/2014/main" id="{C5E8AF04-0652-48AE-89C6-B7B8B4BA3C7B}"/>
               </a:ext>
             </a:extLst>
           </p:cNvPr>
@@ -6001,7 +6001,7 @@
           <p:cNvPr id="17" name="">
             <a:extLst xmlns:a="http://schemas.openxmlformats.org/drawingml/2006/main">
               <a:ext uri="{FF2B5EF4-FFF2-40B4-BE49-F238E27FC236}">
-                <a16:creationId xmlns:a16="http://schemas.microsoft.com/office/drawing/2014/main" id="{73F41624-1263-4EF6-B48F-B6401DB4B32F}"/>
+                <a16:creationId xmlns:a16="http://schemas.microsoft.com/office/drawing/2014/main" id="{9A6E01A6-AB4F-4A7A-A71D-DA9AB60E5B7E}"/>
               </a:ext>
             </a:extLst>
           </p:cNvPr>
@@ -6065,7 +6065,7 @@
           <p:cNvPr id="18" name="">
             <a:extLst xmlns:a="http://schemas.openxmlformats.org/drawingml/2006/main">
               <a:ext uri="{FF2B5EF4-FFF2-40B4-BE49-F238E27FC236}">
-                <a16:creationId xmlns:a16="http://schemas.microsoft.com/office/drawing/2014/main" id="{5DD36247-CADC-4A79-B2EE-FBCAB3518B7B}"/>
+                <a16:creationId xmlns:a16="http://schemas.microsoft.com/office/drawing/2014/main" id="{F00452F0-9F21-44CC-83C7-C520CBAC9262}"/>
               </a:ext>
             </a:extLst>
           </p:cNvPr>
@@ -6125,7 +6125,7 @@
     </p:spTree>
     <p:extLst>
       <p:ext uri="{BB962C8B-B14F-4D97-AF65-F5344CB8AC3E}">
-        <p14:creationId xmlns:p14="http://schemas.microsoft.com/office/powerpoint/2010/main" val="902986509"/>
+        <p14:creationId xmlns:p14="http://schemas.microsoft.com/office/powerpoint/2010/main" val="2058638039"/>
       </p:ext>
     </p:extLst>
   </p:cSld>
@@ -6156,7 +6156,7 @@
           <p:cNvPr id="1" name="">
             <a:extLst xmlns:a="http://schemas.openxmlformats.org/drawingml/2006/main">
               <a:ext uri="{FF2B5EF4-FFF2-40B4-BE49-F238E27FC236}">
-                <a16:creationId xmlns:a16="http://schemas.microsoft.com/office/drawing/2014/main" id="{7EFC40BB-EC6C-4872-A486-D2464F983584}"/>
+                <a16:creationId xmlns:a16="http://schemas.microsoft.com/office/drawing/2014/main" id="{FE68D07D-2E60-4641-A275-2A4A31B76F28}"/>
               </a:ext>
             </a:extLst>
           </p:cNvPr>
@@ -6191,7 +6191,7 @@
           <p:cNvPr id="2" name="">
             <a:extLst xmlns:a="http://schemas.openxmlformats.org/drawingml/2006/main">
               <a:ext uri="{FF2B5EF4-FFF2-40B4-BE49-F238E27FC236}">
-                <a16:creationId xmlns:a16="http://schemas.microsoft.com/office/drawing/2014/main" id="{304A0736-60B7-41AF-A712-A8FECA89786E}"/>
+                <a16:creationId xmlns:a16="http://schemas.microsoft.com/office/drawing/2014/main" id="{487AB6BC-A8A0-4330-89FB-419A2FCE781D}"/>
               </a:ext>
             </a:extLst>
           </p:cNvPr>
@@ -6255,7 +6255,7 @@
           <p:cNvPr id="3" name="">
             <a:extLst xmlns:a="http://schemas.openxmlformats.org/drawingml/2006/main">
               <a:ext uri="{FF2B5EF4-FFF2-40B4-BE49-F238E27FC236}">
-                <a16:creationId xmlns:a16="http://schemas.microsoft.com/office/drawing/2014/main" id="{FAAC9567-FF03-4851-88C3-DD7FE16881C5}"/>
+                <a16:creationId xmlns:a16="http://schemas.microsoft.com/office/drawing/2014/main" id="{40D4D4BA-BAA3-42B0-9087-B13D6A147901}"/>
               </a:ext>
             </a:extLst>
           </p:cNvPr>
@@ -6319,7 +6319,7 @@
           <p:cNvPr id="4" name="">
             <a:extLst xmlns:a="http://schemas.openxmlformats.org/drawingml/2006/main">
               <a:ext uri="{FF2B5EF4-FFF2-40B4-BE49-F238E27FC236}">
-                <a16:creationId xmlns:a16="http://schemas.microsoft.com/office/drawing/2014/main" id="{A8411E1D-0903-45FD-82CE-52A3425A32E7}"/>
+                <a16:creationId xmlns:a16="http://schemas.microsoft.com/office/drawing/2014/main" id="{F07D9BD5-716D-491A-A4EC-00230B65A7BA}"/>
               </a:ext>
             </a:extLst>
           </p:cNvPr>
@@ -6383,7 +6383,7 @@
           <p:cNvPr id="5" name="">
             <a:extLst xmlns:a="http://schemas.openxmlformats.org/drawingml/2006/main">
               <a:ext uri="{FF2B5EF4-FFF2-40B4-BE49-F238E27FC236}">
-                <a16:creationId xmlns:a16="http://schemas.microsoft.com/office/drawing/2014/main" id="{429DA504-27C7-42A5-BB84-90B7298234FB}"/>
+                <a16:creationId xmlns:a16="http://schemas.microsoft.com/office/drawing/2014/main" id="{1ECC458D-CD5D-4528-A67F-B3D1C7D49A79}"/>
               </a:ext>
             </a:extLst>
           </p:cNvPr>
@@ -6447,7 +6447,7 @@
           <p:cNvPr id="6" name="">
             <a:extLst xmlns:a="http://schemas.openxmlformats.org/drawingml/2006/main">
               <a:ext uri="{FF2B5EF4-FFF2-40B4-BE49-F238E27FC236}">
-                <a16:creationId xmlns:a16="http://schemas.microsoft.com/office/drawing/2014/main" id="{C78B3570-651A-4BB8-9605-3CC5060769A5}"/>
+                <a16:creationId xmlns:a16="http://schemas.microsoft.com/office/drawing/2014/main" id="{ADCF4EA0-9C9F-4CFE-A3D0-DEA32768D8DD}"/>
               </a:ext>
             </a:extLst>
           </p:cNvPr>
@@ -6480,7 +6480,7 @@
           <p:cNvPr id="7" name="">
             <a:extLst xmlns:a="http://schemas.openxmlformats.org/drawingml/2006/main">
               <a:ext uri="{FF2B5EF4-FFF2-40B4-BE49-F238E27FC236}">
-                <a16:creationId xmlns:a16="http://schemas.microsoft.com/office/drawing/2014/main" id="{8C0A8D29-F91D-4B1C-9B8D-BB13FA87A86A}"/>
+                <a16:creationId xmlns:a16="http://schemas.microsoft.com/office/drawing/2014/main" id="{61D1742C-2655-42DD-BB56-D84CCCB07F52}"/>
               </a:ext>
             </a:extLst>
           </p:cNvPr>
@@ -6544,7 +6544,7 @@
           <p:cNvPr id="8" name="">
             <a:extLst xmlns:a="http://schemas.openxmlformats.org/drawingml/2006/main">
               <a:ext uri="{FF2B5EF4-FFF2-40B4-BE49-F238E27FC236}">
-                <a16:creationId xmlns:a16="http://schemas.microsoft.com/office/drawing/2014/main" id="{2EB916AD-FDB2-44A4-8D6E-3D7CD80DCF4E}"/>
+                <a16:creationId xmlns:a16="http://schemas.microsoft.com/office/drawing/2014/main" id="{4489060F-0185-4970-8962-7FE13F4F6AFF}"/>
               </a:ext>
             </a:extLst>
           </p:cNvPr>
@@ -6579,7 +6579,7 @@
           <p:cNvPr id="9" name="">
             <a:extLst xmlns:a="http://schemas.openxmlformats.org/drawingml/2006/main">
               <a:ext uri="{FF2B5EF4-FFF2-40B4-BE49-F238E27FC236}">
-                <a16:creationId xmlns:a16="http://schemas.microsoft.com/office/drawing/2014/main" id="{6E58B248-82DA-455F-89CB-CB8B123C940F}"/>
+                <a16:creationId xmlns:a16="http://schemas.microsoft.com/office/drawing/2014/main" id="{C09EF93F-5255-4E08-825C-7832AFA2FBA0}"/>
               </a:ext>
             </a:extLst>
           </p:cNvPr>
@@ -6612,7 +6612,7 @@
           <p:cNvPr id="10" name="">
             <a:extLst xmlns:a="http://schemas.openxmlformats.org/drawingml/2006/main">
               <a:ext uri="{FF2B5EF4-FFF2-40B4-BE49-F238E27FC236}">
-                <a16:creationId xmlns:a16="http://schemas.microsoft.com/office/drawing/2014/main" id="{F1E6DB97-EB0E-4DAC-BFA5-711A15B98DB2}"/>
+                <a16:creationId xmlns:a16="http://schemas.microsoft.com/office/drawing/2014/main" id="{8F268B67-B191-4AA7-8C02-D91DAE44CC04}"/>
               </a:ext>
             </a:extLst>
           </p:cNvPr>
@@ -6676,7 +6676,7 @@
           <p:cNvPr id="11" name="">
             <a:extLst xmlns:a="http://schemas.openxmlformats.org/drawingml/2006/main">
               <a:ext uri="{FF2B5EF4-FFF2-40B4-BE49-F238E27FC236}">
-                <a16:creationId xmlns:a16="http://schemas.microsoft.com/office/drawing/2014/main" id="{53E07D0E-905D-4EE8-98F3-1427BDAA56E0}"/>
+                <a16:creationId xmlns:a16="http://schemas.microsoft.com/office/drawing/2014/main" id="{B951E0BB-6397-4D0B-A5BB-275B99B41FDD}"/>
               </a:ext>
             </a:extLst>
           </p:cNvPr>
@@ -6711,7 +6711,7 @@
           <p:cNvPr id="12" name="">
             <a:extLst xmlns:a="http://schemas.openxmlformats.org/drawingml/2006/main">
               <a:ext uri="{FF2B5EF4-FFF2-40B4-BE49-F238E27FC236}">
-                <a16:creationId xmlns:a16="http://schemas.microsoft.com/office/drawing/2014/main" id="{D7AADC8A-DB2C-4764-94D2-D5AA3EF617E6}"/>
+                <a16:creationId xmlns:a16="http://schemas.microsoft.com/office/drawing/2014/main" id="{3B46D6A3-7A71-4442-965C-E2458411CDD5}"/>
               </a:ext>
             </a:extLst>
           </p:cNvPr>
@@ -6744,7 +6744,7 @@
           <p:cNvPr id="13" name="">
             <a:extLst xmlns:a="http://schemas.openxmlformats.org/drawingml/2006/main">
               <a:ext uri="{FF2B5EF4-FFF2-40B4-BE49-F238E27FC236}">
-                <a16:creationId xmlns:a16="http://schemas.microsoft.com/office/drawing/2014/main" id="{50FDBB4E-0102-47C3-BC10-06CBF5938349}"/>
+                <a16:creationId xmlns:a16="http://schemas.microsoft.com/office/drawing/2014/main" id="{D96AE98F-1D2B-487F-B7B3-333E20DA0BB7}"/>
               </a:ext>
             </a:extLst>
           </p:cNvPr>
@@ -6808,7 +6808,7 @@
           <p:cNvPr id="14" name="">
             <a:extLst xmlns:a="http://schemas.openxmlformats.org/drawingml/2006/main">
               <a:ext uri="{FF2B5EF4-FFF2-40B4-BE49-F238E27FC236}">
-                <a16:creationId xmlns:a16="http://schemas.microsoft.com/office/drawing/2014/main" id="{6BF9A0DA-2591-45E6-A80A-B5B7BB174084}"/>
+                <a16:creationId xmlns:a16="http://schemas.microsoft.com/office/drawing/2014/main" id="{51998446-1A91-4EEC-969C-9479EC58EEDC}"/>
               </a:ext>
             </a:extLst>
           </p:cNvPr>
@@ -6843,7 +6843,7 @@
           <p:cNvPr id="15" name="">
             <a:extLst xmlns:a="http://schemas.openxmlformats.org/drawingml/2006/main">
               <a:ext uri="{FF2B5EF4-FFF2-40B4-BE49-F238E27FC236}">
-                <a16:creationId xmlns:a16="http://schemas.microsoft.com/office/drawing/2014/main" id="{61A5BDF7-7021-430E-B012-5D14B9F65667}"/>
+                <a16:creationId xmlns:a16="http://schemas.microsoft.com/office/drawing/2014/main" id="{D324C42D-FA24-4D14-BF39-D802DD126462}"/>
               </a:ext>
             </a:extLst>
           </p:cNvPr>
@@ -6876,7 +6876,7 @@
           <p:cNvPr id="16" name="">
             <a:extLst xmlns:a="http://schemas.openxmlformats.org/drawingml/2006/main">
               <a:ext uri="{FF2B5EF4-FFF2-40B4-BE49-F238E27FC236}">
-                <a16:creationId xmlns:a16="http://schemas.microsoft.com/office/drawing/2014/main" id="{6B3D049A-A53B-4FF3-B140-F3F15C45D62F}"/>
+                <a16:creationId xmlns:a16="http://schemas.microsoft.com/office/drawing/2014/main" id="{57750872-41AA-484D-9CC6-BC32CABC7536}"/>
               </a:ext>
             </a:extLst>
           </p:cNvPr>
@@ -6940,7 +6940,7 @@
           <p:cNvPr id="17" name="">
             <a:extLst xmlns:a="http://schemas.openxmlformats.org/drawingml/2006/main">
               <a:ext uri="{FF2B5EF4-FFF2-40B4-BE49-F238E27FC236}">
-                <a16:creationId xmlns:a16="http://schemas.microsoft.com/office/drawing/2014/main" id="{A29BE665-F082-403C-BC88-43D2F18C6ACE}"/>
+                <a16:creationId xmlns:a16="http://schemas.microsoft.com/office/drawing/2014/main" id="{82C4BC9D-5274-4818-BEFB-75151619A4D2}"/>
               </a:ext>
             </a:extLst>
           </p:cNvPr>
@@ -6975,7 +6975,7 @@
           <p:cNvPr id="18" name="">
             <a:extLst xmlns:a="http://schemas.openxmlformats.org/drawingml/2006/main">
               <a:ext uri="{FF2B5EF4-FFF2-40B4-BE49-F238E27FC236}">
-                <a16:creationId xmlns:a16="http://schemas.microsoft.com/office/drawing/2014/main" id="{129ED82D-E616-4797-B642-E7A890348DAF}"/>
+                <a16:creationId xmlns:a16="http://schemas.microsoft.com/office/drawing/2014/main" id="{217620B2-747E-49D5-8D7E-9141C6CBFA87}"/>
               </a:ext>
             </a:extLst>
           </p:cNvPr>
@@ -7008,7 +7008,7 @@
           <p:cNvPr id="19" name="">
             <a:extLst xmlns:a="http://schemas.openxmlformats.org/drawingml/2006/main">
               <a:ext uri="{FF2B5EF4-FFF2-40B4-BE49-F238E27FC236}">
-                <a16:creationId xmlns:a16="http://schemas.microsoft.com/office/drawing/2014/main" id="{CE2D17BE-09A8-4DB9-9C99-E21CB25D59A6}"/>
+                <a16:creationId xmlns:a16="http://schemas.microsoft.com/office/drawing/2014/main" id="{DA78351D-760A-4EF2-87D3-C187E3F76F47}"/>
               </a:ext>
             </a:extLst>
           </p:cNvPr>
@@ -7072,7 +7072,7 @@
           <p:cNvPr id="20" name="">
             <a:extLst xmlns:a="http://schemas.openxmlformats.org/drawingml/2006/main">
               <a:ext uri="{FF2B5EF4-FFF2-40B4-BE49-F238E27FC236}">
-                <a16:creationId xmlns:a16="http://schemas.microsoft.com/office/drawing/2014/main" id="{38AF9A4B-98DC-4436-82A1-F5BB7C8D95D4}"/>
+                <a16:creationId xmlns:a16="http://schemas.microsoft.com/office/drawing/2014/main" id="{EABC5375-E545-420A-9937-6C195E72AA3D}"/>
               </a:ext>
             </a:extLst>
           </p:cNvPr>
@@ -7107,7 +7107,7 @@
           <p:cNvPr id="21" name="">
             <a:extLst xmlns:a="http://schemas.openxmlformats.org/drawingml/2006/main">
               <a:ext uri="{FF2B5EF4-FFF2-40B4-BE49-F238E27FC236}">
-                <a16:creationId xmlns:a16="http://schemas.microsoft.com/office/drawing/2014/main" id="{07BE1D9C-542C-4FCF-B5BB-ECBA354A0221}"/>
+                <a16:creationId xmlns:a16="http://schemas.microsoft.com/office/drawing/2014/main" id="{B2EA1313-C056-4A50-AF08-76FC0ADA70D7}"/>
               </a:ext>
             </a:extLst>
           </p:cNvPr>
@@ -7171,7 +7171,7 @@
           <p:cNvPr id="22" name="">
             <a:extLst xmlns:a="http://schemas.openxmlformats.org/drawingml/2006/main">
               <a:ext uri="{FF2B5EF4-FFF2-40B4-BE49-F238E27FC236}">
-                <a16:creationId xmlns:a16="http://schemas.microsoft.com/office/drawing/2014/main" id="{2D31198E-25C1-49FD-AFE9-CCA3B1D8E0D8}"/>
+                <a16:creationId xmlns:a16="http://schemas.microsoft.com/office/drawing/2014/main" id="{16E527F9-2A4C-4BEA-B3F3-89FD7AD07EC8}"/>
               </a:ext>
             </a:extLst>
           </p:cNvPr>
@@ -7206,7 +7206,7 @@
           <p:cNvPr id="23" name="">
             <a:extLst xmlns:a="http://schemas.openxmlformats.org/drawingml/2006/main">
               <a:ext uri="{FF2B5EF4-FFF2-40B4-BE49-F238E27FC236}">
-                <a16:creationId xmlns:a16="http://schemas.microsoft.com/office/drawing/2014/main" id="{62D6926B-B435-485C-A0D2-0850729D772F}"/>
+                <a16:creationId xmlns:a16="http://schemas.microsoft.com/office/drawing/2014/main" id="{C260C899-BA01-44F4-B94F-D45C474FCAAF}"/>
               </a:ext>
             </a:extLst>
           </p:cNvPr>
@@ -7270,7 +7270,7 @@
           <p:cNvPr id="24" name="">
             <a:extLst xmlns:a="http://schemas.openxmlformats.org/drawingml/2006/main">
               <a:ext uri="{FF2B5EF4-FFF2-40B4-BE49-F238E27FC236}">
-                <a16:creationId xmlns:a16="http://schemas.microsoft.com/office/drawing/2014/main" id="{37DEE9BC-BB33-4BE0-A918-09710AF3D201}"/>
+                <a16:creationId xmlns:a16="http://schemas.microsoft.com/office/drawing/2014/main" id="{8C0F9524-DC6D-49D4-9009-DD9EED9F9472}"/>
               </a:ext>
             </a:extLst>
           </p:cNvPr>
@@ -7305,7 +7305,7 @@
           <p:cNvPr id="25" name="">
             <a:extLst xmlns:a="http://schemas.openxmlformats.org/drawingml/2006/main">
               <a:ext uri="{FF2B5EF4-FFF2-40B4-BE49-F238E27FC236}">
-                <a16:creationId xmlns:a16="http://schemas.microsoft.com/office/drawing/2014/main" id="{CFDE0D3E-7F61-4040-ABA4-BDADDFA434E3}"/>
+                <a16:creationId xmlns:a16="http://schemas.microsoft.com/office/drawing/2014/main" id="{C5661A72-3E27-4F11-A38E-1B6A35739633}"/>
               </a:ext>
             </a:extLst>
           </p:cNvPr>
@@ -7367,7 +7367,7 @@
     </p:spTree>
     <p:extLst>
       <p:ext uri="{BB962C8B-B14F-4D97-AF65-F5344CB8AC3E}">
-        <p14:creationId xmlns:p14="http://schemas.microsoft.com/office/powerpoint/2010/main" val="111026253"/>
+        <p14:creationId xmlns:p14="http://schemas.microsoft.com/office/powerpoint/2010/main" val="702533981"/>
       </p:ext>
     </p:extLst>
   </p:cSld>
@@ -7398,7 +7398,7 @@
           <p:cNvPr id="1" name="">
             <a:extLst xmlns:a="http://schemas.openxmlformats.org/drawingml/2006/main">
               <a:ext uri="{FF2B5EF4-FFF2-40B4-BE49-F238E27FC236}">
-                <a16:creationId xmlns:a16="http://schemas.microsoft.com/office/drawing/2014/main" id="{76D600CC-5D4B-4837-A460-474A3D9013AB}"/>
+                <a16:creationId xmlns:a16="http://schemas.microsoft.com/office/drawing/2014/main" id="{EBFDE00E-B470-4B59-8FA9-7EC2037CE8A2}"/>
               </a:ext>
             </a:extLst>
           </p:cNvPr>
@@ -7433,7 +7433,7 @@
           <p:cNvPr id="2" name="">
             <a:extLst xmlns:a="http://schemas.openxmlformats.org/drawingml/2006/main">
               <a:ext uri="{FF2B5EF4-FFF2-40B4-BE49-F238E27FC236}">
-                <a16:creationId xmlns:a16="http://schemas.microsoft.com/office/drawing/2014/main" id="{1236CF0F-3D65-486D-BAC2-1D9B24753F0E}"/>
+                <a16:creationId xmlns:a16="http://schemas.microsoft.com/office/drawing/2014/main" id="{14A13C81-C625-4423-86A9-2AD5E7A1C59C}"/>
               </a:ext>
             </a:extLst>
           </p:cNvPr>
@@ -7497,7 +7497,7 @@
           <p:cNvPr id="3" name="">
             <a:extLst xmlns:a="http://schemas.openxmlformats.org/drawingml/2006/main">
               <a:ext uri="{FF2B5EF4-FFF2-40B4-BE49-F238E27FC236}">
-                <a16:creationId xmlns:a16="http://schemas.microsoft.com/office/drawing/2014/main" id="{25E192D2-208A-42EF-9E0C-5E1C7E4CD4E3}"/>
+                <a16:creationId xmlns:a16="http://schemas.microsoft.com/office/drawing/2014/main" id="{D7AC2DA3-3027-459E-B7F8-4FAA9136962B}"/>
               </a:ext>
             </a:extLst>
           </p:cNvPr>
@@ -7561,7 +7561,7 @@
           <p:cNvPr id="4" name="">
             <a:extLst xmlns:a="http://schemas.openxmlformats.org/drawingml/2006/main">
               <a:ext uri="{FF2B5EF4-FFF2-40B4-BE49-F238E27FC236}">
-                <a16:creationId xmlns:a16="http://schemas.microsoft.com/office/drawing/2014/main" id="{610DAB9F-8AD5-4856-B53C-3E244FB57AF9}"/>
+                <a16:creationId xmlns:a16="http://schemas.microsoft.com/office/drawing/2014/main" id="{9027B7C6-A89A-4420-B501-6DBB2D3CE520}"/>
               </a:ext>
             </a:extLst>
           </p:cNvPr>
@@ -7625,7 +7625,7 @@
           <p:cNvPr id="5" name="">
             <a:extLst xmlns:a="http://schemas.openxmlformats.org/drawingml/2006/main">
               <a:ext uri="{FF2B5EF4-FFF2-40B4-BE49-F238E27FC236}">
-                <a16:creationId xmlns:a16="http://schemas.microsoft.com/office/drawing/2014/main" id="{35648CF2-0B8C-444D-9D34-EB589EE72FF4}"/>
+                <a16:creationId xmlns:a16="http://schemas.microsoft.com/office/drawing/2014/main" id="{71F8B8DA-FA5A-45B5-9BF1-FA41FCD28D48}"/>
               </a:ext>
             </a:extLst>
           </p:cNvPr>
@@ -7689,7 +7689,7 @@
           <p:cNvPr id="6" name="">
             <a:extLst xmlns:a="http://schemas.openxmlformats.org/drawingml/2006/main">
               <a:ext uri="{FF2B5EF4-FFF2-40B4-BE49-F238E27FC236}">
-                <a16:creationId xmlns:a16="http://schemas.microsoft.com/office/drawing/2014/main" id="{480CA461-F4EE-47E3-BCEB-BD28332933B6}"/>
+                <a16:creationId xmlns:a16="http://schemas.microsoft.com/office/drawing/2014/main" id="{CBED8CE7-A3EF-4C4B-9119-3E795BB0470E}"/>
               </a:ext>
             </a:extLst>
           </p:cNvPr>
@@ -7722,7 +7722,7 @@
           <p:cNvPr id="7" name="">
             <a:extLst xmlns:a="http://schemas.openxmlformats.org/drawingml/2006/main">
               <a:ext uri="{FF2B5EF4-FFF2-40B4-BE49-F238E27FC236}">
-                <a16:creationId xmlns:a16="http://schemas.microsoft.com/office/drawing/2014/main" id="{5BED2A08-E225-46A3-8801-FBCA58BAF773}"/>
+                <a16:creationId xmlns:a16="http://schemas.microsoft.com/office/drawing/2014/main" id="{38E1BE2B-B99A-4F13-AB54-C6FACA50B42D}"/>
               </a:ext>
             </a:extLst>
           </p:cNvPr>
@@ -7757,7 +7757,7 @@
           <p:cNvPr id="8" name="">
             <a:extLst xmlns:a="http://schemas.openxmlformats.org/drawingml/2006/main">
               <a:ext uri="{FF2B5EF4-FFF2-40B4-BE49-F238E27FC236}">
-                <a16:creationId xmlns:a16="http://schemas.microsoft.com/office/drawing/2014/main" id="{A90F1F30-6D0F-41A9-AE8F-E6CD67432024}"/>
+                <a16:creationId xmlns:a16="http://schemas.microsoft.com/office/drawing/2014/main" id="{78FBFBA7-6349-4555-9BD0-8C91829B0CB4}"/>
               </a:ext>
             </a:extLst>
           </p:cNvPr>
@@ -7821,7 +7821,7 @@
           <p:cNvPr id="9" name="">
             <a:extLst xmlns:a="http://schemas.openxmlformats.org/drawingml/2006/main">
               <a:ext uri="{FF2B5EF4-FFF2-40B4-BE49-F238E27FC236}">
-                <a16:creationId xmlns:a16="http://schemas.microsoft.com/office/drawing/2014/main" id="{0E5EE598-83F9-4F98-B57A-9A18CA829AD9}"/>
+                <a16:creationId xmlns:a16="http://schemas.microsoft.com/office/drawing/2014/main" id="{23C1FFDA-884F-4A33-A77D-9AD3ACEBEE32}"/>
               </a:ext>
             </a:extLst>
           </p:cNvPr>
@@ -7885,7 +7885,7 @@
           <p:cNvPr id="10" name="">
             <a:extLst xmlns:a="http://schemas.openxmlformats.org/drawingml/2006/main">
               <a:ext uri="{FF2B5EF4-FFF2-40B4-BE49-F238E27FC236}">
-                <a16:creationId xmlns:a16="http://schemas.microsoft.com/office/drawing/2014/main" id="{5C8D33E8-7917-4F49-A88F-06F0BCD481C3}"/>
+                <a16:creationId xmlns:a16="http://schemas.microsoft.com/office/drawing/2014/main" id="{6803391A-9C35-4E4C-91E3-41519ECAC786}"/>
               </a:ext>
             </a:extLst>
           </p:cNvPr>
@@ -7918,7 +7918,7 @@
           <p:cNvPr id="11" name="">
             <a:extLst xmlns:a="http://schemas.openxmlformats.org/drawingml/2006/main">
               <a:ext uri="{FF2B5EF4-FFF2-40B4-BE49-F238E27FC236}">
-                <a16:creationId xmlns:a16="http://schemas.microsoft.com/office/drawing/2014/main" id="{6C75CCC0-4601-4CDA-97B6-B3D9907F0DF3}"/>
+                <a16:creationId xmlns:a16="http://schemas.microsoft.com/office/drawing/2014/main" id="{3AD545B1-BFC2-45A5-961C-DEC2B0B6F7CD}"/>
               </a:ext>
             </a:extLst>
           </p:cNvPr>
@@ -7953,7 +7953,7 @@
           <p:cNvPr id="12" name="">
             <a:extLst xmlns:a="http://schemas.openxmlformats.org/drawingml/2006/main">
               <a:ext uri="{FF2B5EF4-FFF2-40B4-BE49-F238E27FC236}">
-                <a16:creationId xmlns:a16="http://schemas.microsoft.com/office/drawing/2014/main" id="{05ACCA39-B3F5-4BBB-896B-A70A662BE2B7}"/>
+                <a16:creationId xmlns:a16="http://schemas.microsoft.com/office/drawing/2014/main" id="{4514C0C4-CE2E-4FCC-8C14-24574C2AB934}"/>
               </a:ext>
             </a:extLst>
           </p:cNvPr>
@@ -8017,7 +8017,7 @@
           <p:cNvPr id="13" name="">
             <a:extLst xmlns:a="http://schemas.openxmlformats.org/drawingml/2006/main">
               <a:ext uri="{FF2B5EF4-FFF2-40B4-BE49-F238E27FC236}">
-                <a16:creationId xmlns:a16="http://schemas.microsoft.com/office/drawing/2014/main" id="{52949E0E-4AA2-4CA8-AC2E-645C53E390BE}"/>
+                <a16:creationId xmlns:a16="http://schemas.microsoft.com/office/drawing/2014/main" id="{BD7B9E6B-1B37-4F87-9520-1860613D2C25}"/>
               </a:ext>
             </a:extLst>
           </p:cNvPr>
@@ -8081,7 +8081,7 @@
           <p:cNvPr id="14" name="">
             <a:extLst xmlns:a="http://schemas.openxmlformats.org/drawingml/2006/main">
               <a:ext uri="{FF2B5EF4-FFF2-40B4-BE49-F238E27FC236}">
-                <a16:creationId xmlns:a16="http://schemas.microsoft.com/office/drawing/2014/main" id="{3134BB53-259D-4809-AB8B-994E2BB3ED18}"/>
+                <a16:creationId xmlns:a16="http://schemas.microsoft.com/office/drawing/2014/main" id="{8011AE73-7E3B-4C60-9642-B4538651B990}"/>
               </a:ext>
             </a:extLst>
           </p:cNvPr>
@@ -8114,7 +8114,7 @@
           <p:cNvPr id="15" name="">
             <a:extLst xmlns:a="http://schemas.openxmlformats.org/drawingml/2006/main">
               <a:ext uri="{FF2B5EF4-FFF2-40B4-BE49-F238E27FC236}">
-                <a16:creationId xmlns:a16="http://schemas.microsoft.com/office/drawing/2014/main" id="{69702922-9EFD-48B8-815A-367EE547F027}"/>
+                <a16:creationId xmlns:a16="http://schemas.microsoft.com/office/drawing/2014/main" id="{109D9192-C9AE-46C1-8716-B12F8E838797}"/>
               </a:ext>
             </a:extLst>
           </p:cNvPr>
@@ -8149,7 +8149,7 @@
           <p:cNvPr id="16" name="">
             <a:extLst xmlns:a="http://schemas.openxmlformats.org/drawingml/2006/main">
               <a:ext uri="{FF2B5EF4-FFF2-40B4-BE49-F238E27FC236}">
-                <a16:creationId xmlns:a16="http://schemas.microsoft.com/office/drawing/2014/main" id="{DEBDDC7B-0889-4E14-8DE2-87131F59AD99}"/>
+                <a16:creationId xmlns:a16="http://schemas.microsoft.com/office/drawing/2014/main" id="{60DBDCA9-038E-4E2F-9B6F-884255B83EE9}"/>
               </a:ext>
             </a:extLst>
           </p:cNvPr>
@@ -8213,7 +8213,7 @@
           <p:cNvPr id="17" name="">
             <a:extLst xmlns:a="http://schemas.openxmlformats.org/drawingml/2006/main">
               <a:ext uri="{FF2B5EF4-FFF2-40B4-BE49-F238E27FC236}">
-                <a16:creationId xmlns:a16="http://schemas.microsoft.com/office/drawing/2014/main" id="{68B37CD3-EA85-4D56-BFD3-592D611EEAFE}"/>
+                <a16:creationId xmlns:a16="http://schemas.microsoft.com/office/drawing/2014/main" id="{78E8E2AA-484D-4D3B-B064-5FAC7B0C82F1}"/>
               </a:ext>
             </a:extLst>
           </p:cNvPr>
@@ -8277,7 +8277,7 @@
           <p:cNvPr id="18" name="">
             <a:extLst xmlns:a="http://schemas.openxmlformats.org/drawingml/2006/main">
               <a:ext uri="{FF2B5EF4-FFF2-40B4-BE49-F238E27FC236}">
-                <a16:creationId xmlns:a16="http://schemas.microsoft.com/office/drawing/2014/main" id="{B500963D-8179-4A3A-B756-33855153D393}"/>
+                <a16:creationId xmlns:a16="http://schemas.microsoft.com/office/drawing/2014/main" id="{F4981F16-30F3-4A93-9189-063EA5EC57E3}"/>
               </a:ext>
             </a:extLst>
           </p:cNvPr>
@@ -8310,7 +8310,7 @@
           <p:cNvPr id="19" name="">
             <a:extLst xmlns:a="http://schemas.openxmlformats.org/drawingml/2006/main">
               <a:ext uri="{FF2B5EF4-FFF2-40B4-BE49-F238E27FC236}">
-                <a16:creationId xmlns:a16="http://schemas.microsoft.com/office/drawing/2014/main" id="{796E5475-CF4F-45E3-B34B-45545B1EBBE1}"/>
+                <a16:creationId xmlns:a16="http://schemas.microsoft.com/office/drawing/2014/main" id="{6C03F52D-4D0B-4E57-BF8A-0299C4BEAA5E}"/>
               </a:ext>
             </a:extLst>
           </p:cNvPr>
@@ -8345,7 +8345,7 @@
           <p:cNvPr id="20" name="">
             <a:extLst xmlns:a="http://schemas.openxmlformats.org/drawingml/2006/main">
               <a:ext uri="{FF2B5EF4-FFF2-40B4-BE49-F238E27FC236}">
-                <a16:creationId xmlns:a16="http://schemas.microsoft.com/office/drawing/2014/main" id="{ABFF57F3-AC8C-426B-B392-ACDF8651E4A3}"/>
+                <a16:creationId xmlns:a16="http://schemas.microsoft.com/office/drawing/2014/main" id="{2CEBF7F9-907F-41D6-902B-511D9DECF8B1}"/>
               </a:ext>
             </a:extLst>
           </p:cNvPr>
@@ -8409,7 +8409,7 @@
           <p:cNvPr id="21" name="">
             <a:extLst xmlns:a="http://schemas.openxmlformats.org/drawingml/2006/main">
               <a:ext uri="{FF2B5EF4-FFF2-40B4-BE49-F238E27FC236}">
-                <a16:creationId xmlns:a16="http://schemas.microsoft.com/office/drawing/2014/main" id="{E1AB15F1-8AA4-4E8C-AA92-2D999AFFDF51}"/>
+                <a16:creationId xmlns:a16="http://schemas.microsoft.com/office/drawing/2014/main" id="{6CC4619C-892B-4F9D-98BE-20EC302388B5}"/>
               </a:ext>
             </a:extLst>
           </p:cNvPr>
@@ -8473,7 +8473,7 @@
           <p:cNvPr id="22" name="">
             <a:extLst xmlns:a="http://schemas.openxmlformats.org/drawingml/2006/main">
               <a:ext uri="{FF2B5EF4-FFF2-40B4-BE49-F238E27FC236}">
-                <a16:creationId xmlns:a16="http://schemas.microsoft.com/office/drawing/2014/main" id="{E2606FFE-E014-48E8-B5C0-E216D7E4FBE8}"/>
+                <a16:creationId xmlns:a16="http://schemas.microsoft.com/office/drawing/2014/main" id="{BBE2600B-D9F6-4F35-A634-6F5263ACE8D5}"/>
               </a:ext>
             </a:extLst>
           </p:cNvPr>
@@ -8506,7 +8506,7 @@
           <p:cNvPr id="23" name="">
             <a:extLst xmlns:a="http://schemas.openxmlformats.org/drawingml/2006/main">
               <a:ext uri="{FF2B5EF4-FFF2-40B4-BE49-F238E27FC236}">
-                <a16:creationId xmlns:a16="http://schemas.microsoft.com/office/drawing/2014/main" id="{110FD838-BDCB-413A-84BB-F9AC2AD3A1E8}"/>
+                <a16:creationId xmlns:a16="http://schemas.microsoft.com/office/drawing/2014/main" id="{C8504E9B-3A1C-4841-9A34-8FD53C9215B5}"/>
               </a:ext>
             </a:extLst>
           </p:cNvPr>
@@ -8541,7 +8541,7 @@
           <p:cNvPr id="24" name="">
             <a:extLst xmlns:a="http://schemas.openxmlformats.org/drawingml/2006/main">
               <a:ext uri="{FF2B5EF4-FFF2-40B4-BE49-F238E27FC236}">
-                <a16:creationId xmlns:a16="http://schemas.microsoft.com/office/drawing/2014/main" id="{1897308D-0BC0-4619-AFC5-C0EF569C8824}"/>
+                <a16:creationId xmlns:a16="http://schemas.microsoft.com/office/drawing/2014/main" id="{535EE577-EC8F-4677-9799-71D4E81C3820}"/>
               </a:ext>
             </a:extLst>
           </p:cNvPr>
@@ -8605,7 +8605,7 @@
           <p:cNvPr id="25" name="">
             <a:extLst xmlns:a="http://schemas.openxmlformats.org/drawingml/2006/main">
               <a:ext uri="{FF2B5EF4-FFF2-40B4-BE49-F238E27FC236}">
-                <a16:creationId xmlns:a16="http://schemas.microsoft.com/office/drawing/2014/main" id="{D2FFEED8-74F3-472E-8B8A-116DCAC1EEB9}"/>
+                <a16:creationId xmlns:a16="http://schemas.microsoft.com/office/drawing/2014/main" id="{458BDFD6-7BCC-4646-A208-D5A0E33123B0}"/>
               </a:ext>
             </a:extLst>
           </p:cNvPr>
@@ -8669,7 +8669,7 @@
           <p:cNvPr id="26" name="">
             <a:extLst xmlns:a="http://schemas.openxmlformats.org/drawingml/2006/main">
               <a:ext uri="{FF2B5EF4-FFF2-40B4-BE49-F238E27FC236}">
-                <a16:creationId xmlns:a16="http://schemas.microsoft.com/office/drawing/2014/main" id="{A330EBF6-D40A-4397-A078-59EA0493A09F}"/>
+                <a16:creationId xmlns:a16="http://schemas.microsoft.com/office/drawing/2014/main" id="{FECBBC67-D4F9-4FB6-A6EE-10BC8E563603}"/>
               </a:ext>
             </a:extLst>
           </p:cNvPr>
@@ -8702,7 +8702,7 @@
           <p:cNvPr id="27" name="">
             <a:extLst xmlns:a="http://schemas.openxmlformats.org/drawingml/2006/main">
               <a:ext uri="{FF2B5EF4-FFF2-40B4-BE49-F238E27FC236}">
-                <a16:creationId xmlns:a16="http://schemas.microsoft.com/office/drawing/2014/main" id="{DD1C8127-E89E-4D3C-986C-E87FB843577C}"/>
+                <a16:creationId xmlns:a16="http://schemas.microsoft.com/office/drawing/2014/main" id="{D4DEDB88-60C7-4410-8DBE-D1B5848EE897}"/>
               </a:ext>
             </a:extLst>
           </p:cNvPr>
@@ -8766,7 +8766,7 @@
           <p:cNvPr id="28" name="">
             <a:extLst xmlns:a="http://schemas.openxmlformats.org/drawingml/2006/main">
               <a:ext uri="{FF2B5EF4-FFF2-40B4-BE49-F238E27FC236}">
-                <a16:creationId xmlns:a16="http://schemas.microsoft.com/office/drawing/2014/main" id="{3544C657-498B-4728-A906-3255509B8211}"/>
+                <a16:creationId xmlns:a16="http://schemas.microsoft.com/office/drawing/2014/main" id="{9B2E64F6-5C0B-48B6-931A-6D160305E16B}"/>
               </a:ext>
             </a:extLst>
           </p:cNvPr>
@@ -8830,7 +8830,7 @@
           <p:cNvPr id="29" name="">
             <a:extLst xmlns:a="http://schemas.openxmlformats.org/drawingml/2006/main">
               <a:ext uri="{FF2B5EF4-FFF2-40B4-BE49-F238E27FC236}">
-                <a16:creationId xmlns:a16="http://schemas.microsoft.com/office/drawing/2014/main" id="{13F493CE-6A21-45B5-9F9E-4E1DD82708F6}"/>
+                <a16:creationId xmlns:a16="http://schemas.microsoft.com/office/drawing/2014/main" id="{297D6F5F-31B8-42D8-848F-9FF451C40ECD}"/>
               </a:ext>
             </a:extLst>
           </p:cNvPr>
@@ -8894,7 +8894,7 @@
           <p:cNvPr id="30" name="">
             <a:extLst xmlns:a="http://schemas.openxmlformats.org/drawingml/2006/main">
               <a:ext uri="{FF2B5EF4-FFF2-40B4-BE49-F238E27FC236}">
-                <a16:creationId xmlns:a16="http://schemas.microsoft.com/office/drawing/2014/main" id="{95A53AD5-16AC-4F65-ACF5-88439B74172E}"/>
+                <a16:creationId xmlns:a16="http://schemas.microsoft.com/office/drawing/2014/main" id="{88EEEE4F-AB90-49CB-A18A-7AA7AA58F969}"/>
               </a:ext>
             </a:extLst>
           </p:cNvPr>
@@ -8958,7 +8958,7 @@
           <p:cNvPr id="31" name="">
             <a:extLst xmlns:a="http://schemas.openxmlformats.org/drawingml/2006/main">
               <a:ext uri="{FF2B5EF4-FFF2-40B4-BE49-F238E27FC236}">
-                <a16:creationId xmlns:a16="http://schemas.microsoft.com/office/drawing/2014/main" id="{C670050C-3E7B-495E-8AFF-93B107FCFC8F}"/>
+                <a16:creationId xmlns:a16="http://schemas.microsoft.com/office/drawing/2014/main" id="{CB5BEEEA-6C34-4119-BAD9-9F5A79B8D8FA}"/>
               </a:ext>
             </a:extLst>
           </p:cNvPr>
@@ -9022,7 +9022,7 @@
           <p:cNvPr id="32" name="">
             <a:extLst xmlns:a="http://schemas.openxmlformats.org/drawingml/2006/main">
               <a:ext uri="{FF2B5EF4-FFF2-40B4-BE49-F238E27FC236}">
-                <a16:creationId xmlns:a16="http://schemas.microsoft.com/office/drawing/2014/main" id="{D6A5126A-BB25-4D11-8C4F-0EF9057E603E}"/>
+                <a16:creationId xmlns:a16="http://schemas.microsoft.com/office/drawing/2014/main" id="{20E1617F-60C5-4769-9F5E-FBD06016E596}"/>
               </a:ext>
             </a:extLst>
           </p:cNvPr>
@@ -9082,7 +9082,7 @@
     </p:spTree>
     <p:extLst>
       <p:ext uri="{BB962C8B-B14F-4D97-AF65-F5344CB8AC3E}">
-        <p14:creationId xmlns:p14="http://schemas.microsoft.com/office/powerpoint/2010/main" val="1752523957"/>
+        <p14:creationId xmlns:p14="http://schemas.microsoft.com/office/powerpoint/2010/main" val="1953126477"/>
       </p:ext>
     </p:extLst>
   </p:cSld>
@@ -9113,7 +9113,7 @@
           <p:cNvPr id="1" name="">
             <a:extLst xmlns:a="http://schemas.openxmlformats.org/drawingml/2006/main">
               <a:ext uri="{FF2B5EF4-FFF2-40B4-BE49-F238E27FC236}">
-                <a16:creationId xmlns:a16="http://schemas.microsoft.com/office/drawing/2014/main" id="{6087FFE3-AD78-4002-8FAD-D9B58337B89D}"/>
+                <a16:creationId xmlns:a16="http://schemas.microsoft.com/office/drawing/2014/main" id="{5831939E-97C2-49A5-9193-620986EA741B}"/>
               </a:ext>
             </a:extLst>
           </p:cNvPr>
@@ -9148,7 +9148,7 @@
           <p:cNvPr id="2" name="">
             <a:extLst xmlns:a="http://schemas.openxmlformats.org/drawingml/2006/main">
               <a:ext uri="{FF2B5EF4-FFF2-40B4-BE49-F238E27FC236}">
-                <a16:creationId xmlns:a16="http://schemas.microsoft.com/office/drawing/2014/main" id="{96004DC5-8F01-4DD0-9BCC-231E5C9A87E1}"/>
+                <a16:creationId xmlns:a16="http://schemas.microsoft.com/office/drawing/2014/main" id="{693717BD-A7EE-44E4-9B76-1CF04FC6C09D}"/>
               </a:ext>
             </a:extLst>
           </p:cNvPr>
@@ -9212,7 +9212,7 @@
           <p:cNvPr id="3" name="">
             <a:extLst xmlns:a="http://schemas.openxmlformats.org/drawingml/2006/main">
               <a:ext uri="{FF2B5EF4-FFF2-40B4-BE49-F238E27FC236}">
-                <a16:creationId xmlns:a16="http://schemas.microsoft.com/office/drawing/2014/main" id="{DB7DE707-1ECF-4F65-8C29-32F47D7D5A91}"/>
+                <a16:creationId xmlns:a16="http://schemas.microsoft.com/office/drawing/2014/main" id="{EF8B89E8-4F1C-4555-BF93-CCFB18617CFE}"/>
               </a:ext>
             </a:extLst>
           </p:cNvPr>
@@ -9276,7 +9276,7 @@
           <p:cNvPr id="4" name="">
             <a:extLst xmlns:a="http://schemas.openxmlformats.org/drawingml/2006/main">
               <a:ext uri="{FF2B5EF4-FFF2-40B4-BE49-F238E27FC236}">
-                <a16:creationId xmlns:a16="http://schemas.microsoft.com/office/drawing/2014/main" id="{633A9E80-D7E2-4C3D-B31B-321577D4D199}"/>
+                <a16:creationId xmlns:a16="http://schemas.microsoft.com/office/drawing/2014/main" id="{54C7AA52-7E90-42BD-BAAD-DEE5700450A0}"/>
               </a:ext>
             </a:extLst>
           </p:cNvPr>
@@ -9340,7 +9340,7 @@
           <p:cNvPr id="5" name="">
             <a:extLst xmlns:a="http://schemas.openxmlformats.org/drawingml/2006/main">
               <a:ext uri="{FF2B5EF4-FFF2-40B4-BE49-F238E27FC236}">
-                <a16:creationId xmlns:a16="http://schemas.microsoft.com/office/drawing/2014/main" id="{228A7ADE-C4B6-4AF9-9765-12A9E732C56D}"/>
+                <a16:creationId xmlns:a16="http://schemas.microsoft.com/office/drawing/2014/main" id="{3AAACEC7-05AC-4A54-9FDE-2478FFD73505}"/>
               </a:ext>
             </a:extLst>
           </p:cNvPr>
@@ -9404,7 +9404,7 @@
           <p:cNvPr id="6" name="">
             <a:extLst xmlns:a="http://schemas.openxmlformats.org/drawingml/2006/main">
               <a:ext uri="{FF2B5EF4-FFF2-40B4-BE49-F238E27FC236}">
-                <a16:creationId xmlns:a16="http://schemas.microsoft.com/office/drawing/2014/main" id="{6540F7C1-2398-4EE9-B6BE-87A4054DE1D3}"/>
+                <a16:creationId xmlns:a16="http://schemas.microsoft.com/office/drawing/2014/main" id="{F3ECD081-1026-49BD-A89E-69B78F29F448}"/>
               </a:ext>
             </a:extLst>
           </p:cNvPr>
@@ -9466,7 +9466,7 @@
           <p:cNvPr id="7" name="">
             <a:extLst xmlns:a="http://schemas.openxmlformats.org/drawingml/2006/main">
               <a:ext uri="{FF2B5EF4-FFF2-40B4-BE49-F238E27FC236}">
-                <a16:creationId xmlns:a16="http://schemas.microsoft.com/office/drawing/2014/main" id="{1F4F46D8-E002-456C-8979-90C00C889D4C}"/>
+                <a16:creationId xmlns:a16="http://schemas.microsoft.com/office/drawing/2014/main" id="{83471581-F962-4107-81CE-0020AC70CF92}"/>
               </a:ext>
             </a:extLst>
           </p:cNvPr>
@@ -9499,7 +9499,7 @@
           <p:cNvPr id="8" name="">
             <a:extLst xmlns:a="http://schemas.openxmlformats.org/drawingml/2006/main">
               <a:ext uri="{FF2B5EF4-FFF2-40B4-BE49-F238E27FC236}">
-                <a16:creationId xmlns:a16="http://schemas.microsoft.com/office/drawing/2014/main" id="{6878A271-B74F-4228-934A-15F68E385DFA}"/>
+                <a16:creationId xmlns:a16="http://schemas.microsoft.com/office/drawing/2014/main" id="{F3315EBB-A937-4CF6-80F3-154586A87B7E}"/>
               </a:ext>
             </a:extLst>
           </p:cNvPr>
@@ -9534,7 +9534,7 @@
           <p:cNvPr id="9" name="">
             <a:extLst xmlns:a="http://schemas.openxmlformats.org/drawingml/2006/main">
               <a:ext uri="{FF2B5EF4-FFF2-40B4-BE49-F238E27FC236}">
-                <a16:creationId xmlns:a16="http://schemas.microsoft.com/office/drawing/2014/main" id="{B7F47C03-B839-4FCD-91FC-19707D2BB6B0}"/>
+                <a16:creationId xmlns:a16="http://schemas.microsoft.com/office/drawing/2014/main" id="{82303516-4A37-4767-A073-1690D4DFAF2C}"/>
               </a:ext>
             </a:extLst>
           </p:cNvPr>
@@ -9598,7 +9598,7 @@
           <p:cNvPr id="10" name="">
             <a:extLst xmlns:a="http://schemas.openxmlformats.org/drawingml/2006/main">
               <a:ext uri="{FF2B5EF4-FFF2-40B4-BE49-F238E27FC236}">
-                <a16:creationId xmlns:a16="http://schemas.microsoft.com/office/drawing/2014/main" id="{859CBDF6-0343-427E-A9CD-393E6A26EBDF}"/>
+                <a16:creationId xmlns:a16="http://schemas.microsoft.com/office/drawing/2014/main" id="{097DD74D-971E-4DEE-8BE3-BBE79BA47A8C}"/>
               </a:ext>
             </a:extLst>
           </p:cNvPr>
@@ -9662,7 +9662,7 @@
           <p:cNvPr id="11" name="">
             <a:extLst xmlns:a="http://schemas.openxmlformats.org/drawingml/2006/main">
               <a:ext uri="{FF2B5EF4-FFF2-40B4-BE49-F238E27FC236}">
-                <a16:creationId xmlns:a16="http://schemas.microsoft.com/office/drawing/2014/main" id="{DD0E7E2D-A2DE-4878-AC99-50E43376B2C6}"/>
+                <a16:creationId xmlns:a16="http://schemas.microsoft.com/office/drawing/2014/main" id="{99F72FAA-5FAC-4720-8797-4AF0E8809BB9}"/>
               </a:ext>
             </a:extLst>
           </p:cNvPr>
@@ -9695,7 +9695,7 @@
           <p:cNvPr id="12" name="">
             <a:extLst xmlns:a="http://schemas.openxmlformats.org/drawingml/2006/main">
               <a:ext uri="{FF2B5EF4-FFF2-40B4-BE49-F238E27FC236}">
-                <a16:creationId xmlns:a16="http://schemas.microsoft.com/office/drawing/2014/main" id="{83680F46-2737-4850-8589-8538FE01C8FC}"/>
+                <a16:creationId xmlns:a16="http://schemas.microsoft.com/office/drawing/2014/main" id="{E22E8CF1-7A20-43D9-B879-4233E3E5D9F0}"/>
               </a:ext>
             </a:extLst>
           </p:cNvPr>
@@ -9730,7 +9730,7 @@
           <p:cNvPr id="13" name="">
             <a:extLst xmlns:a="http://schemas.openxmlformats.org/drawingml/2006/main">
               <a:ext uri="{FF2B5EF4-FFF2-40B4-BE49-F238E27FC236}">
-                <a16:creationId xmlns:a16="http://schemas.microsoft.com/office/drawing/2014/main" id="{522D2BE5-E91F-41A4-A422-268BA4A885B6}"/>
+                <a16:creationId xmlns:a16="http://schemas.microsoft.com/office/drawing/2014/main" id="{17BC0237-8AA7-4D3E-A3BE-9D5355031EE6}"/>
               </a:ext>
             </a:extLst>
           </p:cNvPr>
@@ -9794,7 +9794,7 @@
           <p:cNvPr id="14" name="">
             <a:extLst xmlns:a="http://schemas.openxmlformats.org/drawingml/2006/main">
               <a:ext uri="{FF2B5EF4-FFF2-40B4-BE49-F238E27FC236}">
-                <a16:creationId xmlns:a16="http://schemas.microsoft.com/office/drawing/2014/main" id="{B055467A-78B8-4542-8CB6-7E1F555C0198}"/>
+                <a16:creationId xmlns:a16="http://schemas.microsoft.com/office/drawing/2014/main" id="{EB31C116-F826-4238-89C0-89A2142C5AF0}"/>
               </a:ext>
             </a:extLst>
           </p:cNvPr>
@@ -9858,7 +9858,7 @@
           <p:cNvPr id="15" name="">
             <a:extLst xmlns:a="http://schemas.openxmlformats.org/drawingml/2006/main">
               <a:ext uri="{FF2B5EF4-FFF2-40B4-BE49-F238E27FC236}">
-                <a16:creationId xmlns:a16="http://schemas.microsoft.com/office/drawing/2014/main" id="{4106F979-D0B0-4C76-A1C7-5687D9E53CE4}"/>
+                <a16:creationId xmlns:a16="http://schemas.microsoft.com/office/drawing/2014/main" id="{AD3BD0D2-67D8-4474-AF5C-1B39B5709E22}"/>
               </a:ext>
             </a:extLst>
           </p:cNvPr>
@@ -9891,7 +9891,7 @@
           <p:cNvPr id="16" name="">
             <a:extLst xmlns:a="http://schemas.openxmlformats.org/drawingml/2006/main">
               <a:ext uri="{FF2B5EF4-FFF2-40B4-BE49-F238E27FC236}">
-                <a16:creationId xmlns:a16="http://schemas.microsoft.com/office/drawing/2014/main" id="{4DF94481-4689-4373-A0CC-9D62CA725F83}"/>
+                <a16:creationId xmlns:a16="http://schemas.microsoft.com/office/drawing/2014/main" id="{0C52B094-8A09-4F28-8E08-7369B4943E39}"/>
               </a:ext>
             </a:extLst>
           </p:cNvPr>
@@ -9926,7 +9926,7 @@
           <p:cNvPr id="17" name="">
             <a:extLst xmlns:a="http://schemas.openxmlformats.org/drawingml/2006/main">
               <a:ext uri="{FF2B5EF4-FFF2-40B4-BE49-F238E27FC236}">
-                <a16:creationId xmlns:a16="http://schemas.microsoft.com/office/drawing/2014/main" id="{4CE49D05-BA40-4CC4-8BD8-6B86F3EE1C42}"/>
+                <a16:creationId xmlns:a16="http://schemas.microsoft.com/office/drawing/2014/main" id="{BB49D8E4-D9AF-4114-AAC2-F757C2EF66EF}"/>
               </a:ext>
             </a:extLst>
           </p:cNvPr>
@@ -9990,7 +9990,7 @@
           <p:cNvPr id="18" name="">
             <a:extLst xmlns:a="http://schemas.openxmlformats.org/drawingml/2006/main">
               <a:ext uri="{FF2B5EF4-FFF2-40B4-BE49-F238E27FC236}">
-                <a16:creationId xmlns:a16="http://schemas.microsoft.com/office/drawing/2014/main" id="{1B2F4832-C322-4FEA-8521-6E2328381060}"/>
+                <a16:creationId xmlns:a16="http://schemas.microsoft.com/office/drawing/2014/main" id="{4337825E-5C22-4D57-90CF-CA5F0E06588A}"/>
               </a:ext>
             </a:extLst>
           </p:cNvPr>
@@ -10054,7 +10054,7 @@
           <p:cNvPr id="19" name="">
             <a:extLst xmlns:a="http://schemas.openxmlformats.org/drawingml/2006/main">
               <a:ext uri="{FF2B5EF4-FFF2-40B4-BE49-F238E27FC236}">
-                <a16:creationId xmlns:a16="http://schemas.microsoft.com/office/drawing/2014/main" id="{77313518-9F97-4382-B31A-64D06271F267}"/>
+                <a16:creationId xmlns:a16="http://schemas.microsoft.com/office/drawing/2014/main" id="{DFCCECAE-2DA6-474E-8C24-6EE98AA272DE}"/>
               </a:ext>
             </a:extLst>
           </p:cNvPr>
@@ -10087,7 +10087,7 @@
           <p:cNvPr id="20" name="">
             <a:extLst xmlns:a="http://schemas.openxmlformats.org/drawingml/2006/main">
               <a:ext uri="{FF2B5EF4-FFF2-40B4-BE49-F238E27FC236}">
-                <a16:creationId xmlns:a16="http://schemas.microsoft.com/office/drawing/2014/main" id="{2E06BD69-ECC5-4698-830D-43D948A55322}"/>
+                <a16:creationId xmlns:a16="http://schemas.microsoft.com/office/drawing/2014/main" id="{4BFC0944-FC45-4833-9A4E-8DC4495034B5}"/>
               </a:ext>
             </a:extLst>
           </p:cNvPr>
@@ -10122,7 +10122,7 @@
           <p:cNvPr id="21" name="">
             <a:extLst xmlns:a="http://schemas.openxmlformats.org/drawingml/2006/main">
               <a:ext uri="{FF2B5EF4-FFF2-40B4-BE49-F238E27FC236}">
-                <a16:creationId xmlns:a16="http://schemas.microsoft.com/office/drawing/2014/main" id="{3599FFD7-C395-4E36-B9DF-4B6F5BB2A2E9}"/>
+                <a16:creationId xmlns:a16="http://schemas.microsoft.com/office/drawing/2014/main" id="{84FC5C74-440B-4A9A-A74F-5F5E6D6D2D67}"/>
               </a:ext>
             </a:extLst>
           </p:cNvPr>
@@ -10186,7 +10186,7 @@
           <p:cNvPr id="22" name="">
             <a:extLst xmlns:a="http://schemas.openxmlformats.org/drawingml/2006/main">
               <a:ext uri="{FF2B5EF4-FFF2-40B4-BE49-F238E27FC236}">
-                <a16:creationId xmlns:a16="http://schemas.microsoft.com/office/drawing/2014/main" id="{884B86B2-08AA-42C9-A8DE-EE83CC014F49}"/>
+                <a16:creationId xmlns:a16="http://schemas.microsoft.com/office/drawing/2014/main" id="{8E692BF4-6E44-4B38-8452-9D064A408661}"/>
               </a:ext>
             </a:extLst>
           </p:cNvPr>
@@ -10250,7 +10250,7 @@
           <p:cNvPr id="23" name="">
             <a:extLst xmlns:a="http://schemas.openxmlformats.org/drawingml/2006/main">
               <a:ext uri="{FF2B5EF4-FFF2-40B4-BE49-F238E27FC236}">
-                <a16:creationId xmlns:a16="http://schemas.microsoft.com/office/drawing/2014/main" id="{27CFE366-3ED9-4F68-853A-E6B4977D422C}"/>
+                <a16:creationId xmlns:a16="http://schemas.microsoft.com/office/drawing/2014/main" id="{CFF1F24C-4670-4BCE-A5DE-B8EBA54A6D6F}"/>
               </a:ext>
             </a:extLst>
           </p:cNvPr>
@@ -10312,7 +10312,7 @@
     </p:spTree>
     <p:extLst>
       <p:ext uri="{BB962C8B-B14F-4D97-AF65-F5344CB8AC3E}">
-        <p14:creationId xmlns:p14="http://schemas.microsoft.com/office/powerpoint/2010/main" val="882572724"/>
+        <p14:creationId xmlns:p14="http://schemas.microsoft.com/office/powerpoint/2010/main" val="1485888009"/>
       </p:ext>
     </p:extLst>
   </p:cSld>
@@ -10343,7 +10343,7 @@
           <p:cNvPr id="1" name="">
             <a:extLst xmlns:a="http://schemas.openxmlformats.org/drawingml/2006/main">
               <a:ext uri="{FF2B5EF4-FFF2-40B4-BE49-F238E27FC236}">
-                <a16:creationId xmlns:a16="http://schemas.microsoft.com/office/drawing/2014/main" id="{8E676A0C-33C7-4A04-8CD2-38198DD40B5F}"/>
+                <a16:creationId xmlns:a16="http://schemas.microsoft.com/office/drawing/2014/main" id="{1E8A0E5B-6BCA-4A6A-9DF8-1283F3E57AF8}"/>
               </a:ext>
             </a:extLst>
           </p:cNvPr>
@@ -10378,7 +10378,7 @@
           <p:cNvPr id="2" name="">
             <a:extLst xmlns:a="http://schemas.openxmlformats.org/drawingml/2006/main">
               <a:ext uri="{FF2B5EF4-FFF2-40B4-BE49-F238E27FC236}">
-                <a16:creationId xmlns:a16="http://schemas.microsoft.com/office/drawing/2014/main" id="{8F38EC7F-40D9-4DBE-91DE-B55C2FAA750E}"/>
+                <a16:creationId xmlns:a16="http://schemas.microsoft.com/office/drawing/2014/main" id="{911C81A2-1054-4D0D-AC8D-6D4661CD73A3}"/>
               </a:ext>
             </a:extLst>
           </p:cNvPr>
@@ -10442,7 +10442,7 @@
           <p:cNvPr id="3" name="">
             <a:extLst xmlns:a="http://schemas.openxmlformats.org/drawingml/2006/main">
               <a:ext uri="{FF2B5EF4-FFF2-40B4-BE49-F238E27FC236}">
-                <a16:creationId xmlns:a16="http://schemas.microsoft.com/office/drawing/2014/main" id="{1CBA1499-CF1C-4CDC-9FEE-0F112ACD54E5}"/>
+                <a16:creationId xmlns:a16="http://schemas.microsoft.com/office/drawing/2014/main" id="{D35FA5F1-3704-43E0-90D4-67BB37DBA12A}"/>
               </a:ext>
             </a:extLst>
           </p:cNvPr>
@@ -10506,7 +10506,7 @@
           <p:cNvPr id="4" name="">
             <a:extLst xmlns:a="http://schemas.openxmlformats.org/drawingml/2006/main">
               <a:ext uri="{FF2B5EF4-FFF2-40B4-BE49-F238E27FC236}">
-                <a16:creationId xmlns:a16="http://schemas.microsoft.com/office/drawing/2014/main" id="{EA4AAD28-E3D0-4E85-8273-A74FB705D367}"/>
+                <a16:creationId xmlns:a16="http://schemas.microsoft.com/office/drawing/2014/main" id="{4C76E659-096D-4F94-AD32-000D4A6B7463}"/>
               </a:ext>
             </a:extLst>
           </p:cNvPr>
@@ -10570,7 +10570,7 @@
           <p:cNvPr id="5" name="">
             <a:extLst xmlns:a="http://schemas.openxmlformats.org/drawingml/2006/main">
               <a:ext uri="{FF2B5EF4-FFF2-40B4-BE49-F238E27FC236}">
-                <a16:creationId xmlns:a16="http://schemas.microsoft.com/office/drawing/2014/main" id="{1370AC7E-1B32-4A25-AD44-E1D5EB451172}"/>
+                <a16:creationId xmlns:a16="http://schemas.microsoft.com/office/drawing/2014/main" id="{67E4B58E-6B4E-4F6E-AF78-3B74D844C837}"/>
               </a:ext>
             </a:extLst>
           </p:cNvPr>
@@ -10634,7 +10634,7 @@
           <p:cNvPr id="6" name="">
             <a:extLst xmlns:a="http://schemas.openxmlformats.org/drawingml/2006/main">
               <a:ext uri="{FF2B5EF4-FFF2-40B4-BE49-F238E27FC236}">
-                <a16:creationId xmlns:a16="http://schemas.microsoft.com/office/drawing/2014/main" id="{7F3E8221-DFB0-471F-BAA0-F116D9A2A742}"/>
+                <a16:creationId xmlns:a16="http://schemas.microsoft.com/office/drawing/2014/main" id="{D227B639-FF99-444D-818D-A0D707D0954F}"/>
               </a:ext>
             </a:extLst>
           </p:cNvPr>
@@ -10667,7 +10667,7 @@
           <p:cNvPr id="7" name="">
             <a:extLst xmlns:a="http://schemas.openxmlformats.org/drawingml/2006/main">
               <a:ext uri="{FF2B5EF4-FFF2-40B4-BE49-F238E27FC236}">
-                <a16:creationId xmlns:a16="http://schemas.microsoft.com/office/drawing/2014/main" id="{1450CA1E-FF4A-4561-BF42-3C98601CCB62}"/>
+                <a16:creationId xmlns:a16="http://schemas.microsoft.com/office/drawing/2014/main" id="{707B030E-AD6D-43BC-A9A7-3AD20CC155A0}"/>
               </a:ext>
             </a:extLst>
           </p:cNvPr>
@@ -10702,7 +10702,7 @@
           <p:cNvPr id="8" name="">
             <a:extLst xmlns:a="http://schemas.openxmlformats.org/drawingml/2006/main">
               <a:ext uri="{FF2B5EF4-FFF2-40B4-BE49-F238E27FC236}">
-                <a16:creationId xmlns:a16="http://schemas.microsoft.com/office/drawing/2014/main" id="{31AC75A1-404D-4750-89EF-268213CD7C40}"/>
+                <a16:creationId xmlns:a16="http://schemas.microsoft.com/office/drawing/2014/main" id="{F3C7944E-0160-46ED-987F-7AC6DAB2E4BD}"/>
               </a:ext>
             </a:extLst>
           </p:cNvPr>
@@ -10766,7 +10766,7 @@
           <p:cNvPr id="9" name="">
             <a:extLst xmlns:a="http://schemas.openxmlformats.org/drawingml/2006/main">
               <a:ext uri="{FF2B5EF4-FFF2-40B4-BE49-F238E27FC236}">
-                <a16:creationId xmlns:a16="http://schemas.microsoft.com/office/drawing/2014/main" id="{39411AEE-E49A-4604-85FA-2FB01C4E7013}"/>
+                <a16:creationId xmlns:a16="http://schemas.microsoft.com/office/drawing/2014/main" id="{43C64E12-2169-47E7-B0A6-6D154F77946D}"/>
               </a:ext>
             </a:extLst>
           </p:cNvPr>
@@ -10801,7 +10801,7 @@
           <p:cNvPr id="10" name="">
             <a:extLst xmlns:a="http://schemas.openxmlformats.org/drawingml/2006/main">
               <a:ext uri="{FF2B5EF4-FFF2-40B4-BE49-F238E27FC236}">
-                <a16:creationId xmlns:a16="http://schemas.microsoft.com/office/drawing/2014/main" id="{38D121C4-70E3-48F0-9D53-1258A097E308}"/>
+                <a16:creationId xmlns:a16="http://schemas.microsoft.com/office/drawing/2014/main" id="{E8B9FEAA-1992-4501-B5B2-DCF4A87E189A}"/>
               </a:ext>
             </a:extLst>
           </p:cNvPr>
@@ -10865,7 +10865,7 @@
           <p:cNvPr id="11" name="">
             <a:extLst xmlns:a="http://schemas.openxmlformats.org/drawingml/2006/main">
               <a:ext uri="{FF2B5EF4-FFF2-40B4-BE49-F238E27FC236}">
-                <a16:creationId xmlns:a16="http://schemas.microsoft.com/office/drawing/2014/main" id="{475D0CAD-6B5C-4CCD-A257-4B2A74B37E3B}"/>
+                <a16:creationId xmlns:a16="http://schemas.microsoft.com/office/drawing/2014/main" id="{B11C7267-69A8-4DF2-B88E-C4D9F03F0C44}"/>
               </a:ext>
             </a:extLst>
           </p:cNvPr>
@@ -10900,7 +10900,7 @@
           <p:cNvPr id="12" name="">
             <a:extLst xmlns:a="http://schemas.openxmlformats.org/drawingml/2006/main">
               <a:ext uri="{FF2B5EF4-FFF2-40B4-BE49-F238E27FC236}">
-                <a16:creationId xmlns:a16="http://schemas.microsoft.com/office/drawing/2014/main" id="{69CE5956-642D-4EF7-9B61-6917B288EBD7}"/>
+                <a16:creationId xmlns:a16="http://schemas.microsoft.com/office/drawing/2014/main" id="{9FE7A658-91EC-4823-8669-F5D40D3A0E10}"/>
               </a:ext>
             </a:extLst>
           </p:cNvPr>
@@ -10964,7 +10964,7 @@
           <p:cNvPr id="13" name="">
             <a:extLst xmlns:a="http://schemas.openxmlformats.org/drawingml/2006/main">
               <a:ext uri="{FF2B5EF4-FFF2-40B4-BE49-F238E27FC236}">
-                <a16:creationId xmlns:a16="http://schemas.microsoft.com/office/drawing/2014/main" id="{9F78C7DF-E87A-4499-B0AF-1C960BC5FCEB}"/>
+                <a16:creationId xmlns:a16="http://schemas.microsoft.com/office/drawing/2014/main" id="{FC7C045B-B2A1-4AEC-A000-C0CBD3900B54}"/>
               </a:ext>
             </a:extLst>
           </p:cNvPr>
@@ -10999,7 +10999,7 @@
           <p:cNvPr id="14" name="">
             <a:extLst xmlns:a="http://schemas.openxmlformats.org/drawingml/2006/main">
               <a:ext uri="{FF2B5EF4-FFF2-40B4-BE49-F238E27FC236}">
-                <a16:creationId xmlns:a16="http://schemas.microsoft.com/office/drawing/2014/main" id="{EA2D7B88-C9F0-4DB1-9F74-A7FCBC614A1F}"/>
+                <a16:creationId xmlns:a16="http://schemas.microsoft.com/office/drawing/2014/main" id="{CD703162-0D65-430A-A31C-3931A8018161}"/>
               </a:ext>
             </a:extLst>
           </p:cNvPr>
@@ -11063,7 +11063,7 @@
           <p:cNvPr id="15" name="">
             <a:extLst xmlns:a="http://schemas.openxmlformats.org/drawingml/2006/main">
               <a:ext uri="{FF2B5EF4-FFF2-40B4-BE49-F238E27FC236}">
-                <a16:creationId xmlns:a16="http://schemas.microsoft.com/office/drawing/2014/main" id="{CA8BDA53-DE84-4873-A2A2-33593D57A7FB}"/>
+                <a16:creationId xmlns:a16="http://schemas.microsoft.com/office/drawing/2014/main" id="{E7776B0E-52F7-455F-8F8A-165ABFA1D575}"/>
               </a:ext>
             </a:extLst>
           </p:cNvPr>
@@ -11098,7 +11098,7 @@
           <p:cNvPr id="16" name="">
             <a:extLst xmlns:a="http://schemas.openxmlformats.org/drawingml/2006/main">
               <a:ext uri="{FF2B5EF4-FFF2-40B4-BE49-F238E27FC236}">
-                <a16:creationId xmlns:a16="http://schemas.microsoft.com/office/drawing/2014/main" id="{0C889FC7-11BB-4B1C-8E53-3BE0097E995B}"/>
+                <a16:creationId xmlns:a16="http://schemas.microsoft.com/office/drawing/2014/main" id="{90A0D0FB-789C-473A-8C80-7EADA4B42A56}"/>
               </a:ext>
             </a:extLst>
           </p:cNvPr>
@@ -11162,7 +11162,7 @@
           <p:cNvPr id="17" name="">
             <a:extLst xmlns:a="http://schemas.openxmlformats.org/drawingml/2006/main">
               <a:ext uri="{FF2B5EF4-FFF2-40B4-BE49-F238E27FC236}">
-                <a16:creationId xmlns:a16="http://schemas.microsoft.com/office/drawing/2014/main" id="{33BECCE5-A5F3-42F3-883C-DF4301CEDA2E}"/>
+                <a16:creationId xmlns:a16="http://schemas.microsoft.com/office/drawing/2014/main" id="{911AEC16-C211-4965-B03B-3901CFC2049F}"/>
               </a:ext>
             </a:extLst>
           </p:cNvPr>
@@ -11197,7 +11197,7 @@
           <p:cNvPr id="18" name="">
             <a:extLst xmlns:a="http://schemas.openxmlformats.org/drawingml/2006/main">
               <a:ext uri="{FF2B5EF4-FFF2-40B4-BE49-F238E27FC236}">
-                <a16:creationId xmlns:a16="http://schemas.microsoft.com/office/drawing/2014/main" id="{F3DFBC1C-5492-4006-A294-463F5DF02314}"/>
+                <a16:creationId xmlns:a16="http://schemas.microsoft.com/office/drawing/2014/main" id="{6C1B7353-739C-4992-9CC0-D2C92C63406B}"/>
               </a:ext>
             </a:extLst>
           </p:cNvPr>
@@ -11261,7 +11261,7 @@
           <p:cNvPr id="19" name="">
             <a:extLst xmlns:a="http://schemas.openxmlformats.org/drawingml/2006/main">
               <a:ext uri="{FF2B5EF4-FFF2-40B4-BE49-F238E27FC236}">
-                <a16:creationId xmlns:a16="http://schemas.microsoft.com/office/drawing/2014/main" id="{910D1474-C7B4-4E63-835C-AC469EB2B616}"/>
+                <a16:creationId xmlns:a16="http://schemas.microsoft.com/office/drawing/2014/main" id="{D65F942E-24DC-4C45-A2FF-C6B18BA35C4F}"/>
               </a:ext>
             </a:extLst>
           </p:cNvPr>
@@ -11325,7 +11325,7 @@
           <p:cNvPr id="20" name="">
             <a:extLst xmlns:a="http://schemas.openxmlformats.org/drawingml/2006/main">
               <a:ext uri="{FF2B5EF4-FFF2-40B4-BE49-F238E27FC236}">
-                <a16:creationId xmlns:a16="http://schemas.microsoft.com/office/drawing/2014/main" id="{050427ED-0615-4BC0-BF56-2E32EABE08CE}"/>
+                <a16:creationId xmlns:a16="http://schemas.microsoft.com/office/drawing/2014/main" id="{44ECA3B9-68B7-41CD-831E-683FE43E4D3A}"/>
               </a:ext>
             </a:extLst>
           </p:cNvPr>
@@ -11389,7 +11389,7 @@
           <p:cNvPr id="21" name="">
             <a:extLst xmlns:a="http://schemas.openxmlformats.org/drawingml/2006/main">
               <a:ext uri="{FF2B5EF4-FFF2-40B4-BE49-F238E27FC236}">
-                <a16:creationId xmlns:a16="http://schemas.microsoft.com/office/drawing/2014/main" id="{CBA19745-F2DA-4B53-AA93-89B314F8399A}"/>
+                <a16:creationId xmlns:a16="http://schemas.microsoft.com/office/drawing/2014/main" id="{AC1C01F1-9383-43F7-ABBA-6E6683145EEC}"/>
               </a:ext>
             </a:extLst>
           </p:cNvPr>
@@ -11424,7 +11424,7 @@
           <p:cNvPr id="22" name="">
             <a:extLst xmlns:a="http://schemas.openxmlformats.org/drawingml/2006/main">
               <a:ext uri="{FF2B5EF4-FFF2-40B4-BE49-F238E27FC236}">
-                <a16:creationId xmlns:a16="http://schemas.microsoft.com/office/drawing/2014/main" id="{6253FCC2-E5DC-4322-A1E8-FE6DAF4BDC85}"/>
+                <a16:creationId xmlns:a16="http://schemas.microsoft.com/office/drawing/2014/main" id="{41C92AD6-FC82-4001-B0E0-A1F753CC46E7}"/>
               </a:ext>
             </a:extLst>
           </p:cNvPr>
@@ -11488,7 +11488,7 @@
           <p:cNvPr id="23" name="">
             <a:extLst xmlns:a="http://schemas.openxmlformats.org/drawingml/2006/main">
               <a:ext uri="{FF2B5EF4-FFF2-40B4-BE49-F238E27FC236}">
-                <a16:creationId xmlns:a16="http://schemas.microsoft.com/office/drawing/2014/main" id="{9B1D6848-282B-4F83-BF63-3D4481448D55}"/>
+                <a16:creationId xmlns:a16="http://schemas.microsoft.com/office/drawing/2014/main" id="{98BE13B8-2C9E-4EF4-81D3-1FE7491E317A}"/>
               </a:ext>
             </a:extLst>
           </p:cNvPr>
@@ -11552,7 +11552,7 @@
           <p:cNvPr id="24" name="">
             <a:extLst xmlns:a="http://schemas.openxmlformats.org/drawingml/2006/main">
               <a:ext uri="{FF2B5EF4-FFF2-40B4-BE49-F238E27FC236}">
-                <a16:creationId xmlns:a16="http://schemas.microsoft.com/office/drawing/2014/main" id="{47F9764E-5F59-44DC-9A26-ED792406DD36}"/>
+                <a16:creationId xmlns:a16="http://schemas.microsoft.com/office/drawing/2014/main" id="{D2AA3509-B9B2-4C58-BCEE-8E7AD9B7E893}"/>
               </a:ext>
             </a:extLst>
           </p:cNvPr>
@@ -11616,7 +11616,7 @@
           <p:cNvPr id="25" name="">
             <a:extLst xmlns:a="http://schemas.openxmlformats.org/drawingml/2006/main">
               <a:ext uri="{FF2B5EF4-FFF2-40B4-BE49-F238E27FC236}">
-                <a16:creationId xmlns:a16="http://schemas.microsoft.com/office/drawing/2014/main" id="{104DDEC9-92D7-47CE-84CF-9142A6BA2218}"/>
+                <a16:creationId xmlns:a16="http://schemas.microsoft.com/office/drawing/2014/main" id="{B4CF092F-CF5D-4F81-97F6-3B50E13CB76D}"/>
               </a:ext>
             </a:extLst>
           </p:cNvPr>
@@ -11651,7 +11651,7 @@
           <p:cNvPr id="26" name="">
             <a:extLst xmlns:a="http://schemas.openxmlformats.org/drawingml/2006/main">
               <a:ext uri="{FF2B5EF4-FFF2-40B4-BE49-F238E27FC236}">
-                <a16:creationId xmlns:a16="http://schemas.microsoft.com/office/drawing/2014/main" id="{5B27E235-440B-475D-94FB-3FAD23E4BFC3}"/>
+                <a16:creationId xmlns:a16="http://schemas.microsoft.com/office/drawing/2014/main" id="{19160255-B6AE-48C5-A20F-BC9B683B8F95}"/>
               </a:ext>
             </a:extLst>
           </p:cNvPr>
@@ -11715,7 +11715,7 @@
           <p:cNvPr id="27" name="">
             <a:extLst xmlns:a="http://schemas.openxmlformats.org/drawingml/2006/main">
               <a:ext uri="{FF2B5EF4-FFF2-40B4-BE49-F238E27FC236}">
-                <a16:creationId xmlns:a16="http://schemas.microsoft.com/office/drawing/2014/main" id="{05A9C1B5-E2A0-4D5F-9A92-8BA605D62619}"/>
+                <a16:creationId xmlns:a16="http://schemas.microsoft.com/office/drawing/2014/main" id="{0EFAF548-214E-4212-9B4C-3542D05BF5AE}"/>
               </a:ext>
             </a:extLst>
           </p:cNvPr>
@@ -11779,7 +11779,7 @@
           <p:cNvPr id="28" name="">
             <a:extLst xmlns:a="http://schemas.openxmlformats.org/drawingml/2006/main">
               <a:ext uri="{FF2B5EF4-FFF2-40B4-BE49-F238E27FC236}">
-                <a16:creationId xmlns:a16="http://schemas.microsoft.com/office/drawing/2014/main" id="{80A64FB4-FF98-431B-ABEC-9A37F1B592B8}"/>
+                <a16:creationId xmlns:a16="http://schemas.microsoft.com/office/drawing/2014/main" id="{BF3E8D2B-43CA-4707-AC8D-B6C110914F5E}"/>
               </a:ext>
             </a:extLst>
           </p:cNvPr>
@@ -11843,7 +11843,7 @@
           <p:cNvPr id="29" name="">
             <a:extLst xmlns:a="http://schemas.openxmlformats.org/drawingml/2006/main">
               <a:ext uri="{FF2B5EF4-FFF2-40B4-BE49-F238E27FC236}">
-                <a16:creationId xmlns:a16="http://schemas.microsoft.com/office/drawing/2014/main" id="{1D032C80-510E-47E2-8AAC-AD60CDCDFD31}"/>
+                <a16:creationId xmlns:a16="http://schemas.microsoft.com/office/drawing/2014/main" id="{0ED49E57-2F38-4AFC-9CFD-AA1437F845B7}"/>
               </a:ext>
             </a:extLst>
           </p:cNvPr>
@@ -11878,7 +11878,7 @@
           <p:cNvPr id="30" name="">
             <a:extLst xmlns:a="http://schemas.openxmlformats.org/drawingml/2006/main">
               <a:ext uri="{FF2B5EF4-FFF2-40B4-BE49-F238E27FC236}">
-                <a16:creationId xmlns:a16="http://schemas.microsoft.com/office/drawing/2014/main" id="{F470B2EF-81D6-4AF2-A308-E705E5FB4C1A}"/>
+                <a16:creationId xmlns:a16="http://schemas.microsoft.com/office/drawing/2014/main" id="{B9CDA99C-970A-4756-A0A7-05EA5285292A}"/>
               </a:ext>
             </a:extLst>
           </p:cNvPr>
@@ -11942,7 +11942,7 @@
           <p:cNvPr id="31" name="">
             <a:extLst xmlns:a="http://schemas.openxmlformats.org/drawingml/2006/main">
               <a:ext uri="{FF2B5EF4-FFF2-40B4-BE49-F238E27FC236}">
-                <a16:creationId xmlns:a16="http://schemas.microsoft.com/office/drawing/2014/main" id="{134E4C2E-599A-42E8-844D-130565F4C536}"/>
+                <a16:creationId xmlns:a16="http://schemas.microsoft.com/office/drawing/2014/main" id="{7EAA6C8C-E568-4D54-ACF5-B07D11E2773D}"/>
               </a:ext>
             </a:extLst>
           </p:cNvPr>
@@ -12006,7 +12006,7 @@
           <p:cNvPr id="32" name="">
             <a:extLst xmlns:a="http://schemas.openxmlformats.org/drawingml/2006/main">
               <a:ext uri="{FF2B5EF4-FFF2-40B4-BE49-F238E27FC236}">
-                <a16:creationId xmlns:a16="http://schemas.microsoft.com/office/drawing/2014/main" id="{B69D3414-186C-4827-8E2E-9E97D03DB45C}"/>
+                <a16:creationId xmlns:a16="http://schemas.microsoft.com/office/drawing/2014/main" id="{9AD344E9-64EB-4C6B-A7E2-20FE83071C05}"/>
               </a:ext>
             </a:extLst>
           </p:cNvPr>
@@ -12070,7 +12070,7 @@
           <p:cNvPr id="33" name="">
             <a:extLst xmlns:a="http://schemas.openxmlformats.org/drawingml/2006/main">
               <a:ext uri="{FF2B5EF4-FFF2-40B4-BE49-F238E27FC236}">
-                <a16:creationId xmlns:a16="http://schemas.microsoft.com/office/drawing/2014/main" id="{E32CB3B0-78B3-45DE-8066-E0FDD6D13149}"/>
+                <a16:creationId xmlns:a16="http://schemas.microsoft.com/office/drawing/2014/main" id="{1FF4B51B-DCB8-4EAC-9C2C-75B978F26619}"/>
               </a:ext>
             </a:extLst>
           </p:cNvPr>
@@ -12105,7 +12105,7 @@
           <p:cNvPr id="34" name="">
             <a:extLst xmlns:a="http://schemas.openxmlformats.org/drawingml/2006/main">
               <a:ext uri="{FF2B5EF4-FFF2-40B4-BE49-F238E27FC236}">
-                <a16:creationId xmlns:a16="http://schemas.microsoft.com/office/drawing/2014/main" id="{2DC8326B-895C-4CCB-9250-ED19D089C153}"/>
+                <a16:creationId xmlns:a16="http://schemas.microsoft.com/office/drawing/2014/main" id="{E95E863B-1039-48C1-AB02-7EC84D8FA58C}"/>
               </a:ext>
             </a:extLst>
           </p:cNvPr>
@@ -12169,7 +12169,7 @@
           <p:cNvPr id="35" name="">
             <a:extLst xmlns:a="http://schemas.openxmlformats.org/drawingml/2006/main">
               <a:ext uri="{FF2B5EF4-FFF2-40B4-BE49-F238E27FC236}">
-                <a16:creationId xmlns:a16="http://schemas.microsoft.com/office/drawing/2014/main" id="{78ED76A2-22CF-43F6-98ED-F88CDC1ECFEA}"/>
+                <a16:creationId xmlns:a16="http://schemas.microsoft.com/office/drawing/2014/main" id="{97981454-D6E4-4DE8-937C-B258550D9C5D}"/>
               </a:ext>
             </a:extLst>
           </p:cNvPr>
@@ -12233,7 +12233,7 @@
           <p:cNvPr id="36" name="">
             <a:extLst xmlns:a="http://schemas.openxmlformats.org/drawingml/2006/main">
               <a:ext uri="{FF2B5EF4-FFF2-40B4-BE49-F238E27FC236}">
-                <a16:creationId xmlns:a16="http://schemas.microsoft.com/office/drawing/2014/main" id="{D3844DC3-4DF8-4393-BC1F-CC678E4ADF9B}"/>
+                <a16:creationId xmlns:a16="http://schemas.microsoft.com/office/drawing/2014/main" id="{D8760ED0-FDD3-42BA-9E28-D970980B96C1}"/>
               </a:ext>
             </a:extLst>
           </p:cNvPr>
@@ -12297,7 +12297,7 @@
           <p:cNvPr id="37" name="">
             <a:extLst xmlns:a="http://schemas.openxmlformats.org/drawingml/2006/main">
               <a:ext uri="{FF2B5EF4-FFF2-40B4-BE49-F238E27FC236}">
-                <a16:creationId xmlns:a16="http://schemas.microsoft.com/office/drawing/2014/main" id="{9D07DF4B-7BF2-4D62-897B-9F963EE3E190}"/>
+                <a16:creationId xmlns:a16="http://schemas.microsoft.com/office/drawing/2014/main" id="{40B81703-B521-48F0-91AE-9570892EDBC7}"/>
               </a:ext>
             </a:extLst>
           </p:cNvPr>
@@ -12330,7 +12330,7 @@
           <p:cNvPr id="38" name="">
             <a:extLst xmlns:a="http://schemas.openxmlformats.org/drawingml/2006/main">
               <a:ext uri="{FF2B5EF4-FFF2-40B4-BE49-F238E27FC236}">
-                <a16:creationId xmlns:a16="http://schemas.microsoft.com/office/drawing/2014/main" id="{050981BA-8F87-4D82-98A0-3B52EDAE7866}"/>
+                <a16:creationId xmlns:a16="http://schemas.microsoft.com/office/drawing/2014/main" id="{80C5D73E-2BB6-4093-9DFD-9F21318AFD15}"/>
               </a:ext>
             </a:extLst>
           </p:cNvPr>
@@ -12365,7 +12365,7 @@
           <p:cNvPr id="39" name="">
             <a:extLst xmlns:a="http://schemas.openxmlformats.org/drawingml/2006/main">
               <a:ext uri="{FF2B5EF4-FFF2-40B4-BE49-F238E27FC236}">
-                <a16:creationId xmlns:a16="http://schemas.microsoft.com/office/drawing/2014/main" id="{B655D8A2-A004-4715-A538-12DCF39C722A}"/>
+                <a16:creationId xmlns:a16="http://schemas.microsoft.com/office/drawing/2014/main" id="{188EBCDC-F898-4341-A6D9-AB6AB663751F}"/>
               </a:ext>
             </a:extLst>
           </p:cNvPr>
@@ -12429,7 +12429,7 @@
           <p:cNvPr id="40" name="">
             <a:extLst xmlns:a="http://schemas.openxmlformats.org/drawingml/2006/main">
               <a:ext uri="{FF2B5EF4-FFF2-40B4-BE49-F238E27FC236}">
-                <a16:creationId xmlns:a16="http://schemas.microsoft.com/office/drawing/2014/main" id="{EFE66F19-72C1-4942-81E2-5EAABD1EEAD3}"/>
+                <a16:creationId xmlns:a16="http://schemas.microsoft.com/office/drawing/2014/main" id="{1B262123-D79F-470D-92E0-E13C055826FF}"/>
               </a:ext>
             </a:extLst>
           </p:cNvPr>
@@ -12493,7 +12493,7 @@
           <p:cNvPr id="41" name="">
             <a:extLst xmlns:a="http://schemas.openxmlformats.org/drawingml/2006/main">
               <a:ext uri="{FF2B5EF4-FFF2-40B4-BE49-F238E27FC236}">
-                <a16:creationId xmlns:a16="http://schemas.microsoft.com/office/drawing/2014/main" id="{A12BB445-1976-498A-A285-44053BB47810}"/>
+                <a16:creationId xmlns:a16="http://schemas.microsoft.com/office/drawing/2014/main" id="{1817D0C6-F95B-4AAB-A659-0FF092990EF6}"/>
               </a:ext>
             </a:extLst>
           </p:cNvPr>
@@ -12526,7 +12526,7 @@
           <p:cNvPr id="42" name="">
             <a:extLst xmlns:a="http://schemas.openxmlformats.org/drawingml/2006/main">
               <a:ext uri="{FF2B5EF4-FFF2-40B4-BE49-F238E27FC236}">
-                <a16:creationId xmlns:a16="http://schemas.microsoft.com/office/drawing/2014/main" id="{7CA604D3-A923-47BA-A7FA-0BE6243668D2}"/>
+                <a16:creationId xmlns:a16="http://schemas.microsoft.com/office/drawing/2014/main" id="{B1970771-9979-4353-8958-137D48B10F98}"/>
               </a:ext>
             </a:extLst>
           </p:cNvPr>
@@ -12561,7 +12561,7 @@
           <p:cNvPr id="43" name="">
             <a:extLst xmlns:a="http://schemas.openxmlformats.org/drawingml/2006/main">
               <a:ext uri="{FF2B5EF4-FFF2-40B4-BE49-F238E27FC236}">
-                <a16:creationId xmlns:a16="http://schemas.microsoft.com/office/drawing/2014/main" id="{FC8D5C80-07E2-4697-A53D-7295651686EC}"/>
+                <a16:creationId xmlns:a16="http://schemas.microsoft.com/office/drawing/2014/main" id="{CF072008-183B-4E03-9E02-3F5A0D2B2A35}"/>
               </a:ext>
             </a:extLst>
           </p:cNvPr>
@@ -12625,7 +12625,7 @@
           <p:cNvPr id="44" name="">
             <a:extLst xmlns:a="http://schemas.openxmlformats.org/drawingml/2006/main">
               <a:ext uri="{FF2B5EF4-FFF2-40B4-BE49-F238E27FC236}">
-                <a16:creationId xmlns:a16="http://schemas.microsoft.com/office/drawing/2014/main" id="{64A21478-66E3-4F36-9CAB-07DB8D723502}"/>
+                <a16:creationId xmlns:a16="http://schemas.microsoft.com/office/drawing/2014/main" id="{12496F5D-BC6E-41E7-89F0-63F6BF43A7E4}"/>
               </a:ext>
             </a:extLst>
           </p:cNvPr>
@@ -12689,7 +12689,7 @@
           <p:cNvPr id="45" name="">
             <a:extLst xmlns:a="http://schemas.openxmlformats.org/drawingml/2006/main">
               <a:ext uri="{FF2B5EF4-FFF2-40B4-BE49-F238E27FC236}">
-                <a16:creationId xmlns:a16="http://schemas.microsoft.com/office/drawing/2014/main" id="{1882825E-B74F-4B99-B926-C2FF3A79C764}"/>
+                <a16:creationId xmlns:a16="http://schemas.microsoft.com/office/drawing/2014/main" id="{5AE509B7-0BD6-4D71-946E-5120C445837E}"/>
               </a:ext>
             </a:extLst>
           </p:cNvPr>
@@ -12749,7 +12749,7 @@
     </p:spTree>
     <p:extLst>
       <p:ext uri="{BB962C8B-B14F-4D97-AF65-F5344CB8AC3E}">
-        <p14:creationId xmlns:p14="http://schemas.microsoft.com/office/powerpoint/2010/main" val="2076332122"/>
+        <p14:creationId xmlns:p14="http://schemas.microsoft.com/office/powerpoint/2010/main" val="1157774811"/>
       </p:ext>
     </p:extLst>
   </p:cSld>
@@ -12780,7 +12780,7 @@
           <p:cNvPr id="1" name="">
             <a:extLst xmlns:a="http://schemas.openxmlformats.org/drawingml/2006/main">
               <a:ext uri="{FF2B5EF4-FFF2-40B4-BE49-F238E27FC236}">
-                <a16:creationId xmlns:a16="http://schemas.microsoft.com/office/drawing/2014/main" id="{2C665835-3BA6-4046-B54C-BA9DE47167BF}"/>
+                <a16:creationId xmlns:a16="http://schemas.microsoft.com/office/drawing/2014/main" id="{3A53A104-0222-4948-A57F-4030B6001B59}"/>
               </a:ext>
             </a:extLst>
           </p:cNvPr>
@@ -12815,7 +12815,7 @@
           <p:cNvPr id="2" name="">
             <a:extLst xmlns:a="http://schemas.openxmlformats.org/drawingml/2006/main">
               <a:ext uri="{FF2B5EF4-FFF2-40B4-BE49-F238E27FC236}">
-                <a16:creationId xmlns:a16="http://schemas.microsoft.com/office/drawing/2014/main" id="{178DC794-4C17-4534-8BB7-529093F56198}"/>
+                <a16:creationId xmlns:a16="http://schemas.microsoft.com/office/drawing/2014/main" id="{66DBE5C5-B777-42D7-A58F-26227F0B69ED}"/>
               </a:ext>
             </a:extLst>
           </p:cNvPr>
@@ -12879,7 +12879,7 @@
           <p:cNvPr id="3" name="">
             <a:extLst xmlns:a="http://schemas.openxmlformats.org/drawingml/2006/main">
               <a:ext uri="{FF2B5EF4-FFF2-40B4-BE49-F238E27FC236}">
-                <a16:creationId xmlns:a16="http://schemas.microsoft.com/office/drawing/2014/main" id="{9453E8A4-F1DF-422C-9E87-97FFB9BE515E}"/>
+                <a16:creationId xmlns:a16="http://schemas.microsoft.com/office/drawing/2014/main" id="{844F35D6-7FBB-42A4-BC3C-C26591CBAC57}"/>
               </a:ext>
             </a:extLst>
           </p:cNvPr>
@@ -12943,7 +12943,7 @@
           <p:cNvPr id="4" name="">
             <a:extLst xmlns:a="http://schemas.openxmlformats.org/drawingml/2006/main">
               <a:ext uri="{FF2B5EF4-FFF2-40B4-BE49-F238E27FC236}">
-                <a16:creationId xmlns:a16="http://schemas.microsoft.com/office/drawing/2014/main" id="{FF82688E-7EA8-4CE2-914F-D8686833EE36}"/>
+                <a16:creationId xmlns:a16="http://schemas.microsoft.com/office/drawing/2014/main" id="{B5293DBB-7506-446F-A978-4E7BF5DB2654}"/>
               </a:ext>
             </a:extLst>
           </p:cNvPr>
@@ -13007,7 +13007,7 @@
           <p:cNvPr id="5" name="">
             <a:extLst xmlns:a="http://schemas.openxmlformats.org/drawingml/2006/main">
               <a:ext uri="{FF2B5EF4-FFF2-40B4-BE49-F238E27FC236}">
-                <a16:creationId xmlns:a16="http://schemas.microsoft.com/office/drawing/2014/main" id="{EA1F9E55-E345-4D64-A9A2-64508575407E}"/>
+                <a16:creationId xmlns:a16="http://schemas.microsoft.com/office/drawing/2014/main" id="{44E6958E-2528-4B0B-BF94-B9A55BD73F04}"/>
               </a:ext>
             </a:extLst>
           </p:cNvPr>
@@ -13071,7 +13071,7 @@
           <p:cNvPr id="6" name="">
             <a:extLst xmlns:a="http://schemas.openxmlformats.org/drawingml/2006/main">
               <a:ext uri="{FF2B5EF4-FFF2-40B4-BE49-F238E27FC236}">
-                <a16:creationId xmlns:a16="http://schemas.microsoft.com/office/drawing/2014/main" id="{6AAC3139-B1B3-470E-A733-903B0E5EAB03}"/>
+                <a16:creationId xmlns:a16="http://schemas.microsoft.com/office/drawing/2014/main" id="{EE900CCA-3F84-48DA-B6AF-1C70C714682C}"/>
               </a:ext>
             </a:extLst>
           </p:cNvPr>
@@ -13104,7 +13104,7 @@
           <p:cNvPr id="7" name="">
             <a:extLst xmlns:a="http://schemas.openxmlformats.org/drawingml/2006/main">
               <a:ext uri="{FF2B5EF4-FFF2-40B4-BE49-F238E27FC236}">
-                <a16:creationId xmlns:a16="http://schemas.microsoft.com/office/drawing/2014/main" id="{35A0B8CE-1054-440F-A3FD-21B5EA82D4AC}"/>
+                <a16:creationId xmlns:a16="http://schemas.microsoft.com/office/drawing/2014/main" id="{2805B6F5-CA80-41F9-AC52-BAD08D7D38D0}"/>
               </a:ext>
             </a:extLst>
           </p:cNvPr>
@@ -13139,7 +13139,7 @@
           <p:cNvPr id="8" name="">
             <a:extLst xmlns:a="http://schemas.openxmlformats.org/drawingml/2006/main">
               <a:ext uri="{FF2B5EF4-FFF2-40B4-BE49-F238E27FC236}">
-                <a16:creationId xmlns:a16="http://schemas.microsoft.com/office/drawing/2014/main" id="{3FB6B340-4CB3-4DC3-BDD0-09FB9CC2DBC7}"/>
+                <a16:creationId xmlns:a16="http://schemas.microsoft.com/office/drawing/2014/main" id="{C78F9E61-046C-40EC-9EA3-4E8187753008}"/>
               </a:ext>
             </a:extLst>
           </p:cNvPr>
@@ -13203,7 +13203,7 @@
           <p:cNvPr id="9" name="">
             <a:extLst xmlns:a="http://schemas.openxmlformats.org/drawingml/2006/main">
               <a:ext uri="{FF2B5EF4-FFF2-40B4-BE49-F238E27FC236}">
-                <a16:creationId xmlns:a16="http://schemas.microsoft.com/office/drawing/2014/main" id="{6610B267-E137-4943-A1A0-ACC3A322B924}"/>
+                <a16:creationId xmlns:a16="http://schemas.microsoft.com/office/drawing/2014/main" id="{EE4C5BE3-CEA9-4941-BBC8-E9CF9E4675A4}"/>
               </a:ext>
             </a:extLst>
           </p:cNvPr>
@@ -13267,7 +13267,7 @@
           <p:cNvPr id="10" name="">
             <a:extLst xmlns:a="http://schemas.openxmlformats.org/drawingml/2006/main">
               <a:ext uri="{FF2B5EF4-FFF2-40B4-BE49-F238E27FC236}">
-                <a16:creationId xmlns:a16="http://schemas.microsoft.com/office/drawing/2014/main" id="{D5B5AD47-2C11-4D8D-88D8-FD5256EF38C3}"/>
+                <a16:creationId xmlns:a16="http://schemas.microsoft.com/office/drawing/2014/main" id="{70CAAB35-D72F-4B94-9E8A-39C143D48E79}"/>
               </a:ext>
             </a:extLst>
           </p:cNvPr>
@@ -13300,7 +13300,7 @@
           <p:cNvPr id="11" name="">
             <a:extLst xmlns:a="http://schemas.openxmlformats.org/drawingml/2006/main">
               <a:ext uri="{FF2B5EF4-FFF2-40B4-BE49-F238E27FC236}">
-                <a16:creationId xmlns:a16="http://schemas.microsoft.com/office/drawing/2014/main" id="{1935141A-9574-41C7-9CDE-80C0919D4359}"/>
+                <a16:creationId xmlns:a16="http://schemas.microsoft.com/office/drawing/2014/main" id="{01449475-778A-4FBF-9D9A-E4E97D77A24E}"/>
               </a:ext>
             </a:extLst>
           </p:cNvPr>
@@ -13335,7 +13335,7 @@
           <p:cNvPr id="12" name="">
             <a:extLst xmlns:a="http://schemas.openxmlformats.org/drawingml/2006/main">
               <a:ext uri="{FF2B5EF4-FFF2-40B4-BE49-F238E27FC236}">
-                <a16:creationId xmlns:a16="http://schemas.microsoft.com/office/drawing/2014/main" id="{FEFCC252-9E08-4D16-9A3F-C03DF508EC95}"/>
+                <a16:creationId xmlns:a16="http://schemas.microsoft.com/office/drawing/2014/main" id="{3C9BF56E-79E8-45F7-8FF9-85C6B296B546}"/>
               </a:ext>
             </a:extLst>
           </p:cNvPr>
@@ -13399,7 +13399,7 @@
           <p:cNvPr id="13" name="">
             <a:extLst xmlns:a="http://schemas.openxmlformats.org/drawingml/2006/main">
               <a:ext uri="{FF2B5EF4-FFF2-40B4-BE49-F238E27FC236}">
-                <a16:creationId xmlns:a16="http://schemas.microsoft.com/office/drawing/2014/main" id="{3D02C820-0293-4392-B586-3DAB7C732A96}"/>
+                <a16:creationId xmlns:a16="http://schemas.microsoft.com/office/drawing/2014/main" id="{7CDEE8A8-0AE0-4D6B-9E8E-DF57D40D40CE}"/>
               </a:ext>
             </a:extLst>
           </p:cNvPr>
@@ -13463,7 +13463,7 @@
           <p:cNvPr id="14" name="">
             <a:extLst xmlns:a="http://schemas.openxmlformats.org/drawingml/2006/main">
               <a:ext uri="{FF2B5EF4-FFF2-40B4-BE49-F238E27FC236}">
-                <a16:creationId xmlns:a16="http://schemas.microsoft.com/office/drawing/2014/main" id="{8ADB2B6F-F905-4275-968D-31147265B7F7}"/>
+                <a16:creationId xmlns:a16="http://schemas.microsoft.com/office/drawing/2014/main" id="{442EEE6E-590A-4BED-8CD6-8ECEA62E11D3}"/>
               </a:ext>
             </a:extLst>
           </p:cNvPr>
@@ -13496,7 +13496,7 @@
           <p:cNvPr id="15" name="">
             <a:extLst xmlns:a="http://schemas.openxmlformats.org/drawingml/2006/main">
               <a:ext uri="{FF2B5EF4-FFF2-40B4-BE49-F238E27FC236}">
-                <a16:creationId xmlns:a16="http://schemas.microsoft.com/office/drawing/2014/main" id="{FF3B941E-ED65-402A-91DF-0B5E5CA3F89E}"/>
+                <a16:creationId xmlns:a16="http://schemas.microsoft.com/office/drawing/2014/main" id="{99C5E611-603D-40AE-AF86-EB03AC0E7CB7}"/>
               </a:ext>
             </a:extLst>
           </p:cNvPr>
@@ -13531,7 +13531,7 @@
           <p:cNvPr id="16" name="">
             <a:extLst xmlns:a="http://schemas.openxmlformats.org/drawingml/2006/main">
               <a:ext uri="{FF2B5EF4-FFF2-40B4-BE49-F238E27FC236}">
-                <a16:creationId xmlns:a16="http://schemas.microsoft.com/office/drawing/2014/main" id="{775D7AEF-AB41-44CE-9B6E-6F12BDB104EF}"/>
+                <a16:creationId xmlns:a16="http://schemas.microsoft.com/office/drawing/2014/main" id="{7DA2424B-9690-4255-804E-641FF907949D}"/>
               </a:ext>
             </a:extLst>
           </p:cNvPr>
@@ -13595,7 +13595,7 @@
           <p:cNvPr id="17" name="">
             <a:extLst xmlns:a="http://schemas.openxmlformats.org/drawingml/2006/main">
               <a:ext uri="{FF2B5EF4-FFF2-40B4-BE49-F238E27FC236}">
-                <a16:creationId xmlns:a16="http://schemas.microsoft.com/office/drawing/2014/main" id="{ABD71FED-25CB-4DE4-AFB6-9AFBA7C70745}"/>
+                <a16:creationId xmlns:a16="http://schemas.microsoft.com/office/drawing/2014/main" id="{C9FDC4B2-139F-429A-A7CB-9E62AE737C16}"/>
               </a:ext>
             </a:extLst>
           </p:cNvPr>
@@ -13659,7 +13659,7 @@
           <p:cNvPr id="18" name="">
             <a:extLst xmlns:a="http://schemas.openxmlformats.org/drawingml/2006/main">
               <a:ext uri="{FF2B5EF4-FFF2-40B4-BE49-F238E27FC236}">
-                <a16:creationId xmlns:a16="http://schemas.microsoft.com/office/drawing/2014/main" id="{5DF85D9E-17DF-4C81-96B2-D2E1D8CC0850}"/>
+                <a16:creationId xmlns:a16="http://schemas.microsoft.com/office/drawing/2014/main" id="{F3E3B79A-FE37-4776-86D6-7441F71BE2F1}"/>
               </a:ext>
             </a:extLst>
           </p:cNvPr>
@@ -13692,7 +13692,7 @@
           <p:cNvPr id="19" name="">
             <a:extLst xmlns:a="http://schemas.openxmlformats.org/drawingml/2006/main">
               <a:ext uri="{FF2B5EF4-FFF2-40B4-BE49-F238E27FC236}">
-                <a16:creationId xmlns:a16="http://schemas.microsoft.com/office/drawing/2014/main" id="{7CBF718B-25AB-4A16-BD6C-6F817C673C76}"/>
+                <a16:creationId xmlns:a16="http://schemas.microsoft.com/office/drawing/2014/main" id="{C22506B8-8DBA-40D2-9DFB-21C166AB9084}"/>
               </a:ext>
             </a:extLst>
           </p:cNvPr>
@@ -13727,7 +13727,7 @@
           <p:cNvPr id="20" name="">
             <a:extLst xmlns:a="http://schemas.openxmlformats.org/drawingml/2006/main">
               <a:ext uri="{FF2B5EF4-FFF2-40B4-BE49-F238E27FC236}">
-                <a16:creationId xmlns:a16="http://schemas.microsoft.com/office/drawing/2014/main" id="{859CB054-80DD-455A-A271-4F29DFAFC2A6}"/>
+                <a16:creationId xmlns:a16="http://schemas.microsoft.com/office/drawing/2014/main" id="{DA4EA8B0-515C-4975-97D4-093311B4E095}"/>
               </a:ext>
             </a:extLst>
           </p:cNvPr>
@@ -13791,7 +13791,7 @@
           <p:cNvPr id="21" name="">
             <a:extLst xmlns:a="http://schemas.openxmlformats.org/drawingml/2006/main">
               <a:ext uri="{FF2B5EF4-FFF2-40B4-BE49-F238E27FC236}">
-                <a16:creationId xmlns:a16="http://schemas.microsoft.com/office/drawing/2014/main" id="{2A08D828-82E4-48F2-908E-C3412012329D}"/>
+                <a16:creationId xmlns:a16="http://schemas.microsoft.com/office/drawing/2014/main" id="{3CA40B9D-C697-4BA1-A16F-B686AA9DAF72}"/>
               </a:ext>
             </a:extLst>
           </p:cNvPr>
@@ -13855,7 +13855,7 @@
           <p:cNvPr id="22" name="">
             <a:extLst xmlns:a="http://schemas.openxmlformats.org/drawingml/2006/main">
               <a:ext uri="{FF2B5EF4-FFF2-40B4-BE49-F238E27FC236}">
-                <a16:creationId xmlns:a16="http://schemas.microsoft.com/office/drawing/2014/main" id="{3725896E-061E-4759-87DA-F066FCCFCD06}"/>
+                <a16:creationId xmlns:a16="http://schemas.microsoft.com/office/drawing/2014/main" id="{4B8FE219-005E-494D-9A71-990A93D8B17F}"/>
               </a:ext>
             </a:extLst>
           </p:cNvPr>
@@ -13888,7 +13888,7 @@
           <p:cNvPr id="23" name="">
             <a:extLst xmlns:a="http://schemas.openxmlformats.org/drawingml/2006/main">
               <a:ext uri="{FF2B5EF4-FFF2-40B4-BE49-F238E27FC236}">
-                <a16:creationId xmlns:a16="http://schemas.microsoft.com/office/drawing/2014/main" id="{006EA0D0-67A3-4FA2-A0EC-E0A20955756E}"/>
+                <a16:creationId xmlns:a16="http://schemas.microsoft.com/office/drawing/2014/main" id="{0E471BA4-28A2-4DB2-8AF5-098B9DE067E5}"/>
               </a:ext>
             </a:extLst>
           </p:cNvPr>
@@ -13923,7 +13923,7 @@
           <p:cNvPr id="24" name="">
             <a:extLst xmlns:a="http://schemas.openxmlformats.org/drawingml/2006/main">
               <a:ext uri="{FF2B5EF4-FFF2-40B4-BE49-F238E27FC236}">
-                <a16:creationId xmlns:a16="http://schemas.microsoft.com/office/drawing/2014/main" id="{313D3442-B840-4F88-B874-A9644D65FC97}"/>
+                <a16:creationId xmlns:a16="http://schemas.microsoft.com/office/drawing/2014/main" id="{F4917D39-85E6-48B0-8B7C-FF589CC9FD7B}"/>
               </a:ext>
             </a:extLst>
           </p:cNvPr>
@@ -13987,7 +13987,7 @@
           <p:cNvPr id="25" name="">
             <a:extLst xmlns:a="http://schemas.openxmlformats.org/drawingml/2006/main">
               <a:ext uri="{FF2B5EF4-FFF2-40B4-BE49-F238E27FC236}">
-                <a16:creationId xmlns:a16="http://schemas.microsoft.com/office/drawing/2014/main" id="{23CBDFDB-1729-4123-ADE2-D88377E0FBAC}"/>
+                <a16:creationId xmlns:a16="http://schemas.microsoft.com/office/drawing/2014/main" id="{DFFC608A-F46B-4277-A507-0DC3CA85A95C}"/>
               </a:ext>
             </a:extLst>
           </p:cNvPr>
@@ -14051,7 +14051,7 @@
           <p:cNvPr id="26" name="">
             <a:extLst xmlns:a="http://schemas.openxmlformats.org/drawingml/2006/main">
               <a:ext uri="{FF2B5EF4-FFF2-40B4-BE49-F238E27FC236}">
-                <a16:creationId xmlns:a16="http://schemas.microsoft.com/office/drawing/2014/main" id="{D48F3D7A-D99C-4670-8ABC-B49195217C33}"/>
+                <a16:creationId xmlns:a16="http://schemas.microsoft.com/office/drawing/2014/main" id="{0CD4699B-86B6-4939-8FCE-F949D071BDA9}"/>
               </a:ext>
             </a:extLst>
           </p:cNvPr>
@@ -14084,7 +14084,7 @@
           <p:cNvPr id="27" name="">
             <a:extLst xmlns:a="http://schemas.openxmlformats.org/drawingml/2006/main">
               <a:ext uri="{FF2B5EF4-FFF2-40B4-BE49-F238E27FC236}">
-                <a16:creationId xmlns:a16="http://schemas.microsoft.com/office/drawing/2014/main" id="{EDC0847E-62D2-446C-9597-5A9CA0138F47}"/>
+                <a16:creationId xmlns:a16="http://schemas.microsoft.com/office/drawing/2014/main" id="{BA90CDE5-8C74-4F77-940D-165665636803}"/>
               </a:ext>
             </a:extLst>
           </p:cNvPr>
@@ -14119,7 +14119,7 @@
           <p:cNvPr id="28" name="">
             <a:extLst xmlns:a="http://schemas.openxmlformats.org/drawingml/2006/main">
               <a:ext uri="{FF2B5EF4-FFF2-40B4-BE49-F238E27FC236}">
-                <a16:creationId xmlns:a16="http://schemas.microsoft.com/office/drawing/2014/main" id="{561FCDFD-8384-4B03-ACB2-74E388EF3F3C}"/>
+                <a16:creationId xmlns:a16="http://schemas.microsoft.com/office/drawing/2014/main" id="{40C9DF59-B0FF-462D-94D8-0E7857146157}"/>
               </a:ext>
             </a:extLst>
           </p:cNvPr>
@@ -14183,7 +14183,7 @@
           <p:cNvPr id="29" name="">
             <a:extLst xmlns:a="http://schemas.openxmlformats.org/drawingml/2006/main">
               <a:ext uri="{FF2B5EF4-FFF2-40B4-BE49-F238E27FC236}">
-                <a16:creationId xmlns:a16="http://schemas.microsoft.com/office/drawing/2014/main" id="{FC215777-CEB6-4BE8-9242-95A25D77C059}"/>
+                <a16:creationId xmlns:a16="http://schemas.microsoft.com/office/drawing/2014/main" id="{DE9C9CD1-508E-40A2-BBD5-681CFC63320A}"/>
               </a:ext>
             </a:extLst>
           </p:cNvPr>
@@ -14247,7 +14247,7 @@
           <p:cNvPr id="30" name="">
             <a:extLst xmlns:a="http://schemas.openxmlformats.org/drawingml/2006/main">
               <a:ext uri="{FF2B5EF4-FFF2-40B4-BE49-F238E27FC236}">
-                <a16:creationId xmlns:a16="http://schemas.microsoft.com/office/drawing/2014/main" id="{B98BA148-8B50-4E55-B7F7-60441EF6EEAE}"/>
+                <a16:creationId xmlns:a16="http://schemas.microsoft.com/office/drawing/2014/main" id="{068AF260-E4E6-4A8A-B240-7153FA814E70}"/>
               </a:ext>
             </a:extLst>
           </p:cNvPr>
@@ -14307,7 +14307,7 @@
     </p:spTree>
     <p:extLst>
       <p:ext uri="{BB962C8B-B14F-4D97-AF65-F5344CB8AC3E}">
-        <p14:creationId xmlns:p14="http://schemas.microsoft.com/office/powerpoint/2010/main" val="1227684482"/>
+        <p14:creationId xmlns:p14="http://schemas.microsoft.com/office/powerpoint/2010/main" val="650410880"/>
       </p:ext>
     </p:extLst>
   </p:cSld>
@@ -14338,7 +14338,7 @@
           <p:cNvPr id="1" name="">
             <a:extLst xmlns:a="http://schemas.openxmlformats.org/drawingml/2006/main">
               <a:ext uri="{FF2B5EF4-FFF2-40B4-BE49-F238E27FC236}">
-                <a16:creationId xmlns:a16="http://schemas.microsoft.com/office/drawing/2014/main" id="{7A9CEB31-CBAF-4F24-99BD-46517627F101}"/>
+                <a16:creationId xmlns:a16="http://schemas.microsoft.com/office/drawing/2014/main" id="{03144A38-32E2-4985-9607-D4EDA41DF5E0}"/>
               </a:ext>
             </a:extLst>
           </p:cNvPr>
@@ -14373,7 +14373,7 @@
           <p:cNvPr id="2" name="">
             <a:extLst xmlns:a="http://schemas.openxmlformats.org/drawingml/2006/main">
               <a:ext uri="{FF2B5EF4-FFF2-40B4-BE49-F238E27FC236}">
-                <a16:creationId xmlns:a16="http://schemas.microsoft.com/office/drawing/2014/main" id="{81BA01EE-7F2A-44BA-B34F-7A19C129117F}"/>
+                <a16:creationId xmlns:a16="http://schemas.microsoft.com/office/drawing/2014/main" id="{C0C58BB6-60E3-429A-9465-832F5A753F65}"/>
               </a:ext>
             </a:extLst>
           </p:cNvPr>
@@ -14437,7 +14437,7 @@
           <p:cNvPr id="3" name="">
             <a:extLst xmlns:a="http://schemas.openxmlformats.org/drawingml/2006/main">
               <a:ext uri="{FF2B5EF4-FFF2-40B4-BE49-F238E27FC236}">
-                <a16:creationId xmlns:a16="http://schemas.microsoft.com/office/drawing/2014/main" id="{E29A6DFC-D199-49B1-91AF-09411DF08215}"/>
+                <a16:creationId xmlns:a16="http://schemas.microsoft.com/office/drawing/2014/main" id="{56307199-6829-4EC0-9637-DA5EBA45C361}"/>
               </a:ext>
             </a:extLst>
           </p:cNvPr>
@@ -14501,7 +14501,7 @@
           <p:cNvPr id="4" name="">
             <a:extLst xmlns:a="http://schemas.openxmlformats.org/drawingml/2006/main">
               <a:ext uri="{FF2B5EF4-FFF2-40B4-BE49-F238E27FC236}">
-                <a16:creationId xmlns:a16="http://schemas.microsoft.com/office/drawing/2014/main" id="{5CDDE2E4-1123-434B-B7DB-CC9575F69D5A}"/>
+                <a16:creationId xmlns:a16="http://schemas.microsoft.com/office/drawing/2014/main" id="{91446F26-8D17-429A-8CC0-29173331D036}"/>
               </a:ext>
             </a:extLst>
           </p:cNvPr>
@@ -14565,7 +14565,7 @@
           <p:cNvPr id="5" name="">
             <a:extLst xmlns:a="http://schemas.openxmlformats.org/drawingml/2006/main">
               <a:ext uri="{FF2B5EF4-FFF2-40B4-BE49-F238E27FC236}">
-                <a16:creationId xmlns:a16="http://schemas.microsoft.com/office/drawing/2014/main" id="{1715B29F-CC48-45C3-A8A1-62A4D88474B1}"/>
+                <a16:creationId xmlns:a16="http://schemas.microsoft.com/office/drawing/2014/main" id="{BB851AED-00CD-4647-B4B1-349706A4672B}"/>
               </a:ext>
             </a:extLst>
           </p:cNvPr>
@@ -14629,7 +14629,7 @@
           <p:cNvPr id="6" name="">
             <a:extLst xmlns:a="http://schemas.openxmlformats.org/drawingml/2006/main">
               <a:ext uri="{FF2B5EF4-FFF2-40B4-BE49-F238E27FC236}">
-                <a16:creationId xmlns:a16="http://schemas.microsoft.com/office/drawing/2014/main" id="{13E2E56B-162E-4034-B3FB-84164B3283EF}"/>
+                <a16:creationId xmlns:a16="http://schemas.microsoft.com/office/drawing/2014/main" id="{9C4D7D4F-67E4-4A9C-B87B-F04A1D5BF659}"/>
               </a:ext>
             </a:extLst>
           </p:cNvPr>
@@ -14693,7 +14693,7 @@
           <p:cNvPr id="7" name="">
             <a:extLst xmlns:a="http://schemas.openxmlformats.org/drawingml/2006/main">
               <a:ext uri="{FF2B5EF4-FFF2-40B4-BE49-F238E27FC236}">
-                <a16:creationId xmlns:a16="http://schemas.microsoft.com/office/drawing/2014/main" id="{4263B1F2-974D-4788-B21E-2F2B5FA4A925}"/>
+                <a16:creationId xmlns:a16="http://schemas.microsoft.com/office/drawing/2014/main" id="{ED6073A9-896B-44DA-A2D1-CDF200E35469}"/>
               </a:ext>
             </a:extLst>
           </p:cNvPr>
@@ -14757,7 +14757,7 @@
           <p:cNvPr id="8" name="">
             <a:extLst xmlns:a="http://schemas.openxmlformats.org/drawingml/2006/main">
               <a:ext uri="{FF2B5EF4-FFF2-40B4-BE49-F238E27FC236}">
-                <a16:creationId xmlns:a16="http://schemas.microsoft.com/office/drawing/2014/main" id="{14CBDFE2-CCE7-418C-868C-86CA60FF5FF2}"/>
+                <a16:creationId xmlns:a16="http://schemas.microsoft.com/office/drawing/2014/main" id="{7D521E21-C4F4-4138-8846-E08B31741A2B}"/>
               </a:ext>
             </a:extLst>
           </p:cNvPr>
@@ -14821,7 +14821,7 @@
           <p:cNvPr id="9" name="">
             <a:extLst xmlns:a="http://schemas.openxmlformats.org/drawingml/2006/main">
               <a:ext uri="{FF2B5EF4-FFF2-40B4-BE49-F238E27FC236}">
-                <a16:creationId xmlns:a16="http://schemas.microsoft.com/office/drawing/2014/main" id="{C397CC02-83BE-4940-8422-FD94FC279179}"/>
+                <a16:creationId xmlns:a16="http://schemas.microsoft.com/office/drawing/2014/main" id="{F5D927AE-AFD0-4BF9-80DD-1F28F34104CC}"/>
               </a:ext>
             </a:extLst>
           </p:cNvPr>
@@ -14854,7 +14854,7 @@
           <p:cNvPr id="10" name="">
             <a:extLst xmlns:a="http://schemas.openxmlformats.org/drawingml/2006/main">
               <a:ext uri="{FF2B5EF4-FFF2-40B4-BE49-F238E27FC236}">
-                <a16:creationId xmlns:a16="http://schemas.microsoft.com/office/drawing/2014/main" id="{4EF0EB6D-1ACF-49D7-8C74-643199645035}"/>
+                <a16:creationId xmlns:a16="http://schemas.microsoft.com/office/drawing/2014/main" id="{D54E4706-02AB-4B76-9F78-911AE0891E06}"/>
               </a:ext>
             </a:extLst>
           </p:cNvPr>
@@ -14889,7 +14889,7 @@
           <p:cNvPr id="11" name="">
             <a:extLst xmlns:a="http://schemas.openxmlformats.org/drawingml/2006/main">
               <a:ext uri="{FF2B5EF4-FFF2-40B4-BE49-F238E27FC236}">
-                <a16:creationId xmlns:a16="http://schemas.microsoft.com/office/drawing/2014/main" id="{961FE079-2673-4173-BD45-1CC4692E06D4}"/>
+                <a16:creationId xmlns:a16="http://schemas.microsoft.com/office/drawing/2014/main" id="{DB2A2C89-9792-4756-8DF5-4FE7322712A5}"/>
               </a:ext>
             </a:extLst>
           </p:cNvPr>
@@ -14976,7 +14976,7 @@
           <p:cNvPr id="12" name="">
             <a:extLst xmlns:a="http://schemas.openxmlformats.org/drawingml/2006/main">
               <a:ext uri="{FF2B5EF4-FFF2-40B4-BE49-F238E27FC236}">
-                <a16:creationId xmlns:a16="http://schemas.microsoft.com/office/drawing/2014/main" id="{E0E4C400-E295-4EC8-9103-C524DB944626}"/>
+                <a16:creationId xmlns:a16="http://schemas.microsoft.com/office/drawing/2014/main" id="{21D29D36-4F0B-458D-A11D-07C161E2E0FE}"/>
               </a:ext>
             </a:extLst>
           </p:cNvPr>
@@ -15011,7 +15011,7 @@
           <p:cNvPr id="13" name="">
             <a:extLst xmlns:a="http://schemas.openxmlformats.org/drawingml/2006/main">
               <a:ext uri="{FF2B5EF4-FFF2-40B4-BE49-F238E27FC236}">
-                <a16:creationId xmlns:a16="http://schemas.microsoft.com/office/drawing/2014/main" id="{BE3246C9-3F52-425E-894B-2B02FD397D9C}"/>
+                <a16:creationId xmlns:a16="http://schemas.microsoft.com/office/drawing/2014/main" id="{656C94D6-1250-4548-AF13-B132E59A6EC9}"/>
               </a:ext>
             </a:extLst>
           </p:cNvPr>
@@ -15075,7 +15075,7 @@
           <p:cNvPr id="14" name="">
             <a:extLst xmlns:a="http://schemas.openxmlformats.org/drawingml/2006/main">
               <a:ext uri="{FF2B5EF4-FFF2-40B4-BE49-F238E27FC236}">
-                <a16:creationId xmlns:a16="http://schemas.microsoft.com/office/drawing/2014/main" id="{9FF75F51-D65B-4D38-866B-BB4EC2CB723F}"/>
+                <a16:creationId xmlns:a16="http://schemas.microsoft.com/office/drawing/2014/main" id="{8B664B5B-C96B-4CB6-82D0-0B0F6AEB3355}"/>
               </a:ext>
             </a:extLst>
           </p:cNvPr>
@@ -15110,7 +15110,7 @@
           <p:cNvPr id="15" name="">
             <a:extLst xmlns:a="http://schemas.openxmlformats.org/drawingml/2006/main">
               <a:ext uri="{FF2B5EF4-FFF2-40B4-BE49-F238E27FC236}">
-                <a16:creationId xmlns:a16="http://schemas.microsoft.com/office/drawing/2014/main" id="{BC6D9C1D-F31C-4BF5-BF7E-5CDCCD6C48C0}"/>
+                <a16:creationId xmlns:a16="http://schemas.microsoft.com/office/drawing/2014/main" id="{33F1CF8A-E747-4F15-B53C-79A20FF0FBDA}"/>
               </a:ext>
             </a:extLst>
           </p:cNvPr>
@@ -15174,7 +15174,7 @@
           <p:cNvPr id="16" name="">
             <a:extLst xmlns:a="http://schemas.openxmlformats.org/drawingml/2006/main">
               <a:ext uri="{FF2B5EF4-FFF2-40B4-BE49-F238E27FC236}">
-                <a16:creationId xmlns:a16="http://schemas.microsoft.com/office/drawing/2014/main" id="{280BB749-FD59-451C-8A22-06016855C0DD}"/>
+                <a16:creationId xmlns:a16="http://schemas.microsoft.com/office/drawing/2014/main" id="{E993F827-9DDC-4F9E-8489-A108D6D7ED2F}"/>
               </a:ext>
             </a:extLst>
           </p:cNvPr>
@@ -15207,7 +15207,7 @@
           <p:cNvPr id="17" name="">
             <a:extLst xmlns:a="http://schemas.openxmlformats.org/drawingml/2006/main">
               <a:ext uri="{FF2B5EF4-FFF2-40B4-BE49-F238E27FC236}">
-                <a16:creationId xmlns:a16="http://schemas.microsoft.com/office/drawing/2014/main" id="{9976DE89-BF03-4E81-8961-ACE68A7EDB94}"/>
+                <a16:creationId xmlns:a16="http://schemas.microsoft.com/office/drawing/2014/main" id="{5589E36E-C045-4E17-9A07-7C30AC5CEB93}"/>
               </a:ext>
             </a:extLst>
           </p:cNvPr>
@@ -15242,7 +15242,7 @@
           <p:cNvPr id="18" name="">
             <a:extLst xmlns:a="http://schemas.openxmlformats.org/drawingml/2006/main">
               <a:ext uri="{FF2B5EF4-FFF2-40B4-BE49-F238E27FC236}">
-                <a16:creationId xmlns:a16="http://schemas.microsoft.com/office/drawing/2014/main" id="{E7D24B4F-DD86-473B-B24D-AC4976AD9F1E}"/>
+                <a16:creationId xmlns:a16="http://schemas.microsoft.com/office/drawing/2014/main" id="{95B55684-340A-4E23-B37A-74355B19C33D}"/>
               </a:ext>
             </a:extLst>
           </p:cNvPr>
@@ -15329,7 +15329,7 @@
           <p:cNvPr id="19" name="">
             <a:extLst xmlns:a="http://schemas.openxmlformats.org/drawingml/2006/main">
               <a:ext uri="{FF2B5EF4-FFF2-40B4-BE49-F238E27FC236}">
-                <a16:creationId xmlns:a16="http://schemas.microsoft.com/office/drawing/2014/main" id="{AB901918-0B76-4566-B959-E3840DD70A4D}"/>
+                <a16:creationId xmlns:a16="http://schemas.microsoft.com/office/drawing/2014/main" id="{0C00C4E8-866D-47B9-8956-CFA09AA5F1A1}"/>
               </a:ext>
             </a:extLst>
           </p:cNvPr>
@@ -15364,7 +15364,7 @@
           <p:cNvPr id="20" name="">
             <a:extLst xmlns:a="http://schemas.openxmlformats.org/drawingml/2006/main">
               <a:ext uri="{FF2B5EF4-FFF2-40B4-BE49-F238E27FC236}">
-                <a16:creationId xmlns:a16="http://schemas.microsoft.com/office/drawing/2014/main" id="{C38FEF97-C1EC-4AF6-B082-03B83DBD6FA0}"/>
+                <a16:creationId xmlns:a16="http://schemas.microsoft.com/office/drawing/2014/main" id="{5E89BFFA-B4CE-43B4-BF77-A063B2DA3958}"/>
               </a:ext>
             </a:extLst>
           </p:cNvPr>
@@ -15428,7 +15428,7 @@
           <p:cNvPr id="21" name="">
             <a:extLst xmlns:a="http://schemas.openxmlformats.org/drawingml/2006/main">
               <a:ext uri="{FF2B5EF4-FFF2-40B4-BE49-F238E27FC236}">
-                <a16:creationId xmlns:a16="http://schemas.microsoft.com/office/drawing/2014/main" id="{888E7A23-0F64-4F42-A2F7-BC8918B88D82}"/>
+                <a16:creationId xmlns:a16="http://schemas.microsoft.com/office/drawing/2014/main" id="{49360832-8A2D-48C8-B52E-371A646924B9}"/>
               </a:ext>
             </a:extLst>
           </p:cNvPr>
@@ -15463,7 +15463,7 @@
           <p:cNvPr id="22" name="">
             <a:extLst xmlns:a="http://schemas.openxmlformats.org/drawingml/2006/main">
               <a:ext uri="{FF2B5EF4-FFF2-40B4-BE49-F238E27FC236}">
-                <a16:creationId xmlns:a16="http://schemas.microsoft.com/office/drawing/2014/main" id="{A68BE16A-DDC9-4A83-B317-6DEE10EE5E07}"/>
+                <a16:creationId xmlns:a16="http://schemas.microsoft.com/office/drawing/2014/main" id="{F9AA2E27-594F-4BBD-986B-75B3B512D2D6}"/>
               </a:ext>
             </a:extLst>
           </p:cNvPr>
@@ -15527,7 +15527,7 @@
           <p:cNvPr id="23" name="">
             <a:extLst xmlns:a="http://schemas.openxmlformats.org/drawingml/2006/main">
               <a:ext uri="{FF2B5EF4-FFF2-40B4-BE49-F238E27FC236}">
-                <a16:creationId xmlns:a16="http://schemas.microsoft.com/office/drawing/2014/main" id="{2CCF2418-1FCE-4A6F-BD00-9F63A526695E}"/>
+                <a16:creationId xmlns:a16="http://schemas.microsoft.com/office/drawing/2014/main" id="{83BCD932-94AF-489D-9F43-8712AFB05658}"/>
               </a:ext>
             </a:extLst>
           </p:cNvPr>
@@ -15560,7 +15560,7 @@
           <p:cNvPr id="24" name="">
             <a:extLst xmlns:a="http://schemas.openxmlformats.org/drawingml/2006/main">
               <a:ext uri="{FF2B5EF4-FFF2-40B4-BE49-F238E27FC236}">
-                <a16:creationId xmlns:a16="http://schemas.microsoft.com/office/drawing/2014/main" id="{3ACCE544-33BF-43C9-B687-E88A4AB2F451}"/>
+                <a16:creationId xmlns:a16="http://schemas.microsoft.com/office/drawing/2014/main" id="{62204F7E-F128-4980-881A-3C896F5B7DE9}"/>
               </a:ext>
             </a:extLst>
           </p:cNvPr>
@@ -15595,7 +15595,7 @@
           <p:cNvPr id="25" name="">
             <a:extLst xmlns:a="http://schemas.openxmlformats.org/drawingml/2006/main">
               <a:ext uri="{FF2B5EF4-FFF2-40B4-BE49-F238E27FC236}">
-                <a16:creationId xmlns:a16="http://schemas.microsoft.com/office/drawing/2014/main" id="{78BBC56D-E313-4359-ADCF-52CF85981729}"/>
+                <a16:creationId xmlns:a16="http://schemas.microsoft.com/office/drawing/2014/main" id="{EFF5A7CC-98A9-4D37-91A1-CF2A8AEFFCDC}"/>
               </a:ext>
             </a:extLst>
           </p:cNvPr>
@@ -15682,7 +15682,7 @@
           <p:cNvPr id="26" name="">
             <a:extLst xmlns:a="http://schemas.openxmlformats.org/drawingml/2006/main">
               <a:ext uri="{FF2B5EF4-FFF2-40B4-BE49-F238E27FC236}">
-                <a16:creationId xmlns:a16="http://schemas.microsoft.com/office/drawing/2014/main" id="{4010DC91-C49A-4DF8-ADA3-AADBA50CDF1C}"/>
+                <a16:creationId xmlns:a16="http://schemas.microsoft.com/office/drawing/2014/main" id="{7DA1F7EC-9F8F-47D4-8E27-5201CC403740}"/>
               </a:ext>
             </a:extLst>
           </p:cNvPr>
@@ -15717,7 +15717,7 @@
           <p:cNvPr id="27" name="">
             <a:extLst xmlns:a="http://schemas.openxmlformats.org/drawingml/2006/main">
               <a:ext uri="{FF2B5EF4-FFF2-40B4-BE49-F238E27FC236}">
-                <a16:creationId xmlns:a16="http://schemas.microsoft.com/office/drawing/2014/main" id="{AA598E61-DDE3-43FD-A385-B9FDCDBD5173}"/>
+                <a16:creationId xmlns:a16="http://schemas.microsoft.com/office/drawing/2014/main" id="{FC12B6E4-0985-440E-93AD-B382E2468E1C}"/>
               </a:ext>
             </a:extLst>
           </p:cNvPr>
@@ -15781,7 +15781,7 @@
           <p:cNvPr id="28" name="">
             <a:extLst xmlns:a="http://schemas.openxmlformats.org/drawingml/2006/main">
               <a:ext uri="{FF2B5EF4-FFF2-40B4-BE49-F238E27FC236}">
-                <a16:creationId xmlns:a16="http://schemas.microsoft.com/office/drawing/2014/main" id="{B3BE9740-C868-49F9-A0B0-427F3BDCF19D}"/>
+                <a16:creationId xmlns:a16="http://schemas.microsoft.com/office/drawing/2014/main" id="{DC733029-86DC-48F8-8594-E578965B0B62}"/>
               </a:ext>
             </a:extLst>
           </p:cNvPr>
@@ -15816,7 +15816,7 @@
           <p:cNvPr id="29" name="">
             <a:extLst xmlns:a="http://schemas.openxmlformats.org/drawingml/2006/main">
               <a:ext uri="{FF2B5EF4-FFF2-40B4-BE49-F238E27FC236}">
-                <a16:creationId xmlns:a16="http://schemas.microsoft.com/office/drawing/2014/main" id="{7066D026-C64D-4582-8A57-5719E8BDEBF9}"/>
+                <a16:creationId xmlns:a16="http://schemas.microsoft.com/office/drawing/2014/main" id="{F7A759F7-0DB0-4F01-A74F-11963499B7BF}"/>
               </a:ext>
             </a:extLst>
           </p:cNvPr>
@@ -15880,7 +15880,7 @@
           <p:cNvPr id="30" name="">
             <a:extLst xmlns:a="http://schemas.openxmlformats.org/drawingml/2006/main">
               <a:ext uri="{FF2B5EF4-FFF2-40B4-BE49-F238E27FC236}">
-                <a16:creationId xmlns:a16="http://schemas.microsoft.com/office/drawing/2014/main" id="{54DAC199-3AD8-4C3E-89DD-9C07047C7F4C}"/>
+                <a16:creationId xmlns:a16="http://schemas.microsoft.com/office/drawing/2014/main" id="{89BD0B9A-0ACA-4B2C-8EE5-912E84889118}"/>
               </a:ext>
             </a:extLst>
           </p:cNvPr>
@@ -15913,7 +15913,7 @@
           <p:cNvPr id="31" name="">
             <a:extLst xmlns:a="http://schemas.openxmlformats.org/drawingml/2006/main">
               <a:ext uri="{FF2B5EF4-FFF2-40B4-BE49-F238E27FC236}">
-                <a16:creationId xmlns:a16="http://schemas.microsoft.com/office/drawing/2014/main" id="{FA767CC0-C204-498B-8449-45700A8AA16E}"/>
+                <a16:creationId xmlns:a16="http://schemas.microsoft.com/office/drawing/2014/main" id="{6CAF0705-F1F1-4245-8B59-DD6215DDDE62}"/>
               </a:ext>
             </a:extLst>
           </p:cNvPr>
@@ -15948,7 +15948,7 @@
           <p:cNvPr id="32" name="">
             <a:extLst xmlns:a="http://schemas.openxmlformats.org/drawingml/2006/main">
               <a:ext uri="{FF2B5EF4-FFF2-40B4-BE49-F238E27FC236}">
-                <a16:creationId xmlns:a16="http://schemas.microsoft.com/office/drawing/2014/main" id="{67337664-1671-4ABB-AE0C-F8711EBFECE5}"/>
+                <a16:creationId xmlns:a16="http://schemas.microsoft.com/office/drawing/2014/main" id="{0FE4FF33-F1EA-4901-9ACF-60352C908924}"/>
               </a:ext>
             </a:extLst>
           </p:cNvPr>
@@ -16035,7 +16035,7 @@
           <p:cNvPr id="33" name="">
             <a:extLst xmlns:a="http://schemas.openxmlformats.org/drawingml/2006/main">
               <a:ext uri="{FF2B5EF4-FFF2-40B4-BE49-F238E27FC236}">
-                <a16:creationId xmlns:a16="http://schemas.microsoft.com/office/drawing/2014/main" id="{AB8E07B7-0499-442A-9A7F-6814BEC16E9E}"/>
+                <a16:creationId xmlns:a16="http://schemas.microsoft.com/office/drawing/2014/main" id="{9BCB1269-347D-4448-BEBB-1EAECB698E79}"/>
               </a:ext>
             </a:extLst>
           </p:cNvPr>
@@ -16070,7 +16070,7 @@
           <p:cNvPr id="34" name="">
             <a:extLst xmlns:a="http://schemas.openxmlformats.org/drawingml/2006/main">
               <a:ext uri="{FF2B5EF4-FFF2-40B4-BE49-F238E27FC236}">
-                <a16:creationId xmlns:a16="http://schemas.microsoft.com/office/drawing/2014/main" id="{F3903184-1ED1-42EA-829C-9B442AEBC065}"/>
+                <a16:creationId xmlns:a16="http://schemas.microsoft.com/office/drawing/2014/main" id="{D466C2FB-3FE8-4B27-8CCE-4B8E0C2B5ACF}"/>
               </a:ext>
             </a:extLst>
           </p:cNvPr>
@@ -16134,7 +16134,7 @@
           <p:cNvPr id="35" name="">
             <a:extLst xmlns:a="http://schemas.openxmlformats.org/drawingml/2006/main">
               <a:ext uri="{FF2B5EF4-FFF2-40B4-BE49-F238E27FC236}">
-                <a16:creationId xmlns:a16="http://schemas.microsoft.com/office/drawing/2014/main" id="{5AFACE84-4583-4431-98C0-22DCB2FDCAAB}"/>
+                <a16:creationId xmlns:a16="http://schemas.microsoft.com/office/drawing/2014/main" id="{3BBBAB0F-DE62-422A-82C1-A637A7C3E4D0}"/>
               </a:ext>
             </a:extLst>
           </p:cNvPr>
@@ -16169,7 +16169,7 @@
           <p:cNvPr id="36" name="">
             <a:extLst xmlns:a="http://schemas.openxmlformats.org/drawingml/2006/main">
               <a:ext uri="{FF2B5EF4-FFF2-40B4-BE49-F238E27FC236}">
-                <a16:creationId xmlns:a16="http://schemas.microsoft.com/office/drawing/2014/main" id="{577E9717-4769-4C9A-9265-1E97E4F7961F}"/>
+                <a16:creationId xmlns:a16="http://schemas.microsoft.com/office/drawing/2014/main" id="{405FD31C-2987-457E-B9D0-24D4242B8BB3}"/>
               </a:ext>
             </a:extLst>
           </p:cNvPr>
@@ -16233,7 +16233,7 @@
           <p:cNvPr id="37" name="">
             <a:extLst xmlns:a="http://schemas.openxmlformats.org/drawingml/2006/main">
               <a:ext uri="{FF2B5EF4-FFF2-40B4-BE49-F238E27FC236}">
-                <a16:creationId xmlns:a16="http://schemas.microsoft.com/office/drawing/2014/main" id="{C06E35CC-CBCE-4A8C-AC6B-44FE933E3151}"/>
+                <a16:creationId xmlns:a16="http://schemas.microsoft.com/office/drawing/2014/main" id="{B6CBAECA-ED79-41DE-B87A-8AF31A02A3FB}"/>
               </a:ext>
             </a:extLst>
           </p:cNvPr>
@@ -16268,7 +16268,7 @@
           <p:cNvPr id="38" name="">
             <a:extLst xmlns:a="http://schemas.openxmlformats.org/drawingml/2006/main">
               <a:ext uri="{FF2B5EF4-FFF2-40B4-BE49-F238E27FC236}">
-                <a16:creationId xmlns:a16="http://schemas.microsoft.com/office/drawing/2014/main" id="{BCDE0FF1-B2E8-4C65-8B67-5D5A3A712BC4}"/>
+                <a16:creationId xmlns:a16="http://schemas.microsoft.com/office/drawing/2014/main" id="{0C3F72EE-72E3-4C20-86E4-F48182E610E3}"/>
               </a:ext>
             </a:extLst>
           </p:cNvPr>
@@ -16330,7 +16330,7 @@
     </p:spTree>
     <p:extLst>
       <p:ext uri="{BB962C8B-B14F-4D97-AF65-F5344CB8AC3E}">
-        <p14:creationId xmlns:p14="http://schemas.microsoft.com/office/powerpoint/2010/main" val="1116633312"/>
+        <p14:creationId xmlns:p14="http://schemas.microsoft.com/office/powerpoint/2010/main" val="1982797610"/>
       </p:ext>
     </p:extLst>
   </p:cSld>
@@ -16361,7 +16361,7 @@
           <p:cNvPr id="1" name="">
             <a:extLst xmlns:a="http://schemas.openxmlformats.org/drawingml/2006/main">
               <a:ext uri="{FF2B5EF4-FFF2-40B4-BE49-F238E27FC236}">
-                <a16:creationId xmlns:a16="http://schemas.microsoft.com/office/drawing/2014/main" id="{1771A373-BDE4-4F3E-B8CF-08139092ACFD}"/>
+                <a16:creationId xmlns:a16="http://schemas.microsoft.com/office/drawing/2014/main" id="{2B061DDC-07D0-4D6D-B457-1B232122B929}"/>
               </a:ext>
             </a:extLst>
           </p:cNvPr>
@@ -16396,7 +16396,7 @@
           <p:cNvPr id="2" name="">
             <a:extLst xmlns:a="http://schemas.openxmlformats.org/drawingml/2006/main">
               <a:ext uri="{FF2B5EF4-FFF2-40B4-BE49-F238E27FC236}">
-                <a16:creationId xmlns:a16="http://schemas.microsoft.com/office/drawing/2014/main" id="{05ABACCD-4D6E-44F1-88DF-342D8E46B0F1}"/>
+                <a16:creationId xmlns:a16="http://schemas.microsoft.com/office/drawing/2014/main" id="{208FB19A-6B5E-4077-AAE6-A8E46BF58539}"/>
               </a:ext>
             </a:extLst>
           </p:cNvPr>
@@ -16460,7 +16460,7 @@
           <p:cNvPr id="3" name="">
             <a:extLst xmlns:a="http://schemas.openxmlformats.org/drawingml/2006/main">
               <a:ext uri="{FF2B5EF4-FFF2-40B4-BE49-F238E27FC236}">
-                <a16:creationId xmlns:a16="http://schemas.microsoft.com/office/drawing/2014/main" id="{4E03BA1E-DF63-4CD7-84CB-EB9B9DBC8CCB}"/>
+                <a16:creationId xmlns:a16="http://schemas.microsoft.com/office/drawing/2014/main" id="{56635623-A4E5-465F-B743-885E889870A9}"/>
               </a:ext>
             </a:extLst>
           </p:cNvPr>
@@ -16524,7 +16524,7 @@
           <p:cNvPr id="4" name="">
             <a:extLst xmlns:a="http://schemas.openxmlformats.org/drawingml/2006/main">
               <a:ext uri="{FF2B5EF4-FFF2-40B4-BE49-F238E27FC236}">
-                <a16:creationId xmlns:a16="http://schemas.microsoft.com/office/drawing/2014/main" id="{B086A3AC-D5F9-43CD-B4E3-9F3887093BC0}"/>
+                <a16:creationId xmlns:a16="http://schemas.microsoft.com/office/drawing/2014/main" id="{62E8EB77-AA5F-4857-8221-78BA4D8F4695}"/>
               </a:ext>
             </a:extLst>
           </p:cNvPr>
@@ -16578,7 +16578,7 @@
                 <a:ea typeface="PingFang SC"/>
                 <a:cs typeface="PingFang SC"/>
               </a:rPr>
-              <a:t>BigLab-A：ArceOS 小实验与系统能力训练</a:t>
+              <a:t>BigLab-A：前置训练回顾</a:t>
             </a:r>
           </a:p>
         </p:txBody>
@@ -16588,7 +16588,7 @@
           <p:cNvPr id="5" name="">
             <a:extLst xmlns:a="http://schemas.openxmlformats.org/drawingml/2006/main">
               <a:ext uri="{FF2B5EF4-FFF2-40B4-BE49-F238E27FC236}">
-                <a16:creationId xmlns:a16="http://schemas.microsoft.com/office/drawing/2014/main" id="{BB4E9E8B-5DDF-4C96-B393-B7051F8309DB}"/>
+                <a16:creationId xmlns:a16="http://schemas.microsoft.com/office/drawing/2014/main" id="{65AAF714-9240-4BA1-94FF-5C1F1F49F402}"/>
               </a:ext>
             </a:extLst>
           </p:cNvPr>
@@ -16642,7 +16642,7 @@
                 <a:ea typeface="PingFang SC"/>
                 <a:cs typeface="PingFang SC"/>
               </a:rPr>
-              <a:t>BigLab-A 里我主要完成 tg-arceos-tutorial/test 分支上的 ArceOS 小实验，从单个组件逐步走到应用、文件系统和虚拟化路径。</a:t>
+              <a:t>BigLab-A 主要作为进入 BigLab-B 前的 OS 基础训练；本次答辩只简要说明它给后续 StarryOS 工作提供的能力基础。</a:t>
             </a:r>
           </a:p>
         </p:txBody>
@@ -16652,19 +16652,19 @@
           <p:cNvPr id="6" name="">
             <a:extLst xmlns:a="http://schemas.openxmlformats.org/drawingml/2006/main">
               <a:ext uri="{FF2B5EF4-FFF2-40B4-BE49-F238E27FC236}">
-                <a16:creationId xmlns:a16="http://schemas.microsoft.com/office/drawing/2014/main" id="{0AEF31BF-8A80-47EE-9F10-BAFC1CACB1FD}"/>
-              </a:ext>
-            </a:extLst>
-          </p:cNvPr>
-          <p:cNvSpPr>
-            <a:spLocks xmlns:a="http://schemas.openxmlformats.org/drawingml/2006/main" noGrp="1"/>
-          </p:cNvSpPr>
-          <p:nvPr/>
-        </p:nvSpPr>
-        <p:spPr>
-          <a:xfrm xmlns:a="http://schemas.openxmlformats.org/drawingml/2006/main">
-            <a:off x="704850" y="2076450"/>
-            <a:ext cx="4953000" cy="1638300"/>
+                <a16:creationId xmlns:a16="http://schemas.microsoft.com/office/drawing/2014/main" id="{5A12BDBC-3FF0-4C91-853F-A8D865C8EB85}"/>
+              </a:ext>
+            </a:extLst>
+          </p:cNvPr>
+          <p:cNvSpPr>
+            <a:spLocks xmlns:a="http://schemas.openxmlformats.org/drawingml/2006/main" noGrp="1"/>
+          </p:cNvSpPr>
+          <p:nvPr/>
+        </p:nvSpPr>
+        <p:spPr>
+          <a:xfrm xmlns:a="http://schemas.openxmlformats.org/drawingml/2006/main">
+            <a:off x="704850" y="2266950"/>
+            <a:ext cx="3238500" cy="1771650"/>
           </a:xfrm>
           <a:prstGeom xmlns:a="http://schemas.openxmlformats.org/drawingml/2006/main" prst="rect">
             <a:avLst/>
@@ -16685,19 +16685,19 @@
           <p:cNvPr id="7" name="">
             <a:extLst xmlns:a="http://schemas.openxmlformats.org/drawingml/2006/main">
               <a:ext uri="{FF2B5EF4-FFF2-40B4-BE49-F238E27FC236}">
-                <a16:creationId xmlns:a16="http://schemas.microsoft.com/office/drawing/2014/main" id="{07F93A17-F45D-4FA9-9EC1-8DCDCA63DD3A}"/>
-              </a:ext>
-            </a:extLst>
-          </p:cNvPr>
-          <p:cNvSpPr>
-            <a:spLocks xmlns:a="http://schemas.openxmlformats.org/drawingml/2006/main" noGrp="1"/>
-          </p:cNvSpPr>
-          <p:nvPr/>
-        </p:nvSpPr>
-        <p:spPr>
-          <a:xfrm xmlns:a="http://schemas.openxmlformats.org/drawingml/2006/main">
-            <a:off x="704850" y="2076450"/>
-            <a:ext cx="47625" cy="1638300"/>
+                <a16:creationId xmlns:a16="http://schemas.microsoft.com/office/drawing/2014/main" id="{FC959C80-44C1-4ECC-A0E3-D06184504E30}"/>
+              </a:ext>
+            </a:extLst>
+          </p:cNvPr>
+          <p:cNvSpPr>
+            <a:spLocks xmlns:a="http://schemas.openxmlformats.org/drawingml/2006/main" noGrp="1"/>
+          </p:cNvSpPr>
+          <p:nvPr/>
+        </p:nvSpPr>
+        <p:spPr>
+          <a:xfrm xmlns:a="http://schemas.openxmlformats.org/drawingml/2006/main">
+            <a:off x="704850" y="2266950"/>
+            <a:ext cx="47625" cy="1771650"/>
           </a:xfrm>
           <a:prstGeom xmlns:a="http://schemas.openxmlformats.org/drawingml/2006/main" prst="rect">
             <a:avLst/>
@@ -16720,19 +16720,19 @@
           <p:cNvPr id="8" name="">
             <a:extLst xmlns:a="http://schemas.openxmlformats.org/drawingml/2006/main">
               <a:ext uri="{FF2B5EF4-FFF2-40B4-BE49-F238E27FC236}">
-                <a16:creationId xmlns:a16="http://schemas.microsoft.com/office/drawing/2014/main" id="{45DF5E8A-C7FA-47D0-A415-A3898CBF5EB3}"/>
-              </a:ext>
-            </a:extLst>
-          </p:cNvPr>
-          <p:cNvSpPr>
-            <a:spLocks xmlns:a="http://schemas.openxmlformats.org/drawingml/2006/main" noGrp="1"/>
-          </p:cNvSpPr>
-          <p:nvPr/>
-        </p:nvSpPr>
-        <p:spPr>
-          <a:xfrm xmlns:a="http://schemas.openxmlformats.org/drawingml/2006/main">
-            <a:off x="933450" y="2286000"/>
-            <a:ext cx="4495800" cy="304800"/>
+                <a16:creationId xmlns:a16="http://schemas.microsoft.com/office/drawing/2014/main" id="{815FE4B6-8C1C-4BEC-812B-CA033FAD7A54}"/>
+              </a:ext>
+            </a:extLst>
+          </p:cNvPr>
+          <p:cNvSpPr>
+            <a:spLocks xmlns:a="http://schemas.openxmlformats.org/drawingml/2006/main" noGrp="1"/>
+          </p:cNvSpPr>
+          <p:nvPr/>
+        </p:nvSpPr>
+        <p:spPr>
+          <a:xfrm xmlns:a="http://schemas.openxmlformats.org/drawingml/2006/main">
+            <a:off x="933450" y="2476500"/>
+            <a:ext cx="2781300" cy="304800"/>
           </a:xfrm>
           <a:prstGeom xmlns:a="http://schemas.openxmlformats.org/drawingml/2006/main" prst="rect">
             <a:avLst/>
@@ -16774,7 +16774,7 @@
                 <a:ea typeface="PingFang SC"/>
                 <a:cs typeface="PingFang SC"/>
               </a:rPr>
-              <a:t>基础 OS app</a:t>
+              <a:t>Rust 与 no_std 工程</a:t>
             </a:r>
           </a:p>
         </p:txBody>
@@ -16784,19 +16784,19 @@
           <p:cNvPr id="9" name="">
             <a:extLst xmlns:a="http://schemas.openxmlformats.org/drawingml/2006/main">
               <a:ext uri="{FF2B5EF4-FFF2-40B4-BE49-F238E27FC236}">
-                <a16:creationId xmlns:a16="http://schemas.microsoft.com/office/drawing/2014/main" id="{0B8246F3-B69D-4D96-906F-89FC3DDE7A3C}"/>
-              </a:ext>
-            </a:extLst>
-          </p:cNvPr>
-          <p:cNvSpPr>
-            <a:spLocks xmlns:a="http://schemas.openxmlformats.org/drawingml/2006/main" noGrp="1"/>
-          </p:cNvSpPr>
-          <p:nvPr/>
-        </p:nvSpPr>
-        <p:spPr>
-          <a:xfrm xmlns:a="http://schemas.openxmlformats.org/drawingml/2006/main">
-            <a:off x="933450" y="2705100"/>
-            <a:ext cx="4495800" cy="895350"/>
+                <a16:creationId xmlns:a16="http://schemas.microsoft.com/office/drawing/2014/main" id="{CC2C11F2-AD71-4C1D-A3AC-5C41E7804951}"/>
+              </a:ext>
+            </a:extLst>
+          </p:cNvPr>
+          <p:cNvSpPr>
+            <a:spLocks xmlns:a="http://schemas.openxmlformats.org/drawingml/2006/main" noGrp="1"/>
+          </p:cNvSpPr>
+          <p:nvPr/>
+        </p:nvSpPr>
+        <p:spPr>
+          <a:xfrm xmlns:a="http://schemas.openxmlformats.org/drawingml/2006/main">
+            <a:off x="933450" y="2895600"/>
+            <a:ext cx="2781300" cy="1028700"/>
           </a:xfrm>
           <a:prstGeom xmlns:a="http://schemas.openxmlformats.org/drawingml/2006/main" prst="rect">
             <a:avLst/>
@@ -16838,58 +16838,7 @@
                 <a:ea typeface="PingFang SC"/>
                 <a:cs typeface="PingFang SC"/>
               </a:rPr>
-              <a:t>完成 app-helloworld / app-collections</a:t>
-            </a:r>
-          </a:p>
-          <a:p xmlns:a="http://schemas.openxmlformats.org/drawingml/2006/main">
-            <a:pPr algn="l">
-              <a:defRPr sz="1275" b="0">
-                <a:solidFill>
-                  <a:srgbClr val="5B6472"/>
-                </a:solidFill>
-                <a:latin typeface="PingFang SC"/>
-                <a:ea typeface="PingFang SC"/>
-                <a:cs typeface="PingFang SC"/>
-              </a:defRPr>
-            </a:pPr>
-            <a:r>
-              <a:rPr sz="1275" b="0">
-                <a:solidFill>
-                  <a:srgbClr val="5B6472"/>
-                </a:solidFill>
-                <a:latin typeface="PingFang SC"/>
-                <a:ea typeface="PingFang SC"/>
-                <a:cs typeface="PingFang SC"/>
-              </a:rPr>
-              <a:t>完成 exercise-printcolor / hashmap / altalloc</a:t>
-            </a:r>
-          </a:p>
-          <a:p xmlns:a="http://schemas.openxmlformats.org/drawingml/2006/main">
-            <a:r>
-              <a:t/>
-            </a:r>
-          </a:p>
-          <a:p xmlns:a="http://schemas.openxmlformats.org/drawingml/2006/main">
-            <a:pPr algn="l">
-              <a:defRPr sz="1275" b="0">
-                <a:solidFill>
-                  <a:srgbClr val="5B6472"/>
-                </a:solidFill>
-                <a:latin typeface="PingFang SC"/>
-                <a:ea typeface="PingFang SC"/>
-                <a:cs typeface="PingFang SC"/>
-              </a:defRPr>
-            </a:pPr>
-            <a:r>
-              <a:rPr sz="1275" b="0">
-                <a:solidFill>
-                  <a:srgbClr val="5B6472"/>
-                </a:solidFill>
-                <a:latin typeface="PingFang SC"/>
-                <a:ea typeface="PingFang SC"/>
-                <a:cs typeface="PingFang SC"/>
-              </a:rPr>
-              <a:t>熟悉 no_std Rust、axstd、allocator、集合结构和 QEMU 启动调试。</a:t>
+              <a:t>熟悉 Rust crate 组织、无标准库环境、交叉编译、QEMU 运行和实验文档整理。</a:t>
             </a:r>
           </a:p>
         </p:txBody>
@@ -16899,19 +16848,19 @@
           <p:cNvPr id="10" name="">
             <a:extLst xmlns:a="http://schemas.openxmlformats.org/drawingml/2006/main">
               <a:ext uri="{FF2B5EF4-FFF2-40B4-BE49-F238E27FC236}">
-                <a16:creationId xmlns:a16="http://schemas.microsoft.com/office/drawing/2014/main" id="{5134B238-B084-498F-920C-18998E315702}"/>
-              </a:ext>
-            </a:extLst>
-          </p:cNvPr>
-          <p:cNvSpPr>
-            <a:spLocks xmlns:a="http://schemas.openxmlformats.org/drawingml/2006/main" noGrp="1"/>
-          </p:cNvSpPr>
-          <p:nvPr/>
-        </p:nvSpPr>
-        <p:spPr>
-          <a:xfrm xmlns:a="http://schemas.openxmlformats.org/drawingml/2006/main">
-            <a:off x="6534150" y="2076450"/>
-            <a:ext cx="4953000" cy="1638300"/>
+                <a16:creationId xmlns:a16="http://schemas.microsoft.com/office/drawing/2014/main" id="{2472E9A3-9DB7-4769-A4C7-4EB60C2C41E7}"/>
+              </a:ext>
+            </a:extLst>
+          </p:cNvPr>
+          <p:cNvSpPr>
+            <a:spLocks xmlns:a="http://schemas.openxmlformats.org/drawingml/2006/main" noGrp="1"/>
+          </p:cNvSpPr>
+          <p:nvPr/>
+        </p:nvSpPr>
+        <p:spPr>
+          <a:xfrm xmlns:a="http://schemas.openxmlformats.org/drawingml/2006/main">
+            <a:off x="4476750" y="2266950"/>
+            <a:ext cx="3238500" cy="1771650"/>
           </a:xfrm>
           <a:prstGeom xmlns:a="http://schemas.openxmlformats.org/drawingml/2006/main" prst="rect">
             <a:avLst/>
@@ -16932,19 +16881,19 @@
           <p:cNvPr id="11" name="">
             <a:extLst xmlns:a="http://schemas.openxmlformats.org/drawingml/2006/main">
               <a:ext uri="{FF2B5EF4-FFF2-40B4-BE49-F238E27FC236}">
-                <a16:creationId xmlns:a16="http://schemas.microsoft.com/office/drawing/2014/main" id="{441D1510-A715-49DB-9EA3-AD36825339E7}"/>
-              </a:ext>
-            </a:extLst>
-          </p:cNvPr>
-          <p:cNvSpPr>
-            <a:spLocks xmlns:a="http://schemas.openxmlformats.org/drawingml/2006/main" noGrp="1"/>
-          </p:cNvSpPr>
-          <p:nvPr/>
-        </p:nvSpPr>
-        <p:spPr>
-          <a:xfrm xmlns:a="http://schemas.openxmlformats.org/drawingml/2006/main">
-            <a:off x="6534150" y="2076450"/>
-            <a:ext cx="47625" cy="1638300"/>
+                <a16:creationId xmlns:a16="http://schemas.microsoft.com/office/drawing/2014/main" id="{62CAA3BB-B81A-494D-96BA-C4BF7807C395}"/>
+              </a:ext>
+            </a:extLst>
+          </p:cNvPr>
+          <p:cNvSpPr>
+            <a:spLocks xmlns:a="http://schemas.openxmlformats.org/drawingml/2006/main" noGrp="1"/>
+          </p:cNvSpPr>
+          <p:nvPr/>
+        </p:nvSpPr>
+        <p:spPr>
+          <a:xfrm xmlns:a="http://schemas.openxmlformats.org/drawingml/2006/main">
+            <a:off x="4476750" y="2266950"/>
+            <a:ext cx="47625" cy="1771650"/>
           </a:xfrm>
           <a:prstGeom xmlns:a="http://schemas.openxmlformats.org/drawingml/2006/main" prst="rect">
             <a:avLst/>
@@ -16967,19 +16916,19 @@
           <p:cNvPr id="12" name="">
             <a:extLst xmlns:a="http://schemas.openxmlformats.org/drawingml/2006/main">
               <a:ext uri="{FF2B5EF4-FFF2-40B4-BE49-F238E27FC236}">
-                <a16:creationId xmlns:a16="http://schemas.microsoft.com/office/drawing/2014/main" id="{B8413507-92C1-4464-9462-0E5219C5CFEB}"/>
-              </a:ext>
-            </a:extLst>
-          </p:cNvPr>
-          <p:cNvSpPr>
-            <a:spLocks xmlns:a="http://schemas.openxmlformats.org/drawingml/2006/main" noGrp="1"/>
-          </p:cNvSpPr>
-          <p:nvPr/>
-        </p:nvSpPr>
-        <p:spPr>
-          <a:xfrm xmlns:a="http://schemas.openxmlformats.org/drawingml/2006/main">
-            <a:off x="6762750" y="2286000"/>
-            <a:ext cx="4495800" cy="304800"/>
+                <a16:creationId xmlns:a16="http://schemas.microsoft.com/office/drawing/2014/main" id="{AB2E52D8-C5C3-47C4-8DEF-17CAB1033F28}"/>
+              </a:ext>
+            </a:extLst>
+          </p:cNvPr>
+          <p:cNvSpPr>
+            <a:spLocks xmlns:a="http://schemas.openxmlformats.org/drawingml/2006/main" noGrp="1"/>
+          </p:cNvSpPr>
+          <p:nvPr/>
+        </p:nvSpPr>
+        <p:spPr>
+          <a:xfrm xmlns:a="http://schemas.openxmlformats.org/drawingml/2006/main">
+            <a:off x="4705350" y="2476500"/>
+            <a:ext cx="2781300" cy="304800"/>
           </a:xfrm>
           <a:prstGeom xmlns:a="http://schemas.openxmlformats.org/drawingml/2006/main" prst="rect">
             <a:avLst/>
@@ -17021,7 +16970,7 @@
                 <a:ea typeface="PingFang SC"/>
                 <a:cs typeface="PingFang SC"/>
               </a:rPr>
-              <a:t>任务、调度与内存</a:t>
+              <a:t>OS 基础概念</a:t>
             </a:r>
           </a:p>
         </p:txBody>
@@ -17031,19 +16980,19 @@
           <p:cNvPr id="13" name="">
             <a:extLst xmlns:a="http://schemas.openxmlformats.org/drawingml/2006/main">
               <a:ext uri="{FF2B5EF4-FFF2-40B4-BE49-F238E27FC236}">
-                <a16:creationId xmlns:a16="http://schemas.microsoft.com/office/drawing/2014/main" id="{48DE3325-4A14-41DC-910E-4A050DE0DE7E}"/>
-              </a:ext>
-            </a:extLst>
-          </p:cNvPr>
-          <p:cNvSpPr>
-            <a:spLocks xmlns:a="http://schemas.openxmlformats.org/drawingml/2006/main" noGrp="1"/>
-          </p:cNvSpPr>
-          <p:nvPr/>
-        </p:nvSpPr>
-        <p:spPr>
-          <a:xfrm xmlns:a="http://schemas.openxmlformats.org/drawingml/2006/main">
-            <a:off x="6762750" y="2705100"/>
-            <a:ext cx="4495800" cy="895350"/>
+                <a16:creationId xmlns:a16="http://schemas.microsoft.com/office/drawing/2014/main" id="{D8D0A375-2986-4350-9CB5-BD0C16F6334D}"/>
+              </a:ext>
+            </a:extLst>
+          </p:cNvPr>
+          <p:cNvSpPr>
+            <a:spLocks xmlns:a="http://schemas.openxmlformats.org/drawingml/2006/main" noGrp="1"/>
+          </p:cNvSpPr>
+          <p:nvPr/>
+        </p:nvSpPr>
+        <p:spPr>
+          <a:xfrm xmlns:a="http://schemas.openxmlformats.org/drawingml/2006/main">
+            <a:off x="4705350" y="2895600"/>
+            <a:ext cx="2781300" cy="1028700"/>
           </a:xfrm>
           <a:prstGeom xmlns:a="http://schemas.openxmlformats.org/drawingml/2006/main" prst="rect">
             <a:avLst/>
@@ -17085,58 +17034,7 @@
                 <a:ea typeface="PingFang SC"/>
                 <a:cs typeface="PingFang SC"/>
               </a:rPr>
-              <a:t>完成 app-childtask / app-fairsched</a:t>
-            </a:r>
-          </a:p>
-          <a:p xmlns:a="http://schemas.openxmlformats.org/drawingml/2006/main">
-            <a:pPr algn="l">
-              <a:defRPr sz="1275" b="0">
-                <a:solidFill>
-                  <a:srgbClr val="5B6472"/>
-                </a:solidFill>
-                <a:latin typeface="PingFang SC"/>
-                <a:ea typeface="PingFang SC"/>
-                <a:cs typeface="PingFang SC"/>
-              </a:defRPr>
-            </a:pPr>
-            <a:r>
-              <a:rPr sz="1275" b="0">
-                <a:solidFill>
-                  <a:srgbClr val="5B6472"/>
-                </a:solidFill>
-                <a:latin typeface="PingFang SC"/>
-                <a:ea typeface="PingFang SC"/>
-                <a:cs typeface="PingFang SC"/>
-              </a:rPr>
-              <a:t>完成 app-lazymapping / exercise-sysmap</a:t>
-            </a:r>
-          </a:p>
-          <a:p xmlns:a="http://schemas.openxmlformats.org/drawingml/2006/main">
-            <a:r>
-              <a:t/>
-            </a:r>
-          </a:p>
-          <a:p xmlns:a="http://schemas.openxmlformats.org/drawingml/2006/main">
-            <a:pPr algn="l">
-              <a:defRPr sz="1275" b="0">
-                <a:solidFill>
-                  <a:srgbClr val="5B6472"/>
-                </a:solidFill>
-                <a:latin typeface="PingFang SC"/>
-                <a:ea typeface="PingFang SC"/>
-                <a:cs typeface="PingFang SC"/>
-              </a:defRPr>
-            </a:pPr>
-            <a:r>
-              <a:rPr sz="1275" b="0">
-                <a:solidFill>
-                  <a:srgbClr val="5B6472"/>
-                </a:solidFill>
-                <a:latin typeface="PingFang SC"/>
-                <a:ea typeface="PingFang SC"/>
-                <a:cs typeface="PingFang SC"/>
-              </a:rPr>
-              <a:t>覆盖任务创建、调度公平性、lazy mapping、符号/地址映射和异常定位。</a:t>
+              <a:t>围绕内存、任务、文件系统、设备和 syscall 等模块建立基本的分层理解。</a:t>
             </a:r>
           </a:p>
         </p:txBody>
@@ -17146,19 +17044,19 @@
           <p:cNvPr id="14" name="">
             <a:extLst xmlns:a="http://schemas.openxmlformats.org/drawingml/2006/main">
               <a:ext uri="{FF2B5EF4-FFF2-40B4-BE49-F238E27FC236}">
-                <a16:creationId xmlns:a16="http://schemas.microsoft.com/office/drawing/2014/main" id="{05C38327-6F87-47B3-A97E-5E36F692BCEF}"/>
-              </a:ext>
-            </a:extLst>
-          </p:cNvPr>
-          <p:cNvSpPr>
-            <a:spLocks xmlns:a="http://schemas.openxmlformats.org/drawingml/2006/main" noGrp="1"/>
-          </p:cNvSpPr>
-          <p:nvPr/>
-        </p:nvSpPr>
-        <p:spPr>
-          <a:xfrm xmlns:a="http://schemas.openxmlformats.org/drawingml/2006/main">
-            <a:off x="704850" y="4171950"/>
-            <a:ext cx="4953000" cy="1638300"/>
+                <a16:creationId xmlns:a16="http://schemas.microsoft.com/office/drawing/2014/main" id="{D2A6963B-459E-424F-98BF-3E4C1C08CA3F}"/>
+              </a:ext>
+            </a:extLst>
+          </p:cNvPr>
+          <p:cNvSpPr>
+            <a:spLocks xmlns:a="http://schemas.openxmlformats.org/drawingml/2006/main" noGrp="1"/>
+          </p:cNvSpPr>
+          <p:nvPr/>
+        </p:nvSpPr>
+        <p:spPr>
+          <a:xfrm xmlns:a="http://schemas.openxmlformats.org/drawingml/2006/main">
+            <a:off x="8248650" y="2266950"/>
+            <a:ext cx="3238500" cy="1771650"/>
           </a:xfrm>
           <a:prstGeom xmlns:a="http://schemas.openxmlformats.org/drawingml/2006/main" prst="rect">
             <a:avLst/>
@@ -17179,19 +17077,19 @@
           <p:cNvPr id="15" name="">
             <a:extLst xmlns:a="http://schemas.openxmlformats.org/drawingml/2006/main">
               <a:ext uri="{FF2B5EF4-FFF2-40B4-BE49-F238E27FC236}">
-                <a16:creationId xmlns:a16="http://schemas.microsoft.com/office/drawing/2014/main" id="{885996ED-57BC-48B5-87D0-C358422C56BB}"/>
-              </a:ext>
-            </a:extLst>
-          </p:cNvPr>
-          <p:cNvSpPr>
-            <a:spLocks xmlns:a="http://schemas.openxmlformats.org/drawingml/2006/main" noGrp="1"/>
-          </p:cNvSpPr>
-          <p:nvPr/>
-        </p:nvSpPr>
-        <p:spPr>
-          <a:xfrm xmlns:a="http://schemas.openxmlformats.org/drawingml/2006/main">
-            <a:off x="704850" y="4171950"/>
-            <a:ext cx="47625" cy="1638300"/>
+                <a16:creationId xmlns:a16="http://schemas.microsoft.com/office/drawing/2014/main" id="{2F78ABCA-9B3F-4013-919C-D8318D7B3E45}"/>
+              </a:ext>
+            </a:extLst>
+          </p:cNvPr>
+          <p:cNvSpPr>
+            <a:spLocks xmlns:a="http://schemas.openxmlformats.org/drawingml/2006/main" noGrp="1"/>
+          </p:cNvSpPr>
+          <p:nvPr/>
+        </p:nvSpPr>
+        <p:spPr>
+          <a:xfrm xmlns:a="http://schemas.openxmlformats.org/drawingml/2006/main">
+            <a:off x="8248650" y="2266950"/>
+            <a:ext cx="47625" cy="1771650"/>
           </a:xfrm>
           <a:prstGeom xmlns:a="http://schemas.openxmlformats.org/drawingml/2006/main" prst="rect">
             <a:avLst/>
@@ -17214,19 +17112,19 @@
           <p:cNvPr id="16" name="">
             <a:extLst xmlns:a="http://schemas.openxmlformats.org/drawingml/2006/main">
               <a:ext uri="{FF2B5EF4-FFF2-40B4-BE49-F238E27FC236}">
-                <a16:creationId xmlns:a16="http://schemas.microsoft.com/office/drawing/2014/main" id="{1D7CF049-145B-4936-A141-45BAA1DB5453}"/>
-              </a:ext>
-            </a:extLst>
-          </p:cNvPr>
-          <p:cNvSpPr>
-            <a:spLocks xmlns:a="http://schemas.openxmlformats.org/drawingml/2006/main" noGrp="1"/>
-          </p:cNvSpPr>
-          <p:nvPr/>
-        </p:nvSpPr>
-        <p:spPr>
-          <a:xfrm xmlns:a="http://schemas.openxmlformats.org/drawingml/2006/main">
-            <a:off x="933450" y="4381500"/>
-            <a:ext cx="4495800" cy="304800"/>
+                <a16:creationId xmlns:a16="http://schemas.microsoft.com/office/drawing/2014/main" id="{7E089FDB-A665-43FA-BB0C-1E7CF5F6C320}"/>
+              </a:ext>
+            </a:extLst>
+          </p:cNvPr>
+          <p:cNvSpPr>
+            <a:spLocks xmlns:a="http://schemas.openxmlformats.org/drawingml/2006/main" noGrp="1"/>
+          </p:cNvSpPr>
+          <p:nvPr/>
+        </p:nvSpPr>
+        <p:spPr>
+          <a:xfrm xmlns:a="http://schemas.openxmlformats.org/drawingml/2006/main">
+            <a:off x="8477250" y="2476500"/>
+            <a:ext cx="2781300" cy="304800"/>
           </a:xfrm>
           <a:prstGeom xmlns:a="http://schemas.openxmlformats.org/drawingml/2006/main" prst="rect">
             <a:avLst/>
@@ -17268,7 +17166,7 @@
                 <a:ea typeface="PingFang SC"/>
                 <a:cs typeface="PingFang SC"/>
               </a:rPr>
-              <a:t>文件系统与设备</a:t>
+              <a:t>过渡到 BigLab-B</a:t>
             </a:r>
           </a:p>
         </p:txBody>
@@ -17278,19 +17176,19 @@
           <p:cNvPr id="17" name="">
             <a:extLst xmlns:a="http://schemas.openxmlformats.org/drawingml/2006/main">
               <a:ext uri="{FF2B5EF4-FFF2-40B4-BE49-F238E27FC236}">
-                <a16:creationId xmlns:a16="http://schemas.microsoft.com/office/drawing/2014/main" id="{5DF53B87-8E9C-44DB-9D80-EE69042CC00A}"/>
-              </a:ext>
-            </a:extLst>
-          </p:cNvPr>
-          <p:cNvSpPr>
-            <a:spLocks xmlns:a="http://schemas.openxmlformats.org/drawingml/2006/main" noGrp="1"/>
-          </p:cNvSpPr>
-          <p:nvPr/>
-        </p:nvSpPr>
-        <p:spPr>
-          <a:xfrm xmlns:a="http://schemas.openxmlformats.org/drawingml/2006/main">
-            <a:off x="933450" y="4800600"/>
-            <a:ext cx="4495800" cy="895350"/>
+                <a16:creationId xmlns:a16="http://schemas.microsoft.com/office/drawing/2014/main" id="{6CE316C4-09F6-4991-8290-C53D9ABB8546}"/>
+              </a:ext>
+            </a:extLst>
+          </p:cNvPr>
+          <p:cNvSpPr>
+            <a:spLocks xmlns:a="http://schemas.openxmlformats.org/drawingml/2006/main" noGrp="1"/>
+          </p:cNvSpPr>
+          <p:nvPr/>
+        </p:nvSpPr>
+        <p:spPr>
+          <a:xfrm xmlns:a="http://schemas.openxmlformats.org/drawingml/2006/main">
+            <a:off x="8477250" y="2895600"/>
+            <a:ext cx="2781300" cy="1028700"/>
           </a:xfrm>
           <a:prstGeom xmlns:a="http://schemas.openxmlformats.org/drawingml/2006/main" prst="rect">
             <a:avLst/>
@@ -17332,58 +17230,7 @@
                 <a:ea typeface="PingFang SC"/>
                 <a:cs typeface="PingFang SC"/>
               </a:rPr>
-              <a:t>完成 app-readblk / app-readpflash</a:t>
-            </a:r>
-          </a:p>
-          <a:p xmlns:a="http://schemas.openxmlformats.org/drawingml/2006/main">
-            <a:pPr algn="l">
-              <a:defRPr sz="1275" b="0">
-                <a:solidFill>
-                  <a:srgbClr val="5B6472"/>
-                </a:solidFill>
-                <a:latin typeface="PingFang SC"/>
-                <a:ea typeface="PingFang SC"/>
-                <a:cs typeface="PingFang SC"/>
-              </a:defRPr>
-            </a:pPr>
-            <a:r>
-              <a:rPr sz="1275" b="0">
-                <a:solidFill>
-                  <a:srgbClr val="5B6472"/>
-                </a:solidFill>
-                <a:latin typeface="PingFang SC"/>
-                <a:ea typeface="PingFang SC"/>
-                <a:cs typeface="PingFang SC"/>
-              </a:rPr>
-              <a:t>完成 exercise-ramfs-rename / app-msgqueue</a:t>
-            </a:r>
-          </a:p>
-          <a:p xmlns:a="http://schemas.openxmlformats.org/drawingml/2006/main">
-            <a:r>
-              <a:t/>
-            </a:r>
-          </a:p>
-          <a:p xmlns:a="http://schemas.openxmlformats.org/drawingml/2006/main">
-            <a:pPr algn="l">
-              <a:defRPr sz="1275" b="0">
-                <a:solidFill>
-                  <a:srgbClr val="5B6472"/>
-                </a:solidFill>
-                <a:latin typeface="PingFang SC"/>
-                <a:ea typeface="PingFang SC"/>
-                <a:cs typeface="PingFang SC"/>
-              </a:defRPr>
-            </a:pPr>
-            <a:r>
-              <a:rPr sz="1275" b="0">
-                <a:solidFill>
-                  <a:srgbClr val="5B6472"/>
-                </a:solidFill>
-                <a:latin typeface="PingFang SC"/>
-                <a:ea typeface="PingFang SC"/>
-                <a:cs typeface="PingFang SC"/>
-              </a:rPr>
-              <a:t>练习块设备、pflash、RAMFS rename、消息队列和文件/设备抽象。</a:t>
+              <a:t>后续工作转向 TGOSKit / StarryOS：从教学小实验进入真实内核 PR 和大型 workload。</a:t>
             </a:r>
           </a:p>
         </p:txBody>
@@ -17393,244 +17240,59 @@
           <p:cNvPr id="18" name="">
             <a:extLst xmlns:a="http://schemas.openxmlformats.org/drawingml/2006/main">
               <a:ext uri="{FF2B5EF4-FFF2-40B4-BE49-F238E27FC236}">
-                <a16:creationId xmlns:a16="http://schemas.microsoft.com/office/drawing/2014/main" id="{E6C1A067-A6AB-4FC6-8224-0B13CDBD5EED}"/>
-              </a:ext>
-            </a:extLst>
-          </p:cNvPr>
-          <p:cNvSpPr>
-            <a:spLocks xmlns:a="http://schemas.openxmlformats.org/drawingml/2006/main" noGrp="1"/>
-          </p:cNvSpPr>
-          <p:nvPr/>
-        </p:nvSpPr>
-        <p:spPr>
-          <a:xfrm xmlns:a="http://schemas.openxmlformats.org/drawingml/2006/main">
-            <a:off x="6534150" y="4171950"/>
-            <a:ext cx="4953000" cy="1638300"/>
-          </a:xfrm>
-          <a:prstGeom xmlns:a="http://schemas.openxmlformats.org/drawingml/2006/main" prst="rect">
-            <a:avLst/>
-          </a:prstGeom>
-          <a:solidFill xmlns:a="http://schemas.openxmlformats.org/drawingml/2006/main">
-            <a:srgbClr val="FFFFFF"/>
-          </a:solidFill>
-          <a:ln xmlns:a="http://schemas.openxmlformats.org/drawingml/2006/main" w="9525">
-            <a:solidFill>
-              <a:srgbClr val="D8DEE8"/>
-            </a:solidFill>
-            <a:prstDash val="solid"/>
-          </a:ln>
-        </p:spPr>
-      </p:sp>
-      <p:sp>
-        <p:nvSpPr>
-          <p:cNvPr id="19" name="">
-            <a:extLst xmlns:a="http://schemas.openxmlformats.org/drawingml/2006/main">
-              <a:ext uri="{FF2B5EF4-FFF2-40B4-BE49-F238E27FC236}">
-                <a16:creationId xmlns:a16="http://schemas.microsoft.com/office/drawing/2014/main" id="{6FFB2BCD-EAAC-491B-BABF-18465F63EFBE}"/>
-              </a:ext>
-            </a:extLst>
-          </p:cNvPr>
-          <p:cNvSpPr>
-            <a:spLocks xmlns:a="http://schemas.openxmlformats.org/drawingml/2006/main" noGrp="1"/>
-          </p:cNvSpPr>
-          <p:nvPr/>
-        </p:nvSpPr>
-        <p:spPr>
-          <a:xfrm xmlns:a="http://schemas.openxmlformats.org/drawingml/2006/main">
-            <a:off x="6534150" y="4171950"/>
-            <a:ext cx="47625" cy="1638300"/>
-          </a:xfrm>
-          <a:prstGeom xmlns:a="http://schemas.openxmlformats.org/drawingml/2006/main" prst="rect">
-            <a:avLst/>
-          </a:prstGeom>
-          <a:solidFill xmlns:a="http://schemas.openxmlformats.org/drawingml/2006/main">
-            <a:srgbClr val="6A42B8"/>
-          </a:solidFill>
-          <a:ln xmlns:a="http://schemas.openxmlformats.org/drawingml/2006/main" w="0">
-            <a:solidFill>
-              <a:srgbClr val="000000">
-                <a:alpha val="0"/>
-              </a:srgbClr>
-            </a:solidFill>
-            <a:prstDash val="solid"/>
-          </a:ln>
-        </p:spPr>
-      </p:sp>
-      <p:sp>
-        <p:nvSpPr>
-          <p:cNvPr id="20" name="">
-            <a:extLst xmlns:a="http://schemas.openxmlformats.org/drawingml/2006/main">
-              <a:ext uri="{FF2B5EF4-FFF2-40B4-BE49-F238E27FC236}">
-                <a16:creationId xmlns:a16="http://schemas.microsoft.com/office/drawing/2014/main" id="{5981A57D-A2EA-45DE-BA82-04B5DB2A0EF9}"/>
-              </a:ext>
-            </a:extLst>
-          </p:cNvPr>
-          <p:cNvSpPr>
-            <a:spLocks xmlns:a="http://schemas.openxmlformats.org/drawingml/2006/main" noGrp="1"/>
-          </p:cNvSpPr>
-          <p:nvPr/>
-        </p:nvSpPr>
-        <p:spPr>
-          <a:xfrm xmlns:a="http://schemas.openxmlformats.org/drawingml/2006/main">
-            <a:off x="6762750" y="4381500"/>
-            <a:ext cx="4495800" cy="304800"/>
-          </a:xfrm>
-          <a:prstGeom xmlns:a="http://schemas.openxmlformats.org/drawingml/2006/main" prst="rect">
-            <a:avLst/>
-          </a:prstGeom>
-          <a:solidFill xmlns:a="http://schemas.openxmlformats.org/drawingml/2006/main">
-            <a:srgbClr val="000000">
-              <a:alpha val="0"/>
-            </a:srgbClr>
-          </a:solidFill>
-          <a:ln xmlns:a="http://schemas.openxmlformats.org/drawingml/2006/main" w="0">
-            <a:solidFill>
-              <a:srgbClr val="000000">
-                <a:alpha val="0"/>
-              </a:srgbClr>
-            </a:solidFill>
-            <a:prstDash val="solid"/>
-          </a:ln>
-        </p:spPr>
-        <p:txBody>
-          <a:bodyPr xmlns:a="http://schemas.openxmlformats.org/drawingml/2006/main" lIns="0" tIns="0" rIns="0" bIns="0" anchor="t"/>
-          <a:lstStyle xmlns:a="http://schemas.openxmlformats.org/drawingml/2006/main"/>
-          <a:p xmlns:a="http://schemas.openxmlformats.org/drawingml/2006/main">
-            <a:pPr algn="l">
-              <a:defRPr sz="1650" b="1">
-                <a:solidFill>
-                  <a:srgbClr val="111827"/>
-                </a:solidFill>
-                <a:latin typeface="PingFang SC"/>
-                <a:ea typeface="PingFang SC"/>
-                <a:cs typeface="PingFang SC"/>
-              </a:defRPr>
-            </a:pPr>
-            <a:r>
-              <a:rPr sz="1650" b="1">
-                <a:solidFill>
-                  <a:srgbClr val="111827"/>
-                </a:solidFill>
-                <a:latin typeface="PingFang SC"/>
-                <a:ea typeface="PingFang SC"/>
-                <a:cs typeface="PingFang SC"/>
-              </a:rPr>
-              <a:t>用户态与虚拟化</a:t>
-            </a:r>
-          </a:p>
-        </p:txBody>
-      </p:sp>
-      <p:sp>
-        <p:nvSpPr>
-          <p:cNvPr id="21" name="">
-            <a:extLst xmlns:a="http://schemas.openxmlformats.org/drawingml/2006/main">
-              <a:ext uri="{FF2B5EF4-FFF2-40B4-BE49-F238E27FC236}">
-                <a16:creationId xmlns:a16="http://schemas.microsoft.com/office/drawing/2014/main" id="{D4629EA4-6452-4464-88D6-846F5B6DDC5F}"/>
-              </a:ext>
-            </a:extLst>
-          </p:cNvPr>
-          <p:cNvSpPr>
-            <a:spLocks xmlns:a="http://schemas.openxmlformats.org/drawingml/2006/main" noGrp="1"/>
-          </p:cNvSpPr>
-          <p:nvPr/>
-        </p:nvSpPr>
-        <p:spPr>
-          <a:xfrm xmlns:a="http://schemas.openxmlformats.org/drawingml/2006/main">
-            <a:off x="6762750" y="4800600"/>
-            <a:ext cx="4495800" cy="895350"/>
-          </a:xfrm>
-          <a:prstGeom xmlns:a="http://schemas.openxmlformats.org/drawingml/2006/main" prst="rect">
-            <a:avLst/>
-          </a:prstGeom>
-          <a:solidFill xmlns:a="http://schemas.openxmlformats.org/drawingml/2006/main">
-            <a:srgbClr val="000000">
-              <a:alpha val="0"/>
-            </a:srgbClr>
-          </a:solidFill>
-          <a:ln xmlns:a="http://schemas.openxmlformats.org/drawingml/2006/main" w="0">
-            <a:solidFill>
-              <a:srgbClr val="000000">
-                <a:alpha val="0"/>
-              </a:srgbClr>
-            </a:solidFill>
-            <a:prstDash val="solid"/>
-          </a:ln>
-        </p:spPr>
-        <p:txBody>
-          <a:bodyPr xmlns:a="http://schemas.openxmlformats.org/drawingml/2006/main" lIns="0" tIns="0" rIns="0" bIns="0" anchor="t"/>
-          <a:lstStyle xmlns:a="http://schemas.openxmlformats.org/drawingml/2006/main"/>
-          <a:p xmlns:a="http://schemas.openxmlformats.org/drawingml/2006/main">
-            <a:pPr algn="l">
-              <a:defRPr sz="1275" b="0">
-                <a:solidFill>
-                  <a:srgbClr val="5B6472"/>
-                </a:solidFill>
-                <a:latin typeface="PingFang SC"/>
-                <a:ea typeface="PingFang SC"/>
-                <a:cs typeface="PingFang SC"/>
-              </a:defRPr>
-            </a:pPr>
-            <a:r>
-              <a:rPr sz="1275" b="0">
-                <a:solidFill>
-                  <a:srgbClr val="5B6472"/>
-                </a:solidFill>
-                <a:latin typeface="PingFang SC"/>
-                <a:ea typeface="PingFang SC"/>
-                <a:cs typeface="PingFang SC"/>
-              </a:rPr>
-              <a:t>完成 app-runlinuxapp / app-userprivilege</a:t>
-            </a:r>
-          </a:p>
-          <a:p xmlns:a="http://schemas.openxmlformats.org/drawingml/2006/main">
-            <a:pPr algn="l">
-              <a:defRPr sz="1275" b="0">
-                <a:solidFill>
-                  <a:srgbClr val="5B6472"/>
-                </a:solidFill>
-                <a:latin typeface="PingFang SC"/>
-                <a:ea typeface="PingFang SC"/>
-                <a:cs typeface="PingFang SC"/>
-              </a:defRPr>
-            </a:pPr>
-            <a:r>
-              <a:rPr sz="1275" b="0">
-                <a:solidFill>
-                  <a:srgbClr val="5B6472"/>
-                </a:solidFill>
-                <a:latin typeface="PingFang SC"/>
-                <a:ea typeface="PingFang SC"/>
-                <a:cs typeface="PingFang SC"/>
-              </a:rPr>
-              <a:t>完成 app-guestmode / app-guestaspace / app-guestvdev</a:t>
-            </a:r>
-          </a:p>
-          <a:p xmlns:a="http://schemas.openxmlformats.org/drawingml/2006/main">
-            <a:r>
-              <a:t/>
-            </a:r>
-          </a:p>
-          <a:p xmlns:a="http://schemas.openxmlformats.org/drawingml/2006/main">
-            <a:pPr algn="l">
-              <a:defRPr sz="1275" b="0">
-                <a:solidFill>
-                  <a:srgbClr val="5B6472"/>
-                </a:solidFill>
-                <a:latin typeface="PingFang SC"/>
-                <a:ea typeface="PingFang SC"/>
-                <a:cs typeface="PingFang SC"/>
-              </a:defRPr>
-            </a:pPr>
-            <a:r>
-              <a:rPr sz="1275" b="0">
-                <a:solidFill>
-                  <a:srgbClr val="5B6472"/>
-                </a:solidFill>
-                <a:latin typeface="PingFang SC"/>
-                <a:ea typeface="PingFang SC"/>
-                <a:cs typeface="PingFang SC"/>
-              </a:rPr>
-              <a:t>接触用户态加载、权限切换、guest 地址空间和虚拟设备路径。</a:t>
+                <a16:creationId xmlns:a16="http://schemas.microsoft.com/office/drawing/2014/main" id="{7DF347F8-623E-4638-A683-24DC19564ED6}"/>
+              </a:ext>
+            </a:extLst>
+          </p:cNvPr>
+          <p:cNvSpPr>
+            <a:spLocks xmlns:a="http://schemas.openxmlformats.org/drawingml/2006/main" noGrp="1"/>
+          </p:cNvSpPr>
+          <p:nvPr/>
+        </p:nvSpPr>
+        <p:spPr>
+          <a:xfrm xmlns:a="http://schemas.openxmlformats.org/drawingml/2006/main">
+            <a:off x="857250" y="6096000"/>
+            <a:ext cx="10477500" cy="400050"/>
+          </a:xfrm>
+          <a:prstGeom xmlns:a="http://schemas.openxmlformats.org/drawingml/2006/main" prst="rect">
+            <a:avLst/>
+          </a:prstGeom>
+          <a:solidFill xmlns:a="http://schemas.openxmlformats.org/drawingml/2006/main">
+            <a:srgbClr val="0B1220"/>
+          </a:solidFill>
+          <a:ln xmlns:a="http://schemas.openxmlformats.org/drawingml/2006/main" w="0">
+            <a:solidFill>
+              <a:srgbClr val="000000">
+                <a:alpha val="0"/>
+              </a:srgbClr>
+            </a:solidFill>
+            <a:prstDash val="solid"/>
+          </a:ln>
+        </p:spPr>
+        <p:txBody>
+          <a:bodyPr xmlns:a="http://schemas.openxmlformats.org/drawingml/2006/main" lIns="76200" tIns="76200" rIns="76200" bIns="76200" anchor="ctr"/>
+          <a:lstStyle xmlns:a="http://schemas.openxmlformats.org/drawingml/2006/main"/>
+          <a:p xmlns:a="http://schemas.openxmlformats.org/drawingml/2006/main">
+            <a:pPr algn="ctr">
+              <a:defRPr sz="1350" b="1">
+                <a:solidFill>
+                  <a:srgbClr val="FFFFFF"/>
+                </a:solidFill>
+                <a:latin typeface="PingFang SC"/>
+                <a:ea typeface="PingFang SC"/>
+                <a:cs typeface="PingFang SC"/>
+              </a:defRPr>
+            </a:pPr>
+            <a:r>
+              <a:rPr sz="1350" b="1">
+                <a:solidFill>
+                  <a:srgbClr val="FFFFFF"/>
+                </a:solidFill>
+                <a:latin typeface="PingFang SC"/>
+                <a:ea typeface="PingFang SC"/>
+                <a:cs typeface="PingFang SC"/>
+              </a:rPr>
+              <a:t>本页只做 BigLab-A 简要承接；BigLab-B 的具体 Task 1 在下一页展开。</a:t>
             </a:r>
           </a:p>
         </p:txBody>
@@ -17638,7 +17300,7 @@
     </p:spTree>
     <p:extLst>
       <p:ext uri="{BB962C8B-B14F-4D97-AF65-F5344CB8AC3E}">
-        <p14:creationId xmlns:p14="http://schemas.microsoft.com/office/powerpoint/2010/main" val="202627860"/>
+        <p14:creationId xmlns:p14="http://schemas.microsoft.com/office/powerpoint/2010/main" val="1359986053"/>
       </p:ext>
     </p:extLst>
   </p:cSld>
@@ -17669,7 +17331,7 @@
           <p:cNvPr id="1" name="">
             <a:extLst xmlns:a="http://schemas.openxmlformats.org/drawingml/2006/main">
               <a:ext uri="{FF2B5EF4-FFF2-40B4-BE49-F238E27FC236}">
-                <a16:creationId xmlns:a16="http://schemas.microsoft.com/office/drawing/2014/main" id="{2551BBAB-174F-43B1-9629-D15802A99EFC}"/>
+                <a16:creationId xmlns:a16="http://schemas.microsoft.com/office/drawing/2014/main" id="{389EED83-05AF-4EAF-A2FD-E5E723863090}"/>
               </a:ext>
             </a:extLst>
           </p:cNvPr>
@@ -17704,7 +17366,7 @@
           <p:cNvPr id="2" name="">
             <a:extLst xmlns:a="http://schemas.openxmlformats.org/drawingml/2006/main">
               <a:ext uri="{FF2B5EF4-FFF2-40B4-BE49-F238E27FC236}">
-                <a16:creationId xmlns:a16="http://schemas.microsoft.com/office/drawing/2014/main" id="{C91319EC-F184-496D-90C8-C1A7E544B6B1}"/>
+                <a16:creationId xmlns:a16="http://schemas.microsoft.com/office/drawing/2014/main" id="{397093C2-4D81-4E5E-81A2-D0294CAC009A}"/>
               </a:ext>
             </a:extLst>
           </p:cNvPr>
@@ -17768,7 +17430,7 @@
           <p:cNvPr id="3" name="">
             <a:extLst xmlns:a="http://schemas.openxmlformats.org/drawingml/2006/main">
               <a:ext uri="{FF2B5EF4-FFF2-40B4-BE49-F238E27FC236}">
-                <a16:creationId xmlns:a16="http://schemas.microsoft.com/office/drawing/2014/main" id="{CF711345-2F75-49C1-97BD-F5E67138A121}"/>
+                <a16:creationId xmlns:a16="http://schemas.microsoft.com/office/drawing/2014/main" id="{C55C7E02-607C-4C01-82D9-25089B031D1F}"/>
               </a:ext>
             </a:extLst>
           </p:cNvPr>
@@ -17832,7 +17494,7 @@
           <p:cNvPr id="4" name="">
             <a:extLst xmlns:a="http://schemas.openxmlformats.org/drawingml/2006/main">
               <a:ext uri="{FF2B5EF4-FFF2-40B4-BE49-F238E27FC236}">
-                <a16:creationId xmlns:a16="http://schemas.microsoft.com/office/drawing/2014/main" id="{8A5823AF-791B-45BE-AE90-A3C1D538218F}"/>
+                <a16:creationId xmlns:a16="http://schemas.microsoft.com/office/drawing/2014/main" id="{A0742DC2-E3E4-4641-A55F-655E744622C9}"/>
               </a:ext>
             </a:extLst>
           </p:cNvPr>
@@ -17886,7 +17548,7 @@
                 <a:ea typeface="PingFang SC"/>
                 <a:cs typeface="PingFang SC"/>
               </a:rPr>
-              <a:t>BigLab-B Task 1：AI 驱动工程框架</a:t>
+              <a:t>BigLab-B Task 1：tg-arceos-tutorial 基础练习</a:t>
             </a:r>
           </a:p>
         </p:txBody>
@@ -17896,7 +17558,7 @@
           <p:cNvPr id="5" name="">
             <a:extLst xmlns:a="http://schemas.openxmlformats.org/drawingml/2006/main">
               <a:ext uri="{FF2B5EF4-FFF2-40B4-BE49-F238E27FC236}">
-                <a16:creationId xmlns:a16="http://schemas.microsoft.com/office/drawing/2014/main" id="{74122C7A-66AB-4E1A-AF8B-03780331EDB1}"/>
+                <a16:creationId xmlns:a16="http://schemas.microsoft.com/office/drawing/2014/main" id="{EDEEB342-6997-42BE-AB25-E960891C8D1D}"/>
               </a:ext>
             </a:extLst>
           </p:cNvPr>
@@ -17950,7 +17612,7 @@
                 <a:ea typeface="PingFang SC"/>
                 <a:cs typeface="PingFang SC"/>
               </a:rPr>
-              <a:t>Task 1 的重点不是单次修 bug，而是建立一套能持续同步、运行、定位、修复和提交的工作流。</a:t>
+              <a:t>Task 1 是基于 rcore-os/tg-arceos-tutorial 的 test 分支，在自己的 fork 中完成 5 个规定的 exercise-* 基础练习。</a:t>
             </a:r>
           </a:p>
         </p:txBody>
@@ -17960,7 +17622,7 @@
           <p:cNvPr id="6" name="">
             <a:extLst xmlns:a="http://schemas.openxmlformats.org/drawingml/2006/main">
               <a:ext uri="{FF2B5EF4-FFF2-40B4-BE49-F238E27FC236}">
-                <a16:creationId xmlns:a16="http://schemas.microsoft.com/office/drawing/2014/main" id="{C135A419-3CE4-4005-8C2C-54D3BD249998}"/>
+                <a16:creationId xmlns:a16="http://schemas.microsoft.com/office/drawing/2014/main" id="{B377C42C-AECF-4348-835C-DFF191AE1049}"/>
               </a:ext>
             </a:extLst>
           </p:cNvPr>
@@ -17993,7 +17655,7 @@
           <p:cNvPr id="7" name="">
             <a:extLst xmlns:a="http://schemas.openxmlformats.org/drawingml/2006/main">
               <a:ext uri="{FF2B5EF4-FFF2-40B4-BE49-F238E27FC236}">
-                <a16:creationId xmlns:a16="http://schemas.microsoft.com/office/drawing/2014/main" id="{2EF6B84B-FC7A-4EC1-906F-833A7573CACA}"/>
+                <a16:creationId xmlns:a16="http://schemas.microsoft.com/office/drawing/2014/main" id="{8F6E119E-232E-4683-9D02-7C1E3F359C27}"/>
               </a:ext>
             </a:extLst>
           </p:cNvPr>
@@ -18028,7 +17690,7 @@
           <p:cNvPr id="8" name="">
             <a:extLst xmlns:a="http://schemas.openxmlformats.org/drawingml/2006/main">
               <a:ext uri="{FF2B5EF4-FFF2-40B4-BE49-F238E27FC236}">
-                <a16:creationId xmlns:a16="http://schemas.microsoft.com/office/drawing/2014/main" id="{C9E25E75-B4B1-4800-9868-98A57891A0E2}"/>
+                <a16:creationId xmlns:a16="http://schemas.microsoft.com/office/drawing/2014/main" id="{AAD5A1E0-0D48-41D5-BEAB-A3F887840639}"/>
               </a:ext>
             </a:extLst>
           </p:cNvPr>
@@ -18082,7 +17744,7 @@
                 <a:ea typeface="PingFang SC"/>
                 <a:cs typeface="PingFang SC"/>
               </a:rPr>
-              <a:t>目标</a:t>
+              <a:t>仓库与分支</a:t>
             </a:r>
           </a:p>
         </p:txBody>
@@ -18092,7 +17754,7 @@
           <p:cNvPr id="9" name="">
             <a:extLst xmlns:a="http://schemas.openxmlformats.org/drawingml/2006/main">
               <a:ext uri="{FF2B5EF4-FFF2-40B4-BE49-F238E27FC236}">
-                <a16:creationId xmlns:a16="http://schemas.microsoft.com/office/drawing/2014/main" id="{6F156EEB-4AFE-4CEE-BE0D-E948B082A029}"/>
+                <a16:creationId xmlns:a16="http://schemas.microsoft.com/office/drawing/2014/main" id="{4CFDC841-8DC5-4711-960C-22B6DC1428DE}"/>
               </a:ext>
             </a:extLst>
           </p:cNvPr>
@@ -18146,7 +17808,35 @@
                 <a:ea typeface="PingFang SC"/>
                 <a:cs typeface="PingFang SC"/>
               </a:rPr>
-              <a:t>把 AI 辅助开发放进真实 OS 工程闭环：从问题发现到 PR 合并都保留证据。</a:t>
+              <a:t>fork 上游 tg-arceos-tutorial/test，到自己的仓库继续完成代码和总结文档。</a:t>
+            </a:r>
+          </a:p>
+          <a:p xmlns:a="http://schemas.openxmlformats.org/drawingml/2006/main">
+            <a:r>
+              <a:t/>
+            </a:r>
+          </a:p>
+          <a:p xmlns:a="http://schemas.openxmlformats.org/drawingml/2006/main">
+            <a:pPr algn="l">
+              <a:defRPr sz="1275" b="0">
+                <a:solidFill>
+                  <a:srgbClr val="5B6472"/>
+                </a:solidFill>
+                <a:latin typeface="PingFang SC"/>
+                <a:ea typeface="PingFang SC"/>
+                <a:cs typeface="PingFang SC"/>
+              </a:defRPr>
+            </a:pPr>
+            <a:r>
+              <a:rPr sz="1275" b="0">
+                <a:solidFill>
+                  <a:srgbClr val="5B6472"/>
+                </a:solidFill>
+                <a:latin typeface="PingFang SC"/>
+                <a:ea typeface="PingFang SC"/>
+                <a:cs typeface="PingFang SC"/>
+              </a:rPr>
+              <a:t>本地对应仓库：github.com/yks23/tg-arceos-tutorial</a:t>
             </a:r>
           </a:p>
         </p:txBody>
@@ -18156,7 +17846,7 @@
           <p:cNvPr id="10" name="">
             <a:extLst xmlns:a="http://schemas.openxmlformats.org/drawingml/2006/main">
               <a:ext uri="{FF2B5EF4-FFF2-40B4-BE49-F238E27FC236}">
-                <a16:creationId xmlns:a16="http://schemas.microsoft.com/office/drawing/2014/main" id="{CD636934-E110-48D0-B1C2-B3B496C0B09F}"/>
+                <a16:creationId xmlns:a16="http://schemas.microsoft.com/office/drawing/2014/main" id="{D216DCD4-6C0E-413F-8387-7A4CB607EE2F}"/>
               </a:ext>
             </a:extLst>
           </p:cNvPr>
@@ -18189,7 +17879,7 @@
           <p:cNvPr id="11" name="">
             <a:extLst xmlns:a="http://schemas.openxmlformats.org/drawingml/2006/main">
               <a:ext uri="{FF2B5EF4-FFF2-40B4-BE49-F238E27FC236}">
-                <a16:creationId xmlns:a16="http://schemas.microsoft.com/office/drawing/2014/main" id="{91C795DA-F06B-4D7C-B50F-B69D29A474C5}"/>
+                <a16:creationId xmlns:a16="http://schemas.microsoft.com/office/drawing/2014/main" id="{46D55AC1-6C35-4AE8-ABA0-917BEA2DE0E7}"/>
               </a:ext>
             </a:extLst>
           </p:cNvPr>
@@ -18207,7 +17897,7 @@
             <a:avLst/>
           </a:prstGeom>
           <a:solidFill xmlns:a="http://schemas.openxmlformats.org/drawingml/2006/main">
-            <a:srgbClr val="C45A18"/>
+            <a:srgbClr val="148A5A"/>
           </a:solidFill>
           <a:ln xmlns:a="http://schemas.openxmlformats.org/drawingml/2006/main" w="0">
             <a:solidFill>
@@ -18224,7 +17914,7 @@
           <p:cNvPr id="12" name="">
             <a:extLst xmlns:a="http://schemas.openxmlformats.org/drawingml/2006/main">
               <a:ext uri="{FF2B5EF4-FFF2-40B4-BE49-F238E27FC236}">
-                <a16:creationId xmlns:a16="http://schemas.microsoft.com/office/drawing/2014/main" id="{B3E36F0D-3B22-4D21-9A3F-172AD5FF1F13}"/>
+                <a16:creationId xmlns:a16="http://schemas.microsoft.com/office/drawing/2014/main" id="{06D6FBED-375C-466B-90A3-E8F3FFE6AFEF}"/>
               </a:ext>
             </a:extLst>
           </p:cNvPr>
@@ -18278,7 +17968,7 @@
                 <a:ea typeface="PingFang SC"/>
                 <a:cs typeface="PingFang SC"/>
               </a:rPr>
-              <a:t>原则</a:t>
+              <a:t>完成的 5 个 exercise</a:t>
             </a:r>
           </a:p>
         </p:txBody>
@@ -18288,7 +17978,7 @@
           <p:cNvPr id="13" name="">
             <a:extLst xmlns:a="http://schemas.openxmlformats.org/drawingml/2006/main">
               <a:ext uri="{FF2B5EF4-FFF2-40B4-BE49-F238E27FC236}">
-                <a16:creationId xmlns:a16="http://schemas.microsoft.com/office/drawing/2014/main" id="{325A1F26-5E4C-4221-A8E2-72600DD1133D}"/>
+                <a16:creationId xmlns:a16="http://schemas.microsoft.com/office/drawing/2014/main" id="{8DF8FB0D-CE82-4267-AEC6-E9601D03D8EE}"/>
               </a:ext>
             </a:extLst>
           </p:cNvPr>
@@ -18342,7 +18032,99 @@
                 <a:ea typeface="PingFang SC"/>
                 <a:cs typeface="PingFang SC"/>
               </a:rPr>
-              <a:t>反馈链路超过 2 小时就先缩短：小测例、低日志、resume/cache、宿主预检、直接 QEMU。</a:t>
+              <a:t>exercise-printcolor</a:t>
+            </a:r>
+          </a:p>
+          <a:p xmlns:a="http://schemas.openxmlformats.org/drawingml/2006/main">
+            <a:pPr algn="l">
+              <a:defRPr sz="1275" b="0">
+                <a:solidFill>
+                  <a:srgbClr val="5B6472"/>
+                </a:solidFill>
+                <a:latin typeface="PingFang SC"/>
+                <a:ea typeface="PingFang SC"/>
+                <a:cs typeface="PingFang SC"/>
+              </a:defRPr>
+            </a:pPr>
+            <a:r>
+              <a:rPr sz="1275" b="0">
+                <a:solidFill>
+                  <a:srgbClr val="5B6472"/>
+                </a:solidFill>
+                <a:latin typeface="PingFang SC"/>
+                <a:ea typeface="PingFang SC"/>
+                <a:cs typeface="PingFang SC"/>
+              </a:rPr>
+              <a:t>exercise-hashmap</a:t>
+            </a:r>
+          </a:p>
+          <a:p xmlns:a="http://schemas.openxmlformats.org/drawingml/2006/main">
+            <a:pPr algn="l">
+              <a:defRPr sz="1275" b="0">
+                <a:solidFill>
+                  <a:srgbClr val="5B6472"/>
+                </a:solidFill>
+                <a:latin typeface="PingFang SC"/>
+                <a:ea typeface="PingFang SC"/>
+                <a:cs typeface="PingFang SC"/>
+              </a:defRPr>
+            </a:pPr>
+            <a:r>
+              <a:rPr sz="1275" b="0">
+                <a:solidFill>
+                  <a:srgbClr val="5B6472"/>
+                </a:solidFill>
+                <a:latin typeface="PingFang SC"/>
+                <a:ea typeface="PingFang SC"/>
+                <a:cs typeface="PingFang SC"/>
+              </a:rPr>
+              <a:t>exercise-altalloc</a:t>
+            </a:r>
+          </a:p>
+          <a:p xmlns:a="http://schemas.openxmlformats.org/drawingml/2006/main">
+            <a:pPr algn="l">
+              <a:defRPr sz="1275" b="0">
+                <a:solidFill>
+                  <a:srgbClr val="5B6472"/>
+                </a:solidFill>
+                <a:latin typeface="PingFang SC"/>
+                <a:ea typeface="PingFang SC"/>
+                <a:cs typeface="PingFang SC"/>
+              </a:defRPr>
+            </a:pPr>
+            <a:r>
+              <a:rPr sz="1275" b="0">
+                <a:solidFill>
+                  <a:srgbClr val="5B6472"/>
+                </a:solidFill>
+                <a:latin typeface="PingFang SC"/>
+                <a:ea typeface="PingFang SC"/>
+                <a:cs typeface="PingFang SC"/>
+              </a:rPr>
+              <a:t>exercise-ramfs-rename</a:t>
+            </a:r>
+          </a:p>
+          <a:p xmlns:a="http://schemas.openxmlformats.org/drawingml/2006/main">
+            <a:pPr algn="l">
+              <a:defRPr sz="1275" b="0">
+                <a:solidFill>
+                  <a:srgbClr val="5B6472"/>
+                </a:solidFill>
+                <a:latin typeface="PingFang SC"/>
+                <a:ea typeface="PingFang SC"/>
+                <a:cs typeface="PingFang SC"/>
+              </a:defRPr>
+            </a:pPr>
+            <a:r>
+              <a:rPr sz="1275" b="0">
+                <a:solidFill>
+                  <a:srgbClr val="5B6472"/>
+                </a:solidFill>
+                <a:latin typeface="PingFang SC"/>
+                <a:ea typeface="PingFang SC"/>
+                <a:cs typeface="PingFang SC"/>
+              </a:rPr>
+              <a:t>exercise-sysmap</a:t>
             </a:r>
           </a:p>
         </p:txBody>
@@ -18352,7 +18134,7 @@
           <p:cNvPr id="14" name="">
             <a:extLst xmlns:a="http://schemas.openxmlformats.org/drawingml/2006/main">
               <a:ext uri="{FF2B5EF4-FFF2-40B4-BE49-F238E27FC236}">
-                <a16:creationId xmlns:a16="http://schemas.microsoft.com/office/drawing/2014/main" id="{504E5A0B-560C-4F7B-A982-6AA7240DE7FF}"/>
+                <a16:creationId xmlns:a16="http://schemas.microsoft.com/office/drawing/2014/main" id="{1A49BD65-2444-4F7C-85E6-86EE34BF944F}"/>
               </a:ext>
             </a:extLst>
           </p:cNvPr>
@@ -18385,7 +18167,7 @@
           <p:cNvPr id="15" name="">
             <a:extLst xmlns:a="http://schemas.openxmlformats.org/drawingml/2006/main">
               <a:ext uri="{FF2B5EF4-FFF2-40B4-BE49-F238E27FC236}">
-                <a16:creationId xmlns:a16="http://schemas.microsoft.com/office/drawing/2014/main" id="{242919CE-D581-4C90-8756-2737235A24F9}"/>
+                <a16:creationId xmlns:a16="http://schemas.microsoft.com/office/drawing/2014/main" id="{062BD2CB-D7A7-4EBB-8CC8-C1E21D75E9EE}"/>
               </a:ext>
             </a:extLst>
           </p:cNvPr>
@@ -18403,7 +18185,7 @@
             <a:avLst/>
           </a:prstGeom>
           <a:solidFill xmlns:a="http://schemas.openxmlformats.org/drawingml/2006/main">
-            <a:srgbClr val="148A5A"/>
+            <a:srgbClr val="C45A18"/>
           </a:solidFill>
           <a:ln xmlns:a="http://schemas.openxmlformats.org/drawingml/2006/main" w="0">
             <a:solidFill>
@@ -18420,7 +18202,7 @@
           <p:cNvPr id="16" name="">
             <a:extLst xmlns:a="http://schemas.openxmlformats.org/drawingml/2006/main">
               <a:ext uri="{FF2B5EF4-FFF2-40B4-BE49-F238E27FC236}">
-                <a16:creationId xmlns:a16="http://schemas.microsoft.com/office/drawing/2014/main" id="{F3154DFD-A61A-4BCD-A339-805B656BBF1B}"/>
+                <a16:creationId xmlns:a16="http://schemas.microsoft.com/office/drawing/2014/main" id="{D70AC300-7ECA-4753-9126-AEC4E54383D6}"/>
               </a:ext>
             </a:extLst>
           </p:cNvPr>
@@ -18474,7 +18256,7 @@
                 <a:ea typeface="PingFang SC"/>
                 <a:cs typeface="PingFang SC"/>
               </a:rPr>
-              <a:t>产物</a:t>
+              <a:t>训练到的能力</a:t>
             </a:r>
           </a:p>
         </p:txBody>
@@ -18484,7 +18266,7 @@
           <p:cNvPr id="17" name="">
             <a:extLst xmlns:a="http://schemas.openxmlformats.org/drawingml/2006/main">
               <a:ext uri="{FF2B5EF4-FFF2-40B4-BE49-F238E27FC236}">
-                <a16:creationId xmlns:a16="http://schemas.microsoft.com/office/drawing/2014/main" id="{1419D96B-8F1F-491E-9E88-BBBFDA0B7361}"/>
+                <a16:creationId xmlns:a16="http://schemas.microsoft.com/office/drawing/2014/main" id="{8F80CFF0-5E1E-4290-B2F0-00C2E1689447}"/>
               </a:ext>
             </a:extLst>
           </p:cNvPr>
@@ -18538,7 +18320,7 @@
                 <a:ea typeface="PingFang SC"/>
                 <a:cs typeface="PingFang SC"/>
               </a:rPr>
-              <a:t>规则、harness、自动同步、PR 检测、日志归档、showtime 文档与可复现脚本。</a:t>
+              <a:t>从基础输出、集合/哈希表、替代 allocator，到 RAMFS rename、系统符号/地址映射，逐步补齐 ArceOS 小实验能力。</a:t>
             </a:r>
           </a:p>
         </p:txBody>
@@ -18548,7 +18330,7 @@
           <p:cNvPr id="18" name="">
             <a:extLst xmlns:a="http://schemas.openxmlformats.org/drawingml/2006/main">
               <a:ext uri="{FF2B5EF4-FFF2-40B4-BE49-F238E27FC236}">
-                <a16:creationId xmlns:a16="http://schemas.microsoft.com/office/drawing/2014/main" id="{C0CED310-59A4-4F4F-A11C-775F40B26708}"/>
+                <a16:creationId xmlns:a16="http://schemas.microsoft.com/office/drawing/2014/main" id="{B6A0CAC1-889F-48B3-AA4C-A9ADD93624BB}"/>
               </a:ext>
             </a:extLst>
           </p:cNvPr>
@@ -18583,7 +18365,7 @@
           <p:cNvPr id="19" name="">
             <a:extLst xmlns:a="http://schemas.openxmlformats.org/drawingml/2006/main">
               <a:ext uri="{FF2B5EF4-FFF2-40B4-BE49-F238E27FC236}">
-                <a16:creationId xmlns:a16="http://schemas.microsoft.com/office/drawing/2014/main" id="{3F14FAC9-CEB1-4D3B-AFAF-E6140C1D449B}"/>
+                <a16:creationId xmlns:a16="http://schemas.microsoft.com/office/drawing/2014/main" id="{281535E8-1652-4BBA-A13E-21F0762A54F3}"/>
               </a:ext>
             </a:extLst>
           </p:cNvPr>
@@ -18637,7 +18419,7 @@
                 <a:ea typeface="PingFang SC"/>
                 <a:cs typeface="PingFang SC"/>
               </a:rPr>
-              <a:t>持续和 TGOSKit dev 对齐，避免长期偏离上游导致 PR 难合并。</a:t>
+              <a:t>这一部分不是 Harness，也不是 StarryOS PR；它是 BigLab-B 的基础训练任务。</a:t>
             </a:r>
           </a:p>
         </p:txBody>
@@ -18647,7 +18429,7 @@
           <p:cNvPr id="20" name="">
             <a:extLst xmlns:a="http://schemas.openxmlformats.org/drawingml/2006/main">
               <a:ext uri="{FF2B5EF4-FFF2-40B4-BE49-F238E27FC236}">
-                <a16:creationId xmlns:a16="http://schemas.microsoft.com/office/drawing/2014/main" id="{057DF3A2-2C63-4FF3-976A-B982DD58D746}"/>
+                <a16:creationId xmlns:a16="http://schemas.microsoft.com/office/drawing/2014/main" id="{54C1D4B2-D371-4835-A435-70F9E552E390}"/>
               </a:ext>
             </a:extLst>
           </p:cNvPr>
@@ -18682,7 +18464,7 @@
           <p:cNvPr id="21" name="">
             <a:extLst xmlns:a="http://schemas.openxmlformats.org/drawingml/2006/main">
               <a:ext uri="{FF2B5EF4-FFF2-40B4-BE49-F238E27FC236}">
-                <a16:creationId xmlns:a16="http://schemas.microsoft.com/office/drawing/2014/main" id="{BC599B2A-6496-486A-8708-F7F409A1687E}"/>
+                <a16:creationId xmlns:a16="http://schemas.microsoft.com/office/drawing/2014/main" id="{FE3A936B-634E-44DB-BD9C-6E2733BB319F}"/>
               </a:ext>
             </a:extLst>
           </p:cNvPr>
@@ -18736,7 +18518,7 @@
                 <a:ea typeface="PingFang SC"/>
                 <a:cs typeface="PingFang SC"/>
               </a:rPr>
-              <a:t>发现 OS bug 后，不停留在实验日志，而是整理 root cause、test-suite 和 PR 文案。</a:t>
+              <a:t>完成后才进入 Task 2：把方法迁移到 TGOSKit / StarryOS 的真实内核改进。</a:t>
             </a:r>
           </a:p>
         </p:txBody>
@@ -18746,7 +18528,7 @@
           <p:cNvPr id="22" name="">
             <a:extLst xmlns:a="http://schemas.openxmlformats.org/drawingml/2006/main">
               <a:ext uri="{FF2B5EF4-FFF2-40B4-BE49-F238E27FC236}">
-                <a16:creationId xmlns:a16="http://schemas.microsoft.com/office/drawing/2014/main" id="{5706D2E7-1A09-4785-8EFA-9370CD44286B}"/>
+                <a16:creationId xmlns:a16="http://schemas.microsoft.com/office/drawing/2014/main" id="{17032641-AFCD-46DE-9B34-972D4EE4C8A9}"/>
               </a:ext>
             </a:extLst>
           </p:cNvPr>
@@ -18781,7 +18563,7 @@
           <p:cNvPr id="23" name="">
             <a:extLst xmlns:a="http://schemas.openxmlformats.org/drawingml/2006/main">
               <a:ext uri="{FF2B5EF4-FFF2-40B4-BE49-F238E27FC236}">
-                <a16:creationId xmlns:a16="http://schemas.microsoft.com/office/drawing/2014/main" id="{2D9D5551-CE24-4043-9C02-5E2F3E59CD23}"/>
+                <a16:creationId xmlns:a16="http://schemas.microsoft.com/office/drawing/2014/main" id="{6143EBC9-EC3E-4047-877E-F4D536BEEF25}"/>
               </a:ext>
             </a:extLst>
           </p:cNvPr>
@@ -18835,7 +18617,7 @@
                 <a:ea typeface="PingFang SC"/>
                 <a:cs typeface="PingFang SC"/>
               </a:rPr>
-              <a:t>长任务用于验收，短任务用于定位；两者分开，减少无效等待。</a:t>
+              <a:t>后面的 Harness、PR、自举编译和多核测速都属于 Task 2 主线。</a:t>
             </a:r>
           </a:p>
         </p:txBody>
@@ -18843,7 +18625,7 @@
     </p:spTree>
     <p:extLst>
       <p:ext uri="{BB962C8B-B14F-4D97-AF65-F5344CB8AC3E}">
-        <p14:creationId xmlns:p14="http://schemas.microsoft.com/office/powerpoint/2010/main" val="510416341"/>
+        <p14:creationId xmlns:p14="http://schemas.microsoft.com/office/powerpoint/2010/main" val="268249211"/>
       </p:ext>
     </p:extLst>
   </p:cSld>
@@ -18874,7 +18656,7 @@
           <p:cNvPr id="1" name="">
             <a:extLst xmlns:a="http://schemas.openxmlformats.org/drawingml/2006/main">
               <a:ext uri="{FF2B5EF4-FFF2-40B4-BE49-F238E27FC236}">
-                <a16:creationId xmlns:a16="http://schemas.microsoft.com/office/drawing/2014/main" id="{F01CAE03-89D2-4B16-87D1-A14B1403F64D}"/>
+                <a16:creationId xmlns:a16="http://schemas.microsoft.com/office/drawing/2014/main" id="{362F1016-73FB-4DF1-AD2D-F2A0BDC22F43}"/>
               </a:ext>
             </a:extLst>
           </p:cNvPr>
@@ -18909,7 +18691,7 @@
           <p:cNvPr id="2" name="">
             <a:extLst xmlns:a="http://schemas.openxmlformats.org/drawingml/2006/main">
               <a:ext uri="{FF2B5EF4-FFF2-40B4-BE49-F238E27FC236}">
-                <a16:creationId xmlns:a16="http://schemas.microsoft.com/office/drawing/2014/main" id="{506D9C5C-1E37-4B79-AFA1-A883AD1337D6}"/>
+                <a16:creationId xmlns:a16="http://schemas.microsoft.com/office/drawing/2014/main" id="{2826D38E-D828-471E-ADC6-35CB276050A1}"/>
               </a:ext>
             </a:extLst>
           </p:cNvPr>
@@ -18973,7 +18755,7 @@
           <p:cNvPr id="3" name="">
             <a:extLst xmlns:a="http://schemas.openxmlformats.org/drawingml/2006/main">
               <a:ext uri="{FF2B5EF4-FFF2-40B4-BE49-F238E27FC236}">
-                <a16:creationId xmlns:a16="http://schemas.microsoft.com/office/drawing/2014/main" id="{06E0DCCF-1132-4C8D-9EC0-F9B025EDB0A5}"/>
+                <a16:creationId xmlns:a16="http://schemas.microsoft.com/office/drawing/2014/main" id="{35211ABC-DC22-4360-9573-B18C480E61C0}"/>
               </a:ext>
             </a:extLst>
           </p:cNvPr>
@@ -19037,7 +18819,7 @@
           <p:cNvPr id="4" name="">
             <a:extLst xmlns:a="http://schemas.openxmlformats.org/drawingml/2006/main">
               <a:ext uri="{FF2B5EF4-FFF2-40B4-BE49-F238E27FC236}">
-                <a16:creationId xmlns:a16="http://schemas.microsoft.com/office/drawing/2014/main" id="{4C0CE204-F3F3-4672-A5EE-CBA5C2036314}"/>
+                <a16:creationId xmlns:a16="http://schemas.microsoft.com/office/drawing/2014/main" id="{800403E9-F1EB-43FA-9E28-B97BCE8CDF89}"/>
               </a:ext>
             </a:extLst>
           </p:cNvPr>
@@ -19091,7 +18873,7 @@
                 <a:ea typeface="PingFang SC"/>
                 <a:cs typeface="PingFang SC"/>
               </a:rPr>
-              <a:t>Task 2 Harness 第一阶段：模型驱动测试挖掘</a:t>
+              <a:t>BigLab-B Task 2 阶段 1：Harness 初版</a:t>
             </a:r>
           </a:p>
         </p:txBody>
@@ -19101,7 +18883,7 @@
           <p:cNvPr id="5" name="">
             <a:extLst xmlns:a="http://schemas.openxmlformats.org/drawingml/2006/main">
               <a:ext uri="{FF2B5EF4-FFF2-40B4-BE49-F238E27FC236}">
-                <a16:creationId xmlns:a16="http://schemas.microsoft.com/office/drawing/2014/main" id="{50775308-2FCC-49F3-A871-464C02DB28B0}"/>
+                <a16:creationId xmlns:a16="http://schemas.microsoft.com/office/drawing/2014/main" id="{05942583-553C-4879-9152-388DF72E66CD}"/>
               </a:ext>
             </a:extLst>
           </p:cNvPr>
@@ -19155,7 +18937,7 @@
                 <a:ea typeface="PingFang SC"/>
                 <a:cs typeface="PingFang SC"/>
               </a:rPr>
-              <a:t>第一阶段尝试让模型生成测试并自动运行，用测试失败来反推 StarryOS 的 bug。</a:t>
+              <a:t>进入 Task 2 后，第一阶段尝试让模型生成测试并自动运行，用测试失败来反推 StarryOS 的 bug。</a:t>
             </a:r>
           </a:p>
         </p:txBody>
@@ -19165,7 +18947,7 @@
           <p:cNvPr id="6" name="">
             <a:extLst xmlns:a="http://schemas.openxmlformats.org/drawingml/2006/main">
               <a:ext uri="{FF2B5EF4-FFF2-40B4-BE49-F238E27FC236}">
-                <a16:creationId xmlns:a16="http://schemas.microsoft.com/office/drawing/2014/main" id="{885A28D0-DACC-4F96-8DA7-3E196FA93B4C}"/>
+                <a16:creationId xmlns:a16="http://schemas.microsoft.com/office/drawing/2014/main" id="{CDFDF8FA-F1E1-4ABA-A135-2E1765A5C340}"/>
               </a:ext>
             </a:extLst>
           </p:cNvPr>
@@ -19198,7 +18980,7 @@
           <p:cNvPr id="7" name="">
             <a:extLst xmlns:a="http://schemas.openxmlformats.org/drawingml/2006/main">
               <a:ext uri="{FF2B5EF4-FFF2-40B4-BE49-F238E27FC236}">
-                <a16:creationId xmlns:a16="http://schemas.microsoft.com/office/drawing/2014/main" id="{5D1C6293-E86F-4CBC-B4A3-FD7B806AF63F}"/>
+                <a16:creationId xmlns:a16="http://schemas.microsoft.com/office/drawing/2014/main" id="{0D876EAE-FDED-405D-81A3-53BA94BDEDF5}"/>
               </a:ext>
             </a:extLst>
           </p:cNvPr>
@@ -19233,7 +19015,7 @@
           <p:cNvPr id="8" name="">
             <a:extLst xmlns:a="http://schemas.openxmlformats.org/drawingml/2006/main">
               <a:ext uri="{FF2B5EF4-FFF2-40B4-BE49-F238E27FC236}">
-                <a16:creationId xmlns:a16="http://schemas.microsoft.com/office/drawing/2014/main" id="{1C3AD44C-6A7B-4586-9FE2-A8BFFB04D253}"/>
+                <a16:creationId xmlns:a16="http://schemas.microsoft.com/office/drawing/2014/main" id="{F8F22C9E-E641-476A-BF56-EA60DA374458}"/>
               </a:ext>
             </a:extLst>
           </p:cNvPr>
@@ -19297,7 +19079,7 @@
           <p:cNvPr id="9" name="">
             <a:extLst xmlns:a="http://schemas.openxmlformats.org/drawingml/2006/main">
               <a:ext uri="{FF2B5EF4-FFF2-40B4-BE49-F238E27FC236}">
-                <a16:creationId xmlns:a16="http://schemas.microsoft.com/office/drawing/2014/main" id="{2976FEA6-94E2-40FC-87EA-AC2E39DDED5F}"/>
+                <a16:creationId xmlns:a16="http://schemas.microsoft.com/office/drawing/2014/main" id="{858F9D04-8405-4937-B039-6E2FA218E00E}"/>
               </a:ext>
             </a:extLst>
           </p:cNvPr>
@@ -19343,7 +19125,7 @@
           <p:cNvPr id="10" name="">
             <a:extLst xmlns:a="http://schemas.openxmlformats.org/drawingml/2006/main">
               <a:ext uri="{FF2B5EF4-FFF2-40B4-BE49-F238E27FC236}">
-                <a16:creationId xmlns:a16="http://schemas.microsoft.com/office/drawing/2014/main" id="{2194A47A-7E88-42B9-B679-356A4C6543B4}"/>
+                <a16:creationId xmlns:a16="http://schemas.microsoft.com/office/drawing/2014/main" id="{80611E11-D0CF-4CD5-814B-314D82B4E56C}"/>
               </a:ext>
             </a:extLst>
           </p:cNvPr>
@@ -19376,7 +19158,7 @@
           <p:cNvPr id="11" name="">
             <a:extLst xmlns:a="http://schemas.openxmlformats.org/drawingml/2006/main">
               <a:ext uri="{FF2B5EF4-FFF2-40B4-BE49-F238E27FC236}">
-                <a16:creationId xmlns:a16="http://schemas.microsoft.com/office/drawing/2014/main" id="{968DF523-DCDD-48C2-9830-62A5D6A71514}"/>
+                <a16:creationId xmlns:a16="http://schemas.microsoft.com/office/drawing/2014/main" id="{576AB20C-D4AE-4227-95FA-8370A28CA35D}"/>
               </a:ext>
             </a:extLst>
           </p:cNvPr>
@@ -19411,7 +19193,7 @@
           <p:cNvPr id="12" name="">
             <a:extLst xmlns:a="http://schemas.openxmlformats.org/drawingml/2006/main">
               <a:ext uri="{FF2B5EF4-FFF2-40B4-BE49-F238E27FC236}">
-                <a16:creationId xmlns:a16="http://schemas.microsoft.com/office/drawing/2014/main" id="{6D776A1B-48B8-41C9-937A-A0BB310170BF}"/>
+                <a16:creationId xmlns:a16="http://schemas.microsoft.com/office/drawing/2014/main" id="{E34970A4-322C-492E-9166-DD1CC08CD257}"/>
               </a:ext>
             </a:extLst>
           </p:cNvPr>
@@ -19475,7 +19257,7 @@
           <p:cNvPr id="13" name="">
             <a:extLst xmlns:a="http://schemas.openxmlformats.org/drawingml/2006/main">
               <a:ext uri="{FF2B5EF4-FFF2-40B4-BE49-F238E27FC236}">
-                <a16:creationId xmlns:a16="http://schemas.microsoft.com/office/drawing/2014/main" id="{93C66FC3-1D6A-44D0-AD41-4B31BB06904F}"/>
+                <a16:creationId xmlns:a16="http://schemas.microsoft.com/office/drawing/2014/main" id="{BB091FBC-824B-40AB-B7AD-F65F31E1C6D1}"/>
               </a:ext>
             </a:extLst>
           </p:cNvPr>
@@ -19521,7 +19303,7 @@
           <p:cNvPr id="14" name="">
             <a:extLst xmlns:a="http://schemas.openxmlformats.org/drawingml/2006/main">
               <a:ext uri="{FF2B5EF4-FFF2-40B4-BE49-F238E27FC236}">
-                <a16:creationId xmlns:a16="http://schemas.microsoft.com/office/drawing/2014/main" id="{ED121A7B-47FF-4ABA-AFD1-B0B732120232}"/>
+                <a16:creationId xmlns:a16="http://schemas.microsoft.com/office/drawing/2014/main" id="{C3DCD1E9-4054-47AB-B5F4-CA3EF38283B5}"/>
               </a:ext>
             </a:extLst>
           </p:cNvPr>
@@ -19556,7 +19338,7 @@
           <p:cNvPr id="15" name="">
             <a:extLst xmlns:a="http://schemas.openxmlformats.org/drawingml/2006/main">
               <a:ext uri="{FF2B5EF4-FFF2-40B4-BE49-F238E27FC236}">
-                <a16:creationId xmlns:a16="http://schemas.microsoft.com/office/drawing/2014/main" id="{59F5D502-9333-45B5-816B-86F5250F48EC}"/>
+                <a16:creationId xmlns:a16="http://schemas.microsoft.com/office/drawing/2014/main" id="{ECDB5715-657F-4311-8F5C-A1D67F361D33}"/>
               </a:ext>
             </a:extLst>
           </p:cNvPr>
@@ -19620,7 +19402,7 @@
           <p:cNvPr id="16" name="">
             <a:extLst xmlns:a="http://schemas.openxmlformats.org/drawingml/2006/main">
               <a:ext uri="{FF2B5EF4-FFF2-40B4-BE49-F238E27FC236}">
-                <a16:creationId xmlns:a16="http://schemas.microsoft.com/office/drawing/2014/main" id="{447FF0DE-63A9-4730-BE68-9A21B3485495}"/>
+                <a16:creationId xmlns:a16="http://schemas.microsoft.com/office/drawing/2014/main" id="{9170D59E-133B-453F-9983-941D8E4A2876}"/>
               </a:ext>
             </a:extLst>
           </p:cNvPr>
@@ -19655,7 +19437,7 @@
           <p:cNvPr id="17" name="">
             <a:extLst xmlns:a="http://schemas.openxmlformats.org/drawingml/2006/main">
               <a:ext uri="{FF2B5EF4-FFF2-40B4-BE49-F238E27FC236}">
-                <a16:creationId xmlns:a16="http://schemas.microsoft.com/office/drawing/2014/main" id="{04C237CB-CBFB-4144-A26B-A3E1F7882E9D}"/>
+                <a16:creationId xmlns:a16="http://schemas.microsoft.com/office/drawing/2014/main" id="{5D1EC0F5-6FFB-4DC9-9D68-B9A25323F3B8}"/>
               </a:ext>
             </a:extLst>
           </p:cNvPr>
@@ -19719,7 +19501,7 @@
           <p:cNvPr id="18" name="">
             <a:extLst xmlns:a="http://schemas.openxmlformats.org/drawingml/2006/main">
               <a:ext uri="{FF2B5EF4-FFF2-40B4-BE49-F238E27FC236}">
-                <a16:creationId xmlns:a16="http://schemas.microsoft.com/office/drawing/2014/main" id="{8995B164-72F8-4423-A376-C7E973D56C91}"/>
+                <a16:creationId xmlns:a16="http://schemas.microsoft.com/office/drawing/2014/main" id="{6107162C-CC62-4B09-A5B5-2C912FDE6CE9}"/>
               </a:ext>
             </a:extLst>
           </p:cNvPr>
@@ -19754,7 +19536,7 @@
           <p:cNvPr id="19" name="">
             <a:extLst xmlns:a="http://schemas.openxmlformats.org/drawingml/2006/main">
               <a:ext uri="{FF2B5EF4-FFF2-40B4-BE49-F238E27FC236}">
-                <a16:creationId xmlns:a16="http://schemas.microsoft.com/office/drawing/2014/main" id="{FA000A0D-57BC-48DD-BA5D-79C0D02B98AA}"/>
+                <a16:creationId xmlns:a16="http://schemas.microsoft.com/office/drawing/2014/main" id="{47BE570B-2803-4118-A37E-4001A380163D}"/>
               </a:ext>
             </a:extLst>
           </p:cNvPr>
@@ -19818,7 +19600,7 @@
           <p:cNvPr id="20" name="">
             <a:extLst xmlns:a="http://schemas.openxmlformats.org/drawingml/2006/main">
               <a:ext uri="{FF2B5EF4-FFF2-40B4-BE49-F238E27FC236}">
-                <a16:creationId xmlns:a16="http://schemas.microsoft.com/office/drawing/2014/main" id="{99CBBFC5-96E8-40CF-A74B-5C2365F19828}"/>
+                <a16:creationId xmlns:a16="http://schemas.microsoft.com/office/drawing/2014/main" id="{6625EF01-4A90-4248-8A9C-2986C298BCEA}"/>
               </a:ext>
             </a:extLst>
           </p:cNvPr>
@@ -19853,7 +19635,7 @@
           <p:cNvPr id="21" name="">
             <a:extLst xmlns:a="http://schemas.openxmlformats.org/drawingml/2006/main">
               <a:ext uri="{FF2B5EF4-FFF2-40B4-BE49-F238E27FC236}">
-                <a16:creationId xmlns:a16="http://schemas.microsoft.com/office/drawing/2014/main" id="{F9A43307-EE28-4F19-B0FB-C75DC11581AD}"/>
+                <a16:creationId xmlns:a16="http://schemas.microsoft.com/office/drawing/2014/main" id="{AA6C6855-5F63-43F9-9ECB-D41EBC03E0A4}"/>
               </a:ext>
             </a:extLst>
           </p:cNvPr>
@@ -19917,7 +19699,7 @@
           <p:cNvPr id="22" name="">
             <a:extLst xmlns:a="http://schemas.openxmlformats.org/drawingml/2006/main">
               <a:ext uri="{FF2B5EF4-FFF2-40B4-BE49-F238E27FC236}">
-                <a16:creationId xmlns:a16="http://schemas.microsoft.com/office/drawing/2014/main" id="{40A82050-7FDB-4D79-90BF-584BCCA9BD16}"/>
+                <a16:creationId xmlns:a16="http://schemas.microsoft.com/office/drawing/2014/main" id="{506CC75A-768C-4E2A-B822-4D135EA2B332}"/>
               </a:ext>
             </a:extLst>
           </p:cNvPr>
@@ -19977,7 +19759,7 @@
     </p:spTree>
     <p:extLst>
       <p:ext uri="{BB962C8B-B14F-4D97-AF65-F5344CB8AC3E}">
-        <p14:creationId xmlns:p14="http://schemas.microsoft.com/office/powerpoint/2010/main" val="1899932613"/>
+        <p14:creationId xmlns:p14="http://schemas.microsoft.com/office/powerpoint/2010/main" val="314295448"/>
       </p:ext>
     </p:extLst>
   </p:cSld>
@@ -20008,7 +19790,7 @@
           <p:cNvPr id="1" name="">
             <a:extLst xmlns:a="http://schemas.openxmlformats.org/drawingml/2006/main">
               <a:ext uri="{FF2B5EF4-FFF2-40B4-BE49-F238E27FC236}">
-                <a16:creationId xmlns:a16="http://schemas.microsoft.com/office/drawing/2014/main" id="{C6C632DE-4740-4436-A9B8-7B9F7369EEC5}"/>
+                <a16:creationId xmlns:a16="http://schemas.microsoft.com/office/drawing/2014/main" id="{68ECB801-68BB-4EED-9628-8DAD3CC39D57}"/>
               </a:ext>
             </a:extLst>
           </p:cNvPr>
@@ -20043,7 +19825,7 @@
           <p:cNvPr id="2" name="">
             <a:extLst xmlns:a="http://schemas.openxmlformats.org/drawingml/2006/main">
               <a:ext uri="{FF2B5EF4-FFF2-40B4-BE49-F238E27FC236}">
-                <a16:creationId xmlns:a16="http://schemas.microsoft.com/office/drawing/2014/main" id="{CBA519FB-9DB9-4776-9D03-E6A60B0A4BEF}"/>
+                <a16:creationId xmlns:a16="http://schemas.microsoft.com/office/drawing/2014/main" id="{CA62DBE6-AC02-4975-A22D-BE92987F8F85}"/>
               </a:ext>
             </a:extLst>
           </p:cNvPr>
@@ -20107,7 +19889,7 @@
           <p:cNvPr id="3" name="">
             <a:extLst xmlns:a="http://schemas.openxmlformats.org/drawingml/2006/main">
               <a:ext uri="{FF2B5EF4-FFF2-40B4-BE49-F238E27FC236}">
-                <a16:creationId xmlns:a16="http://schemas.microsoft.com/office/drawing/2014/main" id="{E83F3B6E-F790-4590-B824-223EF9763C7A}"/>
+                <a16:creationId xmlns:a16="http://schemas.microsoft.com/office/drawing/2014/main" id="{3DD495F1-B91A-4E05-8858-99C8340D334E}"/>
               </a:ext>
             </a:extLst>
           </p:cNvPr>
@@ -20171,7 +19953,7 @@
           <p:cNvPr id="4" name="">
             <a:extLst xmlns:a="http://schemas.openxmlformats.org/drawingml/2006/main">
               <a:ext uri="{FF2B5EF4-FFF2-40B4-BE49-F238E27FC236}">
-                <a16:creationId xmlns:a16="http://schemas.microsoft.com/office/drawing/2014/main" id="{925F2919-C1D1-48AA-A238-56A126F501C2}"/>
+                <a16:creationId xmlns:a16="http://schemas.microsoft.com/office/drawing/2014/main" id="{40975844-A6D3-4A3E-9EC8-502F22DBDDE2}"/>
               </a:ext>
             </a:extLst>
           </p:cNvPr>
@@ -20225,7 +20007,7 @@
                 <a:ea typeface="PingFang SC"/>
                 <a:cs typeface="PingFang SC"/>
               </a:rPr>
-              <a:t>Task 2 Harness 当前方案：与 StarryOS dev 紧密联动</a:t>
+              <a:t>BigLab-B Task 2 阶段 1：Harness 当前闭环</a:t>
             </a:r>
           </a:p>
         </p:txBody>
@@ -20235,7 +20017,7 @@
           <p:cNvPr id="5" name="">
             <a:extLst xmlns:a="http://schemas.openxmlformats.org/drawingml/2006/main">
               <a:ext uri="{FF2B5EF4-FFF2-40B4-BE49-F238E27FC236}">
-                <a16:creationId xmlns:a16="http://schemas.microsoft.com/office/drawing/2014/main" id="{0CB9C1E2-4E96-4DFC-999B-88F8248251ED}"/>
+                <a16:creationId xmlns:a16="http://schemas.microsoft.com/office/drawing/2014/main" id="{524A9D2C-D801-43A6-8C68-B96CD847A597}"/>
               </a:ext>
             </a:extLst>
           </p:cNvPr>
@@ -20289,7 +20071,7 @@
                 <a:ea typeface="PingFang SC"/>
                 <a:cs typeface="PingFang SC"/>
               </a:rPr>
-              <a:t>现在的框架以可合并 PR 为目标：每天同步 dev，在真实 StarryOS 任务中暴露问题，并沉淀测例。</a:t>
+              <a:t>Harness 后来从泛化测试挖掘，收敛到和 StarryOS dev 紧密联动：跑真实任务、读输出、修内核、补测例、提 PR。</a:t>
             </a:r>
           </a:p>
         </p:txBody>
@@ -20299,7 +20081,7 @@
           <p:cNvPr id="6" name="">
             <a:extLst xmlns:a="http://schemas.openxmlformats.org/drawingml/2006/main">
               <a:ext uri="{FF2B5EF4-FFF2-40B4-BE49-F238E27FC236}">
-                <a16:creationId xmlns:a16="http://schemas.microsoft.com/office/drawing/2014/main" id="{886C1296-FD5D-434D-B586-A2DF57A10572}"/>
+                <a16:creationId xmlns:a16="http://schemas.microsoft.com/office/drawing/2014/main" id="{36C3DE3F-A357-46C8-9639-BAE0CEF378C5}"/>
               </a:ext>
             </a:extLst>
           </p:cNvPr>
@@ -20332,7 +20114,7 @@
           <p:cNvPr id="7" name="">
             <a:extLst xmlns:a="http://schemas.openxmlformats.org/drawingml/2006/main">
               <a:ext uri="{FF2B5EF4-FFF2-40B4-BE49-F238E27FC236}">
-                <a16:creationId xmlns:a16="http://schemas.microsoft.com/office/drawing/2014/main" id="{65A207FD-FDD6-4A71-A8CF-F48244A2CDA9}"/>
+                <a16:creationId xmlns:a16="http://schemas.microsoft.com/office/drawing/2014/main" id="{42A72CCC-DDF7-4909-9A85-4475A7FBD087}"/>
               </a:ext>
             </a:extLst>
           </p:cNvPr>
@@ -20396,7 +20178,7 @@
           <p:cNvPr id="8" name="">
             <a:extLst xmlns:a="http://schemas.openxmlformats.org/drawingml/2006/main">
               <a:ext uri="{FF2B5EF4-FFF2-40B4-BE49-F238E27FC236}">
-                <a16:creationId xmlns:a16="http://schemas.microsoft.com/office/drawing/2014/main" id="{B0A441F7-DEBE-4241-8FB8-9D37BD7B4E0D}"/>
+                <a16:creationId xmlns:a16="http://schemas.microsoft.com/office/drawing/2014/main" id="{624F8F8B-2D7A-4869-A0D5-664F78081FA7}"/>
               </a:ext>
             </a:extLst>
           </p:cNvPr>
@@ -20460,7 +20242,7 @@
           <p:cNvPr id="9" name="">
             <a:extLst xmlns:a="http://schemas.openxmlformats.org/drawingml/2006/main">
               <a:ext uri="{FF2B5EF4-FFF2-40B4-BE49-F238E27FC236}">
-                <a16:creationId xmlns:a16="http://schemas.microsoft.com/office/drawing/2014/main" id="{DAECB04A-9C5D-47C6-B537-7A4711537492}"/>
+                <a16:creationId xmlns:a16="http://schemas.microsoft.com/office/drawing/2014/main" id="{ECD4EC2F-254A-4854-899A-FA80762B64E2}"/>
               </a:ext>
             </a:extLst>
           </p:cNvPr>
@@ -20495,7 +20277,7 @@
           <p:cNvPr id="10" name="">
             <a:extLst xmlns:a="http://schemas.openxmlformats.org/drawingml/2006/main">
               <a:ext uri="{FF2B5EF4-FFF2-40B4-BE49-F238E27FC236}">
-                <a16:creationId xmlns:a16="http://schemas.microsoft.com/office/drawing/2014/main" id="{14A3991D-C793-4D35-B72A-971D08E5228A}"/>
+                <a16:creationId xmlns:a16="http://schemas.microsoft.com/office/drawing/2014/main" id="{FFABFE89-E78D-4DA0-95B4-ED3829A5A534}"/>
               </a:ext>
             </a:extLst>
           </p:cNvPr>
@@ -20528,7 +20310,7 @@
           <p:cNvPr id="11" name="">
             <a:extLst xmlns:a="http://schemas.openxmlformats.org/drawingml/2006/main">
               <a:ext uri="{FF2B5EF4-FFF2-40B4-BE49-F238E27FC236}">
-                <a16:creationId xmlns:a16="http://schemas.microsoft.com/office/drawing/2014/main" id="{9E5C9248-773C-463E-9438-E0CEE0000653}"/>
+                <a16:creationId xmlns:a16="http://schemas.microsoft.com/office/drawing/2014/main" id="{29BEC7EB-A4FE-4389-A657-671573729221}"/>
               </a:ext>
             </a:extLst>
           </p:cNvPr>
@@ -20592,7 +20374,7 @@
           <p:cNvPr id="12" name="">
             <a:extLst xmlns:a="http://schemas.openxmlformats.org/drawingml/2006/main">
               <a:ext uri="{FF2B5EF4-FFF2-40B4-BE49-F238E27FC236}">
-                <a16:creationId xmlns:a16="http://schemas.microsoft.com/office/drawing/2014/main" id="{3A6BB6B3-F738-40B4-B19F-1014BAEDD5F8}"/>
+                <a16:creationId xmlns:a16="http://schemas.microsoft.com/office/drawing/2014/main" id="{47B3FDC0-0A39-42A8-8B01-43AACF166F22}"/>
               </a:ext>
             </a:extLst>
           </p:cNvPr>
@@ -20656,7 +20438,7 @@
           <p:cNvPr id="13" name="">
             <a:extLst xmlns:a="http://schemas.openxmlformats.org/drawingml/2006/main">
               <a:ext uri="{FF2B5EF4-FFF2-40B4-BE49-F238E27FC236}">
-                <a16:creationId xmlns:a16="http://schemas.microsoft.com/office/drawing/2014/main" id="{424DD769-296D-4067-817A-5EC4B916539C}"/>
+                <a16:creationId xmlns:a16="http://schemas.microsoft.com/office/drawing/2014/main" id="{B4DAA44A-5344-40D2-8866-3AD55ACF805B}"/>
               </a:ext>
             </a:extLst>
           </p:cNvPr>
@@ -20691,7 +20473,7 @@
           <p:cNvPr id="14" name="">
             <a:extLst xmlns:a="http://schemas.openxmlformats.org/drawingml/2006/main">
               <a:ext uri="{FF2B5EF4-FFF2-40B4-BE49-F238E27FC236}">
-                <a16:creationId xmlns:a16="http://schemas.microsoft.com/office/drawing/2014/main" id="{BCCB9B19-7861-49EB-ACA8-04B53DF3A8D8}"/>
+                <a16:creationId xmlns:a16="http://schemas.microsoft.com/office/drawing/2014/main" id="{42871C9F-B008-4DE5-B403-7A2DC65675D1}"/>
               </a:ext>
             </a:extLst>
           </p:cNvPr>
@@ -20724,7 +20506,7 @@
           <p:cNvPr id="15" name="">
             <a:extLst xmlns:a="http://schemas.openxmlformats.org/drawingml/2006/main">
               <a:ext uri="{FF2B5EF4-FFF2-40B4-BE49-F238E27FC236}">
-                <a16:creationId xmlns:a16="http://schemas.microsoft.com/office/drawing/2014/main" id="{1B4F7B24-F6DC-4321-9332-DD1E5D84EE86}"/>
+                <a16:creationId xmlns:a16="http://schemas.microsoft.com/office/drawing/2014/main" id="{35889BAD-0F07-48DC-974F-371ABE9EA185}"/>
               </a:ext>
             </a:extLst>
           </p:cNvPr>
@@ -20788,7 +20570,7 @@
           <p:cNvPr id="16" name="">
             <a:extLst xmlns:a="http://schemas.openxmlformats.org/drawingml/2006/main">
               <a:ext uri="{FF2B5EF4-FFF2-40B4-BE49-F238E27FC236}">
-                <a16:creationId xmlns:a16="http://schemas.microsoft.com/office/drawing/2014/main" id="{D2428E32-0075-4C47-A40D-CF00E244FAB7}"/>
+                <a16:creationId xmlns:a16="http://schemas.microsoft.com/office/drawing/2014/main" id="{F560E877-B10D-451E-9BB7-06F851AB18B8}"/>
               </a:ext>
             </a:extLst>
           </p:cNvPr>
@@ -20852,7 +20634,7 @@
           <p:cNvPr id="17" name="">
             <a:extLst xmlns:a="http://schemas.openxmlformats.org/drawingml/2006/main">
               <a:ext uri="{FF2B5EF4-FFF2-40B4-BE49-F238E27FC236}">
-                <a16:creationId xmlns:a16="http://schemas.microsoft.com/office/drawing/2014/main" id="{67A1B934-DB9B-4DD3-97A8-7D02B6758B5F}"/>
+                <a16:creationId xmlns:a16="http://schemas.microsoft.com/office/drawing/2014/main" id="{E52C6FD8-6830-4EAD-BB5F-1532E225CCD5}"/>
               </a:ext>
             </a:extLst>
           </p:cNvPr>
@@ -20887,7 +20669,7 @@
           <p:cNvPr id="18" name="">
             <a:extLst xmlns:a="http://schemas.openxmlformats.org/drawingml/2006/main">
               <a:ext uri="{FF2B5EF4-FFF2-40B4-BE49-F238E27FC236}">
-                <a16:creationId xmlns:a16="http://schemas.microsoft.com/office/drawing/2014/main" id="{9BAF84BE-E22B-4DBE-AEEF-F3C3904A9AE7}"/>
+                <a16:creationId xmlns:a16="http://schemas.microsoft.com/office/drawing/2014/main" id="{1ECD70D6-4CC3-4DEB-9D6D-A8AAA74FD4B2}"/>
               </a:ext>
             </a:extLst>
           </p:cNvPr>
@@ -20920,7 +20702,7 @@
           <p:cNvPr id="19" name="">
             <a:extLst xmlns:a="http://schemas.openxmlformats.org/drawingml/2006/main">
               <a:ext uri="{FF2B5EF4-FFF2-40B4-BE49-F238E27FC236}">
-                <a16:creationId xmlns:a16="http://schemas.microsoft.com/office/drawing/2014/main" id="{A56BCE8E-BD73-4DA9-8EBE-23EA50877306}"/>
+                <a16:creationId xmlns:a16="http://schemas.microsoft.com/office/drawing/2014/main" id="{EB543E2F-EE74-4FD0-AC20-A0CB0C34CF1D}"/>
               </a:ext>
             </a:extLst>
           </p:cNvPr>
@@ -20984,7 +20766,7 @@
           <p:cNvPr id="20" name="">
             <a:extLst xmlns:a="http://schemas.openxmlformats.org/drawingml/2006/main">
               <a:ext uri="{FF2B5EF4-FFF2-40B4-BE49-F238E27FC236}">
-                <a16:creationId xmlns:a16="http://schemas.microsoft.com/office/drawing/2014/main" id="{B8B81B66-654B-4107-82F2-62AD300A534A}"/>
+                <a16:creationId xmlns:a16="http://schemas.microsoft.com/office/drawing/2014/main" id="{4E70DB27-4AB6-4B65-A77A-24A9B2C1FB1B}"/>
               </a:ext>
             </a:extLst>
           </p:cNvPr>
@@ -21048,7 +20830,7 @@
           <p:cNvPr id="21" name="">
             <a:extLst xmlns:a="http://schemas.openxmlformats.org/drawingml/2006/main">
               <a:ext uri="{FF2B5EF4-FFF2-40B4-BE49-F238E27FC236}">
-                <a16:creationId xmlns:a16="http://schemas.microsoft.com/office/drawing/2014/main" id="{D03A69E0-5D65-4446-8FB7-B5AE03CC8784}"/>
+                <a16:creationId xmlns:a16="http://schemas.microsoft.com/office/drawing/2014/main" id="{BC0548FA-09B0-4E42-AA24-D0D925269099}"/>
               </a:ext>
             </a:extLst>
           </p:cNvPr>
@@ -21083,7 +20865,7 @@
           <p:cNvPr id="22" name="">
             <a:extLst xmlns:a="http://schemas.openxmlformats.org/drawingml/2006/main">
               <a:ext uri="{FF2B5EF4-FFF2-40B4-BE49-F238E27FC236}">
-                <a16:creationId xmlns:a16="http://schemas.microsoft.com/office/drawing/2014/main" id="{E0C69035-99B7-41C5-B5D7-CA75EF5FAC3A}"/>
+                <a16:creationId xmlns:a16="http://schemas.microsoft.com/office/drawing/2014/main" id="{06DA698F-00E2-4486-B336-767F4C926AE5}"/>
               </a:ext>
             </a:extLst>
           </p:cNvPr>
@@ -21116,7 +20898,7 @@
           <p:cNvPr id="23" name="">
             <a:extLst xmlns:a="http://schemas.openxmlformats.org/drawingml/2006/main">
               <a:ext uri="{FF2B5EF4-FFF2-40B4-BE49-F238E27FC236}">
-                <a16:creationId xmlns:a16="http://schemas.microsoft.com/office/drawing/2014/main" id="{6778B8A7-121C-4B8A-ACC1-AD7D45FA83A7}"/>
+                <a16:creationId xmlns:a16="http://schemas.microsoft.com/office/drawing/2014/main" id="{1E67AFDC-EAD3-4AEC-862A-B831CB6C6211}"/>
               </a:ext>
             </a:extLst>
           </p:cNvPr>
@@ -21180,7 +20962,7 @@
           <p:cNvPr id="24" name="">
             <a:extLst xmlns:a="http://schemas.openxmlformats.org/drawingml/2006/main">
               <a:ext uri="{FF2B5EF4-FFF2-40B4-BE49-F238E27FC236}">
-                <a16:creationId xmlns:a16="http://schemas.microsoft.com/office/drawing/2014/main" id="{802C617A-B7E2-4278-B3D5-D5DFC0B4F26A}"/>
+                <a16:creationId xmlns:a16="http://schemas.microsoft.com/office/drawing/2014/main" id="{199A2CA2-FA7E-463F-88BC-87910C3AA22D}"/>
               </a:ext>
             </a:extLst>
           </p:cNvPr>
@@ -21244,7 +21026,7 @@
           <p:cNvPr id="25" name="">
             <a:extLst xmlns:a="http://schemas.openxmlformats.org/drawingml/2006/main">
               <a:ext uri="{FF2B5EF4-FFF2-40B4-BE49-F238E27FC236}">
-                <a16:creationId xmlns:a16="http://schemas.microsoft.com/office/drawing/2014/main" id="{F8591B6D-7BA2-4DF1-BE51-96067E7961F5}"/>
+                <a16:creationId xmlns:a16="http://schemas.microsoft.com/office/drawing/2014/main" id="{57895341-7D0D-4020-853D-0395934AF26D}"/>
               </a:ext>
             </a:extLst>
           </p:cNvPr>
@@ -21277,7 +21059,7 @@
           <p:cNvPr id="26" name="">
             <a:extLst xmlns:a="http://schemas.openxmlformats.org/drawingml/2006/main">
               <a:ext uri="{FF2B5EF4-FFF2-40B4-BE49-F238E27FC236}">
-                <a16:creationId xmlns:a16="http://schemas.microsoft.com/office/drawing/2014/main" id="{A95DC64C-E827-4DA7-941C-51EBDC6CACE5}"/>
+                <a16:creationId xmlns:a16="http://schemas.microsoft.com/office/drawing/2014/main" id="{976056E8-A522-4DC9-8A6E-FD8B7BE6A4E9}"/>
               </a:ext>
             </a:extLst>
           </p:cNvPr>
@@ -21312,7 +21094,7 @@
           <p:cNvPr id="27" name="">
             <a:extLst xmlns:a="http://schemas.openxmlformats.org/drawingml/2006/main">
               <a:ext uri="{FF2B5EF4-FFF2-40B4-BE49-F238E27FC236}">
-                <a16:creationId xmlns:a16="http://schemas.microsoft.com/office/drawing/2014/main" id="{32840F60-4602-41AB-8ECF-F39D1AA8891A}"/>
+                <a16:creationId xmlns:a16="http://schemas.microsoft.com/office/drawing/2014/main" id="{4C1DD40F-3B63-4B0D-BF24-EBC762757297}"/>
               </a:ext>
             </a:extLst>
           </p:cNvPr>
@@ -21376,7 +21158,7 @@
           <p:cNvPr id="28" name="">
             <a:extLst xmlns:a="http://schemas.openxmlformats.org/drawingml/2006/main">
               <a:ext uri="{FF2B5EF4-FFF2-40B4-BE49-F238E27FC236}">
-                <a16:creationId xmlns:a16="http://schemas.microsoft.com/office/drawing/2014/main" id="{F8E10F26-65E8-4CA0-B4F8-257B3F0CDE1D}"/>
+                <a16:creationId xmlns:a16="http://schemas.microsoft.com/office/drawing/2014/main" id="{140698F6-8424-4AF5-A9FF-F2168E1DD821}"/>
               </a:ext>
             </a:extLst>
           </p:cNvPr>
@@ -21440,7 +21222,7 @@
           <p:cNvPr id="29" name="">
             <a:extLst xmlns:a="http://schemas.openxmlformats.org/drawingml/2006/main">
               <a:ext uri="{FF2B5EF4-FFF2-40B4-BE49-F238E27FC236}">
-                <a16:creationId xmlns:a16="http://schemas.microsoft.com/office/drawing/2014/main" id="{F005581C-FAD5-492C-935B-3ACA82B879A0}"/>
+                <a16:creationId xmlns:a16="http://schemas.microsoft.com/office/drawing/2014/main" id="{7B0A1669-014A-4EE6-A4EF-12E1A5408817}"/>
               </a:ext>
             </a:extLst>
           </p:cNvPr>
@@ -21473,7 +21255,7 @@
           <p:cNvPr id="30" name="">
             <a:extLst xmlns:a="http://schemas.openxmlformats.org/drawingml/2006/main">
               <a:ext uri="{FF2B5EF4-FFF2-40B4-BE49-F238E27FC236}">
-                <a16:creationId xmlns:a16="http://schemas.microsoft.com/office/drawing/2014/main" id="{C2C81932-7048-41D0-8C49-987645237E32}"/>
+                <a16:creationId xmlns:a16="http://schemas.microsoft.com/office/drawing/2014/main" id="{065AF5F1-AEBD-49D9-8773-EA009722D0E8}"/>
               </a:ext>
             </a:extLst>
           </p:cNvPr>
@@ -21508,7 +21290,7 @@
           <p:cNvPr id="31" name="">
             <a:extLst xmlns:a="http://schemas.openxmlformats.org/drawingml/2006/main">
               <a:ext uri="{FF2B5EF4-FFF2-40B4-BE49-F238E27FC236}">
-                <a16:creationId xmlns:a16="http://schemas.microsoft.com/office/drawing/2014/main" id="{FB58BBEA-7137-4278-8A22-66BC6A38C808}"/>
+                <a16:creationId xmlns:a16="http://schemas.microsoft.com/office/drawing/2014/main" id="{6C28E587-F402-4469-9B96-8F17B389A4A7}"/>
               </a:ext>
             </a:extLst>
           </p:cNvPr>
@@ -21572,7 +21354,7 @@
           <p:cNvPr id="32" name="">
             <a:extLst xmlns:a="http://schemas.openxmlformats.org/drawingml/2006/main">
               <a:ext uri="{FF2B5EF4-FFF2-40B4-BE49-F238E27FC236}">
-                <a16:creationId xmlns:a16="http://schemas.microsoft.com/office/drawing/2014/main" id="{4966D6A2-E816-45EA-BAB2-E533A9697C53}"/>
+                <a16:creationId xmlns:a16="http://schemas.microsoft.com/office/drawing/2014/main" id="{954BECD3-59E5-42E3-B64F-EA7E3150550B}"/>
               </a:ext>
             </a:extLst>
           </p:cNvPr>
@@ -21636,7 +21418,7 @@
           <p:cNvPr id="33" name="">
             <a:extLst xmlns:a="http://schemas.openxmlformats.org/drawingml/2006/main">
               <a:ext uri="{FF2B5EF4-FFF2-40B4-BE49-F238E27FC236}">
-                <a16:creationId xmlns:a16="http://schemas.microsoft.com/office/drawing/2014/main" id="{949C95F7-9F69-405C-8520-ACAB2ADD78E4}"/>
+                <a16:creationId xmlns:a16="http://schemas.microsoft.com/office/drawing/2014/main" id="{7456E12E-F931-47F5-8988-B9523100F3F3}"/>
               </a:ext>
             </a:extLst>
           </p:cNvPr>
@@ -21669,7 +21451,7 @@
           <p:cNvPr id="34" name="">
             <a:extLst xmlns:a="http://schemas.openxmlformats.org/drawingml/2006/main">
               <a:ext uri="{FF2B5EF4-FFF2-40B4-BE49-F238E27FC236}">
-                <a16:creationId xmlns:a16="http://schemas.microsoft.com/office/drawing/2014/main" id="{A3AB9792-2D68-42B2-82DE-702029F1E4CF}"/>
+                <a16:creationId xmlns:a16="http://schemas.microsoft.com/office/drawing/2014/main" id="{45256BDE-7FE4-4465-9C54-06808A8CDDEC}"/>
               </a:ext>
             </a:extLst>
           </p:cNvPr>
@@ -21704,7 +21486,7 @@
           <p:cNvPr id="35" name="">
             <a:extLst xmlns:a="http://schemas.openxmlformats.org/drawingml/2006/main">
               <a:ext uri="{FF2B5EF4-FFF2-40B4-BE49-F238E27FC236}">
-                <a16:creationId xmlns:a16="http://schemas.microsoft.com/office/drawing/2014/main" id="{717908E5-A5D6-4C11-9DF7-0EA2610ADEC4}"/>
+                <a16:creationId xmlns:a16="http://schemas.microsoft.com/office/drawing/2014/main" id="{DEAA4EB7-FA07-41E7-A33C-2EB431E62367}"/>
               </a:ext>
             </a:extLst>
           </p:cNvPr>
@@ -21768,7 +21550,7 @@
           <p:cNvPr id="36" name="">
             <a:extLst xmlns:a="http://schemas.openxmlformats.org/drawingml/2006/main">
               <a:ext uri="{FF2B5EF4-FFF2-40B4-BE49-F238E27FC236}">
-                <a16:creationId xmlns:a16="http://schemas.microsoft.com/office/drawing/2014/main" id="{F6C86B87-06BC-4B28-9086-06039A6C99B0}"/>
+                <a16:creationId xmlns:a16="http://schemas.microsoft.com/office/drawing/2014/main" id="{DFE09554-61F9-492A-8B1D-B64D2C68ED3F}"/>
               </a:ext>
             </a:extLst>
           </p:cNvPr>
@@ -21830,7 +21612,7 @@
     </p:spTree>
     <p:extLst>
       <p:ext uri="{BB962C8B-B14F-4D97-AF65-F5344CB8AC3E}">
-        <p14:creationId xmlns:p14="http://schemas.microsoft.com/office/powerpoint/2010/main" val="1857115650"/>
+        <p14:creationId xmlns:p14="http://schemas.microsoft.com/office/powerpoint/2010/main" val="1769062119"/>
       </p:ext>
     </p:extLst>
   </p:cSld>
@@ -21861,7 +21643,7 @@
           <p:cNvPr id="1" name="">
             <a:extLst xmlns:a="http://schemas.openxmlformats.org/drawingml/2006/main">
               <a:ext uri="{FF2B5EF4-FFF2-40B4-BE49-F238E27FC236}">
-                <a16:creationId xmlns:a16="http://schemas.microsoft.com/office/drawing/2014/main" id="{85B45926-B999-4F7F-8571-AE126F50AE66}"/>
+                <a16:creationId xmlns:a16="http://schemas.microsoft.com/office/drawing/2014/main" id="{DD847A5F-9FF1-4B0A-8794-1B090E5E0A29}"/>
               </a:ext>
             </a:extLst>
           </p:cNvPr>
@@ -21896,7 +21678,7 @@
           <p:cNvPr id="2" name="">
             <a:extLst xmlns:a="http://schemas.openxmlformats.org/drawingml/2006/main">
               <a:ext uri="{FF2B5EF4-FFF2-40B4-BE49-F238E27FC236}">
-                <a16:creationId xmlns:a16="http://schemas.microsoft.com/office/drawing/2014/main" id="{4CDABA2F-EAFB-478A-B9F4-84EDAD17F01F}"/>
+                <a16:creationId xmlns:a16="http://schemas.microsoft.com/office/drawing/2014/main" id="{A6F70043-FD0C-48F2-AAE5-4CCDB4A45E67}"/>
               </a:ext>
             </a:extLst>
           </p:cNvPr>
@@ -21960,7 +21742,7 @@
           <p:cNvPr id="3" name="">
             <a:extLst xmlns:a="http://schemas.openxmlformats.org/drawingml/2006/main">
               <a:ext uri="{FF2B5EF4-FFF2-40B4-BE49-F238E27FC236}">
-                <a16:creationId xmlns:a16="http://schemas.microsoft.com/office/drawing/2014/main" id="{818E13D4-2B31-4BE6-940D-A44DF0695321}"/>
+                <a16:creationId xmlns:a16="http://schemas.microsoft.com/office/drawing/2014/main" id="{AEFD94EF-800B-447A-A3F7-32B741252A35}"/>
               </a:ext>
             </a:extLst>
           </p:cNvPr>
@@ -22024,7 +21806,7 @@
           <p:cNvPr id="4" name="">
             <a:extLst xmlns:a="http://schemas.openxmlformats.org/drawingml/2006/main">
               <a:ext uri="{FF2B5EF4-FFF2-40B4-BE49-F238E27FC236}">
-                <a16:creationId xmlns:a16="http://schemas.microsoft.com/office/drawing/2014/main" id="{CC272CFD-6450-4D40-BC51-DE529090CC4A}"/>
+                <a16:creationId xmlns:a16="http://schemas.microsoft.com/office/drawing/2014/main" id="{75973826-4047-4C60-AAE1-F0B44D1972BB}"/>
               </a:ext>
             </a:extLst>
           </p:cNvPr>
@@ -22088,7 +21870,7 @@
           <p:cNvPr id="5" name="">
             <a:extLst xmlns:a="http://schemas.openxmlformats.org/drawingml/2006/main">
               <a:ext uri="{FF2B5EF4-FFF2-40B4-BE49-F238E27FC236}">
-                <a16:creationId xmlns:a16="http://schemas.microsoft.com/office/drawing/2014/main" id="{C1A568C2-512E-4430-AEFD-D7777CB77F3F}"/>
+                <a16:creationId xmlns:a16="http://schemas.microsoft.com/office/drawing/2014/main" id="{74FFC8E2-6BE2-4BDD-B796-E0177B726F3D}"/>
               </a:ext>
             </a:extLst>
           </p:cNvPr>
@@ -22152,7 +21934,7 @@
           <p:cNvPr id="6" name="">
             <a:extLst xmlns:a="http://schemas.openxmlformats.org/drawingml/2006/main">
               <a:ext uri="{FF2B5EF4-FFF2-40B4-BE49-F238E27FC236}">
-                <a16:creationId xmlns:a16="http://schemas.microsoft.com/office/drawing/2014/main" id="{C2E7AAC7-7D1D-49DF-A79F-5833E966AAEA}"/>
+                <a16:creationId xmlns:a16="http://schemas.microsoft.com/office/drawing/2014/main" id="{7C611D40-E0BB-4249-A5B1-391AED204116}"/>
               </a:ext>
             </a:extLst>
           </p:cNvPr>
@@ -22185,7 +21967,7 @@
           <p:cNvPr id="7" name="">
             <a:extLst xmlns:a="http://schemas.openxmlformats.org/drawingml/2006/main">
               <a:ext uri="{FF2B5EF4-FFF2-40B4-BE49-F238E27FC236}">
-                <a16:creationId xmlns:a16="http://schemas.microsoft.com/office/drawing/2014/main" id="{172FB9D3-E915-4E98-AFB8-8A392321B6D9}"/>
+                <a16:creationId xmlns:a16="http://schemas.microsoft.com/office/drawing/2014/main" id="{07E3BA7A-0F1F-457B-8CB9-199EC03AC462}"/>
               </a:ext>
             </a:extLst>
           </p:cNvPr>
@@ -22220,7 +22002,7 @@
           <p:cNvPr id="8" name="">
             <a:extLst xmlns:a="http://schemas.openxmlformats.org/drawingml/2006/main">
               <a:ext uri="{FF2B5EF4-FFF2-40B4-BE49-F238E27FC236}">
-                <a16:creationId xmlns:a16="http://schemas.microsoft.com/office/drawing/2014/main" id="{FD3EDA9E-5152-4504-89EC-7EAB7C952CF7}"/>
+                <a16:creationId xmlns:a16="http://schemas.microsoft.com/office/drawing/2014/main" id="{9866D062-70E9-4F3D-A347-95BB678A7485}"/>
               </a:ext>
             </a:extLst>
           </p:cNvPr>
@@ -22284,7 +22066,7 @@
           <p:cNvPr id="9" name="">
             <a:extLst xmlns:a="http://schemas.openxmlformats.org/drawingml/2006/main">
               <a:ext uri="{FF2B5EF4-FFF2-40B4-BE49-F238E27FC236}">
-                <a16:creationId xmlns:a16="http://schemas.microsoft.com/office/drawing/2014/main" id="{EE146DFF-F1EC-4BDB-A96B-02D2B2BF82B0}"/>
+                <a16:creationId xmlns:a16="http://schemas.microsoft.com/office/drawing/2014/main" id="{EDEBBBA0-C506-423A-A96A-F6455618E51A}"/>
               </a:ext>
             </a:extLst>
           </p:cNvPr>
@@ -22394,7 +22176,7 @@
           <p:cNvPr id="10" name="">
             <a:extLst xmlns:a="http://schemas.openxmlformats.org/drawingml/2006/main">
               <a:ext uri="{FF2B5EF4-FFF2-40B4-BE49-F238E27FC236}">
-                <a16:creationId xmlns:a16="http://schemas.microsoft.com/office/drawing/2014/main" id="{15D2E4BF-A0CB-47D6-8223-990D5FE1BEA3}"/>
+                <a16:creationId xmlns:a16="http://schemas.microsoft.com/office/drawing/2014/main" id="{05276469-ED0C-4615-BB48-5C20DA790A59}"/>
               </a:ext>
             </a:extLst>
           </p:cNvPr>
@@ -22427,7 +22209,7 @@
           <p:cNvPr id="11" name="">
             <a:extLst xmlns:a="http://schemas.openxmlformats.org/drawingml/2006/main">
               <a:ext uri="{FF2B5EF4-FFF2-40B4-BE49-F238E27FC236}">
-                <a16:creationId xmlns:a16="http://schemas.microsoft.com/office/drawing/2014/main" id="{B5DA50EE-3C74-4FE5-BFDB-4A5F07656E67}"/>
+                <a16:creationId xmlns:a16="http://schemas.microsoft.com/office/drawing/2014/main" id="{F8BE2B5A-EEB7-4A13-996A-915AF140A6F8}"/>
               </a:ext>
             </a:extLst>
           </p:cNvPr>
@@ -22462,7 +22244,7 @@
           <p:cNvPr id="12" name="">
             <a:extLst xmlns:a="http://schemas.openxmlformats.org/drawingml/2006/main">
               <a:ext uri="{FF2B5EF4-FFF2-40B4-BE49-F238E27FC236}">
-                <a16:creationId xmlns:a16="http://schemas.microsoft.com/office/drawing/2014/main" id="{7AB676AC-E3EA-4D76-9C1D-616F93C16878}"/>
+                <a16:creationId xmlns:a16="http://schemas.microsoft.com/office/drawing/2014/main" id="{20E4CBDC-C5DC-4893-A1AF-9B9049258A8A}"/>
               </a:ext>
             </a:extLst>
           </p:cNvPr>
@@ -22526,7 +22308,7 @@
           <p:cNvPr id="13" name="">
             <a:extLst xmlns:a="http://schemas.openxmlformats.org/drawingml/2006/main">
               <a:ext uri="{FF2B5EF4-FFF2-40B4-BE49-F238E27FC236}">
-                <a16:creationId xmlns:a16="http://schemas.microsoft.com/office/drawing/2014/main" id="{E22188DB-BCE3-412B-9870-83616CB1A97F}"/>
+                <a16:creationId xmlns:a16="http://schemas.microsoft.com/office/drawing/2014/main" id="{13539E6C-EA8A-4689-9DE4-E9AEE5F2AAA7}"/>
               </a:ext>
             </a:extLst>
           </p:cNvPr>
@@ -22636,7 +22418,7 @@
           <p:cNvPr id="14" name="">
             <a:extLst xmlns:a="http://schemas.openxmlformats.org/drawingml/2006/main">
               <a:ext uri="{FF2B5EF4-FFF2-40B4-BE49-F238E27FC236}">
-                <a16:creationId xmlns:a16="http://schemas.microsoft.com/office/drawing/2014/main" id="{DB44911F-9A0D-4436-A815-7DCB92352BE0}"/>
+                <a16:creationId xmlns:a16="http://schemas.microsoft.com/office/drawing/2014/main" id="{A4E6A1D8-A81C-4048-833F-A5B85D9FB503}"/>
               </a:ext>
             </a:extLst>
           </p:cNvPr>
@@ -22669,7 +22451,7 @@
           <p:cNvPr id="15" name="">
             <a:extLst xmlns:a="http://schemas.openxmlformats.org/drawingml/2006/main">
               <a:ext uri="{FF2B5EF4-FFF2-40B4-BE49-F238E27FC236}">
-                <a16:creationId xmlns:a16="http://schemas.microsoft.com/office/drawing/2014/main" id="{C0526A51-1C6F-4007-AA2B-1268AC5DB24B}"/>
+                <a16:creationId xmlns:a16="http://schemas.microsoft.com/office/drawing/2014/main" id="{F7AD20AB-B871-4B57-8DA6-15442DB292A0}"/>
               </a:ext>
             </a:extLst>
           </p:cNvPr>
@@ -22704,7 +22486,7 @@
           <p:cNvPr id="16" name="">
             <a:extLst xmlns:a="http://schemas.openxmlformats.org/drawingml/2006/main">
               <a:ext uri="{FF2B5EF4-FFF2-40B4-BE49-F238E27FC236}">
-                <a16:creationId xmlns:a16="http://schemas.microsoft.com/office/drawing/2014/main" id="{69E5F5B3-5C8C-45D3-9CBD-D7EBE50F68C1}"/>
+                <a16:creationId xmlns:a16="http://schemas.microsoft.com/office/drawing/2014/main" id="{BBD94DE7-F8BB-4807-8402-BF3DFB958CE5}"/>
               </a:ext>
             </a:extLst>
           </p:cNvPr>
@@ -22768,7 +22550,7 @@
           <p:cNvPr id="17" name="">
             <a:extLst xmlns:a="http://schemas.openxmlformats.org/drawingml/2006/main">
               <a:ext uri="{FF2B5EF4-FFF2-40B4-BE49-F238E27FC236}">
-                <a16:creationId xmlns:a16="http://schemas.microsoft.com/office/drawing/2014/main" id="{ED1828E3-0841-44A6-B8E4-098E0F19C80D}"/>
+                <a16:creationId xmlns:a16="http://schemas.microsoft.com/office/drawing/2014/main" id="{70D1FCC6-5A18-49AA-9F5F-84D946BDF7CF}"/>
               </a:ext>
             </a:extLst>
           </p:cNvPr>
@@ -22901,7 +22683,7 @@
           <p:cNvPr id="18" name="">
             <a:extLst xmlns:a="http://schemas.openxmlformats.org/drawingml/2006/main">
               <a:ext uri="{FF2B5EF4-FFF2-40B4-BE49-F238E27FC236}">
-                <a16:creationId xmlns:a16="http://schemas.microsoft.com/office/drawing/2014/main" id="{2093BE0E-950D-4E5D-93A1-0A81ECF51A13}"/>
+                <a16:creationId xmlns:a16="http://schemas.microsoft.com/office/drawing/2014/main" id="{856D1D3E-CCC7-48B4-BDA6-16DE1D41435F}"/>
               </a:ext>
             </a:extLst>
           </p:cNvPr>
@@ -22934,7 +22716,7 @@
           <p:cNvPr id="19" name="">
             <a:extLst xmlns:a="http://schemas.openxmlformats.org/drawingml/2006/main">
               <a:ext uri="{FF2B5EF4-FFF2-40B4-BE49-F238E27FC236}">
-                <a16:creationId xmlns:a16="http://schemas.microsoft.com/office/drawing/2014/main" id="{E8F65242-D5B1-48F3-9C83-ABF573F3F55C}"/>
+                <a16:creationId xmlns:a16="http://schemas.microsoft.com/office/drawing/2014/main" id="{37541910-B0F0-4120-B2C7-9E611EDDAA53}"/>
               </a:ext>
             </a:extLst>
           </p:cNvPr>
@@ -22969,7 +22751,7 @@
           <p:cNvPr id="20" name="">
             <a:extLst xmlns:a="http://schemas.openxmlformats.org/drawingml/2006/main">
               <a:ext uri="{FF2B5EF4-FFF2-40B4-BE49-F238E27FC236}">
-                <a16:creationId xmlns:a16="http://schemas.microsoft.com/office/drawing/2014/main" id="{A62383CD-8492-438D-8BF9-B924CAAE3360}"/>
+                <a16:creationId xmlns:a16="http://schemas.microsoft.com/office/drawing/2014/main" id="{456E64BF-C4C4-4753-B930-B9CB9B2BFAEE}"/>
               </a:ext>
             </a:extLst>
           </p:cNvPr>
@@ -23033,7 +22815,7 @@
           <p:cNvPr id="21" name="">
             <a:extLst xmlns:a="http://schemas.openxmlformats.org/drawingml/2006/main">
               <a:ext uri="{FF2B5EF4-FFF2-40B4-BE49-F238E27FC236}">
-                <a16:creationId xmlns:a16="http://schemas.microsoft.com/office/drawing/2014/main" id="{6F10EB6B-49A3-42DC-9B3D-A210E938A33E}"/>
+                <a16:creationId xmlns:a16="http://schemas.microsoft.com/office/drawing/2014/main" id="{8EC21824-C34D-42E4-BFFA-00980790D3A7}"/>
               </a:ext>
             </a:extLst>
           </p:cNvPr>
@@ -23120,7 +22902,7 @@
           <p:cNvPr id="22" name="">
             <a:extLst xmlns:a="http://schemas.openxmlformats.org/drawingml/2006/main">
               <a:ext uri="{FF2B5EF4-FFF2-40B4-BE49-F238E27FC236}">
-                <a16:creationId xmlns:a16="http://schemas.microsoft.com/office/drawing/2014/main" id="{9FAF1C59-D021-484F-A897-FF8DC977DDD2}"/>
+                <a16:creationId xmlns:a16="http://schemas.microsoft.com/office/drawing/2014/main" id="{762198D1-09F6-467D-8D0D-6B5EBE413926}"/>
               </a:ext>
             </a:extLst>
           </p:cNvPr>
@@ -23153,7 +22935,7 @@
           <p:cNvPr id="23" name="">
             <a:extLst xmlns:a="http://schemas.openxmlformats.org/drawingml/2006/main">
               <a:ext uri="{FF2B5EF4-FFF2-40B4-BE49-F238E27FC236}">
-                <a16:creationId xmlns:a16="http://schemas.microsoft.com/office/drawing/2014/main" id="{8990CC80-FE94-462E-BAFB-96ADD1FEBD4A}"/>
+                <a16:creationId xmlns:a16="http://schemas.microsoft.com/office/drawing/2014/main" id="{3F9E81A7-2E2C-4137-BE98-24B70285DBFB}"/>
               </a:ext>
             </a:extLst>
           </p:cNvPr>
@@ -23188,7 +22970,7 @@
           <p:cNvPr id="24" name="">
             <a:extLst xmlns:a="http://schemas.openxmlformats.org/drawingml/2006/main">
               <a:ext uri="{FF2B5EF4-FFF2-40B4-BE49-F238E27FC236}">
-                <a16:creationId xmlns:a16="http://schemas.microsoft.com/office/drawing/2014/main" id="{CA536691-5EA5-4F21-A170-9443D7D5A8E7}"/>
+                <a16:creationId xmlns:a16="http://schemas.microsoft.com/office/drawing/2014/main" id="{9403C669-F62A-4A8D-9C47-D66BE6E26780}"/>
               </a:ext>
             </a:extLst>
           </p:cNvPr>
@@ -23252,7 +23034,7 @@
           <p:cNvPr id="25" name="">
             <a:extLst xmlns:a="http://schemas.openxmlformats.org/drawingml/2006/main">
               <a:ext uri="{FF2B5EF4-FFF2-40B4-BE49-F238E27FC236}">
-                <a16:creationId xmlns:a16="http://schemas.microsoft.com/office/drawing/2014/main" id="{1106F023-2C2D-434E-ABFC-E4FBC50BD8DB}"/>
+                <a16:creationId xmlns:a16="http://schemas.microsoft.com/office/drawing/2014/main" id="{750508EC-3FAC-4AF1-AC72-8C2ADE9AE881}"/>
               </a:ext>
             </a:extLst>
           </p:cNvPr>
@@ -23314,7 +23096,7 @@
     </p:spTree>
     <p:extLst>
       <p:ext uri="{BB962C8B-B14F-4D97-AF65-F5344CB8AC3E}">
-        <p14:creationId xmlns:p14="http://schemas.microsoft.com/office/powerpoint/2010/main" val="474639623"/>
+        <p14:creationId xmlns:p14="http://schemas.microsoft.com/office/powerpoint/2010/main" val="2068566272"/>
       </p:ext>
     </p:extLst>
   </p:cSld>
@@ -23345,7 +23127,7 @@
           <p:cNvPr id="1" name="">
             <a:extLst xmlns:a="http://schemas.openxmlformats.org/drawingml/2006/main">
               <a:ext uri="{FF2B5EF4-FFF2-40B4-BE49-F238E27FC236}">
-                <a16:creationId xmlns:a16="http://schemas.microsoft.com/office/drawing/2014/main" id="{87B4CC0F-7CE8-4B4A-8330-BDF1458CD077}"/>
+                <a16:creationId xmlns:a16="http://schemas.microsoft.com/office/drawing/2014/main" id="{A6CC1A07-C9CE-41D2-909F-4DA517F9FB89}"/>
               </a:ext>
             </a:extLst>
           </p:cNvPr>
@@ -23380,7 +23162,7 @@
           <p:cNvPr id="2" name="">
             <a:extLst xmlns:a="http://schemas.openxmlformats.org/drawingml/2006/main">
               <a:ext uri="{FF2B5EF4-FFF2-40B4-BE49-F238E27FC236}">
-                <a16:creationId xmlns:a16="http://schemas.microsoft.com/office/drawing/2014/main" id="{1FADD913-36C5-47FB-9FEB-05D935BDF065}"/>
+                <a16:creationId xmlns:a16="http://schemas.microsoft.com/office/drawing/2014/main" id="{0595BD2C-887B-46B5-9494-F33909FC437F}"/>
               </a:ext>
             </a:extLst>
           </p:cNvPr>
@@ -23444,7 +23226,7 @@
           <p:cNvPr id="3" name="">
             <a:extLst xmlns:a="http://schemas.openxmlformats.org/drawingml/2006/main">
               <a:ext uri="{FF2B5EF4-FFF2-40B4-BE49-F238E27FC236}">
-                <a16:creationId xmlns:a16="http://schemas.microsoft.com/office/drawing/2014/main" id="{7F5B4545-DF0A-4E84-854C-7F365B18D95F}"/>
+                <a16:creationId xmlns:a16="http://schemas.microsoft.com/office/drawing/2014/main" id="{32893184-5DA1-416B-8BED-AFB144E94EDD}"/>
               </a:ext>
             </a:extLst>
           </p:cNvPr>
@@ -23508,7 +23290,7 @@
           <p:cNvPr id="4" name="">
             <a:extLst xmlns:a="http://schemas.openxmlformats.org/drawingml/2006/main">
               <a:ext uri="{FF2B5EF4-FFF2-40B4-BE49-F238E27FC236}">
-                <a16:creationId xmlns:a16="http://schemas.microsoft.com/office/drawing/2014/main" id="{91F7AB2B-C5B6-43AA-9A1D-3F71FBD657D1}"/>
+                <a16:creationId xmlns:a16="http://schemas.microsoft.com/office/drawing/2014/main" id="{E476D615-3E34-4D73-B0DB-2F218F421937}"/>
               </a:ext>
             </a:extLst>
           </p:cNvPr>
@@ -23572,7 +23354,7 @@
           <p:cNvPr id="5" name="">
             <a:extLst xmlns:a="http://schemas.openxmlformats.org/drawingml/2006/main">
               <a:ext uri="{FF2B5EF4-FFF2-40B4-BE49-F238E27FC236}">
-                <a16:creationId xmlns:a16="http://schemas.microsoft.com/office/drawing/2014/main" id="{4927C75A-BE47-4273-91F8-6F45BAA0B8EF}"/>
+                <a16:creationId xmlns:a16="http://schemas.microsoft.com/office/drawing/2014/main" id="{5110A7D1-FBB4-4B45-A2C3-16440E4268FD}"/>
               </a:ext>
             </a:extLst>
           </p:cNvPr>
@@ -23636,7 +23418,7 @@
           <p:cNvPr id="6" name="">
             <a:extLst xmlns:a="http://schemas.openxmlformats.org/drawingml/2006/main">
               <a:ext uri="{FF2B5EF4-FFF2-40B4-BE49-F238E27FC236}">
-                <a16:creationId xmlns:a16="http://schemas.microsoft.com/office/drawing/2014/main" id="{C303A097-5402-4922-8DC5-462B39848F3B}"/>
+                <a16:creationId xmlns:a16="http://schemas.microsoft.com/office/drawing/2014/main" id="{46FAE55E-5929-4B97-B069-1AD61EB03FE7}"/>
               </a:ext>
             </a:extLst>
           </p:cNvPr>
@@ -23669,7 +23451,7 @@
           <p:cNvPr id="7" name="">
             <a:extLst xmlns:a="http://schemas.openxmlformats.org/drawingml/2006/main">
               <a:ext uri="{FF2B5EF4-FFF2-40B4-BE49-F238E27FC236}">
-                <a16:creationId xmlns:a16="http://schemas.microsoft.com/office/drawing/2014/main" id="{6B972033-17F2-4C6E-A207-35B1067DAFA6}"/>
+                <a16:creationId xmlns:a16="http://schemas.microsoft.com/office/drawing/2014/main" id="{0A665D88-2436-433F-9A64-78483C46AD94}"/>
               </a:ext>
             </a:extLst>
           </p:cNvPr>
@@ -23704,7 +23486,7 @@
           <p:cNvPr id="8" name="">
             <a:extLst xmlns:a="http://schemas.openxmlformats.org/drawingml/2006/main">
               <a:ext uri="{FF2B5EF4-FFF2-40B4-BE49-F238E27FC236}">
-                <a16:creationId xmlns:a16="http://schemas.microsoft.com/office/drawing/2014/main" id="{7EDBF261-397C-445B-90EB-50D17DBFF623}"/>
+                <a16:creationId xmlns:a16="http://schemas.microsoft.com/office/drawing/2014/main" id="{A6EB1729-6EAE-4A41-91EC-73CD25D4A833}"/>
               </a:ext>
             </a:extLst>
           </p:cNvPr>
@@ -23768,7 +23550,7 @@
           <p:cNvPr id="9" name="">
             <a:extLst xmlns:a="http://schemas.openxmlformats.org/drawingml/2006/main">
               <a:ext uri="{FF2B5EF4-FFF2-40B4-BE49-F238E27FC236}">
-                <a16:creationId xmlns:a16="http://schemas.microsoft.com/office/drawing/2014/main" id="{B8B050B1-9396-45C8-AF99-1EFF7B383DD4}"/>
+                <a16:creationId xmlns:a16="http://schemas.microsoft.com/office/drawing/2014/main" id="{66039358-B5CB-4DC8-9C44-B55DA85947BA}"/>
               </a:ext>
             </a:extLst>
           </p:cNvPr>
@@ -23832,7 +23614,7 @@
           <p:cNvPr id="10" name="">
             <a:extLst xmlns:a="http://schemas.openxmlformats.org/drawingml/2006/main">
               <a:ext uri="{FF2B5EF4-FFF2-40B4-BE49-F238E27FC236}">
-                <a16:creationId xmlns:a16="http://schemas.microsoft.com/office/drawing/2014/main" id="{E6C52629-FD79-4D0A-A08D-823F2028E25A}"/>
+                <a16:creationId xmlns:a16="http://schemas.microsoft.com/office/drawing/2014/main" id="{A11A9982-0E4A-4B46-B1A6-996DCE0A27E4}"/>
               </a:ext>
             </a:extLst>
           </p:cNvPr>
@@ -23865,7 +23647,7 @@
           <p:cNvPr id="11" name="">
             <a:extLst xmlns:a="http://schemas.openxmlformats.org/drawingml/2006/main">
               <a:ext uri="{FF2B5EF4-FFF2-40B4-BE49-F238E27FC236}">
-                <a16:creationId xmlns:a16="http://schemas.microsoft.com/office/drawing/2014/main" id="{9818E5A5-ABCB-447B-AADC-2DD83F418D17}"/>
+                <a16:creationId xmlns:a16="http://schemas.microsoft.com/office/drawing/2014/main" id="{7ADB5E31-852E-41F0-A56E-2255A46EA6D5}"/>
               </a:ext>
             </a:extLst>
           </p:cNvPr>
@@ -23900,7 +23682,7 @@
           <p:cNvPr id="12" name="">
             <a:extLst xmlns:a="http://schemas.openxmlformats.org/drawingml/2006/main">
               <a:ext uri="{FF2B5EF4-FFF2-40B4-BE49-F238E27FC236}">
-                <a16:creationId xmlns:a16="http://schemas.microsoft.com/office/drawing/2014/main" id="{89B6539C-48C6-4650-9EC1-EA72AAD01E95}"/>
+                <a16:creationId xmlns:a16="http://schemas.microsoft.com/office/drawing/2014/main" id="{BBFD3C8B-4A3B-4542-8B5B-ACCCF4A305EF}"/>
               </a:ext>
             </a:extLst>
           </p:cNvPr>
@@ -23964,7 +23746,7 @@
           <p:cNvPr id="13" name="">
             <a:extLst xmlns:a="http://schemas.openxmlformats.org/drawingml/2006/main">
               <a:ext uri="{FF2B5EF4-FFF2-40B4-BE49-F238E27FC236}">
-                <a16:creationId xmlns:a16="http://schemas.microsoft.com/office/drawing/2014/main" id="{8A4BC86D-33E3-4AA6-B233-8ECE48EA3A9E}"/>
+                <a16:creationId xmlns:a16="http://schemas.microsoft.com/office/drawing/2014/main" id="{9E58D050-7A40-4907-83EF-658B769F9F54}"/>
               </a:ext>
             </a:extLst>
           </p:cNvPr>
@@ -24028,7 +23810,7 @@
           <p:cNvPr id="14" name="">
             <a:extLst xmlns:a="http://schemas.openxmlformats.org/drawingml/2006/main">
               <a:ext uri="{FF2B5EF4-FFF2-40B4-BE49-F238E27FC236}">
-                <a16:creationId xmlns:a16="http://schemas.microsoft.com/office/drawing/2014/main" id="{401358D9-CCBD-4916-84B9-C3F292905D90}"/>
+                <a16:creationId xmlns:a16="http://schemas.microsoft.com/office/drawing/2014/main" id="{50918ABE-D1D6-40BD-A077-AB02983328A7}"/>
               </a:ext>
             </a:extLst>
           </p:cNvPr>
@@ -24061,7 +23843,7 @@
           <p:cNvPr id="15" name="">
             <a:extLst xmlns:a="http://schemas.openxmlformats.org/drawingml/2006/main">
               <a:ext uri="{FF2B5EF4-FFF2-40B4-BE49-F238E27FC236}">
-                <a16:creationId xmlns:a16="http://schemas.microsoft.com/office/drawing/2014/main" id="{D12AFB6D-61C8-4B53-B4EF-46BB54E31A30}"/>
+                <a16:creationId xmlns:a16="http://schemas.microsoft.com/office/drawing/2014/main" id="{18258957-A158-49DD-8499-E969AFEBDB30}"/>
               </a:ext>
             </a:extLst>
           </p:cNvPr>
@@ -24096,7 +23878,7 @@
           <p:cNvPr id="16" name="">
             <a:extLst xmlns:a="http://schemas.openxmlformats.org/drawingml/2006/main">
               <a:ext uri="{FF2B5EF4-FFF2-40B4-BE49-F238E27FC236}">
-                <a16:creationId xmlns:a16="http://schemas.microsoft.com/office/drawing/2014/main" id="{E6BCE692-627F-4C25-8C80-DF98DB9AF1D8}"/>
+                <a16:creationId xmlns:a16="http://schemas.microsoft.com/office/drawing/2014/main" id="{42591778-D17A-4B69-A26C-FDF3855785F3}"/>
               </a:ext>
             </a:extLst>
           </p:cNvPr>
@@ -24160,7 +23942,7 @@
           <p:cNvPr id="17" name="">
             <a:extLst xmlns:a="http://schemas.openxmlformats.org/drawingml/2006/main">
               <a:ext uri="{FF2B5EF4-FFF2-40B4-BE49-F238E27FC236}">
-                <a16:creationId xmlns:a16="http://schemas.microsoft.com/office/drawing/2014/main" id="{48990DD8-9D9E-4D17-890F-22659818F039}"/>
+                <a16:creationId xmlns:a16="http://schemas.microsoft.com/office/drawing/2014/main" id="{FF1B662B-FEDD-4B6C-A688-74CEF121C6DE}"/>
               </a:ext>
             </a:extLst>
           </p:cNvPr>
@@ -24224,7 +24006,7 @@
           <p:cNvPr id="18" name="">
             <a:extLst xmlns:a="http://schemas.openxmlformats.org/drawingml/2006/main">
               <a:ext uri="{FF2B5EF4-FFF2-40B4-BE49-F238E27FC236}">
-                <a16:creationId xmlns:a16="http://schemas.microsoft.com/office/drawing/2014/main" id="{E254DB6E-ABAD-445F-B4FF-FD5B56641747}"/>
+                <a16:creationId xmlns:a16="http://schemas.microsoft.com/office/drawing/2014/main" id="{4E4EE8FC-E6E1-4F08-BC1C-FB6D10FC0EE8}"/>
               </a:ext>
             </a:extLst>
           </p:cNvPr>
@@ -24259,7 +24041,7 @@
           <p:cNvPr id="19" name="">
             <a:extLst xmlns:a="http://schemas.openxmlformats.org/drawingml/2006/main">
               <a:ext uri="{FF2B5EF4-FFF2-40B4-BE49-F238E27FC236}">
-                <a16:creationId xmlns:a16="http://schemas.microsoft.com/office/drawing/2014/main" id="{9A45A670-1506-4E5A-B432-923CA7748F7C}"/>
+                <a16:creationId xmlns:a16="http://schemas.microsoft.com/office/drawing/2014/main" id="{D6C01ED5-56E4-45C8-8151-EB774B6F9707}"/>
               </a:ext>
             </a:extLst>
           </p:cNvPr>
@@ -24323,7 +24105,7 @@
           <p:cNvPr id="20" name="">
             <a:extLst xmlns:a="http://schemas.openxmlformats.org/drawingml/2006/main">
               <a:ext uri="{FF2B5EF4-FFF2-40B4-BE49-F238E27FC236}">
-                <a16:creationId xmlns:a16="http://schemas.microsoft.com/office/drawing/2014/main" id="{E85C63DD-932C-4ECF-9D3F-E47794624928}"/>
+                <a16:creationId xmlns:a16="http://schemas.microsoft.com/office/drawing/2014/main" id="{657E2846-E4B5-4448-9222-DB9233D5F98F}"/>
               </a:ext>
             </a:extLst>
           </p:cNvPr>
@@ -24358,7 +24140,7 @@
           <p:cNvPr id="21" name="">
             <a:extLst xmlns:a="http://schemas.openxmlformats.org/drawingml/2006/main">
               <a:ext uri="{FF2B5EF4-FFF2-40B4-BE49-F238E27FC236}">
-                <a16:creationId xmlns:a16="http://schemas.microsoft.com/office/drawing/2014/main" id="{41D05143-D2DF-4CFE-AEAD-13CFC852E3DC}"/>
+                <a16:creationId xmlns:a16="http://schemas.microsoft.com/office/drawing/2014/main" id="{F76D96ED-544A-4F78-BDF8-4611A1370BA0}"/>
               </a:ext>
             </a:extLst>
           </p:cNvPr>
@@ -24420,7 +24202,7 @@
     </p:spTree>
     <p:extLst>
       <p:ext uri="{BB962C8B-B14F-4D97-AF65-F5344CB8AC3E}">
-        <p14:creationId xmlns:p14="http://schemas.microsoft.com/office/powerpoint/2010/main" val="461820114"/>
+        <p14:creationId xmlns:p14="http://schemas.microsoft.com/office/powerpoint/2010/main" val="939265099"/>
       </p:ext>
     </p:extLst>
   </p:cSld>
@@ -24451,7 +24233,7 @@
           <p:cNvPr id="1" name="">
             <a:extLst xmlns:a="http://schemas.openxmlformats.org/drawingml/2006/main">
               <a:ext uri="{FF2B5EF4-FFF2-40B4-BE49-F238E27FC236}">
-                <a16:creationId xmlns:a16="http://schemas.microsoft.com/office/drawing/2014/main" id="{C2692300-D229-4240-B1BF-C47DA8E00120}"/>
+                <a16:creationId xmlns:a16="http://schemas.microsoft.com/office/drawing/2014/main" id="{E007EDEC-84EA-436D-B7E1-27E33DE8F23E}"/>
               </a:ext>
             </a:extLst>
           </p:cNvPr>
@@ -24486,7 +24268,7 @@
           <p:cNvPr id="2" name="">
             <a:extLst xmlns:a="http://schemas.openxmlformats.org/drawingml/2006/main">
               <a:ext uri="{FF2B5EF4-FFF2-40B4-BE49-F238E27FC236}">
-                <a16:creationId xmlns:a16="http://schemas.microsoft.com/office/drawing/2014/main" id="{5457F86A-B436-4F94-81FB-3951DCECFFBE}"/>
+                <a16:creationId xmlns:a16="http://schemas.microsoft.com/office/drawing/2014/main" id="{734A9F72-94F6-4117-8BC6-89C857C6A0B2}"/>
               </a:ext>
             </a:extLst>
           </p:cNvPr>
@@ -24550,7 +24332,7 @@
           <p:cNvPr id="3" name="">
             <a:extLst xmlns:a="http://schemas.openxmlformats.org/drawingml/2006/main">
               <a:ext uri="{FF2B5EF4-FFF2-40B4-BE49-F238E27FC236}">
-                <a16:creationId xmlns:a16="http://schemas.microsoft.com/office/drawing/2014/main" id="{838A37A5-EB87-4DFF-947B-3BE3FAE04700}"/>
+                <a16:creationId xmlns:a16="http://schemas.microsoft.com/office/drawing/2014/main" id="{EC2C4C5C-B285-4D6A-92B9-3BCC0ABC6BEE}"/>
               </a:ext>
             </a:extLst>
           </p:cNvPr>
@@ -24614,7 +24396,7 @@
           <p:cNvPr id="4" name="">
             <a:extLst xmlns:a="http://schemas.openxmlformats.org/drawingml/2006/main">
               <a:ext uri="{FF2B5EF4-FFF2-40B4-BE49-F238E27FC236}">
-                <a16:creationId xmlns:a16="http://schemas.microsoft.com/office/drawing/2014/main" id="{742CFEAD-1B95-404D-A13F-4759AB42676B}"/>
+                <a16:creationId xmlns:a16="http://schemas.microsoft.com/office/drawing/2014/main" id="{CB58D1C1-C3A9-48C3-929B-064E5800FE28}"/>
               </a:ext>
             </a:extLst>
           </p:cNvPr>
@@ -24678,7 +24460,7 @@
           <p:cNvPr id="5" name="">
             <a:extLst xmlns:a="http://schemas.openxmlformats.org/drawingml/2006/main">
               <a:ext uri="{FF2B5EF4-FFF2-40B4-BE49-F238E27FC236}">
-                <a16:creationId xmlns:a16="http://schemas.microsoft.com/office/drawing/2014/main" id="{BDE85490-7681-4E6A-972F-44CE2EF1DBB2}"/>
+                <a16:creationId xmlns:a16="http://schemas.microsoft.com/office/drawing/2014/main" id="{8CFDB39D-4F36-4AB8-9E36-0912C19A20B5}"/>
               </a:ext>
             </a:extLst>
           </p:cNvPr>
@@ -24742,7 +24524,7 @@
           <p:cNvPr id="6" name="">
             <a:extLst xmlns:a="http://schemas.openxmlformats.org/drawingml/2006/main">
               <a:ext uri="{FF2B5EF4-FFF2-40B4-BE49-F238E27FC236}">
-                <a16:creationId xmlns:a16="http://schemas.microsoft.com/office/drawing/2014/main" id="{6D88A7A8-38E6-4A4F-95EB-37B9D91C63D6}"/>
+                <a16:creationId xmlns:a16="http://schemas.microsoft.com/office/drawing/2014/main" id="{38CCE91F-281E-413E-B07D-68B72EB4E301}"/>
               </a:ext>
             </a:extLst>
           </p:cNvPr>
@@ -24775,7 +24557,7 @@
           <p:cNvPr id="7" name="">
             <a:extLst xmlns:a="http://schemas.openxmlformats.org/drawingml/2006/main">
               <a:ext uri="{FF2B5EF4-FFF2-40B4-BE49-F238E27FC236}">
-                <a16:creationId xmlns:a16="http://schemas.microsoft.com/office/drawing/2014/main" id="{B2925A78-B651-499E-9D08-3A4A5E6AA2F9}"/>
+                <a16:creationId xmlns:a16="http://schemas.microsoft.com/office/drawing/2014/main" id="{88FBB052-6D9C-4E50-9993-786C2EE2EB0F}"/>
               </a:ext>
             </a:extLst>
           </p:cNvPr>
@@ -24810,7 +24592,7 @@
           <p:cNvPr id="8" name="">
             <a:extLst xmlns:a="http://schemas.openxmlformats.org/drawingml/2006/main">
               <a:ext uri="{FF2B5EF4-FFF2-40B4-BE49-F238E27FC236}">
-                <a16:creationId xmlns:a16="http://schemas.microsoft.com/office/drawing/2014/main" id="{70E51B33-5DD1-4B2F-BDC7-700BE199B3C5}"/>
+                <a16:creationId xmlns:a16="http://schemas.microsoft.com/office/drawing/2014/main" id="{F653400F-5A14-4DE9-87F3-A509C05D0525}"/>
               </a:ext>
             </a:extLst>
           </p:cNvPr>
@@ -24874,7 +24656,7 @@
           <p:cNvPr id="9" name="">
             <a:extLst xmlns:a="http://schemas.openxmlformats.org/drawingml/2006/main">
               <a:ext uri="{FF2B5EF4-FFF2-40B4-BE49-F238E27FC236}">
-                <a16:creationId xmlns:a16="http://schemas.microsoft.com/office/drawing/2014/main" id="{17B117A4-0B9C-41CC-94BB-C14CF31B8725}"/>
+                <a16:creationId xmlns:a16="http://schemas.microsoft.com/office/drawing/2014/main" id="{D9932AA2-852F-4E49-8A9D-C32325BF9AC6}"/>
               </a:ext>
             </a:extLst>
           </p:cNvPr>
@@ -24920,7 +24702,7 @@
           <p:cNvPr id="10" name="">
             <a:extLst xmlns:a="http://schemas.openxmlformats.org/drawingml/2006/main">
               <a:ext uri="{FF2B5EF4-FFF2-40B4-BE49-F238E27FC236}">
-                <a16:creationId xmlns:a16="http://schemas.microsoft.com/office/drawing/2014/main" id="{A56B32CD-923F-4D15-951E-21083EFD4554}"/>
+                <a16:creationId xmlns:a16="http://schemas.microsoft.com/office/drawing/2014/main" id="{E94C43C1-005F-4737-AACC-1AB7EB38D95C}"/>
               </a:ext>
             </a:extLst>
           </p:cNvPr>
@@ -24953,7 +24735,7 @@
           <p:cNvPr id="11" name="">
             <a:extLst xmlns:a="http://schemas.openxmlformats.org/drawingml/2006/main">
               <a:ext uri="{FF2B5EF4-FFF2-40B4-BE49-F238E27FC236}">
-                <a16:creationId xmlns:a16="http://schemas.microsoft.com/office/drawing/2014/main" id="{ECA9AFE6-D7A2-424A-AD52-BC0B6A5AB246}"/>
+                <a16:creationId xmlns:a16="http://schemas.microsoft.com/office/drawing/2014/main" id="{5E39FE6A-4E2C-47A1-ABB3-D5F9579DB5A5}"/>
               </a:ext>
             </a:extLst>
           </p:cNvPr>
@@ -24988,7 +24770,7 @@
           <p:cNvPr id="12" name="">
             <a:extLst xmlns:a="http://schemas.openxmlformats.org/drawingml/2006/main">
               <a:ext uri="{FF2B5EF4-FFF2-40B4-BE49-F238E27FC236}">
-                <a16:creationId xmlns:a16="http://schemas.microsoft.com/office/drawing/2014/main" id="{2EC67BCF-9D34-437E-A267-F803B539F152}"/>
+                <a16:creationId xmlns:a16="http://schemas.microsoft.com/office/drawing/2014/main" id="{610A06E2-FE03-4AB1-A00F-59F5483BC6E5}"/>
               </a:ext>
             </a:extLst>
           </p:cNvPr>
@@ -25052,7 +24834,7 @@
           <p:cNvPr id="13" name="">
             <a:extLst xmlns:a="http://schemas.openxmlformats.org/drawingml/2006/main">
               <a:ext uri="{FF2B5EF4-FFF2-40B4-BE49-F238E27FC236}">
-                <a16:creationId xmlns:a16="http://schemas.microsoft.com/office/drawing/2014/main" id="{6C43F793-D899-48D6-A8BB-DF4D27AD29C2}"/>
+                <a16:creationId xmlns:a16="http://schemas.microsoft.com/office/drawing/2014/main" id="{82091129-9609-4231-B64B-EF0B74CCA5CC}"/>
               </a:ext>
             </a:extLst>
           </p:cNvPr>
@@ -25098,7 +24880,7 @@
           <p:cNvPr id="14" name="">
             <a:extLst xmlns:a="http://schemas.openxmlformats.org/drawingml/2006/main">
               <a:ext uri="{FF2B5EF4-FFF2-40B4-BE49-F238E27FC236}">
-                <a16:creationId xmlns:a16="http://schemas.microsoft.com/office/drawing/2014/main" id="{19FE6E15-EE16-4FFC-9874-40D678BE18C3}"/>
+                <a16:creationId xmlns:a16="http://schemas.microsoft.com/office/drawing/2014/main" id="{116D01F0-FA4E-4E63-9FD7-4EF99F1E3630}"/>
               </a:ext>
             </a:extLst>
           </p:cNvPr>
@@ -25133,7 +24915,7 @@
           <p:cNvPr id="15" name="">
             <a:extLst xmlns:a="http://schemas.openxmlformats.org/drawingml/2006/main">
               <a:ext uri="{FF2B5EF4-FFF2-40B4-BE49-F238E27FC236}">
-                <a16:creationId xmlns:a16="http://schemas.microsoft.com/office/drawing/2014/main" id="{C71843EA-B54D-4EE6-A888-EDC5EDC06836}"/>
+                <a16:creationId xmlns:a16="http://schemas.microsoft.com/office/drawing/2014/main" id="{8A8C9DB0-0B8E-4ECD-9DA9-02ED093E6D64}"/>
               </a:ext>
             </a:extLst>
           </p:cNvPr>
@@ -25197,7 +24979,7 @@
           <p:cNvPr id="16" name="">
             <a:extLst xmlns:a="http://schemas.openxmlformats.org/drawingml/2006/main">
               <a:ext uri="{FF2B5EF4-FFF2-40B4-BE49-F238E27FC236}">
-                <a16:creationId xmlns:a16="http://schemas.microsoft.com/office/drawing/2014/main" id="{3CF3E8EB-71DE-4A4C-B161-BB85914B22E0}"/>
+                <a16:creationId xmlns:a16="http://schemas.microsoft.com/office/drawing/2014/main" id="{694AD6F7-DED2-45D0-890E-546D682F455E}"/>
               </a:ext>
             </a:extLst>
           </p:cNvPr>
@@ -25232,7 +25014,7 @@
           <p:cNvPr id="17" name="">
             <a:extLst xmlns:a="http://schemas.openxmlformats.org/drawingml/2006/main">
               <a:ext uri="{FF2B5EF4-FFF2-40B4-BE49-F238E27FC236}">
-                <a16:creationId xmlns:a16="http://schemas.microsoft.com/office/drawing/2014/main" id="{61C4BE39-329B-4557-A5BE-97FBFB22E827}"/>
+                <a16:creationId xmlns:a16="http://schemas.microsoft.com/office/drawing/2014/main" id="{BEAE96F6-549D-4B62-AFB1-85911A3884CE}"/>
               </a:ext>
             </a:extLst>
           </p:cNvPr>
@@ -25296,7 +25078,7 @@
           <p:cNvPr id="18" name="">
             <a:extLst xmlns:a="http://schemas.openxmlformats.org/drawingml/2006/main">
               <a:ext uri="{FF2B5EF4-FFF2-40B4-BE49-F238E27FC236}">
-                <a16:creationId xmlns:a16="http://schemas.microsoft.com/office/drawing/2014/main" id="{79FC5E01-5BA0-4B96-8DB5-34246964F5A1}"/>
+                <a16:creationId xmlns:a16="http://schemas.microsoft.com/office/drawing/2014/main" id="{67530476-CB22-457F-B4B0-1D0DC0C492FB}"/>
               </a:ext>
             </a:extLst>
           </p:cNvPr>
@@ -25331,7 +25113,7 @@
           <p:cNvPr id="19" name="">
             <a:extLst xmlns:a="http://schemas.openxmlformats.org/drawingml/2006/main">
               <a:ext uri="{FF2B5EF4-FFF2-40B4-BE49-F238E27FC236}">
-                <a16:creationId xmlns:a16="http://schemas.microsoft.com/office/drawing/2014/main" id="{D33B7130-F3CA-4624-B20D-82CC90720CF3}"/>
+                <a16:creationId xmlns:a16="http://schemas.microsoft.com/office/drawing/2014/main" id="{30E3EA17-84F6-45E2-8F38-DE964D8B9B19}"/>
               </a:ext>
             </a:extLst>
           </p:cNvPr>
@@ -25395,7 +25177,7 @@
           <p:cNvPr id="20" name="">
             <a:extLst xmlns:a="http://schemas.openxmlformats.org/drawingml/2006/main">
               <a:ext uri="{FF2B5EF4-FFF2-40B4-BE49-F238E27FC236}">
-                <a16:creationId xmlns:a16="http://schemas.microsoft.com/office/drawing/2014/main" id="{62781B1C-16AF-4C10-ABC5-0CA015ABA0B5}"/>
+                <a16:creationId xmlns:a16="http://schemas.microsoft.com/office/drawing/2014/main" id="{A74402D4-3D35-4068-A3CE-080EBC2B5051}"/>
               </a:ext>
             </a:extLst>
           </p:cNvPr>
@@ -25430,7 +25212,7 @@
           <p:cNvPr id="21" name="">
             <a:extLst xmlns:a="http://schemas.openxmlformats.org/drawingml/2006/main">
               <a:ext uri="{FF2B5EF4-FFF2-40B4-BE49-F238E27FC236}">
-                <a16:creationId xmlns:a16="http://schemas.microsoft.com/office/drawing/2014/main" id="{060EFEEA-CED6-4923-9F74-3998FC05B778}"/>
+                <a16:creationId xmlns:a16="http://schemas.microsoft.com/office/drawing/2014/main" id="{BAA85DFE-CD47-4023-AEE4-B035F3DD4D17}"/>
               </a:ext>
             </a:extLst>
           </p:cNvPr>
@@ -25494,7 +25276,7 @@
           <p:cNvPr id="22" name="">
             <a:extLst xmlns:a="http://schemas.openxmlformats.org/drawingml/2006/main">
               <a:ext uri="{FF2B5EF4-FFF2-40B4-BE49-F238E27FC236}">
-                <a16:creationId xmlns:a16="http://schemas.microsoft.com/office/drawing/2014/main" id="{144EAB9C-974C-404B-991D-ABE2525A3C84}"/>
+                <a16:creationId xmlns:a16="http://schemas.microsoft.com/office/drawing/2014/main" id="{057AE3F8-3BF9-44E3-82BD-9295087F22C4}"/>
               </a:ext>
             </a:extLst>
           </p:cNvPr>
@@ -25529,7 +25311,7 @@
           <p:cNvPr id="23" name="">
             <a:extLst xmlns:a="http://schemas.openxmlformats.org/drawingml/2006/main">
               <a:ext uri="{FF2B5EF4-FFF2-40B4-BE49-F238E27FC236}">
-                <a16:creationId xmlns:a16="http://schemas.microsoft.com/office/drawing/2014/main" id="{B6C23408-04F5-4C1A-B034-DE4E1434FC00}"/>
+                <a16:creationId xmlns:a16="http://schemas.microsoft.com/office/drawing/2014/main" id="{65C01244-1A2E-4E1F-9FCE-F9B2AF623611}"/>
               </a:ext>
             </a:extLst>
           </p:cNvPr>
@@ -25593,7 +25375,7 @@
           <p:cNvPr id="24" name="">
             <a:extLst xmlns:a="http://schemas.openxmlformats.org/drawingml/2006/main">
               <a:ext uri="{FF2B5EF4-FFF2-40B4-BE49-F238E27FC236}">
-                <a16:creationId xmlns:a16="http://schemas.microsoft.com/office/drawing/2014/main" id="{C3A077DA-C3A9-4324-92C7-2CFA006EF60D}"/>
+                <a16:creationId xmlns:a16="http://schemas.microsoft.com/office/drawing/2014/main" id="{F75DDD97-1D36-4B92-B0B5-12C663D8A008}"/>
               </a:ext>
             </a:extLst>
           </p:cNvPr>
@@ -25653,7 +25435,7 @@
     </p:spTree>
     <p:extLst>
       <p:ext uri="{BB962C8B-B14F-4D97-AF65-F5344CB8AC3E}">
-        <p14:creationId xmlns:p14="http://schemas.microsoft.com/office/powerpoint/2010/main" val="1889346797"/>
+        <p14:creationId xmlns:p14="http://schemas.microsoft.com/office/powerpoint/2010/main" val="2564505"/>
       </p:ext>
     </p:extLst>
   </p:cSld>
@@ -25684,7 +25466,7 @@
           <p:cNvPr id="1" name="">
             <a:extLst xmlns:a="http://schemas.openxmlformats.org/drawingml/2006/main">
               <a:ext uri="{FF2B5EF4-FFF2-40B4-BE49-F238E27FC236}">
-                <a16:creationId xmlns:a16="http://schemas.microsoft.com/office/drawing/2014/main" id="{8152E557-7ED7-41CC-B52B-F6EED16049BE}"/>
+                <a16:creationId xmlns:a16="http://schemas.microsoft.com/office/drawing/2014/main" id="{A017AD74-4755-4D60-82C8-D5AAFDD62F16}"/>
               </a:ext>
             </a:extLst>
           </p:cNvPr>
@@ -25719,7 +25501,7 @@
           <p:cNvPr id="2" name="">
             <a:extLst xmlns:a="http://schemas.openxmlformats.org/drawingml/2006/main">
               <a:ext uri="{FF2B5EF4-FFF2-40B4-BE49-F238E27FC236}">
-                <a16:creationId xmlns:a16="http://schemas.microsoft.com/office/drawing/2014/main" id="{6827C4BD-1D2D-4028-BB34-EEFC4FC8BF6F}"/>
+                <a16:creationId xmlns:a16="http://schemas.microsoft.com/office/drawing/2014/main" id="{7AEAB619-671C-4D24-94F0-76B8880ED48B}"/>
               </a:ext>
             </a:extLst>
           </p:cNvPr>
@@ -25783,7 +25565,7 @@
           <p:cNvPr id="3" name="">
             <a:extLst xmlns:a="http://schemas.openxmlformats.org/drawingml/2006/main">
               <a:ext uri="{FF2B5EF4-FFF2-40B4-BE49-F238E27FC236}">
-                <a16:creationId xmlns:a16="http://schemas.microsoft.com/office/drawing/2014/main" id="{9C802FD1-6961-4203-B067-C40A98B07D28}"/>
+                <a16:creationId xmlns:a16="http://schemas.microsoft.com/office/drawing/2014/main" id="{8F36B3C9-0306-4B94-98A4-1229A0E83C6E}"/>
               </a:ext>
             </a:extLst>
           </p:cNvPr>
@@ -25847,7 +25629,7 @@
           <p:cNvPr id="4" name="">
             <a:extLst xmlns:a="http://schemas.openxmlformats.org/drawingml/2006/main">
               <a:ext uri="{FF2B5EF4-FFF2-40B4-BE49-F238E27FC236}">
-                <a16:creationId xmlns:a16="http://schemas.microsoft.com/office/drawing/2014/main" id="{263C6A5C-0632-405C-8E4D-2EB4E70EC3C4}"/>
+                <a16:creationId xmlns:a16="http://schemas.microsoft.com/office/drawing/2014/main" id="{99DD1D64-E31B-472E-8395-F14A2A18CF5C}"/>
               </a:ext>
             </a:extLst>
           </p:cNvPr>
@@ -25911,7 +25693,7 @@
           <p:cNvPr id="5" name="">
             <a:extLst xmlns:a="http://schemas.openxmlformats.org/drawingml/2006/main">
               <a:ext uri="{FF2B5EF4-FFF2-40B4-BE49-F238E27FC236}">
-                <a16:creationId xmlns:a16="http://schemas.microsoft.com/office/drawing/2014/main" id="{3C7C1DDF-3559-4C3F-A27A-22DEFC72F6FF}"/>
+                <a16:creationId xmlns:a16="http://schemas.microsoft.com/office/drawing/2014/main" id="{898E3375-1CAD-4E93-AF2E-551F7CB767CA}"/>
               </a:ext>
             </a:extLst>
           </p:cNvPr>
@@ -25975,7 +25757,7 @@
           <p:cNvPr id="6" name="">
             <a:extLst xmlns:a="http://schemas.openxmlformats.org/drawingml/2006/main">
               <a:ext uri="{FF2B5EF4-FFF2-40B4-BE49-F238E27FC236}">
-                <a16:creationId xmlns:a16="http://schemas.microsoft.com/office/drawing/2014/main" id="{BBF6A636-9851-454E-8A80-A0DB9F953B4E}"/>
+                <a16:creationId xmlns:a16="http://schemas.microsoft.com/office/drawing/2014/main" id="{25D58041-6334-4B76-9A1C-3439A72A21AC}"/>
               </a:ext>
             </a:extLst>
           </p:cNvPr>
@@ -26008,7 +25790,7 @@
           <p:cNvPr id="7" name="">
             <a:extLst xmlns:a="http://schemas.openxmlformats.org/drawingml/2006/main">
               <a:ext uri="{FF2B5EF4-FFF2-40B4-BE49-F238E27FC236}">
-                <a16:creationId xmlns:a16="http://schemas.microsoft.com/office/drawing/2014/main" id="{5394E859-5C29-4BE8-9273-824DDDC00AA8}"/>
+                <a16:creationId xmlns:a16="http://schemas.microsoft.com/office/drawing/2014/main" id="{4FF5EDC6-F9ED-4C3A-A3C2-53772346E365}"/>
               </a:ext>
             </a:extLst>
           </p:cNvPr>
@@ -26043,7 +25825,7 @@
           <p:cNvPr id="8" name="">
             <a:extLst xmlns:a="http://schemas.openxmlformats.org/drawingml/2006/main">
               <a:ext uri="{FF2B5EF4-FFF2-40B4-BE49-F238E27FC236}">
-                <a16:creationId xmlns:a16="http://schemas.microsoft.com/office/drawing/2014/main" id="{6A78F9E6-CDD5-438F-B88B-36D50D667F5C}"/>
+                <a16:creationId xmlns:a16="http://schemas.microsoft.com/office/drawing/2014/main" id="{94A81369-5B34-479C-9502-DC04CABD3D7F}"/>
               </a:ext>
             </a:extLst>
           </p:cNvPr>
@@ -26107,7 +25889,7 @@
           <p:cNvPr id="9" name="">
             <a:extLst xmlns:a="http://schemas.openxmlformats.org/drawingml/2006/main">
               <a:ext uri="{FF2B5EF4-FFF2-40B4-BE49-F238E27FC236}">
-                <a16:creationId xmlns:a16="http://schemas.microsoft.com/office/drawing/2014/main" id="{F6C72368-30A4-495A-8529-C8D6C275F0B3}"/>
+                <a16:creationId xmlns:a16="http://schemas.microsoft.com/office/drawing/2014/main" id="{A6AE1F9D-76C6-4E0E-899A-8087F632DA43}"/>
               </a:ext>
             </a:extLst>
           </p:cNvPr>
@@ -26171,7 +25953,7 @@
           <p:cNvPr id="10" name="">
             <a:extLst xmlns:a="http://schemas.openxmlformats.org/drawingml/2006/main">
               <a:ext uri="{FF2B5EF4-FFF2-40B4-BE49-F238E27FC236}">
-                <a16:creationId xmlns:a16="http://schemas.microsoft.com/office/drawing/2014/main" id="{57A00C99-205E-4AA5-8BCA-A1B505C377DA}"/>
+                <a16:creationId xmlns:a16="http://schemas.microsoft.com/office/drawing/2014/main" id="{97D3C0A1-8E45-4CAA-9BA5-2A2865F66893}"/>
               </a:ext>
             </a:extLst>
           </p:cNvPr>
@@ -26204,7 +25986,7 @@
           <p:cNvPr id="11" name="">
             <a:extLst xmlns:a="http://schemas.openxmlformats.org/drawingml/2006/main">
               <a:ext uri="{FF2B5EF4-FFF2-40B4-BE49-F238E27FC236}">
-                <a16:creationId xmlns:a16="http://schemas.microsoft.com/office/drawing/2014/main" id="{6A51FE65-3274-44B2-AEFD-FCFC051858A0}"/>
+                <a16:creationId xmlns:a16="http://schemas.microsoft.com/office/drawing/2014/main" id="{7728B116-E4FF-40F4-9107-73C34ED9C5E8}"/>
               </a:ext>
             </a:extLst>
           </p:cNvPr>
@@ -26239,7 +26021,7 @@
           <p:cNvPr id="12" name="">
             <a:extLst xmlns:a="http://schemas.openxmlformats.org/drawingml/2006/main">
               <a:ext uri="{FF2B5EF4-FFF2-40B4-BE49-F238E27FC236}">
-                <a16:creationId xmlns:a16="http://schemas.microsoft.com/office/drawing/2014/main" id="{D7286161-EDCA-4D85-AA3E-CE13E3EFDF1F}"/>
+                <a16:creationId xmlns:a16="http://schemas.microsoft.com/office/drawing/2014/main" id="{17CCCECE-C08E-41D7-937F-A0B85ECF1720}"/>
               </a:ext>
             </a:extLst>
           </p:cNvPr>
@@ -26303,7 +26085,7 @@
           <p:cNvPr id="13" name="">
             <a:extLst xmlns:a="http://schemas.openxmlformats.org/drawingml/2006/main">
               <a:ext uri="{FF2B5EF4-FFF2-40B4-BE49-F238E27FC236}">
-                <a16:creationId xmlns:a16="http://schemas.microsoft.com/office/drawing/2014/main" id="{6B5577FB-5305-4C64-8E70-ECF9E736D6D8}"/>
+                <a16:creationId xmlns:a16="http://schemas.microsoft.com/office/drawing/2014/main" id="{E6FCD3A5-C07A-466E-9D02-A1F601ADA3FE}"/>
               </a:ext>
             </a:extLst>
           </p:cNvPr>
@@ -26367,7 +26149,7 @@
           <p:cNvPr id="14" name="">
             <a:extLst xmlns:a="http://schemas.openxmlformats.org/drawingml/2006/main">
               <a:ext uri="{FF2B5EF4-FFF2-40B4-BE49-F238E27FC236}">
-                <a16:creationId xmlns:a16="http://schemas.microsoft.com/office/drawing/2014/main" id="{B57FC128-1588-4272-A5B2-1C0FD7C49DD5}"/>
+                <a16:creationId xmlns:a16="http://schemas.microsoft.com/office/drawing/2014/main" id="{BC4632F9-9887-4264-A0D0-21C73C7861B9}"/>
               </a:ext>
             </a:extLst>
           </p:cNvPr>
@@ -26400,7 +26182,7 @@
           <p:cNvPr id="15" name="">
             <a:extLst xmlns:a="http://schemas.openxmlformats.org/drawingml/2006/main">
               <a:ext uri="{FF2B5EF4-FFF2-40B4-BE49-F238E27FC236}">
-                <a16:creationId xmlns:a16="http://schemas.microsoft.com/office/drawing/2014/main" id="{55011402-3309-46F4-A8E9-376F36C84E35}"/>
+                <a16:creationId xmlns:a16="http://schemas.microsoft.com/office/drawing/2014/main" id="{06E655B1-C5BE-47D8-B96A-D40636A5019E}"/>
               </a:ext>
             </a:extLst>
           </p:cNvPr>
@@ -26435,7 +26217,7 @@
           <p:cNvPr id="16" name="">
             <a:extLst xmlns:a="http://schemas.openxmlformats.org/drawingml/2006/main">
               <a:ext uri="{FF2B5EF4-FFF2-40B4-BE49-F238E27FC236}">
-                <a16:creationId xmlns:a16="http://schemas.microsoft.com/office/drawing/2014/main" id="{B43616A2-46FF-49FD-A940-E4E954AB0D08}"/>
+                <a16:creationId xmlns:a16="http://schemas.microsoft.com/office/drawing/2014/main" id="{C4C81C4C-8A63-43BB-BDC9-66BA8B09317A}"/>
               </a:ext>
             </a:extLst>
           </p:cNvPr>
@@ -26499,7 +26281,7 @@
           <p:cNvPr id="17" name="">
             <a:extLst xmlns:a="http://schemas.openxmlformats.org/drawingml/2006/main">
               <a:ext uri="{FF2B5EF4-FFF2-40B4-BE49-F238E27FC236}">
-                <a16:creationId xmlns:a16="http://schemas.microsoft.com/office/drawing/2014/main" id="{0A7AD01A-D0A4-4C8A-AC82-11809F32D6FD}"/>
+                <a16:creationId xmlns:a16="http://schemas.microsoft.com/office/drawing/2014/main" id="{A0F7B64F-93FD-4413-AAB1-FE4EC01EA75C}"/>
               </a:ext>
             </a:extLst>
           </p:cNvPr>
@@ -26563,7 +26345,7 @@
           <p:cNvPr id="18" name="">
             <a:extLst xmlns:a="http://schemas.openxmlformats.org/drawingml/2006/main">
               <a:ext uri="{FF2B5EF4-FFF2-40B4-BE49-F238E27FC236}">
-                <a16:creationId xmlns:a16="http://schemas.microsoft.com/office/drawing/2014/main" id="{885D44CD-C6B1-42D8-BAD2-61D56C4A719B}"/>
+                <a16:creationId xmlns:a16="http://schemas.microsoft.com/office/drawing/2014/main" id="{0559BAE8-6200-45A7-8765-511137B50CAD}"/>
               </a:ext>
             </a:extLst>
           </p:cNvPr>
@@ -26598,7 +26380,7 @@
           <p:cNvPr id="19" name="">
             <a:extLst xmlns:a="http://schemas.openxmlformats.org/drawingml/2006/main">
               <a:ext uri="{FF2B5EF4-FFF2-40B4-BE49-F238E27FC236}">
-                <a16:creationId xmlns:a16="http://schemas.microsoft.com/office/drawing/2014/main" id="{57F2FEBE-A96A-42DF-BC53-230022E8F769}"/>
+                <a16:creationId xmlns:a16="http://schemas.microsoft.com/office/drawing/2014/main" id="{770F66E6-73F0-4B71-930C-8E9A291FCEA9}"/>
               </a:ext>
             </a:extLst>
           </p:cNvPr>
@@ -26662,7 +26444,7 @@
           <p:cNvPr id="20" name="">
             <a:extLst xmlns:a="http://schemas.openxmlformats.org/drawingml/2006/main">
               <a:ext uri="{FF2B5EF4-FFF2-40B4-BE49-F238E27FC236}">
-                <a16:creationId xmlns:a16="http://schemas.microsoft.com/office/drawing/2014/main" id="{C0B9AE5A-840B-4174-BE60-30E64FCF0467}"/>
+                <a16:creationId xmlns:a16="http://schemas.microsoft.com/office/drawing/2014/main" id="{DB95D475-FA97-482F-92E0-4F737AE5DF0D}"/>
               </a:ext>
             </a:extLst>
           </p:cNvPr>
@@ -26697,7 +26479,7 @@
           <p:cNvPr id="21" name="">
             <a:extLst xmlns:a="http://schemas.openxmlformats.org/drawingml/2006/main">
               <a:ext uri="{FF2B5EF4-FFF2-40B4-BE49-F238E27FC236}">
-                <a16:creationId xmlns:a16="http://schemas.microsoft.com/office/drawing/2014/main" id="{FA012815-D764-4BBE-B7C6-DA29B8B88E45}"/>
+                <a16:creationId xmlns:a16="http://schemas.microsoft.com/office/drawing/2014/main" id="{6D09FBD1-B7EF-45A3-BED5-4AE72B4E0343}"/>
               </a:ext>
             </a:extLst>
           </p:cNvPr>
@@ -26759,7 +26541,7 @@
     </p:spTree>
     <p:extLst>
       <p:ext uri="{BB962C8B-B14F-4D97-AF65-F5344CB8AC3E}">
-        <p14:creationId xmlns:p14="http://schemas.microsoft.com/office/powerpoint/2010/main" val="2071660063"/>
+        <p14:creationId xmlns:p14="http://schemas.microsoft.com/office/powerpoint/2010/main" val="1148587494"/>
       </p:ext>
     </p:extLst>
   </p:cSld>

--- a/showtime-2/final/biglab-b-final-yang-kaisen.pptx
+++ b/showtime-2/final/biglab-b-final-yang-kaisen.pptx
@@ -2,30 +2,31 @@
 <file path=ppt/presentation.xml><?xml version="1.0" encoding="utf-8"?>
 <p:presentation xmlns:p="http://schemas.openxmlformats.org/presentationml/2006/main">
   <p:sldMasterIdLst>
-    <p:sldMasterId xmlns:r="http://schemas.openxmlformats.org/officeDocument/2006/relationships" id="2147483648" r:id="R1f9a1193bb784848"/>
+    <p:sldMasterId xmlns:r="http://schemas.openxmlformats.org/officeDocument/2006/relationships" id="2147483648" r:id="Ra0b4bf261cda4457"/>
   </p:sldMasterIdLst>
   <p:notesMasterIdLst>
-    <p:notesMasterId xmlns:r="http://schemas.openxmlformats.org/officeDocument/2006/relationships" r:id="R43d0a552cd404b0e"/>
+    <p:notesMasterId xmlns:r="http://schemas.openxmlformats.org/officeDocument/2006/relationships" r:id="R31ff26221fa7433f"/>
   </p:notesMasterIdLst>
   <p:sldIdLst>
-    <p:sldId xmlns:r="http://schemas.openxmlformats.org/officeDocument/2006/relationships" id="256" r:id="R7ed1ecba95a64284"/>
-    <p:sldId xmlns:r="http://schemas.openxmlformats.org/officeDocument/2006/relationships" id="257" r:id="Rc6252496effd40f0"/>
-    <p:sldId xmlns:r="http://schemas.openxmlformats.org/officeDocument/2006/relationships" id="258" r:id="Rf07640a33de94eda"/>
-    <p:sldId xmlns:r="http://schemas.openxmlformats.org/officeDocument/2006/relationships" id="259" r:id="Rfd3b665c0cdd4fd8"/>
-    <p:sldId xmlns:r="http://schemas.openxmlformats.org/officeDocument/2006/relationships" id="260" r:id="R7f161ba273be498a"/>
-    <p:sldId xmlns:r="http://schemas.openxmlformats.org/officeDocument/2006/relationships" id="261" r:id="Rbe04f1dca9de4d40"/>
-    <p:sldId xmlns:r="http://schemas.openxmlformats.org/officeDocument/2006/relationships" id="262" r:id="R1a739e9c126c429a"/>
-    <p:sldId xmlns:r="http://schemas.openxmlformats.org/officeDocument/2006/relationships" id="263" r:id="R3094795fdc454276"/>
-    <p:sldId xmlns:r="http://schemas.openxmlformats.org/officeDocument/2006/relationships" id="264" r:id="R421c6a0aa56845c5"/>
-    <p:sldId xmlns:r="http://schemas.openxmlformats.org/officeDocument/2006/relationships" id="265" r:id="Rc9c525bf95b94851"/>
-    <p:sldId xmlns:r="http://schemas.openxmlformats.org/officeDocument/2006/relationships" id="266" r:id="R73f67351a2904fb9"/>
-    <p:sldId xmlns:r="http://schemas.openxmlformats.org/officeDocument/2006/relationships" id="267" r:id="Rbe660fffc68c4d96"/>
-    <p:sldId xmlns:r="http://schemas.openxmlformats.org/officeDocument/2006/relationships" id="268" r:id="Rebf38849ef6642bc"/>
-    <p:sldId xmlns:r="http://schemas.openxmlformats.org/officeDocument/2006/relationships" id="269" r:id="Rb08d27d19bd541b6"/>
-    <p:sldId xmlns:r="http://schemas.openxmlformats.org/officeDocument/2006/relationships" id="270" r:id="R82e3f2926c33403d"/>
-    <p:sldId xmlns:r="http://schemas.openxmlformats.org/officeDocument/2006/relationships" id="271" r:id="R7213a6b12a8a48ca"/>
-    <p:sldId xmlns:r="http://schemas.openxmlformats.org/officeDocument/2006/relationships" id="272" r:id="R600c5a905b8b44a4"/>
-    <p:sldId xmlns:r="http://schemas.openxmlformats.org/officeDocument/2006/relationships" id="273" r:id="R4dd17e02c54744ac"/>
+    <p:sldId xmlns:r="http://schemas.openxmlformats.org/officeDocument/2006/relationships" id="256" r:id="R631345bf232f4289"/>
+    <p:sldId xmlns:r="http://schemas.openxmlformats.org/officeDocument/2006/relationships" id="257" r:id="R8b5ac237418b4cd8"/>
+    <p:sldId xmlns:r="http://schemas.openxmlformats.org/officeDocument/2006/relationships" id="258" r:id="R643ca2d3f1d54010"/>
+    <p:sldId xmlns:r="http://schemas.openxmlformats.org/officeDocument/2006/relationships" id="259" r:id="Rda878ddd9dcf4ef9"/>
+    <p:sldId xmlns:r="http://schemas.openxmlformats.org/officeDocument/2006/relationships" id="260" r:id="R06684192373d4321"/>
+    <p:sldId xmlns:r="http://schemas.openxmlformats.org/officeDocument/2006/relationships" id="261" r:id="R4612bbeaac654af0"/>
+    <p:sldId xmlns:r="http://schemas.openxmlformats.org/officeDocument/2006/relationships" id="262" r:id="Re8cc80571a294b0e"/>
+    <p:sldId xmlns:r="http://schemas.openxmlformats.org/officeDocument/2006/relationships" id="263" r:id="Rc7df5581c29d4c58"/>
+    <p:sldId xmlns:r="http://schemas.openxmlformats.org/officeDocument/2006/relationships" id="264" r:id="R55d3975bea8544da"/>
+    <p:sldId xmlns:r="http://schemas.openxmlformats.org/officeDocument/2006/relationships" id="265" r:id="Rc5b2451538d343ff"/>
+    <p:sldId xmlns:r="http://schemas.openxmlformats.org/officeDocument/2006/relationships" id="266" r:id="Rd9235e4037644ccc"/>
+    <p:sldId xmlns:r="http://schemas.openxmlformats.org/officeDocument/2006/relationships" id="267" r:id="R83ad3dc73b5b4817"/>
+    <p:sldId xmlns:r="http://schemas.openxmlformats.org/officeDocument/2006/relationships" id="268" r:id="R5a89687c60714497"/>
+    <p:sldId xmlns:r="http://schemas.openxmlformats.org/officeDocument/2006/relationships" id="269" r:id="R22e63ea31e954d27"/>
+    <p:sldId xmlns:r="http://schemas.openxmlformats.org/officeDocument/2006/relationships" id="270" r:id="R62138492b2eb4b53"/>
+    <p:sldId xmlns:r="http://schemas.openxmlformats.org/officeDocument/2006/relationships" id="271" r:id="R89d63869be2b42b3"/>
+    <p:sldId xmlns:r="http://schemas.openxmlformats.org/officeDocument/2006/relationships" id="272" r:id="Re8c7ef705d5c4719"/>
+    <p:sldId xmlns:r="http://schemas.openxmlformats.org/officeDocument/2006/relationships" id="273" r:id="R209e4823d5f7422e"/>
+    <p:sldId xmlns:r="http://schemas.openxmlformats.org/officeDocument/2006/relationships" id="274" r:id="R7accab2e33394895"/>
   </p:sldIdLst>
   <p:sldSz cx="12192000" cy="6858000"/>
   <p:notesSz cx="6858000" cy="9144000"/>
@@ -1128,6 +1129,72 @@
 </p:notes>
 </file>
 
+<file path=ppt/notesSlides/notesSlide19.xml><?xml version="1.0" encoding="utf-8"?>
+<p:notes xmlns:p="http://schemas.openxmlformats.org/presentationml/2006/main">
+  <p:cSld>
+    <p:spTree>
+      <p:nvGrpSpPr>
+        <p:cNvPr id="1" name=""/>
+        <p:cNvGrpSpPr/>
+        <p:nvPr/>
+      </p:nvGrpSpPr>
+      <p:grpSpPr>
+        <a:xfrm xmlns:a="http://schemas.openxmlformats.org/drawingml/2006/main"/>
+      </p:grpSpPr>
+      <p:sp>
+        <p:nvSpPr>
+          <p:cNvPr id="2" name="Slide Image Placeholder 1"/>
+          <p:cNvSpPr>
+            <a:spLocks xmlns:a="http://schemas.openxmlformats.org/drawingml/2006/main" noGrp="1"/>
+          </p:cNvSpPr>
+          <p:nvPr>
+            <p:ph type="sldImg" idx="0"/>
+          </p:nvPr>
+        </p:nvSpPr>
+        <p:spPr/>
+      </p:sp>
+      <p:sp>
+        <p:nvSpPr>
+          <p:cNvPr id="3" name="Notes Placeholder 2"/>
+          <p:cNvSpPr>
+            <a:spLocks xmlns:a="http://schemas.openxmlformats.org/drawingml/2006/main" noGrp="1"/>
+          </p:cNvSpPr>
+          <p:nvPr>
+            <p:ph type="body" idx="1"/>
+          </p:nvPr>
+        </p:nvSpPr>
+        <p:spPr/>
+        <p:txBody>
+          <a:bodyPr xmlns:a="http://schemas.openxmlformats.org/drawingml/2006/main"/>
+          <a:lstStyle xmlns:a="http://schemas.openxmlformats.org/drawingml/2006/main"/>
+          <a:p xmlns:a="http://schemas.openxmlformats.org/drawingml/2006/main"/>
+        </p:txBody>
+      </p:sp>
+      <p:sp>
+        <p:nvSpPr>
+          <p:cNvPr id="4" name="Slide Number Placeholder 3"/>
+          <p:cNvSpPr>
+            <a:spLocks xmlns:a="http://schemas.openxmlformats.org/drawingml/2006/main" noGrp="1"/>
+          </p:cNvSpPr>
+          <p:nvPr>
+            <p:ph type="sldNum" idx="5"/>
+          </p:nvPr>
+        </p:nvSpPr>
+        <p:spPr/>
+        <p:txBody>
+          <a:bodyPr xmlns:a="http://schemas.openxmlformats.org/drawingml/2006/main"/>
+          <a:lstStyle xmlns:a="http://schemas.openxmlformats.org/drawingml/2006/main"/>
+          <a:p xmlns:a="http://schemas.openxmlformats.org/drawingml/2006/main"/>
+        </p:txBody>
+      </p:sp>
+    </p:spTree>
+  </p:cSld>
+  <p:clrMapOvr>
+    <a:masterClrMapping xmlns:a="http://schemas.openxmlformats.org/drawingml/2006/main"/>
+  </p:clrMapOvr>
+</p:notes>
+</file>
+
 <file path=ppt/notesSlides/notesSlide2.xml><?xml version="1.0" encoding="utf-8"?>
 <p:notes xmlns:p="http://schemas.openxmlformats.org/presentationml/2006/main">
   <p:cSld>
@@ -1694,7 +1761,7 @@
   </p:cSld>
   <p:clrMap bg1="lt1" tx1="dk1" bg2="lt2" tx2="dk2" accent1="accent1" accent2="accent2" accent3="accent3" accent4="accent4" accent5="accent5" accent6="accent6" hlink="hlink" folHlink="folHlink"/>
   <p:sldLayoutIdLst>
-    <p:sldLayoutId xmlns:r="http://schemas.openxmlformats.org/officeDocument/2006/relationships" id="2147483649" r:id="R32739f9706c3487e"/>
+    <p:sldLayoutId xmlns:r="http://schemas.openxmlformats.org/officeDocument/2006/relationships" id="2147483649" r:id="Raf7d7d0051974f7b"/>
   </p:sldLayoutIdLst>
   <p:txStyles>
     <p:titleStyle>
@@ -2000,7 +2067,7 @@
           <p:cNvPr id="1" name="">
             <a:extLst xmlns:a="http://schemas.openxmlformats.org/drawingml/2006/main">
               <a:ext uri="{FF2B5EF4-FFF2-40B4-BE49-F238E27FC236}">
-                <a16:creationId xmlns:a16="http://schemas.microsoft.com/office/drawing/2014/main" id="{091B41B5-FD6A-49E8-8DCB-BEC2C4FF36AF}"/>
+                <a16:creationId xmlns:a16="http://schemas.microsoft.com/office/drawing/2014/main" id="{A7B3A718-76BD-428E-9D4B-20DCEDD17D69}"/>
               </a:ext>
             </a:extLst>
           </p:cNvPr>
@@ -2035,7 +2102,7 @@
           <p:cNvPr id="2" name="">
             <a:extLst xmlns:a="http://schemas.openxmlformats.org/drawingml/2006/main">
               <a:ext uri="{FF2B5EF4-FFF2-40B4-BE49-F238E27FC236}">
-                <a16:creationId xmlns:a16="http://schemas.microsoft.com/office/drawing/2014/main" id="{C12CAE91-5D53-4931-9D4B-821794AE437C}"/>
+                <a16:creationId xmlns:a16="http://schemas.microsoft.com/office/drawing/2014/main" id="{94864689-FD06-40D5-AAD8-F114C1703C2B}"/>
               </a:ext>
             </a:extLst>
           </p:cNvPr>
@@ -2099,7 +2166,7 @@
           <p:cNvPr id="3" name="">
             <a:extLst xmlns:a="http://schemas.openxmlformats.org/drawingml/2006/main">
               <a:ext uri="{FF2B5EF4-FFF2-40B4-BE49-F238E27FC236}">
-                <a16:creationId xmlns:a16="http://schemas.microsoft.com/office/drawing/2014/main" id="{8B4215EF-6D2A-4DC5-8ED1-8C32E78FD380}"/>
+                <a16:creationId xmlns:a16="http://schemas.microsoft.com/office/drawing/2014/main" id="{57C7DABF-88B7-4C04-94C3-06220C3BC740}"/>
               </a:ext>
             </a:extLst>
           </p:cNvPr>
@@ -2163,7 +2230,7 @@
           <p:cNvPr id="4" name="">
             <a:extLst xmlns:a="http://schemas.openxmlformats.org/drawingml/2006/main">
               <a:ext uri="{FF2B5EF4-FFF2-40B4-BE49-F238E27FC236}">
-                <a16:creationId xmlns:a16="http://schemas.microsoft.com/office/drawing/2014/main" id="{A8D71BEA-5F18-4375-B1DB-26EF777E0A9F}"/>
+                <a16:creationId xmlns:a16="http://schemas.microsoft.com/office/drawing/2014/main" id="{23D640AE-AC2D-4B2E-9FE4-A702A1603EB2}"/>
               </a:ext>
             </a:extLst>
           </p:cNvPr>
@@ -2227,7 +2294,7 @@
           <p:cNvPr id="5" name="">
             <a:extLst xmlns:a="http://schemas.openxmlformats.org/drawingml/2006/main">
               <a:ext uri="{FF2B5EF4-FFF2-40B4-BE49-F238E27FC236}">
-                <a16:creationId xmlns:a16="http://schemas.microsoft.com/office/drawing/2014/main" id="{1F51B4D1-4986-4104-AF68-0E9DAB3571C2}"/>
+                <a16:creationId xmlns:a16="http://schemas.microsoft.com/office/drawing/2014/main" id="{FFC06A77-F9D0-4562-8AD7-FFDEDD752C83}"/>
               </a:ext>
             </a:extLst>
           </p:cNvPr>
@@ -2291,7 +2358,7 @@
           <p:cNvPr id="6" name="">
             <a:extLst xmlns:a="http://schemas.openxmlformats.org/drawingml/2006/main">
               <a:ext uri="{FF2B5EF4-FFF2-40B4-BE49-F238E27FC236}">
-                <a16:creationId xmlns:a16="http://schemas.microsoft.com/office/drawing/2014/main" id="{FCF1F638-9CAA-4C5B-B281-20469F5BA3E3}"/>
+                <a16:creationId xmlns:a16="http://schemas.microsoft.com/office/drawing/2014/main" id="{A011F025-D124-4A89-8C18-CB8C5406FA83}"/>
               </a:ext>
             </a:extLst>
           </p:cNvPr>
@@ -2326,7 +2393,7 @@
           <p:cNvPr id="7" name="">
             <a:extLst xmlns:a="http://schemas.openxmlformats.org/drawingml/2006/main">
               <a:ext uri="{FF2B5EF4-FFF2-40B4-BE49-F238E27FC236}">
-                <a16:creationId xmlns:a16="http://schemas.microsoft.com/office/drawing/2014/main" id="{3857AB8C-E9FE-4004-AEEB-8DDA887C9178}"/>
+                <a16:creationId xmlns:a16="http://schemas.microsoft.com/office/drawing/2014/main" id="{FF7ED068-C007-44C9-A1C8-D2AD8A19BBA9}"/>
               </a:ext>
             </a:extLst>
           </p:cNvPr>
@@ -2390,7 +2457,7 @@
           <p:cNvPr id="8" name="">
             <a:extLst xmlns:a="http://schemas.openxmlformats.org/drawingml/2006/main">
               <a:ext uri="{FF2B5EF4-FFF2-40B4-BE49-F238E27FC236}">
-                <a16:creationId xmlns:a16="http://schemas.microsoft.com/office/drawing/2014/main" id="{F85CEC34-0CD2-476E-A1C0-E6F3EF5CB88B}"/>
+                <a16:creationId xmlns:a16="http://schemas.microsoft.com/office/drawing/2014/main" id="{5FF3F255-60F5-4F70-961F-F130D489479B}"/>
               </a:ext>
             </a:extLst>
           </p:cNvPr>
@@ -2425,7 +2492,7 @@
           <p:cNvPr id="9" name="">
             <a:extLst xmlns:a="http://schemas.openxmlformats.org/drawingml/2006/main">
               <a:ext uri="{FF2B5EF4-FFF2-40B4-BE49-F238E27FC236}">
-                <a16:creationId xmlns:a16="http://schemas.microsoft.com/office/drawing/2014/main" id="{4B57DAA7-C9CD-46C9-B926-874E53F958F6}"/>
+                <a16:creationId xmlns:a16="http://schemas.microsoft.com/office/drawing/2014/main" id="{BD96B6AD-89F7-4AE6-94F2-2A9406432829}"/>
               </a:ext>
             </a:extLst>
           </p:cNvPr>
@@ -2489,7 +2556,7 @@
           <p:cNvPr id="10" name="">
             <a:extLst xmlns:a="http://schemas.openxmlformats.org/drawingml/2006/main">
               <a:ext uri="{FF2B5EF4-FFF2-40B4-BE49-F238E27FC236}">
-                <a16:creationId xmlns:a16="http://schemas.microsoft.com/office/drawing/2014/main" id="{F8197100-8F57-4404-A363-81818CC6E6BD}"/>
+                <a16:creationId xmlns:a16="http://schemas.microsoft.com/office/drawing/2014/main" id="{90F3FAD5-CACB-485C-AFA2-A42B48FC2B77}"/>
               </a:ext>
             </a:extLst>
           </p:cNvPr>
@@ -2524,7 +2591,7 @@
           <p:cNvPr id="11" name="">
             <a:extLst xmlns:a="http://schemas.openxmlformats.org/drawingml/2006/main">
               <a:ext uri="{FF2B5EF4-FFF2-40B4-BE49-F238E27FC236}">
-                <a16:creationId xmlns:a16="http://schemas.microsoft.com/office/drawing/2014/main" id="{3B55D87A-8DBB-4B88-81BB-6C3D07989E84}"/>
+                <a16:creationId xmlns:a16="http://schemas.microsoft.com/office/drawing/2014/main" id="{EA72C90B-D074-49AD-8514-4C565AB8DC95}"/>
               </a:ext>
             </a:extLst>
           </p:cNvPr>
@@ -2588,7 +2655,7 @@
           <p:cNvPr id="12" name="">
             <a:extLst xmlns:a="http://schemas.openxmlformats.org/drawingml/2006/main">
               <a:ext uri="{FF2B5EF4-FFF2-40B4-BE49-F238E27FC236}">
-                <a16:creationId xmlns:a16="http://schemas.microsoft.com/office/drawing/2014/main" id="{7A4D3D61-BD5A-4B7E-97AB-677E82810A3F}"/>
+                <a16:creationId xmlns:a16="http://schemas.microsoft.com/office/drawing/2014/main" id="{B5B4ACC0-F094-49E3-A541-F80D41B6E305}"/>
               </a:ext>
             </a:extLst>
           </p:cNvPr>
@@ -2621,7 +2688,7 @@
           <p:cNvPr id="13" name="">
             <a:extLst xmlns:a="http://schemas.openxmlformats.org/drawingml/2006/main">
               <a:ext uri="{FF2B5EF4-FFF2-40B4-BE49-F238E27FC236}">
-                <a16:creationId xmlns:a16="http://schemas.microsoft.com/office/drawing/2014/main" id="{FF5F2F55-F938-427D-B5C1-42313ACDA661}"/>
+                <a16:creationId xmlns:a16="http://schemas.microsoft.com/office/drawing/2014/main" id="{EF13EB02-3205-410E-B36F-73B3B86B873A}"/>
               </a:ext>
             </a:extLst>
           </p:cNvPr>
@@ -2685,7 +2752,7 @@
           <p:cNvPr id="14" name="">
             <a:extLst xmlns:a="http://schemas.openxmlformats.org/drawingml/2006/main">
               <a:ext uri="{FF2B5EF4-FFF2-40B4-BE49-F238E27FC236}">
-                <a16:creationId xmlns:a16="http://schemas.microsoft.com/office/drawing/2014/main" id="{638F26A3-2F6E-46FC-9C92-4D7A6050B8D0}"/>
+                <a16:creationId xmlns:a16="http://schemas.microsoft.com/office/drawing/2014/main" id="{95F49522-AA32-447D-86F8-89CE0AB6D8B6}"/>
               </a:ext>
             </a:extLst>
           </p:cNvPr>
@@ -2816,7 +2883,7 @@
     </p:spTree>
     <p:extLst>
       <p:ext uri="{BB962C8B-B14F-4D97-AF65-F5344CB8AC3E}">
-        <p14:creationId xmlns:p14="http://schemas.microsoft.com/office/powerpoint/2010/main" val="1664206819"/>
+        <p14:creationId xmlns:p14="http://schemas.microsoft.com/office/powerpoint/2010/main" val="1000153555"/>
       </p:ext>
     </p:extLst>
   </p:cSld>
@@ -2847,7 +2914,7 @@
           <p:cNvPr id="1" name="">
             <a:extLst xmlns:a="http://schemas.openxmlformats.org/drawingml/2006/main">
               <a:ext uri="{FF2B5EF4-FFF2-40B4-BE49-F238E27FC236}">
-                <a16:creationId xmlns:a16="http://schemas.microsoft.com/office/drawing/2014/main" id="{D78192C2-B0D5-4AF5-9CF4-873034CC94D2}"/>
+                <a16:creationId xmlns:a16="http://schemas.microsoft.com/office/drawing/2014/main" id="{28694C74-31B8-4AD5-AF81-71402151903A}"/>
               </a:ext>
             </a:extLst>
           </p:cNvPr>
@@ -2882,7 +2949,7 @@
           <p:cNvPr id="2" name="">
             <a:extLst xmlns:a="http://schemas.openxmlformats.org/drawingml/2006/main">
               <a:ext uri="{FF2B5EF4-FFF2-40B4-BE49-F238E27FC236}">
-                <a16:creationId xmlns:a16="http://schemas.microsoft.com/office/drawing/2014/main" id="{39ADFDD2-4F93-4CEA-9C9B-2F188BE5C5B7}"/>
+                <a16:creationId xmlns:a16="http://schemas.microsoft.com/office/drawing/2014/main" id="{A8DB2C54-4374-4782-B411-B22784B1802B}"/>
               </a:ext>
             </a:extLst>
           </p:cNvPr>
@@ -2946,7 +3013,7 @@
           <p:cNvPr id="3" name="">
             <a:extLst xmlns:a="http://schemas.openxmlformats.org/drawingml/2006/main">
               <a:ext uri="{FF2B5EF4-FFF2-40B4-BE49-F238E27FC236}">
-                <a16:creationId xmlns:a16="http://schemas.microsoft.com/office/drawing/2014/main" id="{0B5D77F7-8DCC-4F1B-B81E-5004D2EE15D2}"/>
+                <a16:creationId xmlns:a16="http://schemas.microsoft.com/office/drawing/2014/main" id="{1133223F-45CB-4BAC-8750-2C8159559819}"/>
               </a:ext>
             </a:extLst>
           </p:cNvPr>
@@ -3010,7 +3077,7 @@
           <p:cNvPr id="4" name="">
             <a:extLst xmlns:a="http://schemas.openxmlformats.org/drawingml/2006/main">
               <a:ext uri="{FF2B5EF4-FFF2-40B4-BE49-F238E27FC236}">
-                <a16:creationId xmlns:a16="http://schemas.microsoft.com/office/drawing/2014/main" id="{B1B7C298-111E-4E14-936B-84B6D25E6A25}"/>
+                <a16:creationId xmlns:a16="http://schemas.microsoft.com/office/drawing/2014/main" id="{8A724F07-9A2C-4CF0-BBB4-B221D33DDC7F}"/>
               </a:ext>
             </a:extLst>
           </p:cNvPr>
@@ -3074,7 +3141,7 @@
           <p:cNvPr id="5" name="">
             <a:extLst xmlns:a="http://schemas.openxmlformats.org/drawingml/2006/main">
               <a:ext uri="{FF2B5EF4-FFF2-40B4-BE49-F238E27FC236}">
-                <a16:creationId xmlns:a16="http://schemas.microsoft.com/office/drawing/2014/main" id="{EEC21961-5322-47BD-8CBF-DAE884C87F5E}"/>
+                <a16:creationId xmlns:a16="http://schemas.microsoft.com/office/drawing/2014/main" id="{2095044B-7A4A-4772-B3DF-FBDFBCCD7480}"/>
               </a:ext>
             </a:extLst>
           </p:cNvPr>
@@ -3138,7 +3205,7 @@
           <p:cNvPr id="6" name="">
             <a:extLst xmlns:a="http://schemas.openxmlformats.org/drawingml/2006/main">
               <a:ext uri="{FF2B5EF4-FFF2-40B4-BE49-F238E27FC236}">
-                <a16:creationId xmlns:a16="http://schemas.microsoft.com/office/drawing/2014/main" id="{B78004A5-8556-4B02-9D6B-C4D57907DC9A}"/>
+                <a16:creationId xmlns:a16="http://schemas.microsoft.com/office/drawing/2014/main" id="{A03ACD6A-3BEE-4957-95D8-EB06678042A2}"/>
               </a:ext>
             </a:extLst>
           </p:cNvPr>
@@ -3171,7 +3238,7 @@
           <p:cNvPr id="7" name="">
             <a:extLst xmlns:a="http://schemas.openxmlformats.org/drawingml/2006/main">
               <a:ext uri="{FF2B5EF4-FFF2-40B4-BE49-F238E27FC236}">
-                <a16:creationId xmlns:a16="http://schemas.microsoft.com/office/drawing/2014/main" id="{D393C0BC-DA29-44DE-84C9-874B58D86481}"/>
+                <a16:creationId xmlns:a16="http://schemas.microsoft.com/office/drawing/2014/main" id="{2DF83696-D8ED-44F8-B896-B93A3AA175E3}"/>
               </a:ext>
             </a:extLst>
           </p:cNvPr>
@@ -3206,7 +3273,7 @@
           <p:cNvPr id="8" name="">
             <a:extLst xmlns:a="http://schemas.openxmlformats.org/drawingml/2006/main">
               <a:ext uri="{FF2B5EF4-FFF2-40B4-BE49-F238E27FC236}">
-                <a16:creationId xmlns:a16="http://schemas.microsoft.com/office/drawing/2014/main" id="{AFA415DD-C448-40E3-96A4-E4B6D5BFC72B}"/>
+                <a16:creationId xmlns:a16="http://schemas.microsoft.com/office/drawing/2014/main" id="{8AC4F7BA-F523-4BCD-9FBB-F8EB6020C1B3}"/>
               </a:ext>
             </a:extLst>
           </p:cNvPr>
@@ -3270,7 +3337,7 @@
           <p:cNvPr id="9" name="">
             <a:extLst xmlns:a="http://schemas.openxmlformats.org/drawingml/2006/main">
               <a:ext uri="{FF2B5EF4-FFF2-40B4-BE49-F238E27FC236}">
-                <a16:creationId xmlns:a16="http://schemas.microsoft.com/office/drawing/2014/main" id="{06DDBAF9-C39B-40BA-A1E2-D8166FFD5BE9}"/>
+                <a16:creationId xmlns:a16="http://schemas.microsoft.com/office/drawing/2014/main" id="{A4E48157-CB09-4140-BCD4-07E3E8874638}"/>
               </a:ext>
             </a:extLst>
           </p:cNvPr>
@@ -3316,7 +3383,7 @@
           <p:cNvPr id="10" name="">
             <a:extLst xmlns:a="http://schemas.openxmlformats.org/drawingml/2006/main">
               <a:ext uri="{FF2B5EF4-FFF2-40B4-BE49-F238E27FC236}">
-                <a16:creationId xmlns:a16="http://schemas.microsoft.com/office/drawing/2014/main" id="{E06637E2-F66F-4953-82C2-8166E3716A3D}"/>
+                <a16:creationId xmlns:a16="http://schemas.microsoft.com/office/drawing/2014/main" id="{2233C86F-CCE4-4211-9DA2-8DC8DAD2EAFD}"/>
               </a:ext>
             </a:extLst>
           </p:cNvPr>
@@ -3349,7 +3416,7 @@
           <p:cNvPr id="11" name="">
             <a:extLst xmlns:a="http://schemas.openxmlformats.org/drawingml/2006/main">
               <a:ext uri="{FF2B5EF4-FFF2-40B4-BE49-F238E27FC236}">
-                <a16:creationId xmlns:a16="http://schemas.microsoft.com/office/drawing/2014/main" id="{73B1CCAD-4F23-44D1-A682-5951C621E5CC}"/>
+                <a16:creationId xmlns:a16="http://schemas.microsoft.com/office/drawing/2014/main" id="{41B265CC-B0F4-4232-8E35-E504AFF9D5D7}"/>
               </a:ext>
             </a:extLst>
           </p:cNvPr>
@@ -3384,7 +3451,7 @@
           <p:cNvPr id="12" name="">
             <a:extLst xmlns:a="http://schemas.openxmlformats.org/drawingml/2006/main">
               <a:ext uri="{FF2B5EF4-FFF2-40B4-BE49-F238E27FC236}">
-                <a16:creationId xmlns:a16="http://schemas.microsoft.com/office/drawing/2014/main" id="{65D7278F-D56F-4CF4-8284-550CD8EAEC82}"/>
+                <a16:creationId xmlns:a16="http://schemas.microsoft.com/office/drawing/2014/main" id="{BF3784A7-63B0-4024-A420-422E305E67D4}"/>
               </a:ext>
             </a:extLst>
           </p:cNvPr>
@@ -3448,7 +3515,7 @@
           <p:cNvPr id="13" name="">
             <a:extLst xmlns:a="http://schemas.openxmlformats.org/drawingml/2006/main">
               <a:ext uri="{FF2B5EF4-FFF2-40B4-BE49-F238E27FC236}">
-                <a16:creationId xmlns:a16="http://schemas.microsoft.com/office/drawing/2014/main" id="{BC8DFD64-C36E-4801-8422-1DDBEA5E3D49}"/>
+                <a16:creationId xmlns:a16="http://schemas.microsoft.com/office/drawing/2014/main" id="{78963770-262A-4B9A-B0C6-DB0C3D98F2CC}"/>
               </a:ext>
             </a:extLst>
           </p:cNvPr>
@@ -3494,7 +3561,7 @@
           <p:cNvPr id="14" name="">
             <a:extLst xmlns:a="http://schemas.openxmlformats.org/drawingml/2006/main">
               <a:ext uri="{FF2B5EF4-FFF2-40B4-BE49-F238E27FC236}">
-                <a16:creationId xmlns:a16="http://schemas.microsoft.com/office/drawing/2014/main" id="{382360A5-6604-4FD3-A835-22BEC1B56A68}"/>
+                <a16:creationId xmlns:a16="http://schemas.microsoft.com/office/drawing/2014/main" id="{9266528D-6FA6-45EB-B2F9-E96AA147CDA8}"/>
               </a:ext>
             </a:extLst>
           </p:cNvPr>
@@ -3529,7 +3596,7 @@
           <p:cNvPr id="15" name="">
             <a:extLst xmlns:a="http://schemas.openxmlformats.org/drawingml/2006/main">
               <a:ext uri="{FF2B5EF4-FFF2-40B4-BE49-F238E27FC236}">
-                <a16:creationId xmlns:a16="http://schemas.microsoft.com/office/drawing/2014/main" id="{E744DFC2-EEF6-4336-986A-D01729726743}"/>
+                <a16:creationId xmlns:a16="http://schemas.microsoft.com/office/drawing/2014/main" id="{C2CDD973-AE3F-4CBD-8C12-BB7616D407E3}"/>
               </a:ext>
             </a:extLst>
           </p:cNvPr>
@@ -3593,7 +3660,7 @@
           <p:cNvPr id="16" name="">
             <a:extLst xmlns:a="http://schemas.openxmlformats.org/drawingml/2006/main">
               <a:ext uri="{FF2B5EF4-FFF2-40B4-BE49-F238E27FC236}">
-                <a16:creationId xmlns:a16="http://schemas.microsoft.com/office/drawing/2014/main" id="{4AFDDD92-0F8E-4C80-AF71-ED3B26452D94}"/>
+                <a16:creationId xmlns:a16="http://schemas.microsoft.com/office/drawing/2014/main" id="{455E0E53-F95D-4FCF-B149-FFE1608BDA00}"/>
               </a:ext>
             </a:extLst>
           </p:cNvPr>
@@ -3628,7 +3695,7 @@
           <p:cNvPr id="17" name="">
             <a:extLst xmlns:a="http://schemas.openxmlformats.org/drawingml/2006/main">
               <a:ext uri="{FF2B5EF4-FFF2-40B4-BE49-F238E27FC236}">
-                <a16:creationId xmlns:a16="http://schemas.microsoft.com/office/drawing/2014/main" id="{0B91806D-637A-4A74-9F12-9B8836DDC8E2}"/>
+                <a16:creationId xmlns:a16="http://schemas.microsoft.com/office/drawing/2014/main" id="{A5445D6A-48D1-4E54-AA7C-12B24FB4FD38}"/>
               </a:ext>
             </a:extLst>
           </p:cNvPr>
@@ -3692,7 +3759,7 @@
           <p:cNvPr id="18" name="">
             <a:extLst xmlns:a="http://schemas.openxmlformats.org/drawingml/2006/main">
               <a:ext uri="{FF2B5EF4-FFF2-40B4-BE49-F238E27FC236}">
-                <a16:creationId xmlns:a16="http://schemas.microsoft.com/office/drawing/2014/main" id="{B46CFC9A-6190-4063-B9DA-D0C081909113}"/>
+                <a16:creationId xmlns:a16="http://schemas.microsoft.com/office/drawing/2014/main" id="{2A57DE5B-3DE5-4441-9EA6-2C585DE4D8BC}"/>
               </a:ext>
             </a:extLst>
           </p:cNvPr>
@@ -3727,7 +3794,7 @@
           <p:cNvPr id="19" name="">
             <a:extLst xmlns:a="http://schemas.openxmlformats.org/drawingml/2006/main">
               <a:ext uri="{FF2B5EF4-FFF2-40B4-BE49-F238E27FC236}">
-                <a16:creationId xmlns:a16="http://schemas.microsoft.com/office/drawing/2014/main" id="{12A45ACD-5A09-4856-9CF8-9E903ED549A9}"/>
+                <a16:creationId xmlns:a16="http://schemas.microsoft.com/office/drawing/2014/main" id="{4A495DE3-D4DB-4785-963D-9591C3BB84EE}"/>
               </a:ext>
             </a:extLst>
           </p:cNvPr>
@@ -3791,7 +3858,7 @@
           <p:cNvPr id="20" name="">
             <a:extLst xmlns:a="http://schemas.openxmlformats.org/drawingml/2006/main">
               <a:ext uri="{FF2B5EF4-FFF2-40B4-BE49-F238E27FC236}">
-                <a16:creationId xmlns:a16="http://schemas.microsoft.com/office/drawing/2014/main" id="{1BDB1B3C-E891-44A4-B1C0-3A5994AF2430}"/>
+                <a16:creationId xmlns:a16="http://schemas.microsoft.com/office/drawing/2014/main" id="{83FD1764-4D86-4219-A531-DE9576944F22}"/>
               </a:ext>
             </a:extLst>
           </p:cNvPr>
@@ -3826,7 +3893,7 @@
           <p:cNvPr id="21" name="">
             <a:extLst xmlns:a="http://schemas.openxmlformats.org/drawingml/2006/main">
               <a:ext uri="{FF2B5EF4-FFF2-40B4-BE49-F238E27FC236}">
-                <a16:creationId xmlns:a16="http://schemas.microsoft.com/office/drawing/2014/main" id="{F1C3B15D-6157-4F09-B131-891D1515C2CF}"/>
+                <a16:creationId xmlns:a16="http://schemas.microsoft.com/office/drawing/2014/main" id="{407D576E-BFEB-4D64-96D3-34921E0C584A}"/>
               </a:ext>
             </a:extLst>
           </p:cNvPr>
@@ -3890,7 +3957,7 @@
           <p:cNvPr id="22" name="">
             <a:extLst xmlns:a="http://schemas.openxmlformats.org/drawingml/2006/main">
               <a:ext uri="{FF2B5EF4-FFF2-40B4-BE49-F238E27FC236}">
-                <a16:creationId xmlns:a16="http://schemas.microsoft.com/office/drawing/2014/main" id="{D177CFF0-0284-4A9A-8A4F-1D5580B39677}"/>
+                <a16:creationId xmlns:a16="http://schemas.microsoft.com/office/drawing/2014/main" id="{CB548E9E-F23E-4934-BB61-184D9F49167C}"/>
               </a:ext>
             </a:extLst>
           </p:cNvPr>
@@ -3925,7 +3992,7 @@
           <p:cNvPr id="23" name="">
             <a:extLst xmlns:a="http://schemas.openxmlformats.org/drawingml/2006/main">
               <a:ext uri="{FF2B5EF4-FFF2-40B4-BE49-F238E27FC236}">
-                <a16:creationId xmlns:a16="http://schemas.microsoft.com/office/drawing/2014/main" id="{4F027D98-48AF-4C13-850F-612B43D69DAD}"/>
+                <a16:creationId xmlns:a16="http://schemas.microsoft.com/office/drawing/2014/main" id="{AC5C07C3-FD6F-4826-96CF-5809ED5DF503}"/>
               </a:ext>
             </a:extLst>
           </p:cNvPr>
@@ -3989,7 +4056,7 @@
           <p:cNvPr id="24" name="">
             <a:extLst xmlns:a="http://schemas.openxmlformats.org/drawingml/2006/main">
               <a:ext uri="{FF2B5EF4-FFF2-40B4-BE49-F238E27FC236}">
-                <a16:creationId xmlns:a16="http://schemas.microsoft.com/office/drawing/2014/main" id="{EFDA237E-3785-4F56-BA88-223C2F54D1AE}"/>
+                <a16:creationId xmlns:a16="http://schemas.microsoft.com/office/drawing/2014/main" id="{B22033FA-55E1-4590-BEBC-062E61D3AE9B}"/>
               </a:ext>
             </a:extLst>
           </p:cNvPr>
@@ -4049,7 +4116,7 @@
     </p:spTree>
     <p:extLst>
       <p:ext uri="{BB962C8B-B14F-4D97-AF65-F5344CB8AC3E}">
-        <p14:creationId xmlns:p14="http://schemas.microsoft.com/office/powerpoint/2010/main" val="1797054301"/>
+        <p14:creationId xmlns:p14="http://schemas.microsoft.com/office/powerpoint/2010/main" val="1160147281"/>
       </p:ext>
     </p:extLst>
   </p:cSld>
@@ -4080,7 +4147,7 @@
           <p:cNvPr id="1" name="">
             <a:extLst xmlns:a="http://schemas.openxmlformats.org/drawingml/2006/main">
               <a:ext uri="{FF2B5EF4-FFF2-40B4-BE49-F238E27FC236}">
-                <a16:creationId xmlns:a16="http://schemas.microsoft.com/office/drawing/2014/main" id="{67DE8684-4929-45AE-861F-E877FE608C61}"/>
+                <a16:creationId xmlns:a16="http://schemas.microsoft.com/office/drawing/2014/main" id="{D79CE832-D922-4728-9B11-E4F44ECB54FB}"/>
               </a:ext>
             </a:extLst>
           </p:cNvPr>
@@ -4115,7 +4182,7 @@
           <p:cNvPr id="2" name="">
             <a:extLst xmlns:a="http://schemas.openxmlformats.org/drawingml/2006/main">
               <a:ext uri="{FF2B5EF4-FFF2-40B4-BE49-F238E27FC236}">
-                <a16:creationId xmlns:a16="http://schemas.microsoft.com/office/drawing/2014/main" id="{98885BF1-170F-402D-8202-AEBD9DD235D9}"/>
+                <a16:creationId xmlns:a16="http://schemas.microsoft.com/office/drawing/2014/main" id="{5840699A-FA89-4792-A6AE-598043348DCF}"/>
               </a:ext>
             </a:extLst>
           </p:cNvPr>
@@ -4179,7 +4246,7 @@
           <p:cNvPr id="3" name="">
             <a:extLst xmlns:a="http://schemas.openxmlformats.org/drawingml/2006/main">
               <a:ext uri="{FF2B5EF4-FFF2-40B4-BE49-F238E27FC236}">
-                <a16:creationId xmlns:a16="http://schemas.microsoft.com/office/drawing/2014/main" id="{4EAD774A-7B6F-4863-8F8C-E34CFAE06906}"/>
+                <a16:creationId xmlns:a16="http://schemas.microsoft.com/office/drawing/2014/main" id="{A670F20A-A784-41AB-9C17-A1C1ED0396F9}"/>
               </a:ext>
             </a:extLst>
           </p:cNvPr>
@@ -4243,7 +4310,7 @@
           <p:cNvPr id="4" name="">
             <a:extLst xmlns:a="http://schemas.openxmlformats.org/drawingml/2006/main">
               <a:ext uri="{FF2B5EF4-FFF2-40B4-BE49-F238E27FC236}">
-                <a16:creationId xmlns:a16="http://schemas.microsoft.com/office/drawing/2014/main" id="{50064858-1A08-48F0-8050-E492895A9293}"/>
+                <a16:creationId xmlns:a16="http://schemas.microsoft.com/office/drawing/2014/main" id="{9DA1EE77-B31F-4A73-A54D-2903C8B352C6}"/>
               </a:ext>
             </a:extLst>
           </p:cNvPr>
@@ -4307,7 +4374,7 @@
           <p:cNvPr id="5" name="">
             <a:extLst xmlns:a="http://schemas.openxmlformats.org/drawingml/2006/main">
               <a:ext uri="{FF2B5EF4-FFF2-40B4-BE49-F238E27FC236}">
-                <a16:creationId xmlns:a16="http://schemas.microsoft.com/office/drawing/2014/main" id="{20FF4C3C-40BC-4FC5-812E-CB4FF9648A4C}"/>
+                <a16:creationId xmlns:a16="http://schemas.microsoft.com/office/drawing/2014/main" id="{F39A667C-6213-4C7C-9994-55C6D2E6FCF1}"/>
               </a:ext>
             </a:extLst>
           </p:cNvPr>
@@ -4371,7 +4438,7 @@
           <p:cNvPr id="6" name="">
             <a:extLst xmlns:a="http://schemas.openxmlformats.org/drawingml/2006/main">
               <a:ext uri="{FF2B5EF4-FFF2-40B4-BE49-F238E27FC236}">
-                <a16:creationId xmlns:a16="http://schemas.microsoft.com/office/drawing/2014/main" id="{CBABED9D-A3C0-4E58-BCDD-6DDDBDF9697D}"/>
+                <a16:creationId xmlns:a16="http://schemas.microsoft.com/office/drawing/2014/main" id="{63FA745B-F890-4164-94CE-D92DF62B48C7}"/>
               </a:ext>
             </a:extLst>
           </p:cNvPr>
@@ -4404,7 +4471,7 @@
           <p:cNvPr id="7" name="">
             <a:extLst xmlns:a="http://schemas.openxmlformats.org/drawingml/2006/main">
               <a:ext uri="{FF2B5EF4-FFF2-40B4-BE49-F238E27FC236}">
-                <a16:creationId xmlns:a16="http://schemas.microsoft.com/office/drawing/2014/main" id="{B8CEFA5C-97BA-4B62-8B3F-5F544113576D}"/>
+                <a16:creationId xmlns:a16="http://schemas.microsoft.com/office/drawing/2014/main" id="{C73C9BAF-6A7F-48A5-A059-4406A268AADB}"/>
               </a:ext>
             </a:extLst>
           </p:cNvPr>
@@ -4439,7 +4506,7 @@
           <p:cNvPr id="8" name="">
             <a:extLst xmlns:a="http://schemas.openxmlformats.org/drawingml/2006/main">
               <a:ext uri="{FF2B5EF4-FFF2-40B4-BE49-F238E27FC236}">
-                <a16:creationId xmlns:a16="http://schemas.microsoft.com/office/drawing/2014/main" id="{4D1C3FE3-2A6C-4CD7-AD55-46E9C551CFF5}"/>
+                <a16:creationId xmlns:a16="http://schemas.microsoft.com/office/drawing/2014/main" id="{0C66D2C7-17D1-42AB-B67D-DCDCB8CDF33C}"/>
               </a:ext>
             </a:extLst>
           </p:cNvPr>
@@ -4503,7 +4570,7 @@
           <p:cNvPr id="9" name="">
             <a:extLst xmlns:a="http://schemas.openxmlformats.org/drawingml/2006/main">
               <a:ext uri="{FF2B5EF4-FFF2-40B4-BE49-F238E27FC236}">
-                <a16:creationId xmlns:a16="http://schemas.microsoft.com/office/drawing/2014/main" id="{3C3D96FB-7923-4CF4-8D68-39289113FC9F}"/>
+                <a16:creationId xmlns:a16="http://schemas.microsoft.com/office/drawing/2014/main" id="{F7A4819C-B9E6-434B-A063-6326D81FD20C}"/>
               </a:ext>
             </a:extLst>
           </p:cNvPr>
@@ -4567,7 +4634,7 @@
           <p:cNvPr id="10" name="">
             <a:extLst xmlns:a="http://schemas.openxmlformats.org/drawingml/2006/main">
               <a:ext uri="{FF2B5EF4-FFF2-40B4-BE49-F238E27FC236}">
-                <a16:creationId xmlns:a16="http://schemas.microsoft.com/office/drawing/2014/main" id="{8CF68335-A279-4D63-AF86-2CD55A0F234C}"/>
+                <a16:creationId xmlns:a16="http://schemas.microsoft.com/office/drawing/2014/main" id="{A47F08CF-698F-437C-A399-FA1DE4A6CB89}"/>
               </a:ext>
             </a:extLst>
           </p:cNvPr>
@@ -4600,7 +4667,7 @@
           <p:cNvPr id="11" name="">
             <a:extLst xmlns:a="http://schemas.openxmlformats.org/drawingml/2006/main">
               <a:ext uri="{FF2B5EF4-FFF2-40B4-BE49-F238E27FC236}">
-                <a16:creationId xmlns:a16="http://schemas.microsoft.com/office/drawing/2014/main" id="{3585F1B7-2223-43AC-BC5F-46D10BC4E2CB}"/>
+                <a16:creationId xmlns:a16="http://schemas.microsoft.com/office/drawing/2014/main" id="{9A14A00F-5A12-4E71-926C-F6A066FE5EC0}"/>
               </a:ext>
             </a:extLst>
           </p:cNvPr>
@@ -4635,7 +4702,7 @@
           <p:cNvPr id="12" name="">
             <a:extLst xmlns:a="http://schemas.openxmlformats.org/drawingml/2006/main">
               <a:ext uri="{FF2B5EF4-FFF2-40B4-BE49-F238E27FC236}">
-                <a16:creationId xmlns:a16="http://schemas.microsoft.com/office/drawing/2014/main" id="{CC7164D3-B50C-4FEA-B2F8-A0B46E2A2676}"/>
+                <a16:creationId xmlns:a16="http://schemas.microsoft.com/office/drawing/2014/main" id="{B5BE3FBF-3A55-4FBC-89E5-EF69744D0404}"/>
               </a:ext>
             </a:extLst>
           </p:cNvPr>
@@ -4699,7 +4766,7 @@
           <p:cNvPr id="13" name="">
             <a:extLst xmlns:a="http://schemas.openxmlformats.org/drawingml/2006/main">
               <a:ext uri="{FF2B5EF4-FFF2-40B4-BE49-F238E27FC236}">
-                <a16:creationId xmlns:a16="http://schemas.microsoft.com/office/drawing/2014/main" id="{E3A73E35-3012-4E4F-ADE7-048205114B36}"/>
+                <a16:creationId xmlns:a16="http://schemas.microsoft.com/office/drawing/2014/main" id="{AA66561E-1BED-4503-8085-33A8C82374E5}"/>
               </a:ext>
             </a:extLst>
           </p:cNvPr>
@@ -4763,7 +4830,7 @@
           <p:cNvPr id="14" name="">
             <a:extLst xmlns:a="http://schemas.openxmlformats.org/drawingml/2006/main">
               <a:ext uri="{FF2B5EF4-FFF2-40B4-BE49-F238E27FC236}">
-                <a16:creationId xmlns:a16="http://schemas.microsoft.com/office/drawing/2014/main" id="{120C3266-B7F5-4C76-8B67-E234F029E45F}"/>
+                <a16:creationId xmlns:a16="http://schemas.microsoft.com/office/drawing/2014/main" id="{2A6FA21E-2191-4441-A7F1-C361AA8A56B2}"/>
               </a:ext>
             </a:extLst>
           </p:cNvPr>
@@ -4796,7 +4863,7 @@
           <p:cNvPr id="15" name="">
             <a:extLst xmlns:a="http://schemas.openxmlformats.org/drawingml/2006/main">
               <a:ext uri="{FF2B5EF4-FFF2-40B4-BE49-F238E27FC236}">
-                <a16:creationId xmlns:a16="http://schemas.microsoft.com/office/drawing/2014/main" id="{404B8CD5-5996-498F-9027-252D71607D0C}"/>
+                <a16:creationId xmlns:a16="http://schemas.microsoft.com/office/drawing/2014/main" id="{82BCFC41-824E-4C7D-AF5B-34ED48839BDC}"/>
               </a:ext>
             </a:extLst>
           </p:cNvPr>
@@ -4831,7 +4898,7 @@
           <p:cNvPr id="16" name="">
             <a:extLst xmlns:a="http://schemas.openxmlformats.org/drawingml/2006/main">
               <a:ext uri="{FF2B5EF4-FFF2-40B4-BE49-F238E27FC236}">
-                <a16:creationId xmlns:a16="http://schemas.microsoft.com/office/drawing/2014/main" id="{57E4A9F1-4045-4AD3-9927-F96C4109B6CE}"/>
+                <a16:creationId xmlns:a16="http://schemas.microsoft.com/office/drawing/2014/main" id="{955AFA58-0895-45DC-8C4F-7FC4FBDDB5E7}"/>
               </a:ext>
             </a:extLst>
           </p:cNvPr>
@@ -4895,7 +4962,7 @@
           <p:cNvPr id="17" name="">
             <a:extLst xmlns:a="http://schemas.openxmlformats.org/drawingml/2006/main">
               <a:ext uri="{FF2B5EF4-FFF2-40B4-BE49-F238E27FC236}">
-                <a16:creationId xmlns:a16="http://schemas.microsoft.com/office/drawing/2014/main" id="{BC9934DF-5C2C-470A-8080-9BE1986168B4}"/>
+                <a16:creationId xmlns:a16="http://schemas.microsoft.com/office/drawing/2014/main" id="{49B40BD1-2FD3-4582-AEC5-87427D30B342}"/>
               </a:ext>
             </a:extLst>
           </p:cNvPr>
@@ -4959,7 +5026,7 @@
           <p:cNvPr id="18" name="">
             <a:extLst xmlns:a="http://schemas.openxmlformats.org/drawingml/2006/main">
               <a:ext uri="{FF2B5EF4-FFF2-40B4-BE49-F238E27FC236}">
-                <a16:creationId xmlns:a16="http://schemas.microsoft.com/office/drawing/2014/main" id="{605601E8-92E9-4826-A30D-AE6DD3349266}"/>
+                <a16:creationId xmlns:a16="http://schemas.microsoft.com/office/drawing/2014/main" id="{87B9AB30-1E65-41CF-A409-D9D25A5C8421}"/>
               </a:ext>
             </a:extLst>
           </p:cNvPr>
@@ -4994,7 +5061,7 @@
           <p:cNvPr id="19" name="">
             <a:extLst xmlns:a="http://schemas.openxmlformats.org/drawingml/2006/main">
               <a:ext uri="{FF2B5EF4-FFF2-40B4-BE49-F238E27FC236}">
-                <a16:creationId xmlns:a16="http://schemas.microsoft.com/office/drawing/2014/main" id="{C3C77E57-B39E-46B7-A3A6-5D22BBB79959}"/>
+                <a16:creationId xmlns:a16="http://schemas.microsoft.com/office/drawing/2014/main" id="{188841B3-4E38-48E8-8EA9-8BC9BD8ED46B}"/>
               </a:ext>
             </a:extLst>
           </p:cNvPr>
@@ -5058,7 +5125,7 @@
           <p:cNvPr id="20" name="">
             <a:extLst xmlns:a="http://schemas.openxmlformats.org/drawingml/2006/main">
               <a:ext uri="{FF2B5EF4-FFF2-40B4-BE49-F238E27FC236}">
-                <a16:creationId xmlns:a16="http://schemas.microsoft.com/office/drawing/2014/main" id="{F0B062F2-C0BC-4ECF-A686-87F339573586}"/>
+                <a16:creationId xmlns:a16="http://schemas.microsoft.com/office/drawing/2014/main" id="{C6A18079-2101-4A1B-8697-26B012CBB507}"/>
               </a:ext>
             </a:extLst>
           </p:cNvPr>
@@ -5093,7 +5160,7 @@
           <p:cNvPr id="21" name="">
             <a:extLst xmlns:a="http://schemas.openxmlformats.org/drawingml/2006/main">
               <a:ext uri="{FF2B5EF4-FFF2-40B4-BE49-F238E27FC236}">
-                <a16:creationId xmlns:a16="http://schemas.microsoft.com/office/drawing/2014/main" id="{95FC5CC8-5E09-4913-AA89-194295437604}"/>
+                <a16:creationId xmlns:a16="http://schemas.microsoft.com/office/drawing/2014/main" id="{3827B626-89F5-4F51-A3A3-6F2BF47193E3}"/>
               </a:ext>
             </a:extLst>
           </p:cNvPr>
@@ -5155,7 +5222,7 @@
     </p:spTree>
     <p:extLst>
       <p:ext uri="{BB962C8B-B14F-4D97-AF65-F5344CB8AC3E}">
-        <p14:creationId xmlns:p14="http://schemas.microsoft.com/office/powerpoint/2010/main" val="2108944804"/>
+        <p14:creationId xmlns:p14="http://schemas.microsoft.com/office/powerpoint/2010/main" val="1978648324"/>
       </p:ext>
     </p:extLst>
   </p:cSld>
@@ -5186,7 +5253,7 @@
           <p:cNvPr id="1" name="">
             <a:extLst xmlns:a="http://schemas.openxmlformats.org/drawingml/2006/main">
               <a:ext uri="{FF2B5EF4-FFF2-40B4-BE49-F238E27FC236}">
-                <a16:creationId xmlns:a16="http://schemas.microsoft.com/office/drawing/2014/main" id="{2087F6A6-073E-4307-9F2E-0EB32021BB3E}"/>
+                <a16:creationId xmlns:a16="http://schemas.microsoft.com/office/drawing/2014/main" id="{FDA675F6-6096-4D07-A0D1-0045C4295EDE}"/>
               </a:ext>
             </a:extLst>
           </p:cNvPr>
@@ -5221,7 +5288,7 @@
           <p:cNvPr id="2" name="">
             <a:extLst xmlns:a="http://schemas.openxmlformats.org/drawingml/2006/main">
               <a:ext uri="{FF2B5EF4-FFF2-40B4-BE49-F238E27FC236}">
-                <a16:creationId xmlns:a16="http://schemas.microsoft.com/office/drawing/2014/main" id="{A4F2E562-65F0-4461-A579-EE68A9B85B1F}"/>
+                <a16:creationId xmlns:a16="http://schemas.microsoft.com/office/drawing/2014/main" id="{530B1BAB-3CBB-4F59-BCA3-613C5E7185F0}"/>
               </a:ext>
             </a:extLst>
           </p:cNvPr>
@@ -5285,7 +5352,7 @@
           <p:cNvPr id="3" name="">
             <a:extLst xmlns:a="http://schemas.openxmlformats.org/drawingml/2006/main">
               <a:ext uri="{FF2B5EF4-FFF2-40B4-BE49-F238E27FC236}">
-                <a16:creationId xmlns:a16="http://schemas.microsoft.com/office/drawing/2014/main" id="{F3FFB316-E746-4C4E-B924-CC988537124C}"/>
+                <a16:creationId xmlns:a16="http://schemas.microsoft.com/office/drawing/2014/main" id="{722066F4-BA2C-47C8-B2BC-ECC966115EFE}"/>
               </a:ext>
             </a:extLst>
           </p:cNvPr>
@@ -5349,7 +5416,7 @@
           <p:cNvPr id="4" name="">
             <a:extLst xmlns:a="http://schemas.openxmlformats.org/drawingml/2006/main">
               <a:ext uri="{FF2B5EF4-FFF2-40B4-BE49-F238E27FC236}">
-                <a16:creationId xmlns:a16="http://schemas.microsoft.com/office/drawing/2014/main" id="{61DE0977-6CAF-4AAB-A430-4F260F786B7C}"/>
+                <a16:creationId xmlns:a16="http://schemas.microsoft.com/office/drawing/2014/main" id="{E57B3874-49C0-4BDF-8F86-7425A07A5E53}"/>
               </a:ext>
             </a:extLst>
           </p:cNvPr>
@@ -5413,7 +5480,7 @@
           <p:cNvPr id="5" name="">
             <a:extLst xmlns:a="http://schemas.openxmlformats.org/drawingml/2006/main">
               <a:ext uri="{FF2B5EF4-FFF2-40B4-BE49-F238E27FC236}">
-                <a16:creationId xmlns:a16="http://schemas.microsoft.com/office/drawing/2014/main" id="{8838748D-F9A7-40DB-BFD6-9926E71E81FD}"/>
+                <a16:creationId xmlns:a16="http://schemas.microsoft.com/office/drawing/2014/main" id="{78ED0CC9-A7F8-47A8-A764-0C93D7894205}"/>
               </a:ext>
             </a:extLst>
           </p:cNvPr>
@@ -5477,7 +5544,7 @@
           <p:cNvPr id="6" name="">
             <a:extLst xmlns:a="http://schemas.openxmlformats.org/drawingml/2006/main">
               <a:ext uri="{FF2B5EF4-FFF2-40B4-BE49-F238E27FC236}">
-                <a16:creationId xmlns:a16="http://schemas.microsoft.com/office/drawing/2014/main" id="{63C034BF-8720-4928-A605-B0A9BB19BCBA}"/>
+                <a16:creationId xmlns:a16="http://schemas.microsoft.com/office/drawing/2014/main" id="{01EFF654-ED3C-4058-A773-0C54C7EFE131}"/>
               </a:ext>
             </a:extLst>
           </p:cNvPr>
@@ -5510,7 +5577,7 @@
           <p:cNvPr id="7" name="">
             <a:extLst xmlns:a="http://schemas.openxmlformats.org/drawingml/2006/main">
               <a:ext uri="{FF2B5EF4-FFF2-40B4-BE49-F238E27FC236}">
-                <a16:creationId xmlns:a16="http://schemas.microsoft.com/office/drawing/2014/main" id="{82D02E94-C17B-44EB-8C99-C7FBD6F09904}"/>
+                <a16:creationId xmlns:a16="http://schemas.microsoft.com/office/drawing/2014/main" id="{F8F40E53-2519-40E0-91C2-1003A660A835}"/>
               </a:ext>
             </a:extLst>
           </p:cNvPr>
@@ -5545,7 +5612,7 @@
           <p:cNvPr id="8" name="">
             <a:extLst xmlns:a="http://schemas.openxmlformats.org/drawingml/2006/main">
               <a:ext uri="{FF2B5EF4-FFF2-40B4-BE49-F238E27FC236}">
-                <a16:creationId xmlns:a16="http://schemas.microsoft.com/office/drawing/2014/main" id="{98139B51-A2BD-4060-B541-43A71F03B6FE}"/>
+                <a16:creationId xmlns:a16="http://schemas.microsoft.com/office/drawing/2014/main" id="{167FDF11-58D1-466B-90C4-C929B4236914}"/>
               </a:ext>
             </a:extLst>
           </p:cNvPr>
@@ -5609,7 +5676,7 @@
           <p:cNvPr id="9" name="">
             <a:extLst xmlns:a="http://schemas.openxmlformats.org/drawingml/2006/main">
               <a:ext uri="{FF2B5EF4-FFF2-40B4-BE49-F238E27FC236}">
-                <a16:creationId xmlns:a16="http://schemas.microsoft.com/office/drawing/2014/main" id="{D43AAF67-BCAB-456C-8432-B4067FFCC7BD}"/>
+                <a16:creationId xmlns:a16="http://schemas.microsoft.com/office/drawing/2014/main" id="{650AE917-FDD5-41B9-B200-52973EB4F38D}"/>
               </a:ext>
             </a:extLst>
           </p:cNvPr>
@@ -5673,7 +5740,7 @@
           <p:cNvPr id="10" name="">
             <a:extLst xmlns:a="http://schemas.openxmlformats.org/drawingml/2006/main">
               <a:ext uri="{FF2B5EF4-FFF2-40B4-BE49-F238E27FC236}">
-                <a16:creationId xmlns:a16="http://schemas.microsoft.com/office/drawing/2014/main" id="{F0984846-9942-4D23-9619-890D73B7BEA7}"/>
+                <a16:creationId xmlns:a16="http://schemas.microsoft.com/office/drawing/2014/main" id="{CECC7344-A066-4349-B692-FF2A15687EB9}"/>
               </a:ext>
             </a:extLst>
           </p:cNvPr>
@@ -5706,7 +5773,7 @@
           <p:cNvPr id="11" name="">
             <a:extLst xmlns:a="http://schemas.openxmlformats.org/drawingml/2006/main">
               <a:ext uri="{FF2B5EF4-FFF2-40B4-BE49-F238E27FC236}">
-                <a16:creationId xmlns:a16="http://schemas.microsoft.com/office/drawing/2014/main" id="{A2708972-E126-486A-8825-0BE11E7A733A}"/>
+                <a16:creationId xmlns:a16="http://schemas.microsoft.com/office/drawing/2014/main" id="{3B3DACE6-1924-4ABB-9802-1719188E5275}"/>
               </a:ext>
             </a:extLst>
           </p:cNvPr>
@@ -5741,7 +5808,7 @@
           <p:cNvPr id="12" name="">
             <a:extLst xmlns:a="http://schemas.openxmlformats.org/drawingml/2006/main">
               <a:ext uri="{FF2B5EF4-FFF2-40B4-BE49-F238E27FC236}">
-                <a16:creationId xmlns:a16="http://schemas.microsoft.com/office/drawing/2014/main" id="{964ED3FC-C44A-4470-91E4-E4F4CD8E6556}"/>
+                <a16:creationId xmlns:a16="http://schemas.microsoft.com/office/drawing/2014/main" id="{644CF7D0-EB9D-40F8-9DC5-07FA2331A06B}"/>
               </a:ext>
             </a:extLst>
           </p:cNvPr>
@@ -5805,7 +5872,7 @@
           <p:cNvPr id="13" name="">
             <a:extLst xmlns:a="http://schemas.openxmlformats.org/drawingml/2006/main">
               <a:ext uri="{FF2B5EF4-FFF2-40B4-BE49-F238E27FC236}">
-                <a16:creationId xmlns:a16="http://schemas.microsoft.com/office/drawing/2014/main" id="{EF909E1E-840A-4A27-ADD7-871A9D946FE3}"/>
+                <a16:creationId xmlns:a16="http://schemas.microsoft.com/office/drawing/2014/main" id="{E07E5D04-500E-4FD4-A56F-4047A89465B7}"/>
               </a:ext>
             </a:extLst>
           </p:cNvPr>
@@ -5869,7 +5936,7 @@
           <p:cNvPr id="14" name="">
             <a:extLst xmlns:a="http://schemas.openxmlformats.org/drawingml/2006/main">
               <a:ext uri="{FF2B5EF4-FFF2-40B4-BE49-F238E27FC236}">
-                <a16:creationId xmlns:a16="http://schemas.microsoft.com/office/drawing/2014/main" id="{24189CAB-5A35-43FD-985F-6DE807810B86}"/>
+                <a16:creationId xmlns:a16="http://schemas.microsoft.com/office/drawing/2014/main" id="{B7D71177-7B64-4BFC-9884-5181F6577E44}"/>
               </a:ext>
             </a:extLst>
           </p:cNvPr>
@@ -5902,7 +5969,7 @@
           <p:cNvPr id="15" name="">
             <a:extLst xmlns:a="http://schemas.openxmlformats.org/drawingml/2006/main">
               <a:ext uri="{FF2B5EF4-FFF2-40B4-BE49-F238E27FC236}">
-                <a16:creationId xmlns:a16="http://schemas.microsoft.com/office/drawing/2014/main" id="{7D94AFB7-A3A3-43A5-A6B3-5653840E2F2E}"/>
+                <a16:creationId xmlns:a16="http://schemas.microsoft.com/office/drawing/2014/main" id="{DE4A33A7-414D-42FA-86B7-501C42FCC878}"/>
               </a:ext>
             </a:extLst>
           </p:cNvPr>
@@ -5937,7 +6004,7 @@
           <p:cNvPr id="16" name="">
             <a:extLst xmlns:a="http://schemas.openxmlformats.org/drawingml/2006/main">
               <a:ext uri="{FF2B5EF4-FFF2-40B4-BE49-F238E27FC236}">
-                <a16:creationId xmlns:a16="http://schemas.microsoft.com/office/drawing/2014/main" id="{C5E8AF04-0652-48AE-89C6-B7B8B4BA3C7B}"/>
+                <a16:creationId xmlns:a16="http://schemas.microsoft.com/office/drawing/2014/main" id="{0C53DB7C-8A67-4745-8C13-7C2824796C9B}"/>
               </a:ext>
             </a:extLst>
           </p:cNvPr>
@@ -6001,7 +6068,7 @@
           <p:cNvPr id="17" name="">
             <a:extLst xmlns:a="http://schemas.openxmlformats.org/drawingml/2006/main">
               <a:ext uri="{FF2B5EF4-FFF2-40B4-BE49-F238E27FC236}">
-                <a16:creationId xmlns:a16="http://schemas.microsoft.com/office/drawing/2014/main" id="{9A6E01A6-AB4F-4A7A-A71D-DA9AB60E5B7E}"/>
+                <a16:creationId xmlns:a16="http://schemas.microsoft.com/office/drawing/2014/main" id="{5F0471B1-9631-49F9-8ABB-8047EF604A6E}"/>
               </a:ext>
             </a:extLst>
           </p:cNvPr>
@@ -6065,7 +6132,7 @@
           <p:cNvPr id="18" name="">
             <a:extLst xmlns:a="http://schemas.openxmlformats.org/drawingml/2006/main">
               <a:ext uri="{FF2B5EF4-FFF2-40B4-BE49-F238E27FC236}">
-                <a16:creationId xmlns:a16="http://schemas.microsoft.com/office/drawing/2014/main" id="{F00452F0-9F21-44CC-83C7-C520CBAC9262}"/>
+                <a16:creationId xmlns:a16="http://schemas.microsoft.com/office/drawing/2014/main" id="{B75C8405-099B-4DAE-A1DD-36FD08BFCD9A}"/>
               </a:ext>
             </a:extLst>
           </p:cNvPr>
@@ -6125,7 +6192,7 @@
     </p:spTree>
     <p:extLst>
       <p:ext uri="{BB962C8B-B14F-4D97-AF65-F5344CB8AC3E}">
-        <p14:creationId xmlns:p14="http://schemas.microsoft.com/office/powerpoint/2010/main" val="2058638039"/>
+        <p14:creationId xmlns:p14="http://schemas.microsoft.com/office/powerpoint/2010/main" val="439946069"/>
       </p:ext>
     </p:extLst>
   </p:cSld>
@@ -6156,7 +6223,7 @@
           <p:cNvPr id="1" name="">
             <a:extLst xmlns:a="http://schemas.openxmlformats.org/drawingml/2006/main">
               <a:ext uri="{FF2B5EF4-FFF2-40B4-BE49-F238E27FC236}">
-                <a16:creationId xmlns:a16="http://schemas.microsoft.com/office/drawing/2014/main" id="{FE68D07D-2E60-4641-A275-2A4A31B76F28}"/>
+                <a16:creationId xmlns:a16="http://schemas.microsoft.com/office/drawing/2014/main" id="{692E46AA-BA89-45E8-B8A2-0251210DFF78}"/>
               </a:ext>
             </a:extLst>
           </p:cNvPr>
@@ -6191,7 +6258,7 @@
           <p:cNvPr id="2" name="">
             <a:extLst xmlns:a="http://schemas.openxmlformats.org/drawingml/2006/main">
               <a:ext uri="{FF2B5EF4-FFF2-40B4-BE49-F238E27FC236}">
-                <a16:creationId xmlns:a16="http://schemas.microsoft.com/office/drawing/2014/main" id="{487AB6BC-A8A0-4330-89FB-419A2FCE781D}"/>
+                <a16:creationId xmlns:a16="http://schemas.microsoft.com/office/drawing/2014/main" id="{0066D417-13F5-4580-B041-C6FF238F3A71}"/>
               </a:ext>
             </a:extLst>
           </p:cNvPr>
@@ -6255,7 +6322,7 @@
           <p:cNvPr id="3" name="">
             <a:extLst xmlns:a="http://schemas.openxmlformats.org/drawingml/2006/main">
               <a:ext uri="{FF2B5EF4-FFF2-40B4-BE49-F238E27FC236}">
-                <a16:creationId xmlns:a16="http://schemas.microsoft.com/office/drawing/2014/main" id="{40D4D4BA-BAA3-42B0-9087-B13D6A147901}"/>
+                <a16:creationId xmlns:a16="http://schemas.microsoft.com/office/drawing/2014/main" id="{7BD80EDA-448C-4233-80EB-FD2EC38F97EE}"/>
               </a:ext>
             </a:extLst>
           </p:cNvPr>
@@ -6319,7 +6386,7 @@
           <p:cNvPr id="4" name="">
             <a:extLst xmlns:a="http://schemas.openxmlformats.org/drawingml/2006/main">
               <a:ext uri="{FF2B5EF4-FFF2-40B4-BE49-F238E27FC236}">
-                <a16:creationId xmlns:a16="http://schemas.microsoft.com/office/drawing/2014/main" id="{F07D9BD5-716D-491A-A4EC-00230B65A7BA}"/>
+                <a16:creationId xmlns:a16="http://schemas.microsoft.com/office/drawing/2014/main" id="{DFF3231A-4E39-45A5-BBEB-9CA67BD5752A}"/>
               </a:ext>
             </a:extLst>
           </p:cNvPr>
@@ -6383,7 +6450,7 @@
           <p:cNvPr id="5" name="">
             <a:extLst xmlns:a="http://schemas.openxmlformats.org/drawingml/2006/main">
               <a:ext uri="{FF2B5EF4-FFF2-40B4-BE49-F238E27FC236}">
-                <a16:creationId xmlns:a16="http://schemas.microsoft.com/office/drawing/2014/main" id="{1ECC458D-CD5D-4528-A67F-B3D1C7D49A79}"/>
+                <a16:creationId xmlns:a16="http://schemas.microsoft.com/office/drawing/2014/main" id="{10BC8A84-2774-4E40-81C9-E4A7904F3A1B}"/>
               </a:ext>
             </a:extLst>
           </p:cNvPr>
@@ -6447,7 +6514,7 @@
           <p:cNvPr id="6" name="">
             <a:extLst xmlns:a="http://schemas.openxmlformats.org/drawingml/2006/main">
               <a:ext uri="{FF2B5EF4-FFF2-40B4-BE49-F238E27FC236}">
-                <a16:creationId xmlns:a16="http://schemas.microsoft.com/office/drawing/2014/main" id="{ADCF4EA0-9C9F-4CFE-A3D0-DEA32768D8DD}"/>
+                <a16:creationId xmlns:a16="http://schemas.microsoft.com/office/drawing/2014/main" id="{8D7C4753-A214-4F41-A8E9-B1F8F5BD9356}"/>
               </a:ext>
             </a:extLst>
           </p:cNvPr>
@@ -6480,7 +6547,7 @@
           <p:cNvPr id="7" name="">
             <a:extLst xmlns:a="http://schemas.openxmlformats.org/drawingml/2006/main">
               <a:ext uri="{FF2B5EF4-FFF2-40B4-BE49-F238E27FC236}">
-                <a16:creationId xmlns:a16="http://schemas.microsoft.com/office/drawing/2014/main" id="{61D1742C-2655-42DD-BB56-D84CCCB07F52}"/>
+                <a16:creationId xmlns:a16="http://schemas.microsoft.com/office/drawing/2014/main" id="{E7E00AC5-E621-450A-A8EA-C825D8798D52}"/>
               </a:ext>
             </a:extLst>
           </p:cNvPr>
@@ -6544,7 +6611,7 @@
           <p:cNvPr id="8" name="">
             <a:extLst xmlns:a="http://schemas.openxmlformats.org/drawingml/2006/main">
               <a:ext uri="{FF2B5EF4-FFF2-40B4-BE49-F238E27FC236}">
-                <a16:creationId xmlns:a16="http://schemas.microsoft.com/office/drawing/2014/main" id="{4489060F-0185-4970-8962-7FE13F4F6AFF}"/>
+                <a16:creationId xmlns:a16="http://schemas.microsoft.com/office/drawing/2014/main" id="{43DCCC6D-0F1B-4C2A-9690-396807FFDD99}"/>
               </a:ext>
             </a:extLst>
           </p:cNvPr>
@@ -6579,7 +6646,7 @@
           <p:cNvPr id="9" name="">
             <a:extLst xmlns:a="http://schemas.openxmlformats.org/drawingml/2006/main">
               <a:ext uri="{FF2B5EF4-FFF2-40B4-BE49-F238E27FC236}">
-                <a16:creationId xmlns:a16="http://schemas.microsoft.com/office/drawing/2014/main" id="{C09EF93F-5255-4E08-825C-7832AFA2FBA0}"/>
+                <a16:creationId xmlns:a16="http://schemas.microsoft.com/office/drawing/2014/main" id="{4FC96847-4787-46D9-8661-4DD12B3A0362}"/>
               </a:ext>
             </a:extLst>
           </p:cNvPr>
@@ -6612,7 +6679,7 @@
           <p:cNvPr id="10" name="">
             <a:extLst xmlns:a="http://schemas.openxmlformats.org/drawingml/2006/main">
               <a:ext uri="{FF2B5EF4-FFF2-40B4-BE49-F238E27FC236}">
-                <a16:creationId xmlns:a16="http://schemas.microsoft.com/office/drawing/2014/main" id="{8F268B67-B191-4AA7-8C02-D91DAE44CC04}"/>
+                <a16:creationId xmlns:a16="http://schemas.microsoft.com/office/drawing/2014/main" id="{FF5A7F5A-DEDD-4A8B-BF3D-A932E5121CBA}"/>
               </a:ext>
             </a:extLst>
           </p:cNvPr>
@@ -6676,7 +6743,7 @@
           <p:cNvPr id="11" name="">
             <a:extLst xmlns:a="http://schemas.openxmlformats.org/drawingml/2006/main">
               <a:ext uri="{FF2B5EF4-FFF2-40B4-BE49-F238E27FC236}">
-                <a16:creationId xmlns:a16="http://schemas.microsoft.com/office/drawing/2014/main" id="{B951E0BB-6397-4D0B-A5BB-275B99B41FDD}"/>
+                <a16:creationId xmlns:a16="http://schemas.microsoft.com/office/drawing/2014/main" id="{90FFDDA3-0905-4756-8614-85BFBBF5A7DC}"/>
               </a:ext>
             </a:extLst>
           </p:cNvPr>
@@ -6711,7 +6778,7 @@
           <p:cNvPr id="12" name="">
             <a:extLst xmlns:a="http://schemas.openxmlformats.org/drawingml/2006/main">
               <a:ext uri="{FF2B5EF4-FFF2-40B4-BE49-F238E27FC236}">
-                <a16:creationId xmlns:a16="http://schemas.microsoft.com/office/drawing/2014/main" id="{3B46D6A3-7A71-4442-965C-E2458411CDD5}"/>
+                <a16:creationId xmlns:a16="http://schemas.microsoft.com/office/drawing/2014/main" id="{5FF5428E-F3FD-4F92-AC27-919BC5ED0E65}"/>
               </a:ext>
             </a:extLst>
           </p:cNvPr>
@@ -6744,7 +6811,7 @@
           <p:cNvPr id="13" name="">
             <a:extLst xmlns:a="http://schemas.openxmlformats.org/drawingml/2006/main">
               <a:ext uri="{FF2B5EF4-FFF2-40B4-BE49-F238E27FC236}">
-                <a16:creationId xmlns:a16="http://schemas.microsoft.com/office/drawing/2014/main" id="{D96AE98F-1D2B-487F-B7B3-333E20DA0BB7}"/>
+                <a16:creationId xmlns:a16="http://schemas.microsoft.com/office/drawing/2014/main" id="{281E91DE-3FF0-43F1-AECE-5DC584A7E097}"/>
               </a:ext>
             </a:extLst>
           </p:cNvPr>
@@ -6808,7 +6875,7 @@
           <p:cNvPr id="14" name="">
             <a:extLst xmlns:a="http://schemas.openxmlformats.org/drawingml/2006/main">
               <a:ext uri="{FF2B5EF4-FFF2-40B4-BE49-F238E27FC236}">
-                <a16:creationId xmlns:a16="http://schemas.microsoft.com/office/drawing/2014/main" id="{51998446-1A91-4EEC-969C-9479EC58EEDC}"/>
+                <a16:creationId xmlns:a16="http://schemas.microsoft.com/office/drawing/2014/main" id="{69AB4558-5367-47B4-87EF-5AB14D0EEDA7}"/>
               </a:ext>
             </a:extLst>
           </p:cNvPr>
@@ -6843,7 +6910,7 @@
           <p:cNvPr id="15" name="">
             <a:extLst xmlns:a="http://schemas.openxmlformats.org/drawingml/2006/main">
               <a:ext uri="{FF2B5EF4-FFF2-40B4-BE49-F238E27FC236}">
-                <a16:creationId xmlns:a16="http://schemas.microsoft.com/office/drawing/2014/main" id="{D324C42D-FA24-4D14-BF39-D802DD126462}"/>
+                <a16:creationId xmlns:a16="http://schemas.microsoft.com/office/drawing/2014/main" id="{ABD5D445-BFB3-43E9-BC69-06F327B52D55}"/>
               </a:ext>
             </a:extLst>
           </p:cNvPr>
@@ -6876,7 +6943,7 @@
           <p:cNvPr id="16" name="">
             <a:extLst xmlns:a="http://schemas.openxmlformats.org/drawingml/2006/main">
               <a:ext uri="{FF2B5EF4-FFF2-40B4-BE49-F238E27FC236}">
-                <a16:creationId xmlns:a16="http://schemas.microsoft.com/office/drawing/2014/main" id="{57750872-41AA-484D-9CC6-BC32CABC7536}"/>
+                <a16:creationId xmlns:a16="http://schemas.microsoft.com/office/drawing/2014/main" id="{90CC4461-8FB6-4DAE-B92F-83EB34669561}"/>
               </a:ext>
             </a:extLst>
           </p:cNvPr>
@@ -6940,7 +7007,7 @@
           <p:cNvPr id="17" name="">
             <a:extLst xmlns:a="http://schemas.openxmlformats.org/drawingml/2006/main">
               <a:ext uri="{FF2B5EF4-FFF2-40B4-BE49-F238E27FC236}">
-                <a16:creationId xmlns:a16="http://schemas.microsoft.com/office/drawing/2014/main" id="{82C4BC9D-5274-4818-BEFB-75151619A4D2}"/>
+                <a16:creationId xmlns:a16="http://schemas.microsoft.com/office/drawing/2014/main" id="{943E6AEC-3AAA-4FCB-9365-5CF39BEC49AA}"/>
               </a:ext>
             </a:extLst>
           </p:cNvPr>
@@ -6975,7 +7042,7 @@
           <p:cNvPr id="18" name="">
             <a:extLst xmlns:a="http://schemas.openxmlformats.org/drawingml/2006/main">
               <a:ext uri="{FF2B5EF4-FFF2-40B4-BE49-F238E27FC236}">
-                <a16:creationId xmlns:a16="http://schemas.microsoft.com/office/drawing/2014/main" id="{217620B2-747E-49D5-8D7E-9141C6CBFA87}"/>
+                <a16:creationId xmlns:a16="http://schemas.microsoft.com/office/drawing/2014/main" id="{DBDCB7C5-EE93-47E7-8DB1-3A5A674A6FF8}"/>
               </a:ext>
             </a:extLst>
           </p:cNvPr>
@@ -7008,7 +7075,7 @@
           <p:cNvPr id="19" name="">
             <a:extLst xmlns:a="http://schemas.openxmlformats.org/drawingml/2006/main">
               <a:ext uri="{FF2B5EF4-FFF2-40B4-BE49-F238E27FC236}">
-                <a16:creationId xmlns:a16="http://schemas.microsoft.com/office/drawing/2014/main" id="{DA78351D-760A-4EF2-87D3-C187E3F76F47}"/>
+                <a16:creationId xmlns:a16="http://schemas.microsoft.com/office/drawing/2014/main" id="{2DCDEF64-68A6-4D07-858E-E6BF787EB86E}"/>
               </a:ext>
             </a:extLst>
           </p:cNvPr>
@@ -7072,7 +7139,7 @@
           <p:cNvPr id="20" name="">
             <a:extLst xmlns:a="http://schemas.openxmlformats.org/drawingml/2006/main">
               <a:ext uri="{FF2B5EF4-FFF2-40B4-BE49-F238E27FC236}">
-                <a16:creationId xmlns:a16="http://schemas.microsoft.com/office/drawing/2014/main" id="{EABC5375-E545-420A-9937-6C195E72AA3D}"/>
+                <a16:creationId xmlns:a16="http://schemas.microsoft.com/office/drawing/2014/main" id="{4306B8CC-BDD8-4D0C-A476-6B1CCF9FEACD}"/>
               </a:ext>
             </a:extLst>
           </p:cNvPr>
@@ -7107,7 +7174,7 @@
           <p:cNvPr id="21" name="">
             <a:extLst xmlns:a="http://schemas.openxmlformats.org/drawingml/2006/main">
               <a:ext uri="{FF2B5EF4-FFF2-40B4-BE49-F238E27FC236}">
-                <a16:creationId xmlns:a16="http://schemas.microsoft.com/office/drawing/2014/main" id="{B2EA1313-C056-4A50-AF08-76FC0ADA70D7}"/>
+                <a16:creationId xmlns:a16="http://schemas.microsoft.com/office/drawing/2014/main" id="{FD8B3B72-64F0-4796-92B6-DD6F0F215D90}"/>
               </a:ext>
             </a:extLst>
           </p:cNvPr>
@@ -7171,7 +7238,7 @@
           <p:cNvPr id="22" name="">
             <a:extLst xmlns:a="http://schemas.openxmlformats.org/drawingml/2006/main">
               <a:ext uri="{FF2B5EF4-FFF2-40B4-BE49-F238E27FC236}">
-                <a16:creationId xmlns:a16="http://schemas.microsoft.com/office/drawing/2014/main" id="{16E527F9-2A4C-4BEA-B3F3-89FD7AD07EC8}"/>
+                <a16:creationId xmlns:a16="http://schemas.microsoft.com/office/drawing/2014/main" id="{407080A0-A8ED-4954-A7CD-AEE78B000E61}"/>
               </a:ext>
             </a:extLst>
           </p:cNvPr>
@@ -7206,7 +7273,7 @@
           <p:cNvPr id="23" name="">
             <a:extLst xmlns:a="http://schemas.openxmlformats.org/drawingml/2006/main">
               <a:ext uri="{FF2B5EF4-FFF2-40B4-BE49-F238E27FC236}">
-                <a16:creationId xmlns:a16="http://schemas.microsoft.com/office/drawing/2014/main" id="{C260C899-BA01-44F4-B94F-D45C474FCAAF}"/>
+                <a16:creationId xmlns:a16="http://schemas.microsoft.com/office/drawing/2014/main" id="{942999EC-432C-4F51-A13D-AC8E8ED47952}"/>
               </a:ext>
             </a:extLst>
           </p:cNvPr>
@@ -7270,7 +7337,7 @@
           <p:cNvPr id="24" name="">
             <a:extLst xmlns:a="http://schemas.openxmlformats.org/drawingml/2006/main">
               <a:ext uri="{FF2B5EF4-FFF2-40B4-BE49-F238E27FC236}">
-                <a16:creationId xmlns:a16="http://schemas.microsoft.com/office/drawing/2014/main" id="{8C0F9524-DC6D-49D4-9009-DD9EED9F9472}"/>
+                <a16:creationId xmlns:a16="http://schemas.microsoft.com/office/drawing/2014/main" id="{CDDC48F2-6546-4022-9777-DC58666F8C41}"/>
               </a:ext>
             </a:extLst>
           </p:cNvPr>
@@ -7305,7 +7372,7 @@
           <p:cNvPr id="25" name="">
             <a:extLst xmlns:a="http://schemas.openxmlformats.org/drawingml/2006/main">
               <a:ext uri="{FF2B5EF4-FFF2-40B4-BE49-F238E27FC236}">
-                <a16:creationId xmlns:a16="http://schemas.microsoft.com/office/drawing/2014/main" id="{C5661A72-3E27-4F11-A38E-1B6A35739633}"/>
+                <a16:creationId xmlns:a16="http://schemas.microsoft.com/office/drawing/2014/main" id="{4170222D-92A7-4326-9130-8F8E4D70EC98}"/>
               </a:ext>
             </a:extLst>
           </p:cNvPr>
@@ -7367,7 +7434,7 @@
     </p:spTree>
     <p:extLst>
       <p:ext uri="{BB962C8B-B14F-4D97-AF65-F5344CB8AC3E}">
-        <p14:creationId xmlns:p14="http://schemas.microsoft.com/office/powerpoint/2010/main" val="702533981"/>
+        <p14:creationId xmlns:p14="http://schemas.microsoft.com/office/powerpoint/2010/main" val="2099337252"/>
       </p:ext>
     </p:extLst>
   </p:cSld>
@@ -7398,7 +7465,7 @@
           <p:cNvPr id="1" name="">
             <a:extLst xmlns:a="http://schemas.openxmlformats.org/drawingml/2006/main">
               <a:ext uri="{FF2B5EF4-FFF2-40B4-BE49-F238E27FC236}">
-                <a16:creationId xmlns:a16="http://schemas.microsoft.com/office/drawing/2014/main" id="{EBFDE00E-B470-4B59-8FA9-7EC2037CE8A2}"/>
+                <a16:creationId xmlns:a16="http://schemas.microsoft.com/office/drawing/2014/main" id="{0F8DB89D-7FEA-4070-9D42-9F4B0682BE30}"/>
               </a:ext>
             </a:extLst>
           </p:cNvPr>
@@ -7433,7 +7500,7 @@
           <p:cNvPr id="2" name="">
             <a:extLst xmlns:a="http://schemas.openxmlformats.org/drawingml/2006/main">
               <a:ext uri="{FF2B5EF4-FFF2-40B4-BE49-F238E27FC236}">
-                <a16:creationId xmlns:a16="http://schemas.microsoft.com/office/drawing/2014/main" id="{14A13C81-C625-4423-86A9-2AD5E7A1C59C}"/>
+                <a16:creationId xmlns:a16="http://schemas.microsoft.com/office/drawing/2014/main" id="{BAFBBA58-E1DA-4A52-BF1F-FBFA566F0084}"/>
               </a:ext>
             </a:extLst>
           </p:cNvPr>
@@ -7497,7 +7564,7 @@
           <p:cNvPr id="3" name="">
             <a:extLst xmlns:a="http://schemas.openxmlformats.org/drawingml/2006/main">
               <a:ext uri="{FF2B5EF4-FFF2-40B4-BE49-F238E27FC236}">
-                <a16:creationId xmlns:a16="http://schemas.microsoft.com/office/drawing/2014/main" id="{D7AC2DA3-3027-459E-B7F8-4FAA9136962B}"/>
+                <a16:creationId xmlns:a16="http://schemas.microsoft.com/office/drawing/2014/main" id="{3768762B-25EF-4B9A-8504-15964F5F7351}"/>
               </a:ext>
             </a:extLst>
           </p:cNvPr>
@@ -7561,7 +7628,7 @@
           <p:cNvPr id="4" name="">
             <a:extLst xmlns:a="http://schemas.openxmlformats.org/drawingml/2006/main">
               <a:ext uri="{FF2B5EF4-FFF2-40B4-BE49-F238E27FC236}">
-                <a16:creationId xmlns:a16="http://schemas.microsoft.com/office/drawing/2014/main" id="{9027B7C6-A89A-4420-B501-6DBB2D3CE520}"/>
+                <a16:creationId xmlns:a16="http://schemas.microsoft.com/office/drawing/2014/main" id="{A2B46AA1-8EE4-43AC-B784-91BFF8DBA97C}"/>
               </a:ext>
             </a:extLst>
           </p:cNvPr>
@@ -7625,7 +7692,7 @@
           <p:cNvPr id="5" name="">
             <a:extLst xmlns:a="http://schemas.openxmlformats.org/drawingml/2006/main">
               <a:ext uri="{FF2B5EF4-FFF2-40B4-BE49-F238E27FC236}">
-                <a16:creationId xmlns:a16="http://schemas.microsoft.com/office/drawing/2014/main" id="{71F8B8DA-FA5A-45B5-9BF1-FA41FCD28D48}"/>
+                <a16:creationId xmlns:a16="http://schemas.microsoft.com/office/drawing/2014/main" id="{A043AAF9-DA61-46A7-88AB-D666A7984CF4}"/>
               </a:ext>
             </a:extLst>
           </p:cNvPr>
@@ -7689,7 +7756,7 @@
           <p:cNvPr id="6" name="">
             <a:extLst xmlns:a="http://schemas.openxmlformats.org/drawingml/2006/main">
               <a:ext uri="{FF2B5EF4-FFF2-40B4-BE49-F238E27FC236}">
-                <a16:creationId xmlns:a16="http://schemas.microsoft.com/office/drawing/2014/main" id="{CBED8CE7-A3EF-4C4B-9119-3E795BB0470E}"/>
+                <a16:creationId xmlns:a16="http://schemas.microsoft.com/office/drawing/2014/main" id="{88528041-A58B-4B79-85BE-41E447E54EDE}"/>
               </a:ext>
             </a:extLst>
           </p:cNvPr>
@@ -7722,7 +7789,7 @@
           <p:cNvPr id="7" name="">
             <a:extLst xmlns:a="http://schemas.openxmlformats.org/drawingml/2006/main">
               <a:ext uri="{FF2B5EF4-FFF2-40B4-BE49-F238E27FC236}">
-                <a16:creationId xmlns:a16="http://schemas.microsoft.com/office/drawing/2014/main" id="{38E1BE2B-B99A-4F13-AB54-C6FACA50B42D}"/>
+                <a16:creationId xmlns:a16="http://schemas.microsoft.com/office/drawing/2014/main" id="{7EE91F26-ABCB-427F-BF4B-C6B5CB17EF1C}"/>
               </a:ext>
             </a:extLst>
           </p:cNvPr>
@@ -7757,7 +7824,7 @@
           <p:cNvPr id="8" name="">
             <a:extLst xmlns:a="http://schemas.openxmlformats.org/drawingml/2006/main">
               <a:ext uri="{FF2B5EF4-FFF2-40B4-BE49-F238E27FC236}">
-                <a16:creationId xmlns:a16="http://schemas.microsoft.com/office/drawing/2014/main" id="{78FBFBA7-6349-4555-9BD0-8C91829B0CB4}"/>
+                <a16:creationId xmlns:a16="http://schemas.microsoft.com/office/drawing/2014/main" id="{CE34159F-6260-4AAD-9125-8E3735161AC8}"/>
               </a:ext>
             </a:extLst>
           </p:cNvPr>
@@ -7821,7 +7888,7 @@
           <p:cNvPr id="9" name="">
             <a:extLst xmlns:a="http://schemas.openxmlformats.org/drawingml/2006/main">
               <a:ext uri="{FF2B5EF4-FFF2-40B4-BE49-F238E27FC236}">
-                <a16:creationId xmlns:a16="http://schemas.microsoft.com/office/drawing/2014/main" id="{23C1FFDA-884F-4A33-A77D-9AD3ACEBEE32}"/>
+                <a16:creationId xmlns:a16="http://schemas.microsoft.com/office/drawing/2014/main" id="{1F849DC9-D7B7-41B9-8C6C-9508FEEB0B30}"/>
               </a:ext>
             </a:extLst>
           </p:cNvPr>
@@ -7885,7 +7952,7 @@
           <p:cNvPr id="10" name="">
             <a:extLst xmlns:a="http://schemas.openxmlformats.org/drawingml/2006/main">
               <a:ext uri="{FF2B5EF4-FFF2-40B4-BE49-F238E27FC236}">
-                <a16:creationId xmlns:a16="http://schemas.microsoft.com/office/drawing/2014/main" id="{6803391A-9C35-4E4C-91E3-41519ECAC786}"/>
+                <a16:creationId xmlns:a16="http://schemas.microsoft.com/office/drawing/2014/main" id="{3FE0E700-C9B1-47E3-9205-D21A5E695516}"/>
               </a:ext>
             </a:extLst>
           </p:cNvPr>
@@ -7918,7 +7985,7 @@
           <p:cNvPr id="11" name="">
             <a:extLst xmlns:a="http://schemas.openxmlformats.org/drawingml/2006/main">
               <a:ext uri="{FF2B5EF4-FFF2-40B4-BE49-F238E27FC236}">
-                <a16:creationId xmlns:a16="http://schemas.microsoft.com/office/drawing/2014/main" id="{3AD545B1-BFC2-45A5-961C-DEC2B0B6F7CD}"/>
+                <a16:creationId xmlns:a16="http://schemas.microsoft.com/office/drawing/2014/main" id="{6DFF37D6-0FC8-4F93-8E6F-EDC8D3A2E5DC}"/>
               </a:ext>
             </a:extLst>
           </p:cNvPr>
@@ -7953,7 +8020,7 @@
           <p:cNvPr id="12" name="">
             <a:extLst xmlns:a="http://schemas.openxmlformats.org/drawingml/2006/main">
               <a:ext uri="{FF2B5EF4-FFF2-40B4-BE49-F238E27FC236}">
-                <a16:creationId xmlns:a16="http://schemas.microsoft.com/office/drawing/2014/main" id="{4514C0C4-CE2E-4FCC-8C14-24574C2AB934}"/>
+                <a16:creationId xmlns:a16="http://schemas.microsoft.com/office/drawing/2014/main" id="{CCBED6AD-E5DC-4EBE-9E25-628CC9788483}"/>
               </a:ext>
             </a:extLst>
           </p:cNvPr>
@@ -8017,7 +8084,7 @@
           <p:cNvPr id="13" name="">
             <a:extLst xmlns:a="http://schemas.openxmlformats.org/drawingml/2006/main">
               <a:ext uri="{FF2B5EF4-FFF2-40B4-BE49-F238E27FC236}">
-                <a16:creationId xmlns:a16="http://schemas.microsoft.com/office/drawing/2014/main" id="{BD7B9E6B-1B37-4F87-9520-1860613D2C25}"/>
+                <a16:creationId xmlns:a16="http://schemas.microsoft.com/office/drawing/2014/main" id="{57C3DC24-7CF7-44B9-B166-20D8C0BC9383}"/>
               </a:ext>
             </a:extLst>
           </p:cNvPr>
@@ -8081,7 +8148,7 @@
           <p:cNvPr id="14" name="">
             <a:extLst xmlns:a="http://schemas.openxmlformats.org/drawingml/2006/main">
               <a:ext uri="{FF2B5EF4-FFF2-40B4-BE49-F238E27FC236}">
-                <a16:creationId xmlns:a16="http://schemas.microsoft.com/office/drawing/2014/main" id="{8011AE73-7E3B-4C60-9642-B4538651B990}"/>
+                <a16:creationId xmlns:a16="http://schemas.microsoft.com/office/drawing/2014/main" id="{DBA77E67-AAD7-4D4F-931F-F3988489DBF2}"/>
               </a:ext>
             </a:extLst>
           </p:cNvPr>
@@ -8114,7 +8181,7 @@
           <p:cNvPr id="15" name="">
             <a:extLst xmlns:a="http://schemas.openxmlformats.org/drawingml/2006/main">
               <a:ext uri="{FF2B5EF4-FFF2-40B4-BE49-F238E27FC236}">
-                <a16:creationId xmlns:a16="http://schemas.microsoft.com/office/drawing/2014/main" id="{109D9192-C9AE-46C1-8716-B12F8E838797}"/>
+                <a16:creationId xmlns:a16="http://schemas.microsoft.com/office/drawing/2014/main" id="{062C199B-E042-45EA-92A0-B2E7D39C9E47}"/>
               </a:ext>
             </a:extLst>
           </p:cNvPr>
@@ -8149,7 +8216,7 @@
           <p:cNvPr id="16" name="">
             <a:extLst xmlns:a="http://schemas.openxmlformats.org/drawingml/2006/main">
               <a:ext uri="{FF2B5EF4-FFF2-40B4-BE49-F238E27FC236}">
-                <a16:creationId xmlns:a16="http://schemas.microsoft.com/office/drawing/2014/main" id="{60DBDCA9-038E-4E2F-9B6F-884255B83EE9}"/>
+                <a16:creationId xmlns:a16="http://schemas.microsoft.com/office/drawing/2014/main" id="{D7720ECC-BCA7-423F-8198-8D41A9E282D8}"/>
               </a:ext>
             </a:extLst>
           </p:cNvPr>
@@ -8213,7 +8280,7 @@
           <p:cNvPr id="17" name="">
             <a:extLst xmlns:a="http://schemas.openxmlformats.org/drawingml/2006/main">
               <a:ext uri="{FF2B5EF4-FFF2-40B4-BE49-F238E27FC236}">
-                <a16:creationId xmlns:a16="http://schemas.microsoft.com/office/drawing/2014/main" id="{78E8E2AA-484D-4D3B-B064-5FAC7B0C82F1}"/>
+                <a16:creationId xmlns:a16="http://schemas.microsoft.com/office/drawing/2014/main" id="{3D0199C2-4496-4843-8A48-AC63E0FD07DB}"/>
               </a:ext>
             </a:extLst>
           </p:cNvPr>
@@ -8277,7 +8344,7 @@
           <p:cNvPr id="18" name="">
             <a:extLst xmlns:a="http://schemas.openxmlformats.org/drawingml/2006/main">
               <a:ext uri="{FF2B5EF4-FFF2-40B4-BE49-F238E27FC236}">
-                <a16:creationId xmlns:a16="http://schemas.microsoft.com/office/drawing/2014/main" id="{F4981F16-30F3-4A93-9189-063EA5EC57E3}"/>
+                <a16:creationId xmlns:a16="http://schemas.microsoft.com/office/drawing/2014/main" id="{9096091A-279B-4DD3-A736-1E20097E8D59}"/>
               </a:ext>
             </a:extLst>
           </p:cNvPr>
@@ -8310,7 +8377,7 @@
           <p:cNvPr id="19" name="">
             <a:extLst xmlns:a="http://schemas.openxmlformats.org/drawingml/2006/main">
               <a:ext uri="{FF2B5EF4-FFF2-40B4-BE49-F238E27FC236}">
-                <a16:creationId xmlns:a16="http://schemas.microsoft.com/office/drawing/2014/main" id="{6C03F52D-4D0B-4E57-BF8A-0299C4BEAA5E}"/>
+                <a16:creationId xmlns:a16="http://schemas.microsoft.com/office/drawing/2014/main" id="{D99BEBCA-549C-4C4C-A50C-8409711ECBE9}"/>
               </a:ext>
             </a:extLst>
           </p:cNvPr>
@@ -8345,7 +8412,7 @@
           <p:cNvPr id="20" name="">
             <a:extLst xmlns:a="http://schemas.openxmlformats.org/drawingml/2006/main">
               <a:ext uri="{FF2B5EF4-FFF2-40B4-BE49-F238E27FC236}">
-                <a16:creationId xmlns:a16="http://schemas.microsoft.com/office/drawing/2014/main" id="{2CEBF7F9-907F-41D6-902B-511D9DECF8B1}"/>
+                <a16:creationId xmlns:a16="http://schemas.microsoft.com/office/drawing/2014/main" id="{FACD8615-71A9-4099-9996-5D7D1E397228}"/>
               </a:ext>
             </a:extLst>
           </p:cNvPr>
@@ -8409,7 +8476,7 @@
           <p:cNvPr id="21" name="">
             <a:extLst xmlns:a="http://schemas.openxmlformats.org/drawingml/2006/main">
               <a:ext uri="{FF2B5EF4-FFF2-40B4-BE49-F238E27FC236}">
-                <a16:creationId xmlns:a16="http://schemas.microsoft.com/office/drawing/2014/main" id="{6CC4619C-892B-4F9D-98BE-20EC302388B5}"/>
+                <a16:creationId xmlns:a16="http://schemas.microsoft.com/office/drawing/2014/main" id="{1F8FE9E7-F81A-4C5A-A31F-641ED20B596F}"/>
               </a:ext>
             </a:extLst>
           </p:cNvPr>
@@ -8473,7 +8540,7 @@
           <p:cNvPr id="22" name="">
             <a:extLst xmlns:a="http://schemas.openxmlformats.org/drawingml/2006/main">
               <a:ext uri="{FF2B5EF4-FFF2-40B4-BE49-F238E27FC236}">
-                <a16:creationId xmlns:a16="http://schemas.microsoft.com/office/drawing/2014/main" id="{BBE2600B-D9F6-4F35-A634-6F5263ACE8D5}"/>
+                <a16:creationId xmlns:a16="http://schemas.microsoft.com/office/drawing/2014/main" id="{E5FA78F7-04EE-4B41-97FE-33EE998A5FE8}"/>
               </a:ext>
             </a:extLst>
           </p:cNvPr>
@@ -8506,7 +8573,7 @@
           <p:cNvPr id="23" name="">
             <a:extLst xmlns:a="http://schemas.openxmlformats.org/drawingml/2006/main">
               <a:ext uri="{FF2B5EF4-FFF2-40B4-BE49-F238E27FC236}">
-                <a16:creationId xmlns:a16="http://schemas.microsoft.com/office/drawing/2014/main" id="{C8504E9B-3A1C-4841-9A34-8FD53C9215B5}"/>
+                <a16:creationId xmlns:a16="http://schemas.microsoft.com/office/drawing/2014/main" id="{C8079AA6-E7DC-410C-AABB-94813F939E87}"/>
               </a:ext>
             </a:extLst>
           </p:cNvPr>
@@ -8541,7 +8608,7 @@
           <p:cNvPr id="24" name="">
             <a:extLst xmlns:a="http://schemas.openxmlformats.org/drawingml/2006/main">
               <a:ext uri="{FF2B5EF4-FFF2-40B4-BE49-F238E27FC236}">
-                <a16:creationId xmlns:a16="http://schemas.microsoft.com/office/drawing/2014/main" id="{535EE577-EC8F-4677-9799-71D4E81C3820}"/>
+                <a16:creationId xmlns:a16="http://schemas.microsoft.com/office/drawing/2014/main" id="{1161A341-C8C2-4E8A-9BC5-7BDC671E5CB0}"/>
               </a:ext>
             </a:extLst>
           </p:cNvPr>
@@ -8605,7 +8672,7 @@
           <p:cNvPr id="25" name="">
             <a:extLst xmlns:a="http://schemas.openxmlformats.org/drawingml/2006/main">
               <a:ext uri="{FF2B5EF4-FFF2-40B4-BE49-F238E27FC236}">
-                <a16:creationId xmlns:a16="http://schemas.microsoft.com/office/drawing/2014/main" id="{458BDFD6-7BCC-4646-A208-D5A0E33123B0}"/>
+                <a16:creationId xmlns:a16="http://schemas.microsoft.com/office/drawing/2014/main" id="{B77E582E-74AA-4867-9417-9B31BE3FB729}"/>
               </a:ext>
             </a:extLst>
           </p:cNvPr>
@@ -8669,7 +8736,7 @@
           <p:cNvPr id="26" name="">
             <a:extLst xmlns:a="http://schemas.openxmlformats.org/drawingml/2006/main">
               <a:ext uri="{FF2B5EF4-FFF2-40B4-BE49-F238E27FC236}">
-                <a16:creationId xmlns:a16="http://schemas.microsoft.com/office/drawing/2014/main" id="{FECBBC67-D4F9-4FB6-A6EE-10BC8E563603}"/>
+                <a16:creationId xmlns:a16="http://schemas.microsoft.com/office/drawing/2014/main" id="{26F5C9F0-05B0-4CD6-8A1C-AC15789DC7F6}"/>
               </a:ext>
             </a:extLst>
           </p:cNvPr>
@@ -8702,7 +8769,7 @@
           <p:cNvPr id="27" name="">
             <a:extLst xmlns:a="http://schemas.openxmlformats.org/drawingml/2006/main">
               <a:ext uri="{FF2B5EF4-FFF2-40B4-BE49-F238E27FC236}">
-                <a16:creationId xmlns:a16="http://schemas.microsoft.com/office/drawing/2014/main" id="{D4DEDB88-60C7-4410-8DBE-D1B5848EE897}"/>
+                <a16:creationId xmlns:a16="http://schemas.microsoft.com/office/drawing/2014/main" id="{DC5350D1-D3D0-4F8E-933A-C34BD7650879}"/>
               </a:ext>
             </a:extLst>
           </p:cNvPr>
@@ -8766,7 +8833,7 @@
           <p:cNvPr id="28" name="">
             <a:extLst xmlns:a="http://schemas.openxmlformats.org/drawingml/2006/main">
               <a:ext uri="{FF2B5EF4-FFF2-40B4-BE49-F238E27FC236}">
-                <a16:creationId xmlns:a16="http://schemas.microsoft.com/office/drawing/2014/main" id="{9B2E64F6-5C0B-48B6-931A-6D160305E16B}"/>
+                <a16:creationId xmlns:a16="http://schemas.microsoft.com/office/drawing/2014/main" id="{3C4C8839-F81B-431D-A54E-2215E483F753}"/>
               </a:ext>
             </a:extLst>
           </p:cNvPr>
@@ -8830,7 +8897,7 @@
           <p:cNvPr id="29" name="">
             <a:extLst xmlns:a="http://schemas.openxmlformats.org/drawingml/2006/main">
               <a:ext uri="{FF2B5EF4-FFF2-40B4-BE49-F238E27FC236}">
-                <a16:creationId xmlns:a16="http://schemas.microsoft.com/office/drawing/2014/main" id="{297D6F5F-31B8-42D8-848F-9FF451C40ECD}"/>
+                <a16:creationId xmlns:a16="http://schemas.microsoft.com/office/drawing/2014/main" id="{9BE70956-A29C-4C93-8CDB-03FF53C2C934}"/>
               </a:ext>
             </a:extLst>
           </p:cNvPr>
@@ -8894,7 +8961,7 @@
           <p:cNvPr id="30" name="">
             <a:extLst xmlns:a="http://schemas.openxmlformats.org/drawingml/2006/main">
               <a:ext uri="{FF2B5EF4-FFF2-40B4-BE49-F238E27FC236}">
-                <a16:creationId xmlns:a16="http://schemas.microsoft.com/office/drawing/2014/main" id="{88EEEE4F-AB90-49CB-A18A-7AA7AA58F969}"/>
+                <a16:creationId xmlns:a16="http://schemas.microsoft.com/office/drawing/2014/main" id="{38C2AE11-8326-484B-B4EF-E261D83C9F23}"/>
               </a:ext>
             </a:extLst>
           </p:cNvPr>
@@ -8958,7 +9025,7 @@
           <p:cNvPr id="31" name="">
             <a:extLst xmlns:a="http://schemas.openxmlformats.org/drawingml/2006/main">
               <a:ext uri="{FF2B5EF4-FFF2-40B4-BE49-F238E27FC236}">
-                <a16:creationId xmlns:a16="http://schemas.microsoft.com/office/drawing/2014/main" id="{CB5BEEEA-6C34-4119-BAD9-9F5A79B8D8FA}"/>
+                <a16:creationId xmlns:a16="http://schemas.microsoft.com/office/drawing/2014/main" id="{A08AA8A0-57CD-47D7-B19D-7EE4239CB545}"/>
               </a:ext>
             </a:extLst>
           </p:cNvPr>
@@ -9022,7 +9089,7 @@
           <p:cNvPr id="32" name="">
             <a:extLst xmlns:a="http://schemas.openxmlformats.org/drawingml/2006/main">
               <a:ext uri="{FF2B5EF4-FFF2-40B4-BE49-F238E27FC236}">
-                <a16:creationId xmlns:a16="http://schemas.microsoft.com/office/drawing/2014/main" id="{20E1617F-60C5-4769-9F5E-FBD06016E596}"/>
+                <a16:creationId xmlns:a16="http://schemas.microsoft.com/office/drawing/2014/main" id="{8350F94B-24BB-4F0E-8DAE-DEC5FB1121D8}"/>
               </a:ext>
             </a:extLst>
           </p:cNvPr>
@@ -9082,7 +9149,7 @@
     </p:spTree>
     <p:extLst>
       <p:ext uri="{BB962C8B-B14F-4D97-AF65-F5344CB8AC3E}">
-        <p14:creationId xmlns:p14="http://schemas.microsoft.com/office/powerpoint/2010/main" val="1953126477"/>
+        <p14:creationId xmlns:p14="http://schemas.microsoft.com/office/powerpoint/2010/main" val="199636441"/>
       </p:ext>
     </p:extLst>
   </p:cSld>
@@ -9113,7 +9180,7 @@
           <p:cNvPr id="1" name="">
             <a:extLst xmlns:a="http://schemas.openxmlformats.org/drawingml/2006/main">
               <a:ext uri="{FF2B5EF4-FFF2-40B4-BE49-F238E27FC236}">
-                <a16:creationId xmlns:a16="http://schemas.microsoft.com/office/drawing/2014/main" id="{5831939E-97C2-49A5-9193-620986EA741B}"/>
+                <a16:creationId xmlns:a16="http://schemas.microsoft.com/office/drawing/2014/main" id="{D060A2F6-EB47-42E6-BE5F-81E695B4BBC5}"/>
               </a:ext>
             </a:extLst>
           </p:cNvPr>
@@ -9148,7 +9215,7 @@
           <p:cNvPr id="2" name="">
             <a:extLst xmlns:a="http://schemas.openxmlformats.org/drawingml/2006/main">
               <a:ext uri="{FF2B5EF4-FFF2-40B4-BE49-F238E27FC236}">
-                <a16:creationId xmlns:a16="http://schemas.microsoft.com/office/drawing/2014/main" id="{693717BD-A7EE-44E4-9B76-1CF04FC6C09D}"/>
+                <a16:creationId xmlns:a16="http://schemas.microsoft.com/office/drawing/2014/main" id="{EB2EDA23-7276-465E-A43B-FC646D6061D5}"/>
               </a:ext>
             </a:extLst>
           </p:cNvPr>
@@ -9212,7 +9279,7 @@
           <p:cNvPr id="3" name="">
             <a:extLst xmlns:a="http://schemas.openxmlformats.org/drawingml/2006/main">
               <a:ext uri="{FF2B5EF4-FFF2-40B4-BE49-F238E27FC236}">
-                <a16:creationId xmlns:a16="http://schemas.microsoft.com/office/drawing/2014/main" id="{EF8B89E8-4F1C-4555-BF93-CCFB18617CFE}"/>
+                <a16:creationId xmlns:a16="http://schemas.microsoft.com/office/drawing/2014/main" id="{733FCC5E-090F-4338-ADFE-3092CB8BF61F}"/>
               </a:ext>
             </a:extLst>
           </p:cNvPr>
@@ -9276,7 +9343,7 @@
           <p:cNvPr id="4" name="">
             <a:extLst xmlns:a="http://schemas.openxmlformats.org/drawingml/2006/main">
               <a:ext uri="{FF2B5EF4-FFF2-40B4-BE49-F238E27FC236}">
-                <a16:creationId xmlns:a16="http://schemas.microsoft.com/office/drawing/2014/main" id="{54C7AA52-7E90-42BD-BAAD-DEE5700450A0}"/>
+                <a16:creationId xmlns:a16="http://schemas.microsoft.com/office/drawing/2014/main" id="{5F15D178-17B0-41CD-9898-5CF8E2B105CC}"/>
               </a:ext>
             </a:extLst>
           </p:cNvPr>
@@ -9340,7 +9407,7 @@
           <p:cNvPr id="5" name="">
             <a:extLst xmlns:a="http://schemas.openxmlformats.org/drawingml/2006/main">
               <a:ext uri="{FF2B5EF4-FFF2-40B4-BE49-F238E27FC236}">
-                <a16:creationId xmlns:a16="http://schemas.microsoft.com/office/drawing/2014/main" id="{3AAACEC7-05AC-4A54-9FDE-2478FFD73505}"/>
+                <a16:creationId xmlns:a16="http://schemas.microsoft.com/office/drawing/2014/main" id="{8E699A83-09F2-4DA8-80D1-FBF7A6F679E4}"/>
               </a:ext>
             </a:extLst>
           </p:cNvPr>
@@ -9404,7 +9471,7 @@
           <p:cNvPr id="6" name="">
             <a:extLst xmlns:a="http://schemas.openxmlformats.org/drawingml/2006/main">
               <a:ext uri="{FF2B5EF4-FFF2-40B4-BE49-F238E27FC236}">
-                <a16:creationId xmlns:a16="http://schemas.microsoft.com/office/drawing/2014/main" id="{F3ECD081-1026-49BD-A89E-69B78F29F448}"/>
+                <a16:creationId xmlns:a16="http://schemas.microsoft.com/office/drawing/2014/main" id="{C8305615-897C-4401-A894-A7703BDB367B}"/>
               </a:ext>
             </a:extLst>
           </p:cNvPr>
@@ -9466,7 +9533,7 @@
           <p:cNvPr id="7" name="">
             <a:extLst xmlns:a="http://schemas.openxmlformats.org/drawingml/2006/main">
               <a:ext uri="{FF2B5EF4-FFF2-40B4-BE49-F238E27FC236}">
-                <a16:creationId xmlns:a16="http://schemas.microsoft.com/office/drawing/2014/main" id="{83471581-F962-4107-81CE-0020AC70CF92}"/>
+                <a16:creationId xmlns:a16="http://schemas.microsoft.com/office/drawing/2014/main" id="{84A24FCA-53BC-4AB4-AE4B-7D0EBAD70D80}"/>
               </a:ext>
             </a:extLst>
           </p:cNvPr>
@@ -9499,7 +9566,7 @@
           <p:cNvPr id="8" name="">
             <a:extLst xmlns:a="http://schemas.openxmlformats.org/drawingml/2006/main">
               <a:ext uri="{FF2B5EF4-FFF2-40B4-BE49-F238E27FC236}">
-                <a16:creationId xmlns:a16="http://schemas.microsoft.com/office/drawing/2014/main" id="{F3315EBB-A937-4CF6-80F3-154586A87B7E}"/>
+                <a16:creationId xmlns:a16="http://schemas.microsoft.com/office/drawing/2014/main" id="{1C987BA3-2A5B-4CB8-A0A4-1821A67EB1A3}"/>
               </a:ext>
             </a:extLst>
           </p:cNvPr>
@@ -9534,7 +9601,7 @@
           <p:cNvPr id="9" name="">
             <a:extLst xmlns:a="http://schemas.openxmlformats.org/drawingml/2006/main">
               <a:ext uri="{FF2B5EF4-FFF2-40B4-BE49-F238E27FC236}">
-                <a16:creationId xmlns:a16="http://schemas.microsoft.com/office/drawing/2014/main" id="{82303516-4A37-4767-A073-1690D4DFAF2C}"/>
+                <a16:creationId xmlns:a16="http://schemas.microsoft.com/office/drawing/2014/main" id="{D32A4F67-5068-4DD0-A96A-FE372B290AC7}"/>
               </a:ext>
             </a:extLst>
           </p:cNvPr>
@@ -9598,7 +9665,7 @@
           <p:cNvPr id="10" name="">
             <a:extLst xmlns:a="http://schemas.openxmlformats.org/drawingml/2006/main">
               <a:ext uri="{FF2B5EF4-FFF2-40B4-BE49-F238E27FC236}">
-                <a16:creationId xmlns:a16="http://schemas.microsoft.com/office/drawing/2014/main" id="{097DD74D-971E-4DEE-8BE3-BBE79BA47A8C}"/>
+                <a16:creationId xmlns:a16="http://schemas.microsoft.com/office/drawing/2014/main" id="{48B85D57-FD18-4083-AC7A-61A3974ADA93}"/>
               </a:ext>
             </a:extLst>
           </p:cNvPr>
@@ -9662,7 +9729,7 @@
           <p:cNvPr id="11" name="">
             <a:extLst xmlns:a="http://schemas.openxmlformats.org/drawingml/2006/main">
               <a:ext uri="{FF2B5EF4-FFF2-40B4-BE49-F238E27FC236}">
-                <a16:creationId xmlns:a16="http://schemas.microsoft.com/office/drawing/2014/main" id="{99F72FAA-5FAC-4720-8797-4AF0E8809BB9}"/>
+                <a16:creationId xmlns:a16="http://schemas.microsoft.com/office/drawing/2014/main" id="{EC3E3C50-4318-41D4-BA92-3294DFEBAC4F}"/>
               </a:ext>
             </a:extLst>
           </p:cNvPr>
@@ -9695,7 +9762,7 @@
           <p:cNvPr id="12" name="">
             <a:extLst xmlns:a="http://schemas.openxmlformats.org/drawingml/2006/main">
               <a:ext uri="{FF2B5EF4-FFF2-40B4-BE49-F238E27FC236}">
-                <a16:creationId xmlns:a16="http://schemas.microsoft.com/office/drawing/2014/main" id="{E22E8CF1-7A20-43D9-B879-4233E3E5D9F0}"/>
+                <a16:creationId xmlns:a16="http://schemas.microsoft.com/office/drawing/2014/main" id="{589AC47A-3DAB-496C-81D0-259ED05F8B69}"/>
               </a:ext>
             </a:extLst>
           </p:cNvPr>
@@ -9730,7 +9797,7 @@
           <p:cNvPr id="13" name="">
             <a:extLst xmlns:a="http://schemas.openxmlformats.org/drawingml/2006/main">
               <a:ext uri="{FF2B5EF4-FFF2-40B4-BE49-F238E27FC236}">
-                <a16:creationId xmlns:a16="http://schemas.microsoft.com/office/drawing/2014/main" id="{17BC0237-8AA7-4D3E-A3BE-9D5355031EE6}"/>
+                <a16:creationId xmlns:a16="http://schemas.microsoft.com/office/drawing/2014/main" id="{50886807-B877-47F7-8DB4-9DDB2E1141F4}"/>
               </a:ext>
             </a:extLst>
           </p:cNvPr>
@@ -9794,7 +9861,7 @@
           <p:cNvPr id="14" name="">
             <a:extLst xmlns:a="http://schemas.openxmlformats.org/drawingml/2006/main">
               <a:ext uri="{FF2B5EF4-FFF2-40B4-BE49-F238E27FC236}">
-                <a16:creationId xmlns:a16="http://schemas.microsoft.com/office/drawing/2014/main" id="{EB31C116-F826-4238-89C0-89A2142C5AF0}"/>
+                <a16:creationId xmlns:a16="http://schemas.microsoft.com/office/drawing/2014/main" id="{1B126D57-52AE-4459-8F97-91F614E530F2}"/>
               </a:ext>
             </a:extLst>
           </p:cNvPr>
@@ -9858,7 +9925,7 @@
           <p:cNvPr id="15" name="">
             <a:extLst xmlns:a="http://schemas.openxmlformats.org/drawingml/2006/main">
               <a:ext uri="{FF2B5EF4-FFF2-40B4-BE49-F238E27FC236}">
-                <a16:creationId xmlns:a16="http://schemas.microsoft.com/office/drawing/2014/main" id="{AD3BD0D2-67D8-4474-AF5C-1B39B5709E22}"/>
+                <a16:creationId xmlns:a16="http://schemas.microsoft.com/office/drawing/2014/main" id="{CC38F691-8596-4E76-A9C7-A1D6C7A7626F}"/>
               </a:ext>
             </a:extLst>
           </p:cNvPr>
@@ -9891,7 +9958,7 @@
           <p:cNvPr id="16" name="">
             <a:extLst xmlns:a="http://schemas.openxmlformats.org/drawingml/2006/main">
               <a:ext uri="{FF2B5EF4-FFF2-40B4-BE49-F238E27FC236}">
-                <a16:creationId xmlns:a16="http://schemas.microsoft.com/office/drawing/2014/main" id="{0C52B094-8A09-4F28-8E08-7369B4943E39}"/>
+                <a16:creationId xmlns:a16="http://schemas.microsoft.com/office/drawing/2014/main" id="{3677DBFC-AF15-4E6E-B519-58F960E453CB}"/>
               </a:ext>
             </a:extLst>
           </p:cNvPr>
@@ -9926,7 +9993,7 @@
           <p:cNvPr id="17" name="">
             <a:extLst xmlns:a="http://schemas.openxmlformats.org/drawingml/2006/main">
               <a:ext uri="{FF2B5EF4-FFF2-40B4-BE49-F238E27FC236}">
-                <a16:creationId xmlns:a16="http://schemas.microsoft.com/office/drawing/2014/main" id="{BB49D8E4-D9AF-4114-AAC2-F757C2EF66EF}"/>
+                <a16:creationId xmlns:a16="http://schemas.microsoft.com/office/drawing/2014/main" id="{B6D03976-D193-45A6-BB04-B140F0B1D930}"/>
               </a:ext>
             </a:extLst>
           </p:cNvPr>
@@ -9990,7 +10057,7 @@
           <p:cNvPr id="18" name="">
             <a:extLst xmlns:a="http://schemas.openxmlformats.org/drawingml/2006/main">
               <a:ext uri="{FF2B5EF4-FFF2-40B4-BE49-F238E27FC236}">
-                <a16:creationId xmlns:a16="http://schemas.microsoft.com/office/drawing/2014/main" id="{4337825E-5C22-4D57-90CF-CA5F0E06588A}"/>
+                <a16:creationId xmlns:a16="http://schemas.microsoft.com/office/drawing/2014/main" id="{9367890B-57E2-4200-8392-655282302F71}"/>
               </a:ext>
             </a:extLst>
           </p:cNvPr>
@@ -10054,7 +10121,7 @@
           <p:cNvPr id="19" name="">
             <a:extLst xmlns:a="http://schemas.openxmlformats.org/drawingml/2006/main">
               <a:ext uri="{FF2B5EF4-FFF2-40B4-BE49-F238E27FC236}">
-                <a16:creationId xmlns:a16="http://schemas.microsoft.com/office/drawing/2014/main" id="{DFCCECAE-2DA6-474E-8C24-6EE98AA272DE}"/>
+                <a16:creationId xmlns:a16="http://schemas.microsoft.com/office/drawing/2014/main" id="{4FA7D466-1CE9-4F1A-AF75-8D6E94621DA1}"/>
               </a:ext>
             </a:extLst>
           </p:cNvPr>
@@ -10087,7 +10154,7 @@
           <p:cNvPr id="20" name="">
             <a:extLst xmlns:a="http://schemas.openxmlformats.org/drawingml/2006/main">
               <a:ext uri="{FF2B5EF4-FFF2-40B4-BE49-F238E27FC236}">
-                <a16:creationId xmlns:a16="http://schemas.microsoft.com/office/drawing/2014/main" id="{4BFC0944-FC45-4833-9A4E-8DC4495034B5}"/>
+                <a16:creationId xmlns:a16="http://schemas.microsoft.com/office/drawing/2014/main" id="{17EE4887-1335-4FE3-BE0C-46B76B449ED0}"/>
               </a:ext>
             </a:extLst>
           </p:cNvPr>
@@ -10122,7 +10189,7 @@
           <p:cNvPr id="21" name="">
             <a:extLst xmlns:a="http://schemas.openxmlformats.org/drawingml/2006/main">
               <a:ext uri="{FF2B5EF4-FFF2-40B4-BE49-F238E27FC236}">
-                <a16:creationId xmlns:a16="http://schemas.microsoft.com/office/drawing/2014/main" id="{84FC5C74-440B-4A9A-A74F-5F5E6D6D2D67}"/>
+                <a16:creationId xmlns:a16="http://schemas.microsoft.com/office/drawing/2014/main" id="{1087508D-1C00-4BB2-A9E1-6AC05F814640}"/>
               </a:ext>
             </a:extLst>
           </p:cNvPr>
@@ -10186,7 +10253,7 @@
           <p:cNvPr id="22" name="">
             <a:extLst xmlns:a="http://schemas.openxmlformats.org/drawingml/2006/main">
               <a:ext uri="{FF2B5EF4-FFF2-40B4-BE49-F238E27FC236}">
-                <a16:creationId xmlns:a16="http://schemas.microsoft.com/office/drawing/2014/main" id="{8E692BF4-6E44-4B38-8452-9D064A408661}"/>
+                <a16:creationId xmlns:a16="http://schemas.microsoft.com/office/drawing/2014/main" id="{5F4FF816-2804-4D20-8F3F-FE5862B416DB}"/>
               </a:ext>
             </a:extLst>
           </p:cNvPr>
@@ -10250,7 +10317,7 @@
           <p:cNvPr id="23" name="">
             <a:extLst xmlns:a="http://schemas.openxmlformats.org/drawingml/2006/main">
               <a:ext uri="{FF2B5EF4-FFF2-40B4-BE49-F238E27FC236}">
-                <a16:creationId xmlns:a16="http://schemas.microsoft.com/office/drawing/2014/main" id="{CFF1F24C-4670-4BCE-A5DE-B8EBA54A6D6F}"/>
+                <a16:creationId xmlns:a16="http://schemas.microsoft.com/office/drawing/2014/main" id="{F1CF6343-3B0C-4698-ACA2-5F05887776B7}"/>
               </a:ext>
             </a:extLst>
           </p:cNvPr>
@@ -10312,7 +10379,7 @@
     </p:spTree>
     <p:extLst>
       <p:ext uri="{BB962C8B-B14F-4D97-AF65-F5344CB8AC3E}">
-        <p14:creationId xmlns:p14="http://schemas.microsoft.com/office/powerpoint/2010/main" val="1485888009"/>
+        <p14:creationId xmlns:p14="http://schemas.microsoft.com/office/powerpoint/2010/main" val="485171668"/>
       </p:ext>
     </p:extLst>
   </p:cSld>
@@ -10343,7 +10410,7 @@
           <p:cNvPr id="1" name="">
             <a:extLst xmlns:a="http://schemas.openxmlformats.org/drawingml/2006/main">
               <a:ext uri="{FF2B5EF4-FFF2-40B4-BE49-F238E27FC236}">
-                <a16:creationId xmlns:a16="http://schemas.microsoft.com/office/drawing/2014/main" id="{1E8A0E5B-6BCA-4A6A-9DF8-1283F3E57AF8}"/>
+                <a16:creationId xmlns:a16="http://schemas.microsoft.com/office/drawing/2014/main" id="{C338E3B4-B11E-441E-B97C-D0E16A16D429}"/>
               </a:ext>
             </a:extLst>
           </p:cNvPr>
@@ -10378,7 +10445,7 @@
           <p:cNvPr id="2" name="">
             <a:extLst xmlns:a="http://schemas.openxmlformats.org/drawingml/2006/main">
               <a:ext uri="{FF2B5EF4-FFF2-40B4-BE49-F238E27FC236}">
-                <a16:creationId xmlns:a16="http://schemas.microsoft.com/office/drawing/2014/main" id="{911C81A2-1054-4D0D-AC8D-6D4661CD73A3}"/>
+                <a16:creationId xmlns:a16="http://schemas.microsoft.com/office/drawing/2014/main" id="{49985BC1-BA71-44E4-A894-0C3824656CB2}"/>
               </a:ext>
             </a:extLst>
           </p:cNvPr>
@@ -10442,7 +10509,7 @@
           <p:cNvPr id="3" name="">
             <a:extLst xmlns:a="http://schemas.openxmlformats.org/drawingml/2006/main">
               <a:ext uri="{FF2B5EF4-FFF2-40B4-BE49-F238E27FC236}">
-                <a16:creationId xmlns:a16="http://schemas.microsoft.com/office/drawing/2014/main" id="{D35FA5F1-3704-43E0-90D4-67BB37DBA12A}"/>
+                <a16:creationId xmlns:a16="http://schemas.microsoft.com/office/drawing/2014/main" id="{53147F3C-75C9-425E-B6C9-631F9293B409}"/>
               </a:ext>
             </a:extLst>
           </p:cNvPr>
@@ -10506,7 +10573,7 @@
           <p:cNvPr id="4" name="">
             <a:extLst xmlns:a="http://schemas.openxmlformats.org/drawingml/2006/main">
               <a:ext uri="{FF2B5EF4-FFF2-40B4-BE49-F238E27FC236}">
-                <a16:creationId xmlns:a16="http://schemas.microsoft.com/office/drawing/2014/main" id="{4C76E659-096D-4F94-AD32-000D4A6B7463}"/>
+                <a16:creationId xmlns:a16="http://schemas.microsoft.com/office/drawing/2014/main" id="{1CE14EC2-B114-487E-8F04-D15AE626AF3C}"/>
               </a:ext>
             </a:extLst>
           </p:cNvPr>
@@ -10570,7 +10637,7 @@
           <p:cNvPr id="5" name="">
             <a:extLst xmlns:a="http://schemas.openxmlformats.org/drawingml/2006/main">
               <a:ext uri="{FF2B5EF4-FFF2-40B4-BE49-F238E27FC236}">
-                <a16:creationId xmlns:a16="http://schemas.microsoft.com/office/drawing/2014/main" id="{67E4B58E-6B4E-4F6E-AF78-3B74D844C837}"/>
+                <a16:creationId xmlns:a16="http://schemas.microsoft.com/office/drawing/2014/main" id="{D1CE6B9A-A1CA-441A-97E9-2374AE1BC53B}"/>
               </a:ext>
             </a:extLst>
           </p:cNvPr>
@@ -10634,7 +10701,7 @@
           <p:cNvPr id="6" name="">
             <a:extLst xmlns:a="http://schemas.openxmlformats.org/drawingml/2006/main">
               <a:ext uri="{FF2B5EF4-FFF2-40B4-BE49-F238E27FC236}">
-                <a16:creationId xmlns:a16="http://schemas.microsoft.com/office/drawing/2014/main" id="{D227B639-FF99-444D-818D-A0D707D0954F}"/>
+                <a16:creationId xmlns:a16="http://schemas.microsoft.com/office/drawing/2014/main" id="{30335AF7-09A2-44DA-BD17-903851FA2C70}"/>
               </a:ext>
             </a:extLst>
           </p:cNvPr>
@@ -10667,7 +10734,7 @@
           <p:cNvPr id="7" name="">
             <a:extLst xmlns:a="http://schemas.openxmlformats.org/drawingml/2006/main">
               <a:ext uri="{FF2B5EF4-FFF2-40B4-BE49-F238E27FC236}">
-                <a16:creationId xmlns:a16="http://schemas.microsoft.com/office/drawing/2014/main" id="{707B030E-AD6D-43BC-A9A7-3AD20CC155A0}"/>
+                <a16:creationId xmlns:a16="http://schemas.microsoft.com/office/drawing/2014/main" id="{2975DBD5-973D-4444-B08D-9EEFE3D52FA5}"/>
               </a:ext>
             </a:extLst>
           </p:cNvPr>
@@ -10702,7 +10769,7 @@
           <p:cNvPr id="8" name="">
             <a:extLst xmlns:a="http://schemas.openxmlformats.org/drawingml/2006/main">
               <a:ext uri="{FF2B5EF4-FFF2-40B4-BE49-F238E27FC236}">
-                <a16:creationId xmlns:a16="http://schemas.microsoft.com/office/drawing/2014/main" id="{F3C7944E-0160-46ED-987F-7AC6DAB2E4BD}"/>
+                <a16:creationId xmlns:a16="http://schemas.microsoft.com/office/drawing/2014/main" id="{84602164-158E-453C-B31E-0B8FB16BDE5A}"/>
               </a:ext>
             </a:extLst>
           </p:cNvPr>
@@ -10766,7 +10833,7 @@
           <p:cNvPr id="9" name="">
             <a:extLst xmlns:a="http://schemas.openxmlformats.org/drawingml/2006/main">
               <a:ext uri="{FF2B5EF4-FFF2-40B4-BE49-F238E27FC236}">
-                <a16:creationId xmlns:a16="http://schemas.microsoft.com/office/drawing/2014/main" id="{43C64E12-2169-47E7-B0A6-6D154F77946D}"/>
+                <a16:creationId xmlns:a16="http://schemas.microsoft.com/office/drawing/2014/main" id="{E820D8F7-ADC2-403A-9734-9CB2EEF182C2}"/>
               </a:ext>
             </a:extLst>
           </p:cNvPr>
@@ -10801,7 +10868,7 @@
           <p:cNvPr id="10" name="">
             <a:extLst xmlns:a="http://schemas.openxmlformats.org/drawingml/2006/main">
               <a:ext uri="{FF2B5EF4-FFF2-40B4-BE49-F238E27FC236}">
-                <a16:creationId xmlns:a16="http://schemas.microsoft.com/office/drawing/2014/main" id="{E8B9FEAA-1992-4501-B5B2-DCF4A87E189A}"/>
+                <a16:creationId xmlns:a16="http://schemas.microsoft.com/office/drawing/2014/main" id="{D4E3BE21-4DB2-4536-A72F-A11D43C391A6}"/>
               </a:ext>
             </a:extLst>
           </p:cNvPr>
@@ -10865,7 +10932,7 @@
           <p:cNvPr id="11" name="">
             <a:extLst xmlns:a="http://schemas.openxmlformats.org/drawingml/2006/main">
               <a:ext uri="{FF2B5EF4-FFF2-40B4-BE49-F238E27FC236}">
-                <a16:creationId xmlns:a16="http://schemas.microsoft.com/office/drawing/2014/main" id="{B11C7267-69A8-4DF2-B88E-C4D9F03F0C44}"/>
+                <a16:creationId xmlns:a16="http://schemas.microsoft.com/office/drawing/2014/main" id="{6BE71969-A67D-4BF5-9359-8B45E960BF64}"/>
               </a:ext>
             </a:extLst>
           </p:cNvPr>
@@ -10900,7 +10967,7 @@
           <p:cNvPr id="12" name="">
             <a:extLst xmlns:a="http://schemas.openxmlformats.org/drawingml/2006/main">
               <a:ext uri="{FF2B5EF4-FFF2-40B4-BE49-F238E27FC236}">
-                <a16:creationId xmlns:a16="http://schemas.microsoft.com/office/drawing/2014/main" id="{9FE7A658-91EC-4823-8669-F5D40D3A0E10}"/>
+                <a16:creationId xmlns:a16="http://schemas.microsoft.com/office/drawing/2014/main" id="{482BFC11-989D-4DDA-AD69-FFF9767D79EF}"/>
               </a:ext>
             </a:extLst>
           </p:cNvPr>
@@ -10964,7 +11031,7 @@
           <p:cNvPr id="13" name="">
             <a:extLst xmlns:a="http://schemas.openxmlformats.org/drawingml/2006/main">
               <a:ext uri="{FF2B5EF4-FFF2-40B4-BE49-F238E27FC236}">
-                <a16:creationId xmlns:a16="http://schemas.microsoft.com/office/drawing/2014/main" id="{FC7C045B-B2A1-4AEC-A000-C0CBD3900B54}"/>
+                <a16:creationId xmlns:a16="http://schemas.microsoft.com/office/drawing/2014/main" id="{9DEEA202-FFD5-4A0D-A7BE-90BF55D0C098}"/>
               </a:ext>
             </a:extLst>
           </p:cNvPr>
@@ -10999,7 +11066,7 @@
           <p:cNvPr id="14" name="">
             <a:extLst xmlns:a="http://schemas.openxmlformats.org/drawingml/2006/main">
               <a:ext uri="{FF2B5EF4-FFF2-40B4-BE49-F238E27FC236}">
-                <a16:creationId xmlns:a16="http://schemas.microsoft.com/office/drawing/2014/main" id="{CD703162-0D65-430A-A31C-3931A8018161}"/>
+                <a16:creationId xmlns:a16="http://schemas.microsoft.com/office/drawing/2014/main" id="{3D168F73-FB68-46F0-92D2-DE92D9F1132A}"/>
               </a:ext>
             </a:extLst>
           </p:cNvPr>
@@ -11063,7 +11130,7 @@
           <p:cNvPr id="15" name="">
             <a:extLst xmlns:a="http://schemas.openxmlformats.org/drawingml/2006/main">
               <a:ext uri="{FF2B5EF4-FFF2-40B4-BE49-F238E27FC236}">
-                <a16:creationId xmlns:a16="http://schemas.microsoft.com/office/drawing/2014/main" id="{E7776B0E-52F7-455F-8F8A-165ABFA1D575}"/>
+                <a16:creationId xmlns:a16="http://schemas.microsoft.com/office/drawing/2014/main" id="{47E4414E-612F-4473-BB5A-ADAC3993E0A1}"/>
               </a:ext>
             </a:extLst>
           </p:cNvPr>
@@ -11098,7 +11165,7 @@
           <p:cNvPr id="16" name="">
             <a:extLst xmlns:a="http://schemas.openxmlformats.org/drawingml/2006/main">
               <a:ext uri="{FF2B5EF4-FFF2-40B4-BE49-F238E27FC236}">
-                <a16:creationId xmlns:a16="http://schemas.microsoft.com/office/drawing/2014/main" id="{90A0D0FB-789C-473A-8C80-7EADA4B42A56}"/>
+                <a16:creationId xmlns:a16="http://schemas.microsoft.com/office/drawing/2014/main" id="{658D5231-5ED2-4261-9A41-D43268FB3594}"/>
               </a:ext>
             </a:extLst>
           </p:cNvPr>
@@ -11162,7 +11229,7 @@
           <p:cNvPr id="17" name="">
             <a:extLst xmlns:a="http://schemas.openxmlformats.org/drawingml/2006/main">
               <a:ext uri="{FF2B5EF4-FFF2-40B4-BE49-F238E27FC236}">
-                <a16:creationId xmlns:a16="http://schemas.microsoft.com/office/drawing/2014/main" id="{911AEC16-C211-4965-B03B-3901CFC2049F}"/>
+                <a16:creationId xmlns:a16="http://schemas.microsoft.com/office/drawing/2014/main" id="{1B19BAB4-E812-480C-A8A6-24EE097985C8}"/>
               </a:ext>
             </a:extLst>
           </p:cNvPr>
@@ -11197,7 +11264,7 @@
           <p:cNvPr id="18" name="">
             <a:extLst xmlns:a="http://schemas.openxmlformats.org/drawingml/2006/main">
               <a:ext uri="{FF2B5EF4-FFF2-40B4-BE49-F238E27FC236}">
-                <a16:creationId xmlns:a16="http://schemas.microsoft.com/office/drawing/2014/main" id="{6C1B7353-739C-4992-9CC0-D2C92C63406B}"/>
+                <a16:creationId xmlns:a16="http://schemas.microsoft.com/office/drawing/2014/main" id="{2BFC26CA-F140-4521-AFC4-0AFA478A16B1}"/>
               </a:ext>
             </a:extLst>
           </p:cNvPr>
@@ -11261,7 +11328,7 @@
           <p:cNvPr id="19" name="">
             <a:extLst xmlns:a="http://schemas.openxmlformats.org/drawingml/2006/main">
               <a:ext uri="{FF2B5EF4-FFF2-40B4-BE49-F238E27FC236}">
-                <a16:creationId xmlns:a16="http://schemas.microsoft.com/office/drawing/2014/main" id="{D65F942E-24DC-4C45-A2FF-C6B18BA35C4F}"/>
+                <a16:creationId xmlns:a16="http://schemas.microsoft.com/office/drawing/2014/main" id="{456E4D74-1225-4DE3-8807-46F412A71842}"/>
               </a:ext>
             </a:extLst>
           </p:cNvPr>
@@ -11325,7 +11392,7 @@
           <p:cNvPr id="20" name="">
             <a:extLst xmlns:a="http://schemas.openxmlformats.org/drawingml/2006/main">
               <a:ext uri="{FF2B5EF4-FFF2-40B4-BE49-F238E27FC236}">
-                <a16:creationId xmlns:a16="http://schemas.microsoft.com/office/drawing/2014/main" id="{44ECA3B9-68B7-41CD-831E-683FE43E4D3A}"/>
+                <a16:creationId xmlns:a16="http://schemas.microsoft.com/office/drawing/2014/main" id="{23E11DFD-F93E-4B27-A79E-01F2900CE44D}"/>
               </a:ext>
             </a:extLst>
           </p:cNvPr>
@@ -11389,7 +11456,7 @@
           <p:cNvPr id="21" name="">
             <a:extLst xmlns:a="http://schemas.openxmlformats.org/drawingml/2006/main">
               <a:ext uri="{FF2B5EF4-FFF2-40B4-BE49-F238E27FC236}">
-                <a16:creationId xmlns:a16="http://schemas.microsoft.com/office/drawing/2014/main" id="{AC1C01F1-9383-43F7-ABBA-6E6683145EEC}"/>
+                <a16:creationId xmlns:a16="http://schemas.microsoft.com/office/drawing/2014/main" id="{AB793C51-56E2-4F5A-AF21-3EEF5A66783D}"/>
               </a:ext>
             </a:extLst>
           </p:cNvPr>
@@ -11424,7 +11491,7 @@
           <p:cNvPr id="22" name="">
             <a:extLst xmlns:a="http://schemas.openxmlformats.org/drawingml/2006/main">
               <a:ext uri="{FF2B5EF4-FFF2-40B4-BE49-F238E27FC236}">
-                <a16:creationId xmlns:a16="http://schemas.microsoft.com/office/drawing/2014/main" id="{41C92AD6-FC82-4001-B0E0-A1F753CC46E7}"/>
+                <a16:creationId xmlns:a16="http://schemas.microsoft.com/office/drawing/2014/main" id="{C844E368-ADD9-4E93-83D6-9A582529E404}"/>
               </a:ext>
             </a:extLst>
           </p:cNvPr>
@@ -11488,7 +11555,7 @@
           <p:cNvPr id="23" name="">
             <a:extLst xmlns:a="http://schemas.openxmlformats.org/drawingml/2006/main">
               <a:ext uri="{FF2B5EF4-FFF2-40B4-BE49-F238E27FC236}">
-                <a16:creationId xmlns:a16="http://schemas.microsoft.com/office/drawing/2014/main" id="{98BE13B8-2C9E-4EF4-81D3-1FE7491E317A}"/>
+                <a16:creationId xmlns:a16="http://schemas.microsoft.com/office/drawing/2014/main" id="{71C7849C-133F-436C-A578-9E6326AD5F1E}"/>
               </a:ext>
             </a:extLst>
           </p:cNvPr>
@@ -11552,7 +11619,7 @@
           <p:cNvPr id="24" name="">
             <a:extLst xmlns:a="http://schemas.openxmlformats.org/drawingml/2006/main">
               <a:ext uri="{FF2B5EF4-FFF2-40B4-BE49-F238E27FC236}">
-                <a16:creationId xmlns:a16="http://schemas.microsoft.com/office/drawing/2014/main" id="{D2AA3509-B9B2-4C58-BCEE-8E7AD9B7E893}"/>
+                <a16:creationId xmlns:a16="http://schemas.microsoft.com/office/drawing/2014/main" id="{3A6A51D7-76A3-4688-917E-8242ED89BC02}"/>
               </a:ext>
             </a:extLst>
           </p:cNvPr>
@@ -11616,7 +11683,7 @@
           <p:cNvPr id="25" name="">
             <a:extLst xmlns:a="http://schemas.openxmlformats.org/drawingml/2006/main">
               <a:ext uri="{FF2B5EF4-FFF2-40B4-BE49-F238E27FC236}">
-                <a16:creationId xmlns:a16="http://schemas.microsoft.com/office/drawing/2014/main" id="{B4CF092F-CF5D-4F81-97F6-3B50E13CB76D}"/>
+                <a16:creationId xmlns:a16="http://schemas.microsoft.com/office/drawing/2014/main" id="{8DBA29E7-FBC0-47F2-B0E7-E1E9FBB15EB7}"/>
               </a:ext>
             </a:extLst>
           </p:cNvPr>
@@ -11651,7 +11718,7 @@
           <p:cNvPr id="26" name="">
             <a:extLst xmlns:a="http://schemas.openxmlformats.org/drawingml/2006/main">
               <a:ext uri="{FF2B5EF4-FFF2-40B4-BE49-F238E27FC236}">
-                <a16:creationId xmlns:a16="http://schemas.microsoft.com/office/drawing/2014/main" id="{19160255-B6AE-48C5-A20F-BC9B683B8F95}"/>
+                <a16:creationId xmlns:a16="http://schemas.microsoft.com/office/drawing/2014/main" id="{98CF9EB9-278D-4E91-A2E4-FAACD4981372}"/>
               </a:ext>
             </a:extLst>
           </p:cNvPr>
@@ -11715,7 +11782,7 @@
           <p:cNvPr id="27" name="">
             <a:extLst xmlns:a="http://schemas.openxmlformats.org/drawingml/2006/main">
               <a:ext uri="{FF2B5EF4-FFF2-40B4-BE49-F238E27FC236}">
-                <a16:creationId xmlns:a16="http://schemas.microsoft.com/office/drawing/2014/main" id="{0EFAF548-214E-4212-9B4C-3542D05BF5AE}"/>
+                <a16:creationId xmlns:a16="http://schemas.microsoft.com/office/drawing/2014/main" id="{505A3226-BB90-4CB8-A102-16EF27F9E4B3}"/>
               </a:ext>
             </a:extLst>
           </p:cNvPr>
@@ -11779,7 +11846,7 @@
           <p:cNvPr id="28" name="">
             <a:extLst xmlns:a="http://schemas.openxmlformats.org/drawingml/2006/main">
               <a:ext uri="{FF2B5EF4-FFF2-40B4-BE49-F238E27FC236}">
-                <a16:creationId xmlns:a16="http://schemas.microsoft.com/office/drawing/2014/main" id="{BF3E8D2B-43CA-4707-AC8D-B6C110914F5E}"/>
+                <a16:creationId xmlns:a16="http://schemas.microsoft.com/office/drawing/2014/main" id="{1D60BA94-28D9-4E70-99B5-342824B226EB}"/>
               </a:ext>
             </a:extLst>
           </p:cNvPr>
@@ -11843,7 +11910,7 @@
           <p:cNvPr id="29" name="">
             <a:extLst xmlns:a="http://schemas.openxmlformats.org/drawingml/2006/main">
               <a:ext uri="{FF2B5EF4-FFF2-40B4-BE49-F238E27FC236}">
-                <a16:creationId xmlns:a16="http://schemas.microsoft.com/office/drawing/2014/main" id="{0ED49E57-2F38-4AFC-9CFD-AA1437F845B7}"/>
+                <a16:creationId xmlns:a16="http://schemas.microsoft.com/office/drawing/2014/main" id="{BEF8495D-D2E6-4CAA-9066-73488071A637}"/>
               </a:ext>
             </a:extLst>
           </p:cNvPr>
@@ -11878,7 +11945,7 @@
           <p:cNvPr id="30" name="">
             <a:extLst xmlns:a="http://schemas.openxmlformats.org/drawingml/2006/main">
               <a:ext uri="{FF2B5EF4-FFF2-40B4-BE49-F238E27FC236}">
-                <a16:creationId xmlns:a16="http://schemas.microsoft.com/office/drawing/2014/main" id="{B9CDA99C-970A-4756-A0A7-05EA5285292A}"/>
+                <a16:creationId xmlns:a16="http://schemas.microsoft.com/office/drawing/2014/main" id="{6CD1A95F-87B4-4009-872B-BF236B24D5F2}"/>
               </a:ext>
             </a:extLst>
           </p:cNvPr>
@@ -11942,7 +12009,7 @@
           <p:cNvPr id="31" name="">
             <a:extLst xmlns:a="http://schemas.openxmlformats.org/drawingml/2006/main">
               <a:ext uri="{FF2B5EF4-FFF2-40B4-BE49-F238E27FC236}">
-                <a16:creationId xmlns:a16="http://schemas.microsoft.com/office/drawing/2014/main" id="{7EAA6C8C-E568-4D54-ACF5-B07D11E2773D}"/>
+                <a16:creationId xmlns:a16="http://schemas.microsoft.com/office/drawing/2014/main" id="{A5B03010-D375-436D-99B2-D953C4945CEA}"/>
               </a:ext>
             </a:extLst>
           </p:cNvPr>
@@ -12006,7 +12073,7 @@
           <p:cNvPr id="32" name="">
             <a:extLst xmlns:a="http://schemas.openxmlformats.org/drawingml/2006/main">
               <a:ext uri="{FF2B5EF4-FFF2-40B4-BE49-F238E27FC236}">
-                <a16:creationId xmlns:a16="http://schemas.microsoft.com/office/drawing/2014/main" id="{9AD344E9-64EB-4C6B-A7E2-20FE83071C05}"/>
+                <a16:creationId xmlns:a16="http://schemas.microsoft.com/office/drawing/2014/main" id="{7A318BA8-68DF-4F91-84F4-D598E9BF5AD2}"/>
               </a:ext>
             </a:extLst>
           </p:cNvPr>
@@ -12070,7 +12137,7 @@
           <p:cNvPr id="33" name="">
             <a:extLst xmlns:a="http://schemas.openxmlformats.org/drawingml/2006/main">
               <a:ext uri="{FF2B5EF4-FFF2-40B4-BE49-F238E27FC236}">
-                <a16:creationId xmlns:a16="http://schemas.microsoft.com/office/drawing/2014/main" id="{1FF4B51B-DCB8-4EAC-9C2C-75B978F26619}"/>
+                <a16:creationId xmlns:a16="http://schemas.microsoft.com/office/drawing/2014/main" id="{5D950A1D-1C44-4A30-A9E9-BC0EA2505F88}"/>
               </a:ext>
             </a:extLst>
           </p:cNvPr>
@@ -12105,7 +12172,7 @@
           <p:cNvPr id="34" name="">
             <a:extLst xmlns:a="http://schemas.openxmlformats.org/drawingml/2006/main">
               <a:ext uri="{FF2B5EF4-FFF2-40B4-BE49-F238E27FC236}">
-                <a16:creationId xmlns:a16="http://schemas.microsoft.com/office/drawing/2014/main" id="{E95E863B-1039-48C1-AB02-7EC84D8FA58C}"/>
+                <a16:creationId xmlns:a16="http://schemas.microsoft.com/office/drawing/2014/main" id="{E0D12921-8425-46B6-A097-A348EEE727D9}"/>
               </a:ext>
             </a:extLst>
           </p:cNvPr>
@@ -12169,7 +12236,7 @@
           <p:cNvPr id="35" name="">
             <a:extLst xmlns:a="http://schemas.openxmlformats.org/drawingml/2006/main">
               <a:ext uri="{FF2B5EF4-FFF2-40B4-BE49-F238E27FC236}">
-                <a16:creationId xmlns:a16="http://schemas.microsoft.com/office/drawing/2014/main" id="{97981454-D6E4-4DE8-937C-B258550D9C5D}"/>
+                <a16:creationId xmlns:a16="http://schemas.microsoft.com/office/drawing/2014/main" id="{9AD5E6B4-8332-42B7-BD43-AD13981E88A5}"/>
               </a:ext>
             </a:extLst>
           </p:cNvPr>
@@ -12233,7 +12300,7 @@
           <p:cNvPr id="36" name="">
             <a:extLst xmlns:a="http://schemas.openxmlformats.org/drawingml/2006/main">
               <a:ext uri="{FF2B5EF4-FFF2-40B4-BE49-F238E27FC236}">
-                <a16:creationId xmlns:a16="http://schemas.microsoft.com/office/drawing/2014/main" id="{D8760ED0-FDD3-42BA-9E28-D970980B96C1}"/>
+                <a16:creationId xmlns:a16="http://schemas.microsoft.com/office/drawing/2014/main" id="{6D67C0B0-8B9D-4884-8171-CD9126A6AE7B}"/>
               </a:ext>
             </a:extLst>
           </p:cNvPr>
@@ -12297,7 +12364,7 @@
           <p:cNvPr id="37" name="">
             <a:extLst xmlns:a="http://schemas.openxmlformats.org/drawingml/2006/main">
               <a:ext uri="{FF2B5EF4-FFF2-40B4-BE49-F238E27FC236}">
-                <a16:creationId xmlns:a16="http://schemas.microsoft.com/office/drawing/2014/main" id="{40B81703-B521-48F0-91AE-9570892EDBC7}"/>
+                <a16:creationId xmlns:a16="http://schemas.microsoft.com/office/drawing/2014/main" id="{B3E13469-6EDD-473C-B21F-BDFE796167F3}"/>
               </a:ext>
             </a:extLst>
           </p:cNvPr>
@@ -12330,7 +12397,7 @@
           <p:cNvPr id="38" name="">
             <a:extLst xmlns:a="http://schemas.openxmlformats.org/drawingml/2006/main">
               <a:ext uri="{FF2B5EF4-FFF2-40B4-BE49-F238E27FC236}">
-                <a16:creationId xmlns:a16="http://schemas.microsoft.com/office/drawing/2014/main" id="{80C5D73E-2BB6-4093-9DFD-9F21318AFD15}"/>
+                <a16:creationId xmlns:a16="http://schemas.microsoft.com/office/drawing/2014/main" id="{5A7F6728-7A63-4CB3-8B41-A841DA8EE59E}"/>
               </a:ext>
             </a:extLst>
           </p:cNvPr>
@@ -12365,7 +12432,7 @@
           <p:cNvPr id="39" name="">
             <a:extLst xmlns:a="http://schemas.openxmlformats.org/drawingml/2006/main">
               <a:ext uri="{FF2B5EF4-FFF2-40B4-BE49-F238E27FC236}">
-                <a16:creationId xmlns:a16="http://schemas.microsoft.com/office/drawing/2014/main" id="{188EBCDC-F898-4341-A6D9-AB6AB663751F}"/>
+                <a16:creationId xmlns:a16="http://schemas.microsoft.com/office/drawing/2014/main" id="{8C82B82B-3E9B-4A24-9221-08AB859E3D04}"/>
               </a:ext>
             </a:extLst>
           </p:cNvPr>
@@ -12429,7 +12496,7 @@
           <p:cNvPr id="40" name="">
             <a:extLst xmlns:a="http://schemas.openxmlformats.org/drawingml/2006/main">
               <a:ext uri="{FF2B5EF4-FFF2-40B4-BE49-F238E27FC236}">
-                <a16:creationId xmlns:a16="http://schemas.microsoft.com/office/drawing/2014/main" id="{1B262123-D79F-470D-92E0-E13C055826FF}"/>
+                <a16:creationId xmlns:a16="http://schemas.microsoft.com/office/drawing/2014/main" id="{8AA04E9A-0B1C-428A-AE25-D462535BA9A5}"/>
               </a:ext>
             </a:extLst>
           </p:cNvPr>
@@ -12493,7 +12560,7 @@
           <p:cNvPr id="41" name="">
             <a:extLst xmlns:a="http://schemas.openxmlformats.org/drawingml/2006/main">
               <a:ext uri="{FF2B5EF4-FFF2-40B4-BE49-F238E27FC236}">
-                <a16:creationId xmlns:a16="http://schemas.microsoft.com/office/drawing/2014/main" id="{1817D0C6-F95B-4AAB-A659-0FF092990EF6}"/>
+                <a16:creationId xmlns:a16="http://schemas.microsoft.com/office/drawing/2014/main" id="{1A5E0977-40D7-4D41-8D23-266F0FFDAFDD}"/>
               </a:ext>
             </a:extLst>
           </p:cNvPr>
@@ -12526,7 +12593,7 @@
           <p:cNvPr id="42" name="">
             <a:extLst xmlns:a="http://schemas.openxmlformats.org/drawingml/2006/main">
               <a:ext uri="{FF2B5EF4-FFF2-40B4-BE49-F238E27FC236}">
-                <a16:creationId xmlns:a16="http://schemas.microsoft.com/office/drawing/2014/main" id="{B1970771-9979-4353-8958-137D48B10F98}"/>
+                <a16:creationId xmlns:a16="http://schemas.microsoft.com/office/drawing/2014/main" id="{686529D6-CD2A-44BC-9250-92D296373AE1}"/>
               </a:ext>
             </a:extLst>
           </p:cNvPr>
@@ -12561,7 +12628,7 @@
           <p:cNvPr id="43" name="">
             <a:extLst xmlns:a="http://schemas.openxmlformats.org/drawingml/2006/main">
               <a:ext uri="{FF2B5EF4-FFF2-40B4-BE49-F238E27FC236}">
-                <a16:creationId xmlns:a16="http://schemas.microsoft.com/office/drawing/2014/main" id="{CF072008-183B-4E03-9E02-3F5A0D2B2A35}"/>
+                <a16:creationId xmlns:a16="http://schemas.microsoft.com/office/drawing/2014/main" id="{EB0A2BD2-8EDC-472D-9685-B4C7A58A66C4}"/>
               </a:ext>
             </a:extLst>
           </p:cNvPr>
@@ -12625,7 +12692,7 @@
           <p:cNvPr id="44" name="">
             <a:extLst xmlns:a="http://schemas.openxmlformats.org/drawingml/2006/main">
               <a:ext uri="{FF2B5EF4-FFF2-40B4-BE49-F238E27FC236}">
-                <a16:creationId xmlns:a16="http://schemas.microsoft.com/office/drawing/2014/main" id="{12496F5D-BC6E-41E7-89F0-63F6BF43A7E4}"/>
+                <a16:creationId xmlns:a16="http://schemas.microsoft.com/office/drawing/2014/main" id="{94BC47C7-4344-4BAC-91D4-3E00213A618B}"/>
               </a:ext>
             </a:extLst>
           </p:cNvPr>
@@ -12689,7 +12756,7 @@
           <p:cNvPr id="45" name="">
             <a:extLst xmlns:a="http://schemas.openxmlformats.org/drawingml/2006/main">
               <a:ext uri="{FF2B5EF4-FFF2-40B4-BE49-F238E27FC236}">
-                <a16:creationId xmlns:a16="http://schemas.microsoft.com/office/drawing/2014/main" id="{5AE509B7-0BD6-4D71-946E-5120C445837E}"/>
+                <a16:creationId xmlns:a16="http://schemas.microsoft.com/office/drawing/2014/main" id="{FECB60E3-172E-4687-95A9-82926DC64C66}"/>
               </a:ext>
             </a:extLst>
           </p:cNvPr>
@@ -12749,7 +12816,7 @@
     </p:spTree>
     <p:extLst>
       <p:ext uri="{BB962C8B-B14F-4D97-AF65-F5344CB8AC3E}">
-        <p14:creationId xmlns:p14="http://schemas.microsoft.com/office/powerpoint/2010/main" val="1157774811"/>
+        <p14:creationId xmlns:p14="http://schemas.microsoft.com/office/powerpoint/2010/main" val="515255451"/>
       </p:ext>
     </p:extLst>
   </p:cSld>
@@ -12780,7 +12847,7 @@
           <p:cNvPr id="1" name="">
             <a:extLst xmlns:a="http://schemas.openxmlformats.org/drawingml/2006/main">
               <a:ext uri="{FF2B5EF4-FFF2-40B4-BE49-F238E27FC236}">
-                <a16:creationId xmlns:a16="http://schemas.microsoft.com/office/drawing/2014/main" id="{3A53A104-0222-4948-A57F-4030B6001B59}"/>
+                <a16:creationId xmlns:a16="http://schemas.microsoft.com/office/drawing/2014/main" id="{5E066D6E-B300-48AD-A9D1-DF1CEE46ED5F}"/>
               </a:ext>
             </a:extLst>
           </p:cNvPr>
@@ -12815,7 +12882,7 @@
           <p:cNvPr id="2" name="">
             <a:extLst xmlns:a="http://schemas.openxmlformats.org/drawingml/2006/main">
               <a:ext uri="{FF2B5EF4-FFF2-40B4-BE49-F238E27FC236}">
-                <a16:creationId xmlns:a16="http://schemas.microsoft.com/office/drawing/2014/main" id="{66DBE5C5-B777-42D7-A58F-26227F0B69ED}"/>
+                <a16:creationId xmlns:a16="http://schemas.microsoft.com/office/drawing/2014/main" id="{9D381C45-4C98-49E1-9930-5AD74F26B368}"/>
               </a:ext>
             </a:extLst>
           </p:cNvPr>
@@ -12879,7 +12946,7 @@
           <p:cNvPr id="3" name="">
             <a:extLst xmlns:a="http://schemas.openxmlformats.org/drawingml/2006/main">
               <a:ext uri="{FF2B5EF4-FFF2-40B4-BE49-F238E27FC236}">
-                <a16:creationId xmlns:a16="http://schemas.microsoft.com/office/drawing/2014/main" id="{844F35D6-7FBB-42A4-BC3C-C26591CBAC57}"/>
+                <a16:creationId xmlns:a16="http://schemas.microsoft.com/office/drawing/2014/main" id="{89D5BB3D-3BF4-4409-B1C3-C5E1B5086054}"/>
               </a:ext>
             </a:extLst>
           </p:cNvPr>
@@ -12943,7 +13010,7 @@
           <p:cNvPr id="4" name="">
             <a:extLst xmlns:a="http://schemas.openxmlformats.org/drawingml/2006/main">
               <a:ext uri="{FF2B5EF4-FFF2-40B4-BE49-F238E27FC236}">
-                <a16:creationId xmlns:a16="http://schemas.microsoft.com/office/drawing/2014/main" id="{B5293DBB-7506-446F-A978-4E7BF5DB2654}"/>
+                <a16:creationId xmlns:a16="http://schemas.microsoft.com/office/drawing/2014/main" id="{70573EE1-179B-470F-B5E7-D0A885DAD3AA}"/>
               </a:ext>
             </a:extLst>
           </p:cNvPr>
@@ -13007,7 +13074,7 @@
           <p:cNvPr id="5" name="">
             <a:extLst xmlns:a="http://schemas.openxmlformats.org/drawingml/2006/main">
               <a:ext uri="{FF2B5EF4-FFF2-40B4-BE49-F238E27FC236}">
-                <a16:creationId xmlns:a16="http://schemas.microsoft.com/office/drawing/2014/main" id="{44E6958E-2528-4B0B-BF94-B9A55BD73F04}"/>
+                <a16:creationId xmlns:a16="http://schemas.microsoft.com/office/drawing/2014/main" id="{299763BE-AE61-4F8F-9658-0B2CC8C86201}"/>
               </a:ext>
             </a:extLst>
           </p:cNvPr>
@@ -13071,7 +13138,7 @@
           <p:cNvPr id="6" name="">
             <a:extLst xmlns:a="http://schemas.openxmlformats.org/drawingml/2006/main">
               <a:ext uri="{FF2B5EF4-FFF2-40B4-BE49-F238E27FC236}">
-                <a16:creationId xmlns:a16="http://schemas.microsoft.com/office/drawing/2014/main" id="{EE900CCA-3F84-48DA-B6AF-1C70C714682C}"/>
+                <a16:creationId xmlns:a16="http://schemas.microsoft.com/office/drawing/2014/main" id="{B5FDA4FE-F50F-464B-A601-EEBBAAD6A6A0}"/>
               </a:ext>
             </a:extLst>
           </p:cNvPr>
@@ -13104,7 +13171,7 @@
           <p:cNvPr id="7" name="">
             <a:extLst xmlns:a="http://schemas.openxmlformats.org/drawingml/2006/main">
               <a:ext uri="{FF2B5EF4-FFF2-40B4-BE49-F238E27FC236}">
-                <a16:creationId xmlns:a16="http://schemas.microsoft.com/office/drawing/2014/main" id="{2805B6F5-CA80-41F9-AC52-BAD08D7D38D0}"/>
+                <a16:creationId xmlns:a16="http://schemas.microsoft.com/office/drawing/2014/main" id="{143D623D-78AE-41B4-BF42-76CE448E9DA3}"/>
               </a:ext>
             </a:extLst>
           </p:cNvPr>
@@ -13139,7 +13206,7 @@
           <p:cNvPr id="8" name="">
             <a:extLst xmlns:a="http://schemas.openxmlformats.org/drawingml/2006/main">
               <a:ext uri="{FF2B5EF4-FFF2-40B4-BE49-F238E27FC236}">
-                <a16:creationId xmlns:a16="http://schemas.microsoft.com/office/drawing/2014/main" id="{C78F9E61-046C-40EC-9EA3-4E8187753008}"/>
+                <a16:creationId xmlns:a16="http://schemas.microsoft.com/office/drawing/2014/main" id="{98A2ADC2-06E5-44BE-9E47-708380D3CB4A}"/>
               </a:ext>
             </a:extLst>
           </p:cNvPr>
@@ -13203,7 +13270,7 @@
           <p:cNvPr id="9" name="">
             <a:extLst xmlns:a="http://schemas.openxmlformats.org/drawingml/2006/main">
               <a:ext uri="{FF2B5EF4-FFF2-40B4-BE49-F238E27FC236}">
-                <a16:creationId xmlns:a16="http://schemas.microsoft.com/office/drawing/2014/main" id="{EE4C5BE3-CEA9-4941-BBC8-E9CF9E4675A4}"/>
+                <a16:creationId xmlns:a16="http://schemas.microsoft.com/office/drawing/2014/main" id="{D8D39085-1BE3-4734-A959-6FB99598CBB3}"/>
               </a:ext>
             </a:extLst>
           </p:cNvPr>
@@ -13267,7 +13334,7 @@
           <p:cNvPr id="10" name="">
             <a:extLst xmlns:a="http://schemas.openxmlformats.org/drawingml/2006/main">
               <a:ext uri="{FF2B5EF4-FFF2-40B4-BE49-F238E27FC236}">
-                <a16:creationId xmlns:a16="http://schemas.microsoft.com/office/drawing/2014/main" id="{70CAAB35-D72F-4B94-9E8A-39C143D48E79}"/>
+                <a16:creationId xmlns:a16="http://schemas.microsoft.com/office/drawing/2014/main" id="{A7338FDF-14BB-4D16-9B57-B43700B438A5}"/>
               </a:ext>
             </a:extLst>
           </p:cNvPr>
@@ -13300,7 +13367,7 @@
           <p:cNvPr id="11" name="">
             <a:extLst xmlns:a="http://schemas.openxmlformats.org/drawingml/2006/main">
               <a:ext uri="{FF2B5EF4-FFF2-40B4-BE49-F238E27FC236}">
-                <a16:creationId xmlns:a16="http://schemas.microsoft.com/office/drawing/2014/main" id="{01449475-778A-4FBF-9D9A-E4E97D77A24E}"/>
+                <a16:creationId xmlns:a16="http://schemas.microsoft.com/office/drawing/2014/main" id="{960BE978-647A-49CB-A6FA-5D0870375372}"/>
               </a:ext>
             </a:extLst>
           </p:cNvPr>
@@ -13335,7 +13402,7 @@
           <p:cNvPr id="12" name="">
             <a:extLst xmlns:a="http://schemas.openxmlformats.org/drawingml/2006/main">
               <a:ext uri="{FF2B5EF4-FFF2-40B4-BE49-F238E27FC236}">
-                <a16:creationId xmlns:a16="http://schemas.microsoft.com/office/drawing/2014/main" id="{3C9BF56E-79E8-45F7-8FF9-85C6B296B546}"/>
+                <a16:creationId xmlns:a16="http://schemas.microsoft.com/office/drawing/2014/main" id="{285AFBCB-D7EF-4FAF-B1CF-4055DB0833E8}"/>
               </a:ext>
             </a:extLst>
           </p:cNvPr>
@@ -13399,7 +13466,7 @@
           <p:cNvPr id="13" name="">
             <a:extLst xmlns:a="http://schemas.openxmlformats.org/drawingml/2006/main">
               <a:ext uri="{FF2B5EF4-FFF2-40B4-BE49-F238E27FC236}">
-                <a16:creationId xmlns:a16="http://schemas.microsoft.com/office/drawing/2014/main" id="{7CDEE8A8-0AE0-4D6B-9E8E-DF57D40D40CE}"/>
+                <a16:creationId xmlns:a16="http://schemas.microsoft.com/office/drawing/2014/main" id="{2689F070-4ECE-4391-A818-FA4F6E836F64}"/>
               </a:ext>
             </a:extLst>
           </p:cNvPr>
@@ -13463,7 +13530,7 @@
           <p:cNvPr id="14" name="">
             <a:extLst xmlns:a="http://schemas.openxmlformats.org/drawingml/2006/main">
               <a:ext uri="{FF2B5EF4-FFF2-40B4-BE49-F238E27FC236}">
-                <a16:creationId xmlns:a16="http://schemas.microsoft.com/office/drawing/2014/main" id="{442EEE6E-590A-4BED-8CD6-8ECEA62E11D3}"/>
+                <a16:creationId xmlns:a16="http://schemas.microsoft.com/office/drawing/2014/main" id="{265427B8-A866-4F54-A997-A19DA30FD81E}"/>
               </a:ext>
             </a:extLst>
           </p:cNvPr>
@@ -13496,7 +13563,7 @@
           <p:cNvPr id="15" name="">
             <a:extLst xmlns:a="http://schemas.openxmlformats.org/drawingml/2006/main">
               <a:ext uri="{FF2B5EF4-FFF2-40B4-BE49-F238E27FC236}">
-                <a16:creationId xmlns:a16="http://schemas.microsoft.com/office/drawing/2014/main" id="{99C5E611-603D-40AE-AF86-EB03AC0E7CB7}"/>
+                <a16:creationId xmlns:a16="http://schemas.microsoft.com/office/drawing/2014/main" id="{4C3464A1-6A74-493B-8F2E-C83A2357C249}"/>
               </a:ext>
             </a:extLst>
           </p:cNvPr>
@@ -13531,7 +13598,7 @@
           <p:cNvPr id="16" name="">
             <a:extLst xmlns:a="http://schemas.openxmlformats.org/drawingml/2006/main">
               <a:ext uri="{FF2B5EF4-FFF2-40B4-BE49-F238E27FC236}">
-                <a16:creationId xmlns:a16="http://schemas.microsoft.com/office/drawing/2014/main" id="{7DA2424B-9690-4255-804E-641FF907949D}"/>
+                <a16:creationId xmlns:a16="http://schemas.microsoft.com/office/drawing/2014/main" id="{57500B38-D8E8-4581-BFCA-E30955625CD4}"/>
               </a:ext>
             </a:extLst>
           </p:cNvPr>
@@ -13595,7 +13662,7 @@
           <p:cNvPr id="17" name="">
             <a:extLst xmlns:a="http://schemas.openxmlformats.org/drawingml/2006/main">
               <a:ext uri="{FF2B5EF4-FFF2-40B4-BE49-F238E27FC236}">
-                <a16:creationId xmlns:a16="http://schemas.microsoft.com/office/drawing/2014/main" id="{C9FDC4B2-139F-429A-A7CB-9E62AE737C16}"/>
+                <a16:creationId xmlns:a16="http://schemas.microsoft.com/office/drawing/2014/main" id="{8E3EE11F-48F8-4356-804C-B96B6099DE88}"/>
               </a:ext>
             </a:extLst>
           </p:cNvPr>
@@ -13659,7 +13726,7 @@
           <p:cNvPr id="18" name="">
             <a:extLst xmlns:a="http://schemas.openxmlformats.org/drawingml/2006/main">
               <a:ext uri="{FF2B5EF4-FFF2-40B4-BE49-F238E27FC236}">
-                <a16:creationId xmlns:a16="http://schemas.microsoft.com/office/drawing/2014/main" id="{F3E3B79A-FE37-4776-86D6-7441F71BE2F1}"/>
+                <a16:creationId xmlns:a16="http://schemas.microsoft.com/office/drawing/2014/main" id="{3846D2CD-E38B-43F7-9628-C7B8464F069E}"/>
               </a:ext>
             </a:extLst>
           </p:cNvPr>
@@ -13692,7 +13759,7 @@
           <p:cNvPr id="19" name="">
             <a:extLst xmlns:a="http://schemas.openxmlformats.org/drawingml/2006/main">
               <a:ext uri="{FF2B5EF4-FFF2-40B4-BE49-F238E27FC236}">
-                <a16:creationId xmlns:a16="http://schemas.microsoft.com/office/drawing/2014/main" id="{C22506B8-8DBA-40D2-9DFB-21C166AB9084}"/>
+                <a16:creationId xmlns:a16="http://schemas.microsoft.com/office/drawing/2014/main" id="{BD4FF7B4-82FF-453F-A6FC-FC7D21A03057}"/>
               </a:ext>
             </a:extLst>
           </p:cNvPr>
@@ -13727,7 +13794,7 @@
           <p:cNvPr id="20" name="">
             <a:extLst xmlns:a="http://schemas.openxmlformats.org/drawingml/2006/main">
               <a:ext uri="{FF2B5EF4-FFF2-40B4-BE49-F238E27FC236}">
-                <a16:creationId xmlns:a16="http://schemas.microsoft.com/office/drawing/2014/main" id="{DA4EA8B0-515C-4975-97D4-093311B4E095}"/>
+                <a16:creationId xmlns:a16="http://schemas.microsoft.com/office/drawing/2014/main" id="{32326FD7-2791-49AC-B512-52414BAD86FB}"/>
               </a:ext>
             </a:extLst>
           </p:cNvPr>
@@ -13791,7 +13858,7 @@
           <p:cNvPr id="21" name="">
             <a:extLst xmlns:a="http://schemas.openxmlformats.org/drawingml/2006/main">
               <a:ext uri="{FF2B5EF4-FFF2-40B4-BE49-F238E27FC236}">
-                <a16:creationId xmlns:a16="http://schemas.microsoft.com/office/drawing/2014/main" id="{3CA40B9D-C697-4BA1-A16F-B686AA9DAF72}"/>
+                <a16:creationId xmlns:a16="http://schemas.microsoft.com/office/drawing/2014/main" id="{F33A1152-7EC9-46F1-B60A-F5A02A46992F}"/>
               </a:ext>
             </a:extLst>
           </p:cNvPr>
@@ -13855,7 +13922,7 @@
           <p:cNvPr id="22" name="">
             <a:extLst xmlns:a="http://schemas.openxmlformats.org/drawingml/2006/main">
               <a:ext uri="{FF2B5EF4-FFF2-40B4-BE49-F238E27FC236}">
-                <a16:creationId xmlns:a16="http://schemas.microsoft.com/office/drawing/2014/main" id="{4B8FE219-005E-494D-9A71-990A93D8B17F}"/>
+                <a16:creationId xmlns:a16="http://schemas.microsoft.com/office/drawing/2014/main" id="{CDBA3DFE-3A20-40B2-A000-86BC72105D33}"/>
               </a:ext>
             </a:extLst>
           </p:cNvPr>
@@ -13888,7 +13955,7 @@
           <p:cNvPr id="23" name="">
             <a:extLst xmlns:a="http://schemas.openxmlformats.org/drawingml/2006/main">
               <a:ext uri="{FF2B5EF4-FFF2-40B4-BE49-F238E27FC236}">
-                <a16:creationId xmlns:a16="http://schemas.microsoft.com/office/drawing/2014/main" id="{0E471BA4-28A2-4DB2-8AF5-098B9DE067E5}"/>
+                <a16:creationId xmlns:a16="http://schemas.microsoft.com/office/drawing/2014/main" id="{FD76A91E-C362-44C8-A0F9-329DEEFCED0E}"/>
               </a:ext>
             </a:extLst>
           </p:cNvPr>
@@ -13923,7 +13990,7 @@
           <p:cNvPr id="24" name="">
             <a:extLst xmlns:a="http://schemas.openxmlformats.org/drawingml/2006/main">
               <a:ext uri="{FF2B5EF4-FFF2-40B4-BE49-F238E27FC236}">
-                <a16:creationId xmlns:a16="http://schemas.microsoft.com/office/drawing/2014/main" id="{F4917D39-85E6-48B0-8B7C-FF589CC9FD7B}"/>
+                <a16:creationId xmlns:a16="http://schemas.microsoft.com/office/drawing/2014/main" id="{CF980CEF-24F6-46D1-8472-AE229AB14E6E}"/>
               </a:ext>
             </a:extLst>
           </p:cNvPr>
@@ -13987,7 +14054,7 @@
           <p:cNvPr id="25" name="">
             <a:extLst xmlns:a="http://schemas.openxmlformats.org/drawingml/2006/main">
               <a:ext uri="{FF2B5EF4-FFF2-40B4-BE49-F238E27FC236}">
-                <a16:creationId xmlns:a16="http://schemas.microsoft.com/office/drawing/2014/main" id="{DFFC608A-F46B-4277-A507-0DC3CA85A95C}"/>
+                <a16:creationId xmlns:a16="http://schemas.microsoft.com/office/drawing/2014/main" id="{52D22097-7BF9-4392-BD32-37648EE7AC28}"/>
               </a:ext>
             </a:extLst>
           </p:cNvPr>
@@ -14051,7 +14118,7 @@
           <p:cNvPr id="26" name="">
             <a:extLst xmlns:a="http://schemas.openxmlformats.org/drawingml/2006/main">
               <a:ext uri="{FF2B5EF4-FFF2-40B4-BE49-F238E27FC236}">
-                <a16:creationId xmlns:a16="http://schemas.microsoft.com/office/drawing/2014/main" id="{0CD4699B-86B6-4939-8FCE-F949D071BDA9}"/>
+                <a16:creationId xmlns:a16="http://schemas.microsoft.com/office/drawing/2014/main" id="{743B1F23-3886-43D5-9AF9-A37EAB31D7C8}"/>
               </a:ext>
             </a:extLst>
           </p:cNvPr>
@@ -14084,7 +14151,7 @@
           <p:cNvPr id="27" name="">
             <a:extLst xmlns:a="http://schemas.openxmlformats.org/drawingml/2006/main">
               <a:ext uri="{FF2B5EF4-FFF2-40B4-BE49-F238E27FC236}">
-                <a16:creationId xmlns:a16="http://schemas.microsoft.com/office/drawing/2014/main" id="{BA90CDE5-8C74-4F77-940D-165665636803}"/>
+                <a16:creationId xmlns:a16="http://schemas.microsoft.com/office/drawing/2014/main" id="{D86669C6-DA7C-4E31-BF82-0A2BEA139170}"/>
               </a:ext>
             </a:extLst>
           </p:cNvPr>
@@ -14119,7 +14186,7 @@
           <p:cNvPr id="28" name="">
             <a:extLst xmlns:a="http://schemas.openxmlformats.org/drawingml/2006/main">
               <a:ext uri="{FF2B5EF4-FFF2-40B4-BE49-F238E27FC236}">
-                <a16:creationId xmlns:a16="http://schemas.microsoft.com/office/drawing/2014/main" id="{40C9DF59-B0FF-462D-94D8-0E7857146157}"/>
+                <a16:creationId xmlns:a16="http://schemas.microsoft.com/office/drawing/2014/main" id="{BCB051DC-E99C-456C-AA00-D715185BE5B3}"/>
               </a:ext>
             </a:extLst>
           </p:cNvPr>
@@ -14183,7 +14250,7 @@
           <p:cNvPr id="29" name="">
             <a:extLst xmlns:a="http://schemas.openxmlformats.org/drawingml/2006/main">
               <a:ext uri="{FF2B5EF4-FFF2-40B4-BE49-F238E27FC236}">
-                <a16:creationId xmlns:a16="http://schemas.microsoft.com/office/drawing/2014/main" id="{DE9C9CD1-508E-40A2-BBD5-681CFC63320A}"/>
+                <a16:creationId xmlns:a16="http://schemas.microsoft.com/office/drawing/2014/main" id="{4584904D-3675-47BF-8263-CA9FC10AF4BB}"/>
               </a:ext>
             </a:extLst>
           </p:cNvPr>
@@ -14247,7 +14314,7 @@
           <p:cNvPr id="30" name="">
             <a:extLst xmlns:a="http://schemas.openxmlformats.org/drawingml/2006/main">
               <a:ext uri="{FF2B5EF4-FFF2-40B4-BE49-F238E27FC236}">
-                <a16:creationId xmlns:a16="http://schemas.microsoft.com/office/drawing/2014/main" id="{068AF260-E4E6-4A8A-B240-7153FA814E70}"/>
+                <a16:creationId xmlns:a16="http://schemas.microsoft.com/office/drawing/2014/main" id="{2383E103-4B72-48B1-9E8C-BC93C8436F26}"/>
               </a:ext>
             </a:extLst>
           </p:cNvPr>
@@ -14307,7 +14374,7 @@
     </p:spTree>
     <p:extLst>
       <p:ext uri="{BB962C8B-B14F-4D97-AF65-F5344CB8AC3E}">
-        <p14:creationId xmlns:p14="http://schemas.microsoft.com/office/powerpoint/2010/main" val="650410880"/>
+        <p14:creationId xmlns:p14="http://schemas.microsoft.com/office/powerpoint/2010/main" val="1416074213"/>
       </p:ext>
     </p:extLst>
   </p:cSld>
@@ -14338,7 +14405,7 @@
           <p:cNvPr id="1" name="">
             <a:extLst xmlns:a="http://schemas.openxmlformats.org/drawingml/2006/main">
               <a:ext uri="{FF2B5EF4-FFF2-40B4-BE49-F238E27FC236}">
-                <a16:creationId xmlns:a16="http://schemas.microsoft.com/office/drawing/2014/main" id="{03144A38-32E2-4985-9607-D4EDA41DF5E0}"/>
+                <a16:creationId xmlns:a16="http://schemas.microsoft.com/office/drawing/2014/main" id="{6D5EB4CD-E79F-434D-A6F0-D82C094E6FEF}"/>
               </a:ext>
             </a:extLst>
           </p:cNvPr>
@@ -14373,7 +14440,7 @@
           <p:cNvPr id="2" name="">
             <a:extLst xmlns:a="http://schemas.openxmlformats.org/drawingml/2006/main">
               <a:ext uri="{FF2B5EF4-FFF2-40B4-BE49-F238E27FC236}">
-                <a16:creationId xmlns:a16="http://schemas.microsoft.com/office/drawing/2014/main" id="{C0C58BB6-60E3-429A-9465-832F5A753F65}"/>
+                <a16:creationId xmlns:a16="http://schemas.microsoft.com/office/drawing/2014/main" id="{0F83BDC5-C535-46A7-B840-1CA189EEEFA6}"/>
               </a:ext>
             </a:extLst>
           </p:cNvPr>
@@ -14437,7 +14504,7 @@
           <p:cNvPr id="3" name="">
             <a:extLst xmlns:a="http://schemas.openxmlformats.org/drawingml/2006/main">
               <a:ext uri="{FF2B5EF4-FFF2-40B4-BE49-F238E27FC236}">
-                <a16:creationId xmlns:a16="http://schemas.microsoft.com/office/drawing/2014/main" id="{56307199-6829-4EC0-9637-DA5EBA45C361}"/>
+                <a16:creationId xmlns:a16="http://schemas.microsoft.com/office/drawing/2014/main" id="{0E7BEAF9-8789-400C-9D90-259D85CA6FD9}"/>
               </a:ext>
             </a:extLst>
           </p:cNvPr>
@@ -14501,7 +14568,7 @@
           <p:cNvPr id="4" name="">
             <a:extLst xmlns:a="http://schemas.openxmlformats.org/drawingml/2006/main">
               <a:ext uri="{FF2B5EF4-FFF2-40B4-BE49-F238E27FC236}">
-                <a16:creationId xmlns:a16="http://schemas.microsoft.com/office/drawing/2014/main" id="{91446F26-8D17-429A-8CC0-29173331D036}"/>
+                <a16:creationId xmlns:a16="http://schemas.microsoft.com/office/drawing/2014/main" id="{22B17F67-3983-4E61-A0EF-666FE6635564}"/>
               </a:ext>
             </a:extLst>
           </p:cNvPr>
@@ -14565,7 +14632,7 @@
           <p:cNvPr id="5" name="">
             <a:extLst xmlns:a="http://schemas.openxmlformats.org/drawingml/2006/main">
               <a:ext uri="{FF2B5EF4-FFF2-40B4-BE49-F238E27FC236}">
-                <a16:creationId xmlns:a16="http://schemas.microsoft.com/office/drawing/2014/main" id="{BB851AED-00CD-4647-B4B1-349706A4672B}"/>
+                <a16:creationId xmlns:a16="http://schemas.microsoft.com/office/drawing/2014/main" id="{B4CC4A85-ECE9-4AB3-8C88-C1DE6A792562}"/>
               </a:ext>
             </a:extLst>
           </p:cNvPr>
@@ -14629,7 +14696,7 @@
           <p:cNvPr id="6" name="">
             <a:extLst xmlns:a="http://schemas.openxmlformats.org/drawingml/2006/main">
               <a:ext uri="{FF2B5EF4-FFF2-40B4-BE49-F238E27FC236}">
-                <a16:creationId xmlns:a16="http://schemas.microsoft.com/office/drawing/2014/main" id="{9C4D7D4F-67E4-4A9C-B87B-F04A1D5BF659}"/>
+                <a16:creationId xmlns:a16="http://schemas.microsoft.com/office/drawing/2014/main" id="{1B405876-8E11-41DF-845B-C4668B7895EF}"/>
               </a:ext>
             </a:extLst>
           </p:cNvPr>
@@ -14693,7 +14760,7 @@
           <p:cNvPr id="7" name="">
             <a:extLst xmlns:a="http://schemas.openxmlformats.org/drawingml/2006/main">
               <a:ext uri="{FF2B5EF4-FFF2-40B4-BE49-F238E27FC236}">
-                <a16:creationId xmlns:a16="http://schemas.microsoft.com/office/drawing/2014/main" id="{ED6073A9-896B-44DA-A2D1-CDF200E35469}"/>
+                <a16:creationId xmlns:a16="http://schemas.microsoft.com/office/drawing/2014/main" id="{1EFD9C8F-86DA-462F-89BF-7D0F3B16BCD8}"/>
               </a:ext>
             </a:extLst>
           </p:cNvPr>
@@ -14757,7 +14824,7 @@
           <p:cNvPr id="8" name="">
             <a:extLst xmlns:a="http://schemas.openxmlformats.org/drawingml/2006/main">
               <a:ext uri="{FF2B5EF4-FFF2-40B4-BE49-F238E27FC236}">
-                <a16:creationId xmlns:a16="http://schemas.microsoft.com/office/drawing/2014/main" id="{7D521E21-C4F4-4138-8846-E08B31741A2B}"/>
+                <a16:creationId xmlns:a16="http://schemas.microsoft.com/office/drawing/2014/main" id="{6D919CDC-6203-4038-8BA1-FCFBD0DC2367}"/>
               </a:ext>
             </a:extLst>
           </p:cNvPr>
@@ -14821,7 +14888,7 @@
           <p:cNvPr id="9" name="">
             <a:extLst xmlns:a="http://schemas.openxmlformats.org/drawingml/2006/main">
               <a:ext uri="{FF2B5EF4-FFF2-40B4-BE49-F238E27FC236}">
-                <a16:creationId xmlns:a16="http://schemas.microsoft.com/office/drawing/2014/main" id="{F5D927AE-AFD0-4BF9-80DD-1F28F34104CC}"/>
+                <a16:creationId xmlns:a16="http://schemas.microsoft.com/office/drawing/2014/main" id="{4DCE4CD1-8CFA-4368-9CB6-A8E46C0DA438}"/>
               </a:ext>
             </a:extLst>
           </p:cNvPr>
@@ -14854,7 +14921,7 @@
           <p:cNvPr id="10" name="">
             <a:extLst xmlns:a="http://schemas.openxmlformats.org/drawingml/2006/main">
               <a:ext uri="{FF2B5EF4-FFF2-40B4-BE49-F238E27FC236}">
-                <a16:creationId xmlns:a16="http://schemas.microsoft.com/office/drawing/2014/main" id="{D54E4706-02AB-4B76-9F78-911AE0891E06}"/>
+                <a16:creationId xmlns:a16="http://schemas.microsoft.com/office/drawing/2014/main" id="{8CED78B2-A4A9-4DB0-BF82-9FE5CF02880A}"/>
               </a:ext>
             </a:extLst>
           </p:cNvPr>
@@ -14889,7 +14956,7 @@
           <p:cNvPr id="11" name="">
             <a:extLst xmlns:a="http://schemas.openxmlformats.org/drawingml/2006/main">
               <a:ext uri="{FF2B5EF4-FFF2-40B4-BE49-F238E27FC236}">
-                <a16:creationId xmlns:a16="http://schemas.microsoft.com/office/drawing/2014/main" id="{DB2A2C89-9792-4756-8DF5-4FE7322712A5}"/>
+                <a16:creationId xmlns:a16="http://schemas.microsoft.com/office/drawing/2014/main" id="{3DBE498E-442E-43BF-AA87-380085A08F92}"/>
               </a:ext>
             </a:extLst>
           </p:cNvPr>
@@ -14976,7 +15043,7 @@
           <p:cNvPr id="12" name="">
             <a:extLst xmlns:a="http://schemas.openxmlformats.org/drawingml/2006/main">
               <a:ext uri="{FF2B5EF4-FFF2-40B4-BE49-F238E27FC236}">
-                <a16:creationId xmlns:a16="http://schemas.microsoft.com/office/drawing/2014/main" id="{21D29D36-4F0B-458D-A11D-07C161E2E0FE}"/>
+                <a16:creationId xmlns:a16="http://schemas.microsoft.com/office/drawing/2014/main" id="{04512CD2-A09F-42B3-872D-6E753309739A}"/>
               </a:ext>
             </a:extLst>
           </p:cNvPr>
@@ -15011,7 +15078,7 @@
           <p:cNvPr id="13" name="">
             <a:extLst xmlns:a="http://schemas.openxmlformats.org/drawingml/2006/main">
               <a:ext uri="{FF2B5EF4-FFF2-40B4-BE49-F238E27FC236}">
-                <a16:creationId xmlns:a16="http://schemas.microsoft.com/office/drawing/2014/main" id="{656C94D6-1250-4548-AF13-B132E59A6EC9}"/>
+                <a16:creationId xmlns:a16="http://schemas.microsoft.com/office/drawing/2014/main" id="{28A6A658-0A35-4CDC-B0D5-C7102B3C4925}"/>
               </a:ext>
             </a:extLst>
           </p:cNvPr>
@@ -15075,7 +15142,7 @@
           <p:cNvPr id="14" name="">
             <a:extLst xmlns:a="http://schemas.openxmlformats.org/drawingml/2006/main">
               <a:ext uri="{FF2B5EF4-FFF2-40B4-BE49-F238E27FC236}">
-                <a16:creationId xmlns:a16="http://schemas.microsoft.com/office/drawing/2014/main" id="{8B664B5B-C96B-4CB6-82D0-0B0F6AEB3355}"/>
+                <a16:creationId xmlns:a16="http://schemas.microsoft.com/office/drawing/2014/main" id="{E654EC61-AA67-474E-8C04-5745B9DA24D2}"/>
               </a:ext>
             </a:extLst>
           </p:cNvPr>
@@ -15110,7 +15177,7 @@
           <p:cNvPr id="15" name="">
             <a:extLst xmlns:a="http://schemas.openxmlformats.org/drawingml/2006/main">
               <a:ext uri="{FF2B5EF4-FFF2-40B4-BE49-F238E27FC236}">
-                <a16:creationId xmlns:a16="http://schemas.microsoft.com/office/drawing/2014/main" id="{33F1CF8A-E747-4F15-B53C-79A20FF0FBDA}"/>
+                <a16:creationId xmlns:a16="http://schemas.microsoft.com/office/drawing/2014/main" id="{E00540DF-77BA-41F8-B82E-D87C1D637B25}"/>
               </a:ext>
             </a:extLst>
           </p:cNvPr>
@@ -15174,7 +15241,7 @@
           <p:cNvPr id="16" name="">
             <a:extLst xmlns:a="http://schemas.openxmlformats.org/drawingml/2006/main">
               <a:ext uri="{FF2B5EF4-FFF2-40B4-BE49-F238E27FC236}">
-                <a16:creationId xmlns:a16="http://schemas.microsoft.com/office/drawing/2014/main" id="{E993F827-9DDC-4F9E-8489-A108D6D7ED2F}"/>
+                <a16:creationId xmlns:a16="http://schemas.microsoft.com/office/drawing/2014/main" id="{7B18BA6D-9BD5-420F-B6C6-29177592E738}"/>
               </a:ext>
             </a:extLst>
           </p:cNvPr>
@@ -15207,7 +15274,7 @@
           <p:cNvPr id="17" name="">
             <a:extLst xmlns:a="http://schemas.openxmlformats.org/drawingml/2006/main">
               <a:ext uri="{FF2B5EF4-FFF2-40B4-BE49-F238E27FC236}">
-                <a16:creationId xmlns:a16="http://schemas.microsoft.com/office/drawing/2014/main" id="{5589E36E-C045-4E17-9A07-7C30AC5CEB93}"/>
+                <a16:creationId xmlns:a16="http://schemas.microsoft.com/office/drawing/2014/main" id="{98E474F2-B8E5-4642-BB7D-ECAEB555BE57}"/>
               </a:ext>
             </a:extLst>
           </p:cNvPr>
@@ -15242,7 +15309,7 @@
           <p:cNvPr id="18" name="">
             <a:extLst xmlns:a="http://schemas.openxmlformats.org/drawingml/2006/main">
               <a:ext uri="{FF2B5EF4-FFF2-40B4-BE49-F238E27FC236}">
-                <a16:creationId xmlns:a16="http://schemas.microsoft.com/office/drawing/2014/main" id="{95B55684-340A-4E23-B37A-74355B19C33D}"/>
+                <a16:creationId xmlns:a16="http://schemas.microsoft.com/office/drawing/2014/main" id="{A0582A03-2A9C-4811-BCCE-6151C2C2C6A9}"/>
               </a:ext>
             </a:extLst>
           </p:cNvPr>
@@ -15329,7 +15396,7 @@
           <p:cNvPr id="19" name="">
             <a:extLst xmlns:a="http://schemas.openxmlformats.org/drawingml/2006/main">
               <a:ext uri="{FF2B5EF4-FFF2-40B4-BE49-F238E27FC236}">
-                <a16:creationId xmlns:a16="http://schemas.microsoft.com/office/drawing/2014/main" id="{0C00C4E8-866D-47B9-8956-CFA09AA5F1A1}"/>
+                <a16:creationId xmlns:a16="http://schemas.microsoft.com/office/drawing/2014/main" id="{743B0805-E065-4A5C-9A7F-01BDB7E0E944}"/>
               </a:ext>
             </a:extLst>
           </p:cNvPr>
@@ -15364,7 +15431,7 @@
           <p:cNvPr id="20" name="">
             <a:extLst xmlns:a="http://schemas.openxmlformats.org/drawingml/2006/main">
               <a:ext uri="{FF2B5EF4-FFF2-40B4-BE49-F238E27FC236}">
-                <a16:creationId xmlns:a16="http://schemas.microsoft.com/office/drawing/2014/main" id="{5E89BFFA-B4CE-43B4-BF77-A063B2DA3958}"/>
+                <a16:creationId xmlns:a16="http://schemas.microsoft.com/office/drawing/2014/main" id="{6EEBE15C-3CDF-4C18-A185-B04DC1435880}"/>
               </a:ext>
             </a:extLst>
           </p:cNvPr>
@@ -15428,7 +15495,7 @@
           <p:cNvPr id="21" name="">
             <a:extLst xmlns:a="http://schemas.openxmlformats.org/drawingml/2006/main">
               <a:ext uri="{FF2B5EF4-FFF2-40B4-BE49-F238E27FC236}">
-                <a16:creationId xmlns:a16="http://schemas.microsoft.com/office/drawing/2014/main" id="{49360832-8A2D-48C8-B52E-371A646924B9}"/>
+                <a16:creationId xmlns:a16="http://schemas.microsoft.com/office/drawing/2014/main" id="{4F6D1C75-1D77-4125-9F38-A518702D77FA}"/>
               </a:ext>
             </a:extLst>
           </p:cNvPr>
@@ -15463,7 +15530,7 @@
           <p:cNvPr id="22" name="">
             <a:extLst xmlns:a="http://schemas.openxmlformats.org/drawingml/2006/main">
               <a:ext uri="{FF2B5EF4-FFF2-40B4-BE49-F238E27FC236}">
-                <a16:creationId xmlns:a16="http://schemas.microsoft.com/office/drawing/2014/main" id="{F9AA2E27-594F-4BBD-986B-75B3B512D2D6}"/>
+                <a16:creationId xmlns:a16="http://schemas.microsoft.com/office/drawing/2014/main" id="{6FCF14D0-2403-4C50-9CEC-98907C15C772}"/>
               </a:ext>
             </a:extLst>
           </p:cNvPr>
@@ -15527,7 +15594,7 @@
           <p:cNvPr id="23" name="">
             <a:extLst xmlns:a="http://schemas.openxmlformats.org/drawingml/2006/main">
               <a:ext uri="{FF2B5EF4-FFF2-40B4-BE49-F238E27FC236}">
-                <a16:creationId xmlns:a16="http://schemas.microsoft.com/office/drawing/2014/main" id="{83BCD932-94AF-489D-9F43-8712AFB05658}"/>
+                <a16:creationId xmlns:a16="http://schemas.microsoft.com/office/drawing/2014/main" id="{E557AD53-0C55-4D20-95CC-FDE6C1303A3B}"/>
               </a:ext>
             </a:extLst>
           </p:cNvPr>
@@ -15560,7 +15627,7 @@
           <p:cNvPr id="24" name="">
             <a:extLst xmlns:a="http://schemas.openxmlformats.org/drawingml/2006/main">
               <a:ext uri="{FF2B5EF4-FFF2-40B4-BE49-F238E27FC236}">
-                <a16:creationId xmlns:a16="http://schemas.microsoft.com/office/drawing/2014/main" id="{62204F7E-F128-4980-881A-3C896F5B7DE9}"/>
+                <a16:creationId xmlns:a16="http://schemas.microsoft.com/office/drawing/2014/main" id="{B04DCC4F-B1E1-4E91-B86D-3895237F3215}"/>
               </a:ext>
             </a:extLst>
           </p:cNvPr>
@@ -15595,7 +15662,7 @@
           <p:cNvPr id="25" name="">
             <a:extLst xmlns:a="http://schemas.openxmlformats.org/drawingml/2006/main">
               <a:ext uri="{FF2B5EF4-FFF2-40B4-BE49-F238E27FC236}">
-                <a16:creationId xmlns:a16="http://schemas.microsoft.com/office/drawing/2014/main" id="{EFF5A7CC-98A9-4D37-91A1-CF2A8AEFFCDC}"/>
+                <a16:creationId xmlns:a16="http://schemas.microsoft.com/office/drawing/2014/main" id="{FD79E67B-9103-4D15-9D67-BC2012B4B377}"/>
               </a:ext>
             </a:extLst>
           </p:cNvPr>
@@ -15682,7 +15749,7 @@
           <p:cNvPr id="26" name="">
             <a:extLst xmlns:a="http://schemas.openxmlformats.org/drawingml/2006/main">
               <a:ext uri="{FF2B5EF4-FFF2-40B4-BE49-F238E27FC236}">
-                <a16:creationId xmlns:a16="http://schemas.microsoft.com/office/drawing/2014/main" id="{7DA1F7EC-9F8F-47D4-8E27-5201CC403740}"/>
+                <a16:creationId xmlns:a16="http://schemas.microsoft.com/office/drawing/2014/main" id="{21F2D8D2-2376-4FB1-A62A-BB5D6145A67F}"/>
               </a:ext>
             </a:extLst>
           </p:cNvPr>
@@ -15717,7 +15784,7 @@
           <p:cNvPr id="27" name="">
             <a:extLst xmlns:a="http://schemas.openxmlformats.org/drawingml/2006/main">
               <a:ext uri="{FF2B5EF4-FFF2-40B4-BE49-F238E27FC236}">
-                <a16:creationId xmlns:a16="http://schemas.microsoft.com/office/drawing/2014/main" id="{FC12B6E4-0985-440E-93AD-B382E2468E1C}"/>
+                <a16:creationId xmlns:a16="http://schemas.microsoft.com/office/drawing/2014/main" id="{3CD0BC00-596A-4B1B-BF98-09BF59D58632}"/>
               </a:ext>
             </a:extLst>
           </p:cNvPr>
@@ -15781,7 +15848,7 @@
           <p:cNvPr id="28" name="">
             <a:extLst xmlns:a="http://schemas.openxmlformats.org/drawingml/2006/main">
               <a:ext uri="{FF2B5EF4-FFF2-40B4-BE49-F238E27FC236}">
-                <a16:creationId xmlns:a16="http://schemas.microsoft.com/office/drawing/2014/main" id="{DC733029-86DC-48F8-8594-E578965B0B62}"/>
+                <a16:creationId xmlns:a16="http://schemas.microsoft.com/office/drawing/2014/main" id="{2BA76176-87E6-4FE6-8387-53F9FCFF9308}"/>
               </a:ext>
             </a:extLst>
           </p:cNvPr>
@@ -15816,7 +15883,7 @@
           <p:cNvPr id="29" name="">
             <a:extLst xmlns:a="http://schemas.openxmlformats.org/drawingml/2006/main">
               <a:ext uri="{FF2B5EF4-FFF2-40B4-BE49-F238E27FC236}">
-                <a16:creationId xmlns:a16="http://schemas.microsoft.com/office/drawing/2014/main" id="{F7A759F7-0DB0-4F01-A74F-11963499B7BF}"/>
+                <a16:creationId xmlns:a16="http://schemas.microsoft.com/office/drawing/2014/main" id="{EEE95F67-4F07-4376-A375-7B6264B8DAFD}"/>
               </a:ext>
             </a:extLst>
           </p:cNvPr>
@@ -15880,7 +15947,7 @@
           <p:cNvPr id="30" name="">
             <a:extLst xmlns:a="http://schemas.openxmlformats.org/drawingml/2006/main">
               <a:ext uri="{FF2B5EF4-FFF2-40B4-BE49-F238E27FC236}">
-                <a16:creationId xmlns:a16="http://schemas.microsoft.com/office/drawing/2014/main" id="{89BD0B9A-0ACA-4B2C-8EE5-912E84889118}"/>
+                <a16:creationId xmlns:a16="http://schemas.microsoft.com/office/drawing/2014/main" id="{72B1DF13-6DBF-4AEB-ACA9-13B3F025C9FB}"/>
               </a:ext>
             </a:extLst>
           </p:cNvPr>
@@ -15913,7 +15980,7 @@
           <p:cNvPr id="31" name="">
             <a:extLst xmlns:a="http://schemas.openxmlformats.org/drawingml/2006/main">
               <a:ext uri="{FF2B5EF4-FFF2-40B4-BE49-F238E27FC236}">
-                <a16:creationId xmlns:a16="http://schemas.microsoft.com/office/drawing/2014/main" id="{6CAF0705-F1F1-4245-8B59-DD6215DDDE62}"/>
+                <a16:creationId xmlns:a16="http://schemas.microsoft.com/office/drawing/2014/main" id="{8DDB7B72-B903-4BDF-954B-646E11FD1865}"/>
               </a:ext>
             </a:extLst>
           </p:cNvPr>
@@ -15948,7 +16015,7 @@
           <p:cNvPr id="32" name="">
             <a:extLst xmlns:a="http://schemas.openxmlformats.org/drawingml/2006/main">
               <a:ext uri="{FF2B5EF4-FFF2-40B4-BE49-F238E27FC236}">
-                <a16:creationId xmlns:a16="http://schemas.microsoft.com/office/drawing/2014/main" id="{0FE4FF33-F1EA-4901-9ACF-60352C908924}"/>
+                <a16:creationId xmlns:a16="http://schemas.microsoft.com/office/drawing/2014/main" id="{6F88FCDB-E0CD-4932-8509-E6E933334FEE}"/>
               </a:ext>
             </a:extLst>
           </p:cNvPr>
@@ -16035,7 +16102,7 @@
           <p:cNvPr id="33" name="">
             <a:extLst xmlns:a="http://schemas.openxmlformats.org/drawingml/2006/main">
               <a:ext uri="{FF2B5EF4-FFF2-40B4-BE49-F238E27FC236}">
-                <a16:creationId xmlns:a16="http://schemas.microsoft.com/office/drawing/2014/main" id="{9BCB1269-347D-4448-BEBB-1EAECB698E79}"/>
+                <a16:creationId xmlns:a16="http://schemas.microsoft.com/office/drawing/2014/main" id="{CB4E9C9E-7D64-4BDF-9558-F050B88D08FB}"/>
               </a:ext>
             </a:extLst>
           </p:cNvPr>
@@ -16070,7 +16137,7 @@
           <p:cNvPr id="34" name="">
             <a:extLst xmlns:a="http://schemas.openxmlformats.org/drawingml/2006/main">
               <a:ext uri="{FF2B5EF4-FFF2-40B4-BE49-F238E27FC236}">
-                <a16:creationId xmlns:a16="http://schemas.microsoft.com/office/drawing/2014/main" id="{D466C2FB-3FE8-4B27-8CCE-4B8E0C2B5ACF}"/>
+                <a16:creationId xmlns:a16="http://schemas.microsoft.com/office/drawing/2014/main" id="{4D256551-DA6F-4F51-85DD-FAE3F8E875CF}"/>
               </a:ext>
             </a:extLst>
           </p:cNvPr>
@@ -16134,7 +16201,7 @@
           <p:cNvPr id="35" name="">
             <a:extLst xmlns:a="http://schemas.openxmlformats.org/drawingml/2006/main">
               <a:ext uri="{FF2B5EF4-FFF2-40B4-BE49-F238E27FC236}">
-                <a16:creationId xmlns:a16="http://schemas.microsoft.com/office/drawing/2014/main" id="{3BBBAB0F-DE62-422A-82C1-A637A7C3E4D0}"/>
+                <a16:creationId xmlns:a16="http://schemas.microsoft.com/office/drawing/2014/main" id="{65010CB5-5E7F-4790-BBBC-29889A1BA269}"/>
               </a:ext>
             </a:extLst>
           </p:cNvPr>
@@ -16169,7 +16236,7 @@
           <p:cNvPr id="36" name="">
             <a:extLst xmlns:a="http://schemas.openxmlformats.org/drawingml/2006/main">
               <a:ext uri="{FF2B5EF4-FFF2-40B4-BE49-F238E27FC236}">
-                <a16:creationId xmlns:a16="http://schemas.microsoft.com/office/drawing/2014/main" id="{405FD31C-2987-457E-B9D0-24D4242B8BB3}"/>
+                <a16:creationId xmlns:a16="http://schemas.microsoft.com/office/drawing/2014/main" id="{7E7D1D68-CA78-4DEB-A6C6-875AEF1B6CBF}"/>
               </a:ext>
             </a:extLst>
           </p:cNvPr>
@@ -16233,7 +16300,7 @@
           <p:cNvPr id="37" name="">
             <a:extLst xmlns:a="http://schemas.openxmlformats.org/drawingml/2006/main">
               <a:ext uri="{FF2B5EF4-FFF2-40B4-BE49-F238E27FC236}">
-                <a16:creationId xmlns:a16="http://schemas.microsoft.com/office/drawing/2014/main" id="{B6CBAECA-ED79-41DE-B87A-8AF31A02A3FB}"/>
+                <a16:creationId xmlns:a16="http://schemas.microsoft.com/office/drawing/2014/main" id="{5B5ECAD6-5AA8-4E85-8F45-C3C82EC7F3EB}"/>
               </a:ext>
             </a:extLst>
           </p:cNvPr>
@@ -16268,7 +16335,7 @@
           <p:cNvPr id="38" name="">
             <a:extLst xmlns:a="http://schemas.openxmlformats.org/drawingml/2006/main">
               <a:ext uri="{FF2B5EF4-FFF2-40B4-BE49-F238E27FC236}">
-                <a16:creationId xmlns:a16="http://schemas.microsoft.com/office/drawing/2014/main" id="{0C3F72EE-72E3-4C20-86E4-F48182E610E3}"/>
+                <a16:creationId xmlns:a16="http://schemas.microsoft.com/office/drawing/2014/main" id="{43ADCFDF-E3B9-4FED-A8F8-075C54CF111E}"/>
               </a:ext>
             </a:extLst>
           </p:cNvPr>
@@ -16330,7 +16397,1098 @@
     </p:spTree>
     <p:extLst>
       <p:ext uri="{BB962C8B-B14F-4D97-AF65-F5344CB8AC3E}">
-        <p14:creationId xmlns:p14="http://schemas.microsoft.com/office/powerpoint/2010/main" val="1982797610"/>
+        <p14:creationId xmlns:p14="http://schemas.microsoft.com/office/powerpoint/2010/main" val="391703994"/>
+      </p:ext>
+    </p:extLst>
+  </p:cSld>
+</p:sld>
+</file>
+
+<file path=ppt/slides/slide19.xml><?xml version="1.0" encoding="utf-8"?>
+<p:sld xmlns:p="http://schemas.openxmlformats.org/presentationml/2006/main">
+  <p:cSld>
+    <p:bg>
+      <p:bgPr>
+        <a:solidFill xmlns:a="http://schemas.openxmlformats.org/drawingml/2006/main">
+          <a:srgbClr val="FAFBFC"/>
+        </a:solidFill>
+      </p:bgPr>
+    </p:bg>
+    <p:spTree>
+      <p:nvGrpSpPr>
+        <p:cNvPr id="1" name=""/>
+        <p:cNvGrpSpPr/>
+        <p:nvPr/>
+      </p:nvGrpSpPr>
+      <p:grpSpPr>
+        <a:xfrm xmlns:a="http://schemas.openxmlformats.org/drawingml/2006/main"/>
+      </p:grpSpPr>
+      <p:sp>
+        <p:nvSpPr>
+          <p:cNvPr id="1" name="">
+            <a:extLst xmlns:a="http://schemas.openxmlformats.org/drawingml/2006/main">
+              <a:ext uri="{FF2B5EF4-FFF2-40B4-BE49-F238E27FC236}">
+                <a16:creationId xmlns:a16="http://schemas.microsoft.com/office/drawing/2014/main" id="{32197AEA-D0DF-42E7-B2ED-8B8FA42906C2}"/>
+              </a:ext>
+            </a:extLst>
+          </p:cNvPr>
+          <p:cNvSpPr>
+            <a:spLocks xmlns:a="http://schemas.openxmlformats.org/drawingml/2006/main" noGrp="1"/>
+          </p:cNvSpPr>
+          <p:nvPr/>
+        </p:nvSpPr>
+        <p:spPr>
+          <a:xfrm xmlns:a="http://schemas.openxmlformats.org/drawingml/2006/main">
+            <a:off x="0" y="0"/>
+            <a:ext cx="76200" cy="6858000"/>
+          </a:xfrm>
+          <a:prstGeom xmlns:a="http://schemas.openxmlformats.org/drawingml/2006/main" prst="rect">
+            <a:avLst/>
+          </a:prstGeom>
+          <a:solidFill xmlns:a="http://schemas.openxmlformats.org/drawingml/2006/main">
+            <a:srgbClr val="2563EB"/>
+          </a:solidFill>
+          <a:ln xmlns:a="http://schemas.openxmlformats.org/drawingml/2006/main" w="0">
+            <a:solidFill>
+              <a:srgbClr val="000000">
+                <a:alpha val="0"/>
+              </a:srgbClr>
+            </a:solidFill>
+            <a:prstDash val="solid"/>
+          </a:ln>
+        </p:spPr>
+      </p:sp>
+      <p:sp>
+        <p:nvSpPr>
+          <p:cNvPr id="2" name="">
+            <a:extLst xmlns:a="http://schemas.openxmlformats.org/drawingml/2006/main">
+              <a:ext uri="{FF2B5EF4-FFF2-40B4-BE49-F238E27FC236}">
+                <a16:creationId xmlns:a16="http://schemas.microsoft.com/office/drawing/2014/main" id="{3B7D9356-935E-434B-B8C3-010CB3B98501}"/>
+              </a:ext>
+            </a:extLst>
+          </p:cNvPr>
+          <p:cNvSpPr>
+            <a:spLocks xmlns:a="http://schemas.openxmlformats.org/drawingml/2006/main" noGrp="1"/>
+          </p:cNvSpPr>
+          <p:nvPr/>
+        </p:nvSpPr>
+        <p:spPr>
+          <a:xfrm xmlns:a="http://schemas.openxmlformats.org/drawingml/2006/main">
+            <a:off x="514350" y="285750"/>
+            <a:ext cx="3429000" cy="247650"/>
+          </a:xfrm>
+          <a:prstGeom xmlns:a="http://schemas.openxmlformats.org/drawingml/2006/main" prst="rect">
+            <a:avLst/>
+          </a:prstGeom>
+          <a:solidFill xmlns:a="http://schemas.openxmlformats.org/drawingml/2006/main">
+            <a:srgbClr val="000000">
+              <a:alpha val="0"/>
+            </a:srgbClr>
+          </a:solidFill>
+          <a:ln xmlns:a="http://schemas.openxmlformats.org/drawingml/2006/main" w="0">
+            <a:solidFill>
+              <a:srgbClr val="000000">
+                <a:alpha val="0"/>
+              </a:srgbClr>
+            </a:solidFill>
+            <a:prstDash val="solid"/>
+          </a:ln>
+        </p:spPr>
+        <p:txBody>
+          <a:bodyPr xmlns:a="http://schemas.openxmlformats.org/drawingml/2006/main" lIns="0" tIns="0" rIns="0" bIns="0" anchor="t"/>
+          <a:lstStyle xmlns:a="http://schemas.openxmlformats.org/drawingml/2006/main"/>
+          <a:p xmlns:a="http://schemas.openxmlformats.org/drawingml/2006/main">
+            <a:pPr algn="l">
+              <a:defRPr sz="1050" b="1">
+                <a:solidFill>
+                  <a:srgbClr val="2563EB"/>
+                </a:solidFill>
+                <a:latin typeface="PingFang SC"/>
+                <a:ea typeface="PingFang SC"/>
+                <a:cs typeface="PingFang SC"/>
+              </a:defRPr>
+            </a:pPr>
+            <a:r>
+              <a:rPr sz="1050" b="1">
+                <a:solidFill>
+                  <a:srgbClr val="2563EB"/>
+                </a:solidFill>
+                <a:latin typeface="PingFang SC"/>
+                <a:ea typeface="PingFang SC"/>
+                <a:cs typeface="PingFang SC"/>
+              </a:rPr>
+              <a:t>BigLab-B / StarryOS</a:t>
+            </a:r>
+          </a:p>
+        </p:txBody>
+      </p:sp>
+      <p:sp>
+        <p:nvSpPr>
+          <p:cNvPr id="3" name="">
+            <a:extLst xmlns:a="http://schemas.openxmlformats.org/drawingml/2006/main">
+              <a:ext uri="{FF2B5EF4-FFF2-40B4-BE49-F238E27FC236}">
+                <a16:creationId xmlns:a16="http://schemas.microsoft.com/office/drawing/2014/main" id="{A59D0733-43E8-4676-9880-5CC26C27A4E9}"/>
+              </a:ext>
+            </a:extLst>
+          </p:cNvPr>
+          <p:cNvSpPr>
+            <a:spLocks xmlns:a="http://schemas.openxmlformats.org/drawingml/2006/main" noGrp="1"/>
+          </p:cNvSpPr>
+          <p:nvPr/>
+        </p:nvSpPr>
+        <p:spPr>
+          <a:xfrm xmlns:a="http://schemas.openxmlformats.org/drawingml/2006/main">
+            <a:off x="10858500" y="285750"/>
+            <a:ext cx="666750" cy="247650"/>
+          </a:xfrm>
+          <a:prstGeom xmlns:a="http://schemas.openxmlformats.org/drawingml/2006/main" prst="rect">
+            <a:avLst/>
+          </a:prstGeom>
+          <a:solidFill xmlns:a="http://schemas.openxmlformats.org/drawingml/2006/main">
+            <a:srgbClr val="000000">
+              <a:alpha val="0"/>
+            </a:srgbClr>
+          </a:solidFill>
+          <a:ln xmlns:a="http://schemas.openxmlformats.org/drawingml/2006/main" w="0">
+            <a:solidFill>
+              <a:srgbClr val="000000">
+                <a:alpha val="0"/>
+              </a:srgbClr>
+            </a:solidFill>
+            <a:prstDash val="solid"/>
+          </a:ln>
+        </p:spPr>
+        <p:txBody>
+          <a:bodyPr xmlns:a="http://schemas.openxmlformats.org/drawingml/2006/main" lIns="0" tIns="0" rIns="0" bIns="0" anchor="t"/>
+          <a:lstStyle xmlns:a="http://schemas.openxmlformats.org/drawingml/2006/main"/>
+          <a:p xmlns:a="http://schemas.openxmlformats.org/drawingml/2006/main">
+            <a:pPr algn="r">
+              <a:defRPr sz="1050" b="0">
+                <a:solidFill>
+                  <a:srgbClr val="5B6472"/>
+                </a:solidFill>
+                <a:latin typeface="PingFang SC"/>
+                <a:ea typeface="PingFang SC"/>
+                <a:cs typeface="PingFang SC"/>
+              </a:defRPr>
+            </a:pPr>
+            <a:r>
+              <a:rPr sz="1050" b="0">
+                <a:solidFill>
+                  <a:srgbClr val="5B6472"/>
+                </a:solidFill>
+                <a:latin typeface="PingFang SC"/>
+                <a:ea typeface="PingFang SC"/>
+                <a:cs typeface="PingFang SC"/>
+              </a:rPr>
+              <a:t>19</a:t>
+            </a:r>
+          </a:p>
+        </p:txBody>
+      </p:sp>
+      <p:sp>
+        <p:nvSpPr>
+          <p:cNvPr id="4" name="">
+            <a:extLst xmlns:a="http://schemas.openxmlformats.org/drawingml/2006/main">
+              <a:ext uri="{FF2B5EF4-FFF2-40B4-BE49-F238E27FC236}">
+                <a16:creationId xmlns:a16="http://schemas.microsoft.com/office/drawing/2014/main" id="{A5810F3F-B448-4DF8-8486-057F78B58B56}"/>
+              </a:ext>
+            </a:extLst>
+          </p:cNvPr>
+          <p:cNvSpPr>
+            <a:spLocks xmlns:a="http://schemas.openxmlformats.org/drawingml/2006/main" noGrp="1"/>
+          </p:cNvSpPr>
+          <p:nvPr/>
+        </p:nvSpPr>
+        <p:spPr>
+          <a:xfrm xmlns:a="http://schemas.openxmlformats.org/drawingml/2006/main">
+            <a:off x="514350" y="742950"/>
+            <a:ext cx="8572500" cy="514350"/>
+          </a:xfrm>
+          <a:prstGeom xmlns:a="http://schemas.openxmlformats.org/drawingml/2006/main" prst="rect">
+            <a:avLst/>
+          </a:prstGeom>
+          <a:solidFill xmlns:a="http://schemas.openxmlformats.org/drawingml/2006/main">
+            <a:srgbClr val="000000">
+              <a:alpha val="0"/>
+            </a:srgbClr>
+          </a:solidFill>
+          <a:ln xmlns:a="http://schemas.openxmlformats.org/drawingml/2006/main" w="0">
+            <a:solidFill>
+              <a:srgbClr val="000000">
+                <a:alpha val="0"/>
+              </a:srgbClr>
+            </a:solidFill>
+            <a:prstDash val="solid"/>
+          </a:ln>
+        </p:spPr>
+        <p:txBody>
+          <a:bodyPr xmlns:a="http://schemas.openxmlformats.org/drawingml/2006/main" lIns="0" tIns="0" rIns="0" bIns="0" anchor="t"/>
+          <a:lstStyle xmlns:a="http://schemas.openxmlformats.org/drawingml/2006/main"/>
+          <a:p xmlns:a="http://schemas.openxmlformats.org/drawingml/2006/main">
+            <a:pPr algn="l">
+              <a:defRPr sz="2550" b="1">
+                <a:solidFill>
+                  <a:srgbClr val="111827"/>
+                </a:solidFill>
+                <a:latin typeface="PingFang SC"/>
+                <a:ea typeface="PingFang SC"/>
+                <a:cs typeface="PingFang SC"/>
+              </a:defRPr>
+            </a:pPr>
+            <a:r>
+              <a:rPr sz="2550" b="1">
+                <a:solidFill>
+                  <a:srgbClr val="111827"/>
+                </a:solidFill>
+                <a:latin typeface="PingFang SC"/>
+                <a:ea typeface="PingFang SC"/>
+                <a:cs typeface="PingFang SC"/>
+              </a:rPr>
+              <a:t>课程思考：AI 时代的 OS 实验设计</a:t>
+            </a:r>
+          </a:p>
+        </p:txBody>
+      </p:sp>
+      <p:sp>
+        <p:nvSpPr>
+          <p:cNvPr id="5" name="">
+            <a:extLst xmlns:a="http://schemas.openxmlformats.org/drawingml/2006/main">
+              <a:ext uri="{FF2B5EF4-FFF2-40B4-BE49-F238E27FC236}">
+                <a16:creationId xmlns:a16="http://schemas.microsoft.com/office/drawing/2014/main" id="{B4CBAC55-5151-4527-B71A-5FC980BD3926}"/>
+              </a:ext>
+            </a:extLst>
+          </p:cNvPr>
+          <p:cNvSpPr>
+            <a:spLocks xmlns:a="http://schemas.openxmlformats.org/drawingml/2006/main" noGrp="1"/>
+          </p:cNvSpPr>
+          <p:nvPr/>
+        </p:nvSpPr>
+        <p:spPr>
+          <a:xfrm xmlns:a="http://schemas.openxmlformats.org/drawingml/2006/main">
+            <a:off x="533400" y="1333500"/>
+            <a:ext cx="10096500" cy="514350"/>
+          </a:xfrm>
+          <a:prstGeom xmlns:a="http://schemas.openxmlformats.org/drawingml/2006/main" prst="rect">
+            <a:avLst/>
+          </a:prstGeom>
+          <a:solidFill xmlns:a="http://schemas.openxmlformats.org/drawingml/2006/main">
+            <a:srgbClr val="000000">
+              <a:alpha val="0"/>
+            </a:srgbClr>
+          </a:solidFill>
+          <a:ln xmlns:a="http://schemas.openxmlformats.org/drawingml/2006/main" w="0">
+            <a:solidFill>
+              <a:srgbClr val="000000">
+                <a:alpha val="0"/>
+              </a:srgbClr>
+            </a:solidFill>
+            <a:prstDash val="solid"/>
+          </a:ln>
+        </p:spPr>
+        <p:txBody>
+          <a:bodyPr xmlns:a="http://schemas.openxmlformats.org/drawingml/2006/main" lIns="0" tIns="0" rIns="0" bIns="0" anchor="t"/>
+          <a:lstStyle xmlns:a="http://schemas.openxmlformats.org/drawingml/2006/main"/>
+          <a:p xmlns:a="http://schemas.openxmlformats.org/drawingml/2006/main">
+            <a:pPr algn="l">
+              <a:defRPr sz="1500" b="0">
+                <a:solidFill>
+                  <a:srgbClr val="5B6472"/>
+                </a:solidFill>
+                <a:latin typeface="PingFang SC"/>
+                <a:ea typeface="PingFang SC"/>
+                <a:cs typeface="PingFang SC"/>
+              </a:defRPr>
+            </a:pPr>
+            <a:r>
+              <a:rPr sz="1500" b="0">
+                <a:solidFill>
+                  <a:srgbClr val="5B6472"/>
+                </a:solidFill>
+                <a:latin typeface="PingFang SC"/>
+                <a:ea typeface="PingFang SC"/>
+                <a:cs typeface="PingFang SC"/>
+              </a:rPr>
+              <a:t>这次 BigLab-B 的经验是：AI 降低了工程实现门槛，但更凸显任务拆解、信息供给和系统理解的重要性。</a:t>
+            </a:r>
+          </a:p>
+        </p:txBody>
+      </p:sp>
+      <p:sp>
+        <p:nvSpPr>
+          <p:cNvPr id="6" name="">
+            <a:extLst xmlns:a="http://schemas.openxmlformats.org/drawingml/2006/main">
+              <a:ext uri="{FF2B5EF4-FFF2-40B4-BE49-F238E27FC236}">
+                <a16:creationId xmlns:a16="http://schemas.microsoft.com/office/drawing/2014/main" id="{57CC832E-30EF-421E-93B2-5EE44B14DCB8}"/>
+              </a:ext>
+            </a:extLst>
+          </p:cNvPr>
+          <p:cNvSpPr>
+            <a:spLocks xmlns:a="http://schemas.openxmlformats.org/drawingml/2006/main" noGrp="1"/>
+          </p:cNvSpPr>
+          <p:nvPr/>
+        </p:nvSpPr>
+        <p:spPr>
+          <a:xfrm xmlns:a="http://schemas.openxmlformats.org/drawingml/2006/main">
+            <a:off x="704850" y="2076450"/>
+            <a:ext cx="3333750" cy="2609850"/>
+          </a:xfrm>
+          <a:prstGeom xmlns:a="http://schemas.openxmlformats.org/drawingml/2006/main" prst="rect">
+            <a:avLst/>
+          </a:prstGeom>
+          <a:solidFill xmlns:a="http://schemas.openxmlformats.org/drawingml/2006/main">
+            <a:srgbClr val="FFFFFF"/>
+          </a:solidFill>
+          <a:ln xmlns:a="http://schemas.openxmlformats.org/drawingml/2006/main" w="9525">
+            <a:solidFill>
+              <a:srgbClr val="D8DEE8"/>
+            </a:solidFill>
+            <a:prstDash val="solid"/>
+          </a:ln>
+        </p:spPr>
+      </p:sp>
+      <p:sp>
+        <p:nvSpPr>
+          <p:cNvPr id="7" name="">
+            <a:extLst xmlns:a="http://schemas.openxmlformats.org/drawingml/2006/main">
+              <a:ext uri="{FF2B5EF4-FFF2-40B4-BE49-F238E27FC236}">
+                <a16:creationId xmlns:a16="http://schemas.microsoft.com/office/drawing/2014/main" id="{F28B2391-EED1-49C6-8AED-7E3100CEE8BC}"/>
+              </a:ext>
+            </a:extLst>
+          </p:cNvPr>
+          <p:cNvSpPr>
+            <a:spLocks xmlns:a="http://schemas.openxmlformats.org/drawingml/2006/main" noGrp="1"/>
+          </p:cNvSpPr>
+          <p:nvPr/>
+        </p:nvSpPr>
+        <p:spPr>
+          <a:xfrm xmlns:a="http://schemas.openxmlformats.org/drawingml/2006/main">
+            <a:off x="704850" y="2076450"/>
+            <a:ext cx="47625" cy="2609850"/>
+          </a:xfrm>
+          <a:prstGeom xmlns:a="http://schemas.openxmlformats.org/drawingml/2006/main" prst="rect">
+            <a:avLst/>
+          </a:prstGeom>
+          <a:solidFill xmlns:a="http://schemas.openxmlformats.org/drawingml/2006/main">
+            <a:srgbClr val="2563EB"/>
+          </a:solidFill>
+          <a:ln xmlns:a="http://schemas.openxmlformats.org/drawingml/2006/main" w="0">
+            <a:solidFill>
+              <a:srgbClr val="000000">
+                <a:alpha val="0"/>
+              </a:srgbClr>
+            </a:solidFill>
+            <a:prstDash val="solid"/>
+          </a:ln>
+        </p:spPr>
+      </p:sp>
+      <p:sp>
+        <p:nvSpPr>
+          <p:cNvPr id="8" name="">
+            <a:extLst xmlns:a="http://schemas.openxmlformats.org/drawingml/2006/main">
+              <a:ext uri="{FF2B5EF4-FFF2-40B4-BE49-F238E27FC236}">
+                <a16:creationId xmlns:a16="http://schemas.microsoft.com/office/drawing/2014/main" id="{23C5D99C-135F-40FC-A706-DD99DD3AA83E}"/>
+              </a:ext>
+            </a:extLst>
+          </p:cNvPr>
+          <p:cNvSpPr>
+            <a:spLocks xmlns:a="http://schemas.openxmlformats.org/drawingml/2006/main" noGrp="1"/>
+          </p:cNvSpPr>
+          <p:nvPr/>
+        </p:nvSpPr>
+        <p:spPr>
+          <a:xfrm xmlns:a="http://schemas.openxmlformats.org/drawingml/2006/main">
+            <a:off x="933450" y="2286000"/>
+            <a:ext cx="2876550" cy="304800"/>
+          </a:xfrm>
+          <a:prstGeom xmlns:a="http://schemas.openxmlformats.org/drawingml/2006/main" prst="rect">
+            <a:avLst/>
+          </a:prstGeom>
+          <a:solidFill xmlns:a="http://schemas.openxmlformats.org/drawingml/2006/main">
+            <a:srgbClr val="000000">
+              <a:alpha val="0"/>
+            </a:srgbClr>
+          </a:solidFill>
+          <a:ln xmlns:a="http://schemas.openxmlformats.org/drawingml/2006/main" w="0">
+            <a:solidFill>
+              <a:srgbClr val="000000">
+                <a:alpha val="0"/>
+              </a:srgbClr>
+            </a:solidFill>
+            <a:prstDash val="solid"/>
+          </a:ln>
+        </p:spPr>
+        <p:txBody>
+          <a:bodyPr xmlns:a="http://schemas.openxmlformats.org/drawingml/2006/main" lIns="0" tIns="0" rIns="0" bIns="0" anchor="t"/>
+          <a:lstStyle xmlns:a="http://schemas.openxmlformats.org/drawingml/2006/main"/>
+          <a:p xmlns:a="http://schemas.openxmlformats.org/drawingml/2006/main">
+            <a:pPr algn="l">
+              <a:defRPr sz="1650" b="1">
+                <a:solidFill>
+                  <a:srgbClr val="111827"/>
+                </a:solidFill>
+                <a:latin typeface="PingFang SC"/>
+                <a:ea typeface="PingFang SC"/>
+                <a:cs typeface="PingFang SC"/>
+              </a:defRPr>
+            </a:pPr>
+            <a:r>
+              <a:rPr sz="1650" b="1">
+                <a:solidFill>
+                  <a:srgbClr val="111827"/>
+                </a:solidFill>
+                <a:latin typeface="PingFang SC"/>
+                <a:ea typeface="PingFang SC"/>
+                <a:cs typeface="PingFang SC"/>
+              </a:rPr>
+              <a:t>1. Agent 与任务拆解</a:t>
+            </a:r>
+          </a:p>
+        </p:txBody>
+      </p:sp>
+      <p:sp>
+        <p:nvSpPr>
+          <p:cNvPr id="9" name="">
+            <a:extLst xmlns:a="http://schemas.openxmlformats.org/drawingml/2006/main">
+              <a:ext uri="{FF2B5EF4-FFF2-40B4-BE49-F238E27FC236}">
+                <a16:creationId xmlns:a16="http://schemas.microsoft.com/office/drawing/2014/main" id="{9A7AA554-79E2-40D7-AC2F-56518784D4C9}"/>
+              </a:ext>
+            </a:extLst>
+          </p:cNvPr>
+          <p:cNvSpPr>
+            <a:spLocks xmlns:a="http://schemas.openxmlformats.org/drawingml/2006/main" noGrp="1"/>
+          </p:cNvSpPr>
+          <p:nvPr/>
+        </p:nvSpPr>
+        <p:spPr>
+          <a:xfrm xmlns:a="http://schemas.openxmlformats.org/drawingml/2006/main">
+            <a:off x="933450" y="2705100"/>
+            <a:ext cx="2876550" cy="1866900"/>
+          </a:xfrm>
+          <a:prstGeom xmlns:a="http://schemas.openxmlformats.org/drawingml/2006/main" prst="rect">
+            <a:avLst/>
+          </a:prstGeom>
+          <a:solidFill xmlns:a="http://schemas.openxmlformats.org/drawingml/2006/main">
+            <a:srgbClr val="000000">
+              <a:alpha val="0"/>
+            </a:srgbClr>
+          </a:solidFill>
+          <a:ln xmlns:a="http://schemas.openxmlformats.org/drawingml/2006/main" w="0">
+            <a:solidFill>
+              <a:srgbClr val="000000">
+                <a:alpha val="0"/>
+              </a:srgbClr>
+            </a:solidFill>
+            <a:prstDash val="solid"/>
+          </a:ln>
+        </p:spPr>
+        <p:txBody>
+          <a:bodyPr xmlns:a="http://schemas.openxmlformats.org/drawingml/2006/main" lIns="0" tIns="0" rIns="0" bIns="0" anchor="t"/>
+          <a:lstStyle xmlns:a="http://schemas.openxmlformats.org/drawingml/2006/main"/>
+          <a:p xmlns:a="http://schemas.openxmlformats.org/drawingml/2006/main">
+            <a:pPr algn="l">
+              <a:defRPr sz="1275" b="0">
+                <a:solidFill>
+                  <a:srgbClr val="5B6472"/>
+                </a:solidFill>
+                <a:latin typeface="PingFang SC"/>
+                <a:ea typeface="PingFang SC"/>
+                <a:cs typeface="PingFang SC"/>
+              </a:defRPr>
+            </a:pPr>
+            <a:r>
+              <a:rPr sz="1275" b="0">
+                <a:solidFill>
+                  <a:srgbClr val="5B6472"/>
+                </a:solidFill>
+                <a:latin typeface="PingFang SC"/>
+                <a:ea typeface="PingFang SC"/>
+                <a:cs typeface="PingFang SC"/>
+              </a:rPr>
+              <a:t>Agent 已经能处理很长的工程上下文；真正决定效率的是学生能否把目标、仓库、分支、运行模式、交付标准说清楚。</a:t>
+            </a:r>
+          </a:p>
+          <a:p xmlns:a="http://schemas.openxmlformats.org/drawingml/2006/main">
+            <a:r>
+              <a:t/>
+            </a:r>
+          </a:p>
+          <a:p xmlns:a="http://schemas.openxmlformats.org/drawingml/2006/main">
+            <a:pPr algn="l">
+              <a:defRPr sz="1275" b="0">
+                <a:solidFill>
+                  <a:srgbClr val="5B6472"/>
+                </a:solidFill>
+                <a:latin typeface="PingFang SC"/>
+                <a:ea typeface="PingFang SC"/>
+                <a:cs typeface="PingFang SC"/>
+              </a:defRPr>
+            </a:pPr>
+            <a:r>
+              <a:rPr sz="1275" b="0">
+                <a:solidFill>
+                  <a:srgbClr val="5B6472"/>
+                </a:solidFill>
+                <a:latin typeface="PingFang SC"/>
+                <a:ea typeface="PingFang SC"/>
+                <a:cs typeface="PingFang SC"/>
+              </a:rPr>
+              <a:t>课程可以更强调：面对庞大 OS 项目，如何把模糊目标拆成可验证的小任务。</a:t>
+            </a:r>
+          </a:p>
+        </p:txBody>
+      </p:sp>
+      <p:sp>
+        <p:nvSpPr>
+          <p:cNvPr id="10" name="">
+            <a:extLst xmlns:a="http://schemas.openxmlformats.org/drawingml/2006/main">
+              <a:ext uri="{FF2B5EF4-FFF2-40B4-BE49-F238E27FC236}">
+                <a16:creationId xmlns:a16="http://schemas.microsoft.com/office/drawing/2014/main" id="{D3F02E46-1899-44D6-9B06-53E793669507}"/>
+              </a:ext>
+            </a:extLst>
+          </p:cNvPr>
+          <p:cNvSpPr>
+            <a:spLocks xmlns:a="http://schemas.openxmlformats.org/drawingml/2006/main" noGrp="1"/>
+          </p:cNvSpPr>
+          <p:nvPr/>
+        </p:nvSpPr>
+        <p:spPr>
+          <a:xfrm xmlns:a="http://schemas.openxmlformats.org/drawingml/2006/main">
+            <a:off x="4429125" y="2076450"/>
+            <a:ext cx="3333750" cy="2609850"/>
+          </a:xfrm>
+          <a:prstGeom xmlns:a="http://schemas.openxmlformats.org/drawingml/2006/main" prst="rect">
+            <a:avLst/>
+          </a:prstGeom>
+          <a:solidFill xmlns:a="http://schemas.openxmlformats.org/drawingml/2006/main">
+            <a:srgbClr val="FFFFFF"/>
+          </a:solidFill>
+          <a:ln xmlns:a="http://schemas.openxmlformats.org/drawingml/2006/main" w="9525">
+            <a:solidFill>
+              <a:srgbClr val="D8DEE8"/>
+            </a:solidFill>
+            <a:prstDash val="solid"/>
+          </a:ln>
+        </p:spPr>
+      </p:sp>
+      <p:sp>
+        <p:nvSpPr>
+          <p:cNvPr id="11" name="">
+            <a:extLst xmlns:a="http://schemas.openxmlformats.org/drawingml/2006/main">
+              <a:ext uri="{FF2B5EF4-FFF2-40B4-BE49-F238E27FC236}">
+                <a16:creationId xmlns:a16="http://schemas.microsoft.com/office/drawing/2014/main" id="{0377D42D-E023-4131-91B0-8BB4795998FE}"/>
+              </a:ext>
+            </a:extLst>
+          </p:cNvPr>
+          <p:cNvSpPr>
+            <a:spLocks xmlns:a="http://schemas.openxmlformats.org/drawingml/2006/main" noGrp="1"/>
+          </p:cNvSpPr>
+          <p:nvPr/>
+        </p:nvSpPr>
+        <p:spPr>
+          <a:xfrm xmlns:a="http://schemas.openxmlformats.org/drawingml/2006/main">
+            <a:off x="4429125" y="2076450"/>
+            <a:ext cx="47625" cy="2609850"/>
+          </a:xfrm>
+          <a:prstGeom xmlns:a="http://schemas.openxmlformats.org/drawingml/2006/main" prst="rect">
+            <a:avLst/>
+          </a:prstGeom>
+          <a:solidFill xmlns:a="http://schemas.openxmlformats.org/drawingml/2006/main">
+            <a:srgbClr val="148A5A"/>
+          </a:solidFill>
+          <a:ln xmlns:a="http://schemas.openxmlformats.org/drawingml/2006/main" w="0">
+            <a:solidFill>
+              <a:srgbClr val="000000">
+                <a:alpha val="0"/>
+              </a:srgbClr>
+            </a:solidFill>
+            <a:prstDash val="solid"/>
+          </a:ln>
+        </p:spPr>
+      </p:sp>
+      <p:sp>
+        <p:nvSpPr>
+          <p:cNvPr id="12" name="">
+            <a:extLst xmlns:a="http://schemas.openxmlformats.org/drawingml/2006/main">
+              <a:ext uri="{FF2B5EF4-FFF2-40B4-BE49-F238E27FC236}">
+                <a16:creationId xmlns:a16="http://schemas.microsoft.com/office/drawing/2014/main" id="{8E808C0C-B617-4F14-828A-9571D7A23006}"/>
+              </a:ext>
+            </a:extLst>
+          </p:cNvPr>
+          <p:cNvSpPr>
+            <a:spLocks xmlns:a="http://schemas.openxmlformats.org/drawingml/2006/main" noGrp="1"/>
+          </p:cNvSpPr>
+          <p:nvPr/>
+        </p:nvSpPr>
+        <p:spPr>
+          <a:xfrm xmlns:a="http://schemas.openxmlformats.org/drawingml/2006/main">
+            <a:off x="4657725" y="2286000"/>
+            <a:ext cx="2876550" cy="304800"/>
+          </a:xfrm>
+          <a:prstGeom xmlns:a="http://schemas.openxmlformats.org/drawingml/2006/main" prst="rect">
+            <a:avLst/>
+          </a:prstGeom>
+          <a:solidFill xmlns:a="http://schemas.openxmlformats.org/drawingml/2006/main">
+            <a:srgbClr val="000000">
+              <a:alpha val="0"/>
+            </a:srgbClr>
+          </a:solidFill>
+          <a:ln xmlns:a="http://schemas.openxmlformats.org/drawingml/2006/main" w="0">
+            <a:solidFill>
+              <a:srgbClr val="000000">
+                <a:alpha val="0"/>
+              </a:srgbClr>
+            </a:solidFill>
+            <a:prstDash val="solid"/>
+          </a:ln>
+        </p:spPr>
+        <p:txBody>
+          <a:bodyPr xmlns:a="http://schemas.openxmlformats.org/drawingml/2006/main" lIns="0" tIns="0" rIns="0" bIns="0" anchor="t"/>
+          <a:lstStyle xmlns:a="http://schemas.openxmlformats.org/drawingml/2006/main"/>
+          <a:p xmlns:a="http://schemas.openxmlformats.org/drawingml/2006/main">
+            <a:pPr algn="l">
+              <a:defRPr sz="1650" b="1">
+                <a:solidFill>
+                  <a:srgbClr val="111827"/>
+                </a:solidFill>
+                <a:latin typeface="PingFang SC"/>
+                <a:ea typeface="PingFang SC"/>
+                <a:cs typeface="PingFang SC"/>
+              </a:defRPr>
+            </a:pPr>
+            <a:r>
+              <a:rPr sz="1650" b="1">
+                <a:solidFill>
+                  <a:srgbClr val="111827"/>
+                </a:solidFill>
+                <a:latin typeface="PingFang SC"/>
+                <a:ea typeface="PingFang SC"/>
+                <a:cs typeface="PingFang SC"/>
+              </a:rPr>
+              <a:t>2. 更早开放 OS 实战</a:t>
+            </a:r>
+          </a:p>
+        </p:txBody>
+      </p:sp>
+      <p:sp>
+        <p:nvSpPr>
+          <p:cNvPr id="13" name="">
+            <a:extLst xmlns:a="http://schemas.openxmlformats.org/drawingml/2006/main">
+              <a:ext uri="{FF2B5EF4-FFF2-40B4-BE49-F238E27FC236}">
+                <a16:creationId xmlns:a16="http://schemas.microsoft.com/office/drawing/2014/main" id="{5A591828-5206-47F1-925C-A70533ACD830}"/>
+              </a:ext>
+            </a:extLst>
+          </p:cNvPr>
+          <p:cNvSpPr>
+            <a:spLocks xmlns:a="http://schemas.openxmlformats.org/drawingml/2006/main" noGrp="1"/>
+          </p:cNvSpPr>
+          <p:nvPr/>
+        </p:nvSpPr>
+        <p:spPr>
+          <a:xfrm xmlns:a="http://schemas.openxmlformats.org/drawingml/2006/main">
+            <a:off x="4657725" y="2705100"/>
+            <a:ext cx="2876550" cy="1866900"/>
+          </a:xfrm>
+          <a:prstGeom xmlns:a="http://schemas.openxmlformats.org/drawingml/2006/main" prst="rect">
+            <a:avLst/>
+          </a:prstGeom>
+          <a:solidFill xmlns:a="http://schemas.openxmlformats.org/drawingml/2006/main">
+            <a:srgbClr val="000000">
+              <a:alpha val="0"/>
+            </a:srgbClr>
+          </a:solidFill>
+          <a:ln xmlns:a="http://schemas.openxmlformats.org/drawingml/2006/main" w="0">
+            <a:solidFill>
+              <a:srgbClr val="000000">
+                <a:alpha val="0"/>
+              </a:srgbClr>
+            </a:solidFill>
+            <a:prstDash val="solid"/>
+          </a:ln>
+        </p:spPr>
+        <p:txBody>
+          <a:bodyPr xmlns:a="http://schemas.openxmlformats.org/drawingml/2006/main" lIns="0" tIns="0" rIns="0" bIns="0" anchor="t"/>
+          <a:lstStyle xmlns:a="http://schemas.openxmlformats.org/drawingml/2006/main"/>
+          <a:p xmlns:a="http://schemas.openxmlformats.org/drawingml/2006/main">
+            <a:pPr algn="l">
+              <a:defRPr sz="1275" b="0">
+                <a:solidFill>
+                  <a:srgbClr val="5B6472"/>
+                </a:solidFill>
+                <a:latin typeface="PingFang SC"/>
+                <a:ea typeface="PingFang SC"/>
+                <a:cs typeface="PingFang SC"/>
+              </a:defRPr>
+            </a:pPr>
+            <a:r>
+              <a:rPr sz="1275" b="0">
+                <a:solidFill>
+                  <a:srgbClr val="5B6472"/>
+                </a:solidFill>
+                <a:latin typeface="PingFang SC"/>
+                <a:ea typeface="PingFang SC"/>
+                <a:cs typeface="PingFang SC"/>
+              </a:rPr>
+              <a:t>AI 让工程门槛显著下降，OS 课可以更多面向大一同学开放。</a:t>
+            </a:r>
+          </a:p>
+          <a:p xmlns:a="http://schemas.openxmlformats.org/drawingml/2006/main">
+            <a:r>
+              <a:t/>
+            </a:r>
+          </a:p>
+          <a:p xmlns:a="http://schemas.openxmlformats.org/drawingml/2006/main">
+            <a:pPr algn="l">
+              <a:defRPr sz="1275" b="0">
+                <a:solidFill>
+                  <a:srgbClr val="5B6472"/>
+                </a:solidFill>
+                <a:latin typeface="PingFang SC"/>
+                <a:ea typeface="PingFang SC"/>
+                <a:cs typeface="PingFang SC"/>
+              </a:defRPr>
+            </a:pPr>
+            <a:r>
+              <a:rPr sz="1275" b="0">
+                <a:solidFill>
+                  <a:srgbClr val="5B6472"/>
+                </a:solidFill>
+                <a:latin typeface="PingFang SC"/>
+                <a:ea typeface="PingFang SC"/>
+                <a:cs typeface="PingFang SC"/>
+              </a:rPr>
+              <a:t>他们通过参与真实项目、读代码、跑测试、提 PR，会比只做小作业获得更快的工程成长。</a:t>
+            </a:r>
+          </a:p>
+        </p:txBody>
+      </p:sp>
+      <p:sp>
+        <p:nvSpPr>
+          <p:cNvPr id="14" name="">
+            <a:extLst xmlns:a="http://schemas.openxmlformats.org/drawingml/2006/main">
+              <a:ext uri="{FF2B5EF4-FFF2-40B4-BE49-F238E27FC236}">
+                <a16:creationId xmlns:a16="http://schemas.microsoft.com/office/drawing/2014/main" id="{AE0011D0-444D-4F0F-8C59-A314E438C981}"/>
+              </a:ext>
+            </a:extLst>
+          </p:cNvPr>
+          <p:cNvSpPr>
+            <a:spLocks xmlns:a="http://schemas.openxmlformats.org/drawingml/2006/main" noGrp="1"/>
+          </p:cNvSpPr>
+          <p:nvPr/>
+        </p:nvSpPr>
+        <p:spPr>
+          <a:xfrm xmlns:a="http://schemas.openxmlformats.org/drawingml/2006/main">
+            <a:off x="8153400" y="2076450"/>
+            <a:ext cx="3333750" cy="2609850"/>
+          </a:xfrm>
+          <a:prstGeom xmlns:a="http://schemas.openxmlformats.org/drawingml/2006/main" prst="rect">
+            <a:avLst/>
+          </a:prstGeom>
+          <a:solidFill xmlns:a="http://schemas.openxmlformats.org/drawingml/2006/main">
+            <a:srgbClr val="FFFFFF"/>
+          </a:solidFill>
+          <a:ln xmlns:a="http://schemas.openxmlformats.org/drawingml/2006/main" w="9525">
+            <a:solidFill>
+              <a:srgbClr val="D8DEE8"/>
+            </a:solidFill>
+            <a:prstDash val="solid"/>
+          </a:ln>
+        </p:spPr>
+      </p:sp>
+      <p:sp>
+        <p:nvSpPr>
+          <p:cNvPr id="15" name="">
+            <a:extLst xmlns:a="http://schemas.openxmlformats.org/drawingml/2006/main">
+              <a:ext uri="{FF2B5EF4-FFF2-40B4-BE49-F238E27FC236}">
+                <a16:creationId xmlns:a16="http://schemas.microsoft.com/office/drawing/2014/main" id="{C474FF84-54FC-4272-A516-ADC2AF827AF7}"/>
+              </a:ext>
+            </a:extLst>
+          </p:cNvPr>
+          <p:cNvSpPr>
+            <a:spLocks xmlns:a="http://schemas.openxmlformats.org/drawingml/2006/main" noGrp="1"/>
+          </p:cNvSpPr>
+          <p:nvPr/>
+        </p:nvSpPr>
+        <p:spPr>
+          <a:xfrm xmlns:a="http://schemas.openxmlformats.org/drawingml/2006/main">
+            <a:off x="8153400" y="2076450"/>
+            <a:ext cx="47625" cy="2609850"/>
+          </a:xfrm>
+          <a:prstGeom xmlns:a="http://schemas.openxmlformats.org/drawingml/2006/main" prst="rect">
+            <a:avLst/>
+          </a:prstGeom>
+          <a:solidFill xmlns:a="http://schemas.openxmlformats.org/drawingml/2006/main">
+            <a:srgbClr val="C45A18"/>
+          </a:solidFill>
+          <a:ln xmlns:a="http://schemas.openxmlformats.org/drawingml/2006/main" w="0">
+            <a:solidFill>
+              <a:srgbClr val="000000">
+                <a:alpha val="0"/>
+              </a:srgbClr>
+            </a:solidFill>
+            <a:prstDash val="solid"/>
+          </a:ln>
+        </p:spPr>
+      </p:sp>
+      <p:sp>
+        <p:nvSpPr>
+          <p:cNvPr id="16" name="">
+            <a:extLst xmlns:a="http://schemas.openxmlformats.org/drawingml/2006/main">
+              <a:ext uri="{FF2B5EF4-FFF2-40B4-BE49-F238E27FC236}">
+                <a16:creationId xmlns:a16="http://schemas.microsoft.com/office/drawing/2014/main" id="{9682F394-9A4D-4DFD-828B-514C79D5D281}"/>
+              </a:ext>
+            </a:extLst>
+          </p:cNvPr>
+          <p:cNvSpPr>
+            <a:spLocks xmlns:a="http://schemas.openxmlformats.org/drawingml/2006/main" noGrp="1"/>
+          </p:cNvSpPr>
+          <p:nvPr/>
+        </p:nvSpPr>
+        <p:spPr>
+          <a:xfrm xmlns:a="http://schemas.openxmlformats.org/drawingml/2006/main">
+            <a:off x="8382000" y="2286000"/>
+            <a:ext cx="2876550" cy="304800"/>
+          </a:xfrm>
+          <a:prstGeom xmlns:a="http://schemas.openxmlformats.org/drawingml/2006/main" prst="rect">
+            <a:avLst/>
+          </a:prstGeom>
+          <a:solidFill xmlns:a="http://schemas.openxmlformats.org/drawingml/2006/main">
+            <a:srgbClr val="000000">
+              <a:alpha val="0"/>
+            </a:srgbClr>
+          </a:solidFill>
+          <a:ln xmlns:a="http://schemas.openxmlformats.org/drawingml/2006/main" w="0">
+            <a:solidFill>
+              <a:srgbClr val="000000">
+                <a:alpha val="0"/>
+              </a:srgbClr>
+            </a:solidFill>
+            <a:prstDash val="solid"/>
+          </a:ln>
+        </p:spPr>
+        <p:txBody>
+          <a:bodyPr xmlns:a="http://schemas.openxmlformats.org/drawingml/2006/main" lIns="0" tIns="0" rIns="0" bIns="0" anchor="t"/>
+          <a:lstStyle xmlns:a="http://schemas.openxmlformats.org/drawingml/2006/main"/>
+          <a:p xmlns:a="http://schemas.openxmlformats.org/drawingml/2006/main">
+            <a:pPr algn="l">
+              <a:defRPr sz="1650" b="1">
+                <a:solidFill>
+                  <a:srgbClr val="111827"/>
+                </a:solidFill>
+                <a:latin typeface="PingFang SC"/>
+                <a:ea typeface="PingFang SC"/>
+                <a:cs typeface="PingFang SC"/>
+              </a:defRPr>
+            </a:pPr>
+            <a:r>
+              <a:rPr sz="1650" b="1">
+                <a:solidFill>
+                  <a:srgbClr val="111827"/>
+                </a:solidFill>
+                <a:latin typeface="PingFang SC"/>
+                <a:ea typeface="PingFang SC"/>
+                <a:cs typeface="PingFang SC"/>
+              </a:rPr>
+              <a:t>3. 选修课的多元参与</a:t>
+            </a:r>
+          </a:p>
+        </p:txBody>
+      </p:sp>
+      <p:sp>
+        <p:nvSpPr>
+          <p:cNvPr id="17" name="">
+            <a:extLst xmlns:a="http://schemas.openxmlformats.org/drawingml/2006/main">
+              <a:ext uri="{FF2B5EF4-FFF2-40B4-BE49-F238E27FC236}">
+                <a16:creationId xmlns:a16="http://schemas.microsoft.com/office/drawing/2014/main" id="{DE5250A2-8F94-497A-8BB3-C16448314911}"/>
+              </a:ext>
+            </a:extLst>
+          </p:cNvPr>
+          <p:cNvSpPr>
+            <a:spLocks xmlns:a="http://schemas.openxmlformats.org/drawingml/2006/main" noGrp="1"/>
+          </p:cNvSpPr>
+          <p:nvPr/>
+        </p:nvSpPr>
+        <p:spPr>
+          <a:xfrm xmlns:a="http://schemas.openxmlformats.org/drawingml/2006/main">
+            <a:off x="8382000" y="2705100"/>
+            <a:ext cx="2876550" cy="1866900"/>
+          </a:xfrm>
+          <a:prstGeom xmlns:a="http://schemas.openxmlformats.org/drawingml/2006/main" prst="rect">
+            <a:avLst/>
+          </a:prstGeom>
+          <a:solidFill xmlns:a="http://schemas.openxmlformats.org/drawingml/2006/main">
+            <a:srgbClr val="000000">
+              <a:alpha val="0"/>
+            </a:srgbClr>
+          </a:solidFill>
+          <a:ln xmlns:a="http://schemas.openxmlformats.org/drawingml/2006/main" w="0">
+            <a:solidFill>
+              <a:srgbClr val="000000">
+                <a:alpha val="0"/>
+              </a:srgbClr>
+            </a:solidFill>
+            <a:prstDash val="solid"/>
+          </a:ln>
+        </p:spPr>
+        <p:txBody>
+          <a:bodyPr xmlns:a="http://schemas.openxmlformats.org/drawingml/2006/main" lIns="0" tIns="0" rIns="0" bIns="0" anchor="t"/>
+          <a:lstStyle xmlns:a="http://schemas.openxmlformats.org/drawingml/2006/main"/>
+          <a:p xmlns:a="http://schemas.openxmlformats.org/drawingml/2006/main">
+            <a:pPr algn="l">
+              <a:defRPr sz="1275" b="0">
+                <a:solidFill>
+                  <a:srgbClr val="5B6472"/>
+                </a:solidFill>
+                <a:latin typeface="PingFang SC"/>
+                <a:ea typeface="PingFang SC"/>
+                <a:cs typeface="PingFang SC"/>
+              </a:defRPr>
+            </a:pPr>
+            <a:r>
+              <a:rPr sz="1275" b="0">
+                <a:solidFill>
+                  <a:srgbClr val="5B6472"/>
+                </a:solidFill>
+                <a:latin typeface="PingFang SC"/>
+                <a:ea typeface="PingFang SC"/>
+                <a:cs typeface="PingFang SC"/>
+              </a:rPr>
+              <a:t>区分必须掌握的 OS 基础和可选进阶模块。</a:t>
+            </a:r>
+          </a:p>
+          <a:p xmlns:a="http://schemas.openxmlformats.org/drawingml/2006/main">
+            <a:r>
+              <a:t/>
+            </a:r>
+          </a:p>
+          <a:p xmlns:a="http://schemas.openxmlformats.org/drawingml/2006/main">
+            <a:pPr algn="l">
+              <a:defRPr sz="1275" b="0">
+                <a:solidFill>
+                  <a:srgbClr val="5B6472"/>
+                </a:solidFill>
+                <a:latin typeface="PingFang SC"/>
+                <a:ea typeface="PingFang SC"/>
+                <a:cs typeface="PingFang SC"/>
+              </a:defRPr>
+            </a:pPr>
+            <a:r>
+              <a:rPr sz="1275" b="0">
+                <a:solidFill>
+                  <a:srgbClr val="5B6472"/>
+                </a:solidFill>
+                <a:latin typeface="PingFang SC"/>
+                <a:ea typeface="PingFang SC"/>
+                <a:cs typeface="PingFang SC"/>
+              </a:rPr>
+              <a:t>鼓励 AI 方向同学用自己的 AI 能力完成过去单人课程里很难完成的大型系统项目，同时保持 OS 核心问题足够有趣。</a:t>
+            </a:r>
+          </a:p>
+        </p:txBody>
+      </p:sp>
+      <p:sp>
+        <p:nvSpPr>
+          <p:cNvPr id="18" name="">
+            <a:extLst xmlns:a="http://schemas.openxmlformats.org/drawingml/2006/main">
+              <a:ext uri="{FF2B5EF4-FFF2-40B4-BE49-F238E27FC236}">
+                <a16:creationId xmlns:a16="http://schemas.microsoft.com/office/drawing/2014/main" id="{70768C1F-0693-4227-9DB2-AA3C9E537CED}"/>
+              </a:ext>
+            </a:extLst>
+          </p:cNvPr>
+          <p:cNvSpPr>
+            <a:spLocks xmlns:a="http://schemas.openxmlformats.org/drawingml/2006/main" noGrp="1"/>
+          </p:cNvSpPr>
+          <p:nvPr/>
+        </p:nvSpPr>
+        <p:spPr>
+          <a:xfrm xmlns:a="http://schemas.openxmlformats.org/drawingml/2006/main">
+            <a:off x="952500" y="5448300"/>
+            <a:ext cx="10287000" cy="514350"/>
+          </a:xfrm>
+          <a:prstGeom xmlns:a="http://schemas.openxmlformats.org/drawingml/2006/main" prst="rect">
+            <a:avLst/>
+          </a:prstGeom>
+          <a:solidFill xmlns:a="http://schemas.openxmlformats.org/drawingml/2006/main">
+            <a:srgbClr val="0B1220"/>
+          </a:solidFill>
+          <a:ln xmlns:a="http://schemas.openxmlformats.org/drawingml/2006/main" w="0">
+            <a:solidFill>
+              <a:srgbClr val="000000">
+                <a:alpha val="0"/>
+              </a:srgbClr>
+            </a:solidFill>
+            <a:prstDash val="solid"/>
+          </a:ln>
+        </p:spPr>
+      </p:sp>
+      <p:sp>
+        <p:nvSpPr>
+          <p:cNvPr id="19" name="">
+            <a:extLst xmlns:a="http://schemas.openxmlformats.org/drawingml/2006/main">
+              <a:ext uri="{FF2B5EF4-FFF2-40B4-BE49-F238E27FC236}">
+                <a16:creationId xmlns:a16="http://schemas.microsoft.com/office/drawing/2014/main" id="{612EEBC1-12A9-43B1-B62C-83C35882201B}"/>
+              </a:ext>
+            </a:extLst>
+          </p:cNvPr>
+          <p:cNvSpPr>
+            <a:spLocks xmlns:a="http://schemas.openxmlformats.org/drawingml/2006/main" noGrp="1"/>
+          </p:cNvSpPr>
+          <p:nvPr/>
+        </p:nvSpPr>
+        <p:spPr>
+          <a:xfrm xmlns:a="http://schemas.openxmlformats.org/drawingml/2006/main">
+            <a:off x="1238250" y="5600700"/>
+            <a:ext cx="9715500" cy="228600"/>
+          </a:xfrm>
+          <a:prstGeom xmlns:a="http://schemas.openxmlformats.org/drawingml/2006/main" prst="rect">
+            <a:avLst/>
+          </a:prstGeom>
+          <a:solidFill xmlns:a="http://schemas.openxmlformats.org/drawingml/2006/main">
+            <a:srgbClr val="000000">
+              <a:alpha val="0"/>
+            </a:srgbClr>
+          </a:solidFill>
+          <a:ln xmlns:a="http://schemas.openxmlformats.org/drawingml/2006/main" w="0">
+            <a:solidFill>
+              <a:srgbClr val="000000">
+                <a:alpha val="0"/>
+              </a:srgbClr>
+            </a:solidFill>
+            <a:prstDash val="solid"/>
+          </a:ln>
+        </p:spPr>
+        <p:txBody>
+          <a:bodyPr xmlns:a="http://schemas.openxmlformats.org/drawingml/2006/main" lIns="0" tIns="0" rIns="0" bIns="0" anchor="t"/>
+          <a:lstStyle xmlns:a="http://schemas.openxmlformats.org/drawingml/2006/main"/>
+          <a:p xmlns:a="http://schemas.openxmlformats.org/drawingml/2006/main">
+            <a:pPr algn="ctr">
+              <a:defRPr sz="1500" b="1">
+                <a:solidFill>
+                  <a:srgbClr val="FFFFFF"/>
+                </a:solidFill>
+                <a:latin typeface="PingFang SC"/>
+                <a:ea typeface="PingFang SC"/>
+                <a:cs typeface="PingFang SC"/>
+              </a:defRPr>
+            </a:pPr>
+            <a:r>
+              <a:rPr sz="1500" b="1">
+                <a:solidFill>
+                  <a:srgbClr val="FFFFFF"/>
+                </a:solidFill>
+                <a:latin typeface="PingFang SC"/>
+                <a:ea typeface="PingFang SC"/>
+                <a:cs typeface="PingFang SC"/>
+              </a:rPr>
+              <a:t>结论：AI 不替代 OS 理解；它让课程更适合训练“拆解复杂系统、组织证据、完成真实工程交付”的能力。</a:t>
+            </a:r>
+          </a:p>
+        </p:txBody>
+      </p:sp>
+    </p:spTree>
+    <p:extLst>
+      <p:ext uri="{BB962C8B-B14F-4D97-AF65-F5344CB8AC3E}">
+        <p14:creationId xmlns:p14="http://schemas.microsoft.com/office/powerpoint/2010/main" val="659510216"/>
       </p:ext>
     </p:extLst>
   </p:cSld>
@@ -16361,7 +17519,7 @@
           <p:cNvPr id="1" name="">
             <a:extLst xmlns:a="http://schemas.openxmlformats.org/drawingml/2006/main">
               <a:ext uri="{FF2B5EF4-FFF2-40B4-BE49-F238E27FC236}">
-                <a16:creationId xmlns:a16="http://schemas.microsoft.com/office/drawing/2014/main" id="{2B061DDC-07D0-4D6D-B457-1B232122B929}"/>
+                <a16:creationId xmlns:a16="http://schemas.microsoft.com/office/drawing/2014/main" id="{01865735-63F5-4717-9D52-E921EDEF2BEB}"/>
               </a:ext>
             </a:extLst>
           </p:cNvPr>
@@ -16396,7 +17554,7 @@
           <p:cNvPr id="2" name="">
             <a:extLst xmlns:a="http://schemas.openxmlformats.org/drawingml/2006/main">
               <a:ext uri="{FF2B5EF4-FFF2-40B4-BE49-F238E27FC236}">
-                <a16:creationId xmlns:a16="http://schemas.microsoft.com/office/drawing/2014/main" id="{208FB19A-6B5E-4077-AAE6-A8E46BF58539}"/>
+                <a16:creationId xmlns:a16="http://schemas.microsoft.com/office/drawing/2014/main" id="{6E97088D-32A4-417F-A504-67526EDE77CB}"/>
               </a:ext>
             </a:extLst>
           </p:cNvPr>
@@ -16460,7 +17618,7 @@
           <p:cNvPr id="3" name="">
             <a:extLst xmlns:a="http://schemas.openxmlformats.org/drawingml/2006/main">
               <a:ext uri="{FF2B5EF4-FFF2-40B4-BE49-F238E27FC236}">
-                <a16:creationId xmlns:a16="http://schemas.microsoft.com/office/drawing/2014/main" id="{56635623-A4E5-465F-B743-885E889870A9}"/>
+                <a16:creationId xmlns:a16="http://schemas.microsoft.com/office/drawing/2014/main" id="{64C1DCEC-916D-4D9E-9B20-245DD9737DC4}"/>
               </a:ext>
             </a:extLst>
           </p:cNvPr>
@@ -16524,7 +17682,7 @@
           <p:cNvPr id="4" name="">
             <a:extLst xmlns:a="http://schemas.openxmlformats.org/drawingml/2006/main">
               <a:ext uri="{FF2B5EF4-FFF2-40B4-BE49-F238E27FC236}">
-                <a16:creationId xmlns:a16="http://schemas.microsoft.com/office/drawing/2014/main" id="{62E8EB77-AA5F-4857-8221-78BA4D8F4695}"/>
+                <a16:creationId xmlns:a16="http://schemas.microsoft.com/office/drawing/2014/main" id="{FDD607E3-DC1F-41BA-B172-F17A1349314B}"/>
               </a:ext>
             </a:extLst>
           </p:cNvPr>
@@ -16588,7 +17746,7 @@
           <p:cNvPr id="5" name="">
             <a:extLst xmlns:a="http://schemas.openxmlformats.org/drawingml/2006/main">
               <a:ext uri="{FF2B5EF4-FFF2-40B4-BE49-F238E27FC236}">
-                <a16:creationId xmlns:a16="http://schemas.microsoft.com/office/drawing/2014/main" id="{65AAF714-9240-4BA1-94FF-5C1F1F49F402}"/>
+                <a16:creationId xmlns:a16="http://schemas.microsoft.com/office/drawing/2014/main" id="{BABD9B51-392F-4604-BBCF-E32FC1C81024}"/>
               </a:ext>
             </a:extLst>
           </p:cNvPr>
@@ -16652,7 +17810,7 @@
           <p:cNvPr id="6" name="">
             <a:extLst xmlns:a="http://schemas.openxmlformats.org/drawingml/2006/main">
               <a:ext uri="{FF2B5EF4-FFF2-40B4-BE49-F238E27FC236}">
-                <a16:creationId xmlns:a16="http://schemas.microsoft.com/office/drawing/2014/main" id="{5A12BDBC-3FF0-4C91-853F-A8D865C8EB85}"/>
+                <a16:creationId xmlns:a16="http://schemas.microsoft.com/office/drawing/2014/main" id="{AEC81472-58C5-4EF7-943F-45DC2EE20009}"/>
               </a:ext>
             </a:extLst>
           </p:cNvPr>
@@ -16685,7 +17843,7 @@
           <p:cNvPr id="7" name="">
             <a:extLst xmlns:a="http://schemas.openxmlformats.org/drawingml/2006/main">
               <a:ext uri="{FF2B5EF4-FFF2-40B4-BE49-F238E27FC236}">
-                <a16:creationId xmlns:a16="http://schemas.microsoft.com/office/drawing/2014/main" id="{FC959C80-44C1-4ECC-A0E3-D06184504E30}"/>
+                <a16:creationId xmlns:a16="http://schemas.microsoft.com/office/drawing/2014/main" id="{0BE61B56-B313-4524-A6EE-DFE25FB4DD25}"/>
               </a:ext>
             </a:extLst>
           </p:cNvPr>
@@ -16720,7 +17878,7 @@
           <p:cNvPr id="8" name="">
             <a:extLst xmlns:a="http://schemas.openxmlformats.org/drawingml/2006/main">
               <a:ext uri="{FF2B5EF4-FFF2-40B4-BE49-F238E27FC236}">
-                <a16:creationId xmlns:a16="http://schemas.microsoft.com/office/drawing/2014/main" id="{815FE4B6-8C1C-4BEC-812B-CA033FAD7A54}"/>
+                <a16:creationId xmlns:a16="http://schemas.microsoft.com/office/drawing/2014/main" id="{D98E6C7D-83FB-47E7-B97A-47C358350F70}"/>
               </a:ext>
             </a:extLst>
           </p:cNvPr>
@@ -16784,7 +17942,7 @@
           <p:cNvPr id="9" name="">
             <a:extLst xmlns:a="http://schemas.openxmlformats.org/drawingml/2006/main">
               <a:ext uri="{FF2B5EF4-FFF2-40B4-BE49-F238E27FC236}">
-                <a16:creationId xmlns:a16="http://schemas.microsoft.com/office/drawing/2014/main" id="{CC2C11F2-AD71-4C1D-A3AC-5C41E7804951}"/>
+                <a16:creationId xmlns:a16="http://schemas.microsoft.com/office/drawing/2014/main" id="{C12083F9-31B6-48C8-99BA-205DB1BFE024}"/>
               </a:ext>
             </a:extLst>
           </p:cNvPr>
@@ -16848,7 +18006,7 @@
           <p:cNvPr id="10" name="">
             <a:extLst xmlns:a="http://schemas.openxmlformats.org/drawingml/2006/main">
               <a:ext uri="{FF2B5EF4-FFF2-40B4-BE49-F238E27FC236}">
-                <a16:creationId xmlns:a16="http://schemas.microsoft.com/office/drawing/2014/main" id="{2472E9A3-9DB7-4769-A4C7-4EB60C2C41E7}"/>
+                <a16:creationId xmlns:a16="http://schemas.microsoft.com/office/drawing/2014/main" id="{8480B292-8F3B-4BEE-A28E-78FD4AA8E4FF}"/>
               </a:ext>
             </a:extLst>
           </p:cNvPr>
@@ -16881,7 +18039,7 @@
           <p:cNvPr id="11" name="">
             <a:extLst xmlns:a="http://schemas.openxmlformats.org/drawingml/2006/main">
               <a:ext uri="{FF2B5EF4-FFF2-40B4-BE49-F238E27FC236}">
-                <a16:creationId xmlns:a16="http://schemas.microsoft.com/office/drawing/2014/main" id="{62CAA3BB-B81A-494D-96BA-C4BF7807C395}"/>
+                <a16:creationId xmlns:a16="http://schemas.microsoft.com/office/drawing/2014/main" id="{0A2D22EC-0F80-4BE3-9CB0-173C00C9B587}"/>
               </a:ext>
             </a:extLst>
           </p:cNvPr>
@@ -16916,7 +18074,7 @@
           <p:cNvPr id="12" name="">
             <a:extLst xmlns:a="http://schemas.openxmlformats.org/drawingml/2006/main">
               <a:ext uri="{FF2B5EF4-FFF2-40B4-BE49-F238E27FC236}">
-                <a16:creationId xmlns:a16="http://schemas.microsoft.com/office/drawing/2014/main" id="{AB2E52D8-C5C3-47C4-8DEF-17CAB1033F28}"/>
+                <a16:creationId xmlns:a16="http://schemas.microsoft.com/office/drawing/2014/main" id="{32DB7CFE-3D36-406F-BD10-F8860BB5F6E1}"/>
               </a:ext>
             </a:extLst>
           </p:cNvPr>
@@ -16980,7 +18138,7 @@
           <p:cNvPr id="13" name="">
             <a:extLst xmlns:a="http://schemas.openxmlformats.org/drawingml/2006/main">
               <a:ext uri="{FF2B5EF4-FFF2-40B4-BE49-F238E27FC236}">
-                <a16:creationId xmlns:a16="http://schemas.microsoft.com/office/drawing/2014/main" id="{D8D0A375-2986-4350-9CB5-BD0C16F6334D}"/>
+                <a16:creationId xmlns:a16="http://schemas.microsoft.com/office/drawing/2014/main" id="{19B987F1-8313-4836-8463-FC7E86FBA61E}"/>
               </a:ext>
             </a:extLst>
           </p:cNvPr>
@@ -17044,7 +18202,7 @@
           <p:cNvPr id="14" name="">
             <a:extLst xmlns:a="http://schemas.openxmlformats.org/drawingml/2006/main">
               <a:ext uri="{FF2B5EF4-FFF2-40B4-BE49-F238E27FC236}">
-                <a16:creationId xmlns:a16="http://schemas.microsoft.com/office/drawing/2014/main" id="{D2A6963B-459E-424F-98BF-3E4C1C08CA3F}"/>
+                <a16:creationId xmlns:a16="http://schemas.microsoft.com/office/drawing/2014/main" id="{79C6BA8C-1DF5-4DB1-AB7D-25EEF8471E2F}"/>
               </a:ext>
             </a:extLst>
           </p:cNvPr>
@@ -17077,7 +18235,7 @@
           <p:cNvPr id="15" name="">
             <a:extLst xmlns:a="http://schemas.openxmlformats.org/drawingml/2006/main">
               <a:ext uri="{FF2B5EF4-FFF2-40B4-BE49-F238E27FC236}">
-                <a16:creationId xmlns:a16="http://schemas.microsoft.com/office/drawing/2014/main" id="{2F78ABCA-9B3F-4013-919C-D8318D7B3E45}"/>
+                <a16:creationId xmlns:a16="http://schemas.microsoft.com/office/drawing/2014/main" id="{43944173-1F80-45FA-8ED3-E27D4B8CE76C}"/>
               </a:ext>
             </a:extLst>
           </p:cNvPr>
@@ -17112,7 +18270,7 @@
           <p:cNvPr id="16" name="">
             <a:extLst xmlns:a="http://schemas.openxmlformats.org/drawingml/2006/main">
               <a:ext uri="{FF2B5EF4-FFF2-40B4-BE49-F238E27FC236}">
-                <a16:creationId xmlns:a16="http://schemas.microsoft.com/office/drawing/2014/main" id="{7E089FDB-A665-43FA-BB0C-1E7CF5F6C320}"/>
+                <a16:creationId xmlns:a16="http://schemas.microsoft.com/office/drawing/2014/main" id="{7C3E5EB5-18B8-4414-8BE5-96A9F2E6B341}"/>
               </a:ext>
             </a:extLst>
           </p:cNvPr>
@@ -17176,7 +18334,7 @@
           <p:cNvPr id="17" name="">
             <a:extLst xmlns:a="http://schemas.openxmlformats.org/drawingml/2006/main">
               <a:ext uri="{FF2B5EF4-FFF2-40B4-BE49-F238E27FC236}">
-                <a16:creationId xmlns:a16="http://schemas.microsoft.com/office/drawing/2014/main" id="{6CE316C4-09F6-4991-8290-C53D9ABB8546}"/>
+                <a16:creationId xmlns:a16="http://schemas.microsoft.com/office/drawing/2014/main" id="{B9EAB0AC-F1D9-4E54-B1A9-BD75A7FF8C6B}"/>
               </a:ext>
             </a:extLst>
           </p:cNvPr>
@@ -17240,7 +18398,7 @@
           <p:cNvPr id="18" name="">
             <a:extLst xmlns:a="http://schemas.openxmlformats.org/drawingml/2006/main">
               <a:ext uri="{FF2B5EF4-FFF2-40B4-BE49-F238E27FC236}">
-                <a16:creationId xmlns:a16="http://schemas.microsoft.com/office/drawing/2014/main" id="{7DF347F8-623E-4638-A683-24DC19564ED6}"/>
+                <a16:creationId xmlns:a16="http://schemas.microsoft.com/office/drawing/2014/main" id="{08C5DCC2-F5DB-449B-8E73-0AFFA65642BA}"/>
               </a:ext>
             </a:extLst>
           </p:cNvPr>
@@ -17300,7 +18458,7 @@
     </p:spTree>
     <p:extLst>
       <p:ext uri="{BB962C8B-B14F-4D97-AF65-F5344CB8AC3E}">
-        <p14:creationId xmlns:p14="http://schemas.microsoft.com/office/powerpoint/2010/main" val="1359986053"/>
+        <p14:creationId xmlns:p14="http://schemas.microsoft.com/office/powerpoint/2010/main" val="248528248"/>
       </p:ext>
     </p:extLst>
   </p:cSld>
@@ -17331,7 +18489,7 @@
           <p:cNvPr id="1" name="">
             <a:extLst xmlns:a="http://schemas.openxmlformats.org/drawingml/2006/main">
               <a:ext uri="{FF2B5EF4-FFF2-40B4-BE49-F238E27FC236}">
-                <a16:creationId xmlns:a16="http://schemas.microsoft.com/office/drawing/2014/main" id="{389EED83-05AF-4EAF-A2FD-E5E723863090}"/>
+                <a16:creationId xmlns:a16="http://schemas.microsoft.com/office/drawing/2014/main" id="{CB309ED3-1B6A-43D9-9EEF-DB367749093D}"/>
               </a:ext>
             </a:extLst>
           </p:cNvPr>
@@ -17366,7 +18524,7 @@
           <p:cNvPr id="2" name="">
             <a:extLst xmlns:a="http://schemas.openxmlformats.org/drawingml/2006/main">
               <a:ext uri="{FF2B5EF4-FFF2-40B4-BE49-F238E27FC236}">
-                <a16:creationId xmlns:a16="http://schemas.microsoft.com/office/drawing/2014/main" id="{397093C2-4D81-4E5E-81A2-D0294CAC009A}"/>
+                <a16:creationId xmlns:a16="http://schemas.microsoft.com/office/drawing/2014/main" id="{8CA3BDBE-BA19-4AAE-8D41-E8F22E82088E}"/>
               </a:ext>
             </a:extLst>
           </p:cNvPr>
@@ -17430,7 +18588,7 @@
           <p:cNvPr id="3" name="">
             <a:extLst xmlns:a="http://schemas.openxmlformats.org/drawingml/2006/main">
               <a:ext uri="{FF2B5EF4-FFF2-40B4-BE49-F238E27FC236}">
-                <a16:creationId xmlns:a16="http://schemas.microsoft.com/office/drawing/2014/main" id="{C55C7E02-607C-4C01-82D9-25089B031D1F}"/>
+                <a16:creationId xmlns:a16="http://schemas.microsoft.com/office/drawing/2014/main" id="{49A9D082-8125-4BFC-A5F7-82893A655C4A}"/>
               </a:ext>
             </a:extLst>
           </p:cNvPr>
@@ -17494,7 +18652,7 @@
           <p:cNvPr id="4" name="">
             <a:extLst xmlns:a="http://schemas.openxmlformats.org/drawingml/2006/main">
               <a:ext uri="{FF2B5EF4-FFF2-40B4-BE49-F238E27FC236}">
-                <a16:creationId xmlns:a16="http://schemas.microsoft.com/office/drawing/2014/main" id="{A0742DC2-E3E4-4641-A55F-655E744622C9}"/>
+                <a16:creationId xmlns:a16="http://schemas.microsoft.com/office/drawing/2014/main" id="{1D9BFA28-6864-48F5-A2A2-6D80D07D4613}"/>
               </a:ext>
             </a:extLst>
           </p:cNvPr>
@@ -17558,7 +18716,7 @@
           <p:cNvPr id="5" name="">
             <a:extLst xmlns:a="http://schemas.openxmlformats.org/drawingml/2006/main">
               <a:ext uri="{FF2B5EF4-FFF2-40B4-BE49-F238E27FC236}">
-                <a16:creationId xmlns:a16="http://schemas.microsoft.com/office/drawing/2014/main" id="{EDEEB342-6997-42BE-AB25-E960891C8D1D}"/>
+                <a16:creationId xmlns:a16="http://schemas.microsoft.com/office/drawing/2014/main" id="{BA392DBE-B829-4A5D-A14B-C495351AEB86}"/>
               </a:ext>
             </a:extLst>
           </p:cNvPr>
@@ -17622,7 +18780,7 @@
           <p:cNvPr id="6" name="">
             <a:extLst xmlns:a="http://schemas.openxmlformats.org/drawingml/2006/main">
               <a:ext uri="{FF2B5EF4-FFF2-40B4-BE49-F238E27FC236}">
-                <a16:creationId xmlns:a16="http://schemas.microsoft.com/office/drawing/2014/main" id="{B377C42C-AECF-4348-835C-DFF191AE1049}"/>
+                <a16:creationId xmlns:a16="http://schemas.microsoft.com/office/drawing/2014/main" id="{EE8A4F19-18F9-4DA1-8D82-18477F87C15D}"/>
               </a:ext>
             </a:extLst>
           </p:cNvPr>
@@ -17655,7 +18813,7 @@
           <p:cNvPr id="7" name="">
             <a:extLst xmlns:a="http://schemas.openxmlformats.org/drawingml/2006/main">
               <a:ext uri="{FF2B5EF4-FFF2-40B4-BE49-F238E27FC236}">
-                <a16:creationId xmlns:a16="http://schemas.microsoft.com/office/drawing/2014/main" id="{8F6E119E-232E-4683-9D02-7C1E3F359C27}"/>
+                <a16:creationId xmlns:a16="http://schemas.microsoft.com/office/drawing/2014/main" id="{F75B0AA3-3CEC-41B5-8D7C-E41681DCACB5}"/>
               </a:ext>
             </a:extLst>
           </p:cNvPr>
@@ -17690,7 +18848,7 @@
           <p:cNvPr id="8" name="">
             <a:extLst xmlns:a="http://schemas.openxmlformats.org/drawingml/2006/main">
               <a:ext uri="{FF2B5EF4-FFF2-40B4-BE49-F238E27FC236}">
-                <a16:creationId xmlns:a16="http://schemas.microsoft.com/office/drawing/2014/main" id="{AAD5A1E0-0D48-41D5-BEAB-A3F887840639}"/>
+                <a16:creationId xmlns:a16="http://schemas.microsoft.com/office/drawing/2014/main" id="{186BBCFA-A464-4F2D-8799-59A3CE44DEC3}"/>
               </a:ext>
             </a:extLst>
           </p:cNvPr>
@@ -17754,7 +18912,7 @@
           <p:cNvPr id="9" name="">
             <a:extLst xmlns:a="http://schemas.openxmlformats.org/drawingml/2006/main">
               <a:ext uri="{FF2B5EF4-FFF2-40B4-BE49-F238E27FC236}">
-                <a16:creationId xmlns:a16="http://schemas.microsoft.com/office/drawing/2014/main" id="{4CFDC841-8DC5-4711-960C-22B6DC1428DE}"/>
+                <a16:creationId xmlns:a16="http://schemas.microsoft.com/office/drawing/2014/main" id="{2B2E580F-0478-4686-B1B3-68DB92575622}"/>
               </a:ext>
             </a:extLst>
           </p:cNvPr>
@@ -17846,7 +19004,7 @@
           <p:cNvPr id="10" name="">
             <a:extLst xmlns:a="http://schemas.openxmlformats.org/drawingml/2006/main">
               <a:ext uri="{FF2B5EF4-FFF2-40B4-BE49-F238E27FC236}">
-                <a16:creationId xmlns:a16="http://schemas.microsoft.com/office/drawing/2014/main" id="{D216DCD4-6C0E-413F-8387-7A4CB607EE2F}"/>
+                <a16:creationId xmlns:a16="http://schemas.microsoft.com/office/drawing/2014/main" id="{0EB1CA98-BBFC-4F00-842F-44573C67573C}"/>
               </a:ext>
             </a:extLst>
           </p:cNvPr>
@@ -17879,7 +19037,7 @@
           <p:cNvPr id="11" name="">
             <a:extLst xmlns:a="http://schemas.openxmlformats.org/drawingml/2006/main">
               <a:ext uri="{FF2B5EF4-FFF2-40B4-BE49-F238E27FC236}">
-                <a16:creationId xmlns:a16="http://schemas.microsoft.com/office/drawing/2014/main" id="{46D55AC1-6C35-4AE8-ABA0-917BEA2DE0E7}"/>
+                <a16:creationId xmlns:a16="http://schemas.microsoft.com/office/drawing/2014/main" id="{87620382-96DF-451B-BC29-A134C2E34C35}"/>
               </a:ext>
             </a:extLst>
           </p:cNvPr>
@@ -17914,7 +19072,7 @@
           <p:cNvPr id="12" name="">
             <a:extLst xmlns:a="http://schemas.openxmlformats.org/drawingml/2006/main">
               <a:ext uri="{FF2B5EF4-FFF2-40B4-BE49-F238E27FC236}">
-                <a16:creationId xmlns:a16="http://schemas.microsoft.com/office/drawing/2014/main" id="{06D6FBED-375C-466B-90A3-E8F3FFE6AFEF}"/>
+                <a16:creationId xmlns:a16="http://schemas.microsoft.com/office/drawing/2014/main" id="{D5AED3D9-D4BE-43AF-B6CE-CD22D3583042}"/>
               </a:ext>
             </a:extLst>
           </p:cNvPr>
@@ -17978,7 +19136,7 @@
           <p:cNvPr id="13" name="">
             <a:extLst xmlns:a="http://schemas.openxmlformats.org/drawingml/2006/main">
               <a:ext uri="{FF2B5EF4-FFF2-40B4-BE49-F238E27FC236}">
-                <a16:creationId xmlns:a16="http://schemas.microsoft.com/office/drawing/2014/main" id="{8DF8FB0D-CE82-4267-AEC6-E9601D03D8EE}"/>
+                <a16:creationId xmlns:a16="http://schemas.microsoft.com/office/drawing/2014/main" id="{D98E83C6-901C-4457-8CCE-07EC1D8424D9}"/>
               </a:ext>
             </a:extLst>
           </p:cNvPr>
@@ -18134,7 +19292,7 @@
           <p:cNvPr id="14" name="">
             <a:extLst xmlns:a="http://schemas.openxmlformats.org/drawingml/2006/main">
               <a:ext uri="{FF2B5EF4-FFF2-40B4-BE49-F238E27FC236}">
-                <a16:creationId xmlns:a16="http://schemas.microsoft.com/office/drawing/2014/main" id="{1A49BD65-2444-4F7C-85E6-86EE34BF944F}"/>
+                <a16:creationId xmlns:a16="http://schemas.microsoft.com/office/drawing/2014/main" id="{9D136548-E5A8-45B0-86F4-9D7443C871BB}"/>
               </a:ext>
             </a:extLst>
           </p:cNvPr>
@@ -18167,7 +19325,7 @@
           <p:cNvPr id="15" name="">
             <a:extLst xmlns:a="http://schemas.openxmlformats.org/drawingml/2006/main">
               <a:ext uri="{FF2B5EF4-FFF2-40B4-BE49-F238E27FC236}">
-                <a16:creationId xmlns:a16="http://schemas.microsoft.com/office/drawing/2014/main" id="{062BD2CB-D7A7-4EBB-8CC8-C1E21D75E9EE}"/>
+                <a16:creationId xmlns:a16="http://schemas.microsoft.com/office/drawing/2014/main" id="{77B0CD63-1774-441E-BCC9-248B3C1DD80E}"/>
               </a:ext>
             </a:extLst>
           </p:cNvPr>
@@ -18202,7 +19360,7 @@
           <p:cNvPr id="16" name="">
             <a:extLst xmlns:a="http://schemas.openxmlformats.org/drawingml/2006/main">
               <a:ext uri="{FF2B5EF4-FFF2-40B4-BE49-F238E27FC236}">
-                <a16:creationId xmlns:a16="http://schemas.microsoft.com/office/drawing/2014/main" id="{D70AC300-7ECA-4753-9126-AEC4E54383D6}"/>
+                <a16:creationId xmlns:a16="http://schemas.microsoft.com/office/drawing/2014/main" id="{65E4C111-6BC3-4F29-A3CC-5918A7AB2289}"/>
               </a:ext>
             </a:extLst>
           </p:cNvPr>
@@ -18266,7 +19424,7 @@
           <p:cNvPr id="17" name="">
             <a:extLst xmlns:a="http://schemas.openxmlformats.org/drawingml/2006/main">
               <a:ext uri="{FF2B5EF4-FFF2-40B4-BE49-F238E27FC236}">
-                <a16:creationId xmlns:a16="http://schemas.microsoft.com/office/drawing/2014/main" id="{8F80CFF0-5E1E-4290-B2F0-00C2E1689447}"/>
+                <a16:creationId xmlns:a16="http://schemas.microsoft.com/office/drawing/2014/main" id="{C2AA5FD6-DEB2-4399-AF07-09566311C005}"/>
               </a:ext>
             </a:extLst>
           </p:cNvPr>
@@ -18330,7 +19488,7 @@
           <p:cNvPr id="18" name="">
             <a:extLst xmlns:a="http://schemas.openxmlformats.org/drawingml/2006/main">
               <a:ext uri="{FF2B5EF4-FFF2-40B4-BE49-F238E27FC236}">
-                <a16:creationId xmlns:a16="http://schemas.microsoft.com/office/drawing/2014/main" id="{B6A0CAC1-889F-48B3-AA4C-A9ADD93624BB}"/>
+                <a16:creationId xmlns:a16="http://schemas.microsoft.com/office/drawing/2014/main" id="{65C23243-1B8F-4783-9C6B-37D23DD8629D}"/>
               </a:ext>
             </a:extLst>
           </p:cNvPr>
@@ -18365,7 +19523,7 @@
           <p:cNvPr id="19" name="">
             <a:extLst xmlns:a="http://schemas.openxmlformats.org/drawingml/2006/main">
               <a:ext uri="{FF2B5EF4-FFF2-40B4-BE49-F238E27FC236}">
-                <a16:creationId xmlns:a16="http://schemas.microsoft.com/office/drawing/2014/main" id="{281535E8-1652-4BBA-A13E-21F0762A54F3}"/>
+                <a16:creationId xmlns:a16="http://schemas.microsoft.com/office/drawing/2014/main" id="{1515E3D2-4929-4B10-8AB6-03C12F539C28}"/>
               </a:ext>
             </a:extLst>
           </p:cNvPr>
@@ -18429,7 +19587,7 @@
           <p:cNvPr id="20" name="">
             <a:extLst xmlns:a="http://schemas.openxmlformats.org/drawingml/2006/main">
               <a:ext uri="{FF2B5EF4-FFF2-40B4-BE49-F238E27FC236}">
-                <a16:creationId xmlns:a16="http://schemas.microsoft.com/office/drawing/2014/main" id="{54C1D4B2-D371-4835-A435-70F9E552E390}"/>
+                <a16:creationId xmlns:a16="http://schemas.microsoft.com/office/drawing/2014/main" id="{79BCBF45-1CC0-4CE5-AD14-CBA8C415FEDD}"/>
               </a:ext>
             </a:extLst>
           </p:cNvPr>
@@ -18464,7 +19622,7 @@
           <p:cNvPr id="21" name="">
             <a:extLst xmlns:a="http://schemas.openxmlformats.org/drawingml/2006/main">
               <a:ext uri="{FF2B5EF4-FFF2-40B4-BE49-F238E27FC236}">
-                <a16:creationId xmlns:a16="http://schemas.microsoft.com/office/drawing/2014/main" id="{FE3A936B-634E-44DB-BD9C-6E2733BB319F}"/>
+                <a16:creationId xmlns:a16="http://schemas.microsoft.com/office/drawing/2014/main" id="{6652FC4E-15AB-4391-B29C-726410AA078B}"/>
               </a:ext>
             </a:extLst>
           </p:cNvPr>
@@ -18528,7 +19686,7 @@
           <p:cNvPr id="22" name="">
             <a:extLst xmlns:a="http://schemas.openxmlformats.org/drawingml/2006/main">
               <a:ext uri="{FF2B5EF4-FFF2-40B4-BE49-F238E27FC236}">
-                <a16:creationId xmlns:a16="http://schemas.microsoft.com/office/drawing/2014/main" id="{17032641-AFCD-46DE-9B34-972D4EE4C8A9}"/>
+                <a16:creationId xmlns:a16="http://schemas.microsoft.com/office/drawing/2014/main" id="{956314A1-E2B4-45E2-BB5F-F6F649725127}"/>
               </a:ext>
             </a:extLst>
           </p:cNvPr>
@@ -18563,7 +19721,7 @@
           <p:cNvPr id="23" name="">
             <a:extLst xmlns:a="http://schemas.openxmlformats.org/drawingml/2006/main">
               <a:ext uri="{FF2B5EF4-FFF2-40B4-BE49-F238E27FC236}">
-                <a16:creationId xmlns:a16="http://schemas.microsoft.com/office/drawing/2014/main" id="{6143EBC9-EC3E-4047-877E-F4D536BEEF25}"/>
+                <a16:creationId xmlns:a16="http://schemas.microsoft.com/office/drawing/2014/main" id="{B0BF15CB-39B3-42A7-B298-B2134F37B6F3}"/>
               </a:ext>
             </a:extLst>
           </p:cNvPr>
@@ -18625,7 +19783,7 @@
     </p:spTree>
     <p:extLst>
       <p:ext uri="{BB962C8B-B14F-4D97-AF65-F5344CB8AC3E}">
-        <p14:creationId xmlns:p14="http://schemas.microsoft.com/office/powerpoint/2010/main" val="268249211"/>
+        <p14:creationId xmlns:p14="http://schemas.microsoft.com/office/powerpoint/2010/main" val="1763127991"/>
       </p:ext>
     </p:extLst>
   </p:cSld>
@@ -18656,7 +19814,7 @@
           <p:cNvPr id="1" name="">
             <a:extLst xmlns:a="http://schemas.openxmlformats.org/drawingml/2006/main">
               <a:ext uri="{FF2B5EF4-FFF2-40B4-BE49-F238E27FC236}">
-                <a16:creationId xmlns:a16="http://schemas.microsoft.com/office/drawing/2014/main" id="{362F1016-73FB-4DF1-AD2D-F2A0BDC22F43}"/>
+                <a16:creationId xmlns:a16="http://schemas.microsoft.com/office/drawing/2014/main" id="{4310AB19-614A-4B4C-A280-CB35043C784F}"/>
               </a:ext>
             </a:extLst>
           </p:cNvPr>
@@ -18691,7 +19849,7 @@
           <p:cNvPr id="2" name="">
             <a:extLst xmlns:a="http://schemas.openxmlformats.org/drawingml/2006/main">
               <a:ext uri="{FF2B5EF4-FFF2-40B4-BE49-F238E27FC236}">
-                <a16:creationId xmlns:a16="http://schemas.microsoft.com/office/drawing/2014/main" id="{2826D38E-D828-471E-ADC6-35CB276050A1}"/>
+                <a16:creationId xmlns:a16="http://schemas.microsoft.com/office/drawing/2014/main" id="{DA90F56A-4D84-4197-B395-0A5B1C9A42E3}"/>
               </a:ext>
             </a:extLst>
           </p:cNvPr>
@@ -18755,7 +19913,7 @@
           <p:cNvPr id="3" name="">
             <a:extLst xmlns:a="http://schemas.openxmlformats.org/drawingml/2006/main">
               <a:ext uri="{FF2B5EF4-FFF2-40B4-BE49-F238E27FC236}">
-                <a16:creationId xmlns:a16="http://schemas.microsoft.com/office/drawing/2014/main" id="{35211ABC-DC22-4360-9573-B18C480E61C0}"/>
+                <a16:creationId xmlns:a16="http://schemas.microsoft.com/office/drawing/2014/main" id="{55C5FF44-DDB2-4A35-BAFB-7F2278D4E3A5}"/>
               </a:ext>
             </a:extLst>
           </p:cNvPr>
@@ -18819,7 +19977,7 @@
           <p:cNvPr id="4" name="">
             <a:extLst xmlns:a="http://schemas.openxmlformats.org/drawingml/2006/main">
               <a:ext uri="{FF2B5EF4-FFF2-40B4-BE49-F238E27FC236}">
-                <a16:creationId xmlns:a16="http://schemas.microsoft.com/office/drawing/2014/main" id="{800403E9-F1EB-43FA-9E28-B97BCE8CDF89}"/>
+                <a16:creationId xmlns:a16="http://schemas.microsoft.com/office/drawing/2014/main" id="{5F72FA07-8B21-4C3C-AA30-C50C4D17487A}"/>
               </a:ext>
             </a:extLst>
           </p:cNvPr>
@@ -18883,7 +20041,7 @@
           <p:cNvPr id="5" name="">
             <a:extLst xmlns:a="http://schemas.openxmlformats.org/drawingml/2006/main">
               <a:ext uri="{FF2B5EF4-FFF2-40B4-BE49-F238E27FC236}">
-                <a16:creationId xmlns:a16="http://schemas.microsoft.com/office/drawing/2014/main" id="{05942583-553C-4879-9152-388DF72E66CD}"/>
+                <a16:creationId xmlns:a16="http://schemas.microsoft.com/office/drawing/2014/main" id="{86F3FCED-30B8-4DDF-9344-B7D042879D8D}"/>
               </a:ext>
             </a:extLst>
           </p:cNvPr>
@@ -18947,7 +20105,7 @@
           <p:cNvPr id="6" name="">
             <a:extLst xmlns:a="http://schemas.openxmlformats.org/drawingml/2006/main">
               <a:ext uri="{FF2B5EF4-FFF2-40B4-BE49-F238E27FC236}">
-                <a16:creationId xmlns:a16="http://schemas.microsoft.com/office/drawing/2014/main" id="{CDFDF8FA-F1E1-4ABA-A135-2E1765A5C340}"/>
+                <a16:creationId xmlns:a16="http://schemas.microsoft.com/office/drawing/2014/main" id="{B9F0172D-5C89-48A8-AE20-9DE2B7D86B1E}"/>
               </a:ext>
             </a:extLst>
           </p:cNvPr>
@@ -18980,7 +20138,7 @@
           <p:cNvPr id="7" name="">
             <a:extLst xmlns:a="http://schemas.openxmlformats.org/drawingml/2006/main">
               <a:ext uri="{FF2B5EF4-FFF2-40B4-BE49-F238E27FC236}">
-                <a16:creationId xmlns:a16="http://schemas.microsoft.com/office/drawing/2014/main" id="{0D876EAE-FDED-405D-81A3-53BA94BDEDF5}"/>
+                <a16:creationId xmlns:a16="http://schemas.microsoft.com/office/drawing/2014/main" id="{F5A18B28-0C8A-4A37-859C-5FF4B34F14EE}"/>
               </a:ext>
             </a:extLst>
           </p:cNvPr>
@@ -19015,7 +20173,7 @@
           <p:cNvPr id="8" name="">
             <a:extLst xmlns:a="http://schemas.openxmlformats.org/drawingml/2006/main">
               <a:ext uri="{FF2B5EF4-FFF2-40B4-BE49-F238E27FC236}">
-                <a16:creationId xmlns:a16="http://schemas.microsoft.com/office/drawing/2014/main" id="{F8F22C9E-E641-476A-BF56-EA60DA374458}"/>
+                <a16:creationId xmlns:a16="http://schemas.microsoft.com/office/drawing/2014/main" id="{428A5CD0-33DA-453D-8403-764B78EA3695}"/>
               </a:ext>
             </a:extLst>
           </p:cNvPr>
@@ -19079,7 +20237,7 @@
           <p:cNvPr id="9" name="">
             <a:extLst xmlns:a="http://schemas.openxmlformats.org/drawingml/2006/main">
               <a:ext uri="{FF2B5EF4-FFF2-40B4-BE49-F238E27FC236}">
-                <a16:creationId xmlns:a16="http://schemas.microsoft.com/office/drawing/2014/main" id="{858F9D04-8405-4937-B039-6E2FA218E00E}"/>
+                <a16:creationId xmlns:a16="http://schemas.microsoft.com/office/drawing/2014/main" id="{64BA54EA-3865-4615-A15C-0C49D42628F0}"/>
               </a:ext>
             </a:extLst>
           </p:cNvPr>
@@ -19125,7 +20283,7 @@
           <p:cNvPr id="10" name="">
             <a:extLst xmlns:a="http://schemas.openxmlformats.org/drawingml/2006/main">
               <a:ext uri="{FF2B5EF4-FFF2-40B4-BE49-F238E27FC236}">
-                <a16:creationId xmlns:a16="http://schemas.microsoft.com/office/drawing/2014/main" id="{80611E11-D0CF-4CD5-814B-314D82B4E56C}"/>
+                <a16:creationId xmlns:a16="http://schemas.microsoft.com/office/drawing/2014/main" id="{AA636F26-1206-420F-BD7B-BA0A5A5B4E73}"/>
               </a:ext>
             </a:extLst>
           </p:cNvPr>
@@ -19158,7 +20316,7 @@
           <p:cNvPr id="11" name="">
             <a:extLst xmlns:a="http://schemas.openxmlformats.org/drawingml/2006/main">
               <a:ext uri="{FF2B5EF4-FFF2-40B4-BE49-F238E27FC236}">
-                <a16:creationId xmlns:a16="http://schemas.microsoft.com/office/drawing/2014/main" id="{576AB20C-D4AE-4227-95FA-8370A28CA35D}"/>
+                <a16:creationId xmlns:a16="http://schemas.microsoft.com/office/drawing/2014/main" id="{0844A656-13D9-4599-B6CF-CC4F0EA08CB4}"/>
               </a:ext>
             </a:extLst>
           </p:cNvPr>
@@ -19193,7 +20351,7 @@
           <p:cNvPr id="12" name="">
             <a:extLst xmlns:a="http://schemas.openxmlformats.org/drawingml/2006/main">
               <a:ext uri="{FF2B5EF4-FFF2-40B4-BE49-F238E27FC236}">
-                <a16:creationId xmlns:a16="http://schemas.microsoft.com/office/drawing/2014/main" id="{E34970A4-322C-492E-9166-DD1CC08CD257}"/>
+                <a16:creationId xmlns:a16="http://schemas.microsoft.com/office/drawing/2014/main" id="{99E240DA-84BB-41A7-9F68-A6F38E045BE0}"/>
               </a:ext>
             </a:extLst>
           </p:cNvPr>
@@ -19257,7 +20415,7 @@
           <p:cNvPr id="13" name="">
             <a:extLst xmlns:a="http://schemas.openxmlformats.org/drawingml/2006/main">
               <a:ext uri="{FF2B5EF4-FFF2-40B4-BE49-F238E27FC236}">
-                <a16:creationId xmlns:a16="http://schemas.microsoft.com/office/drawing/2014/main" id="{BB091FBC-824B-40AB-B7AD-F65F31E1C6D1}"/>
+                <a16:creationId xmlns:a16="http://schemas.microsoft.com/office/drawing/2014/main" id="{5C6B9257-BE4C-4808-8817-4854290298C1}"/>
               </a:ext>
             </a:extLst>
           </p:cNvPr>
@@ -19303,7 +20461,7 @@
           <p:cNvPr id="14" name="">
             <a:extLst xmlns:a="http://schemas.openxmlformats.org/drawingml/2006/main">
               <a:ext uri="{FF2B5EF4-FFF2-40B4-BE49-F238E27FC236}">
-                <a16:creationId xmlns:a16="http://schemas.microsoft.com/office/drawing/2014/main" id="{C3DCD1E9-4054-47AB-B5F4-CA3EF38283B5}"/>
+                <a16:creationId xmlns:a16="http://schemas.microsoft.com/office/drawing/2014/main" id="{EF8F9E5E-C1CD-4F0E-A1A1-26F299B41A66}"/>
               </a:ext>
             </a:extLst>
           </p:cNvPr>
@@ -19338,7 +20496,7 @@
           <p:cNvPr id="15" name="">
             <a:extLst xmlns:a="http://schemas.openxmlformats.org/drawingml/2006/main">
               <a:ext uri="{FF2B5EF4-FFF2-40B4-BE49-F238E27FC236}">
-                <a16:creationId xmlns:a16="http://schemas.microsoft.com/office/drawing/2014/main" id="{ECDB5715-657F-4311-8F5C-A1D67F361D33}"/>
+                <a16:creationId xmlns:a16="http://schemas.microsoft.com/office/drawing/2014/main" id="{C4E79736-412A-413B-8B34-DEF3769B5B3E}"/>
               </a:ext>
             </a:extLst>
           </p:cNvPr>
@@ -19402,7 +20560,7 @@
           <p:cNvPr id="16" name="">
             <a:extLst xmlns:a="http://schemas.openxmlformats.org/drawingml/2006/main">
               <a:ext uri="{FF2B5EF4-FFF2-40B4-BE49-F238E27FC236}">
-                <a16:creationId xmlns:a16="http://schemas.microsoft.com/office/drawing/2014/main" id="{9170D59E-133B-453F-9983-941D8E4A2876}"/>
+                <a16:creationId xmlns:a16="http://schemas.microsoft.com/office/drawing/2014/main" id="{64158767-6FCD-4160-AD31-1538819D8BA3}"/>
               </a:ext>
             </a:extLst>
           </p:cNvPr>
@@ -19437,7 +20595,7 @@
           <p:cNvPr id="17" name="">
             <a:extLst xmlns:a="http://schemas.openxmlformats.org/drawingml/2006/main">
               <a:ext uri="{FF2B5EF4-FFF2-40B4-BE49-F238E27FC236}">
-                <a16:creationId xmlns:a16="http://schemas.microsoft.com/office/drawing/2014/main" id="{5D1EC0F5-6FFB-4DC9-9D68-B9A25323F3B8}"/>
+                <a16:creationId xmlns:a16="http://schemas.microsoft.com/office/drawing/2014/main" id="{AAFDEEFB-095D-41DB-8FB6-187347B7DD30}"/>
               </a:ext>
             </a:extLst>
           </p:cNvPr>
@@ -19501,7 +20659,7 @@
           <p:cNvPr id="18" name="">
             <a:extLst xmlns:a="http://schemas.openxmlformats.org/drawingml/2006/main">
               <a:ext uri="{FF2B5EF4-FFF2-40B4-BE49-F238E27FC236}">
-                <a16:creationId xmlns:a16="http://schemas.microsoft.com/office/drawing/2014/main" id="{6107162C-CC62-4B09-A5B5-2C912FDE6CE9}"/>
+                <a16:creationId xmlns:a16="http://schemas.microsoft.com/office/drawing/2014/main" id="{F6866321-CB95-4933-A22A-87D30D9693A0}"/>
               </a:ext>
             </a:extLst>
           </p:cNvPr>
@@ -19536,7 +20694,7 @@
           <p:cNvPr id="19" name="">
             <a:extLst xmlns:a="http://schemas.openxmlformats.org/drawingml/2006/main">
               <a:ext uri="{FF2B5EF4-FFF2-40B4-BE49-F238E27FC236}">
-                <a16:creationId xmlns:a16="http://schemas.microsoft.com/office/drawing/2014/main" id="{47BE570B-2803-4118-A37E-4001A380163D}"/>
+                <a16:creationId xmlns:a16="http://schemas.microsoft.com/office/drawing/2014/main" id="{BF27330B-0089-48B6-B9BC-45BFF3236B4F}"/>
               </a:ext>
             </a:extLst>
           </p:cNvPr>
@@ -19600,7 +20758,7 @@
           <p:cNvPr id="20" name="">
             <a:extLst xmlns:a="http://schemas.openxmlformats.org/drawingml/2006/main">
               <a:ext uri="{FF2B5EF4-FFF2-40B4-BE49-F238E27FC236}">
-                <a16:creationId xmlns:a16="http://schemas.microsoft.com/office/drawing/2014/main" id="{6625EF01-4A90-4248-8A9C-2986C298BCEA}"/>
+                <a16:creationId xmlns:a16="http://schemas.microsoft.com/office/drawing/2014/main" id="{817C5D26-1D0B-4534-8083-F8EFD6F51048}"/>
               </a:ext>
             </a:extLst>
           </p:cNvPr>
@@ -19635,7 +20793,7 @@
           <p:cNvPr id="21" name="">
             <a:extLst xmlns:a="http://schemas.openxmlformats.org/drawingml/2006/main">
               <a:ext uri="{FF2B5EF4-FFF2-40B4-BE49-F238E27FC236}">
-                <a16:creationId xmlns:a16="http://schemas.microsoft.com/office/drawing/2014/main" id="{AA6C6855-5F63-43F9-9ECB-D41EBC03E0A4}"/>
+                <a16:creationId xmlns:a16="http://schemas.microsoft.com/office/drawing/2014/main" id="{80854102-EB54-4653-B931-2529EE11D3FE}"/>
               </a:ext>
             </a:extLst>
           </p:cNvPr>
@@ -19699,7 +20857,7 @@
           <p:cNvPr id="22" name="">
             <a:extLst xmlns:a="http://schemas.openxmlformats.org/drawingml/2006/main">
               <a:ext uri="{FF2B5EF4-FFF2-40B4-BE49-F238E27FC236}">
-                <a16:creationId xmlns:a16="http://schemas.microsoft.com/office/drawing/2014/main" id="{506CC75A-768C-4E2A-B822-4D135EA2B332}"/>
+                <a16:creationId xmlns:a16="http://schemas.microsoft.com/office/drawing/2014/main" id="{1FEA7DED-0692-4650-A1C0-C59854D234F9}"/>
               </a:ext>
             </a:extLst>
           </p:cNvPr>
@@ -19759,7 +20917,7 @@
     </p:spTree>
     <p:extLst>
       <p:ext uri="{BB962C8B-B14F-4D97-AF65-F5344CB8AC3E}">
-        <p14:creationId xmlns:p14="http://schemas.microsoft.com/office/powerpoint/2010/main" val="314295448"/>
+        <p14:creationId xmlns:p14="http://schemas.microsoft.com/office/powerpoint/2010/main" val="1490439293"/>
       </p:ext>
     </p:extLst>
   </p:cSld>
@@ -19790,7 +20948,7 @@
           <p:cNvPr id="1" name="">
             <a:extLst xmlns:a="http://schemas.openxmlformats.org/drawingml/2006/main">
               <a:ext uri="{FF2B5EF4-FFF2-40B4-BE49-F238E27FC236}">
-                <a16:creationId xmlns:a16="http://schemas.microsoft.com/office/drawing/2014/main" id="{68ECB801-68BB-4EED-9628-8DAD3CC39D57}"/>
+                <a16:creationId xmlns:a16="http://schemas.microsoft.com/office/drawing/2014/main" id="{2DE96307-BCDB-4260-97AC-A67507F33A22}"/>
               </a:ext>
             </a:extLst>
           </p:cNvPr>
@@ -19825,7 +20983,7 @@
           <p:cNvPr id="2" name="">
             <a:extLst xmlns:a="http://schemas.openxmlformats.org/drawingml/2006/main">
               <a:ext uri="{FF2B5EF4-FFF2-40B4-BE49-F238E27FC236}">
-                <a16:creationId xmlns:a16="http://schemas.microsoft.com/office/drawing/2014/main" id="{CA62DBE6-AC02-4975-A22D-BE92987F8F85}"/>
+                <a16:creationId xmlns:a16="http://schemas.microsoft.com/office/drawing/2014/main" id="{87C28F50-9DA4-419F-B100-961CA792CFAF}"/>
               </a:ext>
             </a:extLst>
           </p:cNvPr>
@@ -19889,7 +21047,7 @@
           <p:cNvPr id="3" name="">
             <a:extLst xmlns:a="http://schemas.openxmlformats.org/drawingml/2006/main">
               <a:ext uri="{FF2B5EF4-FFF2-40B4-BE49-F238E27FC236}">
-                <a16:creationId xmlns:a16="http://schemas.microsoft.com/office/drawing/2014/main" id="{3DD495F1-B91A-4E05-8858-99C8340D334E}"/>
+                <a16:creationId xmlns:a16="http://schemas.microsoft.com/office/drawing/2014/main" id="{B295FE7A-A683-4D03-8E3E-B6D7BA8D0C89}"/>
               </a:ext>
             </a:extLst>
           </p:cNvPr>
@@ -19953,7 +21111,7 @@
           <p:cNvPr id="4" name="">
             <a:extLst xmlns:a="http://schemas.openxmlformats.org/drawingml/2006/main">
               <a:ext uri="{FF2B5EF4-FFF2-40B4-BE49-F238E27FC236}">
-                <a16:creationId xmlns:a16="http://schemas.microsoft.com/office/drawing/2014/main" id="{40975844-A6D3-4A3E-9EC8-502F22DBDDE2}"/>
+                <a16:creationId xmlns:a16="http://schemas.microsoft.com/office/drawing/2014/main" id="{4AD84FC3-006F-4C54-BAAE-C92A7ADEF213}"/>
               </a:ext>
             </a:extLst>
           </p:cNvPr>
@@ -20017,7 +21175,7 @@
           <p:cNvPr id="5" name="">
             <a:extLst xmlns:a="http://schemas.openxmlformats.org/drawingml/2006/main">
               <a:ext uri="{FF2B5EF4-FFF2-40B4-BE49-F238E27FC236}">
-                <a16:creationId xmlns:a16="http://schemas.microsoft.com/office/drawing/2014/main" id="{524A9D2C-D801-43A6-8C68-B96CD847A597}"/>
+                <a16:creationId xmlns:a16="http://schemas.microsoft.com/office/drawing/2014/main" id="{98004CD3-548B-4713-9363-089429751F3A}"/>
               </a:ext>
             </a:extLst>
           </p:cNvPr>
@@ -20081,7 +21239,7 @@
           <p:cNvPr id="6" name="">
             <a:extLst xmlns:a="http://schemas.openxmlformats.org/drawingml/2006/main">
               <a:ext uri="{FF2B5EF4-FFF2-40B4-BE49-F238E27FC236}">
-                <a16:creationId xmlns:a16="http://schemas.microsoft.com/office/drawing/2014/main" id="{36C3DE3F-A357-46C8-9639-BAE0CEF378C5}"/>
+                <a16:creationId xmlns:a16="http://schemas.microsoft.com/office/drawing/2014/main" id="{20060DCC-0462-4B11-8CCF-7E2D3D2690DA}"/>
               </a:ext>
             </a:extLst>
           </p:cNvPr>
@@ -20114,7 +21272,7 @@
           <p:cNvPr id="7" name="">
             <a:extLst xmlns:a="http://schemas.openxmlformats.org/drawingml/2006/main">
               <a:ext uri="{FF2B5EF4-FFF2-40B4-BE49-F238E27FC236}">
-                <a16:creationId xmlns:a16="http://schemas.microsoft.com/office/drawing/2014/main" id="{42A72CCC-DDF7-4909-9A85-4475A7FBD087}"/>
+                <a16:creationId xmlns:a16="http://schemas.microsoft.com/office/drawing/2014/main" id="{ABA6691C-FDF8-4D9F-AE21-DBC798C78327}"/>
               </a:ext>
             </a:extLst>
           </p:cNvPr>
@@ -20178,7 +21336,7 @@
           <p:cNvPr id="8" name="">
             <a:extLst xmlns:a="http://schemas.openxmlformats.org/drawingml/2006/main">
               <a:ext uri="{FF2B5EF4-FFF2-40B4-BE49-F238E27FC236}">
-                <a16:creationId xmlns:a16="http://schemas.microsoft.com/office/drawing/2014/main" id="{624F8F8B-2D7A-4869-A0D5-664F78081FA7}"/>
+                <a16:creationId xmlns:a16="http://schemas.microsoft.com/office/drawing/2014/main" id="{BA14098F-0D7F-4244-A375-7FD05236B3CA}"/>
               </a:ext>
             </a:extLst>
           </p:cNvPr>
@@ -20242,7 +21400,7 @@
           <p:cNvPr id="9" name="">
             <a:extLst xmlns:a="http://schemas.openxmlformats.org/drawingml/2006/main">
               <a:ext uri="{FF2B5EF4-FFF2-40B4-BE49-F238E27FC236}">
-                <a16:creationId xmlns:a16="http://schemas.microsoft.com/office/drawing/2014/main" id="{ECD4EC2F-254A-4854-899A-FA80762B64E2}"/>
+                <a16:creationId xmlns:a16="http://schemas.microsoft.com/office/drawing/2014/main" id="{48EE3405-FFD2-428D-80E3-D6EFE98D7FC6}"/>
               </a:ext>
             </a:extLst>
           </p:cNvPr>
@@ -20277,7 +21435,7 @@
           <p:cNvPr id="10" name="">
             <a:extLst xmlns:a="http://schemas.openxmlformats.org/drawingml/2006/main">
               <a:ext uri="{FF2B5EF4-FFF2-40B4-BE49-F238E27FC236}">
-                <a16:creationId xmlns:a16="http://schemas.microsoft.com/office/drawing/2014/main" id="{FFABFE89-E78D-4DA0-95B4-ED3829A5A534}"/>
+                <a16:creationId xmlns:a16="http://schemas.microsoft.com/office/drawing/2014/main" id="{8D854C65-3F21-48A3-8CF5-4FC3465A10DE}"/>
               </a:ext>
             </a:extLst>
           </p:cNvPr>
@@ -20310,7 +21468,7 @@
           <p:cNvPr id="11" name="">
             <a:extLst xmlns:a="http://schemas.openxmlformats.org/drawingml/2006/main">
               <a:ext uri="{FF2B5EF4-FFF2-40B4-BE49-F238E27FC236}">
-                <a16:creationId xmlns:a16="http://schemas.microsoft.com/office/drawing/2014/main" id="{29BEC7EB-A4FE-4389-A657-671573729221}"/>
+                <a16:creationId xmlns:a16="http://schemas.microsoft.com/office/drawing/2014/main" id="{EFA1BBFD-8CC6-42C6-AAEC-E8C9AAA7BE67}"/>
               </a:ext>
             </a:extLst>
           </p:cNvPr>
@@ -20374,7 +21532,7 @@
           <p:cNvPr id="12" name="">
             <a:extLst xmlns:a="http://schemas.openxmlformats.org/drawingml/2006/main">
               <a:ext uri="{FF2B5EF4-FFF2-40B4-BE49-F238E27FC236}">
-                <a16:creationId xmlns:a16="http://schemas.microsoft.com/office/drawing/2014/main" id="{47B3FDC0-0A39-42A8-8B01-43AACF166F22}"/>
+                <a16:creationId xmlns:a16="http://schemas.microsoft.com/office/drawing/2014/main" id="{D07CBD97-E464-4DED-AF61-002C8A07E27E}"/>
               </a:ext>
             </a:extLst>
           </p:cNvPr>
@@ -20438,7 +21596,7 @@
           <p:cNvPr id="13" name="">
             <a:extLst xmlns:a="http://schemas.openxmlformats.org/drawingml/2006/main">
               <a:ext uri="{FF2B5EF4-FFF2-40B4-BE49-F238E27FC236}">
-                <a16:creationId xmlns:a16="http://schemas.microsoft.com/office/drawing/2014/main" id="{B4DAA44A-5344-40D2-8866-3AD55ACF805B}"/>
+                <a16:creationId xmlns:a16="http://schemas.microsoft.com/office/drawing/2014/main" id="{825E9C9C-F466-4BD5-9F47-27463CAC965D}"/>
               </a:ext>
             </a:extLst>
           </p:cNvPr>
@@ -20473,7 +21631,7 @@
           <p:cNvPr id="14" name="">
             <a:extLst xmlns:a="http://schemas.openxmlformats.org/drawingml/2006/main">
               <a:ext uri="{FF2B5EF4-FFF2-40B4-BE49-F238E27FC236}">
-                <a16:creationId xmlns:a16="http://schemas.microsoft.com/office/drawing/2014/main" id="{42871C9F-B008-4DE5-B403-7A2DC65675D1}"/>
+                <a16:creationId xmlns:a16="http://schemas.microsoft.com/office/drawing/2014/main" id="{92ECEB72-B989-4113-A8C8-567945741233}"/>
               </a:ext>
             </a:extLst>
           </p:cNvPr>
@@ -20506,7 +21664,7 @@
           <p:cNvPr id="15" name="">
             <a:extLst xmlns:a="http://schemas.openxmlformats.org/drawingml/2006/main">
               <a:ext uri="{FF2B5EF4-FFF2-40B4-BE49-F238E27FC236}">
-                <a16:creationId xmlns:a16="http://schemas.microsoft.com/office/drawing/2014/main" id="{35889BAD-0F07-48DC-974F-371ABE9EA185}"/>
+                <a16:creationId xmlns:a16="http://schemas.microsoft.com/office/drawing/2014/main" id="{5CDB607E-A66C-49DB-8A92-A71435F895A1}"/>
               </a:ext>
             </a:extLst>
           </p:cNvPr>
@@ -20570,7 +21728,7 @@
           <p:cNvPr id="16" name="">
             <a:extLst xmlns:a="http://schemas.openxmlformats.org/drawingml/2006/main">
               <a:ext uri="{FF2B5EF4-FFF2-40B4-BE49-F238E27FC236}">
-                <a16:creationId xmlns:a16="http://schemas.microsoft.com/office/drawing/2014/main" id="{F560E877-B10D-451E-9BB7-06F851AB18B8}"/>
+                <a16:creationId xmlns:a16="http://schemas.microsoft.com/office/drawing/2014/main" id="{7433824F-6BD4-4DA2-B904-16534AA70EBC}"/>
               </a:ext>
             </a:extLst>
           </p:cNvPr>
@@ -20634,7 +21792,7 @@
           <p:cNvPr id="17" name="">
             <a:extLst xmlns:a="http://schemas.openxmlformats.org/drawingml/2006/main">
               <a:ext uri="{FF2B5EF4-FFF2-40B4-BE49-F238E27FC236}">
-                <a16:creationId xmlns:a16="http://schemas.microsoft.com/office/drawing/2014/main" id="{E52C6FD8-6830-4EAD-BB5F-1532E225CCD5}"/>
+                <a16:creationId xmlns:a16="http://schemas.microsoft.com/office/drawing/2014/main" id="{95F7689E-101E-40A7-AE85-3ED508751B0C}"/>
               </a:ext>
             </a:extLst>
           </p:cNvPr>
@@ -20669,7 +21827,7 @@
           <p:cNvPr id="18" name="">
             <a:extLst xmlns:a="http://schemas.openxmlformats.org/drawingml/2006/main">
               <a:ext uri="{FF2B5EF4-FFF2-40B4-BE49-F238E27FC236}">
-                <a16:creationId xmlns:a16="http://schemas.microsoft.com/office/drawing/2014/main" id="{1ECD70D6-4CC3-4DEB-9D6D-A8AAA74FD4B2}"/>
+                <a16:creationId xmlns:a16="http://schemas.microsoft.com/office/drawing/2014/main" id="{EAE959B5-635A-4ADF-869C-404A4CCBBC20}"/>
               </a:ext>
             </a:extLst>
           </p:cNvPr>
@@ -20702,7 +21860,7 @@
           <p:cNvPr id="19" name="">
             <a:extLst xmlns:a="http://schemas.openxmlformats.org/drawingml/2006/main">
               <a:ext uri="{FF2B5EF4-FFF2-40B4-BE49-F238E27FC236}">
-                <a16:creationId xmlns:a16="http://schemas.microsoft.com/office/drawing/2014/main" id="{EB543E2F-EE74-4FD0-AC20-A0CB0C34CF1D}"/>
+                <a16:creationId xmlns:a16="http://schemas.microsoft.com/office/drawing/2014/main" id="{AFF62130-E7AD-4407-A18E-6577B06CBA90}"/>
               </a:ext>
             </a:extLst>
           </p:cNvPr>
@@ -20766,7 +21924,7 @@
           <p:cNvPr id="20" name="">
             <a:extLst xmlns:a="http://schemas.openxmlformats.org/drawingml/2006/main">
               <a:ext uri="{FF2B5EF4-FFF2-40B4-BE49-F238E27FC236}">
-                <a16:creationId xmlns:a16="http://schemas.microsoft.com/office/drawing/2014/main" id="{4E70DB27-4AB6-4B65-A77A-24A9B2C1FB1B}"/>
+                <a16:creationId xmlns:a16="http://schemas.microsoft.com/office/drawing/2014/main" id="{C560C003-9AE4-4478-8AA5-6F4D6D109FA9}"/>
               </a:ext>
             </a:extLst>
           </p:cNvPr>
@@ -20830,7 +21988,7 @@
           <p:cNvPr id="21" name="">
             <a:extLst xmlns:a="http://schemas.openxmlformats.org/drawingml/2006/main">
               <a:ext uri="{FF2B5EF4-FFF2-40B4-BE49-F238E27FC236}">
-                <a16:creationId xmlns:a16="http://schemas.microsoft.com/office/drawing/2014/main" id="{BC0548FA-09B0-4E42-AA24-D0D925269099}"/>
+                <a16:creationId xmlns:a16="http://schemas.microsoft.com/office/drawing/2014/main" id="{0A3C6148-1DC9-46A0-AB7F-1ECBAE3CB444}"/>
               </a:ext>
             </a:extLst>
           </p:cNvPr>
@@ -20865,7 +22023,7 @@
           <p:cNvPr id="22" name="">
             <a:extLst xmlns:a="http://schemas.openxmlformats.org/drawingml/2006/main">
               <a:ext uri="{FF2B5EF4-FFF2-40B4-BE49-F238E27FC236}">
-                <a16:creationId xmlns:a16="http://schemas.microsoft.com/office/drawing/2014/main" id="{06DA698F-00E2-4486-B336-767F4C926AE5}"/>
+                <a16:creationId xmlns:a16="http://schemas.microsoft.com/office/drawing/2014/main" id="{578ED65B-AB02-426F-BA2C-C19C00E006D0}"/>
               </a:ext>
             </a:extLst>
           </p:cNvPr>
@@ -20898,7 +22056,7 @@
           <p:cNvPr id="23" name="">
             <a:extLst xmlns:a="http://schemas.openxmlformats.org/drawingml/2006/main">
               <a:ext uri="{FF2B5EF4-FFF2-40B4-BE49-F238E27FC236}">
-                <a16:creationId xmlns:a16="http://schemas.microsoft.com/office/drawing/2014/main" id="{1E67AFDC-EAD3-4AEC-862A-B831CB6C6211}"/>
+                <a16:creationId xmlns:a16="http://schemas.microsoft.com/office/drawing/2014/main" id="{1B59C5AB-F5E7-4960-AE5F-AC1DDF81D869}"/>
               </a:ext>
             </a:extLst>
           </p:cNvPr>
@@ -20962,7 +22120,7 @@
           <p:cNvPr id="24" name="">
             <a:extLst xmlns:a="http://schemas.openxmlformats.org/drawingml/2006/main">
               <a:ext uri="{FF2B5EF4-FFF2-40B4-BE49-F238E27FC236}">
-                <a16:creationId xmlns:a16="http://schemas.microsoft.com/office/drawing/2014/main" id="{199A2CA2-FA7E-463F-88BC-87910C3AA22D}"/>
+                <a16:creationId xmlns:a16="http://schemas.microsoft.com/office/drawing/2014/main" id="{C2F9AE7C-F901-4B69-B59A-D56441858D13}"/>
               </a:ext>
             </a:extLst>
           </p:cNvPr>
@@ -21026,7 +22184,7 @@
           <p:cNvPr id="25" name="">
             <a:extLst xmlns:a="http://schemas.openxmlformats.org/drawingml/2006/main">
               <a:ext uri="{FF2B5EF4-FFF2-40B4-BE49-F238E27FC236}">
-                <a16:creationId xmlns:a16="http://schemas.microsoft.com/office/drawing/2014/main" id="{57895341-7D0D-4020-853D-0395934AF26D}"/>
+                <a16:creationId xmlns:a16="http://schemas.microsoft.com/office/drawing/2014/main" id="{55E72CA3-920E-43D7-8615-7A7F429912DC}"/>
               </a:ext>
             </a:extLst>
           </p:cNvPr>
@@ -21059,7 +22217,7 @@
           <p:cNvPr id="26" name="">
             <a:extLst xmlns:a="http://schemas.openxmlformats.org/drawingml/2006/main">
               <a:ext uri="{FF2B5EF4-FFF2-40B4-BE49-F238E27FC236}">
-                <a16:creationId xmlns:a16="http://schemas.microsoft.com/office/drawing/2014/main" id="{976056E8-A522-4DC9-8A6E-FD8B7BE6A4E9}"/>
+                <a16:creationId xmlns:a16="http://schemas.microsoft.com/office/drawing/2014/main" id="{3E6AC004-E840-4371-8B48-0AFB2C6AFB02}"/>
               </a:ext>
             </a:extLst>
           </p:cNvPr>
@@ -21094,7 +22252,7 @@
           <p:cNvPr id="27" name="">
             <a:extLst xmlns:a="http://schemas.openxmlformats.org/drawingml/2006/main">
               <a:ext uri="{FF2B5EF4-FFF2-40B4-BE49-F238E27FC236}">
-                <a16:creationId xmlns:a16="http://schemas.microsoft.com/office/drawing/2014/main" id="{4C1DD40F-3B63-4B0D-BF24-EBC762757297}"/>
+                <a16:creationId xmlns:a16="http://schemas.microsoft.com/office/drawing/2014/main" id="{4F041908-236C-4C59-BA1D-1AC8139A2D26}"/>
               </a:ext>
             </a:extLst>
           </p:cNvPr>
@@ -21158,7 +22316,7 @@
           <p:cNvPr id="28" name="">
             <a:extLst xmlns:a="http://schemas.openxmlformats.org/drawingml/2006/main">
               <a:ext uri="{FF2B5EF4-FFF2-40B4-BE49-F238E27FC236}">
-                <a16:creationId xmlns:a16="http://schemas.microsoft.com/office/drawing/2014/main" id="{140698F6-8424-4AF5-A9FF-F2168E1DD821}"/>
+                <a16:creationId xmlns:a16="http://schemas.microsoft.com/office/drawing/2014/main" id="{0586428B-71E1-4095-9C3D-8C0EABA202DB}"/>
               </a:ext>
             </a:extLst>
           </p:cNvPr>
@@ -21222,7 +22380,7 @@
           <p:cNvPr id="29" name="">
             <a:extLst xmlns:a="http://schemas.openxmlformats.org/drawingml/2006/main">
               <a:ext uri="{FF2B5EF4-FFF2-40B4-BE49-F238E27FC236}">
-                <a16:creationId xmlns:a16="http://schemas.microsoft.com/office/drawing/2014/main" id="{7B0A1669-014A-4EE6-A4EF-12E1A5408817}"/>
+                <a16:creationId xmlns:a16="http://schemas.microsoft.com/office/drawing/2014/main" id="{812D32F6-161E-4D56-AE85-ED6E87538A46}"/>
               </a:ext>
             </a:extLst>
           </p:cNvPr>
@@ -21255,7 +22413,7 @@
           <p:cNvPr id="30" name="">
             <a:extLst xmlns:a="http://schemas.openxmlformats.org/drawingml/2006/main">
               <a:ext uri="{FF2B5EF4-FFF2-40B4-BE49-F238E27FC236}">
-                <a16:creationId xmlns:a16="http://schemas.microsoft.com/office/drawing/2014/main" id="{065AF5F1-AEBD-49D9-8773-EA009722D0E8}"/>
+                <a16:creationId xmlns:a16="http://schemas.microsoft.com/office/drawing/2014/main" id="{DD91532D-0A07-4F85-835E-9CA9BBB0D9F7}"/>
               </a:ext>
             </a:extLst>
           </p:cNvPr>
@@ -21290,7 +22448,7 @@
           <p:cNvPr id="31" name="">
             <a:extLst xmlns:a="http://schemas.openxmlformats.org/drawingml/2006/main">
               <a:ext uri="{FF2B5EF4-FFF2-40B4-BE49-F238E27FC236}">
-                <a16:creationId xmlns:a16="http://schemas.microsoft.com/office/drawing/2014/main" id="{6C28E587-F402-4469-9B96-8F17B389A4A7}"/>
+                <a16:creationId xmlns:a16="http://schemas.microsoft.com/office/drawing/2014/main" id="{FC72F0DB-B633-4E6B-A05D-140C9E8FB888}"/>
               </a:ext>
             </a:extLst>
           </p:cNvPr>
@@ -21354,7 +22512,7 @@
           <p:cNvPr id="32" name="">
             <a:extLst xmlns:a="http://schemas.openxmlformats.org/drawingml/2006/main">
               <a:ext uri="{FF2B5EF4-FFF2-40B4-BE49-F238E27FC236}">
-                <a16:creationId xmlns:a16="http://schemas.microsoft.com/office/drawing/2014/main" id="{954BECD3-59E5-42E3-B64F-EA7E3150550B}"/>
+                <a16:creationId xmlns:a16="http://schemas.microsoft.com/office/drawing/2014/main" id="{0271A840-4CEB-4A01-9E94-7BFC4B1956C5}"/>
               </a:ext>
             </a:extLst>
           </p:cNvPr>
@@ -21418,7 +22576,7 @@
           <p:cNvPr id="33" name="">
             <a:extLst xmlns:a="http://schemas.openxmlformats.org/drawingml/2006/main">
               <a:ext uri="{FF2B5EF4-FFF2-40B4-BE49-F238E27FC236}">
-                <a16:creationId xmlns:a16="http://schemas.microsoft.com/office/drawing/2014/main" id="{7456E12E-F931-47F5-8988-B9523100F3F3}"/>
+                <a16:creationId xmlns:a16="http://schemas.microsoft.com/office/drawing/2014/main" id="{8C165F84-5A76-4A8E-9425-19886551BB16}"/>
               </a:ext>
             </a:extLst>
           </p:cNvPr>
@@ -21451,7 +22609,7 @@
           <p:cNvPr id="34" name="">
             <a:extLst xmlns:a="http://schemas.openxmlformats.org/drawingml/2006/main">
               <a:ext uri="{FF2B5EF4-FFF2-40B4-BE49-F238E27FC236}">
-                <a16:creationId xmlns:a16="http://schemas.microsoft.com/office/drawing/2014/main" id="{45256BDE-7FE4-4465-9C54-06808A8CDDEC}"/>
+                <a16:creationId xmlns:a16="http://schemas.microsoft.com/office/drawing/2014/main" id="{9CEA9729-D6DB-4F92-859F-F4D27B4A908A}"/>
               </a:ext>
             </a:extLst>
           </p:cNvPr>
@@ -21486,7 +22644,7 @@
           <p:cNvPr id="35" name="">
             <a:extLst xmlns:a="http://schemas.openxmlformats.org/drawingml/2006/main">
               <a:ext uri="{FF2B5EF4-FFF2-40B4-BE49-F238E27FC236}">
-                <a16:creationId xmlns:a16="http://schemas.microsoft.com/office/drawing/2014/main" id="{DEAA4EB7-FA07-41E7-A33C-2EB431E62367}"/>
+                <a16:creationId xmlns:a16="http://schemas.microsoft.com/office/drawing/2014/main" id="{EC449ACB-D61B-4C6A-BBA4-C8446168E09B}"/>
               </a:ext>
             </a:extLst>
           </p:cNvPr>
@@ -21550,7 +22708,7 @@
           <p:cNvPr id="36" name="">
             <a:extLst xmlns:a="http://schemas.openxmlformats.org/drawingml/2006/main">
               <a:ext uri="{FF2B5EF4-FFF2-40B4-BE49-F238E27FC236}">
-                <a16:creationId xmlns:a16="http://schemas.microsoft.com/office/drawing/2014/main" id="{DFE09554-61F9-492A-8B1D-B64D2C68ED3F}"/>
+                <a16:creationId xmlns:a16="http://schemas.microsoft.com/office/drawing/2014/main" id="{0CCEB05F-62EC-47E5-9FC1-4EDA552DA149}"/>
               </a:ext>
             </a:extLst>
           </p:cNvPr>
@@ -21612,7 +22770,7 @@
     </p:spTree>
     <p:extLst>
       <p:ext uri="{BB962C8B-B14F-4D97-AF65-F5344CB8AC3E}">
-        <p14:creationId xmlns:p14="http://schemas.microsoft.com/office/powerpoint/2010/main" val="1769062119"/>
+        <p14:creationId xmlns:p14="http://schemas.microsoft.com/office/powerpoint/2010/main" val="390113100"/>
       </p:ext>
     </p:extLst>
   </p:cSld>
@@ -21643,7 +22801,7 @@
           <p:cNvPr id="1" name="">
             <a:extLst xmlns:a="http://schemas.openxmlformats.org/drawingml/2006/main">
               <a:ext uri="{FF2B5EF4-FFF2-40B4-BE49-F238E27FC236}">
-                <a16:creationId xmlns:a16="http://schemas.microsoft.com/office/drawing/2014/main" id="{DD847A5F-9FF1-4B0A-8794-1B090E5E0A29}"/>
+                <a16:creationId xmlns:a16="http://schemas.microsoft.com/office/drawing/2014/main" id="{D0139877-F88D-4AF2-8F25-ADC3454F52E7}"/>
               </a:ext>
             </a:extLst>
           </p:cNvPr>
@@ -21678,7 +22836,7 @@
           <p:cNvPr id="2" name="">
             <a:extLst xmlns:a="http://schemas.openxmlformats.org/drawingml/2006/main">
               <a:ext uri="{FF2B5EF4-FFF2-40B4-BE49-F238E27FC236}">
-                <a16:creationId xmlns:a16="http://schemas.microsoft.com/office/drawing/2014/main" id="{A6F70043-FD0C-48F2-AAE5-4CCDB4A45E67}"/>
+                <a16:creationId xmlns:a16="http://schemas.microsoft.com/office/drawing/2014/main" id="{87142063-5CFC-47DB-BFBF-E0EC111C8B17}"/>
               </a:ext>
             </a:extLst>
           </p:cNvPr>
@@ -21742,7 +22900,7 @@
           <p:cNvPr id="3" name="">
             <a:extLst xmlns:a="http://schemas.openxmlformats.org/drawingml/2006/main">
               <a:ext uri="{FF2B5EF4-FFF2-40B4-BE49-F238E27FC236}">
-                <a16:creationId xmlns:a16="http://schemas.microsoft.com/office/drawing/2014/main" id="{AEFD94EF-800B-447A-A3F7-32B741252A35}"/>
+                <a16:creationId xmlns:a16="http://schemas.microsoft.com/office/drawing/2014/main" id="{7BC2049F-125B-4918-AAE8-039474FDEBDE}"/>
               </a:ext>
             </a:extLst>
           </p:cNvPr>
@@ -21806,7 +22964,7 @@
           <p:cNvPr id="4" name="">
             <a:extLst xmlns:a="http://schemas.openxmlformats.org/drawingml/2006/main">
               <a:ext uri="{FF2B5EF4-FFF2-40B4-BE49-F238E27FC236}">
-                <a16:creationId xmlns:a16="http://schemas.microsoft.com/office/drawing/2014/main" id="{75973826-4047-4C60-AAE1-F0B44D1972BB}"/>
+                <a16:creationId xmlns:a16="http://schemas.microsoft.com/office/drawing/2014/main" id="{B59D1C61-0C93-4F47-9CCD-4111AC4E3197}"/>
               </a:ext>
             </a:extLst>
           </p:cNvPr>
@@ -21870,7 +23028,7 @@
           <p:cNvPr id="5" name="">
             <a:extLst xmlns:a="http://schemas.openxmlformats.org/drawingml/2006/main">
               <a:ext uri="{FF2B5EF4-FFF2-40B4-BE49-F238E27FC236}">
-                <a16:creationId xmlns:a16="http://schemas.microsoft.com/office/drawing/2014/main" id="{74FFC8E2-6BE2-4BDD-B796-E0177B726F3D}"/>
+                <a16:creationId xmlns:a16="http://schemas.microsoft.com/office/drawing/2014/main" id="{45CFAA1B-CEF5-4A56-98C2-81D84AE55710}"/>
               </a:ext>
             </a:extLst>
           </p:cNvPr>
@@ -21934,7 +23092,7 @@
           <p:cNvPr id="6" name="">
             <a:extLst xmlns:a="http://schemas.openxmlformats.org/drawingml/2006/main">
               <a:ext uri="{FF2B5EF4-FFF2-40B4-BE49-F238E27FC236}">
-                <a16:creationId xmlns:a16="http://schemas.microsoft.com/office/drawing/2014/main" id="{7C611D40-E0BB-4249-A5B1-391AED204116}"/>
+                <a16:creationId xmlns:a16="http://schemas.microsoft.com/office/drawing/2014/main" id="{06A5420D-EECF-4597-BAFD-DC325E4A5EB7}"/>
               </a:ext>
             </a:extLst>
           </p:cNvPr>
@@ -21967,7 +23125,7 @@
           <p:cNvPr id="7" name="">
             <a:extLst xmlns:a="http://schemas.openxmlformats.org/drawingml/2006/main">
               <a:ext uri="{FF2B5EF4-FFF2-40B4-BE49-F238E27FC236}">
-                <a16:creationId xmlns:a16="http://schemas.microsoft.com/office/drawing/2014/main" id="{07E3BA7A-0F1F-457B-8CB9-199EC03AC462}"/>
+                <a16:creationId xmlns:a16="http://schemas.microsoft.com/office/drawing/2014/main" id="{CDF779E7-D238-4364-859A-0F8B852F26D0}"/>
               </a:ext>
             </a:extLst>
           </p:cNvPr>
@@ -22002,7 +23160,7 @@
           <p:cNvPr id="8" name="">
             <a:extLst xmlns:a="http://schemas.openxmlformats.org/drawingml/2006/main">
               <a:ext uri="{FF2B5EF4-FFF2-40B4-BE49-F238E27FC236}">
-                <a16:creationId xmlns:a16="http://schemas.microsoft.com/office/drawing/2014/main" id="{9866D062-70E9-4F3D-A347-95BB678A7485}"/>
+                <a16:creationId xmlns:a16="http://schemas.microsoft.com/office/drawing/2014/main" id="{38D436CE-396C-497B-8148-470494C7E5C6}"/>
               </a:ext>
             </a:extLst>
           </p:cNvPr>
@@ -22066,7 +23224,7 @@
           <p:cNvPr id="9" name="">
             <a:extLst xmlns:a="http://schemas.openxmlformats.org/drawingml/2006/main">
               <a:ext uri="{FF2B5EF4-FFF2-40B4-BE49-F238E27FC236}">
-                <a16:creationId xmlns:a16="http://schemas.microsoft.com/office/drawing/2014/main" id="{EDEBBBA0-C506-423A-A96A-F6455618E51A}"/>
+                <a16:creationId xmlns:a16="http://schemas.microsoft.com/office/drawing/2014/main" id="{53D0C14C-AC8C-4946-8736-977201EF3207}"/>
               </a:ext>
             </a:extLst>
           </p:cNvPr>
@@ -22176,7 +23334,7 @@
           <p:cNvPr id="10" name="">
             <a:extLst xmlns:a="http://schemas.openxmlformats.org/drawingml/2006/main">
               <a:ext uri="{FF2B5EF4-FFF2-40B4-BE49-F238E27FC236}">
-                <a16:creationId xmlns:a16="http://schemas.microsoft.com/office/drawing/2014/main" id="{05276469-ED0C-4615-BB48-5C20DA790A59}"/>
+                <a16:creationId xmlns:a16="http://schemas.microsoft.com/office/drawing/2014/main" id="{9B38219A-E6DE-4A96-898C-1664DF312065}"/>
               </a:ext>
             </a:extLst>
           </p:cNvPr>
@@ -22209,7 +23367,7 @@
           <p:cNvPr id="11" name="">
             <a:extLst xmlns:a="http://schemas.openxmlformats.org/drawingml/2006/main">
               <a:ext uri="{FF2B5EF4-FFF2-40B4-BE49-F238E27FC236}">
-                <a16:creationId xmlns:a16="http://schemas.microsoft.com/office/drawing/2014/main" id="{F8BE2B5A-EEB7-4A13-996A-915AF140A6F8}"/>
+                <a16:creationId xmlns:a16="http://schemas.microsoft.com/office/drawing/2014/main" id="{249EB44F-3306-428A-8CA1-94565D380088}"/>
               </a:ext>
             </a:extLst>
           </p:cNvPr>
@@ -22244,7 +23402,7 @@
           <p:cNvPr id="12" name="">
             <a:extLst xmlns:a="http://schemas.openxmlformats.org/drawingml/2006/main">
               <a:ext uri="{FF2B5EF4-FFF2-40B4-BE49-F238E27FC236}">
-                <a16:creationId xmlns:a16="http://schemas.microsoft.com/office/drawing/2014/main" id="{20E4CBDC-C5DC-4893-A1AF-9B9049258A8A}"/>
+                <a16:creationId xmlns:a16="http://schemas.microsoft.com/office/drawing/2014/main" id="{5B55C754-B3CF-4903-8364-19BEC64AB176}"/>
               </a:ext>
             </a:extLst>
           </p:cNvPr>
@@ -22308,7 +23466,7 @@
           <p:cNvPr id="13" name="">
             <a:extLst xmlns:a="http://schemas.openxmlformats.org/drawingml/2006/main">
               <a:ext uri="{FF2B5EF4-FFF2-40B4-BE49-F238E27FC236}">
-                <a16:creationId xmlns:a16="http://schemas.microsoft.com/office/drawing/2014/main" id="{13539E6C-EA8A-4689-9DE4-E9AEE5F2AAA7}"/>
+                <a16:creationId xmlns:a16="http://schemas.microsoft.com/office/drawing/2014/main" id="{A8B67D20-347A-47E9-9485-9F521E8CF21E}"/>
               </a:ext>
             </a:extLst>
           </p:cNvPr>
@@ -22418,7 +23576,7 @@
           <p:cNvPr id="14" name="">
             <a:extLst xmlns:a="http://schemas.openxmlformats.org/drawingml/2006/main">
               <a:ext uri="{FF2B5EF4-FFF2-40B4-BE49-F238E27FC236}">
-                <a16:creationId xmlns:a16="http://schemas.microsoft.com/office/drawing/2014/main" id="{A4E6A1D8-A81C-4048-833F-A5B85D9FB503}"/>
+                <a16:creationId xmlns:a16="http://schemas.microsoft.com/office/drawing/2014/main" id="{0C1E921B-8EF4-4A6E-AE11-EED5E89E1DA6}"/>
               </a:ext>
             </a:extLst>
           </p:cNvPr>
@@ -22451,7 +23609,7 @@
           <p:cNvPr id="15" name="">
             <a:extLst xmlns:a="http://schemas.openxmlformats.org/drawingml/2006/main">
               <a:ext uri="{FF2B5EF4-FFF2-40B4-BE49-F238E27FC236}">
-                <a16:creationId xmlns:a16="http://schemas.microsoft.com/office/drawing/2014/main" id="{F7AD20AB-B871-4B57-8DA6-15442DB292A0}"/>
+                <a16:creationId xmlns:a16="http://schemas.microsoft.com/office/drawing/2014/main" id="{451ADA70-234A-4B14-AE0B-C016B6EDDC9F}"/>
               </a:ext>
             </a:extLst>
           </p:cNvPr>
@@ -22486,7 +23644,7 @@
           <p:cNvPr id="16" name="">
             <a:extLst xmlns:a="http://schemas.openxmlformats.org/drawingml/2006/main">
               <a:ext uri="{FF2B5EF4-FFF2-40B4-BE49-F238E27FC236}">
-                <a16:creationId xmlns:a16="http://schemas.microsoft.com/office/drawing/2014/main" id="{BBD94DE7-F8BB-4807-8402-BF3DFB958CE5}"/>
+                <a16:creationId xmlns:a16="http://schemas.microsoft.com/office/drawing/2014/main" id="{096D0ECF-F808-436A-B711-B6426D148C8A}"/>
               </a:ext>
             </a:extLst>
           </p:cNvPr>
@@ -22550,7 +23708,7 @@
           <p:cNvPr id="17" name="">
             <a:extLst xmlns:a="http://schemas.openxmlformats.org/drawingml/2006/main">
               <a:ext uri="{FF2B5EF4-FFF2-40B4-BE49-F238E27FC236}">
-                <a16:creationId xmlns:a16="http://schemas.microsoft.com/office/drawing/2014/main" id="{70D1FCC6-5A18-49AA-9F5F-84D946BDF7CF}"/>
+                <a16:creationId xmlns:a16="http://schemas.microsoft.com/office/drawing/2014/main" id="{6CE33ECA-0A39-4201-915C-0FDA31EF904B}"/>
               </a:ext>
             </a:extLst>
           </p:cNvPr>
@@ -22683,7 +23841,7 @@
           <p:cNvPr id="18" name="">
             <a:extLst xmlns:a="http://schemas.openxmlformats.org/drawingml/2006/main">
               <a:ext uri="{FF2B5EF4-FFF2-40B4-BE49-F238E27FC236}">
-                <a16:creationId xmlns:a16="http://schemas.microsoft.com/office/drawing/2014/main" id="{856D1D3E-CCC7-48B4-BDA6-16DE1D41435F}"/>
+                <a16:creationId xmlns:a16="http://schemas.microsoft.com/office/drawing/2014/main" id="{8D0AB76C-35F4-4115-AF68-B5DFC9659211}"/>
               </a:ext>
             </a:extLst>
           </p:cNvPr>
@@ -22716,7 +23874,7 @@
           <p:cNvPr id="19" name="">
             <a:extLst xmlns:a="http://schemas.openxmlformats.org/drawingml/2006/main">
               <a:ext uri="{FF2B5EF4-FFF2-40B4-BE49-F238E27FC236}">
-                <a16:creationId xmlns:a16="http://schemas.microsoft.com/office/drawing/2014/main" id="{37541910-B0F0-4120-B2C7-9E611EDDAA53}"/>
+                <a16:creationId xmlns:a16="http://schemas.microsoft.com/office/drawing/2014/main" id="{E62A5933-F155-4A0D-971B-D2F62C2684C6}"/>
               </a:ext>
             </a:extLst>
           </p:cNvPr>
@@ -22751,7 +23909,7 @@
           <p:cNvPr id="20" name="">
             <a:extLst xmlns:a="http://schemas.openxmlformats.org/drawingml/2006/main">
               <a:ext uri="{FF2B5EF4-FFF2-40B4-BE49-F238E27FC236}">
-                <a16:creationId xmlns:a16="http://schemas.microsoft.com/office/drawing/2014/main" id="{456E64BF-C4C4-4753-B930-B9CB9B2BFAEE}"/>
+                <a16:creationId xmlns:a16="http://schemas.microsoft.com/office/drawing/2014/main" id="{681258F2-1BE8-45A6-A81E-6A685EE9F773}"/>
               </a:ext>
             </a:extLst>
           </p:cNvPr>
@@ -22815,7 +23973,7 @@
           <p:cNvPr id="21" name="">
             <a:extLst xmlns:a="http://schemas.openxmlformats.org/drawingml/2006/main">
               <a:ext uri="{FF2B5EF4-FFF2-40B4-BE49-F238E27FC236}">
-                <a16:creationId xmlns:a16="http://schemas.microsoft.com/office/drawing/2014/main" id="{8EC21824-C34D-42E4-BFFA-00980790D3A7}"/>
+                <a16:creationId xmlns:a16="http://schemas.microsoft.com/office/drawing/2014/main" id="{B7A144F4-1C0A-45BF-9829-13791FDBB094}"/>
               </a:ext>
             </a:extLst>
           </p:cNvPr>
@@ -22902,7 +24060,7 @@
           <p:cNvPr id="22" name="">
             <a:extLst xmlns:a="http://schemas.openxmlformats.org/drawingml/2006/main">
               <a:ext uri="{FF2B5EF4-FFF2-40B4-BE49-F238E27FC236}">
-                <a16:creationId xmlns:a16="http://schemas.microsoft.com/office/drawing/2014/main" id="{762198D1-09F6-467D-8D0D-6B5EBE413926}"/>
+                <a16:creationId xmlns:a16="http://schemas.microsoft.com/office/drawing/2014/main" id="{F15E4077-6B97-447A-938F-B74C7FEC3271}"/>
               </a:ext>
             </a:extLst>
           </p:cNvPr>
@@ -22935,7 +24093,7 @@
           <p:cNvPr id="23" name="">
             <a:extLst xmlns:a="http://schemas.openxmlformats.org/drawingml/2006/main">
               <a:ext uri="{FF2B5EF4-FFF2-40B4-BE49-F238E27FC236}">
-                <a16:creationId xmlns:a16="http://schemas.microsoft.com/office/drawing/2014/main" id="{3F9E81A7-2E2C-4137-BE98-24B70285DBFB}"/>
+                <a16:creationId xmlns:a16="http://schemas.microsoft.com/office/drawing/2014/main" id="{F8869DFD-2D1B-4180-8BB8-4C8E95667596}"/>
               </a:ext>
             </a:extLst>
           </p:cNvPr>
@@ -22970,7 +24128,7 @@
           <p:cNvPr id="24" name="">
             <a:extLst xmlns:a="http://schemas.openxmlformats.org/drawingml/2006/main">
               <a:ext uri="{FF2B5EF4-FFF2-40B4-BE49-F238E27FC236}">
-                <a16:creationId xmlns:a16="http://schemas.microsoft.com/office/drawing/2014/main" id="{9403C669-F62A-4A8D-9C47-D66BE6E26780}"/>
+                <a16:creationId xmlns:a16="http://schemas.microsoft.com/office/drawing/2014/main" id="{3004C8E7-6C65-45AE-9907-A3FB1A4C993D}"/>
               </a:ext>
             </a:extLst>
           </p:cNvPr>
@@ -23034,7 +24192,7 @@
           <p:cNvPr id="25" name="">
             <a:extLst xmlns:a="http://schemas.openxmlformats.org/drawingml/2006/main">
               <a:ext uri="{FF2B5EF4-FFF2-40B4-BE49-F238E27FC236}">
-                <a16:creationId xmlns:a16="http://schemas.microsoft.com/office/drawing/2014/main" id="{750508EC-3FAC-4AF1-AC72-8C2ADE9AE881}"/>
+                <a16:creationId xmlns:a16="http://schemas.microsoft.com/office/drawing/2014/main" id="{AF2DF9BA-A233-4779-80A8-01680C659F2E}"/>
               </a:ext>
             </a:extLst>
           </p:cNvPr>
@@ -23096,7 +24254,7 @@
     </p:spTree>
     <p:extLst>
       <p:ext uri="{BB962C8B-B14F-4D97-AF65-F5344CB8AC3E}">
-        <p14:creationId xmlns:p14="http://schemas.microsoft.com/office/powerpoint/2010/main" val="2068566272"/>
+        <p14:creationId xmlns:p14="http://schemas.microsoft.com/office/powerpoint/2010/main" val="1781323338"/>
       </p:ext>
     </p:extLst>
   </p:cSld>
@@ -23127,7 +24285,7 @@
           <p:cNvPr id="1" name="">
             <a:extLst xmlns:a="http://schemas.openxmlformats.org/drawingml/2006/main">
               <a:ext uri="{FF2B5EF4-FFF2-40B4-BE49-F238E27FC236}">
-                <a16:creationId xmlns:a16="http://schemas.microsoft.com/office/drawing/2014/main" id="{A6CC1A07-C9CE-41D2-909F-4DA517F9FB89}"/>
+                <a16:creationId xmlns:a16="http://schemas.microsoft.com/office/drawing/2014/main" id="{D45C1574-9763-4CC9-A92B-85B94E66711C}"/>
               </a:ext>
             </a:extLst>
           </p:cNvPr>
@@ -23162,7 +24320,7 @@
           <p:cNvPr id="2" name="">
             <a:extLst xmlns:a="http://schemas.openxmlformats.org/drawingml/2006/main">
               <a:ext uri="{FF2B5EF4-FFF2-40B4-BE49-F238E27FC236}">
-                <a16:creationId xmlns:a16="http://schemas.microsoft.com/office/drawing/2014/main" id="{0595BD2C-887B-46B5-9494-F33909FC437F}"/>
+                <a16:creationId xmlns:a16="http://schemas.microsoft.com/office/drawing/2014/main" id="{F5DACD6A-1DC7-44C8-9F34-35F6ED6126E5}"/>
               </a:ext>
             </a:extLst>
           </p:cNvPr>
@@ -23226,7 +24384,7 @@
           <p:cNvPr id="3" name="">
             <a:extLst xmlns:a="http://schemas.openxmlformats.org/drawingml/2006/main">
               <a:ext uri="{FF2B5EF4-FFF2-40B4-BE49-F238E27FC236}">
-                <a16:creationId xmlns:a16="http://schemas.microsoft.com/office/drawing/2014/main" id="{32893184-5DA1-416B-8BED-AFB144E94EDD}"/>
+                <a16:creationId xmlns:a16="http://schemas.microsoft.com/office/drawing/2014/main" id="{8D559C09-4EAF-4549-8309-6EBF83400C33}"/>
               </a:ext>
             </a:extLst>
           </p:cNvPr>
@@ -23290,7 +24448,7 @@
           <p:cNvPr id="4" name="">
             <a:extLst xmlns:a="http://schemas.openxmlformats.org/drawingml/2006/main">
               <a:ext uri="{FF2B5EF4-FFF2-40B4-BE49-F238E27FC236}">
-                <a16:creationId xmlns:a16="http://schemas.microsoft.com/office/drawing/2014/main" id="{E476D615-3E34-4D73-B0DB-2F218F421937}"/>
+                <a16:creationId xmlns:a16="http://schemas.microsoft.com/office/drawing/2014/main" id="{47C4E8FB-8F3B-49F0-998D-05D0933AB356}"/>
               </a:ext>
             </a:extLst>
           </p:cNvPr>
@@ -23354,7 +24512,7 @@
           <p:cNvPr id="5" name="">
             <a:extLst xmlns:a="http://schemas.openxmlformats.org/drawingml/2006/main">
               <a:ext uri="{FF2B5EF4-FFF2-40B4-BE49-F238E27FC236}">
-                <a16:creationId xmlns:a16="http://schemas.microsoft.com/office/drawing/2014/main" id="{5110A7D1-FBB4-4B45-A2C3-16440E4268FD}"/>
+                <a16:creationId xmlns:a16="http://schemas.microsoft.com/office/drawing/2014/main" id="{23EEE3CD-DCDF-4D96-A55E-0DD18FA2F8E7}"/>
               </a:ext>
             </a:extLst>
           </p:cNvPr>
@@ -23418,7 +24576,7 @@
           <p:cNvPr id="6" name="">
             <a:extLst xmlns:a="http://schemas.openxmlformats.org/drawingml/2006/main">
               <a:ext uri="{FF2B5EF4-FFF2-40B4-BE49-F238E27FC236}">
-                <a16:creationId xmlns:a16="http://schemas.microsoft.com/office/drawing/2014/main" id="{46FAE55E-5929-4B97-B069-1AD61EB03FE7}"/>
+                <a16:creationId xmlns:a16="http://schemas.microsoft.com/office/drawing/2014/main" id="{6D7C4CDD-74AB-45CA-982A-2AAEC8FAB5EC}"/>
               </a:ext>
             </a:extLst>
           </p:cNvPr>
@@ -23451,7 +24609,7 @@
           <p:cNvPr id="7" name="">
             <a:extLst xmlns:a="http://schemas.openxmlformats.org/drawingml/2006/main">
               <a:ext uri="{FF2B5EF4-FFF2-40B4-BE49-F238E27FC236}">
-                <a16:creationId xmlns:a16="http://schemas.microsoft.com/office/drawing/2014/main" id="{0A665D88-2436-433F-9A64-78483C46AD94}"/>
+                <a16:creationId xmlns:a16="http://schemas.microsoft.com/office/drawing/2014/main" id="{60AFAF90-A7DA-41AE-BD98-F9CBF12E3697}"/>
               </a:ext>
             </a:extLst>
           </p:cNvPr>
@@ -23486,7 +24644,7 @@
           <p:cNvPr id="8" name="">
             <a:extLst xmlns:a="http://schemas.openxmlformats.org/drawingml/2006/main">
               <a:ext uri="{FF2B5EF4-FFF2-40B4-BE49-F238E27FC236}">
-                <a16:creationId xmlns:a16="http://schemas.microsoft.com/office/drawing/2014/main" id="{A6EB1729-6EAE-4A41-91EC-73CD25D4A833}"/>
+                <a16:creationId xmlns:a16="http://schemas.microsoft.com/office/drawing/2014/main" id="{8A31BA01-EC92-4449-ADA4-8C7F324EC4CF}"/>
               </a:ext>
             </a:extLst>
           </p:cNvPr>
@@ -23550,7 +24708,7 @@
           <p:cNvPr id="9" name="">
             <a:extLst xmlns:a="http://schemas.openxmlformats.org/drawingml/2006/main">
               <a:ext uri="{FF2B5EF4-FFF2-40B4-BE49-F238E27FC236}">
-                <a16:creationId xmlns:a16="http://schemas.microsoft.com/office/drawing/2014/main" id="{66039358-B5CB-4DC8-9C44-B55DA85947BA}"/>
+                <a16:creationId xmlns:a16="http://schemas.microsoft.com/office/drawing/2014/main" id="{2901B194-B2F0-4E66-A43C-E31D41550574}"/>
               </a:ext>
             </a:extLst>
           </p:cNvPr>
@@ -23614,7 +24772,7 @@
           <p:cNvPr id="10" name="">
             <a:extLst xmlns:a="http://schemas.openxmlformats.org/drawingml/2006/main">
               <a:ext uri="{FF2B5EF4-FFF2-40B4-BE49-F238E27FC236}">
-                <a16:creationId xmlns:a16="http://schemas.microsoft.com/office/drawing/2014/main" id="{A11A9982-0E4A-4B46-B1A6-996DCE0A27E4}"/>
+                <a16:creationId xmlns:a16="http://schemas.microsoft.com/office/drawing/2014/main" id="{8337BF57-FAD3-42E7-AC78-6F81BB9D8473}"/>
               </a:ext>
             </a:extLst>
           </p:cNvPr>
@@ -23647,7 +24805,7 @@
           <p:cNvPr id="11" name="">
             <a:extLst xmlns:a="http://schemas.openxmlformats.org/drawingml/2006/main">
               <a:ext uri="{FF2B5EF4-FFF2-40B4-BE49-F238E27FC236}">
-                <a16:creationId xmlns:a16="http://schemas.microsoft.com/office/drawing/2014/main" id="{7ADB5E31-852E-41F0-A56E-2255A46EA6D5}"/>
+                <a16:creationId xmlns:a16="http://schemas.microsoft.com/office/drawing/2014/main" id="{D4A58222-DE04-4CFD-A2CE-655ABA885197}"/>
               </a:ext>
             </a:extLst>
           </p:cNvPr>
@@ -23682,7 +24840,7 @@
           <p:cNvPr id="12" name="">
             <a:extLst xmlns:a="http://schemas.openxmlformats.org/drawingml/2006/main">
               <a:ext uri="{FF2B5EF4-FFF2-40B4-BE49-F238E27FC236}">
-                <a16:creationId xmlns:a16="http://schemas.microsoft.com/office/drawing/2014/main" id="{BBFD3C8B-4A3B-4542-8B5B-ACCCF4A305EF}"/>
+                <a16:creationId xmlns:a16="http://schemas.microsoft.com/office/drawing/2014/main" id="{3B809BC1-E66A-44CD-B698-5941634013B1}"/>
               </a:ext>
             </a:extLst>
           </p:cNvPr>
@@ -23746,7 +24904,7 @@
           <p:cNvPr id="13" name="">
             <a:extLst xmlns:a="http://schemas.openxmlformats.org/drawingml/2006/main">
               <a:ext uri="{FF2B5EF4-FFF2-40B4-BE49-F238E27FC236}">
-                <a16:creationId xmlns:a16="http://schemas.microsoft.com/office/drawing/2014/main" id="{9E58D050-7A40-4907-83EF-658B769F9F54}"/>
+                <a16:creationId xmlns:a16="http://schemas.microsoft.com/office/drawing/2014/main" id="{E3BA82AB-0E23-4D69-B761-51A210C206FB}"/>
               </a:ext>
             </a:extLst>
           </p:cNvPr>
@@ -23810,7 +24968,7 @@
           <p:cNvPr id="14" name="">
             <a:extLst xmlns:a="http://schemas.openxmlformats.org/drawingml/2006/main">
               <a:ext uri="{FF2B5EF4-FFF2-40B4-BE49-F238E27FC236}">
-                <a16:creationId xmlns:a16="http://schemas.microsoft.com/office/drawing/2014/main" id="{50918ABE-D1D6-40BD-A077-AB02983328A7}"/>
+                <a16:creationId xmlns:a16="http://schemas.microsoft.com/office/drawing/2014/main" id="{E51A0C87-DFCD-447A-ADAE-788A718F6A10}"/>
               </a:ext>
             </a:extLst>
           </p:cNvPr>
@@ -23843,7 +25001,7 @@
           <p:cNvPr id="15" name="">
             <a:extLst xmlns:a="http://schemas.openxmlformats.org/drawingml/2006/main">
               <a:ext uri="{FF2B5EF4-FFF2-40B4-BE49-F238E27FC236}">
-                <a16:creationId xmlns:a16="http://schemas.microsoft.com/office/drawing/2014/main" id="{18258957-A158-49DD-8499-E969AFEBDB30}"/>
+                <a16:creationId xmlns:a16="http://schemas.microsoft.com/office/drawing/2014/main" id="{CE1B8C5E-04D9-4BED-B136-CADB30305D9C}"/>
               </a:ext>
             </a:extLst>
           </p:cNvPr>
@@ -23878,7 +25036,7 @@
           <p:cNvPr id="16" name="">
             <a:extLst xmlns:a="http://schemas.openxmlformats.org/drawingml/2006/main">
               <a:ext uri="{FF2B5EF4-FFF2-40B4-BE49-F238E27FC236}">
-                <a16:creationId xmlns:a16="http://schemas.microsoft.com/office/drawing/2014/main" id="{42591778-D17A-4B69-A26C-FDF3855785F3}"/>
+                <a16:creationId xmlns:a16="http://schemas.microsoft.com/office/drawing/2014/main" id="{D8CD7E26-C76A-4ED9-A37E-1FE8DF4DAF35}"/>
               </a:ext>
             </a:extLst>
           </p:cNvPr>
@@ -23942,7 +25100,7 @@
           <p:cNvPr id="17" name="">
             <a:extLst xmlns:a="http://schemas.openxmlformats.org/drawingml/2006/main">
               <a:ext uri="{FF2B5EF4-FFF2-40B4-BE49-F238E27FC236}">
-                <a16:creationId xmlns:a16="http://schemas.microsoft.com/office/drawing/2014/main" id="{FF1B662B-FEDD-4B6C-A688-74CEF121C6DE}"/>
+                <a16:creationId xmlns:a16="http://schemas.microsoft.com/office/drawing/2014/main" id="{B66EB2CE-E67A-4176-AB2B-13C1BE99B0E5}"/>
               </a:ext>
             </a:extLst>
           </p:cNvPr>
@@ -24006,7 +25164,7 @@
           <p:cNvPr id="18" name="">
             <a:extLst xmlns:a="http://schemas.openxmlformats.org/drawingml/2006/main">
               <a:ext uri="{FF2B5EF4-FFF2-40B4-BE49-F238E27FC236}">
-                <a16:creationId xmlns:a16="http://schemas.microsoft.com/office/drawing/2014/main" id="{4E4EE8FC-E6E1-4F08-BC1C-FB6D10FC0EE8}"/>
+                <a16:creationId xmlns:a16="http://schemas.microsoft.com/office/drawing/2014/main" id="{EE7049AE-7FB2-4A95-B0BE-998B9B6C4285}"/>
               </a:ext>
             </a:extLst>
           </p:cNvPr>
@@ -24041,7 +25199,7 @@
           <p:cNvPr id="19" name="">
             <a:extLst xmlns:a="http://schemas.openxmlformats.org/drawingml/2006/main">
               <a:ext uri="{FF2B5EF4-FFF2-40B4-BE49-F238E27FC236}">
-                <a16:creationId xmlns:a16="http://schemas.microsoft.com/office/drawing/2014/main" id="{D6C01ED5-56E4-45C8-8151-EB774B6F9707}"/>
+                <a16:creationId xmlns:a16="http://schemas.microsoft.com/office/drawing/2014/main" id="{125BE1C7-BF45-4580-8CC6-6AD131E1BC51}"/>
               </a:ext>
             </a:extLst>
           </p:cNvPr>
@@ -24105,7 +25263,7 @@
           <p:cNvPr id="20" name="">
             <a:extLst xmlns:a="http://schemas.openxmlformats.org/drawingml/2006/main">
               <a:ext uri="{FF2B5EF4-FFF2-40B4-BE49-F238E27FC236}">
-                <a16:creationId xmlns:a16="http://schemas.microsoft.com/office/drawing/2014/main" id="{657E2846-E4B5-4448-9222-DB9233D5F98F}"/>
+                <a16:creationId xmlns:a16="http://schemas.microsoft.com/office/drawing/2014/main" id="{ECC2089F-DF82-4C6A-A1CA-0A652B349EE4}"/>
               </a:ext>
             </a:extLst>
           </p:cNvPr>
@@ -24140,7 +25298,7 @@
           <p:cNvPr id="21" name="">
             <a:extLst xmlns:a="http://schemas.openxmlformats.org/drawingml/2006/main">
               <a:ext uri="{FF2B5EF4-FFF2-40B4-BE49-F238E27FC236}">
-                <a16:creationId xmlns:a16="http://schemas.microsoft.com/office/drawing/2014/main" id="{F76D96ED-544A-4F78-BDF8-4611A1370BA0}"/>
+                <a16:creationId xmlns:a16="http://schemas.microsoft.com/office/drawing/2014/main" id="{19B691D3-7957-499E-B251-F6FEBD188A3E}"/>
               </a:ext>
             </a:extLst>
           </p:cNvPr>
@@ -24202,7 +25360,7 @@
     </p:spTree>
     <p:extLst>
       <p:ext uri="{BB962C8B-B14F-4D97-AF65-F5344CB8AC3E}">
-        <p14:creationId xmlns:p14="http://schemas.microsoft.com/office/powerpoint/2010/main" val="939265099"/>
+        <p14:creationId xmlns:p14="http://schemas.microsoft.com/office/powerpoint/2010/main" val="1914962973"/>
       </p:ext>
     </p:extLst>
   </p:cSld>
@@ -24233,7 +25391,7 @@
           <p:cNvPr id="1" name="">
             <a:extLst xmlns:a="http://schemas.openxmlformats.org/drawingml/2006/main">
               <a:ext uri="{FF2B5EF4-FFF2-40B4-BE49-F238E27FC236}">
-                <a16:creationId xmlns:a16="http://schemas.microsoft.com/office/drawing/2014/main" id="{E007EDEC-84EA-436D-B7E1-27E33DE8F23E}"/>
+                <a16:creationId xmlns:a16="http://schemas.microsoft.com/office/drawing/2014/main" id="{33E7E2A6-BB58-479B-BAE5-23C0C9FB8D3E}"/>
               </a:ext>
             </a:extLst>
           </p:cNvPr>
@@ -24268,7 +25426,7 @@
           <p:cNvPr id="2" name="">
             <a:extLst xmlns:a="http://schemas.openxmlformats.org/drawingml/2006/main">
               <a:ext uri="{FF2B5EF4-FFF2-40B4-BE49-F238E27FC236}">
-                <a16:creationId xmlns:a16="http://schemas.microsoft.com/office/drawing/2014/main" id="{734A9F72-94F6-4117-8BC6-89C857C6A0B2}"/>
+                <a16:creationId xmlns:a16="http://schemas.microsoft.com/office/drawing/2014/main" id="{9BD4DE04-EB4D-4556-A7D7-841C5BFE3229}"/>
               </a:ext>
             </a:extLst>
           </p:cNvPr>
@@ -24332,7 +25490,7 @@
           <p:cNvPr id="3" name="">
             <a:extLst xmlns:a="http://schemas.openxmlformats.org/drawingml/2006/main">
               <a:ext uri="{FF2B5EF4-FFF2-40B4-BE49-F238E27FC236}">
-                <a16:creationId xmlns:a16="http://schemas.microsoft.com/office/drawing/2014/main" id="{EC2C4C5C-B285-4D6A-92B9-3BCC0ABC6BEE}"/>
+                <a16:creationId xmlns:a16="http://schemas.microsoft.com/office/drawing/2014/main" id="{AB72CBEC-B408-4907-B76C-7D1E2E0C46E4}"/>
               </a:ext>
             </a:extLst>
           </p:cNvPr>
@@ -24396,7 +25554,7 @@
           <p:cNvPr id="4" name="">
             <a:extLst xmlns:a="http://schemas.openxmlformats.org/drawingml/2006/main">
               <a:ext uri="{FF2B5EF4-FFF2-40B4-BE49-F238E27FC236}">
-                <a16:creationId xmlns:a16="http://schemas.microsoft.com/office/drawing/2014/main" id="{CB58D1C1-C3A9-48C3-929B-064E5800FE28}"/>
+                <a16:creationId xmlns:a16="http://schemas.microsoft.com/office/drawing/2014/main" id="{8BA7BBA6-B30F-4735-9B79-D117BA671355}"/>
               </a:ext>
             </a:extLst>
           </p:cNvPr>
@@ -24460,7 +25618,7 @@
           <p:cNvPr id="5" name="">
             <a:extLst xmlns:a="http://schemas.openxmlformats.org/drawingml/2006/main">
               <a:ext uri="{FF2B5EF4-FFF2-40B4-BE49-F238E27FC236}">
-                <a16:creationId xmlns:a16="http://schemas.microsoft.com/office/drawing/2014/main" id="{8CFDB39D-4F36-4AB8-9E36-0912C19A20B5}"/>
+                <a16:creationId xmlns:a16="http://schemas.microsoft.com/office/drawing/2014/main" id="{8B13498A-0403-479B-A1A7-6B30B873CA92}"/>
               </a:ext>
             </a:extLst>
           </p:cNvPr>
@@ -24524,7 +25682,7 @@
           <p:cNvPr id="6" name="">
             <a:extLst xmlns:a="http://schemas.openxmlformats.org/drawingml/2006/main">
               <a:ext uri="{FF2B5EF4-FFF2-40B4-BE49-F238E27FC236}">
-                <a16:creationId xmlns:a16="http://schemas.microsoft.com/office/drawing/2014/main" id="{38CCE91F-281E-413E-B07D-68B72EB4E301}"/>
+                <a16:creationId xmlns:a16="http://schemas.microsoft.com/office/drawing/2014/main" id="{CBCCA103-5029-42E4-9941-BE30860AF510}"/>
               </a:ext>
             </a:extLst>
           </p:cNvPr>
@@ -24557,7 +25715,7 @@
           <p:cNvPr id="7" name="">
             <a:extLst xmlns:a="http://schemas.openxmlformats.org/drawingml/2006/main">
               <a:ext uri="{FF2B5EF4-FFF2-40B4-BE49-F238E27FC236}">
-                <a16:creationId xmlns:a16="http://schemas.microsoft.com/office/drawing/2014/main" id="{88FBB052-6D9C-4E50-9993-786C2EE2EB0F}"/>
+                <a16:creationId xmlns:a16="http://schemas.microsoft.com/office/drawing/2014/main" id="{D34A64F4-6F32-4F1E-B34D-6A169357BE0F}"/>
               </a:ext>
             </a:extLst>
           </p:cNvPr>
@@ -24592,7 +25750,7 @@
           <p:cNvPr id="8" name="">
             <a:extLst xmlns:a="http://schemas.openxmlformats.org/drawingml/2006/main">
               <a:ext uri="{FF2B5EF4-FFF2-40B4-BE49-F238E27FC236}">
-                <a16:creationId xmlns:a16="http://schemas.microsoft.com/office/drawing/2014/main" id="{F653400F-5A14-4DE9-87F3-A509C05D0525}"/>
+                <a16:creationId xmlns:a16="http://schemas.microsoft.com/office/drawing/2014/main" id="{83BAED9A-69CB-4192-9E0C-6793F6D6F432}"/>
               </a:ext>
             </a:extLst>
           </p:cNvPr>
@@ -24656,7 +25814,7 @@
           <p:cNvPr id="9" name="">
             <a:extLst xmlns:a="http://schemas.openxmlformats.org/drawingml/2006/main">
               <a:ext uri="{FF2B5EF4-FFF2-40B4-BE49-F238E27FC236}">
-                <a16:creationId xmlns:a16="http://schemas.microsoft.com/office/drawing/2014/main" id="{D9932AA2-852F-4E49-8A9D-C32325BF9AC6}"/>
+                <a16:creationId xmlns:a16="http://schemas.microsoft.com/office/drawing/2014/main" id="{293BEA13-C40B-4B9A-B35C-E5007CE902C1}"/>
               </a:ext>
             </a:extLst>
           </p:cNvPr>
@@ -24702,7 +25860,7 @@
           <p:cNvPr id="10" name="">
             <a:extLst xmlns:a="http://schemas.openxmlformats.org/drawingml/2006/main">
               <a:ext uri="{FF2B5EF4-FFF2-40B4-BE49-F238E27FC236}">
-                <a16:creationId xmlns:a16="http://schemas.microsoft.com/office/drawing/2014/main" id="{E94C43C1-005F-4737-AACC-1AB7EB38D95C}"/>
+                <a16:creationId xmlns:a16="http://schemas.microsoft.com/office/drawing/2014/main" id="{C6DDD022-CB19-43F9-9760-F64EDE391E44}"/>
               </a:ext>
             </a:extLst>
           </p:cNvPr>
@@ -24735,7 +25893,7 @@
           <p:cNvPr id="11" name="">
             <a:extLst xmlns:a="http://schemas.openxmlformats.org/drawingml/2006/main">
               <a:ext uri="{FF2B5EF4-FFF2-40B4-BE49-F238E27FC236}">
-                <a16:creationId xmlns:a16="http://schemas.microsoft.com/office/drawing/2014/main" id="{5E39FE6A-4E2C-47A1-ABB3-D5F9579DB5A5}"/>
+                <a16:creationId xmlns:a16="http://schemas.microsoft.com/office/drawing/2014/main" id="{7232C1F4-E85E-409B-BC93-441296EBF418}"/>
               </a:ext>
             </a:extLst>
           </p:cNvPr>
@@ -24770,7 +25928,7 @@
           <p:cNvPr id="12" name="">
             <a:extLst xmlns:a="http://schemas.openxmlformats.org/drawingml/2006/main">
               <a:ext uri="{FF2B5EF4-FFF2-40B4-BE49-F238E27FC236}">
-                <a16:creationId xmlns:a16="http://schemas.microsoft.com/office/drawing/2014/main" id="{610A06E2-FE03-4AB1-A00F-59F5483BC6E5}"/>
+                <a16:creationId xmlns:a16="http://schemas.microsoft.com/office/drawing/2014/main" id="{4197E9FA-58E0-4520-93C9-66A6115646B4}"/>
               </a:ext>
             </a:extLst>
           </p:cNvPr>
@@ -24834,7 +25992,7 @@
           <p:cNvPr id="13" name="">
             <a:extLst xmlns:a="http://schemas.openxmlformats.org/drawingml/2006/main">
               <a:ext uri="{FF2B5EF4-FFF2-40B4-BE49-F238E27FC236}">
-                <a16:creationId xmlns:a16="http://schemas.microsoft.com/office/drawing/2014/main" id="{82091129-9609-4231-B64B-EF0B74CCA5CC}"/>
+                <a16:creationId xmlns:a16="http://schemas.microsoft.com/office/drawing/2014/main" id="{9121D994-A889-4FAD-A950-EB78CC4A3728}"/>
               </a:ext>
             </a:extLst>
           </p:cNvPr>
@@ -24880,7 +26038,7 @@
           <p:cNvPr id="14" name="">
             <a:extLst xmlns:a="http://schemas.openxmlformats.org/drawingml/2006/main">
               <a:ext uri="{FF2B5EF4-FFF2-40B4-BE49-F238E27FC236}">
-                <a16:creationId xmlns:a16="http://schemas.microsoft.com/office/drawing/2014/main" id="{116D01F0-FA4E-4E63-9FD7-4EF99F1E3630}"/>
+                <a16:creationId xmlns:a16="http://schemas.microsoft.com/office/drawing/2014/main" id="{4BDBCBA7-B58D-4E5E-B0A3-91B2D2CDFCDA}"/>
               </a:ext>
             </a:extLst>
           </p:cNvPr>
@@ -24915,7 +26073,7 @@
           <p:cNvPr id="15" name="">
             <a:extLst xmlns:a="http://schemas.openxmlformats.org/drawingml/2006/main">
               <a:ext uri="{FF2B5EF4-FFF2-40B4-BE49-F238E27FC236}">
-                <a16:creationId xmlns:a16="http://schemas.microsoft.com/office/drawing/2014/main" id="{8A8C9DB0-0B8E-4ECD-9DA9-02ED093E6D64}"/>
+                <a16:creationId xmlns:a16="http://schemas.microsoft.com/office/drawing/2014/main" id="{F8329FCD-F249-44AA-A8CB-265ADC1D4EA8}"/>
               </a:ext>
             </a:extLst>
           </p:cNvPr>
@@ -24979,7 +26137,7 @@
           <p:cNvPr id="16" name="">
             <a:extLst xmlns:a="http://schemas.openxmlformats.org/drawingml/2006/main">
               <a:ext uri="{FF2B5EF4-FFF2-40B4-BE49-F238E27FC236}">
-                <a16:creationId xmlns:a16="http://schemas.microsoft.com/office/drawing/2014/main" id="{694AD6F7-DED2-45D0-890E-546D682F455E}"/>
+                <a16:creationId xmlns:a16="http://schemas.microsoft.com/office/drawing/2014/main" id="{9A30F25F-4F98-4C17-95DA-DF823D3EC6E9}"/>
               </a:ext>
             </a:extLst>
           </p:cNvPr>
@@ -25014,7 +26172,7 @@
           <p:cNvPr id="17" name="">
             <a:extLst xmlns:a="http://schemas.openxmlformats.org/drawingml/2006/main">
               <a:ext uri="{FF2B5EF4-FFF2-40B4-BE49-F238E27FC236}">
-                <a16:creationId xmlns:a16="http://schemas.microsoft.com/office/drawing/2014/main" id="{BEAE96F6-549D-4B62-AFB1-85911A3884CE}"/>
+                <a16:creationId xmlns:a16="http://schemas.microsoft.com/office/drawing/2014/main" id="{FF43855A-A2AB-41F8-A0AB-EB103E7A0F06}"/>
               </a:ext>
             </a:extLst>
           </p:cNvPr>
@@ -25078,7 +26236,7 @@
           <p:cNvPr id="18" name="">
             <a:extLst xmlns:a="http://schemas.openxmlformats.org/drawingml/2006/main">
               <a:ext uri="{FF2B5EF4-FFF2-40B4-BE49-F238E27FC236}">
-                <a16:creationId xmlns:a16="http://schemas.microsoft.com/office/drawing/2014/main" id="{67530476-CB22-457F-B4B0-1D0DC0C492FB}"/>
+                <a16:creationId xmlns:a16="http://schemas.microsoft.com/office/drawing/2014/main" id="{94FC66D6-8768-467E-B0A6-2C061C64D8C5}"/>
               </a:ext>
             </a:extLst>
           </p:cNvPr>
@@ -25113,7 +26271,7 @@
           <p:cNvPr id="19" name="">
             <a:extLst xmlns:a="http://schemas.openxmlformats.org/drawingml/2006/main">
               <a:ext uri="{FF2B5EF4-FFF2-40B4-BE49-F238E27FC236}">
-                <a16:creationId xmlns:a16="http://schemas.microsoft.com/office/drawing/2014/main" id="{30E3EA17-84F6-45E2-8F38-DE964D8B9B19}"/>
+                <a16:creationId xmlns:a16="http://schemas.microsoft.com/office/drawing/2014/main" id="{A68A424D-C8A1-41DC-8237-F39CABBF2470}"/>
               </a:ext>
             </a:extLst>
           </p:cNvPr>
@@ -25177,7 +26335,7 @@
           <p:cNvPr id="20" name="">
             <a:extLst xmlns:a="http://schemas.openxmlformats.org/drawingml/2006/main">
               <a:ext uri="{FF2B5EF4-FFF2-40B4-BE49-F238E27FC236}">
-                <a16:creationId xmlns:a16="http://schemas.microsoft.com/office/drawing/2014/main" id="{A74402D4-3D35-4068-A3CE-080EBC2B5051}"/>
+                <a16:creationId xmlns:a16="http://schemas.microsoft.com/office/drawing/2014/main" id="{4C77331E-00C8-4A66-9AA9-F9CCD63B0357}"/>
               </a:ext>
             </a:extLst>
           </p:cNvPr>
@@ -25212,7 +26370,7 @@
           <p:cNvPr id="21" name="">
             <a:extLst xmlns:a="http://schemas.openxmlformats.org/drawingml/2006/main">
               <a:ext uri="{FF2B5EF4-FFF2-40B4-BE49-F238E27FC236}">
-                <a16:creationId xmlns:a16="http://schemas.microsoft.com/office/drawing/2014/main" id="{BAA85DFE-CD47-4023-AEE4-B035F3DD4D17}"/>
+                <a16:creationId xmlns:a16="http://schemas.microsoft.com/office/drawing/2014/main" id="{25572CD6-1174-42F8-960B-A3A442E4DECE}"/>
               </a:ext>
             </a:extLst>
           </p:cNvPr>
@@ -25276,7 +26434,7 @@
           <p:cNvPr id="22" name="">
             <a:extLst xmlns:a="http://schemas.openxmlformats.org/drawingml/2006/main">
               <a:ext uri="{FF2B5EF4-FFF2-40B4-BE49-F238E27FC236}">
-                <a16:creationId xmlns:a16="http://schemas.microsoft.com/office/drawing/2014/main" id="{057AE3F8-3BF9-44E3-82BD-9295087F22C4}"/>
+                <a16:creationId xmlns:a16="http://schemas.microsoft.com/office/drawing/2014/main" id="{44B627EC-B069-4427-85C6-037280CA78D0}"/>
               </a:ext>
             </a:extLst>
           </p:cNvPr>
@@ -25311,7 +26469,7 @@
           <p:cNvPr id="23" name="">
             <a:extLst xmlns:a="http://schemas.openxmlformats.org/drawingml/2006/main">
               <a:ext uri="{FF2B5EF4-FFF2-40B4-BE49-F238E27FC236}">
-                <a16:creationId xmlns:a16="http://schemas.microsoft.com/office/drawing/2014/main" id="{65C01244-1A2E-4E1F-9FCE-F9B2AF623611}"/>
+                <a16:creationId xmlns:a16="http://schemas.microsoft.com/office/drawing/2014/main" id="{09BEEAE8-DE55-484C-B8AC-D0D8AD05F8D4}"/>
               </a:ext>
             </a:extLst>
           </p:cNvPr>
@@ -25375,7 +26533,7 @@
           <p:cNvPr id="24" name="">
             <a:extLst xmlns:a="http://schemas.openxmlformats.org/drawingml/2006/main">
               <a:ext uri="{FF2B5EF4-FFF2-40B4-BE49-F238E27FC236}">
-                <a16:creationId xmlns:a16="http://schemas.microsoft.com/office/drawing/2014/main" id="{F75DDD97-1D36-4B92-B0B5-12C663D8A008}"/>
+                <a16:creationId xmlns:a16="http://schemas.microsoft.com/office/drawing/2014/main" id="{87636690-80AB-48D3-88F5-8E509679F5B3}"/>
               </a:ext>
             </a:extLst>
           </p:cNvPr>
@@ -25435,7 +26593,7 @@
     </p:spTree>
     <p:extLst>
       <p:ext uri="{BB962C8B-B14F-4D97-AF65-F5344CB8AC3E}">
-        <p14:creationId xmlns:p14="http://schemas.microsoft.com/office/powerpoint/2010/main" val="2564505"/>
+        <p14:creationId xmlns:p14="http://schemas.microsoft.com/office/powerpoint/2010/main" val="1583635596"/>
       </p:ext>
     </p:extLst>
   </p:cSld>
@@ -25466,7 +26624,7 @@
           <p:cNvPr id="1" name="">
             <a:extLst xmlns:a="http://schemas.openxmlformats.org/drawingml/2006/main">
               <a:ext uri="{FF2B5EF4-FFF2-40B4-BE49-F238E27FC236}">
-                <a16:creationId xmlns:a16="http://schemas.microsoft.com/office/drawing/2014/main" id="{A017AD74-4755-4D60-82C8-D5AAFDD62F16}"/>
+                <a16:creationId xmlns:a16="http://schemas.microsoft.com/office/drawing/2014/main" id="{3F51A380-841D-47BC-8595-EA2156020F25}"/>
               </a:ext>
             </a:extLst>
           </p:cNvPr>
@@ -25501,7 +26659,7 @@
           <p:cNvPr id="2" name="">
             <a:extLst xmlns:a="http://schemas.openxmlformats.org/drawingml/2006/main">
               <a:ext uri="{FF2B5EF4-FFF2-40B4-BE49-F238E27FC236}">
-                <a16:creationId xmlns:a16="http://schemas.microsoft.com/office/drawing/2014/main" id="{7AEAB619-671C-4D24-94F0-76B8880ED48B}"/>
+                <a16:creationId xmlns:a16="http://schemas.microsoft.com/office/drawing/2014/main" id="{7D5FF0EE-485A-43D1-AEB2-601F114A96FD}"/>
               </a:ext>
             </a:extLst>
           </p:cNvPr>
@@ -25565,7 +26723,7 @@
           <p:cNvPr id="3" name="">
             <a:extLst xmlns:a="http://schemas.openxmlformats.org/drawingml/2006/main">
               <a:ext uri="{FF2B5EF4-FFF2-40B4-BE49-F238E27FC236}">
-                <a16:creationId xmlns:a16="http://schemas.microsoft.com/office/drawing/2014/main" id="{8F36B3C9-0306-4B94-98A4-1229A0E83C6E}"/>
+                <a16:creationId xmlns:a16="http://schemas.microsoft.com/office/drawing/2014/main" id="{FC38E8D9-4DA8-421B-98A9-9CE4B930622B}"/>
               </a:ext>
             </a:extLst>
           </p:cNvPr>
@@ -25629,7 +26787,7 @@
           <p:cNvPr id="4" name="">
             <a:extLst xmlns:a="http://schemas.openxmlformats.org/drawingml/2006/main">
               <a:ext uri="{FF2B5EF4-FFF2-40B4-BE49-F238E27FC236}">
-                <a16:creationId xmlns:a16="http://schemas.microsoft.com/office/drawing/2014/main" id="{99DD1D64-E31B-472E-8395-F14A2A18CF5C}"/>
+                <a16:creationId xmlns:a16="http://schemas.microsoft.com/office/drawing/2014/main" id="{616631FC-A89A-4D2C-98E9-409DD5BDB426}"/>
               </a:ext>
             </a:extLst>
           </p:cNvPr>
@@ -25693,7 +26851,7 @@
           <p:cNvPr id="5" name="">
             <a:extLst xmlns:a="http://schemas.openxmlformats.org/drawingml/2006/main">
               <a:ext uri="{FF2B5EF4-FFF2-40B4-BE49-F238E27FC236}">
-                <a16:creationId xmlns:a16="http://schemas.microsoft.com/office/drawing/2014/main" id="{898E3375-1CAD-4E93-AF2E-551F7CB767CA}"/>
+                <a16:creationId xmlns:a16="http://schemas.microsoft.com/office/drawing/2014/main" id="{75E19066-E2D5-4CD4-82CC-E8DD2957C877}"/>
               </a:ext>
             </a:extLst>
           </p:cNvPr>
@@ -25757,7 +26915,7 @@
           <p:cNvPr id="6" name="">
             <a:extLst xmlns:a="http://schemas.openxmlformats.org/drawingml/2006/main">
               <a:ext uri="{FF2B5EF4-FFF2-40B4-BE49-F238E27FC236}">
-                <a16:creationId xmlns:a16="http://schemas.microsoft.com/office/drawing/2014/main" id="{25D58041-6334-4B76-9A1C-3439A72A21AC}"/>
+                <a16:creationId xmlns:a16="http://schemas.microsoft.com/office/drawing/2014/main" id="{5170FA70-909B-4845-B411-E4294FAEF8EB}"/>
               </a:ext>
             </a:extLst>
           </p:cNvPr>
@@ -25790,7 +26948,7 @@
           <p:cNvPr id="7" name="">
             <a:extLst xmlns:a="http://schemas.openxmlformats.org/drawingml/2006/main">
               <a:ext uri="{FF2B5EF4-FFF2-40B4-BE49-F238E27FC236}">
-                <a16:creationId xmlns:a16="http://schemas.microsoft.com/office/drawing/2014/main" id="{4FF5EDC6-F9ED-4C3A-A3C2-53772346E365}"/>
+                <a16:creationId xmlns:a16="http://schemas.microsoft.com/office/drawing/2014/main" id="{76286C19-70F6-425D-AE93-41C052A210F1}"/>
               </a:ext>
             </a:extLst>
           </p:cNvPr>
@@ -25825,7 +26983,7 @@
           <p:cNvPr id="8" name="">
             <a:extLst xmlns:a="http://schemas.openxmlformats.org/drawingml/2006/main">
               <a:ext uri="{FF2B5EF4-FFF2-40B4-BE49-F238E27FC236}">
-                <a16:creationId xmlns:a16="http://schemas.microsoft.com/office/drawing/2014/main" id="{94A81369-5B34-479C-9502-DC04CABD3D7F}"/>
+                <a16:creationId xmlns:a16="http://schemas.microsoft.com/office/drawing/2014/main" id="{84AF2E07-DDBB-4CA8-93EC-EB9E95C07632}"/>
               </a:ext>
             </a:extLst>
           </p:cNvPr>
@@ -25889,7 +27047,7 @@
           <p:cNvPr id="9" name="">
             <a:extLst xmlns:a="http://schemas.openxmlformats.org/drawingml/2006/main">
               <a:ext uri="{FF2B5EF4-FFF2-40B4-BE49-F238E27FC236}">
-                <a16:creationId xmlns:a16="http://schemas.microsoft.com/office/drawing/2014/main" id="{A6AE1F9D-76C6-4E0E-899A-8087F632DA43}"/>
+                <a16:creationId xmlns:a16="http://schemas.microsoft.com/office/drawing/2014/main" id="{7AB55905-D975-4C98-B89B-D5A7D268E8CA}"/>
               </a:ext>
             </a:extLst>
           </p:cNvPr>
@@ -25953,7 +27111,7 @@
           <p:cNvPr id="10" name="">
             <a:extLst xmlns:a="http://schemas.openxmlformats.org/drawingml/2006/main">
               <a:ext uri="{FF2B5EF4-FFF2-40B4-BE49-F238E27FC236}">
-                <a16:creationId xmlns:a16="http://schemas.microsoft.com/office/drawing/2014/main" id="{97D3C0A1-8E45-4CAA-9BA5-2A2865F66893}"/>
+                <a16:creationId xmlns:a16="http://schemas.microsoft.com/office/drawing/2014/main" id="{F0156829-7EB6-4FAE-8F63-0DF9CE8E8E90}"/>
               </a:ext>
             </a:extLst>
           </p:cNvPr>
@@ -25986,7 +27144,7 @@
           <p:cNvPr id="11" name="">
             <a:extLst xmlns:a="http://schemas.openxmlformats.org/drawingml/2006/main">
               <a:ext uri="{FF2B5EF4-FFF2-40B4-BE49-F238E27FC236}">
-                <a16:creationId xmlns:a16="http://schemas.microsoft.com/office/drawing/2014/main" id="{7728B116-E4FF-40F4-9107-73C34ED9C5E8}"/>
+                <a16:creationId xmlns:a16="http://schemas.microsoft.com/office/drawing/2014/main" id="{ACCCD362-23B4-4D47-8179-8898A811A53E}"/>
               </a:ext>
             </a:extLst>
           </p:cNvPr>
@@ -26021,7 +27179,7 @@
           <p:cNvPr id="12" name="">
             <a:extLst xmlns:a="http://schemas.openxmlformats.org/drawingml/2006/main">
               <a:ext uri="{FF2B5EF4-FFF2-40B4-BE49-F238E27FC236}">
-                <a16:creationId xmlns:a16="http://schemas.microsoft.com/office/drawing/2014/main" id="{17CCCECE-C08E-41D7-937F-A0B85ECF1720}"/>
+                <a16:creationId xmlns:a16="http://schemas.microsoft.com/office/drawing/2014/main" id="{1DBC3125-DD5F-4B19-85D8-C7A240DD0090}"/>
               </a:ext>
             </a:extLst>
           </p:cNvPr>
@@ -26085,7 +27243,7 @@
           <p:cNvPr id="13" name="">
             <a:extLst xmlns:a="http://schemas.openxmlformats.org/drawingml/2006/main">
               <a:ext uri="{FF2B5EF4-FFF2-40B4-BE49-F238E27FC236}">
-                <a16:creationId xmlns:a16="http://schemas.microsoft.com/office/drawing/2014/main" id="{E6FCD3A5-C07A-466E-9D02-A1F601ADA3FE}"/>
+                <a16:creationId xmlns:a16="http://schemas.microsoft.com/office/drawing/2014/main" id="{BE39BFA6-BAD7-4644-9A44-B15FBF33F386}"/>
               </a:ext>
             </a:extLst>
           </p:cNvPr>
@@ -26149,7 +27307,7 @@
           <p:cNvPr id="14" name="">
             <a:extLst xmlns:a="http://schemas.openxmlformats.org/drawingml/2006/main">
               <a:ext uri="{FF2B5EF4-FFF2-40B4-BE49-F238E27FC236}">
-                <a16:creationId xmlns:a16="http://schemas.microsoft.com/office/drawing/2014/main" id="{BC4632F9-9887-4264-A0D0-21C73C7861B9}"/>
+                <a16:creationId xmlns:a16="http://schemas.microsoft.com/office/drawing/2014/main" id="{CC150D38-6468-4375-BCE0-6429D1200879}"/>
               </a:ext>
             </a:extLst>
           </p:cNvPr>
@@ -26182,7 +27340,7 @@
           <p:cNvPr id="15" name="">
             <a:extLst xmlns:a="http://schemas.openxmlformats.org/drawingml/2006/main">
               <a:ext uri="{FF2B5EF4-FFF2-40B4-BE49-F238E27FC236}">
-                <a16:creationId xmlns:a16="http://schemas.microsoft.com/office/drawing/2014/main" id="{06E655B1-C5BE-47D8-B96A-D40636A5019E}"/>
+                <a16:creationId xmlns:a16="http://schemas.microsoft.com/office/drawing/2014/main" id="{09CB4338-6217-4A1E-B06A-ECA5A6BBF5C2}"/>
               </a:ext>
             </a:extLst>
           </p:cNvPr>
@@ -26217,7 +27375,7 @@
           <p:cNvPr id="16" name="">
             <a:extLst xmlns:a="http://schemas.openxmlformats.org/drawingml/2006/main">
               <a:ext uri="{FF2B5EF4-FFF2-40B4-BE49-F238E27FC236}">
-                <a16:creationId xmlns:a16="http://schemas.microsoft.com/office/drawing/2014/main" id="{C4C81C4C-8A63-43BB-BDC9-66BA8B09317A}"/>
+                <a16:creationId xmlns:a16="http://schemas.microsoft.com/office/drawing/2014/main" id="{62DC5689-69B9-4ECD-9C75-E96CFA210589}"/>
               </a:ext>
             </a:extLst>
           </p:cNvPr>
@@ -26281,7 +27439,7 @@
           <p:cNvPr id="17" name="">
             <a:extLst xmlns:a="http://schemas.openxmlformats.org/drawingml/2006/main">
               <a:ext uri="{FF2B5EF4-FFF2-40B4-BE49-F238E27FC236}">
-                <a16:creationId xmlns:a16="http://schemas.microsoft.com/office/drawing/2014/main" id="{A0F7B64F-93FD-4413-AAB1-FE4EC01EA75C}"/>
+                <a16:creationId xmlns:a16="http://schemas.microsoft.com/office/drawing/2014/main" id="{996CE7C3-FA9D-4C66-9F3F-FF31EBAE9535}"/>
               </a:ext>
             </a:extLst>
           </p:cNvPr>
@@ -26345,7 +27503,7 @@
           <p:cNvPr id="18" name="">
             <a:extLst xmlns:a="http://schemas.openxmlformats.org/drawingml/2006/main">
               <a:ext uri="{FF2B5EF4-FFF2-40B4-BE49-F238E27FC236}">
-                <a16:creationId xmlns:a16="http://schemas.microsoft.com/office/drawing/2014/main" id="{0559BAE8-6200-45A7-8765-511137B50CAD}"/>
+                <a16:creationId xmlns:a16="http://schemas.microsoft.com/office/drawing/2014/main" id="{35C4E7A8-CA56-447C-961B-D5667CA23B25}"/>
               </a:ext>
             </a:extLst>
           </p:cNvPr>
@@ -26380,7 +27538,7 @@
           <p:cNvPr id="19" name="">
             <a:extLst xmlns:a="http://schemas.openxmlformats.org/drawingml/2006/main">
               <a:ext uri="{FF2B5EF4-FFF2-40B4-BE49-F238E27FC236}">
-                <a16:creationId xmlns:a16="http://schemas.microsoft.com/office/drawing/2014/main" id="{770F66E6-73F0-4B71-930C-8E9A291FCEA9}"/>
+                <a16:creationId xmlns:a16="http://schemas.microsoft.com/office/drawing/2014/main" id="{2626B94E-CBA6-4DEE-A0AB-99AA58D75C41}"/>
               </a:ext>
             </a:extLst>
           </p:cNvPr>
@@ -26444,7 +27602,7 @@
           <p:cNvPr id="20" name="">
             <a:extLst xmlns:a="http://schemas.openxmlformats.org/drawingml/2006/main">
               <a:ext uri="{FF2B5EF4-FFF2-40B4-BE49-F238E27FC236}">
-                <a16:creationId xmlns:a16="http://schemas.microsoft.com/office/drawing/2014/main" id="{DB95D475-FA97-482F-92E0-4F737AE5DF0D}"/>
+                <a16:creationId xmlns:a16="http://schemas.microsoft.com/office/drawing/2014/main" id="{0B9849CA-826F-4D9F-AC65-8C54DA5F4DEF}"/>
               </a:ext>
             </a:extLst>
           </p:cNvPr>
@@ -26479,7 +27637,7 @@
           <p:cNvPr id="21" name="">
             <a:extLst xmlns:a="http://schemas.openxmlformats.org/drawingml/2006/main">
               <a:ext uri="{FF2B5EF4-FFF2-40B4-BE49-F238E27FC236}">
-                <a16:creationId xmlns:a16="http://schemas.microsoft.com/office/drawing/2014/main" id="{6D09FBD1-B7EF-45A3-BED5-4AE72B4E0343}"/>
+                <a16:creationId xmlns:a16="http://schemas.microsoft.com/office/drawing/2014/main" id="{CBD2212C-959E-4359-8A9C-829586D9616D}"/>
               </a:ext>
             </a:extLst>
           </p:cNvPr>
@@ -26541,7 +27699,7 @@
     </p:spTree>
     <p:extLst>
       <p:ext uri="{BB962C8B-B14F-4D97-AF65-F5344CB8AC3E}">
-        <p14:creationId xmlns:p14="http://schemas.microsoft.com/office/powerpoint/2010/main" val="1148587494"/>
+        <p14:creationId xmlns:p14="http://schemas.microsoft.com/office/powerpoint/2010/main" val="843375931"/>
       </p:ext>
     </p:extLst>
   </p:cSld>

--- a/showtime-2/final/biglab-b-final-yang-kaisen.pptx
+++ b/showtime-2/final/biglab-b-final-yang-kaisen.pptx
@@ -2,31 +2,31 @@
 <file path=ppt/presentation.xml><?xml version="1.0" encoding="utf-8"?>
 <p:presentation xmlns:p="http://schemas.openxmlformats.org/presentationml/2006/main">
   <p:sldMasterIdLst>
-    <p:sldMasterId xmlns:r="http://schemas.openxmlformats.org/officeDocument/2006/relationships" id="2147483648" r:id="Ra0b4bf261cda4457"/>
+    <p:sldMasterId xmlns:r="http://schemas.openxmlformats.org/officeDocument/2006/relationships" id="2147483648" r:id="Rb890a20c468b4f13"/>
   </p:sldMasterIdLst>
   <p:notesMasterIdLst>
-    <p:notesMasterId xmlns:r="http://schemas.openxmlformats.org/officeDocument/2006/relationships" r:id="R31ff26221fa7433f"/>
+    <p:notesMasterId xmlns:r="http://schemas.openxmlformats.org/officeDocument/2006/relationships" r:id="R7b59e2792ecb4945"/>
   </p:notesMasterIdLst>
   <p:sldIdLst>
-    <p:sldId xmlns:r="http://schemas.openxmlformats.org/officeDocument/2006/relationships" id="256" r:id="R631345bf232f4289"/>
-    <p:sldId xmlns:r="http://schemas.openxmlformats.org/officeDocument/2006/relationships" id="257" r:id="R8b5ac237418b4cd8"/>
-    <p:sldId xmlns:r="http://schemas.openxmlformats.org/officeDocument/2006/relationships" id="258" r:id="R643ca2d3f1d54010"/>
-    <p:sldId xmlns:r="http://schemas.openxmlformats.org/officeDocument/2006/relationships" id="259" r:id="Rda878ddd9dcf4ef9"/>
-    <p:sldId xmlns:r="http://schemas.openxmlformats.org/officeDocument/2006/relationships" id="260" r:id="R06684192373d4321"/>
-    <p:sldId xmlns:r="http://schemas.openxmlformats.org/officeDocument/2006/relationships" id="261" r:id="R4612bbeaac654af0"/>
-    <p:sldId xmlns:r="http://schemas.openxmlformats.org/officeDocument/2006/relationships" id="262" r:id="Re8cc80571a294b0e"/>
-    <p:sldId xmlns:r="http://schemas.openxmlformats.org/officeDocument/2006/relationships" id="263" r:id="Rc7df5581c29d4c58"/>
-    <p:sldId xmlns:r="http://schemas.openxmlformats.org/officeDocument/2006/relationships" id="264" r:id="R55d3975bea8544da"/>
-    <p:sldId xmlns:r="http://schemas.openxmlformats.org/officeDocument/2006/relationships" id="265" r:id="Rc5b2451538d343ff"/>
-    <p:sldId xmlns:r="http://schemas.openxmlformats.org/officeDocument/2006/relationships" id="266" r:id="Rd9235e4037644ccc"/>
-    <p:sldId xmlns:r="http://schemas.openxmlformats.org/officeDocument/2006/relationships" id="267" r:id="R83ad3dc73b5b4817"/>
-    <p:sldId xmlns:r="http://schemas.openxmlformats.org/officeDocument/2006/relationships" id="268" r:id="R5a89687c60714497"/>
-    <p:sldId xmlns:r="http://schemas.openxmlformats.org/officeDocument/2006/relationships" id="269" r:id="R22e63ea31e954d27"/>
-    <p:sldId xmlns:r="http://schemas.openxmlformats.org/officeDocument/2006/relationships" id="270" r:id="R62138492b2eb4b53"/>
-    <p:sldId xmlns:r="http://schemas.openxmlformats.org/officeDocument/2006/relationships" id="271" r:id="R89d63869be2b42b3"/>
-    <p:sldId xmlns:r="http://schemas.openxmlformats.org/officeDocument/2006/relationships" id="272" r:id="Re8c7ef705d5c4719"/>
-    <p:sldId xmlns:r="http://schemas.openxmlformats.org/officeDocument/2006/relationships" id="273" r:id="R209e4823d5f7422e"/>
-    <p:sldId xmlns:r="http://schemas.openxmlformats.org/officeDocument/2006/relationships" id="274" r:id="R7accab2e33394895"/>
+    <p:sldId xmlns:r="http://schemas.openxmlformats.org/officeDocument/2006/relationships" id="256" r:id="R8e4a32fd21ca48db"/>
+    <p:sldId xmlns:r="http://schemas.openxmlformats.org/officeDocument/2006/relationships" id="257" r:id="R384b770777d143c5"/>
+    <p:sldId xmlns:r="http://schemas.openxmlformats.org/officeDocument/2006/relationships" id="258" r:id="R2c38b574890c45b2"/>
+    <p:sldId xmlns:r="http://schemas.openxmlformats.org/officeDocument/2006/relationships" id="259" r:id="R47392b13fab44bec"/>
+    <p:sldId xmlns:r="http://schemas.openxmlformats.org/officeDocument/2006/relationships" id="260" r:id="Ra603c46d529d4b89"/>
+    <p:sldId xmlns:r="http://schemas.openxmlformats.org/officeDocument/2006/relationships" id="261" r:id="R406624c55a5a46f5"/>
+    <p:sldId xmlns:r="http://schemas.openxmlformats.org/officeDocument/2006/relationships" id="262" r:id="R13d33575228e44d7"/>
+    <p:sldId xmlns:r="http://schemas.openxmlformats.org/officeDocument/2006/relationships" id="263" r:id="Ree84ae8c5b854a1f"/>
+    <p:sldId xmlns:r="http://schemas.openxmlformats.org/officeDocument/2006/relationships" id="264" r:id="Rf33b6a9b936a42f6"/>
+    <p:sldId xmlns:r="http://schemas.openxmlformats.org/officeDocument/2006/relationships" id="265" r:id="R4ae66372fd3f4ff1"/>
+    <p:sldId xmlns:r="http://schemas.openxmlformats.org/officeDocument/2006/relationships" id="266" r:id="R306801e0646b446c"/>
+    <p:sldId xmlns:r="http://schemas.openxmlformats.org/officeDocument/2006/relationships" id="267" r:id="Rf52633d0c16647ff"/>
+    <p:sldId xmlns:r="http://schemas.openxmlformats.org/officeDocument/2006/relationships" id="268" r:id="Re98bb82f90f443b8"/>
+    <p:sldId xmlns:r="http://schemas.openxmlformats.org/officeDocument/2006/relationships" id="269" r:id="R5eebfd265d3549b9"/>
+    <p:sldId xmlns:r="http://schemas.openxmlformats.org/officeDocument/2006/relationships" id="270" r:id="Rac5b06eb073c48ba"/>
+    <p:sldId xmlns:r="http://schemas.openxmlformats.org/officeDocument/2006/relationships" id="271" r:id="R8f2d1492cf8d4a0e"/>
+    <p:sldId xmlns:r="http://schemas.openxmlformats.org/officeDocument/2006/relationships" id="272" r:id="Rd0b646451fb8476b"/>
+    <p:sldId xmlns:r="http://schemas.openxmlformats.org/officeDocument/2006/relationships" id="273" r:id="R12fc474b591b4df0"/>
+    <p:sldId xmlns:r="http://schemas.openxmlformats.org/officeDocument/2006/relationships" id="274" r:id="R198c4f19c8ee4060"/>
   </p:sldIdLst>
   <p:sldSz cx="12192000" cy="6858000"/>
   <p:notesSz cx="6858000" cy="9144000"/>
@@ -1761,7 +1761,7 @@
   </p:cSld>
   <p:clrMap bg1="lt1" tx1="dk1" bg2="lt2" tx2="dk2" accent1="accent1" accent2="accent2" accent3="accent3" accent4="accent4" accent5="accent5" accent6="accent6" hlink="hlink" folHlink="folHlink"/>
   <p:sldLayoutIdLst>
-    <p:sldLayoutId xmlns:r="http://schemas.openxmlformats.org/officeDocument/2006/relationships" id="2147483649" r:id="Raf7d7d0051974f7b"/>
+    <p:sldLayoutId xmlns:r="http://schemas.openxmlformats.org/officeDocument/2006/relationships" id="2147483649" r:id="R68b11000423e4e16"/>
   </p:sldLayoutIdLst>
   <p:txStyles>
     <p:titleStyle>
@@ -2067,7 +2067,7 @@
           <p:cNvPr id="1" name="">
             <a:extLst xmlns:a="http://schemas.openxmlformats.org/drawingml/2006/main">
               <a:ext uri="{FF2B5EF4-FFF2-40B4-BE49-F238E27FC236}">
-                <a16:creationId xmlns:a16="http://schemas.microsoft.com/office/drawing/2014/main" id="{A7B3A718-76BD-428E-9D4B-20DCEDD17D69}"/>
+                <a16:creationId xmlns:a16="http://schemas.microsoft.com/office/drawing/2014/main" id="{3888DD17-D8B7-42B3-A43B-1B9DDA0B26F6}"/>
               </a:ext>
             </a:extLst>
           </p:cNvPr>
@@ -2102,7 +2102,7 @@
           <p:cNvPr id="2" name="">
             <a:extLst xmlns:a="http://schemas.openxmlformats.org/drawingml/2006/main">
               <a:ext uri="{FF2B5EF4-FFF2-40B4-BE49-F238E27FC236}">
-                <a16:creationId xmlns:a16="http://schemas.microsoft.com/office/drawing/2014/main" id="{94864689-FD06-40D5-AAD8-F114C1703C2B}"/>
+                <a16:creationId xmlns:a16="http://schemas.microsoft.com/office/drawing/2014/main" id="{CB7A2543-23C0-4B65-BFC5-B18131C27AAF}"/>
               </a:ext>
             </a:extLst>
           </p:cNvPr>
@@ -2166,7 +2166,7 @@
           <p:cNvPr id="3" name="">
             <a:extLst xmlns:a="http://schemas.openxmlformats.org/drawingml/2006/main">
               <a:ext uri="{FF2B5EF4-FFF2-40B4-BE49-F238E27FC236}">
-                <a16:creationId xmlns:a16="http://schemas.microsoft.com/office/drawing/2014/main" id="{57C7DABF-88B7-4C04-94C3-06220C3BC740}"/>
+                <a16:creationId xmlns:a16="http://schemas.microsoft.com/office/drawing/2014/main" id="{23516D99-7DC2-4CD4-A0AE-D92641C0A9E0}"/>
               </a:ext>
             </a:extLst>
           </p:cNvPr>
@@ -2230,18 +2230,18 @@
           <p:cNvPr id="4" name="">
             <a:extLst xmlns:a="http://schemas.openxmlformats.org/drawingml/2006/main">
               <a:ext uri="{FF2B5EF4-FFF2-40B4-BE49-F238E27FC236}">
-                <a16:creationId xmlns:a16="http://schemas.microsoft.com/office/drawing/2014/main" id="{23D640AE-AC2D-4B2E-9FE4-A702A1603EB2}"/>
-              </a:ext>
-            </a:extLst>
-          </p:cNvPr>
-          <p:cNvSpPr>
-            <a:spLocks xmlns:a="http://schemas.openxmlformats.org/drawingml/2006/main" noGrp="1"/>
-          </p:cNvSpPr>
-          <p:nvPr/>
-        </p:nvSpPr>
-        <p:spPr>
-          <a:xfrm xmlns:a="http://schemas.openxmlformats.org/drawingml/2006/main">
-            <a:off x="723900" y="2476500"/>
+                <a16:creationId xmlns:a16="http://schemas.microsoft.com/office/drawing/2014/main" id="{4DDBA43C-DDEB-4448-8AC4-5942D4C87A98}"/>
+              </a:ext>
+            </a:extLst>
+          </p:cNvPr>
+          <p:cNvSpPr>
+            <a:spLocks xmlns:a="http://schemas.openxmlformats.org/drawingml/2006/main" noGrp="1"/>
+          </p:cNvSpPr>
+          <p:nvPr/>
+        </p:nvSpPr>
+        <p:spPr>
+          <a:xfrm xmlns:a="http://schemas.openxmlformats.org/drawingml/2006/main">
+            <a:off x="723900" y="2571750"/>
             <a:ext cx="9906000" cy="419100"/>
           </a:xfrm>
           <a:prstGeom xmlns:a="http://schemas.openxmlformats.org/drawingml/2006/main" prst="rect">
@@ -2284,7 +2284,7 @@
                 <a:ea typeface="PingFang SC"/>
                 <a:cs typeface="PingFang SC"/>
               </a:rPr>
-              <a:t>目标：让 StarryOS 承载一个真实的大型 Rust/Cargo workload，在 guest 内编译出 StarryOS 自己。</a:t>
+              <a:t>主线：让 StarryOS 在 guest 内编译出 StarryOS 自己，过程分为两步推进。</a:t>
             </a:r>
           </a:p>
         </p:txBody>
@@ -2294,19 +2294,114 @@
           <p:cNvPr id="5" name="">
             <a:extLst xmlns:a="http://schemas.openxmlformats.org/drawingml/2006/main">
               <a:ext uri="{FF2B5EF4-FFF2-40B4-BE49-F238E27FC236}">
-                <a16:creationId xmlns:a16="http://schemas.microsoft.com/office/drawing/2014/main" id="{FFC06A77-F9D0-4562-8AD7-FFDEDD752C83}"/>
-              </a:ext>
-            </a:extLst>
-          </p:cNvPr>
-          <p:cNvSpPr>
-            <a:spLocks xmlns:a="http://schemas.openxmlformats.org/drawingml/2006/main" noGrp="1"/>
-          </p:cNvSpPr>
-          <p:nvPr/>
-        </p:nvSpPr>
-        <p:spPr>
-          <a:xfrm xmlns:a="http://schemas.openxmlformats.org/drawingml/2006/main">
-            <a:off x="723900" y="3028950"/>
-            <a:ext cx="10001250" cy="514350"/>
+                <a16:creationId xmlns:a16="http://schemas.microsoft.com/office/drawing/2014/main" id="{BAA45CA1-F106-43CB-8988-6C696F826783}"/>
+              </a:ext>
+            </a:extLst>
+          </p:cNvPr>
+          <p:cNvSpPr>
+            <a:spLocks xmlns:a="http://schemas.openxmlformats.org/drawingml/2006/main" noGrp="1"/>
+          </p:cNvSpPr>
+          <p:nvPr/>
+        </p:nvSpPr>
+        <p:spPr>
+          <a:xfrm xmlns:a="http://schemas.openxmlformats.org/drawingml/2006/main">
+            <a:off x="742950" y="3562350"/>
+            <a:ext cx="4762500" cy="1428750"/>
+          </a:xfrm>
+          <a:prstGeom xmlns:a="http://schemas.openxmlformats.org/drawingml/2006/main" prst="rect">
+            <a:avLst/>
+          </a:prstGeom>
+          <a:solidFill xmlns:a="http://schemas.openxmlformats.org/drawingml/2006/main">
+            <a:srgbClr val="111C2F"/>
+          </a:solidFill>
+          <a:ln xmlns:a="http://schemas.openxmlformats.org/drawingml/2006/main" w="9525">
+            <a:solidFill>
+              <a:srgbClr val="334155"/>
+            </a:solidFill>
+            <a:prstDash val="solid"/>
+          </a:ln>
+        </p:spPr>
+      </p:sp>
+      <p:sp>
+        <p:nvSpPr>
+          <p:cNvPr id="6" name="">
+            <a:extLst xmlns:a="http://schemas.openxmlformats.org/drawingml/2006/main">
+              <a:ext uri="{FF2B5EF4-FFF2-40B4-BE49-F238E27FC236}">
+                <a16:creationId xmlns:a16="http://schemas.microsoft.com/office/drawing/2014/main" id="{A2F752E6-23F9-4201-9E6F-06466C7DFD62}"/>
+              </a:ext>
+            </a:extLst>
+          </p:cNvPr>
+          <p:cNvSpPr>
+            <a:spLocks xmlns:a="http://schemas.openxmlformats.org/drawingml/2006/main" noGrp="1"/>
+          </p:cNvSpPr>
+          <p:nvPr/>
+        </p:nvSpPr>
+        <p:spPr>
+          <a:xfrm xmlns:a="http://schemas.openxmlformats.org/drawingml/2006/main">
+            <a:off x="990600" y="3810000"/>
+            <a:ext cx="438150" cy="438150"/>
+          </a:xfrm>
+          <a:prstGeom xmlns:a="http://schemas.openxmlformats.org/drawingml/2006/main" prst="rect">
+            <a:avLst/>
+          </a:prstGeom>
+          <a:solidFill xmlns:a="http://schemas.openxmlformats.org/drawingml/2006/main">
+            <a:srgbClr val="1E3A8A"/>
+          </a:solidFill>
+          <a:ln xmlns:a="http://schemas.openxmlformats.org/drawingml/2006/main" w="0">
+            <a:solidFill>
+              <a:srgbClr val="000000">
+                <a:alpha val="0"/>
+              </a:srgbClr>
+            </a:solidFill>
+            <a:prstDash val="solid"/>
+          </a:ln>
+        </p:spPr>
+        <p:txBody>
+          <a:bodyPr xmlns:a="http://schemas.openxmlformats.org/drawingml/2006/main" lIns="0" tIns="0" rIns="0" bIns="0" anchor="ctr"/>
+          <a:lstStyle xmlns:a="http://schemas.openxmlformats.org/drawingml/2006/main"/>
+          <a:p xmlns:a="http://schemas.openxmlformats.org/drawingml/2006/main">
+            <a:pPr algn="ctr">
+              <a:defRPr sz="2250" b="1">
+                <a:solidFill>
+                  <a:srgbClr val="93C5FD"/>
+                </a:solidFill>
+                <a:latin typeface="PingFang SC"/>
+                <a:ea typeface="PingFang SC"/>
+                <a:cs typeface="PingFang SC"/>
+              </a:defRPr>
+            </a:pPr>
+            <a:r>
+              <a:rPr sz="2250" b="1">
+                <a:solidFill>
+                  <a:srgbClr val="93C5FD"/>
+                </a:solidFill>
+                <a:latin typeface="PingFang SC"/>
+                <a:ea typeface="PingFang SC"/>
+                <a:cs typeface="PingFang SC"/>
+              </a:rPr>
+              <a:t>1</a:t>
+            </a:r>
+          </a:p>
+        </p:txBody>
+      </p:sp>
+      <p:sp>
+        <p:nvSpPr>
+          <p:cNvPr id="7" name="">
+            <a:extLst xmlns:a="http://schemas.openxmlformats.org/drawingml/2006/main">
+              <a:ext uri="{FF2B5EF4-FFF2-40B4-BE49-F238E27FC236}">
+                <a16:creationId xmlns:a16="http://schemas.microsoft.com/office/drawing/2014/main" id="{A6B29529-EA7B-4EE7-BF38-33794D520C69}"/>
+              </a:ext>
+            </a:extLst>
+          </p:cNvPr>
+          <p:cNvSpPr>
+            <a:spLocks xmlns:a="http://schemas.openxmlformats.org/drawingml/2006/main" noGrp="1"/>
+          </p:cNvSpPr>
+          <p:nvPr/>
+        </p:nvSpPr>
+        <p:spPr>
+          <a:xfrm xmlns:a="http://schemas.openxmlformats.org/drawingml/2006/main">
+            <a:off x="1657350" y="3771900"/>
+            <a:ext cx="3048000" cy="323850"/>
           </a:xfrm>
           <a:prstGeom xmlns:a="http://schemas.openxmlformats.org/drawingml/2006/main" prst="rect">
             <a:avLst/>
@@ -2330,82 +2425,47 @@
           <a:lstStyle xmlns:a="http://schemas.openxmlformats.org/drawingml/2006/main"/>
           <a:p xmlns:a="http://schemas.openxmlformats.org/drawingml/2006/main">
             <a:pPr algn="l">
-              <a:defRPr sz="1575" b="0">
-                <a:solidFill>
-                  <a:srgbClr val="CBD5E1"/>
-                </a:solidFill>
-                <a:latin typeface="PingFang SC"/>
-                <a:ea typeface="PingFang SC"/>
-                <a:cs typeface="PingFang SC"/>
-              </a:defRPr>
-            </a:pPr>
-            <a:r>
-              <a:rPr sz="1575" b="0">
-                <a:solidFill>
-                  <a:srgbClr val="CBD5E1"/>
-                </a:solidFill>
-                <a:latin typeface="PingFang SC"/>
-                <a:ea typeface="PingFang SC"/>
-                <a:cs typeface="PingFang SC"/>
-              </a:rPr>
-              <a:t>这件事会系统性暴露 OS 层问题：进程创建、futex 退出、文件系统、SMP 同步、调度唤醒、用户态 ABI 和 QEMU/HVF 边界。</a:t>
-            </a:r>
-          </a:p>
-        </p:txBody>
-      </p:sp>
-      <p:sp>
-        <p:nvSpPr>
-          <p:cNvPr id="6" name="">
-            <a:extLst xmlns:a="http://schemas.openxmlformats.org/drawingml/2006/main">
-              <a:ext uri="{FF2B5EF4-FFF2-40B4-BE49-F238E27FC236}">
-                <a16:creationId xmlns:a16="http://schemas.microsoft.com/office/drawing/2014/main" id="{A011F025-D124-4A89-8C18-CB8C5406FA83}"/>
-              </a:ext>
-            </a:extLst>
-          </p:cNvPr>
-          <p:cNvSpPr>
-            <a:spLocks xmlns:a="http://schemas.openxmlformats.org/drawingml/2006/main" noGrp="1"/>
-          </p:cNvSpPr>
-          <p:nvPr/>
-        </p:nvSpPr>
-        <p:spPr>
-          <a:xfrm xmlns:a="http://schemas.openxmlformats.org/drawingml/2006/main">
-            <a:off x="800100" y="4105275"/>
-            <a:ext cx="76200" cy="76200"/>
-          </a:xfrm>
-          <a:prstGeom xmlns:a="http://schemas.openxmlformats.org/drawingml/2006/main" prst="rect">
-            <a:avLst/>
-          </a:prstGeom>
-          <a:solidFill xmlns:a="http://schemas.openxmlformats.org/drawingml/2006/main">
-            <a:srgbClr val="148A5A"/>
-          </a:solidFill>
-          <a:ln xmlns:a="http://schemas.openxmlformats.org/drawingml/2006/main" w="0">
-            <a:solidFill>
-              <a:srgbClr val="000000">
-                <a:alpha val="0"/>
-              </a:srgbClr>
-            </a:solidFill>
-            <a:prstDash val="solid"/>
-          </a:ln>
-        </p:spPr>
-      </p:sp>
-      <p:sp>
-        <p:nvSpPr>
-          <p:cNvPr id="7" name="">
-            <a:extLst xmlns:a="http://schemas.openxmlformats.org/drawingml/2006/main">
-              <a:ext uri="{FF2B5EF4-FFF2-40B4-BE49-F238E27FC236}">
-                <a16:creationId xmlns:a16="http://schemas.microsoft.com/office/drawing/2014/main" id="{FF7ED068-C007-44C9-A1C8-D2AD8A19BBA9}"/>
-              </a:ext>
-            </a:extLst>
-          </p:cNvPr>
-          <p:cNvSpPr>
-            <a:spLocks xmlns:a="http://schemas.openxmlformats.org/drawingml/2006/main" noGrp="1"/>
-          </p:cNvSpPr>
-          <p:nvPr/>
-        </p:nvSpPr>
-        <p:spPr>
-          <a:xfrm xmlns:a="http://schemas.openxmlformats.org/drawingml/2006/main">
-            <a:off x="1028700" y="4000500"/>
-            <a:ext cx="8629650" cy="533400"/>
+              <a:defRPr sz="2025" b="1">
+                <a:solidFill>
+                  <a:srgbClr val="FFFFFF"/>
+                </a:solidFill>
+                <a:latin typeface="PingFang SC"/>
+                <a:ea typeface="PingFang SC"/>
+                <a:cs typeface="PingFang SC"/>
+              </a:defRPr>
+            </a:pPr>
+            <a:r>
+              <a:rPr sz="2025" b="1">
+                <a:solidFill>
+                  <a:srgbClr val="FFFFFF"/>
+                </a:solidFill>
+                <a:latin typeface="PingFang SC"/>
+                <a:ea typeface="PingFang SC"/>
+                <a:cs typeface="PingFang SC"/>
+              </a:rPr>
+              <a:t>首先实现单核</a:t>
+            </a:r>
+          </a:p>
+        </p:txBody>
+      </p:sp>
+      <p:sp>
+        <p:nvSpPr>
+          <p:cNvPr id="8" name="">
+            <a:extLst xmlns:a="http://schemas.openxmlformats.org/drawingml/2006/main">
+              <a:ext uri="{FF2B5EF4-FFF2-40B4-BE49-F238E27FC236}">
+                <a16:creationId xmlns:a16="http://schemas.microsoft.com/office/drawing/2014/main" id="{541A9C3C-1970-4AAE-A311-A68924CF6AE0}"/>
+              </a:ext>
+            </a:extLst>
+          </p:cNvPr>
+          <p:cNvSpPr>
+            <a:spLocks xmlns:a="http://schemas.openxmlformats.org/drawingml/2006/main" noGrp="1"/>
+          </p:cNvSpPr>
+          <p:nvPr/>
+        </p:nvSpPr>
+        <p:spPr>
+          <a:xfrm xmlns:a="http://schemas.openxmlformats.org/drawingml/2006/main">
+            <a:off x="1676400" y="4248150"/>
+            <a:ext cx="3295650" cy="495300"/>
           </a:xfrm>
           <a:prstGeom xmlns:a="http://schemas.openxmlformats.org/drawingml/2006/main" prst="rect">
             <a:avLst/>
@@ -2429,82 +2489,142 @@
           <a:lstStyle xmlns:a="http://schemas.openxmlformats.org/drawingml/2006/main"/>
           <a:p xmlns:a="http://schemas.openxmlformats.org/drawingml/2006/main">
             <a:pPr algn="l">
-              <a:defRPr sz="1575" b="0">
-                <a:solidFill>
-                  <a:srgbClr val="E5E7EB"/>
-                </a:solidFill>
-                <a:latin typeface="PingFang SC"/>
-                <a:ea typeface="PingFang SC"/>
-                <a:cs typeface="PingFang SC"/>
-              </a:defRPr>
-            </a:pPr>
-            <a:r>
-              <a:rPr sz="1575" b="0">
-                <a:solidFill>
-                  <a:srgbClr val="E5E7EB"/>
-                </a:solidFill>
-                <a:latin typeface="PingFang SC"/>
-                <a:ea typeface="PingFang SC"/>
-                <a:cs typeface="PingFang SC"/>
-              </a:rPr>
-              <a:t>方法：用 AI 驱动的持续迭代框架，把长时间实验拆成可复现、可验证、可提交的 OS 修复。</a:t>
-            </a:r>
-          </a:p>
-        </p:txBody>
-      </p:sp>
-      <p:sp>
-        <p:nvSpPr>
-          <p:cNvPr id="8" name="">
-            <a:extLst xmlns:a="http://schemas.openxmlformats.org/drawingml/2006/main">
-              <a:ext uri="{FF2B5EF4-FFF2-40B4-BE49-F238E27FC236}">
-                <a16:creationId xmlns:a16="http://schemas.microsoft.com/office/drawing/2014/main" id="{5FF3F255-60F5-4F70-961F-F130D489479B}"/>
-              </a:ext>
-            </a:extLst>
-          </p:cNvPr>
-          <p:cNvSpPr>
-            <a:spLocks xmlns:a="http://schemas.openxmlformats.org/drawingml/2006/main" noGrp="1"/>
-          </p:cNvSpPr>
-          <p:nvPr/>
-        </p:nvSpPr>
-        <p:spPr>
-          <a:xfrm xmlns:a="http://schemas.openxmlformats.org/drawingml/2006/main">
-            <a:off x="800100" y="4638675"/>
-            <a:ext cx="76200" cy="76200"/>
-          </a:xfrm>
-          <a:prstGeom xmlns:a="http://schemas.openxmlformats.org/drawingml/2006/main" prst="rect">
-            <a:avLst/>
-          </a:prstGeom>
-          <a:solidFill xmlns:a="http://schemas.openxmlformats.org/drawingml/2006/main">
-            <a:srgbClr val="C45A18"/>
-          </a:solidFill>
-          <a:ln xmlns:a="http://schemas.openxmlformats.org/drawingml/2006/main" w="0">
-            <a:solidFill>
-              <a:srgbClr val="000000">
-                <a:alpha val="0"/>
-              </a:srgbClr>
-            </a:solidFill>
-            <a:prstDash val="solid"/>
-          </a:ln>
-        </p:spPr>
+              <a:defRPr sz="1425" b="0">
+                <a:solidFill>
+                  <a:srgbClr val="CBD5E1"/>
+                </a:solidFill>
+                <a:latin typeface="PingFang SC"/>
+                <a:ea typeface="PingFang SC"/>
+                <a:cs typeface="PingFang SC"/>
+              </a:defRPr>
+            </a:pPr>
+            <a:r>
+              <a:rPr sz="1425" b="0">
+                <a:solidFill>
+                  <a:srgbClr val="CBD5E1"/>
+                </a:solidFill>
+                <a:latin typeface="PingFang SC"/>
+                <a:ea typeface="PingFang SC"/>
+                <a:cs typeface="PingFang SC"/>
+              </a:rPr>
+              <a:t>先让 StarryOS 在 guest 环境中稳定完成一次自举编译，形成单核可复现基线。</a:t>
+            </a:r>
+          </a:p>
+        </p:txBody>
       </p:sp>
       <p:sp>
         <p:nvSpPr>
           <p:cNvPr id="9" name="">
             <a:extLst xmlns:a="http://schemas.openxmlformats.org/drawingml/2006/main">
               <a:ext uri="{FF2B5EF4-FFF2-40B4-BE49-F238E27FC236}">
-                <a16:creationId xmlns:a16="http://schemas.microsoft.com/office/drawing/2014/main" id="{BD96B6AD-89F7-4AE6-94F2-2A9406432829}"/>
-              </a:ext>
-            </a:extLst>
-          </p:cNvPr>
-          <p:cNvSpPr>
-            <a:spLocks xmlns:a="http://schemas.openxmlformats.org/drawingml/2006/main" noGrp="1"/>
-          </p:cNvSpPr>
-          <p:nvPr/>
-        </p:nvSpPr>
-        <p:spPr>
-          <a:xfrm xmlns:a="http://schemas.openxmlformats.org/drawingml/2006/main">
-            <a:off x="1028700" y="4533900"/>
-            <a:ext cx="8629650" cy="533400"/>
+                <a16:creationId xmlns:a16="http://schemas.microsoft.com/office/drawing/2014/main" id="{6DC28BB4-377E-40FB-B407-0AD78EEA29F8}"/>
+              </a:ext>
+            </a:extLst>
+          </p:cNvPr>
+          <p:cNvSpPr>
+            <a:spLocks xmlns:a="http://schemas.openxmlformats.org/drawingml/2006/main" noGrp="1"/>
+          </p:cNvSpPr>
+          <p:nvPr/>
+        </p:nvSpPr>
+        <p:spPr>
+          <a:xfrm xmlns:a="http://schemas.openxmlformats.org/drawingml/2006/main">
+            <a:off x="6191250" y="3562350"/>
+            <a:ext cx="4762500" cy="1428750"/>
+          </a:xfrm>
+          <a:prstGeom xmlns:a="http://schemas.openxmlformats.org/drawingml/2006/main" prst="rect">
+            <a:avLst/>
+          </a:prstGeom>
+          <a:solidFill xmlns:a="http://schemas.openxmlformats.org/drawingml/2006/main">
+            <a:srgbClr val="111C2F"/>
+          </a:solidFill>
+          <a:ln xmlns:a="http://schemas.openxmlformats.org/drawingml/2006/main" w="9525">
+            <a:solidFill>
+              <a:srgbClr val="334155"/>
+            </a:solidFill>
+            <a:prstDash val="solid"/>
+          </a:ln>
+        </p:spPr>
+      </p:sp>
+      <p:sp>
+        <p:nvSpPr>
+          <p:cNvPr id="10" name="">
+            <a:extLst xmlns:a="http://schemas.openxmlformats.org/drawingml/2006/main">
+              <a:ext uri="{FF2B5EF4-FFF2-40B4-BE49-F238E27FC236}">
+                <a16:creationId xmlns:a16="http://schemas.microsoft.com/office/drawing/2014/main" id="{D531AF68-2A05-42A3-994D-5541CBB339F9}"/>
+              </a:ext>
+            </a:extLst>
+          </p:cNvPr>
+          <p:cNvSpPr>
+            <a:spLocks xmlns:a="http://schemas.openxmlformats.org/drawingml/2006/main" noGrp="1"/>
+          </p:cNvSpPr>
+          <p:nvPr/>
+        </p:nvSpPr>
+        <p:spPr>
+          <a:xfrm xmlns:a="http://schemas.openxmlformats.org/drawingml/2006/main">
+            <a:off x="6438900" y="3810000"/>
+            <a:ext cx="438150" cy="438150"/>
+          </a:xfrm>
+          <a:prstGeom xmlns:a="http://schemas.openxmlformats.org/drawingml/2006/main" prst="rect">
+            <a:avLst/>
+          </a:prstGeom>
+          <a:solidFill xmlns:a="http://schemas.openxmlformats.org/drawingml/2006/main">
+            <a:srgbClr val="166534"/>
+          </a:solidFill>
+          <a:ln xmlns:a="http://schemas.openxmlformats.org/drawingml/2006/main" w="0">
+            <a:solidFill>
+              <a:srgbClr val="000000">
+                <a:alpha val="0"/>
+              </a:srgbClr>
+            </a:solidFill>
+            <a:prstDash val="solid"/>
+          </a:ln>
+        </p:spPr>
+        <p:txBody>
+          <a:bodyPr xmlns:a="http://schemas.openxmlformats.org/drawingml/2006/main" lIns="0" tIns="0" rIns="0" bIns="0" anchor="ctr"/>
+          <a:lstStyle xmlns:a="http://schemas.openxmlformats.org/drawingml/2006/main"/>
+          <a:p xmlns:a="http://schemas.openxmlformats.org/drawingml/2006/main">
+            <a:pPr algn="ctr">
+              <a:defRPr sz="2250" b="1">
+                <a:solidFill>
+                  <a:srgbClr val="BBF7D0"/>
+                </a:solidFill>
+                <a:latin typeface="PingFang SC"/>
+                <a:ea typeface="PingFang SC"/>
+                <a:cs typeface="PingFang SC"/>
+              </a:defRPr>
+            </a:pPr>
+            <a:r>
+              <a:rPr sz="2250" b="1">
+                <a:solidFill>
+                  <a:srgbClr val="BBF7D0"/>
+                </a:solidFill>
+                <a:latin typeface="PingFang SC"/>
+                <a:ea typeface="PingFang SC"/>
+                <a:cs typeface="PingFang SC"/>
+              </a:rPr>
+              <a:t>2</a:t>
+            </a:r>
+          </a:p>
+        </p:txBody>
+      </p:sp>
+      <p:sp>
+        <p:nvSpPr>
+          <p:cNvPr id="11" name="">
+            <a:extLst xmlns:a="http://schemas.openxmlformats.org/drawingml/2006/main">
+              <a:ext uri="{FF2B5EF4-FFF2-40B4-BE49-F238E27FC236}">
+                <a16:creationId xmlns:a16="http://schemas.microsoft.com/office/drawing/2014/main" id="{7E52A90E-450E-4695-8691-9579978D1E57}"/>
+              </a:ext>
+            </a:extLst>
+          </p:cNvPr>
+          <p:cNvSpPr>
+            <a:spLocks xmlns:a="http://schemas.openxmlformats.org/drawingml/2006/main" noGrp="1"/>
+          </p:cNvSpPr>
+          <p:nvPr/>
+        </p:nvSpPr>
+        <p:spPr>
+          <a:xfrm xmlns:a="http://schemas.openxmlformats.org/drawingml/2006/main">
+            <a:off x="7105650" y="3771900"/>
+            <a:ext cx="3238500" cy="323850"/>
           </a:xfrm>
           <a:prstGeom xmlns:a="http://schemas.openxmlformats.org/drawingml/2006/main" prst="rect">
             <a:avLst/>
@@ -2528,82 +2648,47 @@
           <a:lstStyle xmlns:a="http://schemas.openxmlformats.org/drawingml/2006/main"/>
           <a:p xmlns:a="http://schemas.openxmlformats.org/drawingml/2006/main">
             <a:pPr algn="l">
-              <a:defRPr sz="1575" b="0">
-                <a:solidFill>
-                  <a:srgbClr val="E5E7EB"/>
-                </a:solidFill>
-                <a:latin typeface="PingFang SC"/>
-                <a:ea typeface="PingFang SC"/>
-                <a:cs typeface="PingFang SC"/>
-              </a:defRPr>
-            </a:pPr>
-            <a:r>
-              <a:rPr sz="1575" b="0">
-                <a:solidFill>
-                  <a:srgbClr val="E5E7EB"/>
-                </a:solidFill>
-                <a:latin typeface="PingFang SC"/>
-                <a:ea typeface="PingFang SC"/>
-                <a:cs typeface="PingFang SC"/>
-              </a:rPr>
-              <a:t>成果：12 个 OS PR 已合入 TGOSKit dev；8 核 AArch64/HVF guest 完成 StarryOS self-build。</a:t>
-            </a:r>
-          </a:p>
-        </p:txBody>
-      </p:sp>
-      <p:sp>
-        <p:nvSpPr>
-          <p:cNvPr id="10" name="">
-            <a:extLst xmlns:a="http://schemas.openxmlformats.org/drawingml/2006/main">
-              <a:ext uri="{FF2B5EF4-FFF2-40B4-BE49-F238E27FC236}">
-                <a16:creationId xmlns:a16="http://schemas.microsoft.com/office/drawing/2014/main" id="{90F3FAD5-CACB-485C-AFA2-A42B48FC2B77}"/>
-              </a:ext>
-            </a:extLst>
-          </p:cNvPr>
-          <p:cNvSpPr>
-            <a:spLocks xmlns:a="http://schemas.openxmlformats.org/drawingml/2006/main" noGrp="1"/>
-          </p:cNvSpPr>
-          <p:nvPr/>
-        </p:nvSpPr>
-        <p:spPr>
-          <a:xfrm xmlns:a="http://schemas.openxmlformats.org/drawingml/2006/main">
-            <a:off x="800100" y="5172075"/>
-            <a:ext cx="76200" cy="76200"/>
-          </a:xfrm>
-          <a:prstGeom xmlns:a="http://schemas.openxmlformats.org/drawingml/2006/main" prst="rect">
-            <a:avLst/>
-          </a:prstGeom>
-          <a:solidFill xmlns:a="http://schemas.openxmlformats.org/drawingml/2006/main">
-            <a:srgbClr val="2563EB"/>
-          </a:solidFill>
-          <a:ln xmlns:a="http://schemas.openxmlformats.org/drawingml/2006/main" w="0">
-            <a:solidFill>
-              <a:srgbClr val="000000">
-                <a:alpha val="0"/>
-              </a:srgbClr>
-            </a:solidFill>
-            <a:prstDash val="solid"/>
-          </a:ln>
-        </p:spPr>
-      </p:sp>
-      <p:sp>
-        <p:nvSpPr>
-          <p:cNvPr id="11" name="">
-            <a:extLst xmlns:a="http://schemas.openxmlformats.org/drawingml/2006/main">
-              <a:ext uri="{FF2B5EF4-FFF2-40B4-BE49-F238E27FC236}">
-                <a16:creationId xmlns:a16="http://schemas.microsoft.com/office/drawing/2014/main" id="{EA72C90B-D074-49AD-8514-4C565AB8DC95}"/>
-              </a:ext>
-            </a:extLst>
-          </p:cNvPr>
-          <p:cNvSpPr>
-            <a:spLocks xmlns:a="http://schemas.openxmlformats.org/drawingml/2006/main" noGrp="1"/>
-          </p:cNvSpPr>
-          <p:nvPr/>
-        </p:nvSpPr>
-        <p:spPr>
-          <a:xfrm xmlns:a="http://schemas.openxmlformats.org/drawingml/2006/main">
-            <a:off x="1028700" y="5067300"/>
-            <a:ext cx="8629650" cy="533400"/>
+              <a:defRPr sz="2025" b="1">
+                <a:solidFill>
+                  <a:srgbClr val="FFFFFF"/>
+                </a:solidFill>
+                <a:latin typeface="PingFang SC"/>
+                <a:ea typeface="PingFang SC"/>
+                <a:cs typeface="PingFang SC"/>
+              </a:defRPr>
+            </a:pPr>
+            <a:r>
+              <a:rPr sz="2025" b="1">
+                <a:solidFill>
+                  <a:srgbClr val="FFFFFF"/>
+                </a:solidFill>
+                <a:latin typeface="PingFang SC"/>
+                <a:ea typeface="PingFang SC"/>
+                <a:cs typeface="PingFang SC"/>
+              </a:rPr>
+              <a:t>然后实现多核编译</a:t>
+            </a:r>
+          </a:p>
+        </p:txBody>
+      </p:sp>
+      <p:sp>
+        <p:nvSpPr>
+          <p:cNvPr id="12" name="">
+            <a:extLst xmlns:a="http://schemas.openxmlformats.org/drawingml/2006/main">
+              <a:ext uri="{FF2B5EF4-FFF2-40B4-BE49-F238E27FC236}">
+                <a16:creationId xmlns:a16="http://schemas.microsoft.com/office/drawing/2014/main" id="{A9C69AB3-69AA-40FC-A7E3-3320AEBC9EAE}"/>
+              </a:ext>
+            </a:extLst>
+          </p:cNvPr>
+          <p:cNvSpPr>
+            <a:spLocks xmlns:a="http://schemas.openxmlformats.org/drawingml/2006/main" noGrp="1"/>
+          </p:cNvSpPr>
+          <p:nvPr/>
+        </p:nvSpPr>
+        <p:spPr>
+          <a:xfrm xmlns:a="http://schemas.openxmlformats.org/drawingml/2006/main">
+            <a:off x="7124700" y="4248150"/>
+            <a:ext cx="3295650" cy="628650"/>
           </a:xfrm>
           <a:prstGeom xmlns:a="http://schemas.openxmlformats.org/drawingml/2006/main" prst="rect">
             <a:avLst/>
@@ -2627,168 +2712,7 @@
           <a:lstStyle xmlns:a="http://schemas.openxmlformats.org/drawingml/2006/main"/>
           <a:p xmlns:a="http://schemas.openxmlformats.org/drawingml/2006/main">
             <a:pPr algn="l">
-              <a:defRPr sz="1575" b="0">
-                <a:solidFill>
-                  <a:srgbClr val="E5E7EB"/>
-                </a:solidFill>
-                <a:latin typeface="PingFang SC"/>
-                <a:ea typeface="PingFang SC"/>
-                <a:cs typeface="PingFang SC"/>
-              </a:defRPr>
-            </a:pPr>
-            <a:r>
-              <a:rPr sz="1575" b="0">
-                <a:solidFill>
-                  <a:srgbClr val="E5E7EB"/>
-                </a:solidFill>
-                <a:latin typeface="PingFang SC"/>
-                <a:ea typeface="PingFang SC"/>
-                <a:cs typeface="PingFang SC"/>
-              </a:rPr>
-              <a:t>分析：用 host 对齐参考和微基准拆清 Cargo、OS、QEMU 各自承担的性能成本。</a:t>
-            </a:r>
-          </a:p>
-        </p:txBody>
-      </p:sp>
-      <p:sp>
-        <p:nvSpPr>
-          <p:cNvPr id="12" name="">
-            <a:extLst xmlns:a="http://schemas.openxmlformats.org/drawingml/2006/main">
-              <a:ext uri="{FF2B5EF4-FFF2-40B4-BE49-F238E27FC236}">
-                <a16:creationId xmlns:a16="http://schemas.microsoft.com/office/drawing/2014/main" id="{B5B4ACC0-F094-49E3-A541-F80D41B6E305}"/>
-              </a:ext>
-            </a:extLst>
-          </p:cNvPr>
-          <p:cNvSpPr>
-            <a:spLocks xmlns:a="http://schemas.openxmlformats.org/drawingml/2006/main" noGrp="1"/>
-          </p:cNvSpPr>
-          <p:nvPr/>
-        </p:nvSpPr>
-        <p:spPr>
-          <a:xfrm xmlns:a="http://schemas.openxmlformats.org/drawingml/2006/main">
-            <a:off x="9429750" y="4095750"/>
-            <a:ext cx="1581150" cy="1466850"/>
-          </a:xfrm>
-          <a:prstGeom xmlns:a="http://schemas.openxmlformats.org/drawingml/2006/main" prst="rect">
-            <a:avLst/>
-          </a:prstGeom>
-          <a:solidFill xmlns:a="http://schemas.openxmlformats.org/drawingml/2006/main">
-            <a:srgbClr val="111C2F"/>
-          </a:solidFill>
-          <a:ln xmlns:a="http://schemas.openxmlformats.org/drawingml/2006/main" w="9525">
-            <a:solidFill>
-              <a:srgbClr val="334155"/>
-            </a:solidFill>
-            <a:prstDash val="solid"/>
-          </a:ln>
-        </p:spPr>
-      </p:sp>
-      <p:sp>
-        <p:nvSpPr>
-          <p:cNvPr id="13" name="">
-            <a:extLst xmlns:a="http://schemas.openxmlformats.org/drawingml/2006/main">
-              <a:ext uri="{FF2B5EF4-FFF2-40B4-BE49-F238E27FC236}">
-                <a16:creationId xmlns:a16="http://schemas.microsoft.com/office/drawing/2014/main" id="{EF13EB02-3205-410E-B36F-73B3B86B873A}"/>
-              </a:ext>
-            </a:extLst>
-          </p:cNvPr>
-          <p:cNvSpPr>
-            <a:spLocks xmlns:a="http://schemas.openxmlformats.org/drawingml/2006/main" noGrp="1"/>
-          </p:cNvSpPr>
-          <p:nvPr/>
-        </p:nvSpPr>
-        <p:spPr>
-          <a:xfrm xmlns:a="http://schemas.openxmlformats.org/drawingml/2006/main">
-            <a:off x="9696450" y="4324350"/>
-            <a:ext cx="1047750" cy="247650"/>
-          </a:xfrm>
-          <a:prstGeom xmlns:a="http://schemas.openxmlformats.org/drawingml/2006/main" prst="rect">
-            <a:avLst/>
-          </a:prstGeom>
-          <a:solidFill xmlns:a="http://schemas.openxmlformats.org/drawingml/2006/main">
-            <a:srgbClr val="000000">
-              <a:alpha val="0"/>
-            </a:srgbClr>
-          </a:solidFill>
-          <a:ln xmlns:a="http://schemas.openxmlformats.org/drawingml/2006/main" w="0">
-            <a:solidFill>
-              <a:srgbClr val="000000">
-                <a:alpha val="0"/>
-              </a:srgbClr>
-            </a:solidFill>
-            <a:prstDash val="solid"/>
-          </a:ln>
-        </p:spPr>
-        <p:txBody>
-          <a:bodyPr xmlns:a="http://schemas.openxmlformats.org/drawingml/2006/main" lIns="0" tIns="0" rIns="0" bIns="0" anchor="t"/>
-          <a:lstStyle xmlns:a="http://schemas.openxmlformats.org/drawingml/2006/main"/>
-          <a:p xmlns:a="http://schemas.openxmlformats.org/drawingml/2006/main">
-            <a:pPr algn="ctr">
-              <a:defRPr sz="1500" b="1">
-                <a:solidFill>
-                  <a:srgbClr val="93C5FD"/>
-                </a:solidFill>
-                <a:latin typeface="PingFang SC"/>
-                <a:ea typeface="PingFang SC"/>
-                <a:cs typeface="PingFang SC"/>
-              </a:defRPr>
-            </a:pPr>
-            <a:r>
-              <a:rPr sz="1500" b="1">
-                <a:solidFill>
-                  <a:srgbClr val="93C5FD"/>
-                </a:solidFill>
-                <a:latin typeface="PingFang SC"/>
-                <a:ea typeface="PingFang SC"/>
-                <a:cs typeface="PingFang SC"/>
-              </a:rPr>
-              <a:t>路线</a:t>
-            </a:r>
-          </a:p>
-        </p:txBody>
-      </p:sp>
-      <p:sp>
-        <p:nvSpPr>
-          <p:cNvPr id="14" name="">
-            <a:extLst xmlns:a="http://schemas.openxmlformats.org/drawingml/2006/main">
-              <a:ext uri="{FF2B5EF4-FFF2-40B4-BE49-F238E27FC236}">
-                <a16:creationId xmlns:a16="http://schemas.microsoft.com/office/drawing/2014/main" id="{95F49522-AA32-447D-86F8-89CE0AB6D8B6}"/>
-              </a:ext>
-            </a:extLst>
-          </p:cNvPr>
-          <p:cNvSpPr>
-            <a:spLocks xmlns:a="http://schemas.openxmlformats.org/drawingml/2006/main" noGrp="1"/>
-          </p:cNvSpPr>
-          <p:nvPr/>
-        </p:nvSpPr>
-        <p:spPr>
-          <a:xfrm xmlns:a="http://schemas.openxmlformats.org/drawingml/2006/main">
-            <a:off x="9639300" y="4686300"/>
-            <a:ext cx="1162050" cy="685800"/>
-          </a:xfrm>
-          <a:prstGeom xmlns:a="http://schemas.openxmlformats.org/drawingml/2006/main" prst="rect">
-            <a:avLst/>
-          </a:prstGeom>
-          <a:solidFill xmlns:a="http://schemas.openxmlformats.org/drawingml/2006/main">
-            <a:srgbClr val="000000">
-              <a:alpha val="0"/>
-            </a:srgbClr>
-          </a:solidFill>
-          <a:ln xmlns:a="http://schemas.openxmlformats.org/drawingml/2006/main" w="0">
-            <a:solidFill>
-              <a:srgbClr val="000000">
-                <a:alpha val="0"/>
-              </a:srgbClr>
-            </a:solidFill>
-            <a:prstDash val="solid"/>
-          </a:ln>
-        </p:spPr>
-        <p:txBody>
-          <a:bodyPr xmlns:a="http://schemas.openxmlformats.org/drawingml/2006/main" lIns="0" tIns="0" rIns="0" bIns="0" anchor="t"/>
-          <a:lstStyle xmlns:a="http://schemas.openxmlformats.org/drawingml/2006/main"/>
-          <a:p xmlns:a="http://schemas.openxmlformats.org/drawingml/2006/main">
-            <a:pPr algn="ctr">
-              <a:defRPr sz="1200" b="0">
+              <a:defRPr sz="1425" b="0">
                 <a:solidFill>
                   <a:srgbClr val="CBD5E1"/>
                 </a:solidFill>
@@ -2798,7 +2722,7 @@
               </a:defRPr>
             </a:pPr>
             <a:r>
-              <a:rPr sz="1200" b="0">
+              <a:rPr sz="1425" b="0">
                 <a:solidFill>
                   <a:srgbClr val="CBD5E1"/>
                 </a:solidFill>
@@ -2806,76 +2730,7 @@
                 <a:ea typeface="PingFang SC"/>
                 <a:cs typeface="PingFang SC"/>
               </a:rPr>
-              <a:t>真实 workload</a:t>
-            </a:r>
-          </a:p>
-          <a:p xmlns:a="http://schemas.openxmlformats.org/drawingml/2006/main">
-            <a:pPr algn="ctr">
-              <a:defRPr sz="1200" b="0">
-                <a:solidFill>
-                  <a:srgbClr val="CBD5E1"/>
-                </a:solidFill>
-                <a:latin typeface="PingFang SC"/>
-                <a:ea typeface="PingFang SC"/>
-                <a:cs typeface="PingFang SC"/>
-              </a:defRPr>
-            </a:pPr>
-            <a:r>
-              <a:rPr sz="1200" b="0">
-                <a:solidFill>
-                  <a:srgbClr val="CBD5E1"/>
-                </a:solidFill>
-                <a:latin typeface="PingFang SC"/>
-                <a:ea typeface="PingFang SC"/>
-                <a:cs typeface="PingFang SC"/>
-              </a:rPr>
-              <a:t>暴露 OS 问题</a:t>
-            </a:r>
-          </a:p>
-          <a:p xmlns:a="http://schemas.openxmlformats.org/drawingml/2006/main">
-            <a:pPr algn="ctr">
-              <a:defRPr sz="1200" b="0">
-                <a:solidFill>
-                  <a:srgbClr val="CBD5E1"/>
-                </a:solidFill>
-                <a:latin typeface="PingFang SC"/>
-                <a:ea typeface="PingFang SC"/>
-                <a:cs typeface="PingFang SC"/>
-              </a:defRPr>
-            </a:pPr>
-            <a:r>
-              <a:rPr sz="1200" b="0">
-                <a:solidFill>
-                  <a:srgbClr val="CBD5E1"/>
-                </a:solidFill>
-                <a:latin typeface="PingFang SC"/>
-                <a:ea typeface="PingFang SC"/>
-                <a:cs typeface="PingFang SC"/>
-              </a:rPr>
-              <a:t>形成 PR 与测例</a:t>
-            </a:r>
-          </a:p>
-          <a:p xmlns:a="http://schemas.openxmlformats.org/drawingml/2006/main">
-            <a:pPr algn="ctr">
-              <a:defRPr sz="1200" b="0">
-                <a:solidFill>
-                  <a:srgbClr val="CBD5E1"/>
-                </a:solidFill>
-                <a:latin typeface="PingFang SC"/>
-                <a:ea typeface="PingFang SC"/>
-                <a:cs typeface="PingFang SC"/>
-              </a:defRPr>
-            </a:pPr>
-            <a:r>
-              <a:rPr sz="1200" b="0">
-                <a:solidFill>
-                  <a:srgbClr val="CBD5E1"/>
-                </a:solidFill>
-                <a:latin typeface="PingFang SC"/>
-                <a:ea typeface="PingFang SC"/>
-                <a:cs typeface="PingFang SC"/>
-              </a:rPr>
-              <a:t>再做性能诊断</a:t>
+              <a:t>再沿同一条链路推进多核，让 StarryOS 在 guest 内以多核方式完成自举编译。</a:t>
             </a:r>
           </a:p>
         </p:txBody>
@@ -2883,7 +2738,7 @@
     </p:spTree>
     <p:extLst>
       <p:ext uri="{BB962C8B-B14F-4D97-AF65-F5344CB8AC3E}">
-        <p14:creationId xmlns:p14="http://schemas.microsoft.com/office/powerpoint/2010/main" val="1000153555"/>
+        <p14:creationId xmlns:p14="http://schemas.microsoft.com/office/powerpoint/2010/main" val="1811895068"/>
       </p:ext>
     </p:extLst>
   </p:cSld>
@@ -2914,7 +2769,7 @@
           <p:cNvPr id="1" name="">
             <a:extLst xmlns:a="http://schemas.openxmlformats.org/drawingml/2006/main">
               <a:ext uri="{FF2B5EF4-FFF2-40B4-BE49-F238E27FC236}">
-                <a16:creationId xmlns:a16="http://schemas.microsoft.com/office/drawing/2014/main" id="{28694C74-31B8-4AD5-AF81-71402151903A}"/>
+                <a16:creationId xmlns:a16="http://schemas.microsoft.com/office/drawing/2014/main" id="{404108C5-FE6A-4BD0-B34D-2C4F92EFA3E5}"/>
               </a:ext>
             </a:extLst>
           </p:cNvPr>
@@ -2949,7 +2804,7 @@
           <p:cNvPr id="2" name="">
             <a:extLst xmlns:a="http://schemas.openxmlformats.org/drawingml/2006/main">
               <a:ext uri="{FF2B5EF4-FFF2-40B4-BE49-F238E27FC236}">
-                <a16:creationId xmlns:a16="http://schemas.microsoft.com/office/drawing/2014/main" id="{A8DB2C54-4374-4782-B411-B22784B1802B}"/>
+                <a16:creationId xmlns:a16="http://schemas.microsoft.com/office/drawing/2014/main" id="{2A482E8A-0B92-4324-B570-9021980877C2}"/>
               </a:ext>
             </a:extLst>
           </p:cNvPr>
@@ -3013,7 +2868,7 @@
           <p:cNvPr id="3" name="">
             <a:extLst xmlns:a="http://schemas.openxmlformats.org/drawingml/2006/main">
               <a:ext uri="{FF2B5EF4-FFF2-40B4-BE49-F238E27FC236}">
-                <a16:creationId xmlns:a16="http://schemas.microsoft.com/office/drawing/2014/main" id="{1133223F-45CB-4BAC-8750-2C8159559819}"/>
+                <a16:creationId xmlns:a16="http://schemas.microsoft.com/office/drawing/2014/main" id="{93345654-AE8F-4B1E-8529-F9723908D72C}"/>
               </a:ext>
             </a:extLst>
           </p:cNvPr>
@@ -3077,7 +2932,7 @@
           <p:cNvPr id="4" name="">
             <a:extLst xmlns:a="http://schemas.openxmlformats.org/drawingml/2006/main">
               <a:ext uri="{FF2B5EF4-FFF2-40B4-BE49-F238E27FC236}">
-                <a16:creationId xmlns:a16="http://schemas.microsoft.com/office/drawing/2014/main" id="{8A724F07-9A2C-4CF0-BBB4-B221D33DDC7F}"/>
+                <a16:creationId xmlns:a16="http://schemas.microsoft.com/office/drawing/2014/main" id="{51B1CCCB-71F2-46D6-A3D6-664FDF408490}"/>
               </a:ext>
             </a:extLst>
           </p:cNvPr>
@@ -3141,7 +2996,7 @@
           <p:cNvPr id="5" name="">
             <a:extLst xmlns:a="http://schemas.openxmlformats.org/drawingml/2006/main">
               <a:ext uri="{FF2B5EF4-FFF2-40B4-BE49-F238E27FC236}">
-                <a16:creationId xmlns:a16="http://schemas.microsoft.com/office/drawing/2014/main" id="{2095044B-7A4A-4772-B3DF-FBDFBCCD7480}"/>
+                <a16:creationId xmlns:a16="http://schemas.microsoft.com/office/drawing/2014/main" id="{E65BF77B-D847-4C9F-BDFF-2E3F8444523B}"/>
               </a:ext>
             </a:extLst>
           </p:cNvPr>
@@ -3205,7 +3060,7 @@
           <p:cNvPr id="6" name="">
             <a:extLst xmlns:a="http://schemas.openxmlformats.org/drawingml/2006/main">
               <a:ext uri="{FF2B5EF4-FFF2-40B4-BE49-F238E27FC236}">
-                <a16:creationId xmlns:a16="http://schemas.microsoft.com/office/drawing/2014/main" id="{A03ACD6A-3BEE-4957-95D8-EB06678042A2}"/>
+                <a16:creationId xmlns:a16="http://schemas.microsoft.com/office/drawing/2014/main" id="{98C60FC7-CDAD-4D03-8923-01AF6909AB2B}"/>
               </a:ext>
             </a:extLst>
           </p:cNvPr>
@@ -3238,7 +3093,7 @@
           <p:cNvPr id="7" name="">
             <a:extLst xmlns:a="http://schemas.openxmlformats.org/drawingml/2006/main">
               <a:ext uri="{FF2B5EF4-FFF2-40B4-BE49-F238E27FC236}">
-                <a16:creationId xmlns:a16="http://schemas.microsoft.com/office/drawing/2014/main" id="{2DF83696-D8ED-44F8-B896-B93A3AA175E3}"/>
+                <a16:creationId xmlns:a16="http://schemas.microsoft.com/office/drawing/2014/main" id="{B5BD9950-CF41-4CEB-B111-3B14DC53BACF}"/>
               </a:ext>
             </a:extLst>
           </p:cNvPr>
@@ -3273,7 +3128,7 @@
           <p:cNvPr id="8" name="">
             <a:extLst xmlns:a="http://schemas.openxmlformats.org/drawingml/2006/main">
               <a:ext uri="{FF2B5EF4-FFF2-40B4-BE49-F238E27FC236}">
-                <a16:creationId xmlns:a16="http://schemas.microsoft.com/office/drawing/2014/main" id="{8AC4F7BA-F523-4BCD-9FBB-F8EB6020C1B3}"/>
+                <a16:creationId xmlns:a16="http://schemas.microsoft.com/office/drawing/2014/main" id="{6B2894F8-8A45-425C-8E48-E5ABE159D4FF}"/>
               </a:ext>
             </a:extLst>
           </p:cNvPr>
@@ -3337,7 +3192,7 @@
           <p:cNvPr id="9" name="">
             <a:extLst xmlns:a="http://schemas.openxmlformats.org/drawingml/2006/main">
               <a:ext uri="{FF2B5EF4-FFF2-40B4-BE49-F238E27FC236}">
-                <a16:creationId xmlns:a16="http://schemas.microsoft.com/office/drawing/2014/main" id="{A4E48157-CB09-4140-BCD4-07E3E8874638}"/>
+                <a16:creationId xmlns:a16="http://schemas.microsoft.com/office/drawing/2014/main" id="{3BA7D5B2-FC91-43EF-BD8A-F01B7DCC159B}"/>
               </a:ext>
             </a:extLst>
           </p:cNvPr>
@@ -3383,7 +3238,7 @@
           <p:cNvPr id="10" name="">
             <a:extLst xmlns:a="http://schemas.openxmlformats.org/drawingml/2006/main">
               <a:ext uri="{FF2B5EF4-FFF2-40B4-BE49-F238E27FC236}">
-                <a16:creationId xmlns:a16="http://schemas.microsoft.com/office/drawing/2014/main" id="{2233C86F-CCE4-4211-9DA2-8DC8DAD2EAFD}"/>
+                <a16:creationId xmlns:a16="http://schemas.microsoft.com/office/drawing/2014/main" id="{8D67D8A8-EACB-45A7-AEF2-400BF726AF5C}"/>
               </a:ext>
             </a:extLst>
           </p:cNvPr>
@@ -3416,7 +3271,7 @@
           <p:cNvPr id="11" name="">
             <a:extLst xmlns:a="http://schemas.openxmlformats.org/drawingml/2006/main">
               <a:ext uri="{FF2B5EF4-FFF2-40B4-BE49-F238E27FC236}">
-                <a16:creationId xmlns:a16="http://schemas.microsoft.com/office/drawing/2014/main" id="{41B265CC-B0F4-4232-8E35-E504AFF9D5D7}"/>
+                <a16:creationId xmlns:a16="http://schemas.microsoft.com/office/drawing/2014/main" id="{BD1AB506-66AB-41AA-83FB-E4D49DAF88F4}"/>
               </a:ext>
             </a:extLst>
           </p:cNvPr>
@@ -3451,7 +3306,7 @@
           <p:cNvPr id="12" name="">
             <a:extLst xmlns:a="http://schemas.openxmlformats.org/drawingml/2006/main">
               <a:ext uri="{FF2B5EF4-FFF2-40B4-BE49-F238E27FC236}">
-                <a16:creationId xmlns:a16="http://schemas.microsoft.com/office/drawing/2014/main" id="{BF3784A7-63B0-4024-A420-422E305E67D4}"/>
+                <a16:creationId xmlns:a16="http://schemas.microsoft.com/office/drawing/2014/main" id="{6659F124-E7E6-42DE-8F9A-78201FF29914}"/>
               </a:ext>
             </a:extLst>
           </p:cNvPr>
@@ -3515,7 +3370,7 @@
           <p:cNvPr id="13" name="">
             <a:extLst xmlns:a="http://schemas.openxmlformats.org/drawingml/2006/main">
               <a:ext uri="{FF2B5EF4-FFF2-40B4-BE49-F238E27FC236}">
-                <a16:creationId xmlns:a16="http://schemas.microsoft.com/office/drawing/2014/main" id="{78963770-262A-4B9A-B0C6-DB0C3D98F2CC}"/>
+                <a16:creationId xmlns:a16="http://schemas.microsoft.com/office/drawing/2014/main" id="{89AC60EC-8283-42C9-8149-2F19F42FDFE8}"/>
               </a:ext>
             </a:extLst>
           </p:cNvPr>
@@ -3561,7 +3416,7 @@
           <p:cNvPr id="14" name="">
             <a:extLst xmlns:a="http://schemas.openxmlformats.org/drawingml/2006/main">
               <a:ext uri="{FF2B5EF4-FFF2-40B4-BE49-F238E27FC236}">
-                <a16:creationId xmlns:a16="http://schemas.microsoft.com/office/drawing/2014/main" id="{9266528D-6FA6-45EB-B2F9-E96AA147CDA8}"/>
+                <a16:creationId xmlns:a16="http://schemas.microsoft.com/office/drawing/2014/main" id="{A637CEB7-13FD-4EA7-A23B-FC6B8B370E64}"/>
               </a:ext>
             </a:extLst>
           </p:cNvPr>
@@ -3596,7 +3451,7 @@
           <p:cNvPr id="15" name="">
             <a:extLst xmlns:a="http://schemas.openxmlformats.org/drawingml/2006/main">
               <a:ext uri="{FF2B5EF4-FFF2-40B4-BE49-F238E27FC236}">
-                <a16:creationId xmlns:a16="http://schemas.microsoft.com/office/drawing/2014/main" id="{C2CDD973-AE3F-4CBD-8C12-BB7616D407E3}"/>
+                <a16:creationId xmlns:a16="http://schemas.microsoft.com/office/drawing/2014/main" id="{9B68518D-C667-4297-8434-CD497ED6C5BE}"/>
               </a:ext>
             </a:extLst>
           </p:cNvPr>
@@ -3660,7 +3515,7 @@
           <p:cNvPr id="16" name="">
             <a:extLst xmlns:a="http://schemas.openxmlformats.org/drawingml/2006/main">
               <a:ext uri="{FF2B5EF4-FFF2-40B4-BE49-F238E27FC236}">
-                <a16:creationId xmlns:a16="http://schemas.microsoft.com/office/drawing/2014/main" id="{455E0E53-F95D-4FCF-B149-FFE1608BDA00}"/>
+                <a16:creationId xmlns:a16="http://schemas.microsoft.com/office/drawing/2014/main" id="{70F4E9D9-9532-4232-8BC5-8C2AA7BE88F3}"/>
               </a:ext>
             </a:extLst>
           </p:cNvPr>
@@ -3695,7 +3550,7 @@
           <p:cNvPr id="17" name="">
             <a:extLst xmlns:a="http://schemas.openxmlformats.org/drawingml/2006/main">
               <a:ext uri="{FF2B5EF4-FFF2-40B4-BE49-F238E27FC236}">
-                <a16:creationId xmlns:a16="http://schemas.microsoft.com/office/drawing/2014/main" id="{A5445D6A-48D1-4E54-AA7C-12B24FB4FD38}"/>
+                <a16:creationId xmlns:a16="http://schemas.microsoft.com/office/drawing/2014/main" id="{71E3C299-BFCB-43D9-9F26-76F8021845E4}"/>
               </a:ext>
             </a:extLst>
           </p:cNvPr>
@@ -3759,7 +3614,7 @@
           <p:cNvPr id="18" name="">
             <a:extLst xmlns:a="http://schemas.openxmlformats.org/drawingml/2006/main">
               <a:ext uri="{FF2B5EF4-FFF2-40B4-BE49-F238E27FC236}">
-                <a16:creationId xmlns:a16="http://schemas.microsoft.com/office/drawing/2014/main" id="{2A57DE5B-3DE5-4441-9EA6-2C585DE4D8BC}"/>
+                <a16:creationId xmlns:a16="http://schemas.microsoft.com/office/drawing/2014/main" id="{AA423A9A-8A90-4CF1-A198-D68FD8693290}"/>
               </a:ext>
             </a:extLst>
           </p:cNvPr>
@@ -3794,7 +3649,7 @@
           <p:cNvPr id="19" name="">
             <a:extLst xmlns:a="http://schemas.openxmlformats.org/drawingml/2006/main">
               <a:ext uri="{FF2B5EF4-FFF2-40B4-BE49-F238E27FC236}">
-                <a16:creationId xmlns:a16="http://schemas.microsoft.com/office/drawing/2014/main" id="{4A495DE3-D4DB-4785-963D-9591C3BB84EE}"/>
+                <a16:creationId xmlns:a16="http://schemas.microsoft.com/office/drawing/2014/main" id="{1B4700A7-7B20-4371-B7BB-DE0E372C258E}"/>
               </a:ext>
             </a:extLst>
           </p:cNvPr>
@@ -3858,7 +3713,7 @@
           <p:cNvPr id="20" name="">
             <a:extLst xmlns:a="http://schemas.openxmlformats.org/drawingml/2006/main">
               <a:ext uri="{FF2B5EF4-FFF2-40B4-BE49-F238E27FC236}">
-                <a16:creationId xmlns:a16="http://schemas.microsoft.com/office/drawing/2014/main" id="{83FD1764-4D86-4219-A531-DE9576944F22}"/>
+                <a16:creationId xmlns:a16="http://schemas.microsoft.com/office/drawing/2014/main" id="{BB79B0CA-6586-4D8E-AD0B-478609AACD36}"/>
               </a:ext>
             </a:extLst>
           </p:cNvPr>
@@ -3893,7 +3748,7 @@
           <p:cNvPr id="21" name="">
             <a:extLst xmlns:a="http://schemas.openxmlformats.org/drawingml/2006/main">
               <a:ext uri="{FF2B5EF4-FFF2-40B4-BE49-F238E27FC236}">
-                <a16:creationId xmlns:a16="http://schemas.microsoft.com/office/drawing/2014/main" id="{407D576E-BFEB-4D64-96D3-34921E0C584A}"/>
+                <a16:creationId xmlns:a16="http://schemas.microsoft.com/office/drawing/2014/main" id="{B4A51D57-DFE1-439A-984E-5CE238088AC2}"/>
               </a:ext>
             </a:extLst>
           </p:cNvPr>
@@ -3957,7 +3812,7 @@
           <p:cNvPr id="22" name="">
             <a:extLst xmlns:a="http://schemas.openxmlformats.org/drawingml/2006/main">
               <a:ext uri="{FF2B5EF4-FFF2-40B4-BE49-F238E27FC236}">
-                <a16:creationId xmlns:a16="http://schemas.microsoft.com/office/drawing/2014/main" id="{CB548E9E-F23E-4934-BB61-184D9F49167C}"/>
+                <a16:creationId xmlns:a16="http://schemas.microsoft.com/office/drawing/2014/main" id="{E7EFC2CD-0A9E-466D-AE80-5C2BEACACEBB}"/>
               </a:ext>
             </a:extLst>
           </p:cNvPr>
@@ -3992,7 +3847,7 @@
           <p:cNvPr id="23" name="">
             <a:extLst xmlns:a="http://schemas.openxmlformats.org/drawingml/2006/main">
               <a:ext uri="{FF2B5EF4-FFF2-40B4-BE49-F238E27FC236}">
-                <a16:creationId xmlns:a16="http://schemas.microsoft.com/office/drawing/2014/main" id="{AC5C07C3-FD6F-4826-96CF-5809ED5DF503}"/>
+                <a16:creationId xmlns:a16="http://schemas.microsoft.com/office/drawing/2014/main" id="{B6731A2A-E830-415B-A2A1-4F9BA605D797}"/>
               </a:ext>
             </a:extLst>
           </p:cNvPr>
@@ -4056,7 +3911,7 @@
           <p:cNvPr id="24" name="">
             <a:extLst xmlns:a="http://schemas.openxmlformats.org/drawingml/2006/main">
               <a:ext uri="{FF2B5EF4-FFF2-40B4-BE49-F238E27FC236}">
-                <a16:creationId xmlns:a16="http://schemas.microsoft.com/office/drawing/2014/main" id="{B22033FA-55E1-4590-BEBC-062E61D3AE9B}"/>
+                <a16:creationId xmlns:a16="http://schemas.microsoft.com/office/drawing/2014/main" id="{EAD2AED4-8EDB-4745-948E-B83E8EFD94FE}"/>
               </a:ext>
             </a:extLst>
           </p:cNvPr>
@@ -4116,7 +3971,7 @@
     </p:spTree>
     <p:extLst>
       <p:ext uri="{BB962C8B-B14F-4D97-AF65-F5344CB8AC3E}">
-        <p14:creationId xmlns:p14="http://schemas.microsoft.com/office/powerpoint/2010/main" val="1160147281"/>
+        <p14:creationId xmlns:p14="http://schemas.microsoft.com/office/powerpoint/2010/main" val="1015964189"/>
       </p:ext>
     </p:extLst>
   </p:cSld>
@@ -4147,7 +4002,7 @@
           <p:cNvPr id="1" name="">
             <a:extLst xmlns:a="http://schemas.openxmlformats.org/drawingml/2006/main">
               <a:ext uri="{FF2B5EF4-FFF2-40B4-BE49-F238E27FC236}">
-                <a16:creationId xmlns:a16="http://schemas.microsoft.com/office/drawing/2014/main" id="{D79CE832-D922-4728-9B11-E4F44ECB54FB}"/>
+                <a16:creationId xmlns:a16="http://schemas.microsoft.com/office/drawing/2014/main" id="{441975D7-81D4-4E08-9734-C96CB1DCB1FD}"/>
               </a:ext>
             </a:extLst>
           </p:cNvPr>
@@ -4182,7 +4037,7 @@
           <p:cNvPr id="2" name="">
             <a:extLst xmlns:a="http://schemas.openxmlformats.org/drawingml/2006/main">
               <a:ext uri="{FF2B5EF4-FFF2-40B4-BE49-F238E27FC236}">
-                <a16:creationId xmlns:a16="http://schemas.microsoft.com/office/drawing/2014/main" id="{5840699A-FA89-4792-A6AE-598043348DCF}"/>
+                <a16:creationId xmlns:a16="http://schemas.microsoft.com/office/drawing/2014/main" id="{A28EF9B4-DBB3-42DF-9F83-43B55E600503}"/>
               </a:ext>
             </a:extLst>
           </p:cNvPr>
@@ -4246,7 +4101,7 @@
           <p:cNvPr id="3" name="">
             <a:extLst xmlns:a="http://schemas.openxmlformats.org/drawingml/2006/main">
               <a:ext uri="{FF2B5EF4-FFF2-40B4-BE49-F238E27FC236}">
-                <a16:creationId xmlns:a16="http://schemas.microsoft.com/office/drawing/2014/main" id="{A670F20A-A784-41AB-9C17-A1C1ED0396F9}"/>
+                <a16:creationId xmlns:a16="http://schemas.microsoft.com/office/drawing/2014/main" id="{48F47E07-633B-4C07-A019-6339F6A0D4CF}"/>
               </a:ext>
             </a:extLst>
           </p:cNvPr>
@@ -4310,7 +4165,7 @@
           <p:cNvPr id="4" name="">
             <a:extLst xmlns:a="http://schemas.openxmlformats.org/drawingml/2006/main">
               <a:ext uri="{FF2B5EF4-FFF2-40B4-BE49-F238E27FC236}">
-                <a16:creationId xmlns:a16="http://schemas.microsoft.com/office/drawing/2014/main" id="{9DA1EE77-B31F-4A73-A54D-2903C8B352C6}"/>
+                <a16:creationId xmlns:a16="http://schemas.microsoft.com/office/drawing/2014/main" id="{8227E6B6-56C5-44A1-885F-FA4B18FA6F4D}"/>
               </a:ext>
             </a:extLst>
           </p:cNvPr>
@@ -4374,7 +4229,7 @@
           <p:cNvPr id="5" name="">
             <a:extLst xmlns:a="http://schemas.openxmlformats.org/drawingml/2006/main">
               <a:ext uri="{FF2B5EF4-FFF2-40B4-BE49-F238E27FC236}">
-                <a16:creationId xmlns:a16="http://schemas.microsoft.com/office/drawing/2014/main" id="{F39A667C-6213-4C7C-9994-55C6D2E6FCF1}"/>
+                <a16:creationId xmlns:a16="http://schemas.microsoft.com/office/drawing/2014/main" id="{0DA62FC9-444C-4CEF-B736-AC27599F1F4D}"/>
               </a:ext>
             </a:extLst>
           </p:cNvPr>
@@ -4438,7 +4293,7 @@
           <p:cNvPr id="6" name="">
             <a:extLst xmlns:a="http://schemas.openxmlformats.org/drawingml/2006/main">
               <a:ext uri="{FF2B5EF4-FFF2-40B4-BE49-F238E27FC236}">
-                <a16:creationId xmlns:a16="http://schemas.microsoft.com/office/drawing/2014/main" id="{63FA745B-F890-4164-94CE-D92DF62B48C7}"/>
+                <a16:creationId xmlns:a16="http://schemas.microsoft.com/office/drawing/2014/main" id="{CD466405-D5FB-49AA-A077-C00E1AF0FDAE}"/>
               </a:ext>
             </a:extLst>
           </p:cNvPr>
@@ -4471,7 +4326,7 @@
           <p:cNvPr id="7" name="">
             <a:extLst xmlns:a="http://schemas.openxmlformats.org/drawingml/2006/main">
               <a:ext uri="{FF2B5EF4-FFF2-40B4-BE49-F238E27FC236}">
-                <a16:creationId xmlns:a16="http://schemas.microsoft.com/office/drawing/2014/main" id="{C73C9BAF-6A7F-48A5-A059-4406A268AADB}"/>
+                <a16:creationId xmlns:a16="http://schemas.microsoft.com/office/drawing/2014/main" id="{261CCE42-DB69-4D47-9E36-2F97DEE3280A}"/>
               </a:ext>
             </a:extLst>
           </p:cNvPr>
@@ -4506,7 +4361,7 @@
           <p:cNvPr id="8" name="">
             <a:extLst xmlns:a="http://schemas.openxmlformats.org/drawingml/2006/main">
               <a:ext uri="{FF2B5EF4-FFF2-40B4-BE49-F238E27FC236}">
-                <a16:creationId xmlns:a16="http://schemas.microsoft.com/office/drawing/2014/main" id="{0C66D2C7-17D1-42AB-B67D-DCDCB8CDF33C}"/>
+                <a16:creationId xmlns:a16="http://schemas.microsoft.com/office/drawing/2014/main" id="{6656674B-AB95-498B-8518-6D3240A92779}"/>
               </a:ext>
             </a:extLst>
           </p:cNvPr>
@@ -4570,7 +4425,7 @@
           <p:cNvPr id="9" name="">
             <a:extLst xmlns:a="http://schemas.openxmlformats.org/drawingml/2006/main">
               <a:ext uri="{FF2B5EF4-FFF2-40B4-BE49-F238E27FC236}">
-                <a16:creationId xmlns:a16="http://schemas.microsoft.com/office/drawing/2014/main" id="{F7A4819C-B9E6-434B-A063-6326D81FD20C}"/>
+                <a16:creationId xmlns:a16="http://schemas.microsoft.com/office/drawing/2014/main" id="{16BE6326-32C4-4C9A-AE3E-F886269F389B}"/>
               </a:ext>
             </a:extLst>
           </p:cNvPr>
@@ -4634,7 +4489,7 @@
           <p:cNvPr id="10" name="">
             <a:extLst xmlns:a="http://schemas.openxmlformats.org/drawingml/2006/main">
               <a:ext uri="{FF2B5EF4-FFF2-40B4-BE49-F238E27FC236}">
-                <a16:creationId xmlns:a16="http://schemas.microsoft.com/office/drawing/2014/main" id="{A47F08CF-698F-437C-A399-FA1DE4A6CB89}"/>
+                <a16:creationId xmlns:a16="http://schemas.microsoft.com/office/drawing/2014/main" id="{F3724FF9-FBC4-46A9-80F2-0265BDD44288}"/>
               </a:ext>
             </a:extLst>
           </p:cNvPr>
@@ -4667,7 +4522,7 @@
           <p:cNvPr id="11" name="">
             <a:extLst xmlns:a="http://schemas.openxmlformats.org/drawingml/2006/main">
               <a:ext uri="{FF2B5EF4-FFF2-40B4-BE49-F238E27FC236}">
-                <a16:creationId xmlns:a16="http://schemas.microsoft.com/office/drawing/2014/main" id="{9A14A00F-5A12-4E71-926C-F6A066FE5EC0}"/>
+                <a16:creationId xmlns:a16="http://schemas.microsoft.com/office/drawing/2014/main" id="{85954CBC-5079-4E32-A951-9F18966F09BE}"/>
               </a:ext>
             </a:extLst>
           </p:cNvPr>
@@ -4702,7 +4557,7 @@
           <p:cNvPr id="12" name="">
             <a:extLst xmlns:a="http://schemas.openxmlformats.org/drawingml/2006/main">
               <a:ext uri="{FF2B5EF4-FFF2-40B4-BE49-F238E27FC236}">
-                <a16:creationId xmlns:a16="http://schemas.microsoft.com/office/drawing/2014/main" id="{B5BE3FBF-3A55-4FBC-89E5-EF69744D0404}"/>
+                <a16:creationId xmlns:a16="http://schemas.microsoft.com/office/drawing/2014/main" id="{892C199E-CDC5-4B13-A376-A8BCD7AC75D1}"/>
               </a:ext>
             </a:extLst>
           </p:cNvPr>
@@ -4766,7 +4621,7 @@
           <p:cNvPr id="13" name="">
             <a:extLst xmlns:a="http://schemas.openxmlformats.org/drawingml/2006/main">
               <a:ext uri="{FF2B5EF4-FFF2-40B4-BE49-F238E27FC236}">
-                <a16:creationId xmlns:a16="http://schemas.microsoft.com/office/drawing/2014/main" id="{AA66561E-1BED-4503-8085-33A8C82374E5}"/>
+                <a16:creationId xmlns:a16="http://schemas.microsoft.com/office/drawing/2014/main" id="{E1307291-48B3-4C2E-82D0-8902BCDD9872}"/>
               </a:ext>
             </a:extLst>
           </p:cNvPr>
@@ -4830,7 +4685,7 @@
           <p:cNvPr id="14" name="">
             <a:extLst xmlns:a="http://schemas.openxmlformats.org/drawingml/2006/main">
               <a:ext uri="{FF2B5EF4-FFF2-40B4-BE49-F238E27FC236}">
-                <a16:creationId xmlns:a16="http://schemas.microsoft.com/office/drawing/2014/main" id="{2A6FA21E-2191-4441-A7F1-C361AA8A56B2}"/>
+                <a16:creationId xmlns:a16="http://schemas.microsoft.com/office/drawing/2014/main" id="{D479E3C4-7FFD-4ED2-A772-61D05D4D9055}"/>
               </a:ext>
             </a:extLst>
           </p:cNvPr>
@@ -4863,7 +4718,7 @@
           <p:cNvPr id="15" name="">
             <a:extLst xmlns:a="http://schemas.openxmlformats.org/drawingml/2006/main">
               <a:ext uri="{FF2B5EF4-FFF2-40B4-BE49-F238E27FC236}">
-                <a16:creationId xmlns:a16="http://schemas.microsoft.com/office/drawing/2014/main" id="{82BCFC41-824E-4C7D-AF5B-34ED48839BDC}"/>
+                <a16:creationId xmlns:a16="http://schemas.microsoft.com/office/drawing/2014/main" id="{95A67B64-75FB-48BE-A2FD-D220D191743D}"/>
               </a:ext>
             </a:extLst>
           </p:cNvPr>
@@ -4898,7 +4753,7 @@
           <p:cNvPr id="16" name="">
             <a:extLst xmlns:a="http://schemas.openxmlformats.org/drawingml/2006/main">
               <a:ext uri="{FF2B5EF4-FFF2-40B4-BE49-F238E27FC236}">
-                <a16:creationId xmlns:a16="http://schemas.microsoft.com/office/drawing/2014/main" id="{955AFA58-0895-45DC-8C4F-7FC4FBDDB5E7}"/>
+                <a16:creationId xmlns:a16="http://schemas.microsoft.com/office/drawing/2014/main" id="{D40AF74D-F64D-4297-9FCB-92119B9D6850}"/>
               </a:ext>
             </a:extLst>
           </p:cNvPr>
@@ -4962,7 +4817,7 @@
           <p:cNvPr id="17" name="">
             <a:extLst xmlns:a="http://schemas.openxmlformats.org/drawingml/2006/main">
               <a:ext uri="{FF2B5EF4-FFF2-40B4-BE49-F238E27FC236}">
-                <a16:creationId xmlns:a16="http://schemas.microsoft.com/office/drawing/2014/main" id="{49B40BD1-2FD3-4582-AEC5-87427D30B342}"/>
+                <a16:creationId xmlns:a16="http://schemas.microsoft.com/office/drawing/2014/main" id="{FCE7CF01-08B7-4593-B484-8340DBF236BE}"/>
               </a:ext>
             </a:extLst>
           </p:cNvPr>
@@ -5026,7 +4881,7 @@
           <p:cNvPr id="18" name="">
             <a:extLst xmlns:a="http://schemas.openxmlformats.org/drawingml/2006/main">
               <a:ext uri="{FF2B5EF4-FFF2-40B4-BE49-F238E27FC236}">
-                <a16:creationId xmlns:a16="http://schemas.microsoft.com/office/drawing/2014/main" id="{87B9AB30-1E65-41CF-A409-D9D25A5C8421}"/>
+                <a16:creationId xmlns:a16="http://schemas.microsoft.com/office/drawing/2014/main" id="{95F01B60-AF7B-4D68-98A0-3F145D219945}"/>
               </a:ext>
             </a:extLst>
           </p:cNvPr>
@@ -5061,7 +4916,7 @@
           <p:cNvPr id="19" name="">
             <a:extLst xmlns:a="http://schemas.openxmlformats.org/drawingml/2006/main">
               <a:ext uri="{FF2B5EF4-FFF2-40B4-BE49-F238E27FC236}">
-                <a16:creationId xmlns:a16="http://schemas.microsoft.com/office/drawing/2014/main" id="{188841B3-4E38-48E8-8EA9-8BC9BD8ED46B}"/>
+                <a16:creationId xmlns:a16="http://schemas.microsoft.com/office/drawing/2014/main" id="{D1B575D9-8A2C-4E7D-8875-89FD731F7CC2}"/>
               </a:ext>
             </a:extLst>
           </p:cNvPr>
@@ -5125,7 +4980,7 @@
           <p:cNvPr id="20" name="">
             <a:extLst xmlns:a="http://schemas.openxmlformats.org/drawingml/2006/main">
               <a:ext uri="{FF2B5EF4-FFF2-40B4-BE49-F238E27FC236}">
-                <a16:creationId xmlns:a16="http://schemas.microsoft.com/office/drawing/2014/main" id="{C6A18079-2101-4A1B-8697-26B012CBB507}"/>
+                <a16:creationId xmlns:a16="http://schemas.microsoft.com/office/drawing/2014/main" id="{8F933CEA-641E-42E2-B2D8-8576FEA32718}"/>
               </a:ext>
             </a:extLst>
           </p:cNvPr>
@@ -5160,7 +5015,7 @@
           <p:cNvPr id="21" name="">
             <a:extLst xmlns:a="http://schemas.openxmlformats.org/drawingml/2006/main">
               <a:ext uri="{FF2B5EF4-FFF2-40B4-BE49-F238E27FC236}">
-                <a16:creationId xmlns:a16="http://schemas.microsoft.com/office/drawing/2014/main" id="{3827B626-89F5-4F51-A3A3-6F2BF47193E3}"/>
+                <a16:creationId xmlns:a16="http://schemas.microsoft.com/office/drawing/2014/main" id="{ACB1EB9A-040F-470C-A5AC-73C5024ECE60}"/>
               </a:ext>
             </a:extLst>
           </p:cNvPr>
@@ -5222,7 +5077,7 @@
     </p:spTree>
     <p:extLst>
       <p:ext uri="{BB962C8B-B14F-4D97-AF65-F5344CB8AC3E}">
-        <p14:creationId xmlns:p14="http://schemas.microsoft.com/office/powerpoint/2010/main" val="1978648324"/>
+        <p14:creationId xmlns:p14="http://schemas.microsoft.com/office/powerpoint/2010/main" val="1600036729"/>
       </p:ext>
     </p:extLst>
   </p:cSld>
@@ -5253,7 +5108,7 @@
           <p:cNvPr id="1" name="">
             <a:extLst xmlns:a="http://schemas.openxmlformats.org/drawingml/2006/main">
               <a:ext uri="{FF2B5EF4-FFF2-40B4-BE49-F238E27FC236}">
-                <a16:creationId xmlns:a16="http://schemas.microsoft.com/office/drawing/2014/main" id="{FDA675F6-6096-4D07-A0D1-0045C4295EDE}"/>
+                <a16:creationId xmlns:a16="http://schemas.microsoft.com/office/drawing/2014/main" id="{FD55E774-249F-46E5-9505-38470C5605EB}"/>
               </a:ext>
             </a:extLst>
           </p:cNvPr>
@@ -5288,7 +5143,7 @@
           <p:cNvPr id="2" name="">
             <a:extLst xmlns:a="http://schemas.openxmlformats.org/drawingml/2006/main">
               <a:ext uri="{FF2B5EF4-FFF2-40B4-BE49-F238E27FC236}">
-                <a16:creationId xmlns:a16="http://schemas.microsoft.com/office/drawing/2014/main" id="{530B1BAB-3CBB-4F59-BCA3-613C5E7185F0}"/>
+                <a16:creationId xmlns:a16="http://schemas.microsoft.com/office/drawing/2014/main" id="{14F3A242-9ACB-45ED-9A80-1978B41AA5EA}"/>
               </a:ext>
             </a:extLst>
           </p:cNvPr>
@@ -5352,7 +5207,7 @@
           <p:cNvPr id="3" name="">
             <a:extLst xmlns:a="http://schemas.openxmlformats.org/drawingml/2006/main">
               <a:ext uri="{FF2B5EF4-FFF2-40B4-BE49-F238E27FC236}">
-                <a16:creationId xmlns:a16="http://schemas.microsoft.com/office/drawing/2014/main" id="{722066F4-BA2C-47C8-B2BC-ECC966115EFE}"/>
+                <a16:creationId xmlns:a16="http://schemas.microsoft.com/office/drawing/2014/main" id="{107457BA-96B1-482C-A758-CAD63763719B}"/>
               </a:ext>
             </a:extLst>
           </p:cNvPr>
@@ -5416,7 +5271,7 @@
           <p:cNvPr id="4" name="">
             <a:extLst xmlns:a="http://schemas.openxmlformats.org/drawingml/2006/main">
               <a:ext uri="{FF2B5EF4-FFF2-40B4-BE49-F238E27FC236}">
-                <a16:creationId xmlns:a16="http://schemas.microsoft.com/office/drawing/2014/main" id="{E57B3874-49C0-4BDF-8F86-7425A07A5E53}"/>
+                <a16:creationId xmlns:a16="http://schemas.microsoft.com/office/drawing/2014/main" id="{BEF1583C-0E96-45CE-9CCE-47C9D1183050}"/>
               </a:ext>
             </a:extLst>
           </p:cNvPr>
@@ -5480,7 +5335,7 @@
           <p:cNvPr id="5" name="">
             <a:extLst xmlns:a="http://schemas.openxmlformats.org/drawingml/2006/main">
               <a:ext uri="{FF2B5EF4-FFF2-40B4-BE49-F238E27FC236}">
-                <a16:creationId xmlns:a16="http://schemas.microsoft.com/office/drawing/2014/main" id="{78ED0CC9-A7F8-47A8-A764-0C93D7894205}"/>
+                <a16:creationId xmlns:a16="http://schemas.microsoft.com/office/drawing/2014/main" id="{74A4B255-4032-4D2E-A7BD-3AAB873CA3EA}"/>
               </a:ext>
             </a:extLst>
           </p:cNvPr>
@@ -5544,7 +5399,7 @@
           <p:cNvPr id="6" name="">
             <a:extLst xmlns:a="http://schemas.openxmlformats.org/drawingml/2006/main">
               <a:ext uri="{FF2B5EF4-FFF2-40B4-BE49-F238E27FC236}">
-                <a16:creationId xmlns:a16="http://schemas.microsoft.com/office/drawing/2014/main" id="{01EFF654-ED3C-4058-A773-0C54C7EFE131}"/>
+                <a16:creationId xmlns:a16="http://schemas.microsoft.com/office/drawing/2014/main" id="{7B9CBDFD-BC67-44F7-89AB-3B0A57CAAC47}"/>
               </a:ext>
             </a:extLst>
           </p:cNvPr>
@@ -5577,7 +5432,7 @@
           <p:cNvPr id="7" name="">
             <a:extLst xmlns:a="http://schemas.openxmlformats.org/drawingml/2006/main">
               <a:ext uri="{FF2B5EF4-FFF2-40B4-BE49-F238E27FC236}">
-                <a16:creationId xmlns:a16="http://schemas.microsoft.com/office/drawing/2014/main" id="{F8F40E53-2519-40E0-91C2-1003A660A835}"/>
+                <a16:creationId xmlns:a16="http://schemas.microsoft.com/office/drawing/2014/main" id="{9B883D35-B7C0-4E29-9007-68AC6AFFE990}"/>
               </a:ext>
             </a:extLst>
           </p:cNvPr>
@@ -5612,7 +5467,7 @@
           <p:cNvPr id="8" name="">
             <a:extLst xmlns:a="http://schemas.openxmlformats.org/drawingml/2006/main">
               <a:ext uri="{FF2B5EF4-FFF2-40B4-BE49-F238E27FC236}">
-                <a16:creationId xmlns:a16="http://schemas.microsoft.com/office/drawing/2014/main" id="{167FDF11-58D1-466B-90C4-C929B4236914}"/>
+                <a16:creationId xmlns:a16="http://schemas.microsoft.com/office/drawing/2014/main" id="{75C688D2-EDA5-4354-8BFA-FF5330069B30}"/>
               </a:ext>
             </a:extLst>
           </p:cNvPr>
@@ -5676,7 +5531,7 @@
           <p:cNvPr id="9" name="">
             <a:extLst xmlns:a="http://schemas.openxmlformats.org/drawingml/2006/main">
               <a:ext uri="{FF2B5EF4-FFF2-40B4-BE49-F238E27FC236}">
-                <a16:creationId xmlns:a16="http://schemas.microsoft.com/office/drawing/2014/main" id="{650AE917-FDD5-41B9-B200-52973EB4F38D}"/>
+                <a16:creationId xmlns:a16="http://schemas.microsoft.com/office/drawing/2014/main" id="{0FCD8020-FEED-47E7-8161-43C99C3DA7B7}"/>
               </a:ext>
             </a:extLst>
           </p:cNvPr>
@@ -5740,7 +5595,7 @@
           <p:cNvPr id="10" name="">
             <a:extLst xmlns:a="http://schemas.openxmlformats.org/drawingml/2006/main">
               <a:ext uri="{FF2B5EF4-FFF2-40B4-BE49-F238E27FC236}">
-                <a16:creationId xmlns:a16="http://schemas.microsoft.com/office/drawing/2014/main" id="{CECC7344-A066-4349-B692-FF2A15687EB9}"/>
+                <a16:creationId xmlns:a16="http://schemas.microsoft.com/office/drawing/2014/main" id="{2D053FFC-5865-4119-9314-712F1773CFB5}"/>
               </a:ext>
             </a:extLst>
           </p:cNvPr>
@@ -5773,7 +5628,7 @@
           <p:cNvPr id="11" name="">
             <a:extLst xmlns:a="http://schemas.openxmlformats.org/drawingml/2006/main">
               <a:ext uri="{FF2B5EF4-FFF2-40B4-BE49-F238E27FC236}">
-                <a16:creationId xmlns:a16="http://schemas.microsoft.com/office/drawing/2014/main" id="{3B3DACE6-1924-4ABB-9802-1719188E5275}"/>
+                <a16:creationId xmlns:a16="http://schemas.microsoft.com/office/drawing/2014/main" id="{E1254E25-5EEF-46B3-9761-2FB8A804AB05}"/>
               </a:ext>
             </a:extLst>
           </p:cNvPr>
@@ -5808,7 +5663,7 @@
           <p:cNvPr id="12" name="">
             <a:extLst xmlns:a="http://schemas.openxmlformats.org/drawingml/2006/main">
               <a:ext uri="{FF2B5EF4-FFF2-40B4-BE49-F238E27FC236}">
-                <a16:creationId xmlns:a16="http://schemas.microsoft.com/office/drawing/2014/main" id="{644CF7D0-EB9D-40F8-9DC5-07FA2331A06B}"/>
+                <a16:creationId xmlns:a16="http://schemas.microsoft.com/office/drawing/2014/main" id="{038C6D2A-B668-4466-BCA1-2C28B895499F}"/>
               </a:ext>
             </a:extLst>
           </p:cNvPr>
@@ -5872,7 +5727,7 @@
           <p:cNvPr id="13" name="">
             <a:extLst xmlns:a="http://schemas.openxmlformats.org/drawingml/2006/main">
               <a:ext uri="{FF2B5EF4-FFF2-40B4-BE49-F238E27FC236}">
-                <a16:creationId xmlns:a16="http://schemas.microsoft.com/office/drawing/2014/main" id="{E07E5D04-500E-4FD4-A56F-4047A89465B7}"/>
+                <a16:creationId xmlns:a16="http://schemas.microsoft.com/office/drawing/2014/main" id="{8C1085D5-1180-4886-B93D-207A490167DE}"/>
               </a:ext>
             </a:extLst>
           </p:cNvPr>
@@ -5936,7 +5791,7 @@
           <p:cNvPr id="14" name="">
             <a:extLst xmlns:a="http://schemas.openxmlformats.org/drawingml/2006/main">
               <a:ext uri="{FF2B5EF4-FFF2-40B4-BE49-F238E27FC236}">
-                <a16:creationId xmlns:a16="http://schemas.microsoft.com/office/drawing/2014/main" id="{B7D71177-7B64-4BFC-9884-5181F6577E44}"/>
+                <a16:creationId xmlns:a16="http://schemas.microsoft.com/office/drawing/2014/main" id="{8CA17ACC-CE47-45F8-AE64-8CE905DDE953}"/>
               </a:ext>
             </a:extLst>
           </p:cNvPr>
@@ -5969,7 +5824,7 @@
           <p:cNvPr id="15" name="">
             <a:extLst xmlns:a="http://schemas.openxmlformats.org/drawingml/2006/main">
               <a:ext uri="{FF2B5EF4-FFF2-40B4-BE49-F238E27FC236}">
-                <a16:creationId xmlns:a16="http://schemas.microsoft.com/office/drawing/2014/main" id="{DE4A33A7-414D-42FA-86B7-501C42FCC878}"/>
+                <a16:creationId xmlns:a16="http://schemas.microsoft.com/office/drawing/2014/main" id="{EE6D12AF-ECAB-4E38-9DD1-22433F282E03}"/>
               </a:ext>
             </a:extLst>
           </p:cNvPr>
@@ -6004,7 +5859,7 @@
           <p:cNvPr id="16" name="">
             <a:extLst xmlns:a="http://schemas.openxmlformats.org/drawingml/2006/main">
               <a:ext uri="{FF2B5EF4-FFF2-40B4-BE49-F238E27FC236}">
-                <a16:creationId xmlns:a16="http://schemas.microsoft.com/office/drawing/2014/main" id="{0C53DB7C-8A67-4745-8C13-7C2824796C9B}"/>
+                <a16:creationId xmlns:a16="http://schemas.microsoft.com/office/drawing/2014/main" id="{CEC90B8C-2480-4AF0-9273-72BB413BEABD}"/>
               </a:ext>
             </a:extLst>
           </p:cNvPr>
@@ -6068,7 +5923,7 @@
           <p:cNvPr id="17" name="">
             <a:extLst xmlns:a="http://schemas.openxmlformats.org/drawingml/2006/main">
               <a:ext uri="{FF2B5EF4-FFF2-40B4-BE49-F238E27FC236}">
-                <a16:creationId xmlns:a16="http://schemas.microsoft.com/office/drawing/2014/main" id="{5F0471B1-9631-49F9-8ABB-8047EF604A6E}"/>
+                <a16:creationId xmlns:a16="http://schemas.microsoft.com/office/drawing/2014/main" id="{E47685FC-4F42-4B8C-B118-3D7E3FF593DC}"/>
               </a:ext>
             </a:extLst>
           </p:cNvPr>
@@ -6132,7 +5987,7 @@
           <p:cNvPr id="18" name="">
             <a:extLst xmlns:a="http://schemas.openxmlformats.org/drawingml/2006/main">
               <a:ext uri="{FF2B5EF4-FFF2-40B4-BE49-F238E27FC236}">
-                <a16:creationId xmlns:a16="http://schemas.microsoft.com/office/drawing/2014/main" id="{B75C8405-099B-4DAE-A1DD-36FD08BFCD9A}"/>
+                <a16:creationId xmlns:a16="http://schemas.microsoft.com/office/drawing/2014/main" id="{5E514B7E-1741-48B7-B37E-3D0150A163AC}"/>
               </a:ext>
             </a:extLst>
           </p:cNvPr>
@@ -6192,7 +6047,7 @@
     </p:spTree>
     <p:extLst>
       <p:ext uri="{BB962C8B-B14F-4D97-AF65-F5344CB8AC3E}">
-        <p14:creationId xmlns:p14="http://schemas.microsoft.com/office/powerpoint/2010/main" val="439946069"/>
+        <p14:creationId xmlns:p14="http://schemas.microsoft.com/office/powerpoint/2010/main" val="46906050"/>
       </p:ext>
     </p:extLst>
   </p:cSld>
@@ -6223,7 +6078,7 @@
           <p:cNvPr id="1" name="">
             <a:extLst xmlns:a="http://schemas.openxmlformats.org/drawingml/2006/main">
               <a:ext uri="{FF2B5EF4-FFF2-40B4-BE49-F238E27FC236}">
-                <a16:creationId xmlns:a16="http://schemas.microsoft.com/office/drawing/2014/main" id="{692E46AA-BA89-45E8-B8A2-0251210DFF78}"/>
+                <a16:creationId xmlns:a16="http://schemas.microsoft.com/office/drawing/2014/main" id="{03B1E431-C20C-41B8-B003-697714F37B41}"/>
               </a:ext>
             </a:extLst>
           </p:cNvPr>
@@ -6258,7 +6113,7 @@
           <p:cNvPr id="2" name="">
             <a:extLst xmlns:a="http://schemas.openxmlformats.org/drawingml/2006/main">
               <a:ext uri="{FF2B5EF4-FFF2-40B4-BE49-F238E27FC236}">
-                <a16:creationId xmlns:a16="http://schemas.microsoft.com/office/drawing/2014/main" id="{0066D417-13F5-4580-B041-C6FF238F3A71}"/>
+                <a16:creationId xmlns:a16="http://schemas.microsoft.com/office/drawing/2014/main" id="{40D967F5-D12B-4F87-9A44-F573B29C3BDF}"/>
               </a:ext>
             </a:extLst>
           </p:cNvPr>
@@ -6322,7 +6177,7 @@
           <p:cNvPr id="3" name="">
             <a:extLst xmlns:a="http://schemas.openxmlformats.org/drawingml/2006/main">
               <a:ext uri="{FF2B5EF4-FFF2-40B4-BE49-F238E27FC236}">
-                <a16:creationId xmlns:a16="http://schemas.microsoft.com/office/drawing/2014/main" id="{7BD80EDA-448C-4233-80EB-FD2EC38F97EE}"/>
+                <a16:creationId xmlns:a16="http://schemas.microsoft.com/office/drawing/2014/main" id="{40BF8A00-3725-4669-A4A3-0C4D92C70FFF}"/>
               </a:ext>
             </a:extLst>
           </p:cNvPr>
@@ -6386,7 +6241,7 @@
           <p:cNvPr id="4" name="">
             <a:extLst xmlns:a="http://schemas.openxmlformats.org/drawingml/2006/main">
               <a:ext uri="{FF2B5EF4-FFF2-40B4-BE49-F238E27FC236}">
-                <a16:creationId xmlns:a16="http://schemas.microsoft.com/office/drawing/2014/main" id="{DFF3231A-4E39-45A5-BBEB-9CA67BD5752A}"/>
+                <a16:creationId xmlns:a16="http://schemas.microsoft.com/office/drawing/2014/main" id="{1310EF7E-932B-4838-BACF-15D114BA86D4}"/>
               </a:ext>
             </a:extLst>
           </p:cNvPr>
@@ -6450,7 +6305,7 @@
           <p:cNvPr id="5" name="">
             <a:extLst xmlns:a="http://schemas.openxmlformats.org/drawingml/2006/main">
               <a:ext uri="{FF2B5EF4-FFF2-40B4-BE49-F238E27FC236}">
-                <a16:creationId xmlns:a16="http://schemas.microsoft.com/office/drawing/2014/main" id="{10BC8A84-2774-4E40-81C9-E4A7904F3A1B}"/>
+                <a16:creationId xmlns:a16="http://schemas.microsoft.com/office/drawing/2014/main" id="{29D49CFF-3F94-4719-8767-DBDF991E9EAE}"/>
               </a:ext>
             </a:extLst>
           </p:cNvPr>
@@ -6514,7 +6369,7 @@
           <p:cNvPr id="6" name="">
             <a:extLst xmlns:a="http://schemas.openxmlformats.org/drawingml/2006/main">
               <a:ext uri="{FF2B5EF4-FFF2-40B4-BE49-F238E27FC236}">
-                <a16:creationId xmlns:a16="http://schemas.microsoft.com/office/drawing/2014/main" id="{8D7C4753-A214-4F41-A8E9-B1F8F5BD9356}"/>
+                <a16:creationId xmlns:a16="http://schemas.microsoft.com/office/drawing/2014/main" id="{E5753826-B87D-40A9-B937-A475435E1E9E}"/>
               </a:ext>
             </a:extLst>
           </p:cNvPr>
@@ -6547,7 +6402,7 @@
           <p:cNvPr id="7" name="">
             <a:extLst xmlns:a="http://schemas.openxmlformats.org/drawingml/2006/main">
               <a:ext uri="{FF2B5EF4-FFF2-40B4-BE49-F238E27FC236}">
-                <a16:creationId xmlns:a16="http://schemas.microsoft.com/office/drawing/2014/main" id="{E7E00AC5-E621-450A-A8EA-C825D8798D52}"/>
+                <a16:creationId xmlns:a16="http://schemas.microsoft.com/office/drawing/2014/main" id="{7A6F0940-157F-4A41-A61D-E3324D30FCC0}"/>
               </a:ext>
             </a:extLst>
           </p:cNvPr>
@@ -6611,7 +6466,7 @@
           <p:cNvPr id="8" name="">
             <a:extLst xmlns:a="http://schemas.openxmlformats.org/drawingml/2006/main">
               <a:ext uri="{FF2B5EF4-FFF2-40B4-BE49-F238E27FC236}">
-                <a16:creationId xmlns:a16="http://schemas.microsoft.com/office/drawing/2014/main" id="{43DCCC6D-0F1B-4C2A-9690-396807FFDD99}"/>
+                <a16:creationId xmlns:a16="http://schemas.microsoft.com/office/drawing/2014/main" id="{B5DB26EF-719C-4BE3-A867-6EB537CB0F24}"/>
               </a:ext>
             </a:extLst>
           </p:cNvPr>
@@ -6646,7 +6501,7 @@
           <p:cNvPr id="9" name="">
             <a:extLst xmlns:a="http://schemas.openxmlformats.org/drawingml/2006/main">
               <a:ext uri="{FF2B5EF4-FFF2-40B4-BE49-F238E27FC236}">
-                <a16:creationId xmlns:a16="http://schemas.microsoft.com/office/drawing/2014/main" id="{4FC96847-4787-46D9-8661-4DD12B3A0362}"/>
+                <a16:creationId xmlns:a16="http://schemas.microsoft.com/office/drawing/2014/main" id="{96927E37-7226-458C-83AD-540D66CFD94D}"/>
               </a:ext>
             </a:extLst>
           </p:cNvPr>
@@ -6679,7 +6534,7 @@
           <p:cNvPr id="10" name="">
             <a:extLst xmlns:a="http://schemas.openxmlformats.org/drawingml/2006/main">
               <a:ext uri="{FF2B5EF4-FFF2-40B4-BE49-F238E27FC236}">
-                <a16:creationId xmlns:a16="http://schemas.microsoft.com/office/drawing/2014/main" id="{FF5A7F5A-DEDD-4A8B-BF3D-A932E5121CBA}"/>
+                <a16:creationId xmlns:a16="http://schemas.microsoft.com/office/drawing/2014/main" id="{544F6BE1-93C7-4354-B519-7862C299394C}"/>
               </a:ext>
             </a:extLst>
           </p:cNvPr>
@@ -6743,7 +6598,7 @@
           <p:cNvPr id="11" name="">
             <a:extLst xmlns:a="http://schemas.openxmlformats.org/drawingml/2006/main">
               <a:ext uri="{FF2B5EF4-FFF2-40B4-BE49-F238E27FC236}">
-                <a16:creationId xmlns:a16="http://schemas.microsoft.com/office/drawing/2014/main" id="{90FFDDA3-0905-4756-8614-85BFBBF5A7DC}"/>
+                <a16:creationId xmlns:a16="http://schemas.microsoft.com/office/drawing/2014/main" id="{916F5E21-1747-429E-B94A-5CBCB68B9324}"/>
               </a:ext>
             </a:extLst>
           </p:cNvPr>
@@ -6778,7 +6633,7 @@
           <p:cNvPr id="12" name="">
             <a:extLst xmlns:a="http://schemas.openxmlformats.org/drawingml/2006/main">
               <a:ext uri="{FF2B5EF4-FFF2-40B4-BE49-F238E27FC236}">
-                <a16:creationId xmlns:a16="http://schemas.microsoft.com/office/drawing/2014/main" id="{5FF5428E-F3FD-4F92-AC27-919BC5ED0E65}"/>
+                <a16:creationId xmlns:a16="http://schemas.microsoft.com/office/drawing/2014/main" id="{72DED8A8-3A7F-4999-B198-731B03A8B2E7}"/>
               </a:ext>
             </a:extLst>
           </p:cNvPr>
@@ -6811,7 +6666,7 @@
           <p:cNvPr id="13" name="">
             <a:extLst xmlns:a="http://schemas.openxmlformats.org/drawingml/2006/main">
               <a:ext uri="{FF2B5EF4-FFF2-40B4-BE49-F238E27FC236}">
-                <a16:creationId xmlns:a16="http://schemas.microsoft.com/office/drawing/2014/main" id="{281E91DE-3FF0-43F1-AECE-5DC584A7E097}"/>
+                <a16:creationId xmlns:a16="http://schemas.microsoft.com/office/drawing/2014/main" id="{A4C4802F-A00D-4C9A-8F2B-11243385A2EC}"/>
               </a:ext>
             </a:extLst>
           </p:cNvPr>
@@ -6875,7 +6730,7 @@
           <p:cNvPr id="14" name="">
             <a:extLst xmlns:a="http://schemas.openxmlformats.org/drawingml/2006/main">
               <a:ext uri="{FF2B5EF4-FFF2-40B4-BE49-F238E27FC236}">
-                <a16:creationId xmlns:a16="http://schemas.microsoft.com/office/drawing/2014/main" id="{69AB4558-5367-47B4-87EF-5AB14D0EEDA7}"/>
+                <a16:creationId xmlns:a16="http://schemas.microsoft.com/office/drawing/2014/main" id="{5E129436-21D8-4C9F-91E4-919AE6D906C2}"/>
               </a:ext>
             </a:extLst>
           </p:cNvPr>
@@ -6910,7 +6765,7 @@
           <p:cNvPr id="15" name="">
             <a:extLst xmlns:a="http://schemas.openxmlformats.org/drawingml/2006/main">
               <a:ext uri="{FF2B5EF4-FFF2-40B4-BE49-F238E27FC236}">
-                <a16:creationId xmlns:a16="http://schemas.microsoft.com/office/drawing/2014/main" id="{ABD5D445-BFB3-43E9-BC69-06F327B52D55}"/>
+                <a16:creationId xmlns:a16="http://schemas.microsoft.com/office/drawing/2014/main" id="{9C953AD9-777F-4CDA-97AB-6F202187D39E}"/>
               </a:ext>
             </a:extLst>
           </p:cNvPr>
@@ -6943,7 +6798,7 @@
           <p:cNvPr id="16" name="">
             <a:extLst xmlns:a="http://schemas.openxmlformats.org/drawingml/2006/main">
               <a:ext uri="{FF2B5EF4-FFF2-40B4-BE49-F238E27FC236}">
-                <a16:creationId xmlns:a16="http://schemas.microsoft.com/office/drawing/2014/main" id="{90CC4461-8FB6-4DAE-B92F-83EB34669561}"/>
+                <a16:creationId xmlns:a16="http://schemas.microsoft.com/office/drawing/2014/main" id="{B8ED6CBF-2F33-411D-AA80-D74FB670FDE8}"/>
               </a:ext>
             </a:extLst>
           </p:cNvPr>
@@ -7007,7 +6862,7 @@
           <p:cNvPr id="17" name="">
             <a:extLst xmlns:a="http://schemas.openxmlformats.org/drawingml/2006/main">
               <a:ext uri="{FF2B5EF4-FFF2-40B4-BE49-F238E27FC236}">
-                <a16:creationId xmlns:a16="http://schemas.microsoft.com/office/drawing/2014/main" id="{943E6AEC-3AAA-4FCB-9365-5CF39BEC49AA}"/>
+                <a16:creationId xmlns:a16="http://schemas.microsoft.com/office/drawing/2014/main" id="{C7DA284B-485B-4C1A-9FF0-20DC1BC3AF8D}"/>
               </a:ext>
             </a:extLst>
           </p:cNvPr>
@@ -7042,7 +6897,7 @@
           <p:cNvPr id="18" name="">
             <a:extLst xmlns:a="http://schemas.openxmlformats.org/drawingml/2006/main">
               <a:ext uri="{FF2B5EF4-FFF2-40B4-BE49-F238E27FC236}">
-                <a16:creationId xmlns:a16="http://schemas.microsoft.com/office/drawing/2014/main" id="{DBDCB7C5-EE93-47E7-8DB1-3A5A674A6FF8}"/>
+                <a16:creationId xmlns:a16="http://schemas.microsoft.com/office/drawing/2014/main" id="{D51AB500-0664-432F-A904-EA23CD972DB0}"/>
               </a:ext>
             </a:extLst>
           </p:cNvPr>
@@ -7075,7 +6930,7 @@
           <p:cNvPr id="19" name="">
             <a:extLst xmlns:a="http://schemas.openxmlformats.org/drawingml/2006/main">
               <a:ext uri="{FF2B5EF4-FFF2-40B4-BE49-F238E27FC236}">
-                <a16:creationId xmlns:a16="http://schemas.microsoft.com/office/drawing/2014/main" id="{2DCDEF64-68A6-4D07-858E-E6BF787EB86E}"/>
+                <a16:creationId xmlns:a16="http://schemas.microsoft.com/office/drawing/2014/main" id="{CE8B0BD6-7D79-4864-976B-B167D303E2EF}"/>
               </a:ext>
             </a:extLst>
           </p:cNvPr>
@@ -7139,7 +6994,7 @@
           <p:cNvPr id="20" name="">
             <a:extLst xmlns:a="http://schemas.openxmlformats.org/drawingml/2006/main">
               <a:ext uri="{FF2B5EF4-FFF2-40B4-BE49-F238E27FC236}">
-                <a16:creationId xmlns:a16="http://schemas.microsoft.com/office/drawing/2014/main" id="{4306B8CC-BDD8-4D0C-A476-6B1CCF9FEACD}"/>
+                <a16:creationId xmlns:a16="http://schemas.microsoft.com/office/drawing/2014/main" id="{B4B6B568-52FB-44B0-BAF9-A874200E854B}"/>
               </a:ext>
             </a:extLst>
           </p:cNvPr>
@@ -7174,7 +7029,7 @@
           <p:cNvPr id="21" name="">
             <a:extLst xmlns:a="http://schemas.openxmlformats.org/drawingml/2006/main">
               <a:ext uri="{FF2B5EF4-FFF2-40B4-BE49-F238E27FC236}">
-                <a16:creationId xmlns:a16="http://schemas.microsoft.com/office/drawing/2014/main" id="{FD8B3B72-64F0-4796-92B6-DD6F0F215D90}"/>
+                <a16:creationId xmlns:a16="http://schemas.microsoft.com/office/drawing/2014/main" id="{A6C32A48-DC91-4FE7-B27F-56E9A1AF6AE6}"/>
               </a:ext>
             </a:extLst>
           </p:cNvPr>
@@ -7238,7 +7093,7 @@
           <p:cNvPr id="22" name="">
             <a:extLst xmlns:a="http://schemas.openxmlformats.org/drawingml/2006/main">
               <a:ext uri="{FF2B5EF4-FFF2-40B4-BE49-F238E27FC236}">
-                <a16:creationId xmlns:a16="http://schemas.microsoft.com/office/drawing/2014/main" id="{407080A0-A8ED-4954-A7CD-AEE78B000E61}"/>
+                <a16:creationId xmlns:a16="http://schemas.microsoft.com/office/drawing/2014/main" id="{481AE011-572B-4B61-BB0E-DB744A3D51EB}"/>
               </a:ext>
             </a:extLst>
           </p:cNvPr>
@@ -7273,7 +7128,7 @@
           <p:cNvPr id="23" name="">
             <a:extLst xmlns:a="http://schemas.openxmlformats.org/drawingml/2006/main">
               <a:ext uri="{FF2B5EF4-FFF2-40B4-BE49-F238E27FC236}">
-                <a16:creationId xmlns:a16="http://schemas.microsoft.com/office/drawing/2014/main" id="{942999EC-432C-4F51-A13D-AC8E8ED47952}"/>
+                <a16:creationId xmlns:a16="http://schemas.microsoft.com/office/drawing/2014/main" id="{171EFDC9-84E7-4DF4-B1C8-9B0C866348C6}"/>
               </a:ext>
             </a:extLst>
           </p:cNvPr>
@@ -7337,7 +7192,7 @@
           <p:cNvPr id="24" name="">
             <a:extLst xmlns:a="http://schemas.openxmlformats.org/drawingml/2006/main">
               <a:ext uri="{FF2B5EF4-FFF2-40B4-BE49-F238E27FC236}">
-                <a16:creationId xmlns:a16="http://schemas.microsoft.com/office/drawing/2014/main" id="{CDDC48F2-6546-4022-9777-DC58666F8C41}"/>
+                <a16:creationId xmlns:a16="http://schemas.microsoft.com/office/drawing/2014/main" id="{1DEE299D-3D80-4810-89E4-B3AA7F8A02CD}"/>
               </a:ext>
             </a:extLst>
           </p:cNvPr>
@@ -7372,7 +7227,7 @@
           <p:cNvPr id="25" name="">
             <a:extLst xmlns:a="http://schemas.openxmlformats.org/drawingml/2006/main">
               <a:ext uri="{FF2B5EF4-FFF2-40B4-BE49-F238E27FC236}">
-                <a16:creationId xmlns:a16="http://schemas.microsoft.com/office/drawing/2014/main" id="{4170222D-92A7-4326-9130-8F8E4D70EC98}"/>
+                <a16:creationId xmlns:a16="http://schemas.microsoft.com/office/drawing/2014/main" id="{2B265A17-1D55-4FE6-8821-AF537503D846}"/>
               </a:ext>
             </a:extLst>
           </p:cNvPr>
@@ -7434,7 +7289,7 @@
     </p:spTree>
     <p:extLst>
       <p:ext uri="{BB962C8B-B14F-4D97-AF65-F5344CB8AC3E}">
-        <p14:creationId xmlns:p14="http://schemas.microsoft.com/office/powerpoint/2010/main" val="2099337252"/>
+        <p14:creationId xmlns:p14="http://schemas.microsoft.com/office/powerpoint/2010/main" val="939325908"/>
       </p:ext>
     </p:extLst>
   </p:cSld>
@@ -7465,7 +7320,7 @@
           <p:cNvPr id="1" name="">
             <a:extLst xmlns:a="http://schemas.openxmlformats.org/drawingml/2006/main">
               <a:ext uri="{FF2B5EF4-FFF2-40B4-BE49-F238E27FC236}">
-                <a16:creationId xmlns:a16="http://schemas.microsoft.com/office/drawing/2014/main" id="{0F8DB89D-7FEA-4070-9D42-9F4B0682BE30}"/>
+                <a16:creationId xmlns:a16="http://schemas.microsoft.com/office/drawing/2014/main" id="{7FACD6D4-406E-4EBC-A4E7-727C1940B974}"/>
               </a:ext>
             </a:extLst>
           </p:cNvPr>
@@ -7500,7 +7355,7 @@
           <p:cNvPr id="2" name="">
             <a:extLst xmlns:a="http://schemas.openxmlformats.org/drawingml/2006/main">
               <a:ext uri="{FF2B5EF4-FFF2-40B4-BE49-F238E27FC236}">
-                <a16:creationId xmlns:a16="http://schemas.microsoft.com/office/drawing/2014/main" id="{BAFBBA58-E1DA-4A52-BF1F-FBFA566F0084}"/>
+                <a16:creationId xmlns:a16="http://schemas.microsoft.com/office/drawing/2014/main" id="{E77D63CD-31AD-4669-92E1-83A89EC9E67B}"/>
               </a:ext>
             </a:extLst>
           </p:cNvPr>
@@ -7564,7 +7419,7 @@
           <p:cNvPr id="3" name="">
             <a:extLst xmlns:a="http://schemas.openxmlformats.org/drawingml/2006/main">
               <a:ext uri="{FF2B5EF4-FFF2-40B4-BE49-F238E27FC236}">
-                <a16:creationId xmlns:a16="http://schemas.microsoft.com/office/drawing/2014/main" id="{3768762B-25EF-4B9A-8504-15964F5F7351}"/>
+                <a16:creationId xmlns:a16="http://schemas.microsoft.com/office/drawing/2014/main" id="{12980244-DDB9-419C-B9AE-B1EA50BD03EB}"/>
               </a:ext>
             </a:extLst>
           </p:cNvPr>
@@ -7628,7 +7483,7 @@
           <p:cNvPr id="4" name="">
             <a:extLst xmlns:a="http://schemas.openxmlformats.org/drawingml/2006/main">
               <a:ext uri="{FF2B5EF4-FFF2-40B4-BE49-F238E27FC236}">
-                <a16:creationId xmlns:a16="http://schemas.microsoft.com/office/drawing/2014/main" id="{A2B46AA1-8EE4-43AC-B784-91BFF8DBA97C}"/>
+                <a16:creationId xmlns:a16="http://schemas.microsoft.com/office/drawing/2014/main" id="{712CF6D8-F864-4B53-B182-44C74D99D01D}"/>
               </a:ext>
             </a:extLst>
           </p:cNvPr>
@@ -7692,7 +7547,7 @@
           <p:cNvPr id="5" name="">
             <a:extLst xmlns:a="http://schemas.openxmlformats.org/drawingml/2006/main">
               <a:ext uri="{FF2B5EF4-FFF2-40B4-BE49-F238E27FC236}">
-                <a16:creationId xmlns:a16="http://schemas.microsoft.com/office/drawing/2014/main" id="{A043AAF9-DA61-46A7-88AB-D666A7984CF4}"/>
+                <a16:creationId xmlns:a16="http://schemas.microsoft.com/office/drawing/2014/main" id="{FD94C8A8-E1CC-4A4C-B305-F4F2A96FEAFB}"/>
               </a:ext>
             </a:extLst>
           </p:cNvPr>
@@ -7756,7 +7611,7 @@
           <p:cNvPr id="6" name="">
             <a:extLst xmlns:a="http://schemas.openxmlformats.org/drawingml/2006/main">
               <a:ext uri="{FF2B5EF4-FFF2-40B4-BE49-F238E27FC236}">
-                <a16:creationId xmlns:a16="http://schemas.microsoft.com/office/drawing/2014/main" id="{88528041-A58B-4B79-85BE-41E447E54EDE}"/>
+                <a16:creationId xmlns:a16="http://schemas.microsoft.com/office/drawing/2014/main" id="{78C2ED20-D6C6-40CE-8ED6-D83B80BB7D1B}"/>
               </a:ext>
             </a:extLst>
           </p:cNvPr>
@@ -7789,7 +7644,7 @@
           <p:cNvPr id="7" name="">
             <a:extLst xmlns:a="http://schemas.openxmlformats.org/drawingml/2006/main">
               <a:ext uri="{FF2B5EF4-FFF2-40B4-BE49-F238E27FC236}">
-                <a16:creationId xmlns:a16="http://schemas.microsoft.com/office/drawing/2014/main" id="{7EE91F26-ABCB-427F-BF4B-C6B5CB17EF1C}"/>
+                <a16:creationId xmlns:a16="http://schemas.microsoft.com/office/drawing/2014/main" id="{267ED4D1-62EB-4401-88F9-9A067D48F409}"/>
               </a:ext>
             </a:extLst>
           </p:cNvPr>
@@ -7824,7 +7679,7 @@
           <p:cNvPr id="8" name="">
             <a:extLst xmlns:a="http://schemas.openxmlformats.org/drawingml/2006/main">
               <a:ext uri="{FF2B5EF4-FFF2-40B4-BE49-F238E27FC236}">
-                <a16:creationId xmlns:a16="http://schemas.microsoft.com/office/drawing/2014/main" id="{CE34159F-6260-4AAD-9125-8E3735161AC8}"/>
+                <a16:creationId xmlns:a16="http://schemas.microsoft.com/office/drawing/2014/main" id="{7B2A1639-277B-4C44-9C9C-AEE687CBA951}"/>
               </a:ext>
             </a:extLst>
           </p:cNvPr>
@@ -7888,7 +7743,7 @@
           <p:cNvPr id="9" name="">
             <a:extLst xmlns:a="http://schemas.openxmlformats.org/drawingml/2006/main">
               <a:ext uri="{FF2B5EF4-FFF2-40B4-BE49-F238E27FC236}">
-                <a16:creationId xmlns:a16="http://schemas.microsoft.com/office/drawing/2014/main" id="{1F849DC9-D7B7-41B9-8C6C-9508FEEB0B30}"/>
+                <a16:creationId xmlns:a16="http://schemas.microsoft.com/office/drawing/2014/main" id="{BF8F9B25-0E42-47E7-889E-C73CA81A7884}"/>
               </a:ext>
             </a:extLst>
           </p:cNvPr>
@@ -7952,7 +7807,7 @@
           <p:cNvPr id="10" name="">
             <a:extLst xmlns:a="http://schemas.openxmlformats.org/drawingml/2006/main">
               <a:ext uri="{FF2B5EF4-FFF2-40B4-BE49-F238E27FC236}">
-                <a16:creationId xmlns:a16="http://schemas.microsoft.com/office/drawing/2014/main" id="{3FE0E700-C9B1-47E3-9205-D21A5E695516}"/>
+                <a16:creationId xmlns:a16="http://schemas.microsoft.com/office/drawing/2014/main" id="{AB16141D-CAD5-47B2-ADDB-E1E05D05E8B2}"/>
               </a:ext>
             </a:extLst>
           </p:cNvPr>
@@ -7985,7 +7840,7 @@
           <p:cNvPr id="11" name="">
             <a:extLst xmlns:a="http://schemas.openxmlformats.org/drawingml/2006/main">
               <a:ext uri="{FF2B5EF4-FFF2-40B4-BE49-F238E27FC236}">
-                <a16:creationId xmlns:a16="http://schemas.microsoft.com/office/drawing/2014/main" id="{6DFF37D6-0FC8-4F93-8E6F-EDC8D3A2E5DC}"/>
+                <a16:creationId xmlns:a16="http://schemas.microsoft.com/office/drawing/2014/main" id="{F467E3A3-E3B7-46D0-B0C6-CB3D309135CE}"/>
               </a:ext>
             </a:extLst>
           </p:cNvPr>
@@ -8020,7 +7875,7 @@
           <p:cNvPr id="12" name="">
             <a:extLst xmlns:a="http://schemas.openxmlformats.org/drawingml/2006/main">
               <a:ext uri="{FF2B5EF4-FFF2-40B4-BE49-F238E27FC236}">
-                <a16:creationId xmlns:a16="http://schemas.microsoft.com/office/drawing/2014/main" id="{CCBED6AD-E5DC-4EBE-9E25-628CC9788483}"/>
+                <a16:creationId xmlns:a16="http://schemas.microsoft.com/office/drawing/2014/main" id="{63602B7F-A935-4F68-9C69-E6F1FF53784B}"/>
               </a:ext>
             </a:extLst>
           </p:cNvPr>
@@ -8084,7 +7939,7 @@
           <p:cNvPr id="13" name="">
             <a:extLst xmlns:a="http://schemas.openxmlformats.org/drawingml/2006/main">
               <a:ext uri="{FF2B5EF4-FFF2-40B4-BE49-F238E27FC236}">
-                <a16:creationId xmlns:a16="http://schemas.microsoft.com/office/drawing/2014/main" id="{57C3DC24-7CF7-44B9-B166-20D8C0BC9383}"/>
+                <a16:creationId xmlns:a16="http://schemas.microsoft.com/office/drawing/2014/main" id="{EF73FF8F-DE26-49C9-ABDE-C7A936E40467}"/>
               </a:ext>
             </a:extLst>
           </p:cNvPr>
@@ -8148,7 +8003,7 @@
           <p:cNvPr id="14" name="">
             <a:extLst xmlns:a="http://schemas.openxmlformats.org/drawingml/2006/main">
               <a:ext uri="{FF2B5EF4-FFF2-40B4-BE49-F238E27FC236}">
-                <a16:creationId xmlns:a16="http://schemas.microsoft.com/office/drawing/2014/main" id="{DBA77E67-AAD7-4D4F-931F-F3988489DBF2}"/>
+                <a16:creationId xmlns:a16="http://schemas.microsoft.com/office/drawing/2014/main" id="{C1CFB5CE-6B24-464B-86E8-C48408D93D66}"/>
               </a:ext>
             </a:extLst>
           </p:cNvPr>
@@ -8181,7 +8036,7 @@
           <p:cNvPr id="15" name="">
             <a:extLst xmlns:a="http://schemas.openxmlformats.org/drawingml/2006/main">
               <a:ext uri="{FF2B5EF4-FFF2-40B4-BE49-F238E27FC236}">
-                <a16:creationId xmlns:a16="http://schemas.microsoft.com/office/drawing/2014/main" id="{062C199B-E042-45EA-92A0-B2E7D39C9E47}"/>
+                <a16:creationId xmlns:a16="http://schemas.microsoft.com/office/drawing/2014/main" id="{9C574CEE-0C0D-4682-BD86-43744884555A}"/>
               </a:ext>
             </a:extLst>
           </p:cNvPr>
@@ -8216,7 +8071,7 @@
           <p:cNvPr id="16" name="">
             <a:extLst xmlns:a="http://schemas.openxmlformats.org/drawingml/2006/main">
               <a:ext uri="{FF2B5EF4-FFF2-40B4-BE49-F238E27FC236}">
-                <a16:creationId xmlns:a16="http://schemas.microsoft.com/office/drawing/2014/main" id="{D7720ECC-BCA7-423F-8198-8D41A9E282D8}"/>
+                <a16:creationId xmlns:a16="http://schemas.microsoft.com/office/drawing/2014/main" id="{90832026-614A-4B1C-9FDF-D7663895AFB2}"/>
               </a:ext>
             </a:extLst>
           </p:cNvPr>
@@ -8280,7 +8135,7 @@
           <p:cNvPr id="17" name="">
             <a:extLst xmlns:a="http://schemas.openxmlformats.org/drawingml/2006/main">
               <a:ext uri="{FF2B5EF4-FFF2-40B4-BE49-F238E27FC236}">
-                <a16:creationId xmlns:a16="http://schemas.microsoft.com/office/drawing/2014/main" id="{3D0199C2-4496-4843-8A48-AC63E0FD07DB}"/>
+                <a16:creationId xmlns:a16="http://schemas.microsoft.com/office/drawing/2014/main" id="{971A40EF-7314-41FC-A6E5-10D4D89902FA}"/>
               </a:ext>
             </a:extLst>
           </p:cNvPr>
@@ -8344,7 +8199,7 @@
           <p:cNvPr id="18" name="">
             <a:extLst xmlns:a="http://schemas.openxmlformats.org/drawingml/2006/main">
               <a:ext uri="{FF2B5EF4-FFF2-40B4-BE49-F238E27FC236}">
-                <a16:creationId xmlns:a16="http://schemas.microsoft.com/office/drawing/2014/main" id="{9096091A-279B-4DD3-A736-1E20097E8D59}"/>
+                <a16:creationId xmlns:a16="http://schemas.microsoft.com/office/drawing/2014/main" id="{34AB4121-B85F-4C68-AAD7-58B4BF92603F}"/>
               </a:ext>
             </a:extLst>
           </p:cNvPr>
@@ -8377,7 +8232,7 @@
           <p:cNvPr id="19" name="">
             <a:extLst xmlns:a="http://schemas.openxmlformats.org/drawingml/2006/main">
               <a:ext uri="{FF2B5EF4-FFF2-40B4-BE49-F238E27FC236}">
-                <a16:creationId xmlns:a16="http://schemas.microsoft.com/office/drawing/2014/main" id="{D99BEBCA-549C-4C4C-A50C-8409711ECBE9}"/>
+                <a16:creationId xmlns:a16="http://schemas.microsoft.com/office/drawing/2014/main" id="{1819134A-2EAD-4988-B88C-2A6754767CF5}"/>
               </a:ext>
             </a:extLst>
           </p:cNvPr>
@@ -8412,7 +8267,7 @@
           <p:cNvPr id="20" name="">
             <a:extLst xmlns:a="http://schemas.openxmlformats.org/drawingml/2006/main">
               <a:ext uri="{FF2B5EF4-FFF2-40B4-BE49-F238E27FC236}">
-                <a16:creationId xmlns:a16="http://schemas.microsoft.com/office/drawing/2014/main" id="{FACD8615-71A9-4099-9996-5D7D1E397228}"/>
+                <a16:creationId xmlns:a16="http://schemas.microsoft.com/office/drawing/2014/main" id="{718D1ECA-D461-4572-8237-C32698D4ABF9}"/>
               </a:ext>
             </a:extLst>
           </p:cNvPr>
@@ -8476,7 +8331,7 @@
           <p:cNvPr id="21" name="">
             <a:extLst xmlns:a="http://schemas.openxmlformats.org/drawingml/2006/main">
               <a:ext uri="{FF2B5EF4-FFF2-40B4-BE49-F238E27FC236}">
-                <a16:creationId xmlns:a16="http://schemas.microsoft.com/office/drawing/2014/main" id="{1F8FE9E7-F81A-4C5A-A31F-641ED20B596F}"/>
+                <a16:creationId xmlns:a16="http://schemas.microsoft.com/office/drawing/2014/main" id="{DB30B1C4-804E-4D4D-B1E9-AE1C1FBD22E6}"/>
               </a:ext>
             </a:extLst>
           </p:cNvPr>
@@ -8540,7 +8395,7 @@
           <p:cNvPr id="22" name="">
             <a:extLst xmlns:a="http://schemas.openxmlformats.org/drawingml/2006/main">
               <a:ext uri="{FF2B5EF4-FFF2-40B4-BE49-F238E27FC236}">
-                <a16:creationId xmlns:a16="http://schemas.microsoft.com/office/drawing/2014/main" id="{E5FA78F7-04EE-4B41-97FE-33EE998A5FE8}"/>
+                <a16:creationId xmlns:a16="http://schemas.microsoft.com/office/drawing/2014/main" id="{32C5B11B-1BBB-4B92-A450-5BBEF69F3916}"/>
               </a:ext>
             </a:extLst>
           </p:cNvPr>
@@ -8573,7 +8428,7 @@
           <p:cNvPr id="23" name="">
             <a:extLst xmlns:a="http://schemas.openxmlformats.org/drawingml/2006/main">
               <a:ext uri="{FF2B5EF4-FFF2-40B4-BE49-F238E27FC236}">
-                <a16:creationId xmlns:a16="http://schemas.microsoft.com/office/drawing/2014/main" id="{C8079AA6-E7DC-410C-AABB-94813F939E87}"/>
+                <a16:creationId xmlns:a16="http://schemas.microsoft.com/office/drawing/2014/main" id="{E0F19C4A-DE6E-4C52-9DAB-5ACB511F222E}"/>
               </a:ext>
             </a:extLst>
           </p:cNvPr>
@@ -8608,7 +8463,7 @@
           <p:cNvPr id="24" name="">
             <a:extLst xmlns:a="http://schemas.openxmlformats.org/drawingml/2006/main">
               <a:ext uri="{FF2B5EF4-FFF2-40B4-BE49-F238E27FC236}">
-                <a16:creationId xmlns:a16="http://schemas.microsoft.com/office/drawing/2014/main" id="{1161A341-C8C2-4E8A-9BC5-7BDC671E5CB0}"/>
+                <a16:creationId xmlns:a16="http://schemas.microsoft.com/office/drawing/2014/main" id="{2C505977-B46B-40D3-B078-0CF930719D87}"/>
               </a:ext>
             </a:extLst>
           </p:cNvPr>
@@ -8672,7 +8527,7 @@
           <p:cNvPr id="25" name="">
             <a:extLst xmlns:a="http://schemas.openxmlformats.org/drawingml/2006/main">
               <a:ext uri="{FF2B5EF4-FFF2-40B4-BE49-F238E27FC236}">
-                <a16:creationId xmlns:a16="http://schemas.microsoft.com/office/drawing/2014/main" id="{B77E582E-74AA-4867-9417-9B31BE3FB729}"/>
+                <a16:creationId xmlns:a16="http://schemas.microsoft.com/office/drawing/2014/main" id="{98A1B98A-6DF4-46B5-ACED-8D273B5FD424}"/>
               </a:ext>
             </a:extLst>
           </p:cNvPr>
@@ -8736,7 +8591,7 @@
           <p:cNvPr id="26" name="">
             <a:extLst xmlns:a="http://schemas.openxmlformats.org/drawingml/2006/main">
               <a:ext uri="{FF2B5EF4-FFF2-40B4-BE49-F238E27FC236}">
-                <a16:creationId xmlns:a16="http://schemas.microsoft.com/office/drawing/2014/main" id="{26F5C9F0-05B0-4CD6-8A1C-AC15789DC7F6}"/>
+                <a16:creationId xmlns:a16="http://schemas.microsoft.com/office/drawing/2014/main" id="{DDEA3221-DBC3-408B-A056-E97E3E1FF2FA}"/>
               </a:ext>
             </a:extLst>
           </p:cNvPr>
@@ -8769,7 +8624,7 @@
           <p:cNvPr id="27" name="">
             <a:extLst xmlns:a="http://schemas.openxmlformats.org/drawingml/2006/main">
               <a:ext uri="{FF2B5EF4-FFF2-40B4-BE49-F238E27FC236}">
-                <a16:creationId xmlns:a16="http://schemas.microsoft.com/office/drawing/2014/main" id="{DC5350D1-D3D0-4F8E-933A-C34BD7650879}"/>
+                <a16:creationId xmlns:a16="http://schemas.microsoft.com/office/drawing/2014/main" id="{D92E0D33-A815-4F60-88A4-A029C41F82B4}"/>
               </a:ext>
             </a:extLst>
           </p:cNvPr>
@@ -8833,7 +8688,7 @@
           <p:cNvPr id="28" name="">
             <a:extLst xmlns:a="http://schemas.openxmlformats.org/drawingml/2006/main">
               <a:ext uri="{FF2B5EF4-FFF2-40B4-BE49-F238E27FC236}">
-                <a16:creationId xmlns:a16="http://schemas.microsoft.com/office/drawing/2014/main" id="{3C4C8839-F81B-431D-A54E-2215E483F753}"/>
+                <a16:creationId xmlns:a16="http://schemas.microsoft.com/office/drawing/2014/main" id="{B8C474AD-9886-4464-BB48-37ECF6B1D245}"/>
               </a:ext>
             </a:extLst>
           </p:cNvPr>
@@ -8897,7 +8752,7 @@
           <p:cNvPr id="29" name="">
             <a:extLst xmlns:a="http://schemas.openxmlformats.org/drawingml/2006/main">
               <a:ext uri="{FF2B5EF4-FFF2-40B4-BE49-F238E27FC236}">
-                <a16:creationId xmlns:a16="http://schemas.microsoft.com/office/drawing/2014/main" id="{9BE70956-A29C-4C93-8CDB-03FF53C2C934}"/>
+                <a16:creationId xmlns:a16="http://schemas.microsoft.com/office/drawing/2014/main" id="{0E35624B-A02F-44E5-8F22-EA5FF1659FB5}"/>
               </a:ext>
             </a:extLst>
           </p:cNvPr>
@@ -8961,7 +8816,7 @@
           <p:cNvPr id="30" name="">
             <a:extLst xmlns:a="http://schemas.openxmlformats.org/drawingml/2006/main">
               <a:ext uri="{FF2B5EF4-FFF2-40B4-BE49-F238E27FC236}">
-                <a16:creationId xmlns:a16="http://schemas.microsoft.com/office/drawing/2014/main" id="{38C2AE11-8326-484B-B4EF-E261D83C9F23}"/>
+                <a16:creationId xmlns:a16="http://schemas.microsoft.com/office/drawing/2014/main" id="{FCA60543-BE4E-4C42-9B2D-71ABDF84702B}"/>
               </a:ext>
             </a:extLst>
           </p:cNvPr>
@@ -9025,7 +8880,7 @@
           <p:cNvPr id="31" name="">
             <a:extLst xmlns:a="http://schemas.openxmlformats.org/drawingml/2006/main">
               <a:ext uri="{FF2B5EF4-FFF2-40B4-BE49-F238E27FC236}">
-                <a16:creationId xmlns:a16="http://schemas.microsoft.com/office/drawing/2014/main" id="{A08AA8A0-57CD-47D7-B19D-7EE4239CB545}"/>
+                <a16:creationId xmlns:a16="http://schemas.microsoft.com/office/drawing/2014/main" id="{8E4F7DBB-3A5A-47D6-810B-F8F5600FE9AB}"/>
               </a:ext>
             </a:extLst>
           </p:cNvPr>
@@ -9089,7 +8944,7 @@
           <p:cNvPr id="32" name="">
             <a:extLst xmlns:a="http://schemas.openxmlformats.org/drawingml/2006/main">
               <a:ext uri="{FF2B5EF4-FFF2-40B4-BE49-F238E27FC236}">
-                <a16:creationId xmlns:a16="http://schemas.microsoft.com/office/drawing/2014/main" id="{8350F94B-24BB-4F0E-8DAE-DEC5FB1121D8}"/>
+                <a16:creationId xmlns:a16="http://schemas.microsoft.com/office/drawing/2014/main" id="{BB9B07B5-1097-4D9A-8C00-1F01AB4B3433}"/>
               </a:ext>
             </a:extLst>
           </p:cNvPr>
@@ -9149,7 +9004,7 @@
     </p:spTree>
     <p:extLst>
       <p:ext uri="{BB962C8B-B14F-4D97-AF65-F5344CB8AC3E}">
-        <p14:creationId xmlns:p14="http://schemas.microsoft.com/office/powerpoint/2010/main" val="199636441"/>
+        <p14:creationId xmlns:p14="http://schemas.microsoft.com/office/powerpoint/2010/main" val="21619304"/>
       </p:ext>
     </p:extLst>
   </p:cSld>
@@ -9180,7 +9035,7 @@
           <p:cNvPr id="1" name="">
             <a:extLst xmlns:a="http://schemas.openxmlformats.org/drawingml/2006/main">
               <a:ext uri="{FF2B5EF4-FFF2-40B4-BE49-F238E27FC236}">
-                <a16:creationId xmlns:a16="http://schemas.microsoft.com/office/drawing/2014/main" id="{D060A2F6-EB47-42E6-BE5F-81E695B4BBC5}"/>
+                <a16:creationId xmlns:a16="http://schemas.microsoft.com/office/drawing/2014/main" id="{C1103D5D-098F-4037-93E5-D9959C188D62}"/>
               </a:ext>
             </a:extLst>
           </p:cNvPr>
@@ -9215,7 +9070,7 @@
           <p:cNvPr id="2" name="">
             <a:extLst xmlns:a="http://schemas.openxmlformats.org/drawingml/2006/main">
               <a:ext uri="{FF2B5EF4-FFF2-40B4-BE49-F238E27FC236}">
-                <a16:creationId xmlns:a16="http://schemas.microsoft.com/office/drawing/2014/main" id="{EB2EDA23-7276-465E-A43B-FC646D6061D5}"/>
+                <a16:creationId xmlns:a16="http://schemas.microsoft.com/office/drawing/2014/main" id="{F43D2DB7-93FA-4B73-8B67-C719E868D62A}"/>
               </a:ext>
             </a:extLst>
           </p:cNvPr>
@@ -9279,7 +9134,7 @@
           <p:cNvPr id="3" name="">
             <a:extLst xmlns:a="http://schemas.openxmlformats.org/drawingml/2006/main">
               <a:ext uri="{FF2B5EF4-FFF2-40B4-BE49-F238E27FC236}">
-                <a16:creationId xmlns:a16="http://schemas.microsoft.com/office/drawing/2014/main" id="{733FCC5E-090F-4338-ADFE-3092CB8BF61F}"/>
+                <a16:creationId xmlns:a16="http://schemas.microsoft.com/office/drawing/2014/main" id="{0B5B840D-E232-4F4A-B71D-554102DB6980}"/>
               </a:ext>
             </a:extLst>
           </p:cNvPr>
@@ -9343,7 +9198,7 @@
           <p:cNvPr id="4" name="">
             <a:extLst xmlns:a="http://schemas.openxmlformats.org/drawingml/2006/main">
               <a:ext uri="{FF2B5EF4-FFF2-40B4-BE49-F238E27FC236}">
-                <a16:creationId xmlns:a16="http://schemas.microsoft.com/office/drawing/2014/main" id="{5F15D178-17B0-41CD-9898-5CF8E2B105CC}"/>
+                <a16:creationId xmlns:a16="http://schemas.microsoft.com/office/drawing/2014/main" id="{DD8D9ABD-9BD4-484D-A958-18E59DFE0BEF}"/>
               </a:ext>
             </a:extLst>
           </p:cNvPr>
@@ -9407,7 +9262,7 @@
           <p:cNvPr id="5" name="">
             <a:extLst xmlns:a="http://schemas.openxmlformats.org/drawingml/2006/main">
               <a:ext uri="{FF2B5EF4-FFF2-40B4-BE49-F238E27FC236}">
-                <a16:creationId xmlns:a16="http://schemas.microsoft.com/office/drawing/2014/main" id="{8E699A83-09F2-4DA8-80D1-FBF7A6F679E4}"/>
+                <a16:creationId xmlns:a16="http://schemas.microsoft.com/office/drawing/2014/main" id="{328EBD0A-8BF5-403B-82F3-9E9CE2910FAB}"/>
               </a:ext>
             </a:extLst>
           </p:cNvPr>
@@ -9471,7 +9326,7 @@
           <p:cNvPr id="6" name="">
             <a:extLst xmlns:a="http://schemas.openxmlformats.org/drawingml/2006/main">
               <a:ext uri="{FF2B5EF4-FFF2-40B4-BE49-F238E27FC236}">
-                <a16:creationId xmlns:a16="http://schemas.microsoft.com/office/drawing/2014/main" id="{C8305615-897C-4401-A894-A7703BDB367B}"/>
+                <a16:creationId xmlns:a16="http://schemas.microsoft.com/office/drawing/2014/main" id="{2A90DE8D-CE1D-4184-BE86-0FF5FF6614AA}"/>
               </a:ext>
             </a:extLst>
           </p:cNvPr>
@@ -9533,7 +9388,7 @@
           <p:cNvPr id="7" name="">
             <a:extLst xmlns:a="http://schemas.openxmlformats.org/drawingml/2006/main">
               <a:ext uri="{FF2B5EF4-FFF2-40B4-BE49-F238E27FC236}">
-                <a16:creationId xmlns:a16="http://schemas.microsoft.com/office/drawing/2014/main" id="{84A24FCA-53BC-4AB4-AE4B-7D0EBAD70D80}"/>
+                <a16:creationId xmlns:a16="http://schemas.microsoft.com/office/drawing/2014/main" id="{220AE1A4-F5BE-485B-AA72-83E91834C951}"/>
               </a:ext>
             </a:extLst>
           </p:cNvPr>
@@ -9566,7 +9421,7 @@
           <p:cNvPr id="8" name="">
             <a:extLst xmlns:a="http://schemas.openxmlformats.org/drawingml/2006/main">
               <a:ext uri="{FF2B5EF4-FFF2-40B4-BE49-F238E27FC236}">
-                <a16:creationId xmlns:a16="http://schemas.microsoft.com/office/drawing/2014/main" id="{1C987BA3-2A5B-4CB8-A0A4-1821A67EB1A3}"/>
+                <a16:creationId xmlns:a16="http://schemas.microsoft.com/office/drawing/2014/main" id="{1B9F8D35-C64A-4170-B9F0-99EF73C152DC}"/>
               </a:ext>
             </a:extLst>
           </p:cNvPr>
@@ -9601,7 +9456,7 @@
           <p:cNvPr id="9" name="">
             <a:extLst xmlns:a="http://schemas.openxmlformats.org/drawingml/2006/main">
               <a:ext uri="{FF2B5EF4-FFF2-40B4-BE49-F238E27FC236}">
-                <a16:creationId xmlns:a16="http://schemas.microsoft.com/office/drawing/2014/main" id="{D32A4F67-5068-4DD0-A96A-FE372B290AC7}"/>
+                <a16:creationId xmlns:a16="http://schemas.microsoft.com/office/drawing/2014/main" id="{58877B9A-96E6-43B7-BB71-115DF8C28931}"/>
               </a:ext>
             </a:extLst>
           </p:cNvPr>
@@ -9665,7 +9520,7 @@
           <p:cNvPr id="10" name="">
             <a:extLst xmlns:a="http://schemas.openxmlformats.org/drawingml/2006/main">
               <a:ext uri="{FF2B5EF4-FFF2-40B4-BE49-F238E27FC236}">
-                <a16:creationId xmlns:a16="http://schemas.microsoft.com/office/drawing/2014/main" id="{48B85D57-FD18-4083-AC7A-61A3974ADA93}"/>
+                <a16:creationId xmlns:a16="http://schemas.microsoft.com/office/drawing/2014/main" id="{ADEBB449-78B3-4EEB-A21D-967C139F3601}"/>
               </a:ext>
             </a:extLst>
           </p:cNvPr>
@@ -9729,7 +9584,7 @@
           <p:cNvPr id="11" name="">
             <a:extLst xmlns:a="http://schemas.openxmlformats.org/drawingml/2006/main">
               <a:ext uri="{FF2B5EF4-FFF2-40B4-BE49-F238E27FC236}">
-                <a16:creationId xmlns:a16="http://schemas.microsoft.com/office/drawing/2014/main" id="{EC3E3C50-4318-41D4-BA92-3294DFEBAC4F}"/>
+                <a16:creationId xmlns:a16="http://schemas.microsoft.com/office/drawing/2014/main" id="{91FEE052-D250-4442-B01D-57959365E66F}"/>
               </a:ext>
             </a:extLst>
           </p:cNvPr>
@@ -9762,7 +9617,7 @@
           <p:cNvPr id="12" name="">
             <a:extLst xmlns:a="http://schemas.openxmlformats.org/drawingml/2006/main">
               <a:ext uri="{FF2B5EF4-FFF2-40B4-BE49-F238E27FC236}">
-                <a16:creationId xmlns:a16="http://schemas.microsoft.com/office/drawing/2014/main" id="{589AC47A-3DAB-496C-81D0-259ED05F8B69}"/>
+                <a16:creationId xmlns:a16="http://schemas.microsoft.com/office/drawing/2014/main" id="{C15CC73F-BCF1-46E7-BBE7-D1A985056EAB}"/>
               </a:ext>
             </a:extLst>
           </p:cNvPr>
@@ -9797,7 +9652,7 @@
           <p:cNvPr id="13" name="">
             <a:extLst xmlns:a="http://schemas.openxmlformats.org/drawingml/2006/main">
               <a:ext uri="{FF2B5EF4-FFF2-40B4-BE49-F238E27FC236}">
-                <a16:creationId xmlns:a16="http://schemas.microsoft.com/office/drawing/2014/main" id="{50886807-B877-47F7-8DB4-9DDB2E1141F4}"/>
+                <a16:creationId xmlns:a16="http://schemas.microsoft.com/office/drawing/2014/main" id="{36CD7D4A-722C-4B4E-A29D-CACEDB6B6C1C}"/>
               </a:ext>
             </a:extLst>
           </p:cNvPr>
@@ -9861,7 +9716,7 @@
           <p:cNvPr id="14" name="">
             <a:extLst xmlns:a="http://schemas.openxmlformats.org/drawingml/2006/main">
               <a:ext uri="{FF2B5EF4-FFF2-40B4-BE49-F238E27FC236}">
-                <a16:creationId xmlns:a16="http://schemas.microsoft.com/office/drawing/2014/main" id="{1B126D57-52AE-4459-8F97-91F614E530F2}"/>
+                <a16:creationId xmlns:a16="http://schemas.microsoft.com/office/drawing/2014/main" id="{1859F1BF-A0A4-44C8-84FC-C609A615EA44}"/>
               </a:ext>
             </a:extLst>
           </p:cNvPr>
@@ -9925,7 +9780,7 @@
           <p:cNvPr id="15" name="">
             <a:extLst xmlns:a="http://schemas.openxmlformats.org/drawingml/2006/main">
               <a:ext uri="{FF2B5EF4-FFF2-40B4-BE49-F238E27FC236}">
-                <a16:creationId xmlns:a16="http://schemas.microsoft.com/office/drawing/2014/main" id="{CC38F691-8596-4E76-A9C7-A1D6C7A7626F}"/>
+                <a16:creationId xmlns:a16="http://schemas.microsoft.com/office/drawing/2014/main" id="{351D781F-C125-43D5-86C1-FA08F118139D}"/>
               </a:ext>
             </a:extLst>
           </p:cNvPr>
@@ -9958,7 +9813,7 @@
           <p:cNvPr id="16" name="">
             <a:extLst xmlns:a="http://schemas.openxmlformats.org/drawingml/2006/main">
               <a:ext uri="{FF2B5EF4-FFF2-40B4-BE49-F238E27FC236}">
-                <a16:creationId xmlns:a16="http://schemas.microsoft.com/office/drawing/2014/main" id="{3677DBFC-AF15-4E6E-B519-58F960E453CB}"/>
+                <a16:creationId xmlns:a16="http://schemas.microsoft.com/office/drawing/2014/main" id="{56D67D3E-3535-4992-B69E-A158B6F4EBAA}"/>
               </a:ext>
             </a:extLst>
           </p:cNvPr>
@@ -9993,7 +9848,7 @@
           <p:cNvPr id="17" name="">
             <a:extLst xmlns:a="http://schemas.openxmlformats.org/drawingml/2006/main">
               <a:ext uri="{FF2B5EF4-FFF2-40B4-BE49-F238E27FC236}">
-                <a16:creationId xmlns:a16="http://schemas.microsoft.com/office/drawing/2014/main" id="{B6D03976-D193-45A6-BB04-B140F0B1D930}"/>
+                <a16:creationId xmlns:a16="http://schemas.microsoft.com/office/drawing/2014/main" id="{41621D9C-B22A-4246-A4EB-DD670F832954}"/>
               </a:ext>
             </a:extLst>
           </p:cNvPr>
@@ -10057,7 +9912,7 @@
           <p:cNvPr id="18" name="">
             <a:extLst xmlns:a="http://schemas.openxmlformats.org/drawingml/2006/main">
               <a:ext uri="{FF2B5EF4-FFF2-40B4-BE49-F238E27FC236}">
-                <a16:creationId xmlns:a16="http://schemas.microsoft.com/office/drawing/2014/main" id="{9367890B-57E2-4200-8392-655282302F71}"/>
+                <a16:creationId xmlns:a16="http://schemas.microsoft.com/office/drawing/2014/main" id="{C08FCCC7-97AD-42DF-9204-D603DA60D720}"/>
               </a:ext>
             </a:extLst>
           </p:cNvPr>
@@ -10121,7 +9976,7 @@
           <p:cNvPr id="19" name="">
             <a:extLst xmlns:a="http://schemas.openxmlformats.org/drawingml/2006/main">
               <a:ext uri="{FF2B5EF4-FFF2-40B4-BE49-F238E27FC236}">
-                <a16:creationId xmlns:a16="http://schemas.microsoft.com/office/drawing/2014/main" id="{4FA7D466-1CE9-4F1A-AF75-8D6E94621DA1}"/>
+                <a16:creationId xmlns:a16="http://schemas.microsoft.com/office/drawing/2014/main" id="{86B169EF-E2E6-4038-8745-07CF87D44802}"/>
               </a:ext>
             </a:extLst>
           </p:cNvPr>
@@ -10154,7 +10009,7 @@
           <p:cNvPr id="20" name="">
             <a:extLst xmlns:a="http://schemas.openxmlformats.org/drawingml/2006/main">
               <a:ext uri="{FF2B5EF4-FFF2-40B4-BE49-F238E27FC236}">
-                <a16:creationId xmlns:a16="http://schemas.microsoft.com/office/drawing/2014/main" id="{17EE4887-1335-4FE3-BE0C-46B76B449ED0}"/>
+                <a16:creationId xmlns:a16="http://schemas.microsoft.com/office/drawing/2014/main" id="{559E1FB4-AF7D-4BF2-BEF8-4745ADA3C5C2}"/>
               </a:ext>
             </a:extLst>
           </p:cNvPr>
@@ -10189,7 +10044,7 @@
           <p:cNvPr id="21" name="">
             <a:extLst xmlns:a="http://schemas.openxmlformats.org/drawingml/2006/main">
               <a:ext uri="{FF2B5EF4-FFF2-40B4-BE49-F238E27FC236}">
-                <a16:creationId xmlns:a16="http://schemas.microsoft.com/office/drawing/2014/main" id="{1087508D-1C00-4BB2-A9E1-6AC05F814640}"/>
+                <a16:creationId xmlns:a16="http://schemas.microsoft.com/office/drawing/2014/main" id="{0F76E2A2-CC7E-4400-B70A-A3066989A007}"/>
               </a:ext>
             </a:extLst>
           </p:cNvPr>
@@ -10253,7 +10108,7 @@
           <p:cNvPr id="22" name="">
             <a:extLst xmlns:a="http://schemas.openxmlformats.org/drawingml/2006/main">
               <a:ext uri="{FF2B5EF4-FFF2-40B4-BE49-F238E27FC236}">
-                <a16:creationId xmlns:a16="http://schemas.microsoft.com/office/drawing/2014/main" id="{5F4FF816-2804-4D20-8F3F-FE5862B416DB}"/>
+                <a16:creationId xmlns:a16="http://schemas.microsoft.com/office/drawing/2014/main" id="{658D5903-2A65-4175-B882-404D3057D4C5}"/>
               </a:ext>
             </a:extLst>
           </p:cNvPr>
@@ -10317,7 +10172,7 @@
           <p:cNvPr id="23" name="">
             <a:extLst xmlns:a="http://schemas.openxmlformats.org/drawingml/2006/main">
               <a:ext uri="{FF2B5EF4-FFF2-40B4-BE49-F238E27FC236}">
-                <a16:creationId xmlns:a16="http://schemas.microsoft.com/office/drawing/2014/main" id="{F1CF6343-3B0C-4698-ACA2-5F05887776B7}"/>
+                <a16:creationId xmlns:a16="http://schemas.microsoft.com/office/drawing/2014/main" id="{9A980453-4599-4D3F-B0CC-A394938DE9DD}"/>
               </a:ext>
             </a:extLst>
           </p:cNvPr>
@@ -10379,7 +10234,7 @@
     </p:spTree>
     <p:extLst>
       <p:ext uri="{BB962C8B-B14F-4D97-AF65-F5344CB8AC3E}">
-        <p14:creationId xmlns:p14="http://schemas.microsoft.com/office/powerpoint/2010/main" val="485171668"/>
+        <p14:creationId xmlns:p14="http://schemas.microsoft.com/office/powerpoint/2010/main" val="466299994"/>
       </p:ext>
     </p:extLst>
   </p:cSld>
@@ -10410,7 +10265,7 @@
           <p:cNvPr id="1" name="">
             <a:extLst xmlns:a="http://schemas.openxmlformats.org/drawingml/2006/main">
               <a:ext uri="{FF2B5EF4-FFF2-40B4-BE49-F238E27FC236}">
-                <a16:creationId xmlns:a16="http://schemas.microsoft.com/office/drawing/2014/main" id="{C338E3B4-B11E-441E-B97C-D0E16A16D429}"/>
+                <a16:creationId xmlns:a16="http://schemas.microsoft.com/office/drawing/2014/main" id="{3F89D37A-FD8A-46D2-8882-57BB7ACD7F99}"/>
               </a:ext>
             </a:extLst>
           </p:cNvPr>
@@ -10445,7 +10300,7 @@
           <p:cNvPr id="2" name="">
             <a:extLst xmlns:a="http://schemas.openxmlformats.org/drawingml/2006/main">
               <a:ext uri="{FF2B5EF4-FFF2-40B4-BE49-F238E27FC236}">
-                <a16:creationId xmlns:a16="http://schemas.microsoft.com/office/drawing/2014/main" id="{49985BC1-BA71-44E4-A894-0C3824656CB2}"/>
+                <a16:creationId xmlns:a16="http://schemas.microsoft.com/office/drawing/2014/main" id="{64EB5DA8-EC4D-4A5F-9D73-01597832C204}"/>
               </a:ext>
             </a:extLst>
           </p:cNvPr>
@@ -10509,7 +10364,7 @@
           <p:cNvPr id="3" name="">
             <a:extLst xmlns:a="http://schemas.openxmlformats.org/drawingml/2006/main">
               <a:ext uri="{FF2B5EF4-FFF2-40B4-BE49-F238E27FC236}">
-                <a16:creationId xmlns:a16="http://schemas.microsoft.com/office/drawing/2014/main" id="{53147F3C-75C9-425E-B6C9-631F9293B409}"/>
+                <a16:creationId xmlns:a16="http://schemas.microsoft.com/office/drawing/2014/main" id="{1D0BA36A-9167-4AFE-9BAB-EA486F3DE2E4}"/>
               </a:ext>
             </a:extLst>
           </p:cNvPr>
@@ -10573,7 +10428,7 @@
           <p:cNvPr id="4" name="">
             <a:extLst xmlns:a="http://schemas.openxmlformats.org/drawingml/2006/main">
               <a:ext uri="{FF2B5EF4-FFF2-40B4-BE49-F238E27FC236}">
-                <a16:creationId xmlns:a16="http://schemas.microsoft.com/office/drawing/2014/main" id="{1CE14EC2-B114-487E-8F04-D15AE626AF3C}"/>
+                <a16:creationId xmlns:a16="http://schemas.microsoft.com/office/drawing/2014/main" id="{BEB27FE8-34AF-47D3-94E6-6933130DA199}"/>
               </a:ext>
             </a:extLst>
           </p:cNvPr>
@@ -10637,7 +10492,7 @@
           <p:cNvPr id="5" name="">
             <a:extLst xmlns:a="http://schemas.openxmlformats.org/drawingml/2006/main">
               <a:ext uri="{FF2B5EF4-FFF2-40B4-BE49-F238E27FC236}">
-                <a16:creationId xmlns:a16="http://schemas.microsoft.com/office/drawing/2014/main" id="{D1CE6B9A-A1CA-441A-97E9-2374AE1BC53B}"/>
+                <a16:creationId xmlns:a16="http://schemas.microsoft.com/office/drawing/2014/main" id="{6D036D27-059C-490E-B5FA-CA51161E814A}"/>
               </a:ext>
             </a:extLst>
           </p:cNvPr>
@@ -10701,7 +10556,7 @@
           <p:cNvPr id="6" name="">
             <a:extLst xmlns:a="http://schemas.openxmlformats.org/drawingml/2006/main">
               <a:ext uri="{FF2B5EF4-FFF2-40B4-BE49-F238E27FC236}">
-                <a16:creationId xmlns:a16="http://schemas.microsoft.com/office/drawing/2014/main" id="{30335AF7-09A2-44DA-BD17-903851FA2C70}"/>
+                <a16:creationId xmlns:a16="http://schemas.microsoft.com/office/drawing/2014/main" id="{9E77DBD7-8313-4E47-8442-5A4658EBD2A1}"/>
               </a:ext>
             </a:extLst>
           </p:cNvPr>
@@ -10734,7 +10589,7 @@
           <p:cNvPr id="7" name="">
             <a:extLst xmlns:a="http://schemas.openxmlformats.org/drawingml/2006/main">
               <a:ext uri="{FF2B5EF4-FFF2-40B4-BE49-F238E27FC236}">
-                <a16:creationId xmlns:a16="http://schemas.microsoft.com/office/drawing/2014/main" id="{2975DBD5-973D-4444-B08D-9EEFE3D52FA5}"/>
+                <a16:creationId xmlns:a16="http://schemas.microsoft.com/office/drawing/2014/main" id="{F6F2B236-DF06-42AC-8555-9F30A51E57F9}"/>
               </a:ext>
             </a:extLst>
           </p:cNvPr>
@@ -10769,7 +10624,7 @@
           <p:cNvPr id="8" name="">
             <a:extLst xmlns:a="http://schemas.openxmlformats.org/drawingml/2006/main">
               <a:ext uri="{FF2B5EF4-FFF2-40B4-BE49-F238E27FC236}">
-                <a16:creationId xmlns:a16="http://schemas.microsoft.com/office/drawing/2014/main" id="{84602164-158E-453C-B31E-0B8FB16BDE5A}"/>
+                <a16:creationId xmlns:a16="http://schemas.microsoft.com/office/drawing/2014/main" id="{CC8E6E43-EEFB-4513-9244-8E9C5737A4C0}"/>
               </a:ext>
             </a:extLst>
           </p:cNvPr>
@@ -10833,7 +10688,7 @@
           <p:cNvPr id="9" name="">
             <a:extLst xmlns:a="http://schemas.openxmlformats.org/drawingml/2006/main">
               <a:ext uri="{FF2B5EF4-FFF2-40B4-BE49-F238E27FC236}">
-                <a16:creationId xmlns:a16="http://schemas.microsoft.com/office/drawing/2014/main" id="{E820D8F7-ADC2-403A-9734-9CB2EEF182C2}"/>
+                <a16:creationId xmlns:a16="http://schemas.microsoft.com/office/drawing/2014/main" id="{BC63E93E-002E-478B-ADD4-98C7B61C2266}"/>
               </a:ext>
             </a:extLst>
           </p:cNvPr>
@@ -10868,7 +10723,7 @@
           <p:cNvPr id="10" name="">
             <a:extLst xmlns:a="http://schemas.openxmlformats.org/drawingml/2006/main">
               <a:ext uri="{FF2B5EF4-FFF2-40B4-BE49-F238E27FC236}">
-                <a16:creationId xmlns:a16="http://schemas.microsoft.com/office/drawing/2014/main" id="{D4E3BE21-4DB2-4536-A72F-A11D43C391A6}"/>
+                <a16:creationId xmlns:a16="http://schemas.microsoft.com/office/drawing/2014/main" id="{AA01AC9A-C86E-4724-A551-FDE29665ECDD}"/>
               </a:ext>
             </a:extLst>
           </p:cNvPr>
@@ -10932,7 +10787,7 @@
           <p:cNvPr id="11" name="">
             <a:extLst xmlns:a="http://schemas.openxmlformats.org/drawingml/2006/main">
               <a:ext uri="{FF2B5EF4-FFF2-40B4-BE49-F238E27FC236}">
-                <a16:creationId xmlns:a16="http://schemas.microsoft.com/office/drawing/2014/main" id="{6BE71969-A67D-4BF5-9359-8B45E960BF64}"/>
+                <a16:creationId xmlns:a16="http://schemas.microsoft.com/office/drawing/2014/main" id="{7E7974D7-3F28-4B2A-B7A5-26416D5623B9}"/>
               </a:ext>
             </a:extLst>
           </p:cNvPr>
@@ -10967,7 +10822,7 @@
           <p:cNvPr id="12" name="">
             <a:extLst xmlns:a="http://schemas.openxmlformats.org/drawingml/2006/main">
               <a:ext uri="{FF2B5EF4-FFF2-40B4-BE49-F238E27FC236}">
-                <a16:creationId xmlns:a16="http://schemas.microsoft.com/office/drawing/2014/main" id="{482BFC11-989D-4DDA-AD69-FFF9767D79EF}"/>
+                <a16:creationId xmlns:a16="http://schemas.microsoft.com/office/drawing/2014/main" id="{359E4409-2804-4F6A-9DB3-B5CC5D79088A}"/>
               </a:ext>
             </a:extLst>
           </p:cNvPr>
@@ -11031,7 +10886,7 @@
           <p:cNvPr id="13" name="">
             <a:extLst xmlns:a="http://schemas.openxmlformats.org/drawingml/2006/main">
               <a:ext uri="{FF2B5EF4-FFF2-40B4-BE49-F238E27FC236}">
-                <a16:creationId xmlns:a16="http://schemas.microsoft.com/office/drawing/2014/main" id="{9DEEA202-FFD5-4A0D-A7BE-90BF55D0C098}"/>
+                <a16:creationId xmlns:a16="http://schemas.microsoft.com/office/drawing/2014/main" id="{365215D7-0647-4667-A411-2C4497FE7614}"/>
               </a:ext>
             </a:extLst>
           </p:cNvPr>
@@ -11066,7 +10921,7 @@
           <p:cNvPr id="14" name="">
             <a:extLst xmlns:a="http://schemas.openxmlformats.org/drawingml/2006/main">
               <a:ext uri="{FF2B5EF4-FFF2-40B4-BE49-F238E27FC236}">
-                <a16:creationId xmlns:a16="http://schemas.microsoft.com/office/drawing/2014/main" id="{3D168F73-FB68-46F0-92D2-DE92D9F1132A}"/>
+                <a16:creationId xmlns:a16="http://schemas.microsoft.com/office/drawing/2014/main" id="{2210BB1D-0153-4BFD-B2D4-5B6EB14644B9}"/>
               </a:ext>
             </a:extLst>
           </p:cNvPr>
@@ -11130,7 +10985,7 @@
           <p:cNvPr id="15" name="">
             <a:extLst xmlns:a="http://schemas.openxmlformats.org/drawingml/2006/main">
               <a:ext uri="{FF2B5EF4-FFF2-40B4-BE49-F238E27FC236}">
-                <a16:creationId xmlns:a16="http://schemas.microsoft.com/office/drawing/2014/main" id="{47E4414E-612F-4473-BB5A-ADAC3993E0A1}"/>
+                <a16:creationId xmlns:a16="http://schemas.microsoft.com/office/drawing/2014/main" id="{CAB65F2C-12C8-485A-9B58-D80E1D65BF52}"/>
               </a:ext>
             </a:extLst>
           </p:cNvPr>
@@ -11165,7 +11020,7 @@
           <p:cNvPr id="16" name="">
             <a:extLst xmlns:a="http://schemas.openxmlformats.org/drawingml/2006/main">
               <a:ext uri="{FF2B5EF4-FFF2-40B4-BE49-F238E27FC236}">
-                <a16:creationId xmlns:a16="http://schemas.microsoft.com/office/drawing/2014/main" id="{658D5231-5ED2-4261-9A41-D43268FB3594}"/>
+                <a16:creationId xmlns:a16="http://schemas.microsoft.com/office/drawing/2014/main" id="{D1D502A8-61DA-4BB0-AC11-001663DB1AFA}"/>
               </a:ext>
             </a:extLst>
           </p:cNvPr>
@@ -11229,7 +11084,7 @@
           <p:cNvPr id="17" name="">
             <a:extLst xmlns:a="http://schemas.openxmlformats.org/drawingml/2006/main">
               <a:ext uri="{FF2B5EF4-FFF2-40B4-BE49-F238E27FC236}">
-                <a16:creationId xmlns:a16="http://schemas.microsoft.com/office/drawing/2014/main" id="{1B19BAB4-E812-480C-A8A6-24EE097985C8}"/>
+                <a16:creationId xmlns:a16="http://schemas.microsoft.com/office/drawing/2014/main" id="{5CA4EB03-DEAB-49BE-B7A4-05D4FE51A4DC}"/>
               </a:ext>
             </a:extLst>
           </p:cNvPr>
@@ -11264,7 +11119,7 @@
           <p:cNvPr id="18" name="">
             <a:extLst xmlns:a="http://schemas.openxmlformats.org/drawingml/2006/main">
               <a:ext uri="{FF2B5EF4-FFF2-40B4-BE49-F238E27FC236}">
-                <a16:creationId xmlns:a16="http://schemas.microsoft.com/office/drawing/2014/main" id="{2BFC26CA-F140-4521-AFC4-0AFA478A16B1}"/>
+                <a16:creationId xmlns:a16="http://schemas.microsoft.com/office/drawing/2014/main" id="{A04671D1-64C2-4996-8E2E-7C8E24F05DD0}"/>
               </a:ext>
             </a:extLst>
           </p:cNvPr>
@@ -11328,7 +11183,7 @@
           <p:cNvPr id="19" name="">
             <a:extLst xmlns:a="http://schemas.openxmlformats.org/drawingml/2006/main">
               <a:ext uri="{FF2B5EF4-FFF2-40B4-BE49-F238E27FC236}">
-                <a16:creationId xmlns:a16="http://schemas.microsoft.com/office/drawing/2014/main" id="{456E4D74-1225-4DE3-8807-46F412A71842}"/>
+                <a16:creationId xmlns:a16="http://schemas.microsoft.com/office/drawing/2014/main" id="{0430BCDF-BF26-4625-8AB1-A19E82A219D0}"/>
               </a:ext>
             </a:extLst>
           </p:cNvPr>
@@ -11392,7 +11247,7 @@
           <p:cNvPr id="20" name="">
             <a:extLst xmlns:a="http://schemas.openxmlformats.org/drawingml/2006/main">
               <a:ext uri="{FF2B5EF4-FFF2-40B4-BE49-F238E27FC236}">
-                <a16:creationId xmlns:a16="http://schemas.microsoft.com/office/drawing/2014/main" id="{23E11DFD-F93E-4B27-A79E-01F2900CE44D}"/>
+                <a16:creationId xmlns:a16="http://schemas.microsoft.com/office/drawing/2014/main" id="{C60C9A20-4BF3-4B54-B81A-889E93470E82}"/>
               </a:ext>
             </a:extLst>
           </p:cNvPr>
@@ -11456,7 +11311,7 @@
           <p:cNvPr id="21" name="">
             <a:extLst xmlns:a="http://schemas.openxmlformats.org/drawingml/2006/main">
               <a:ext uri="{FF2B5EF4-FFF2-40B4-BE49-F238E27FC236}">
-                <a16:creationId xmlns:a16="http://schemas.microsoft.com/office/drawing/2014/main" id="{AB793C51-56E2-4F5A-AF21-3EEF5A66783D}"/>
+                <a16:creationId xmlns:a16="http://schemas.microsoft.com/office/drawing/2014/main" id="{7D89815F-F2DF-41A6-90EF-A96455606021}"/>
               </a:ext>
             </a:extLst>
           </p:cNvPr>
@@ -11491,7 +11346,7 @@
           <p:cNvPr id="22" name="">
             <a:extLst xmlns:a="http://schemas.openxmlformats.org/drawingml/2006/main">
               <a:ext uri="{FF2B5EF4-FFF2-40B4-BE49-F238E27FC236}">
-                <a16:creationId xmlns:a16="http://schemas.microsoft.com/office/drawing/2014/main" id="{C844E368-ADD9-4E93-83D6-9A582529E404}"/>
+                <a16:creationId xmlns:a16="http://schemas.microsoft.com/office/drawing/2014/main" id="{0D85DAEB-9CA2-4E58-B36E-58D537A707B6}"/>
               </a:ext>
             </a:extLst>
           </p:cNvPr>
@@ -11555,7 +11410,7 @@
           <p:cNvPr id="23" name="">
             <a:extLst xmlns:a="http://schemas.openxmlformats.org/drawingml/2006/main">
               <a:ext uri="{FF2B5EF4-FFF2-40B4-BE49-F238E27FC236}">
-                <a16:creationId xmlns:a16="http://schemas.microsoft.com/office/drawing/2014/main" id="{71C7849C-133F-436C-A578-9E6326AD5F1E}"/>
+                <a16:creationId xmlns:a16="http://schemas.microsoft.com/office/drawing/2014/main" id="{7E8C0226-FDD8-47BD-BA5B-7C5B8193F804}"/>
               </a:ext>
             </a:extLst>
           </p:cNvPr>
@@ -11619,7 +11474,7 @@
           <p:cNvPr id="24" name="">
             <a:extLst xmlns:a="http://schemas.openxmlformats.org/drawingml/2006/main">
               <a:ext uri="{FF2B5EF4-FFF2-40B4-BE49-F238E27FC236}">
-                <a16:creationId xmlns:a16="http://schemas.microsoft.com/office/drawing/2014/main" id="{3A6A51D7-76A3-4688-917E-8242ED89BC02}"/>
+                <a16:creationId xmlns:a16="http://schemas.microsoft.com/office/drawing/2014/main" id="{88FA5CC7-275E-4EE3-BEDC-065D9CA31C58}"/>
               </a:ext>
             </a:extLst>
           </p:cNvPr>
@@ -11683,7 +11538,7 @@
           <p:cNvPr id="25" name="">
             <a:extLst xmlns:a="http://schemas.openxmlformats.org/drawingml/2006/main">
               <a:ext uri="{FF2B5EF4-FFF2-40B4-BE49-F238E27FC236}">
-                <a16:creationId xmlns:a16="http://schemas.microsoft.com/office/drawing/2014/main" id="{8DBA29E7-FBC0-47F2-B0E7-E1E9FBB15EB7}"/>
+                <a16:creationId xmlns:a16="http://schemas.microsoft.com/office/drawing/2014/main" id="{EBE0A650-0DD0-4079-B0FE-697619BBCBA6}"/>
               </a:ext>
             </a:extLst>
           </p:cNvPr>
@@ -11718,7 +11573,7 @@
           <p:cNvPr id="26" name="">
             <a:extLst xmlns:a="http://schemas.openxmlformats.org/drawingml/2006/main">
               <a:ext uri="{FF2B5EF4-FFF2-40B4-BE49-F238E27FC236}">
-                <a16:creationId xmlns:a16="http://schemas.microsoft.com/office/drawing/2014/main" id="{98CF9EB9-278D-4E91-A2E4-FAACD4981372}"/>
+                <a16:creationId xmlns:a16="http://schemas.microsoft.com/office/drawing/2014/main" id="{92F26BA9-3420-4488-8681-72915E97F5A5}"/>
               </a:ext>
             </a:extLst>
           </p:cNvPr>
@@ -11782,7 +11637,7 @@
           <p:cNvPr id="27" name="">
             <a:extLst xmlns:a="http://schemas.openxmlformats.org/drawingml/2006/main">
               <a:ext uri="{FF2B5EF4-FFF2-40B4-BE49-F238E27FC236}">
-                <a16:creationId xmlns:a16="http://schemas.microsoft.com/office/drawing/2014/main" id="{505A3226-BB90-4CB8-A102-16EF27F9E4B3}"/>
+                <a16:creationId xmlns:a16="http://schemas.microsoft.com/office/drawing/2014/main" id="{0AC2804C-9E09-4FE4-8CAC-D32EFF8861BA}"/>
               </a:ext>
             </a:extLst>
           </p:cNvPr>
@@ -11846,7 +11701,7 @@
           <p:cNvPr id="28" name="">
             <a:extLst xmlns:a="http://schemas.openxmlformats.org/drawingml/2006/main">
               <a:ext uri="{FF2B5EF4-FFF2-40B4-BE49-F238E27FC236}">
-                <a16:creationId xmlns:a16="http://schemas.microsoft.com/office/drawing/2014/main" id="{1D60BA94-28D9-4E70-99B5-342824B226EB}"/>
+                <a16:creationId xmlns:a16="http://schemas.microsoft.com/office/drawing/2014/main" id="{B1F77BDB-9B89-4909-B129-81E0EC299C87}"/>
               </a:ext>
             </a:extLst>
           </p:cNvPr>
@@ -11910,7 +11765,7 @@
           <p:cNvPr id="29" name="">
             <a:extLst xmlns:a="http://schemas.openxmlformats.org/drawingml/2006/main">
               <a:ext uri="{FF2B5EF4-FFF2-40B4-BE49-F238E27FC236}">
-                <a16:creationId xmlns:a16="http://schemas.microsoft.com/office/drawing/2014/main" id="{BEF8495D-D2E6-4CAA-9066-73488071A637}"/>
+                <a16:creationId xmlns:a16="http://schemas.microsoft.com/office/drawing/2014/main" id="{E46C908F-ADDB-41EA-8B99-B39C704EF8EF}"/>
               </a:ext>
             </a:extLst>
           </p:cNvPr>
@@ -11945,7 +11800,7 @@
           <p:cNvPr id="30" name="">
             <a:extLst xmlns:a="http://schemas.openxmlformats.org/drawingml/2006/main">
               <a:ext uri="{FF2B5EF4-FFF2-40B4-BE49-F238E27FC236}">
-                <a16:creationId xmlns:a16="http://schemas.microsoft.com/office/drawing/2014/main" id="{6CD1A95F-87B4-4009-872B-BF236B24D5F2}"/>
+                <a16:creationId xmlns:a16="http://schemas.microsoft.com/office/drawing/2014/main" id="{72AF4B41-C633-4B0C-819C-A7E66E62D37F}"/>
               </a:ext>
             </a:extLst>
           </p:cNvPr>
@@ -12009,7 +11864,7 @@
           <p:cNvPr id="31" name="">
             <a:extLst xmlns:a="http://schemas.openxmlformats.org/drawingml/2006/main">
               <a:ext uri="{FF2B5EF4-FFF2-40B4-BE49-F238E27FC236}">
-                <a16:creationId xmlns:a16="http://schemas.microsoft.com/office/drawing/2014/main" id="{A5B03010-D375-436D-99B2-D953C4945CEA}"/>
+                <a16:creationId xmlns:a16="http://schemas.microsoft.com/office/drawing/2014/main" id="{BEBCBEAC-0DD7-4A37-8C5B-067C9946A9FD}"/>
               </a:ext>
             </a:extLst>
           </p:cNvPr>
@@ -12073,7 +11928,7 @@
           <p:cNvPr id="32" name="">
             <a:extLst xmlns:a="http://schemas.openxmlformats.org/drawingml/2006/main">
               <a:ext uri="{FF2B5EF4-FFF2-40B4-BE49-F238E27FC236}">
-                <a16:creationId xmlns:a16="http://schemas.microsoft.com/office/drawing/2014/main" id="{7A318BA8-68DF-4F91-84F4-D598E9BF5AD2}"/>
+                <a16:creationId xmlns:a16="http://schemas.microsoft.com/office/drawing/2014/main" id="{C424350C-8410-401B-9B88-5A4609EC0893}"/>
               </a:ext>
             </a:extLst>
           </p:cNvPr>
@@ -12137,7 +11992,7 @@
           <p:cNvPr id="33" name="">
             <a:extLst xmlns:a="http://schemas.openxmlformats.org/drawingml/2006/main">
               <a:ext uri="{FF2B5EF4-FFF2-40B4-BE49-F238E27FC236}">
-                <a16:creationId xmlns:a16="http://schemas.microsoft.com/office/drawing/2014/main" id="{5D950A1D-1C44-4A30-A9E9-BC0EA2505F88}"/>
+                <a16:creationId xmlns:a16="http://schemas.microsoft.com/office/drawing/2014/main" id="{1B35584F-4D6A-4FAC-8F5B-B76FF5EAE59D}"/>
               </a:ext>
             </a:extLst>
           </p:cNvPr>
@@ -12172,7 +12027,7 @@
           <p:cNvPr id="34" name="">
             <a:extLst xmlns:a="http://schemas.openxmlformats.org/drawingml/2006/main">
               <a:ext uri="{FF2B5EF4-FFF2-40B4-BE49-F238E27FC236}">
-                <a16:creationId xmlns:a16="http://schemas.microsoft.com/office/drawing/2014/main" id="{E0D12921-8425-46B6-A097-A348EEE727D9}"/>
+                <a16:creationId xmlns:a16="http://schemas.microsoft.com/office/drawing/2014/main" id="{48295FFE-CD4B-42FC-8165-62E396784B30}"/>
               </a:ext>
             </a:extLst>
           </p:cNvPr>
@@ -12236,7 +12091,7 @@
           <p:cNvPr id="35" name="">
             <a:extLst xmlns:a="http://schemas.openxmlformats.org/drawingml/2006/main">
               <a:ext uri="{FF2B5EF4-FFF2-40B4-BE49-F238E27FC236}">
-                <a16:creationId xmlns:a16="http://schemas.microsoft.com/office/drawing/2014/main" id="{9AD5E6B4-8332-42B7-BD43-AD13981E88A5}"/>
+                <a16:creationId xmlns:a16="http://schemas.microsoft.com/office/drawing/2014/main" id="{2C450AA7-1E41-40D3-BEEC-6248C249198C}"/>
               </a:ext>
             </a:extLst>
           </p:cNvPr>
@@ -12300,7 +12155,7 @@
           <p:cNvPr id="36" name="">
             <a:extLst xmlns:a="http://schemas.openxmlformats.org/drawingml/2006/main">
               <a:ext uri="{FF2B5EF4-FFF2-40B4-BE49-F238E27FC236}">
-                <a16:creationId xmlns:a16="http://schemas.microsoft.com/office/drawing/2014/main" id="{6D67C0B0-8B9D-4884-8171-CD9126A6AE7B}"/>
+                <a16:creationId xmlns:a16="http://schemas.microsoft.com/office/drawing/2014/main" id="{57DDB42B-A318-44E0-BA6E-8083D8F1CC0C}"/>
               </a:ext>
             </a:extLst>
           </p:cNvPr>
@@ -12364,7 +12219,7 @@
           <p:cNvPr id="37" name="">
             <a:extLst xmlns:a="http://schemas.openxmlformats.org/drawingml/2006/main">
               <a:ext uri="{FF2B5EF4-FFF2-40B4-BE49-F238E27FC236}">
-                <a16:creationId xmlns:a16="http://schemas.microsoft.com/office/drawing/2014/main" id="{B3E13469-6EDD-473C-B21F-BDFE796167F3}"/>
+                <a16:creationId xmlns:a16="http://schemas.microsoft.com/office/drawing/2014/main" id="{EE2A8642-656A-417D-98A2-E92013819C13}"/>
               </a:ext>
             </a:extLst>
           </p:cNvPr>
@@ -12397,7 +12252,7 @@
           <p:cNvPr id="38" name="">
             <a:extLst xmlns:a="http://schemas.openxmlformats.org/drawingml/2006/main">
               <a:ext uri="{FF2B5EF4-FFF2-40B4-BE49-F238E27FC236}">
-                <a16:creationId xmlns:a16="http://schemas.microsoft.com/office/drawing/2014/main" id="{5A7F6728-7A63-4CB3-8B41-A841DA8EE59E}"/>
+                <a16:creationId xmlns:a16="http://schemas.microsoft.com/office/drawing/2014/main" id="{D79DBEFB-9285-4A42-A838-47EDCF96374D}"/>
               </a:ext>
             </a:extLst>
           </p:cNvPr>
@@ -12432,7 +12287,7 @@
           <p:cNvPr id="39" name="">
             <a:extLst xmlns:a="http://schemas.openxmlformats.org/drawingml/2006/main">
               <a:ext uri="{FF2B5EF4-FFF2-40B4-BE49-F238E27FC236}">
-                <a16:creationId xmlns:a16="http://schemas.microsoft.com/office/drawing/2014/main" id="{8C82B82B-3E9B-4A24-9221-08AB859E3D04}"/>
+                <a16:creationId xmlns:a16="http://schemas.microsoft.com/office/drawing/2014/main" id="{0AE483CB-DE02-46B4-B3E2-3591956F43C5}"/>
               </a:ext>
             </a:extLst>
           </p:cNvPr>
@@ -12496,7 +12351,7 @@
           <p:cNvPr id="40" name="">
             <a:extLst xmlns:a="http://schemas.openxmlformats.org/drawingml/2006/main">
               <a:ext uri="{FF2B5EF4-FFF2-40B4-BE49-F238E27FC236}">
-                <a16:creationId xmlns:a16="http://schemas.microsoft.com/office/drawing/2014/main" id="{8AA04E9A-0B1C-428A-AE25-D462535BA9A5}"/>
+                <a16:creationId xmlns:a16="http://schemas.microsoft.com/office/drawing/2014/main" id="{38910A4E-992B-4BA9-821F-5CE162249F98}"/>
               </a:ext>
             </a:extLst>
           </p:cNvPr>
@@ -12560,7 +12415,7 @@
           <p:cNvPr id="41" name="">
             <a:extLst xmlns:a="http://schemas.openxmlformats.org/drawingml/2006/main">
               <a:ext uri="{FF2B5EF4-FFF2-40B4-BE49-F238E27FC236}">
-                <a16:creationId xmlns:a16="http://schemas.microsoft.com/office/drawing/2014/main" id="{1A5E0977-40D7-4D41-8D23-266F0FFDAFDD}"/>
+                <a16:creationId xmlns:a16="http://schemas.microsoft.com/office/drawing/2014/main" id="{3958F88C-3956-43AA-B5D6-A0A88792B180}"/>
               </a:ext>
             </a:extLst>
           </p:cNvPr>
@@ -12593,7 +12448,7 @@
           <p:cNvPr id="42" name="">
             <a:extLst xmlns:a="http://schemas.openxmlformats.org/drawingml/2006/main">
               <a:ext uri="{FF2B5EF4-FFF2-40B4-BE49-F238E27FC236}">
-                <a16:creationId xmlns:a16="http://schemas.microsoft.com/office/drawing/2014/main" id="{686529D6-CD2A-44BC-9250-92D296373AE1}"/>
+                <a16:creationId xmlns:a16="http://schemas.microsoft.com/office/drawing/2014/main" id="{C2120B12-4EEC-45B7-BE45-E1A7EFBB4AA1}"/>
               </a:ext>
             </a:extLst>
           </p:cNvPr>
@@ -12628,7 +12483,7 @@
           <p:cNvPr id="43" name="">
             <a:extLst xmlns:a="http://schemas.openxmlformats.org/drawingml/2006/main">
               <a:ext uri="{FF2B5EF4-FFF2-40B4-BE49-F238E27FC236}">
-                <a16:creationId xmlns:a16="http://schemas.microsoft.com/office/drawing/2014/main" id="{EB0A2BD2-8EDC-472D-9685-B4C7A58A66C4}"/>
+                <a16:creationId xmlns:a16="http://schemas.microsoft.com/office/drawing/2014/main" id="{4C090FDA-DD9B-4B02-A553-BBA3A332F3D2}"/>
               </a:ext>
             </a:extLst>
           </p:cNvPr>
@@ -12692,7 +12547,7 @@
           <p:cNvPr id="44" name="">
             <a:extLst xmlns:a="http://schemas.openxmlformats.org/drawingml/2006/main">
               <a:ext uri="{FF2B5EF4-FFF2-40B4-BE49-F238E27FC236}">
-                <a16:creationId xmlns:a16="http://schemas.microsoft.com/office/drawing/2014/main" id="{94BC47C7-4344-4BAC-91D4-3E00213A618B}"/>
+                <a16:creationId xmlns:a16="http://schemas.microsoft.com/office/drawing/2014/main" id="{CFC114CC-7282-4A0F-AC7B-324553A04D4E}"/>
               </a:ext>
             </a:extLst>
           </p:cNvPr>
@@ -12756,7 +12611,7 @@
           <p:cNvPr id="45" name="">
             <a:extLst xmlns:a="http://schemas.openxmlformats.org/drawingml/2006/main">
               <a:ext uri="{FF2B5EF4-FFF2-40B4-BE49-F238E27FC236}">
-                <a16:creationId xmlns:a16="http://schemas.microsoft.com/office/drawing/2014/main" id="{FECB60E3-172E-4687-95A9-82926DC64C66}"/>
+                <a16:creationId xmlns:a16="http://schemas.microsoft.com/office/drawing/2014/main" id="{7C6961CC-1B97-40A2-A06F-0C8BA687E99E}"/>
               </a:ext>
             </a:extLst>
           </p:cNvPr>
@@ -12816,7 +12671,7 @@
     </p:spTree>
     <p:extLst>
       <p:ext uri="{BB962C8B-B14F-4D97-AF65-F5344CB8AC3E}">
-        <p14:creationId xmlns:p14="http://schemas.microsoft.com/office/powerpoint/2010/main" val="515255451"/>
+        <p14:creationId xmlns:p14="http://schemas.microsoft.com/office/powerpoint/2010/main" val="1112581427"/>
       </p:ext>
     </p:extLst>
   </p:cSld>
@@ -12847,7 +12702,7 @@
           <p:cNvPr id="1" name="">
             <a:extLst xmlns:a="http://schemas.openxmlformats.org/drawingml/2006/main">
               <a:ext uri="{FF2B5EF4-FFF2-40B4-BE49-F238E27FC236}">
-                <a16:creationId xmlns:a16="http://schemas.microsoft.com/office/drawing/2014/main" id="{5E066D6E-B300-48AD-A9D1-DF1CEE46ED5F}"/>
+                <a16:creationId xmlns:a16="http://schemas.microsoft.com/office/drawing/2014/main" id="{F55FF48A-B8A0-4856-B6C0-9A76EE8AF0C8}"/>
               </a:ext>
             </a:extLst>
           </p:cNvPr>
@@ -12882,7 +12737,7 @@
           <p:cNvPr id="2" name="">
             <a:extLst xmlns:a="http://schemas.openxmlformats.org/drawingml/2006/main">
               <a:ext uri="{FF2B5EF4-FFF2-40B4-BE49-F238E27FC236}">
-                <a16:creationId xmlns:a16="http://schemas.microsoft.com/office/drawing/2014/main" id="{9D381C45-4C98-49E1-9930-5AD74F26B368}"/>
+                <a16:creationId xmlns:a16="http://schemas.microsoft.com/office/drawing/2014/main" id="{583ACA0B-07DB-46C6-A385-838730F6E819}"/>
               </a:ext>
             </a:extLst>
           </p:cNvPr>
@@ -12946,7 +12801,7 @@
           <p:cNvPr id="3" name="">
             <a:extLst xmlns:a="http://schemas.openxmlformats.org/drawingml/2006/main">
               <a:ext uri="{FF2B5EF4-FFF2-40B4-BE49-F238E27FC236}">
-                <a16:creationId xmlns:a16="http://schemas.microsoft.com/office/drawing/2014/main" id="{89D5BB3D-3BF4-4409-B1C3-C5E1B5086054}"/>
+                <a16:creationId xmlns:a16="http://schemas.microsoft.com/office/drawing/2014/main" id="{02B6BF88-A3AF-434E-B5C8-4E6FCDC23CF0}"/>
               </a:ext>
             </a:extLst>
           </p:cNvPr>
@@ -13010,7 +12865,7 @@
           <p:cNvPr id="4" name="">
             <a:extLst xmlns:a="http://schemas.openxmlformats.org/drawingml/2006/main">
               <a:ext uri="{FF2B5EF4-FFF2-40B4-BE49-F238E27FC236}">
-                <a16:creationId xmlns:a16="http://schemas.microsoft.com/office/drawing/2014/main" id="{70573EE1-179B-470F-B5E7-D0A885DAD3AA}"/>
+                <a16:creationId xmlns:a16="http://schemas.microsoft.com/office/drawing/2014/main" id="{8F970672-C832-4964-8B78-7B8ED31D1064}"/>
               </a:ext>
             </a:extLst>
           </p:cNvPr>
@@ -13074,7 +12929,7 @@
           <p:cNvPr id="5" name="">
             <a:extLst xmlns:a="http://schemas.openxmlformats.org/drawingml/2006/main">
               <a:ext uri="{FF2B5EF4-FFF2-40B4-BE49-F238E27FC236}">
-                <a16:creationId xmlns:a16="http://schemas.microsoft.com/office/drawing/2014/main" id="{299763BE-AE61-4F8F-9658-0B2CC8C86201}"/>
+                <a16:creationId xmlns:a16="http://schemas.microsoft.com/office/drawing/2014/main" id="{84545D2B-DCCC-493F-A552-AC47CA42F162}"/>
               </a:ext>
             </a:extLst>
           </p:cNvPr>
@@ -13138,7 +12993,7 @@
           <p:cNvPr id="6" name="">
             <a:extLst xmlns:a="http://schemas.openxmlformats.org/drawingml/2006/main">
               <a:ext uri="{FF2B5EF4-FFF2-40B4-BE49-F238E27FC236}">
-                <a16:creationId xmlns:a16="http://schemas.microsoft.com/office/drawing/2014/main" id="{B5FDA4FE-F50F-464B-A601-EEBBAAD6A6A0}"/>
+                <a16:creationId xmlns:a16="http://schemas.microsoft.com/office/drawing/2014/main" id="{50112486-F827-4DE1-B01A-B833424F0E78}"/>
               </a:ext>
             </a:extLst>
           </p:cNvPr>
@@ -13171,7 +13026,7 @@
           <p:cNvPr id="7" name="">
             <a:extLst xmlns:a="http://schemas.openxmlformats.org/drawingml/2006/main">
               <a:ext uri="{FF2B5EF4-FFF2-40B4-BE49-F238E27FC236}">
-                <a16:creationId xmlns:a16="http://schemas.microsoft.com/office/drawing/2014/main" id="{143D623D-78AE-41B4-BF42-76CE448E9DA3}"/>
+                <a16:creationId xmlns:a16="http://schemas.microsoft.com/office/drawing/2014/main" id="{3A1D13C5-3D07-41E5-8CC8-6CECE3F4CA84}"/>
               </a:ext>
             </a:extLst>
           </p:cNvPr>
@@ -13206,7 +13061,7 @@
           <p:cNvPr id="8" name="">
             <a:extLst xmlns:a="http://schemas.openxmlformats.org/drawingml/2006/main">
               <a:ext uri="{FF2B5EF4-FFF2-40B4-BE49-F238E27FC236}">
-                <a16:creationId xmlns:a16="http://schemas.microsoft.com/office/drawing/2014/main" id="{98A2ADC2-06E5-44BE-9E47-708380D3CB4A}"/>
+                <a16:creationId xmlns:a16="http://schemas.microsoft.com/office/drawing/2014/main" id="{A0358384-304F-4CF5-BFDA-CC3DFA05722C}"/>
               </a:ext>
             </a:extLst>
           </p:cNvPr>
@@ -13270,7 +13125,7 @@
           <p:cNvPr id="9" name="">
             <a:extLst xmlns:a="http://schemas.openxmlformats.org/drawingml/2006/main">
               <a:ext uri="{FF2B5EF4-FFF2-40B4-BE49-F238E27FC236}">
-                <a16:creationId xmlns:a16="http://schemas.microsoft.com/office/drawing/2014/main" id="{D8D39085-1BE3-4734-A959-6FB99598CBB3}"/>
+                <a16:creationId xmlns:a16="http://schemas.microsoft.com/office/drawing/2014/main" id="{078D8DED-7E9C-4854-ABB4-B7D7C1D7B764}"/>
               </a:ext>
             </a:extLst>
           </p:cNvPr>
@@ -13334,7 +13189,7 @@
           <p:cNvPr id="10" name="">
             <a:extLst xmlns:a="http://schemas.openxmlformats.org/drawingml/2006/main">
               <a:ext uri="{FF2B5EF4-FFF2-40B4-BE49-F238E27FC236}">
-                <a16:creationId xmlns:a16="http://schemas.microsoft.com/office/drawing/2014/main" id="{A7338FDF-14BB-4D16-9B57-B43700B438A5}"/>
+                <a16:creationId xmlns:a16="http://schemas.microsoft.com/office/drawing/2014/main" id="{17BCDB79-DBCA-4279-BD2C-74C5FAB3BE56}"/>
               </a:ext>
             </a:extLst>
           </p:cNvPr>
@@ -13367,7 +13222,7 @@
           <p:cNvPr id="11" name="">
             <a:extLst xmlns:a="http://schemas.openxmlformats.org/drawingml/2006/main">
               <a:ext uri="{FF2B5EF4-FFF2-40B4-BE49-F238E27FC236}">
-                <a16:creationId xmlns:a16="http://schemas.microsoft.com/office/drawing/2014/main" id="{960BE978-647A-49CB-A6FA-5D0870375372}"/>
+                <a16:creationId xmlns:a16="http://schemas.microsoft.com/office/drawing/2014/main" id="{E46DAAA2-2557-44F6-8B75-5C5D772A86C9}"/>
               </a:ext>
             </a:extLst>
           </p:cNvPr>
@@ -13402,7 +13257,7 @@
           <p:cNvPr id="12" name="">
             <a:extLst xmlns:a="http://schemas.openxmlformats.org/drawingml/2006/main">
               <a:ext uri="{FF2B5EF4-FFF2-40B4-BE49-F238E27FC236}">
-                <a16:creationId xmlns:a16="http://schemas.microsoft.com/office/drawing/2014/main" id="{285AFBCB-D7EF-4FAF-B1CF-4055DB0833E8}"/>
+                <a16:creationId xmlns:a16="http://schemas.microsoft.com/office/drawing/2014/main" id="{F48EC385-2E85-4EF2-A0D8-F3659A40156B}"/>
               </a:ext>
             </a:extLst>
           </p:cNvPr>
@@ -13466,7 +13321,7 @@
           <p:cNvPr id="13" name="">
             <a:extLst xmlns:a="http://schemas.openxmlformats.org/drawingml/2006/main">
               <a:ext uri="{FF2B5EF4-FFF2-40B4-BE49-F238E27FC236}">
-                <a16:creationId xmlns:a16="http://schemas.microsoft.com/office/drawing/2014/main" id="{2689F070-4ECE-4391-A818-FA4F6E836F64}"/>
+                <a16:creationId xmlns:a16="http://schemas.microsoft.com/office/drawing/2014/main" id="{A2C84E02-6367-41BC-9116-28F13A4E2A67}"/>
               </a:ext>
             </a:extLst>
           </p:cNvPr>
@@ -13530,7 +13385,7 @@
           <p:cNvPr id="14" name="">
             <a:extLst xmlns:a="http://schemas.openxmlformats.org/drawingml/2006/main">
               <a:ext uri="{FF2B5EF4-FFF2-40B4-BE49-F238E27FC236}">
-                <a16:creationId xmlns:a16="http://schemas.microsoft.com/office/drawing/2014/main" id="{265427B8-A866-4F54-A997-A19DA30FD81E}"/>
+                <a16:creationId xmlns:a16="http://schemas.microsoft.com/office/drawing/2014/main" id="{94FCB312-1256-41CC-89FE-F67581F58140}"/>
               </a:ext>
             </a:extLst>
           </p:cNvPr>
@@ -13563,7 +13418,7 @@
           <p:cNvPr id="15" name="">
             <a:extLst xmlns:a="http://schemas.openxmlformats.org/drawingml/2006/main">
               <a:ext uri="{FF2B5EF4-FFF2-40B4-BE49-F238E27FC236}">
-                <a16:creationId xmlns:a16="http://schemas.microsoft.com/office/drawing/2014/main" id="{4C3464A1-6A74-493B-8F2E-C83A2357C249}"/>
+                <a16:creationId xmlns:a16="http://schemas.microsoft.com/office/drawing/2014/main" id="{921EC4C3-E616-43A9-B2BE-8747F99AD50E}"/>
               </a:ext>
             </a:extLst>
           </p:cNvPr>
@@ -13598,7 +13453,7 @@
           <p:cNvPr id="16" name="">
             <a:extLst xmlns:a="http://schemas.openxmlformats.org/drawingml/2006/main">
               <a:ext uri="{FF2B5EF4-FFF2-40B4-BE49-F238E27FC236}">
-                <a16:creationId xmlns:a16="http://schemas.microsoft.com/office/drawing/2014/main" id="{57500B38-D8E8-4581-BFCA-E30955625CD4}"/>
+                <a16:creationId xmlns:a16="http://schemas.microsoft.com/office/drawing/2014/main" id="{874481B8-F421-4C58-BDEF-C546BAA93E22}"/>
               </a:ext>
             </a:extLst>
           </p:cNvPr>
@@ -13662,7 +13517,7 @@
           <p:cNvPr id="17" name="">
             <a:extLst xmlns:a="http://schemas.openxmlformats.org/drawingml/2006/main">
               <a:ext uri="{FF2B5EF4-FFF2-40B4-BE49-F238E27FC236}">
-                <a16:creationId xmlns:a16="http://schemas.microsoft.com/office/drawing/2014/main" id="{8E3EE11F-48F8-4356-804C-B96B6099DE88}"/>
+                <a16:creationId xmlns:a16="http://schemas.microsoft.com/office/drawing/2014/main" id="{BCAA2C1A-E8EC-41AF-BDCC-6A38C48CFC0B}"/>
               </a:ext>
             </a:extLst>
           </p:cNvPr>
@@ -13726,7 +13581,7 @@
           <p:cNvPr id="18" name="">
             <a:extLst xmlns:a="http://schemas.openxmlformats.org/drawingml/2006/main">
               <a:ext uri="{FF2B5EF4-FFF2-40B4-BE49-F238E27FC236}">
-                <a16:creationId xmlns:a16="http://schemas.microsoft.com/office/drawing/2014/main" id="{3846D2CD-E38B-43F7-9628-C7B8464F069E}"/>
+                <a16:creationId xmlns:a16="http://schemas.microsoft.com/office/drawing/2014/main" id="{3EC457E1-6BE4-4B09-830D-6B497A1CD4FF}"/>
               </a:ext>
             </a:extLst>
           </p:cNvPr>
@@ -13759,7 +13614,7 @@
           <p:cNvPr id="19" name="">
             <a:extLst xmlns:a="http://schemas.openxmlformats.org/drawingml/2006/main">
               <a:ext uri="{FF2B5EF4-FFF2-40B4-BE49-F238E27FC236}">
-                <a16:creationId xmlns:a16="http://schemas.microsoft.com/office/drawing/2014/main" id="{BD4FF7B4-82FF-453F-A6FC-FC7D21A03057}"/>
+                <a16:creationId xmlns:a16="http://schemas.microsoft.com/office/drawing/2014/main" id="{3476E4E9-BC94-4DC8-86BD-6614C9977482}"/>
               </a:ext>
             </a:extLst>
           </p:cNvPr>
@@ -13794,7 +13649,7 @@
           <p:cNvPr id="20" name="">
             <a:extLst xmlns:a="http://schemas.openxmlformats.org/drawingml/2006/main">
               <a:ext uri="{FF2B5EF4-FFF2-40B4-BE49-F238E27FC236}">
-                <a16:creationId xmlns:a16="http://schemas.microsoft.com/office/drawing/2014/main" id="{32326FD7-2791-49AC-B512-52414BAD86FB}"/>
+                <a16:creationId xmlns:a16="http://schemas.microsoft.com/office/drawing/2014/main" id="{85B0D3E0-19DD-4A05-81C9-81AD84DA81E4}"/>
               </a:ext>
             </a:extLst>
           </p:cNvPr>
@@ -13858,7 +13713,7 @@
           <p:cNvPr id="21" name="">
             <a:extLst xmlns:a="http://schemas.openxmlformats.org/drawingml/2006/main">
               <a:ext uri="{FF2B5EF4-FFF2-40B4-BE49-F238E27FC236}">
-                <a16:creationId xmlns:a16="http://schemas.microsoft.com/office/drawing/2014/main" id="{F33A1152-7EC9-46F1-B60A-F5A02A46992F}"/>
+                <a16:creationId xmlns:a16="http://schemas.microsoft.com/office/drawing/2014/main" id="{E9AE0F4B-9ED7-430B-A7B4-88618E70FB4F}"/>
               </a:ext>
             </a:extLst>
           </p:cNvPr>
@@ -13922,7 +13777,7 @@
           <p:cNvPr id="22" name="">
             <a:extLst xmlns:a="http://schemas.openxmlformats.org/drawingml/2006/main">
               <a:ext uri="{FF2B5EF4-FFF2-40B4-BE49-F238E27FC236}">
-                <a16:creationId xmlns:a16="http://schemas.microsoft.com/office/drawing/2014/main" id="{CDBA3DFE-3A20-40B2-A000-86BC72105D33}"/>
+                <a16:creationId xmlns:a16="http://schemas.microsoft.com/office/drawing/2014/main" id="{24562066-1150-4EFE-959D-CCBBA81C09E3}"/>
               </a:ext>
             </a:extLst>
           </p:cNvPr>
@@ -13955,7 +13810,7 @@
           <p:cNvPr id="23" name="">
             <a:extLst xmlns:a="http://schemas.openxmlformats.org/drawingml/2006/main">
               <a:ext uri="{FF2B5EF4-FFF2-40B4-BE49-F238E27FC236}">
-                <a16:creationId xmlns:a16="http://schemas.microsoft.com/office/drawing/2014/main" id="{FD76A91E-C362-44C8-A0F9-329DEEFCED0E}"/>
+                <a16:creationId xmlns:a16="http://schemas.microsoft.com/office/drawing/2014/main" id="{B253A4C0-4E15-4EB4-8B9A-741725DF42C4}"/>
               </a:ext>
             </a:extLst>
           </p:cNvPr>
@@ -13990,7 +13845,7 @@
           <p:cNvPr id="24" name="">
             <a:extLst xmlns:a="http://schemas.openxmlformats.org/drawingml/2006/main">
               <a:ext uri="{FF2B5EF4-FFF2-40B4-BE49-F238E27FC236}">
-                <a16:creationId xmlns:a16="http://schemas.microsoft.com/office/drawing/2014/main" id="{CF980CEF-24F6-46D1-8472-AE229AB14E6E}"/>
+                <a16:creationId xmlns:a16="http://schemas.microsoft.com/office/drawing/2014/main" id="{57B07BCE-284C-4549-AB8F-40AD1742CD56}"/>
               </a:ext>
             </a:extLst>
           </p:cNvPr>
@@ -14054,7 +13909,7 @@
           <p:cNvPr id="25" name="">
             <a:extLst xmlns:a="http://schemas.openxmlformats.org/drawingml/2006/main">
               <a:ext uri="{FF2B5EF4-FFF2-40B4-BE49-F238E27FC236}">
-                <a16:creationId xmlns:a16="http://schemas.microsoft.com/office/drawing/2014/main" id="{52D22097-7BF9-4392-BD32-37648EE7AC28}"/>
+                <a16:creationId xmlns:a16="http://schemas.microsoft.com/office/drawing/2014/main" id="{A66B1B2B-ECA7-47F2-9F04-A41B5F10FEA8}"/>
               </a:ext>
             </a:extLst>
           </p:cNvPr>
@@ -14118,7 +13973,7 @@
           <p:cNvPr id="26" name="">
             <a:extLst xmlns:a="http://schemas.openxmlformats.org/drawingml/2006/main">
               <a:ext uri="{FF2B5EF4-FFF2-40B4-BE49-F238E27FC236}">
-                <a16:creationId xmlns:a16="http://schemas.microsoft.com/office/drawing/2014/main" id="{743B1F23-3886-43D5-9AF9-A37EAB31D7C8}"/>
+                <a16:creationId xmlns:a16="http://schemas.microsoft.com/office/drawing/2014/main" id="{3D83C728-6E42-454F-843C-8E6793A646E6}"/>
               </a:ext>
             </a:extLst>
           </p:cNvPr>
@@ -14151,7 +14006,7 @@
           <p:cNvPr id="27" name="">
             <a:extLst xmlns:a="http://schemas.openxmlformats.org/drawingml/2006/main">
               <a:ext uri="{FF2B5EF4-FFF2-40B4-BE49-F238E27FC236}">
-                <a16:creationId xmlns:a16="http://schemas.microsoft.com/office/drawing/2014/main" id="{D86669C6-DA7C-4E31-BF82-0A2BEA139170}"/>
+                <a16:creationId xmlns:a16="http://schemas.microsoft.com/office/drawing/2014/main" id="{FADCAD03-3F13-4BB5-B628-1BB58E89705A}"/>
               </a:ext>
             </a:extLst>
           </p:cNvPr>
@@ -14186,7 +14041,7 @@
           <p:cNvPr id="28" name="">
             <a:extLst xmlns:a="http://schemas.openxmlformats.org/drawingml/2006/main">
               <a:ext uri="{FF2B5EF4-FFF2-40B4-BE49-F238E27FC236}">
-                <a16:creationId xmlns:a16="http://schemas.microsoft.com/office/drawing/2014/main" id="{BCB051DC-E99C-456C-AA00-D715185BE5B3}"/>
+                <a16:creationId xmlns:a16="http://schemas.microsoft.com/office/drawing/2014/main" id="{BA50EFDD-256D-4472-B5C7-C079DE435B63}"/>
               </a:ext>
             </a:extLst>
           </p:cNvPr>
@@ -14250,7 +14105,7 @@
           <p:cNvPr id="29" name="">
             <a:extLst xmlns:a="http://schemas.openxmlformats.org/drawingml/2006/main">
               <a:ext uri="{FF2B5EF4-FFF2-40B4-BE49-F238E27FC236}">
-                <a16:creationId xmlns:a16="http://schemas.microsoft.com/office/drawing/2014/main" id="{4584904D-3675-47BF-8263-CA9FC10AF4BB}"/>
+                <a16:creationId xmlns:a16="http://schemas.microsoft.com/office/drawing/2014/main" id="{7A974B87-2DBF-447D-85F9-1EEB8D7FEA6B}"/>
               </a:ext>
             </a:extLst>
           </p:cNvPr>
@@ -14314,7 +14169,7 @@
           <p:cNvPr id="30" name="">
             <a:extLst xmlns:a="http://schemas.openxmlformats.org/drawingml/2006/main">
               <a:ext uri="{FF2B5EF4-FFF2-40B4-BE49-F238E27FC236}">
-                <a16:creationId xmlns:a16="http://schemas.microsoft.com/office/drawing/2014/main" id="{2383E103-4B72-48B1-9E8C-BC93C8436F26}"/>
+                <a16:creationId xmlns:a16="http://schemas.microsoft.com/office/drawing/2014/main" id="{ACC67822-59F9-49A7-80B4-5C7095CFB055}"/>
               </a:ext>
             </a:extLst>
           </p:cNvPr>
@@ -14374,7 +14229,7 @@
     </p:spTree>
     <p:extLst>
       <p:ext uri="{BB962C8B-B14F-4D97-AF65-F5344CB8AC3E}">
-        <p14:creationId xmlns:p14="http://schemas.microsoft.com/office/powerpoint/2010/main" val="1416074213"/>
+        <p14:creationId xmlns:p14="http://schemas.microsoft.com/office/powerpoint/2010/main" val="431239981"/>
       </p:ext>
     </p:extLst>
   </p:cSld>
@@ -14405,7 +14260,7 @@
           <p:cNvPr id="1" name="">
             <a:extLst xmlns:a="http://schemas.openxmlformats.org/drawingml/2006/main">
               <a:ext uri="{FF2B5EF4-FFF2-40B4-BE49-F238E27FC236}">
-                <a16:creationId xmlns:a16="http://schemas.microsoft.com/office/drawing/2014/main" id="{6D5EB4CD-E79F-434D-A6F0-D82C094E6FEF}"/>
+                <a16:creationId xmlns:a16="http://schemas.microsoft.com/office/drawing/2014/main" id="{BEE2FA24-CDFB-4CD2-9CAD-DFD72E45F278}"/>
               </a:ext>
             </a:extLst>
           </p:cNvPr>
@@ -14440,7 +14295,7 @@
           <p:cNvPr id="2" name="">
             <a:extLst xmlns:a="http://schemas.openxmlformats.org/drawingml/2006/main">
               <a:ext uri="{FF2B5EF4-FFF2-40B4-BE49-F238E27FC236}">
-                <a16:creationId xmlns:a16="http://schemas.microsoft.com/office/drawing/2014/main" id="{0F83BDC5-C535-46A7-B840-1CA189EEEFA6}"/>
+                <a16:creationId xmlns:a16="http://schemas.microsoft.com/office/drawing/2014/main" id="{B5BFB8C0-7F9B-4678-9734-5ACE37E06F62}"/>
               </a:ext>
             </a:extLst>
           </p:cNvPr>
@@ -14504,7 +14359,7 @@
           <p:cNvPr id="3" name="">
             <a:extLst xmlns:a="http://schemas.openxmlformats.org/drawingml/2006/main">
               <a:ext uri="{FF2B5EF4-FFF2-40B4-BE49-F238E27FC236}">
-                <a16:creationId xmlns:a16="http://schemas.microsoft.com/office/drawing/2014/main" id="{0E7BEAF9-8789-400C-9D90-259D85CA6FD9}"/>
+                <a16:creationId xmlns:a16="http://schemas.microsoft.com/office/drawing/2014/main" id="{C923CC40-17BF-4DE9-B7BB-BF89D535AF24}"/>
               </a:ext>
             </a:extLst>
           </p:cNvPr>
@@ -14568,7 +14423,7 @@
           <p:cNvPr id="4" name="">
             <a:extLst xmlns:a="http://schemas.openxmlformats.org/drawingml/2006/main">
               <a:ext uri="{FF2B5EF4-FFF2-40B4-BE49-F238E27FC236}">
-                <a16:creationId xmlns:a16="http://schemas.microsoft.com/office/drawing/2014/main" id="{22B17F67-3983-4E61-A0EF-666FE6635564}"/>
+                <a16:creationId xmlns:a16="http://schemas.microsoft.com/office/drawing/2014/main" id="{78CB44AB-979F-401A-8557-180EE63BB3D0}"/>
               </a:ext>
             </a:extLst>
           </p:cNvPr>
@@ -14632,7 +14487,7 @@
           <p:cNvPr id="5" name="">
             <a:extLst xmlns:a="http://schemas.openxmlformats.org/drawingml/2006/main">
               <a:ext uri="{FF2B5EF4-FFF2-40B4-BE49-F238E27FC236}">
-                <a16:creationId xmlns:a16="http://schemas.microsoft.com/office/drawing/2014/main" id="{B4CC4A85-ECE9-4AB3-8C88-C1DE6A792562}"/>
+                <a16:creationId xmlns:a16="http://schemas.microsoft.com/office/drawing/2014/main" id="{38A352E6-01AD-496F-9E2C-A1E2EBB20080}"/>
               </a:ext>
             </a:extLst>
           </p:cNvPr>
@@ -14696,7 +14551,7 @@
           <p:cNvPr id="6" name="">
             <a:extLst xmlns:a="http://schemas.openxmlformats.org/drawingml/2006/main">
               <a:ext uri="{FF2B5EF4-FFF2-40B4-BE49-F238E27FC236}">
-                <a16:creationId xmlns:a16="http://schemas.microsoft.com/office/drawing/2014/main" id="{1B405876-8E11-41DF-845B-C4668B7895EF}"/>
+                <a16:creationId xmlns:a16="http://schemas.microsoft.com/office/drawing/2014/main" id="{48251330-B802-4F33-B091-10BEFA323C50}"/>
               </a:ext>
             </a:extLst>
           </p:cNvPr>
@@ -14760,7 +14615,7 @@
           <p:cNvPr id="7" name="">
             <a:extLst xmlns:a="http://schemas.openxmlformats.org/drawingml/2006/main">
               <a:ext uri="{FF2B5EF4-FFF2-40B4-BE49-F238E27FC236}">
-                <a16:creationId xmlns:a16="http://schemas.microsoft.com/office/drawing/2014/main" id="{1EFD9C8F-86DA-462F-89BF-7D0F3B16BCD8}"/>
+                <a16:creationId xmlns:a16="http://schemas.microsoft.com/office/drawing/2014/main" id="{AC2BFA79-5ABD-4585-A5C5-DA7EBE65D88D}"/>
               </a:ext>
             </a:extLst>
           </p:cNvPr>
@@ -14824,7 +14679,7 @@
           <p:cNvPr id="8" name="">
             <a:extLst xmlns:a="http://schemas.openxmlformats.org/drawingml/2006/main">
               <a:ext uri="{FF2B5EF4-FFF2-40B4-BE49-F238E27FC236}">
-                <a16:creationId xmlns:a16="http://schemas.microsoft.com/office/drawing/2014/main" id="{6D919CDC-6203-4038-8BA1-FCFBD0DC2367}"/>
+                <a16:creationId xmlns:a16="http://schemas.microsoft.com/office/drawing/2014/main" id="{43358E4C-FAA0-4B10-82F7-643C0978BA63}"/>
               </a:ext>
             </a:extLst>
           </p:cNvPr>
@@ -14888,7 +14743,7 @@
           <p:cNvPr id="9" name="">
             <a:extLst xmlns:a="http://schemas.openxmlformats.org/drawingml/2006/main">
               <a:ext uri="{FF2B5EF4-FFF2-40B4-BE49-F238E27FC236}">
-                <a16:creationId xmlns:a16="http://schemas.microsoft.com/office/drawing/2014/main" id="{4DCE4CD1-8CFA-4368-9CB6-A8E46C0DA438}"/>
+                <a16:creationId xmlns:a16="http://schemas.microsoft.com/office/drawing/2014/main" id="{AEA11218-99E7-43BA-BC37-4BE890D04104}"/>
               </a:ext>
             </a:extLst>
           </p:cNvPr>
@@ -14921,7 +14776,7 @@
           <p:cNvPr id="10" name="">
             <a:extLst xmlns:a="http://schemas.openxmlformats.org/drawingml/2006/main">
               <a:ext uri="{FF2B5EF4-FFF2-40B4-BE49-F238E27FC236}">
-                <a16:creationId xmlns:a16="http://schemas.microsoft.com/office/drawing/2014/main" id="{8CED78B2-A4A9-4DB0-BF82-9FE5CF02880A}"/>
+                <a16:creationId xmlns:a16="http://schemas.microsoft.com/office/drawing/2014/main" id="{B08C7B5C-5F85-4374-9AA9-B4AD17388C76}"/>
               </a:ext>
             </a:extLst>
           </p:cNvPr>
@@ -14956,7 +14811,7 @@
           <p:cNvPr id="11" name="">
             <a:extLst xmlns:a="http://schemas.openxmlformats.org/drawingml/2006/main">
               <a:ext uri="{FF2B5EF4-FFF2-40B4-BE49-F238E27FC236}">
-                <a16:creationId xmlns:a16="http://schemas.microsoft.com/office/drawing/2014/main" id="{3DBE498E-442E-43BF-AA87-380085A08F92}"/>
+                <a16:creationId xmlns:a16="http://schemas.microsoft.com/office/drawing/2014/main" id="{93F7A96C-8988-4EF8-962C-0AAE8F3A4861}"/>
               </a:ext>
             </a:extLst>
           </p:cNvPr>
@@ -15043,7 +14898,7 @@
           <p:cNvPr id="12" name="">
             <a:extLst xmlns:a="http://schemas.openxmlformats.org/drawingml/2006/main">
               <a:ext uri="{FF2B5EF4-FFF2-40B4-BE49-F238E27FC236}">
-                <a16:creationId xmlns:a16="http://schemas.microsoft.com/office/drawing/2014/main" id="{04512CD2-A09F-42B3-872D-6E753309739A}"/>
+                <a16:creationId xmlns:a16="http://schemas.microsoft.com/office/drawing/2014/main" id="{35471B37-4BF4-46F4-B23D-74940FEA564D}"/>
               </a:ext>
             </a:extLst>
           </p:cNvPr>
@@ -15078,7 +14933,7 @@
           <p:cNvPr id="13" name="">
             <a:extLst xmlns:a="http://schemas.openxmlformats.org/drawingml/2006/main">
               <a:ext uri="{FF2B5EF4-FFF2-40B4-BE49-F238E27FC236}">
-                <a16:creationId xmlns:a16="http://schemas.microsoft.com/office/drawing/2014/main" id="{28A6A658-0A35-4CDC-B0D5-C7102B3C4925}"/>
+                <a16:creationId xmlns:a16="http://schemas.microsoft.com/office/drawing/2014/main" id="{955564CB-41C0-4D6C-B94C-CA6537A5A1E8}"/>
               </a:ext>
             </a:extLst>
           </p:cNvPr>
@@ -15142,7 +14997,7 @@
           <p:cNvPr id="14" name="">
             <a:extLst xmlns:a="http://schemas.openxmlformats.org/drawingml/2006/main">
               <a:ext uri="{FF2B5EF4-FFF2-40B4-BE49-F238E27FC236}">
-                <a16:creationId xmlns:a16="http://schemas.microsoft.com/office/drawing/2014/main" id="{E654EC61-AA67-474E-8C04-5745B9DA24D2}"/>
+                <a16:creationId xmlns:a16="http://schemas.microsoft.com/office/drawing/2014/main" id="{9B24E5B7-FE45-4813-B752-9739BFC73BE8}"/>
               </a:ext>
             </a:extLst>
           </p:cNvPr>
@@ -15177,7 +15032,7 @@
           <p:cNvPr id="15" name="">
             <a:extLst xmlns:a="http://schemas.openxmlformats.org/drawingml/2006/main">
               <a:ext uri="{FF2B5EF4-FFF2-40B4-BE49-F238E27FC236}">
-                <a16:creationId xmlns:a16="http://schemas.microsoft.com/office/drawing/2014/main" id="{E00540DF-77BA-41F8-B82E-D87C1D637B25}"/>
+                <a16:creationId xmlns:a16="http://schemas.microsoft.com/office/drawing/2014/main" id="{E7E81C11-192A-4D81-8F4A-ACCEE47BA89C}"/>
               </a:ext>
             </a:extLst>
           </p:cNvPr>
@@ -15241,7 +15096,7 @@
           <p:cNvPr id="16" name="">
             <a:extLst xmlns:a="http://schemas.openxmlformats.org/drawingml/2006/main">
               <a:ext uri="{FF2B5EF4-FFF2-40B4-BE49-F238E27FC236}">
-                <a16:creationId xmlns:a16="http://schemas.microsoft.com/office/drawing/2014/main" id="{7B18BA6D-9BD5-420F-B6C6-29177592E738}"/>
+                <a16:creationId xmlns:a16="http://schemas.microsoft.com/office/drawing/2014/main" id="{6E4B141D-C403-469E-B2CB-149895E30795}"/>
               </a:ext>
             </a:extLst>
           </p:cNvPr>
@@ -15274,7 +15129,7 @@
           <p:cNvPr id="17" name="">
             <a:extLst xmlns:a="http://schemas.openxmlformats.org/drawingml/2006/main">
               <a:ext uri="{FF2B5EF4-FFF2-40B4-BE49-F238E27FC236}">
-                <a16:creationId xmlns:a16="http://schemas.microsoft.com/office/drawing/2014/main" id="{98E474F2-B8E5-4642-BB7D-ECAEB555BE57}"/>
+                <a16:creationId xmlns:a16="http://schemas.microsoft.com/office/drawing/2014/main" id="{19D36288-AA3F-4220-9146-3269B5286291}"/>
               </a:ext>
             </a:extLst>
           </p:cNvPr>
@@ -15309,7 +15164,7 @@
           <p:cNvPr id="18" name="">
             <a:extLst xmlns:a="http://schemas.openxmlformats.org/drawingml/2006/main">
               <a:ext uri="{FF2B5EF4-FFF2-40B4-BE49-F238E27FC236}">
-                <a16:creationId xmlns:a16="http://schemas.microsoft.com/office/drawing/2014/main" id="{A0582A03-2A9C-4811-BCCE-6151C2C2C6A9}"/>
+                <a16:creationId xmlns:a16="http://schemas.microsoft.com/office/drawing/2014/main" id="{AB0745DB-F3E0-47B8-8D41-1F3A4D22FE0F}"/>
               </a:ext>
             </a:extLst>
           </p:cNvPr>
@@ -15396,7 +15251,7 @@
           <p:cNvPr id="19" name="">
             <a:extLst xmlns:a="http://schemas.openxmlformats.org/drawingml/2006/main">
               <a:ext uri="{FF2B5EF4-FFF2-40B4-BE49-F238E27FC236}">
-                <a16:creationId xmlns:a16="http://schemas.microsoft.com/office/drawing/2014/main" id="{743B0805-E065-4A5C-9A7F-01BDB7E0E944}"/>
+                <a16:creationId xmlns:a16="http://schemas.microsoft.com/office/drawing/2014/main" id="{0DC71D3F-77B2-424C-A285-789BE6397C51}"/>
               </a:ext>
             </a:extLst>
           </p:cNvPr>
@@ -15431,7 +15286,7 @@
           <p:cNvPr id="20" name="">
             <a:extLst xmlns:a="http://schemas.openxmlformats.org/drawingml/2006/main">
               <a:ext uri="{FF2B5EF4-FFF2-40B4-BE49-F238E27FC236}">
-                <a16:creationId xmlns:a16="http://schemas.microsoft.com/office/drawing/2014/main" id="{6EEBE15C-3CDF-4C18-A185-B04DC1435880}"/>
+                <a16:creationId xmlns:a16="http://schemas.microsoft.com/office/drawing/2014/main" id="{92CA4E20-65EF-4B59-B678-FF19ABEE2C8D}"/>
               </a:ext>
             </a:extLst>
           </p:cNvPr>
@@ -15495,7 +15350,7 @@
           <p:cNvPr id="21" name="">
             <a:extLst xmlns:a="http://schemas.openxmlformats.org/drawingml/2006/main">
               <a:ext uri="{FF2B5EF4-FFF2-40B4-BE49-F238E27FC236}">
-                <a16:creationId xmlns:a16="http://schemas.microsoft.com/office/drawing/2014/main" id="{4F6D1C75-1D77-4125-9F38-A518702D77FA}"/>
+                <a16:creationId xmlns:a16="http://schemas.microsoft.com/office/drawing/2014/main" id="{4165E1BC-2EFB-4852-9F8F-3015F224EAEB}"/>
               </a:ext>
             </a:extLst>
           </p:cNvPr>
@@ -15530,7 +15385,7 @@
           <p:cNvPr id="22" name="">
             <a:extLst xmlns:a="http://schemas.openxmlformats.org/drawingml/2006/main">
               <a:ext uri="{FF2B5EF4-FFF2-40B4-BE49-F238E27FC236}">
-                <a16:creationId xmlns:a16="http://schemas.microsoft.com/office/drawing/2014/main" id="{6FCF14D0-2403-4C50-9CEC-98907C15C772}"/>
+                <a16:creationId xmlns:a16="http://schemas.microsoft.com/office/drawing/2014/main" id="{BC8B0361-233E-4C53-9238-7049A9B03810}"/>
               </a:ext>
             </a:extLst>
           </p:cNvPr>
@@ -15594,7 +15449,7 @@
           <p:cNvPr id="23" name="">
             <a:extLst xmlns:a="http://schemas.openxmlformats.org/drawingml/2006/main">
               <a:ext uri="{FF2B5EF4-FFF2-40B4-BE49-F238E27FC236}">
-                <a16:creationId xmlns:a16="http://schemas.microsoft.com/office/drawing/2014/main" id="{E557AD53-0C55-4D20-95CC-FDE6C1303A3B}"/>
+                <a16:creationId xmlns:a16="http://schemas.microsoft.com/office/drawing/2014/main" id="{0CF1AB3E-D53D-4A65-BD96-E6A4512B65D4}"/>
               </a:ext>
             </a:extLst>
           </p:cNvPr>
@@ -15627,7 +15482,7 @@
           <p:cNvPr id="24" name="">
             <a:extLst xmlns:a="http://schemas.openxmlformats.org/drawingml/2006/main">
               <a:ext uri="{FF2B5EF4-FFF2-40B4-BE49-F238E27FC236}">
-                <a16:creationId xmlns:a16="http://schemas.microsoft.com/office/drawing/2014/main" id="{B04DCC4F-B1E1-4E91-B86D-3895237F3215}"/>
+                <a16:creationId xmlns:a16="http://schemas.microsoft.com/office/drawing/2014/main" id="{27D22D49-293C-4CD1-8481-333D4F39ACA8}"/>
               </a:ext>
             </a:extLst>
           </p:cNvPr>
@@ -15662,7 +15517,7 @@
           <p:cNvPr id="25" name="">
             <a:extLst xmlns:a="http://schemas.openxmlformats.org/drawingml/2006/main">
               <a:ext uri="{FF2B5EF4-FFF2-40B4-BE49-F238E27FC236}">
-                <a16:creationId xmlns:a16="http://schemas.microsoft.com/office/drawing/2014/main" id="{FD79E67B-9103-4D15-9D67-BC2012B4B377}"/>
+                <a16:creationId xmlns:a16="http://schemas.microsoft.com/office/drawing/2014/main" id="{543C4B8C-FB3C-4FF0-806D-C3A8177A0909}"/>
               </a:ext>
             </a:extLst>
           </p:cNvPr>
@@ -15749,7 +15604,7 @@
           <p:cNvPr id="26" name="">
             <a:extLst xmlns:a="http://schemas.openxmlformats.org/drawingml/2006/main">
               <a:ext uri="{FF2B5EF4-FFF2-40B4-BE49-F238E27FC236}">
-                <a16:creationId xmlns:a16="http://schemas.microsoft.com/office/drawing/2014/main" id="{21F2D8D2-2376-4FB1-A62A-BB5D6145A67F}"/>
+                <a16:creationId xmlns:a16="http://schemas.microsoft.com/office/drawing/2014/main" id="{09E0E7CD-07FB-4FD6-8720-1BC239D4CC98}"/>
               </a:ext>
             </a:extLst>
           </p:cNvPr>
@@ -15784,7 +15639,7 @@
           <p:cNvPr id="27" name="">
             <a:extLst xmlns:a="http://schemas.openxmlformats.org/drawingml/2006/main">
               <a:ext uri="{FF2B5EF4-FFF2-40B4-BE49-F238E27FC236}">
-                <a16:creationId xmlns:a16="http://schemas.microsoft.com/office/drawing/2014/main" id="{3CD0BC00-596A-4B1B-BF98-09BF59D58632}"/>
+                <a16:creationId xmlns:a16="http://schemas.microsoft.com/office/drawing/2014/main" id="{455C25E8-6EE6-4C58-80A9-A188E422AC7D}"/>
               </a:ext>
             </a:extLst>
           </p:cNvPr>
@@ -15848,7 +15703,7 @@
           <p:cNvPr id="28" name="">
             <a:extLst xmlns:a="http://schemas.openxmlformats.org/drawingml/2006/main">
               <a:ext uri="{FF2B5EF4-FFF2-40B4-BE49-F238E27FC236}">
-                <a16:creationId xmlns:a16="http://schemas.microsoft.com/office/drawing/2014/main" id="{2BA76176-87E6-4FE6-8387-53F9FCFF9308}"/>
+                <a16:creationId xmlns:a16="http://schemas.microsoft.com/office/drawing/2014/main" id="{361884EC-121A-4E8F-9696-608B99BE2E3C}"/>
               </a:ext>
             </a:extLst>
           </p:cNvPr>
@@ -15883,7 +15738,7 @@
           <p:cNvPr id="29" name="">
             <a:extLst xmlns:a="http://schemas.openxmlformats.org/drawingml/2006/main">
               <a:ext uri="{FF2B5EF4-FFF2-40B4-BE49-F238E27FC236}">
-                <a16:creationId xmlns:a16="http://schemas.microsoft.com/office/drawing/2014/main" id="{EEE95F67-4F07-4376-A375-7B6264B8DAFD}"/>
+                <a16:creationId xmlns:a16="http://schemas.microsoft.com/office/drawing/2014/main" id="{977CA0AA-8DEE-4E5C-A596-9CAC1B1DEC4D}"/>
               </a:ext>
             </a:extLst>
           </p:cNvPr>
@@ -15947,7 +15802,7 @@
           <p:cNvPr id="30" name="">
             <a:extLst xmlns:a="http://schemas.openxmlformats.org/drawingml/2006/main">
               <a:ext uri="{FF2B5EF4-FFF2-40B4-BE49-F238E27FC236}">
-                <a16:creationId xmlns:a16="http://schemas.microsoft.com/office/drawing/2014/main" id="{72B1DF13-6DBF-4AEB-ACA9-13B3F025C9FB}"/>
+                <a16:creationId xmlns:a16="http://schemas.microsoft.com/office/drawing/2014/main" id="{ADA40B97-EC50-4294-BD32-9838AA988183}"/>
               </a:ext>
             </a:extLst>
           </p:cNvPr>
@@ -15980,7 +15835,7 @@
           <p:cNvPr id="31" name="">
             <a:extLst xmlns:a="http://schemas.openxmlformats.org/drawingml/2006/main">
               <a:ext uri="{FF2B5EF4-FFF2-40B4-BE49-F238E27FC236}">
-                <a16:creationId xmlns:a16="http://schemas.microsoft.com/office/drawing/2014/main" id="{8DDB7B72-B903-4BDF-954B-646E11FD1865}"/>
+                <a16:creationId xmlns:a16="http://schemas.microsoft.com/office/drawing/2014/main" id="{DDEEC43E-2BBE-4EFF-A2BB-E1276B4E84E3}"/>
               </a:ext>
             </a:extLst>
           </p:cNvPr>
@@ -16015,7 +15870,7 @@
           <p:cNvPr id="32" name="">
             <a:extLst xmlns:a="http://schemas.openxmlformats.org/drawingml/2006/main">
               <a:ext uri="{FF2B5EF4-FFF2-40B4-BE49-F238E27FC236}">
-                <a16:creationId xmlns:a16="http://schemas.microsoft.com/office/drawing/2014/main" id="{6F88FCDB-E0CD-4932-8509-E6E933334FEE}"/>
+                <a16:creationId xmlns:a16="http://schemas.microsoft.com/office/drawing/2014/main" id="{D01910FA-7EDD-49D1-A22F-7826CEF2C252}"/>
               </a:ext>
             </a:extLst>
           </p:cNvPr>
@@ -16102,7 +15957,7 @@
           <p:cNvPr id="33" name="">
             <a:extLst xmlns:a="http://schemas.openxmlformats.org/drawingml/2006/main">
               <a:ext uri="{FF2B5EF4-FFF2-40B4-BE49-F238E27FC236}">
-                <a16:creationId xmlns:a16="http://schemas.microsoft.com/office/drawing/2014/main" id="{CB4E9C9E-7D64-4BDF-9558-F050B88D08FB}"/>
+                <a16:creationId xmlns:a16="http://schemas.microsoft.com/office/drawing/2014/main" id="{52339EBF-F03E-4E5A-BF62-1E31AC4BD4A6}"/>
               </a:ext>
             </a:extLst>
           </p:cNvPr>
@@ -16137,7 +15992,7 @@
           <p:cNvPr id="34" name="">
             <a:extLst xmlns:a="http://schemas.openxmlformats.org/drawingml/2006/main">
               <a:ext uri="{FF2B5EF4-FFF2-40B4-BE49-F238E27FC236}">
-                <a16:creationId xmlns:a16="http://schemas.microsoft.com/office/drawing/2014/main" id="{4D256551-DA6F-4F51-85DD-FAE3F8E875CF}"/>
+                <a16:creationId xmlns:a16="http://schemas.microsoft.com/office/drawing/2014/main" id="{86A1C2EE-3C4B-4E78-ABA1-FCC957DD6611}"/>
               </a:ext>
             </a:extLst>
           </p:cNvPr>
@@ -16201,7 +16056,7 @@
           <p:cNvPr id="35" name="">
             <a:extLst xmlns:a="http://schemas.openxmlformats.org/drawingml/2006/main">
               <a:ext uri="{FF2B5EF4-FFF2-40B4-BE49-F238E27FC236}">
-                <a16:creationId xmlns:a16="http://schemas.microsoft.com/office/drawing/2014/main" id="{65010CB5-5E7F-4790-BBBC-29889A1BA269}"/>
+                <a16:creationId xmlns:a16="http://schemas.microsoft.com/office/drawing/2014/main" id="{14C28329-EFEF-4B0C-99E4-7A9929F1B0C4}"/>
               </a:ext>
             </a:extLst>
           </p:cNvPr>
@@ -16236,7 +16091,7 @@
           <p:cNvPr id="36" name="">
             <a:extLst xmlns:a="http://schemas.openxmlformats.org/drawingml/2006/main">
               <a:ext uri="{FF2B5EF4-FFF2-40B4-BE49-F238E27FC236}">
-                <a16:creationId xmlns:a16="http://schemas.microsoft.com/office/drawing/2014/main" id="{7E7D1D68-CA78-4DEB-A6C6-875AEF1B6CBF}"/>
+                <a16:creationId xmlns:a16="http://schemas.microsoft.com/office/drawing/2014/main" id="{51CA3B70-A5E5-4778-BB00-B72BF2FE6CA1}"/>
               </a:ext>
             </a:extLst>
           </p:cNvPr>
@@ -16300,7 +16155,7 @@
           <p:cNvPr id="37" name="">
             <a:extLst xmlns:a="http://schemas.openxmlformats.org/drawingml/2006/main">
               <a:ext uri="{FF2B5EF4-FFF2-40B4-BE49-F238E27FC236}">
-                <a16:creationId xmlns:a16="http://schemas.microsoft.com/office/drawing/2014/main" id="{5B5ECAD6-5AA8-4E85-8F45-C3C82EC7F3EB}"/>
+                <a16:creationId xmlns:a16="http://schemas.microsoft.com/office/drawing/2014/main" id="{A01430F0-D288-4A7C-9561-AE7688F370A3}"/>
               </a:ext>
             </a:extLst>
           </p:cNvPr>
@@ -16335,7 +16190,7 @@
           <p:cNvPr id="38" name="">
             <a:extLst xmlns:a="http://schemas.openxmlformats.org/drawingml/2006/main">
               <a:ext uri="{FF2B5EF4-FFF2-40B4-BE49-F238E27FC236}">
-                <a16:creationId xmlns:a16="http://schemas.microsoft.com/office/drawing/2014/main" id="{43ADCFDF-E3B9-4FED-A8F8-075C54CF111E}"/>
+                <a16:creationId xmlns:a16="http://schemas.microsoft.com/office/drawing/2014/main" id="{CBE574C7-EA2B-44B5-B2A8-64A50384F336}"/>
               </a:ext>
             </a:extLst>
           </p:cNvPr>
@@ -16397,7 +16252,7 @@
     </p:spTree>
     <p:extLst>
       <p:ext uri="{BB962C8B-B14F-4D97-AF65-F5344CB8AC3E}">
-        <p14:creationId xmlns:p14="http://schemas.microsoft.com/office/powerpoint/2010/main" val="391703994"/>
+        <p14:creationId xmlns:p14="http://schemas.microsoft.com/office/powerpoint/2010/main" val="1860568937"/>
       </p:ext>
     </p:extLst>
   </p:cSld>
@@ -16428,7 +16283,7 @@
           <p:cNvPr id="1" name="">
             <a:extLst xmlns:a="http://schemas.openxmlformats.org/drawingml/2006/main">
               <a:ext uri="{FF2B5EF4-FFF2-40B4-BE49-F238E27FC236}">
-                <a16:creationId xmlns:a16="http://schemas.microsoft.com/office/drawing/2014/main" id="{32197AEA-D0DF-42E7-B2ED-8B8FA42906C2}"/>
+                <a16:creationId xmlns:a16="http://schemas.microsoft.com/office/drawing/2014/main" id="{0A6E0DAE-2573-4C2D-8A26-265F30EAC1CF}"/>
               </a:ext>
             </a:extLst>
           </p:cNvPr>
@@ -16463,7 +16318,7 @@
           <p:cNvPr id="2" name="">
             <a:extLst xmlns:a="http://schemas.openxmlformats.org/drawingml/2006/main">
               <a:ext uri="{FF2B5EF4-FFF2-40B4-BE49-F238E27FC236}">
-                <a16:creationId xmlns:a16="http://schemas.microsoft.com/office/drawing/2014/main" id="{3B7D9356-935E-434B-B8C3-010CB3B98501}"/>
+                <a16:creationId xmlns:a16="http://schemas.microsoft.com/office/drawing/2014/main" id="{6F7ACEA9-AB09-481A-8ADE-A22C5D742992}"/>
               </a:ext>
             </a:extLst>
           </p:cNvPr>
@@ -16527,7 +16382,7 @@
           <p:cNvPr id="3" name="">
             <a:extLst xmlns:a="http://schemas.openxmlformats.org/drawingml/2006/main">
               <a:ext uri="{FF2B5EF4-FFF2-40B4-BE49-F238E27FC236}">
-                <a16:creationId xmlns:a16="http://schemas.microsoft.com/office/drawing/2014/main" id="{A59D0733-43E8-4676-9880-5CC26C27A4E9}"/>
+                <a16:creationId xmlns:a16="http://schemas.microsoft.com/office/drawing/2014/main" id="{02700667-9180-4EAE-B865-A8F1DAB983FF}"/>
               </a:ext>
             </a:extLst>
           </p:cNvPr>
@@ -16591,7 +16446,7 @@
           <p:cNvPr id="4" name="">
             <a:extLst xmlns:a="http://schemas.openxmlformats.org/drawingml/2006/main">
               <a:ext uri="{FF2B5EF4-FFF2-40B4-BE49-F238E27FC236}">
-                <a16:creationId xmlns:a16="http://schemas.microsoft.com/office/drawing/2014/main" id="{A5810F3F-B448-4DF8-8486-057F78B58B56}"/>
+                <a16:creationId xmlns:a16="http://schemas.microsoft.com/office/drawing/2014/main" id="{81D46E47-ED9D-49EE-BAF9-E55418568EDB}"/>
               </a:ext>
             </a:extLst>
           </p:cNvPr>
@@ -16655,7 +16510,7 @@
           <p:cNvPr id="5" name="">
             <a:extLst xmlns:a="http://schemas.openxmlformats.org/drawingml/2006/main">
               <a:ext uri="{FF2B5EF4-FFF2-40B4-BE49-F238E27FC236}">
-                <a16:creationId xmlns:a16="http://schemas.microsoft.com/office/drawing/2014/main" id="{B4CBAC55-5151-4527-B71A-5FC980BD3926}"/>
+                <a16:creationId xmlns:a16="http://schemas.microsoft.com/office/drawing/2014/main" id="{8798723C-2B0D-4347-B222-EC5165887CD4}"/>
               </a:ext>
             </a:extLst>
           </p:cNvPr>
@@ -16719,7 +16574,7 @@
           <p:cNvPr id="6" name="">
             <a:extLst xmlns:a="http://schemas.openxmlformats.org/drawingml/2006/main">
               <a:ext uri="{FF2B5EF4-FFF2-40B4-BE49-F238E27FC236}">
-                <a16:creationId xmlns:a16="http://schemas.microsoft.com/office/drawing/2014/main" id="{57CC832E-30EF-421E-93B2-5EE44B14DCB8}"/>
+                <a16:creationId xmlns:a16="http://schemas.microsoft.com/office/drawing/2014/main" id="{16DF8392-078A-400D-A879-1F0A76520F5F}"/>
               </a:ext>
             </a:extLst>
           </p:cNvPr>
@@ -16752,7 +16607,7 @@
           <p:cNvPr id="7" name="">
             <a:extLst xmlns:a="http://schemas.openxmlformats.org/drawingml/2006/main">
               <a:ext uri="{FF2B5EF4-FFF2-40B4-BE49-F238E27FC236}">
-                <a16:creationId xmlns:a16="http://schemas.microsoft.com/office/drawing/2014/main" id="{F28B2391-EED1-49C6-8AED-7E3100CEE8BC}"/>
+                <a16:creationId xmlns:a16="http://schemas.microsoft.com/office/drawing/2014/main" id="{4F372025-1FF6-4A59-B38D-B4F53B00B3AE}"/>
               </a:ext>
             </a:extLst>
           </p:cNvPr>
@@ -16787,7 +16642,7 @@
           <p:cNvPr id="8" name="">
             <a:extLst xmlns:a="http://schemas.openxmlformats.org/drawingml/2006/main">
               <a:ext uri="{FF2B5EF4-FFF2-40B4-BE49-F238E27FC236}">
-                <a16:creationId xmlns:a16="http://schemas.microsoft.com/office/drawing/2014/main" id="{23C5D99C-135F-40FC-A706-DD99DD3AA83E}"/>
+                <a16:creationId xmlns:a16="http://schemas.microsoft.com/office/drawing/2014/main" id="{5945C483-BE70-46DF-9B50-CD08D2675D15}"/>
               </a:ext>
             </a:extLst>
           </p:cNvPr>
@@ -16851,7 +16706,7 @@
           <p:cNvPr id="9" name="">
             <a:extLst xmlns:a="http://schemas.openxmlformats.org/drawingml/2006/main">
               <a:ext uri="{FF2B5EF4-FFF2-40B4-BE49-F238E27FC236}">
-                <a16:creationId xmlns:a16="http://schemas.microsoft.com/office/drawing/2014/main" id="{9A7AA554-79E2-40D7-AC2F-56518784D4C9}"/>
+                <a16:creationId xmlns:a16="http://schemas.microsoft.com/office/drawing/2014/main" id="{551CD72E-FB75-4CAC-A181-B69A84A45005}"/>
               </a:ext>
             </a:extLst>
           </p:cNvPr>
@@ -16943,7 +16798,7 @@
           <p:cNvPr id="10" name="">
             <a:extLst xmlns:a="http://schemas.openxmlformats.org/drawingml/2006/main">
               <a:ext uri="{FF2B5EF4-FFF2-40B4-BE49-F238E27FC236}">
-                <a16:creationId xmlns:a16="http://schemas.microsoft.com/office/drawing/2014/main" id="{D3F02E46-1899-44D6-9B06-53E793669507}"/>
+                <a16:creationId xmlns:a16="http://schemas.microsoft.com/office/drawing/2014/main" id="{54CFA57E-D912-425D-B387-E0D0CF4A618E}"/>
               </a:ext>
             </a:extLst>
           </p:cNvPr>
@@ -16976,7 +16831,7 @@
           <p:cNvPr id="11" name="">
             <a:extLst xmlns:a="http://schemas.openxmlformats.org/drawingml/2006/main">
               <a:ext uri="{FF2B5EF4-FFF2-40B4-BE49-F238E27FC236}">
-                <a16:creationId xmlns:a16="http://schemas.microsoft.com/office/drawing/2014/main" id="{0377D42D-E023-4131-91B0-8BB4795998FE}"/>
+                <a16:creationId xmlns:a16="http://schemas.microsoft.com/office/drawing/2014/main" id="{2D4A838E-8540-4CD2-BA1D-269DA1D56684}"/>
               </a:ext>
             </a:extLst>
           </p:cNvPr>
@@ -17011,7 +16866,7 @@
           <p:cNvPr id="12" name="">
             <a:extLst xmlns:a="http://schemas.openxmlformats.org/drawingml/2006/main">
               <a:ext uri="{FF2B5EF4-FFF2-40B4-BE49-F238E27FC236}">
-                <a16:creationId xmlns:a16="http://schemas.microsoft.com/office/drawing/2014/main" id="{8E808C0C-B617-4F14-828A-9571D7A23006}"/>
+                <a16:creationId xmlns:a16="http://schemas.microsoft.com/office/drawing/2014/main" id="{79581757-BAF6-4BA2-BB3C-8530676D5B4C}"/>
               </a:ext>
             </a:extLst>
           </p:cNvPr>
@@ -17075,7 +16930,7 @@
           <p:cNvPr id="13" name="">
             <a:extLst xmlns:a="http://schemas.openxmlformats.org/drawingml/2006/main">
               <a:ext uri="{FF2B5EF4-FFF2-40B4-BE49-F238E27FC236}">
-                <a16:creationId xmlns:a16="http://schemas.microsoft.com/office/drawing/2014/main" id="{5A591828-5206-47F1-925C-A70533ACD830}"/>
+                <a16:creationId xmlns:a16="http://schemas.microsoft.com/office/drawing/2014/main" id="{627F8B1F-ECE6-4A5B-83B3-ADC57570A872}"/>
               </a:ext>
             </a:extLst>
           </p:cNvPr>
@@ -17167,7 +17022,7 @@
           <p:cNvPr id="14" name="">
             <a:extLst xmlns:a="http://schemas.openxmlformats.org/drawingml/2006/main">
               <a:ext uri="{FF2B5EF4-FFF2-40B4-BE49-F238E27FC236}">
-                <a16:creationId xmlns:a16="http://schemas.microsoft.com/office/drawing/2014/main" id="{AE0011D0-444D-4F0F-8C59-A314E438C981}"/>
+                <a16:creationId xmlns:a16="http://schemas.microsoft.com/office/drawing/2014/main" id="{34384C25-7127-420F-8FBC-C3B4B51D45B7}"/>
               </a:ext>
             </a:extLst>
           </p:cNvPr>
@@ -17200,7 +17055,7 @@
           <p:cNvPr id="15" name="">
             <a:extLst xmlns:a="http://schemas.openxmlformats.org/drawingml/2006/main">
               <a:ext uri="{FF2B5EF4-FFF2-40B4-BE49-F238E27FC236}">
-                <a16:creationId xmlns:a16="http://schemas.microsoft.com/office/drawing/2014/main" id="{C474FF84-54FC-4272-A516-ADC2AF827AF7}"/>
+                <a16:creationId xmlns:a16="http://schemas.microsoft.com/office/drawing/2014/main" id="{F2ED8336-45C6-4FD7-89AC-D6D7A598D33B}"/>
               </a:ext>
             </a:extLst>
           </p:cNvPr>
@@ -17235,7 +17090,7 @@
           <p:cNvPr id="16" name="">
             <a:extLst xmlns:a="http://schemas.openxmlformats.org/drawingml/2006/main">
               <a:ext uri="{FF2B5EF4-FFF2-40B4-BE49-F238E27FC236}">
-                <a16:creationId xmlns:a16="http://schemas.microsoft.com/office/drawing/2014/main" id="{9682F394-9A4D-4DFD-828B-514C79D5D281}"/>
+                <a16:creationId xmlns:a16="http://schemas.microsoft.com/office/drawing/2014/main" id="{BAFA36D4-BB96-4B97-8FD3-4F6FA328F7F3}"/>
               </a:ext>
             </a:extLst>
           </p:cNvPr>
@@ -17299,7 +17154,7 @@
           <p:cNvPr id="17" name="">
             <a:extLst xmlns:a="http://schemas.openxmlformats.org/drawingml/2006/main">
               <a:ext uri="{FF2B5EF4-FFF2-40B4-BE49-F238E27FC236}">
-                <a16:creationId xmlns:a16="http://schemas.microsoft.com/office/drawing/2014/main" id="{DE5250A2-8F94-497A-8BB3-C16448314911}"/>
+                <a16:creationId xmlns:a16="http://schemas.microsoft.com/office/drawing/2014/main" id="{B035EEDA-986D-447E-A239-CA1EAF4DAAFB}"/>
               </a:ext>
             </a:extLst>
           </p:cNvPr>
@@ -17391,7 +17246,7 @@
           <p:cNvPr id="18" name="">
             <a:extLst xmlns:a="http://schemas.openxmlformats.org/drawingml/2006/main">
               <a:ext uri="{FF2B5EF4-FFF2-40B4-BE49-F238E27FC236}">
-                <a16:creationId xmlns:a16="http://schemas.microsoft.com/office/drawing/2014/main" id="{70768C1F-0693-4227-9DB2-AA3C9E537CED}"/>
+                <a16:creationId xmlns:a16="http://schemas.microsoft.com/office/drawing/2014/main" id="{CBCB3E71-3419-41C8-9920-1929ED3B3DCA}"/>
               </a:ext>
             </a:extLst>
           </p:cNvPr>
@@ -17426,7 +17281,7 @@
           <p:cNvPr id="19" name="">
             <a:extLst xmlns:a="http://schemas.openxmlformats.org/drawingml/2006/main">
               <a:ext uri="{FF2B5EF4-FFF2-40B4-BE49-F238E27FC236}">
-                <a16:creationId xmlns:a16="http://schemas.microsoft.com/office/drawing/2014/main" id="{612EEBC1-12A9-43B1-B62C-83C35882201B}"/>
+                <a16:creationId xmlns:a16="http://schemas.microsoft.com/office/drawing/2014/main" id="{0F3769F5-1D26-46E0-9D42-000C9F313B12}"/>
               </a:ext>
             </a:extLst>
           </p:cNvPr>
@@ -17488,7 +17343,7 @@
     </p:spTree>
     <p:extLst>
       <p:ext uri="{BB962C8B-B14F-4D97-AF65-F5344CB8AC3E}">
-        <p14:creationId xmlns:p14="http://schemas.microsoft.com/office/powerpoint/2010/main" val="659510216"/>
+        <p14:creationId xmlns:p14="http://schemas.microsoft.com/office/powerpoint/2010/main" val="1046936977"/>
       </p:ext>
     </p:extLst>
   </p:cSld>
@@ -17519,7 +17374,7 @@
           <p:cNvPr id="1" name="">
             <a:extLst xmlns:a="http://schemas.openxmlformats.org/drawingml/2006/main">
               <a:ext uri="{FF2B5EF4-FFF2-40B4-BE49-F238E27FC236}">
-                <a16:creationId xmlns:a16="http://schemas.microsoft.com/office/drawing/2014/main" id="{01865735-63F5-4717-9D52-E921EDEF2BEB}"/>
+                <a16:creationId xmlns:a16="http://schemas.microsoft.com/office/drawing/2014/main" id="{99E56ECE-0631-4991-B414-93894D5BDE13}"/>
               </a:ext>
             </a:extLst>
           </p:cNvPr>
@@ -17554,7 +17409,7 @@
           <p:cNvPr id="2" name="">
             <a:extLst xmlns:a="http://schemas.openxmlformats.org/drawingml/2006/main">
               <a:ext uri="{FF2B5EF4-FFF2-40B4-BE49-F238E27FC236}">
-                <a16:creationId xmlns:a16="http://schemas.microsoft.com/office/drawing/2014/main" id="{6E97088D-32A4-417F-A504-67526EDE77CB}"/>
+                <a16:creationId xmlns:a16="http://schemas.microsoft.com/office/drawing/2014/main" id="{BFCFD751-5081-40BB-8DCD-24DCF18010CB}"/>
               </a:ext>
             </a:extLst>
           </p:cNvPr>
@@ -17618,7 +17473,7 @@
           <p:cNvPr id="3" name="">
             <a:extLst xmlns:a="http://schemas.openxmlformats.org/drawingml/2006/main">
               <a:ext uri="{FF2B5EF4-FFF2-40B4-BE49-F238E27FC236}">
-                <a16:creationId xmlns:a16="http://schemas.microsoft.com/office/drawing/2014/main" id="{64C1DCEC-916D-4D9E-9B20-245DD9737DC4}"/>
+                <a16:creationId xmlns:a16="http://schemas.microsoft.com/office/drawing/2014/main" id="{F2705778-31A9-4472-B4B9-21D21BD358A0}"/>
               </a:ext>
             </a:extLst>
           </p:cNvPr>
@@ -17682,7 +17537,7 @@
           <p:cNvPr id="4" name="">
             <a:extLst xmlns:a="http://schemas.openxmlformats.org/drawingml/2006/main">
               <a:ext uri="{FF2B5EF4-FFF2-40B4-BE49-F238E27FC236}">
-                <a16:creationId xmlns:a16="http://schemas.microsoft.com/office/drawing/2014/main" id="{FDD607E3-DC1F-41BA-B172-F17A1349314B}"/>
+                <a16:creationId xmlns:a16="http://schemas.microsoft.com/office/drawing/2014/main" id="{3A86176B-3B4F-4571-8760-D5F9D9518C60}"/>
               </a:ext>
             </a:extLst>
           </p:cNvPr>
@@ -17746,7 +17601,7 @@
           <p:cNvPr id="5" name="">
             <a:extLst xmlns:a="http://schemas.openxmlformats.org/drawingml/2006/main">
               <a:ext uri="{FF2B5EF4-FFF2-40B4-BE49-F238E27FC236}">
-                <a16:creationId xmlns:a16="http://schemas.microsoft.com/office/drawing/2014/main" id="{BABD9B51-392F-4604-BBCF-E32FC1C81024}"/>
+                <a16:creationId xmlns:a16="http://schemas.microsoft.com/office/drawing/2014/main" id="{43029CA1-EE68-474F-BA41-D7670B2AA999}"/>
               </a:ext>
             </a:extLst>
           </p:cNvPr>
@@ -17810,7 +17665,7 @@
           <p:cNvPr id="6" name="">
             <a:extLst xmlns:a="http://schemas.openxmlformats.org/drawingml/2006/main">
               <a:ext uri="{FF2B5EF4-FFF2-40B4-BE49-F238E27FC236}">
-                <a16:creationId xmlns:a16="http://schemas.microsoft.com/office/drawing/2014/main" id="{AEC81472-58C5-4EF7-943F-45DC2EE20009}"/>
+                <a16:creationId xmlns:a16="http://schemas.microsoft.com/office/drawing/2014/main" id="{8DC4CD03-C09E-429C-B7B6-7D0845481BC1}"/>
               </a:ext>
             </a:extLst>
           </p:cNvPr>
@@ -17843,7 +17698,7 @@
           <p:cNvPr id="7" name="">
             <a:extLst xmlns:a="http://schemas.openxmlformats.org/drawingml/2006/main">
               <a:ext uri="{FF2B5EF4-FFF2-40B4-BE49-F238E27FC236}">
-                <a16:creationId xmlns:a16="http://schemas.microsoft.com/office/drawing/2014/main" id="{0BE61B56-B313-4524-A6EE-DFE25FB4DD25}"/>
+                <a16:creationId xmlns:a16="http://schemas.microsoft.com/office/drawing/2014/main" id="{CF7DF6AB-0039-49B7-B51C-192C19224F4B}"/>
               </a:ext>
             </a:extLst>
           </p:cNvPr>
@@ -17878,7 +17733,7 @@
           <p:cNvPr id="8" name="">
             <a:extLst xmlns:a="http://schemas.openxmlformats.org/drawingml/2006/main">
               <a:ext uri="{FF2B5EF4-FFF2-40B4-BE49-F238E27FC236}">
-                <a16:creationId xmlns:a16="http://schemas.microsoft.com/office/drawing/2014/main" id="{D98E6C7D-83FB-47E7-B97A-47C358350F70}"/>
+                <a16:creationId xmlns:a16="http://schemas.microsoft.com/office/drawing/2014/main" id="{BB69C7E0-988D-46FC-8D2C-0E067B77834C}"/>
               </a:ext>
             </a:extLst>
           </p:cNvPr>
@@ -17942,7 +17797,7 @@
           <p:cNvPr id="9" name="">
             <a:extLst xmlns:a="http://schemas.openxmlformats.org/drawingml/2006/main">
               <a:ext uri="{FF2B5EF4-FFF2-40B4-BE49-F238E27FC236}">
-                <a16:creationId xmlns:a16="http://schemas.microsoft.com/office/drawing/2014/main" id="{C12083F9-31B6-48C8-99BA-205DB1BFE024}"/>
+                <a16:creationId xmlns:a16="http://schemas.microsoft.com/office/drawing/2014/main" id="{E9AE8E46-C1B3-4ED3-B736-0986BF016CC0}"/>
               </a:ext>
             </a:extLst>
           </p:cNvPr>
@@ -18006,7 +17861,7 @@
           <p:cNvPr id="10" name="">
             <a:extLst xmlns:a="http://schemas.openxmlformats.org/drawingml/2006/main">
               <a:ext uri="{FF2B5EF4-FFF2-40B4-BE49-F238E27FC236}">
-                <a16:creationId xmlns:a16="http://schemas.microsoft.com/office/drawing/2014/main" id="{8480B292-8F3B-4BEE-A28E-78FD4AA8E4FF}"/>
+                <a16:creationId xmlns:a16="http://schemas.microsoft.com/office/drawing/2014/main" id="{8FAAC055-7997-4A32-BCBF-57FCEC7836D4}"/>
               </a:ext>
             </a:extLst>
           </p:cNvPr>
@@ -18039,7 +17894,7 @@
           <p:cNvPr id="11" name="">
             <a:extLst xmlns:a="http://schemas.openxmlformats.org/drawingml/2006/main">
               <a:ext uri="{FF2B5EF4-FFF2-40B4-BE49-F238E27FC236}">
-                <a16:creationId xmlns:a16="http://schemas.microsoft.com/office/drawing/2014/main" id="{0A2D22EC-0F80-4BE3-9CB0-173C00C9B587}"/>
+                <a16:creationId xmlns:a16="http://schemas.microsoft.com/office/drawing/2014/main" id="{44429A0A-DAC2-48A9-A03E-C78787D618DA}"/>
               </a:ext>
             </a:extLst>
           </p:cNvPr>
@@ -18074,7 +17929,7 @@
           <p:cNvPr id="12" name="">
             <a:extLst xmlns:a="http://schemas.openxmlformats.org/drawingml/2006/main">
               <a:ext uri="{FF2B5EF4-FFF2-40B4-BE49-F238E27FC236}">
-                <a16:creationId xmlns:a16="http://schemas.microsoft.com/office/drawing/2014/main" id="{32DB7CFE-3D36-406F-BD10-F8860BB5F6E1}"/>
+                <a16:creationId xmlns:a16="http://schemas.microsoft.com/office/drawing/2014/main" id="{39DB33FE-DAAB-4EEB-ABD6-31DD8FC2B8F3}"/>
               </a:ext>
             </a:extLst>
           </p:cNvPr>
@@ -18138,7 +17993,7 @@
           <p:cNvPr id="13" name="">
             <a:extLst xmlns:a="http://schemas.openxmlformats.org/drawingml/2006/main">
               <a:ext uri="{FF2B5EF4-FFF2-40B4-BE49-F238E27FC236}">
-                <a16:creationId xmlns:a16="http://schemas.microsoft.com/office/drawing/2014/main" id="{19B987F1-8313-4836-8463-FC7E86FBA61E}"/>
+                <a16:creationId xmlns:a16="http://schemas.microsoft.com/office/drawing/2014/main" id="{19082FA8-D951-49C9-B1B7-CA95D499B6B4}"/>
               </a:ext>
             </a:extLst>
           </p:cNvPr>
@@ -18202,7 +18057,7 @@
           <p:cNvPr id="14" name="">
             <a:extLst xmlns:a="http://schemas.openxmlformats.org/drawingml/2006/main">
               <a:ext uri="{FF2B5EF4-FFF2-40B4-BE49-F238E27FC236}">
-                <a16:creationId xmlns:a16="http://schemas.microsoft.com/office/drawing/2014/main" id="{79C6BA8C-1DF5-4DB1-AB7D-25EEF8471E2F}"/>
+                <a16:creationId xmlns:a16="http://schemas.microsoft.com/office/drawing/2014/main" id="{D401CB22-34BF-46B8-B2E2-6D32348AF1DE}"/>
               </a:ext>
             </a:extLst>
           </p:cNvPr>
@@ -18235,7 +18090,7 @@
           <p:cNvPr id="15" name="">
             <a:extLst xmlns:a="http://schemas.openxmlformats.org/drawingml/2006/main">
               <a:ext uri="{FF2B5EF4-FFF2-40B4-BE49-F238E27FC236}">
-                <a16:creationId xmlns:a16="http://schemas.microsoft.com/office/drawing/2014/main" id="{43944173-1F80-45FA-8ED3-E27D4B8CE76C}"/>
+                <a16:creationId xmlns:a16="http://schemas.microsoft.com/office/drawing/2014/main" id="{92127539-C511-4E98-8D18-9F6630DB3C41}"/>
               </a:ext>
             </a:extLst>
           </p:cNvPr>
@@ -18270,7 +18125,7 @@
           <p:cNvPr id="16" name="">
             <a:extLst xmlns:a="http://schemas.openxmlformats.org/drawingml/2006/main">
               <a:ext uri="{FF2B5EF4-FFF2-40B4-BE49-F238E27FC236}">
-                <a16:creationId xmlns:a16="http://schemas.microsoft.com/office/drawing/2014/main" id="{7C3E5EB5-18B8-4414-8BE5-96A9F2E6B341}"/>
+                <a16:creationId xmlns:a16="http://schemas.microsoft.com/office/drawing/2014/main" id="{3FF0EFD2-BA37-453D-BA45-54DBCE1AFC14}"/>
               </a:ext>
             </a:extLst>
           </p:cNvPr>
@@ -18334,7 +18189,7 @@
           <p:cNvPr id="17" name="">
             <a:extLst xmlns:a="http://schemas.openxmlformats.org/drawingml/2006/main">
               <a:ext uri="{FF2B5EF4-FFF2-40B4-BE49-F238E27FC236}">
-                <a16:creationId xmlns:a16="http://schemas.microsoft.com/office/drawing/2014/main" id="{B9EAB0AC-F1D9-4E54-B1A9-BD75A7FF8C6B}"/>
+                <a16:creationId xmlns:a16="http://schemas.microsoft.com/office/drawing/2014/main" id="{399F47EE-009A-4795-9C61-FC835E13936D}"/>
               </a:ext>
             </a:extLst>
           </p:cNvPr>
@@ -18398,7 +18253,7 @@
           <p:cNvPr id="18" name="">
             <a:extLst xmlns:a="http://schemas.openxmlformats.org/drawingml/2006/main">
               <a:ext uri="{FF2B5EF4-FFF2-40B4-BE49-F238E27FC236}">
-                <a16:creationId xmlns:a16="http://schemas.microsoft.com/office/drawing/2014/main" id="{08C5DCC2-F5DB-449B-8E73-0AFFA65642BA}"/>
+                <a16:creationId xmlns:a16="http://schemas.microsoft.com/office/drawing/2014/main" id="{A5B01CFA-207E-48D0-8100-D1F382343E17}"/>
               </a:ext>
             </a:extLst>
           </p:cNvPr>
@@ -18458,7 +18313,7 @@
     </p:spTree>
     <p:extLst>
       <p:ext uri="{BB962C8B-B14F-4D97-AF65-F5344CB8AC3E}">
-        <p14:creationId xmlns:p14="http://schemas.microsoft.com/office/powerpoint/2010/main" val="248528248"/>
+        <p14:creationId xmlns:p14="http://schemas.microsoft.com/office/powerpoint/2010/main" val="109348451"/>
       </p:ext>
     </p:extLst>
   </p:cSld>
@@ -18489,7 +18344,7 @@
           <p:cNvPr id="1" name="">
             <a:extLst xmlns:a="http://schemas.openxmlformats.org/drawingml/2006/main">
               <a:ext uri="{FF2B5EF4-FFF2-40B4-BE49-F238E27FC236}">
-                <a16:creationId xmlns:a16="http://schemas.microsoft.com/office/drawing/2014/main" id="{CB309ED3-1B6A-43D9-9EEF-DB367749093D}"/>
+                <a16:creationId xmlns:a16="http://schemas.microsoft.com/office/drawing/2014/main" id="{6CDD6E76-90B8-4D9F-AF5A-74C8986EE25B}"/>
               </a:ext>
             </a:extLst>
           </p:cNvPr>
@@ -18524,7 +18379,7 @@
           <p:cNvPr id="2" name="">
             <a:extLst xmlns:a="http://schemas.openxmlformats.org/drawingml/2006/main">
               <a:ext uri="{FF2B5EF4-FFF2-40B4-BE49-F238E27FC236}">
-                <a16:creationId xmlns:a16="http://schemas.microsoft.com/office/drawing/2014/main" id="{8CA3BDBE-BA19-4AAE-8D41-E8F22E82088E}"/>
+                <a16:creationId xmlns:a16="http://schemas.microsoft.com/office/drawing/2014/main" id="{D002AE38-B070-4A19-9CD6-3C991C1AE386}"/>
               </a:ext>
             </a:extLst>
           </p:cNvPr>
@@ -18588,7 +18443,7 @@
           <p:cNvPr id="3" name="">
             <a:extLst xmlns:a="http://schemas.openxmlformats.org/drawingml/2006/main">
               <a:ext uri="{FF2B5EF4-FFF2-40B4-BE49-F238E27FC236}">
-                <a16:creationId xmlns:a16="http://schemas.microsoft.com/office/drawing/2014/main" id="{49A9D082-8125-4BFC-A5F7-82893A655C4A}"/>
+                <a16:creationId xmlns:a16="http://schemas.microsoft.com/office/drawing/2014/main" id="{17A3D2BC-F90C-4E77-9BBB-0C7FB5D7B836}"/>
               </a:ext>
             </a:extLst>
           </p:cNvPr>
@@ -18652,7 +18507,7 @@
           <p:cNvPr id="4" name="">
             <a:extLst xmlns:a="http://schemas.openxmlformats.org/drawingml/2006/main">
               <a:ext uri="{FF2B5EF4-FFF2-40B4-BE49-F238E27FC236}">
-                <a16:creationId xmlns:a16="http://schemas.microsoft.com/office/drawing/2014/main" id="{1D9BFA28-6864-48F5-A2A2-6D80D07D4613}"/>
+                <a16:creationId xmlns:a16="http://schemas.microsoft.com/office/drawing/2014/main" id="{553BC4C0-77B6-4E11-BC1F-9C775FFB9C19}"/>
               </a:ext>
             </a:extLst>
           </p:cNvPr>
@@ -18716,7 +18571,7 @@
           <p:cNvPr id="5" name="">
             <a:extLst xmlns:a="http://schemas.openxmlformats.org/drawingml/2006/main">
               <a:ext uri="{FF2B5EF4-FFF2-40B4-BE49-F238E27FC236}">
-                <a16:creationId xmlns:a16="http://schemas.microsoft.com/office/drawing/2014/main" id="{BA392DBE-B829-4A5D-A14B-C495351AEB86}"/>
+                <a16:creationId xmlns:a16="http://schemas.microsoft.com/office/drawing/2014/main" id="{6D954F87-766E-46B4-995D-D17FEFEDB703}"/>
               </a:ext>
             </a:extLst>
           </p:cNvPr>
@@ -18780,7 +18635,7 @@
           <p:cNvPr id="6" name="">
             <a:extLst xmlns:a="http://schemas.openxmlformats.org/drawingml/2006/main">
               <a:ext uri="{FF2B5EF4-FFF2-40B4-BE49-F238E27FC236}">
-                <a16:creationId xmlns:a16="http://schemas.microsoft.com/office/drawing/2014/main" id="{EE8A4F19-18F9-4DA1-8D82-18477F87C15D}"/>
+                <a16:creationId xmlns:a16="http://schemas.microsoft.com/office/drawing/2014/main" id="{31D8325A-4C91-40C9-935F-253C64B287D0}"/>
               </a:ext>
             </a:extLst>
           </p:cNvPr>
@@ -18813,7 +18668,7 @@
           <p:cNvPr id="7" name="">
             <a:extLst xmlns:a="http://schemas.openxmlformats.org/drawingml/2006/main">
               <a:ext uri="{FF2B5EF4-FFF2-40B4-BE49-F238E27FC236}">
-                <a16:creationId xmlns:a16="http://schemas.microsoft.com/office/drawing/2014/main" id="{F75B0AA3-3CEC-41B5-8D7C-E41681DCACB5}"/>
+                <a16:creationId xmlns:a16="http://schemas.microsoft.com/office/drawing/2014/main" id="{33349EA4-2FF8-42D2-A818-32508B16C7E3}"/>
               </a:ext>
             </a:extLst>
           </p:cNvPr>
@@ -18848,7 +18703,7 @@
           <p:cNvPr id="8" name="">
             <a:extLst xmlns:a="http://schemas.openxmlformats.org/drawingml/2006/main">
               <a:ext uri="{FF2B5EF4-FFF2-40B4-BE49-F238E27FC236}">
-                <a16:creationId xmlns:a16="http://schemas.microsoft.com/office/drawing/2014/main" id="{186BBCFA-A464-4F2D-8799-59A3CE44DEC3}"/>
+                <a16:creationId xmlns:a16="http://schemas.microsoft.com/office/drawing/2014/main" id="{0EF3FC0E-9BA1-4F2C-8049-2171A66277F5}"/>
               </a:ext>
             </a:extLst>
           </p:cNvPr>
@@ -18912,7 +18767,7 @@
           <p:cNvPr id="9" name="">
             <a:extLst xmlns:a="http://schemas.openxmlformats.org/drawingml/2006/main">
               <a:ext uri="{FF2B5EF4-FFF2-40B4-BE49-F238E27FC236}">
-                <a16:creationId xmlns:a16="http://schemas.microsoft.com/office/drawing/2014/main" id="{2B2E580F-0478-4686-B1B3-68DB92575622}"/>
+                <a16:creationId xmlns:a16="http://schemas.microsoft.com/office/drawing/2014/main" id="{79274230-8333-4506-B0D5-6FF59CACD7C0}"/>
               </a:ext>
             </a:extLst>
           </p:cNvPr>
@@ -19004,7 +18859,7 @@
           <p:cNvPr id="10" name="">
             <a:extLst xmlns:a="http://schemas.openxmlformats.org/drawingml/2006/main">
               <a:ext uri="{FF2B5EF4-FFF2-40B4-BE49-F238E27FC236}">
-                <a16:creationId xmlns:a16="http://schemas.microsoft.com/office/drawing/2014/main" id="{0EB1CA98-BBFC-4F00-842F-44573C67573C}"/>
+                <a16:creationId xmlns:a16="http://schemas.microsoft.com/office/drawing/2014/main" id="{CA446226-99A6-400C-89B9-BC3D6D3E7052}"/>
               </a:ext>
             </a:extLst>
           </p:cNvPr>
@@ -19037,7 +18892,7 @@
           <p:cNvPr id="11" name="">
             <a:extLst xmlns:a="http://schemas.openxmlformats.org/drawingml/2006/main">
               <a:ext uri="{FF2B5EF4-FFF2-40B4-BE49-F238E27FC236}">
-                <a16:creationId xmlns:a16="http://schemas.microsoft.com/office/drawing/2014/main" id="{87620382-96DF-451B-BC29-A134C2E34C35}"/>
+                <a16:creationId xmlns:a16="http://schemas.microsoft.com/office/drawing/2014/main" id="{8460D7D8-6F42-45CC-BF9A-E20F9ADFC86E}"/>
               </a:ext>
             </a:extLst>
           </p:cNvPr>
@@ -19072,7 +18927,7 @@
           <p:cNvPr id="12" name="">
             <a:extLst xmlns:a="http://schemas.openxmlformats.org/drawingml/2006/main">
               <a:ext uri="{FF2B5EF4-FFF2-40B4-BE49-F238E27FC236}">
-                <a16:creationId xmlns:a16="http://schemas.microsoft.com/office/drawing/2014/main" id="{D5AED3D9-D4BE-43AF-B6CE-CD22D3583042}"/>
+                <a16:creationId xmlns:a16="http://schemas.microsoft.com/office/drawing/2014/main" id="{A38FB7BE-15C3-4994-AB82-A6D8FA2823A8}"/>
               </a:ext>
             </a:extLst>
           </p:cNvPr>
@@ -19136,7 +18991,7 @@
           <p:cNvPr id="13" name="">
             <a:extLst xmlns:a="http://schemas.openxmlformats.org/drawingml/2006/main">
               <a:ext uri="{FF2B5EF4-FFF2-40B4-BE49-F238E27FC236}">
-                <a16:creationId xmlns:a16="http://schemas.microsoft.com/office/drawing/2014/main" id="{D98E83C6-901C-4457-8CCE-07EC1D8424D9}"/>
+                <a16:creationId xmlns:a16="http://schemas.microsoft.com/office/drawing/2014/main" id="{ACC4371E-1D39-4E37-8524-1DCF034823F5}"/>
               </a:ext>
             </a:extLst>
           </p:cNvPr>
@@ -19292,7 +19147,7 @@
           <p:cNvPr id="14" name="">
             <a:extLst xmlns:a="http://schemas.openxmlformats.org/drawingml/2006/main">
               <a:ext uri="{FF2B5EF4-FFF2-40B4-BE49-F238E27FC236}">
-                <a16:creationId xmlns:a16="http://schemas.microsoft.com/office/drawing/2014/main" id="{9D136548-E5A8-45B0-86F4-9D7443C871BB}"/>
+                <a16:creationId xmlns:a16="http://schemas.microsoft.com/office/drawing/2014/main" id="{223C205A-803E-4953-8CAE-22C5D5B12511}"/>
               </a:ext>
             </a:extLst>
           </p:cNvPr>
@@ -19325,7 +19180,7 @@
           <p:cNvPr id="15" name="">
             <a:extLst xmlns:a="http://schemas.openxmlformats.org/drawingml/2006/main">
               <a:ext uri="{FF2B5EF4-FFF2-40B4-BE49-F238E27FC236}">
-                <a16:creationId xmlns:a16="http://schemas.microsoft.com/office/drawing/2014/main" id="{77B0CD63-1774-441E-BCC9-248B3C1DD80E}"/>
+                <a16:creationId xmlns:a16="http://schemas.microsoft.com/office/drawing/2014/main" id="{2D8B760D-E682-4BF5-90B8-23D16919CCA2}"/>
               </a:ext>
             </a:extLst>
           </p:cNvPr>
@@ -19360,7 +19215,7 @@
           <p:cNvPr id="16" name="">
             <a:extLst xmlns:a="http://schemas.openxmlformats.org/drawingml/2006/main">
               <a:ext uri="{FF2B5EF4-FFF2-40B4-BE49-F238E27FC236}">
-                <a16:creationId xmlns:a16="http://schemas.microsoft.com/office/drawing/2014/main" id="{65E4C111-6BC3-4F29-A3CC-5918A7AB2289}"/>
+                <a16:creationId xmlns:a16="http://schemas.microsoft.com/office/drawing/2014/main" id="{186B98B2-A766-4962-BAD9-44F17670EDF1}"/>
               </a:ext>
             </a:extLst>
           </p:cNvPr>
@@ -19424,7 +19279,7 @@
           <p:cNvPr id="17" name="">
             <a:extLst xmlns:a="http://schemas.openxmlformats.org/drawingml/2006/main">
               <a:ext uri="{FF2B5EF4-FFF2-40B4-BE49-F238E27FC236}">
-                <a16:creationId xmlns:a16="http://schemas.microsoft.com/office/drawing/2014/main" id="{C2AA5FD6-DEB2-4399-AF07-09566311C005}"/>
+                <a16:creationId xmlns:a16="http://schemas.microsoft.com/office/drawing/2014/main" id="{E081987B-24F8-440A-8826-6733018D1BB9}"/>
               </a:ext>
             </a:extLst>
           </p:cNvPr>
@@ -19488,7 +19343,7 @@
           <p:cNvPr id="18" name="">
             <a:extLst xmlns:a="http://schemas.openxmlformats.org/drawingml/2006/main">
               <a:ext uri="{FF2B5EF4-FFF2-40B4-BE49-F238E27FC236}">
-                <a16:creationId xmlns:a16="http://schemas.microsoft.com/office/drawing/2014/main" id="{65C23243-1B8F-4783-9C6B-37D23DD8629D}"/>
+                <a16:creationId xmlns:a16="http://schemas.microsoft.com/office/drawing/2014/main" id="{8F19107E-00EF-4979-B036-4E41B556B900}"/>
               </a:ext>
             </a:extLst>
           </p:cNvPr>
@@ -19523,7 +19378,7 @@
           <p:cNvPr id="19" name="">
             <a:extLst xmlns:a="http://schemas.openxmlformats.org/drawingml/2006/main">
               <a:ext uri="{FF2B5EF4-FFF2-40B4-BE49-F238E27FC236}">
-                <a16:creationId xmlns:a16="http://schemas.microsoft.com/office/drawing/2014/main" id="{1515E3D2-4929-4B10-8AB6-03C12F539C28}"/>
+                <a16:creationId xmlns:a16="http://schemas.microsoft.com/office/drawing/2014/main" id="{7272E5AD-BC45-4265-B7F8-8773CBFC8DFA}"/>
               </a:ext>
             </a:extLst>
           </p:cNvPr>
@@ -19587,7 +19442,7 @@
           <p:cNvPr id="20" name="">
             <a:extLst xmlns:a="http://schemas.openxmlformats.org/drawingml/2006/main">
               <a:ext uri="{FF2B5EF4-FFF2-40B4-BE49-F238E27FC236}">
-                <a16:creationId xmlns:a16="http://schemas.microsoft.com/office/drawing/2014/main" id="{79BCBF45-1CC0-4CE5-AD14-CBA8C415FEDD}"/>
+                <a16:creationId xmlns:a16="http://schemas.microsoft.com/office/drawing/2014/main" id="{5EE50D58-48D6-44D4-9011-CBC39D5E66C1}"/>
               </a:ext>
             </a:extLst>
           </p:cNvPr>
@@ -19622,7 +19477,7 @@
           <p:cNvPr id="21" name="">
             <a:extLst xmlns:a="http://schemas.openxmlformats.org/drawingml/2006/main">
               <a:ext uri="{FF2B5EF4-FFF2-40B4-BE49-F238E27FC236}">
-                <a16:creationId xmlns:a16="http://schemas.microsoft.com/office/drawing/2014/main" id="{6652FC4E-15AB-4391-B29C-726410AA078B}"/>
+                <a16:creationId xmlns:a16="http://schemas.microsoft.com/office/drawing/2014/main" id="{8989BCCB-A028-4EF4-90E6-441AF21EEFDA}"/>
               </a:ext>
             </a:extLst>
           </p:cNvPr>
@@ -19686,7 +19541,7 @@
           <p:cNvPr id="22" name="">
             <a:extLst xmlns:a="http://schemas.openxmlformats.org/drawingml/2006/main">
               <a:ext uri="{FF2B5EF4-FFF2-40B4-BE49-F238E27FC236}">
-                <a16:creationId xmlns:a16="http://schemas.microsoft.com/office/drawing/2014/main" id="{956314A1-E2B4-45E2-BB5F-F6F649725127}"/>
+                <a16:creationId xmlns:a16="http://schemas.microsoft.com/office/drawing/2014/main" id="{79FFA536-9A5A-4953-B6AF-33E3AB60AAEC}"/>
               </a:ext>
             </a:extLst>
           </p:cNvPr>
@@ -19721,7 +19576,7 @@
           <p:cNvPr id="23" name="">
             <a:extLst xmlns:a="http://schemas.openxmlformats.org/drawingml/2006/main">
               <a:ext uri="{FF2B5EF4-FFF2-40B4-BE49-F238E27FC236}">
-                <a16:creationId xmlns:a16="http://schemas.microsoft.com/office/drawing/2014/main" id="{B0BF15CB-39B3-42A7-B298-B2134F37B6F3}"/>
+                <a16:creationId xmlns:a16="http://schemas.microsoft.com/office/drawing/2014/main" id="{BAAA4E81-2B5B-4FB7-A8C7-0845C4966E97}"/>
               </a:ext>
             </a:extLst>
           </p:cNvPr>
@@ -19783,7 +19638,7 @@
     </p:spTree>
     <p:extLst>
       <p:ext uri="{BB962C8B-B14F-4D97-AF65-F5344CB8AC3E}">
-        <p14:creationId xmlns:p14="http://schemas.microsoft.com/office/powerpoint/2010/main" val="1763127991"/>
+        <p14:creationId xmlns:p14="http://schemas.microsoft.com/office/powerpoint/2010/main" val="822469048"/>
       </p:ext>
     </p:extLst>
   </p:cSld>
@@ -19814,7 +19669,7 @@
           <p:cNvPr id="1" name="">
             <a:extLst xmlns:a="http://schemas.openxmlformats.org/drawingml/2006/main">
               <a:ext uri="{FF2B5EF4-FFF2-40B4-BE49-F238E27FC236}">
-                <a16:creationId xmlns:a16="http://schemas.microsoft.com/office/drawing/2014/main" id="{4310AB19-614A-4B4C-A280-CB35043C784F}"/>
+                <a16:creationId xmlns:a16="http://schemas.microsoft.com/office/drawing/2014/main" id="{24A41D71-D581-4F1D-A477-A7E78452693B}"/>
               </a:ext>
             </a:extLst>
           </p:cNvPr>
@@ -19849,7 +19704,7 @@
           <p:cNvPr id="2" name="">
             <a:extLst xmlns:a="http://schemas.openxmlformats.org/drawingml/2006/main">
               <a:ext uri="{FF2B5EF4-FFF2-40B4-BE49-F238E27FC236}">
-                <a16:creationId xmlns:a16="http://schemas.microsoft.com/office/drawing/2014/main" id="{DA90F56A-4D84-4197-B395-0A5B1C9A42E3}"/>
+                <a16:creationId xmlns:a16="http://schemas.microsoft.com/office/drawing/2014/main" id="{3C89AA6F-3897-463B-B89A-0905B86A162D}"/>
               </a:ext>
             </a:extLst>
           </p:cNvPr>
@@ -19913,7 +19768,7 @@
           <p:cNvPr id="3" name="">
             <a:extLst xmlns:a="http://schemas.openxmlformats.org/drawingml/2006/main">
               <a:ext uri="{FF2B5EF4-FFF2-40B4-BE49-F238E27FC236}">
-                <a16:creationId xmlns:a16="http://schemas.microsoft.com/office/drawing/2014/main" id="{55C5FF44-DDB2-4A35-BAFB-7F2278D4E3A5}"/>
+                <a16:creationId xmlns:a16="http://schemas.microsoft.com/office/drawing/2014/main" id="{51941040-A1FB-432E-9F94-D1F314B36D48}"/>
               </a:ext>
             </a:extLst>
           </p:cNvPr>
@@ -19977,7 +19832,7 @@
           <p:cNvPr id="4" name="">
             <a:extLst xmlns:a="http://schemas.openxmlformats.org/drawingml/2006/main">
               <a:ext uri="{FF2B5EF4-FFF2-40B4-BE49-F238E27FC236}">
-                <a16:creationId xmlns:a16="http://schemas.microsoft.com/office/drawing/2014/main" id="{5F72FA07-8B21-4C3C-AA30-C50C4D17487A}"/>
+                <a16:creationId xmlns:a16="http://schemas.microsoft.com/office/drawing/2014/main" id="{45FC9AFF-0D08-4AA6-BF14-72BA28CA70CB}"/>
               </a:ext>
             </a:extLst>
           </p:cNvPr>
@@ -20041,7 +19896,7 @@
           <p:cNvPr id="5" name="">
             <a:extLst xmlns:a="http://schemas.openxmlformats.org/drawingml/2006/main">
               <a:ext uri="{FF2B5EF4-FFF2-40B4-BE49-F238E27FC236}">
-                <a16:creationId xmlns:a16="http://schemas.microsoft.com/office/drawing/2014/main" id="{86F3FCED-30B8-4DDF-9344-B7D042879D8D}"/>
+                <a16:creationId xmlns:a16="http://schemas.microsoft.com/office/drawing/2014/main" id="{E50B6CC0-60BB-4C95-A349-A9C4E8A3B808}"/>
               </a:ext>
             </a:extLst>
           </p:cNvPr>
@@ -20105,7 +19960,7 @@
           <p:cNvPr id="6" name="">
             <a:extLst xmlns:a="http://schemas.openxmlformats.org/drawingml/2006/main">
               <a:ext uri="{FF2B5EF4-FFF2-40B4-BE49-F238E27FC236}">
-                <a16:creationId xmlns:a16="http://schemas.microsoft.com/office/drawing/2014/main" id="{B9F0172D-5C89-48A8-AE20-9DE2B7D86B1E}"/>
+                <a16:creationId xmlns:a16="http://schemas.microsoft.com/office/drawing/2014/main" id="{D657931B-053F-4E3A-9C5A-0100791CBD28}"/>
               </a:ext>
             </a:extLst>
           </p:cNvPr>
@@ -20138,7 +19993,7 @@
           <p:cNvPr id="7" name="">
             <a:extLst xmlns:a="http://schemas.openxmlformats.org/drawingml/2006/main">
               <a:ext uri="{FF2B5EF4-FFF2-40B4-BE49-F238E27FC236}">
-                <a16:creationId xmlns:a16="http://schemas.microsoft.com/office/drawing/2014/main" id="{F5A18B28-0C8A-4A37-859C-5FF4B34F14EE}"/>
+                <a16:creationId xmlns:a16="http://schemas.microsoft.com/office/drawing/2014/main" id="{8DE0F7F1-58C5-4A72-A062-1EAA9FEAEEE6}"/>
               </a:ext>
             </a:extLst>
           </p:cNvPr>
@@ -20173,7 +20028,7 @@
           <p:cNvPr id="8" name="">
             <a:extLst xmlns:a="http://schemas.openxmlformats.org/drawingml/2006/main">
               <a:ext uri="{FF2B5EF4-FFF2-40B4-BE49-F238E27FC236}">
-                <a16:creationId xmlns:a16="http://schemas.microsoft.com/office/drawing/2014/main" id="{428A5CD0-33DA-453D-8403-764B78EA3695}"/>
+                <a16:creationId xmlns:a16="http://schemas.microsoft.com/office/drawing/2014/main" id="{CE66670A-431E-4AA8-B868-F9313F264B7A}"/>
               </a:ext>
             </a:extLst>
           </p:cNvPr>
@@ -20237,7 +20092,7 @@
           <p:cNvPr id="9" name="">
             <a:extLst xmlns:a="http://schemas.openxmlformats.org/drawingml/2006/main">
               <a:ext uri="{FF2B5EF4-FFF2-40B4-BE49-F238E27FC236}">
-                <a16:creationId xmlns:a16="http://schemas.microsoft.com/office/drawing/2014/main" id="{64BA54EA-3865-4615-A15C-0C49D42628F0}"/>
+                <a16:creationId xmlns:a16="http://schemas.microsoft.com/office/drawing/2014/main" id="{C0137E99-C45C-47E8-B1A3-5648FA4900C8}"/>
               </a:ext>
             </a:extLst>
           </p:cNvPr>
@@ -20283,7 +20138,7 @@
           <p:cNvPr id="10" name="">
             <a:extLst xmlns:a="http://schemas.openxmlformats.org/drawingml/2006/main">
               <a:ext uri="{FF2B5EF4-FFF2-40B4-BE49-F238E27FC236}">
-                <a16:creationId xmlns:a16="http://schemas.microsoft.com/office/drawing/2014/main" id="{AA636F26-1206-420F-BD7B-BA0A5A5B4E73}"/>
+                <a16:creationId xmlns:a16="http://schemas.microsoft.com/office/drawing/2014/main" id="{CCBFD234-F394-4083-85AE-2A0C531544DD}"/>
               </a:ext>
             </a:extLst>
           </p:cNvPr>
@@ -20316,7 +20171,7 @@
           <p:cNvPr id="11" name="">
             <a:extLst xmlns:a="http://schemas.openxmlformats.org/drawingml/2006/main">
               <a:ext uri="{FF2B5EF4-FFF2-40B4-BE49-F238E27FC236}">
-                <a16:creationId xmlns:a16="http://schemas.microsoft.com/office/drawing/2014/main" id="{0844A656-13D9-4599-B6CF-CC4F0EA08CB4}"/>
+                <a16:creationId xmlns:a16="http://schemas.microsoft.com/office/drawing/2014/main" id="{EF773E1F-03E8-4631-9B21-076B7B64E3DB}"/>
               </a:ext>
             </a:extLst>
           </p:cNvPr>
@@ -20351,7 +20206,7 @@
           <p:cNvPr id="12" name="">
             <a:extLst xmlns:a="http://schemas.openxmlformats.org/drawingml/2006/main">
               <a:ext uri="{FF2B5EF4-FFF2-40B4-BE49-F238E27FC236}">
-                <a16:creationId xmlns:a16="http://schemas.microsoft.com/office/drawing/2014/main" id="{99E240DA-84BB-41A7-9F68-A6F38E045BE0}"/>
+                <a16:creationId xmlns:a16="http://schemas.microsoft.com/office/drawing/2014/main" id="{61D882A6-4880-45F3-B8AE-C450FA7AEB4A}"/>
               </a:ext>
             </a:extLst>
           </p:cNvPr>
@@ -20415,7 +20270,7 @@
           <p:cNvPr id="13" name="">
             <a:extLst xmlns:a="http://schemas.openxmlformats.org/drawingml/2006/main">
               <a:ext uri="{FF2B5EF4-FFF2-40B4-BE49-F238E27FC236}">
-                <a16:creationId xmlns:a16="http://schemas.microsoft.com/office/drawing/2014/main" id="{5C6B9257-BE4C-4808-8817-4854290298C1}"/>
+                <a16:creationId xmlns:a16="http://schemas.microsoft.com/office/drawing/2014/main" id="{C6203B00-4C94-4849-8E01-CE31A79BF710}"/>
               </a:ext>
             </a:extLst>
           </p:cNvPr>
@@ -20461,7 +20316,7 @@
           <p:cNvPr id="14" name="">
             <a:extLst xmlns:a="http://schemas.openxmlformats.org/drawingml/2006/main">
               <a:ext uri="{FF2B5EF4-FFF2-40B4-BE49-F238E27FC236}">
-                <a16:creationId xmlns:a16="http://schemas.microsoft.com/office/drawing/2014/main" id="{EF8F9E5E-C1CD-4F0E-A1A1-26F299B41A66}"/>
+                <a16:creationId xmlns:a16="http://schemas.microsoft.com/office/drawing/2014/main" id="{A3BEC83B-37F1-42D6-B145-69A7DE8AF28F}"/>
               </a:ext>
             </a:extLst>
           </p:cNvPr>
@@ -20496,7 +20351,7 @@
           <p:cNvPr id="15" name="">
             <a:extLst xmlns:a="http://schemas.openxmlformats.org/drawingml/2006/main">
               <a:ext uri="{FF2B5EF4-FFF2-40B4-BE49-F238E27FC236}">
-                <a16:creationId xmlns:a16="http://schemas.microsoft.com/office/drawing/2014/main" id="{C4E79736-412A-413B-8B34-DEF3769B5B3E}"/>
+                <a16:creationId xmlns:a16="http://schemas.microsoft.com/office/drawing/2014/main" id="{2901BAF8-CBE4-4AE8-B6C2-E5C7D59CB024}"/>
               </a:ext>
             </a:extLst>
           </p:cNvPr>
@@ -20560,7 +20415,7 @@
           <p:cNvPr id="16" name="">
             <a:extLst xmlns:a="http://schemas.openxmlformats.org/drawingml/2006/main">
               <a:ext uri="{FF2B5EF4-FFF2-40B4-BE49-F238E27FC236}">
-                <a16:creationId xmlns:a16="http://schemas.microsoft.com/office/drawing/2014/main" id="{64158767-6FCD-4160-AD31-1538819D8BA3}"/>
+                <a16:creationId xmlns:a16="http://schemas.microsoft.com/office/drawing/2014/main" id="{863EBC34-D8B6-4FAF-BCA1-76029F5BBECB}"/>
               </a:ext>
             </a:extLst>
           </p:cNvPr>
@@ -20595,7 +20450,7 @@
           <p:cNvPr id="17" name="">
             <a:extLst xmlns:a="http://schemas.openxmlformats.org/drawingml/2006/main">
               <a:ext uri="{FF2B5EF4-FFF2-40B4-BE49-F238E27FC236}">
-                <a16:creationId xmlns:a16="http://schemas.microsoft.com/office/drawing/2014/main" id="{AAFDEEFB-095D-41DB-8FB6-187347B7DD30}"/>
+                <a16:creationId xmlns:a16="http://schemas.microsoft.com/office/drawing/2014/main" id="{F2F89A99-05B3-4E4F-AA00-EDFD67E92386}"/>
               </a:ext>
             </a:extLst>
           </p:cNvPr>
@@ -20659,7 +20514,7 @@
           <p:cNvPr id="18" name="">
             <a:extLst xmlns:a="http://schemas.openxmlformats.org/drawingml/2006/main">
               <a:ext uri="{FF2B5EF4-FFF2-40B4-BE49-F238E27FC236}">
-                <a16:creationId xmlns:a16="http://schemas.microsoft.com/office/drawing/2014/main" id="{F6866321-CB95-4933-A22A-87D30D9693A0}"/>
+                <a16:creationId xmlns:a16="http://schemas.microsoft.com/office/drawing/2014/main" id="{FA05D737-5911-49A3-B50D-9D1710C144A9}"/>
               </a:ext>
             </a:extLst>
           </p:cNvPr>
@@ -20694,7 +20549,7 @@
           <p:cNvPr id="19" name="">
             <a:extLst xmlns:a="http://schemas.openxmlformats.org/drawingml/2006/main">
               <a:ext uri="{FF2B5EF4-FFF2-40B4-BE49-F238E27FC236}">
-                <a16:creationId xmlns:a16="http://schemas.microsoft.com/office/drawing/2014/main" id="{BF27330B-0089-48B6-B9BC-45BFF3236B4F}"/>
+                <a16:creationId xmlns:a16="http://schemas.microsoft.com/office/drawing/2014/main" id="{B7C4BD20-0215-423C-AFD6-35B253CA6048}"/>
               </a:ext>
             </a:extLst>
           </p:cNvPr>
@@ -20758,7 +20613,7 @@
           <p:cNvPr id="20" name="">
             <a:extLst xmlns:a="http://schemas.openxmlformats.org/drawingml/2006/main">
               <a:ext uri="{FF2B5EF4-FFF2-40B4-BE49-F238E27FC236}">
-                <a16:creationId xmlns:a16="http://schemas.microsoft.com/office/drawing/2014/main" id="{817C5D26-1D0B-4534-8083-F8EFD6F51048}"/>
+                <a16:creationId xmlns:a16="http://schemas.microsoft.com/office/drawing/2014/main" id="{95FF5CBF-9299-4EA1-8A31-64983CD3F0E6}"/>
               </a:ext>
             </a:extLst>
           </p:cNvPr>
@@ -20793,7 +20648,7 @@
           <p:cNvPr id="21" name="">
             <a:extLst xmlns:a="http://schemas.openxmlformats.org/drawingml/2006/main">
               <a:ext uri="{FF2B5EF4-FFF2-40B4-BE49-F238E27FC236}">
-                <a16:creationId xmlns:a16="http://schemas.microsoft.com/office/drawing/2014/main" id="{80854102-EB54-4653-B931-2529EE11D3FE}"/>
+                <a16:creationId xmlns:a16="http://schemas.microsoft.com/office/drawing/2014/main" id="{FA592166-B780-4190-A018-6E9702243D62}"/>
               </a:ext>
             </a:extLst>
           </p:cNvPr>
@@ -20857,7 +20712,7 @@
           <p:cNvPr id="22" name="">
             <a:extLst xmlns:a="http://schemas.openxmlformats.org/drawingml/2006/main">
               <a:ext uri="{FF2B5EF4-FFF2-40B4-BE49-F238E27FC236}">
-                <a16:creationId xmlns:a16="http://schemas.microsoft.com/office/drawing/2014/main" id="{1FEA7DED-0692-4650-A1C0-C59854D234F9}"/>
+                <a16:creationId xmlns:a16="http://schemas.microsoft.com/office/drawing/2014/main" id="{3610CB53-4045-45E0-B2B9-2CD4DFCEE5C1}"/>
               </a:ext>
             </a:extLst>
           </p:cNvPr>
@@ -20917,7 +20772,7 @@
     </p:spTree>
     <p:extLst>
       <p:ext uri="{BB962C8B-B14F-4D97-AF65-F5344CB8AC3E}">
-        <p14:creationId xmlns:p14="http://schemas.microsoft.com/office/powerpoint/2010/main" val="1490439293"/>
+        <p14:creationId xmlns:p14="http://schemas.microsoft.com/office/powerpoint/2010/main" val="712336187"/>
       </p:ext>
     </p:extLst>
   </p:cSld>
@@ -20948,7 +20803,7 @@
           <p:cNvPr id="1" name="">
             <a:extLst xmlns:a="http://schemas.openxmlformats.org/drawingml/2006/main">
               <a:ext uri="{FF2B5EF4-FFF2-40B4-BE49-F238E27FC236}">
-                <a16:creationId xmlns:a16="http://schemas.microsoft.com/office/drawing/2014/main" id="{2DE96307-BCDB-4260-97AC-A67507F33A22}"/>
+                <a16:creationId xmlns:a16="http://schemas.microsoft.com/office/drawing/2014/main" id="{D39023C8-E446-46B0-B392-71A001C060ED}"/>
               </a:ext>
             </a:extLst>
           </p:cNvPr>
@@ -20983,7 +20838,7 @@
           <p:cNvPr id="2" name="">
             <a:extLst xmlns:a="http://schemas.openxmlformats.org/drawingml/2006/main">
               <a:ext uri="{FF2B5EF4-FFF2-40B4-BE49-F238E27FC236}">
-                <a16:creationId xmlns:a16="http://schemas.microsoft.com/office/drawing/2014/main" id="{87C28F50-9DA4-419F-B100-961CA792CFAF}"/>
+                <a16:creationId xmlns:a16="http://schemas.microsoft.com/office/drawing/2014/main" id="{D070CBEF-99DA-4EA6-9965-C7D052B016B1}"/>
               </a:ext>
             </a:extLst>
           </p:cNvPr>
@@ -21047,7 +20902,7 @@
           <p:cNvPr id="3" name="">
             <a:extLst xmlns:a="http://schemas.openxmlformats.org/drawingml/2006/main">
               <a:ext uri="{FF2B5EF4-FFF2-40B4-BE49-F238E27FC236}">
-                <a16:creationId xmlns:a16="http://schemas.microsoft.com/office/drawing/2014/main" id="{B295FE7A-A683-4D03-8E3E-B6D7BA8D0C89}"/>
+                <a16:creationId xmlns:a16="http://schemas.microsoft.com/office/drawing/2014/main" id="{234D9878-571F-4B4B-96CA-3FE2B63F39DC}"/>
               </a:ext>
             </a:extLst>
           </p:cNvPr>
@@ -21111,7 +20966,7 @@
           <p:cNvPr id="4" name="">
             <a:extLst xmlns:a="http://schemas.openxmlformats.org/drawingml/2006/main">
               <a:ext uri="{FF2B5EF4-FFF2-40B4-BE49-F238E27FC236}">
-                <a16:creationId xmlns:a16="http://schemas.microsoft.com/office/drawing/2014/main" id="{4AD84FC3-006F-4C54-BAAE-C92A7ADEF213}"/>
+                <a16:creationId xmlns:a16="http://schemas.microsoft.com/office/drawing/2014/main" id="{088B0882-629F-46B3-A0B8-E138F21D51E8}"/>
               </a:ext>
             </a:extLst>
           </p:cNvPr>
@@ -21175,7 +21030,7 @@
           <p:cNvPr id="5" name="">
             <a:extLst xmlns:a="http://schemas.openxmlformats.org/drawingml/2006/main">
               <a:ext uri="{FF2B5EF4-FFF2-40B4-BE49-F238E27FC236}">
-                <a16:creationId xmlns:a16="http://schemas.microsoft.com/office/drawing/2014/main" id="{98004CD3-548B-4713-9363-089429751F3A}"/>
+                <a16:creationId xmlns:a16="http://schemas.microsoft.com/office/drawing/2014/main" id="{F0379009-455D-47FB-9237-EB93A2763D73}"/>
               </a:ext>
             </a:extLst>
           </p:cNvPr>
@@ -21239,7 +21094,7 @@
           <p:cNvPr id="6" name="">
             <a:extLst xmlns:a="http://schemas.openxmlformats.org/drawingml/2006/main">
               <a:ext uri="{FF2B5EF4-FFF2-40B4-BE49-F238E27FC236}">
-                <a16:creationId xmlns:a16="http://schemas.microsoft.com/office/drawing/2014/main" id="{20060DCC-0462-4B11-8CCF-7E2D3D2690DA}"/>
+                <a16:creationId xmlns:a16="http://schemas.microsoft.com/office/drawing/2014/main" id="{A573C178-A0A2-4DDF-9A05-F481C278ABF0}"/>
               </a:ext>
             </a:extLst>
           </p:cNvPr>
@@ -21272,7 +21127,7 @@
           <p:cNvPr id="7" name="">
             <a:extLst xmlns:a="http://schemas.openxmlformats.org/drawingml/2006/main">
               <a:ext uri="{FF2B5EF4-FFF2-40B4-BE49-F238E27FC236}">
-                <a16:creationId xmlns:a16="http://schemas.microsoft.com/office/drawing/2014/main" id="{ABA6691C-FDF8-4D9F-AE21-DBC798C78327}"/>
+                <a16:creationId xmlns:a16="http://schemas.microsoft.com/office/drawing/2014/main" id="{F2FD5CA0-AF7A-4E0E-83D5-09B27FDD574A}"/>
               </a:ext>
             </a:extLst>
           </p:cNvPr>
@@ -21336,7 +21191,7 @@
           <p:cNvPr id="8" name="">
             <a:extLst xmlns:a="http://schemas.openxmlformats.org/drawingml/2006/main">
               <a:ext uri="{FF2B5EF4-FFF2-40B4-BE49-F238E27FC236}">
-                <a16:creationId xmlns:a16="http://schemas.microsoft.com/office/drawing/2014/main" id="{BA14098F-0D7F-4244-A375-7FD05236B3CA}"/>
+                <a16:creationId xmlns:a16="http://schemas.microsoft.com/office/drawing/2014/main" id="{5908A6A1-70D5-40D6-8E76-50A600814EF7}"/>
               </a:ext>
             </a:extLst>
           </p:cNvPr>
@@ -21400,7 +21255,7 @@
           <p:cNvPr id="9" name="">
             <a:extLst xmlns:a="http://schemas.openxmlformats.org/drawingml/2006/main">
               <a:ext uri="{FF2B5EF4-FFF2-40B4-BE49-F238E27FC236}">
-                <a16:creationId xmlns:a16="http://schemas.microsoft.com/office/drawing/2014/main" id="{48EE3405-FFD2-428D-80E3-D6EFE98D7FC6}"/>
+                <a16:creationId xmlns:a16="http://schemas.microsoft.com/office/drawing/2014/main" id="{CC89412A-F4D0-4653-B132-146BF852772C}"/>
               </a:ext>
             </a:extLst>
           </p:cNvPr>
@@ -21435,7 +21290,7 @@
           <p:cNvPr id="10" name="">
             <a:extLst xmlns:a="http://schemas.openxmlformats.org/drawingml/2006/main">
               <a:ext uri="{FF2B5EF4-FFF2-40B4-BE49-F238E27FC236}">
-                <a16:creationId xmlns:a16="http://schemas.microsoft.com/office/drawing/2014/main" id="{8D854C65-3F21-48A3-8CF5-4FC3465A10DE}"/>
+                <a16:creationId xmlns:a16="http://schemas.microsoft.com/office/drawing/2014/main" id="{72DF4B21-7A40-4D79-9B69-6BB09639739D}"/>
               </a:ext>
             </a:extLst>
           </p:cNvPr>
@@ -21468,7 +21323,7 @@
           <p:cNvPr id="11" name="">
             <a:extLst xmlns:a="http://schemas.openxmlformats.org/drawingml/2006/main">
               <a:ext uri="{FF2B5EF4-FFF2-40B4-BE49-F238E27FC236}">
-                <a16:creationId xmlns:a16="http://schemas.microsoft.com/office/drawing/2014/main" id="{EFA1BBFD-8CC6-42C6-AAEC-E8C9AAA7BE67}"/>
+                <a16:creationId xmlns:a16="http://schemas.microsoft.com/office/drawing/2014/main" id="{2ACAE392-3040-489B-B313-9A42ED640735}"/>
               </a:ext>
             </a:extLst>
           </p:cNvPr>
@@ -21532,7 +21387,7 @@
           <p:cNvPr id="12" name="">
             <a:extLst xmlns:a="http://schemas.openxmlformats.org/drawingml/2006/main">
               <a:ext uri="{FF2B5EF4-FFF2-40B4-BE49-F238E27FC236}">
-                <a16:creationId xmlns:a16="http://schemas.microsoft.com/office/drawing/2014/main" id="{D07CBD97-E464-4DED-AF61-002C8A07E27E}"/>
+                <a16:creationId xmlns:a16="http://schemas.microsoft.com/office/drawing/2014/main" id="{1C89F8B9-30EA-4F6C-A7EF-8161C1B3AD41}"/>
               </a:ext>
             </a:extLst>
           </p:cNvPr>
@@ -21596,7 +21451,7 @@
           <p:cNvPr id="13" name="">
             <a:extLst xmlns:a="http://schemas.openxmlformats.org/drawingml/2006/main">
               <a:ext uri="{FF2B5EF4-FFF2-40B4-BE49-F238E27FC236}">
-                <a16:creationId xmlns:a16="http://schemas.microsoft.com/office/drawing/2014/main" id="{825E9C9C-F466-4BD5-9F47-27463CAC965D}"/>
+                <a16:creationId xmlns:a16="http://schemas.microsoft.com/office/drawing/2014/main" id="{BA81AC11-5F91-40F5-B6D8-A0E34157F566}"/>
               </a:ext>
             </a:extLst>
           </p:cNvPr>
@@ -21631,7 +21486,7 @@
           <p:cNvPr id="14" name="">
             <a:extLst xmlns:a="http://schemas.openxmlformats.org/drawingml/2006/main">
               <a:ext uri="{FF2B5EF4-FFF2-40B4-BE49-F238E27FC236}">
-                <a16:creationId xmlns:a16="http://schemas.microsoft.com/office/drawing/2014/main" id="{92ECEB72-B989-4113-A8C8-567945741233}"/>
+                <a16:creationId xmlns:a16="http://schemas.microsoft.com/office/drawing/2014/main" id="{E228F488-87F3-4A23-B1E0-CA9FCC6C21A6}"/>
               </a:ext>
             </a:extLst>
           </p:cNvPr>
@@ -21664,7 +21519,7 @@
           <p:cNvPr id="15" name="">
             <a:extLst xmlns:a="http://schemas.openxmlformats.org/drawingml/2006/main">
               <a:ext uri="{FF2B5EF4-FFF2-40B4-BE49-F238E27FC236}">
-                <a16:creationId xmlns:a16="http://schemas.microsoft.com/office/drawing/2014/main" id="{5CDB607E-A66C-49DB-8A92-A71435F895A1}"/>
+                <a16:creationId xmlns:a16="http://schemas.microsoft.com/office/drawing/2014/main" id="{DB9185C6-7D86-437E-AD28-E430653C3739}"/>
               </a:ext>
             </a:extLst>
           </p:cNvPr>
@@ -21728,7 +21583,7 @@
           <p:cNvPr id="16" name="">
             <a:extLst xmlns:a="http://schemas.openxmlformats.org/drawingml/2006/main">
               <a:ext uri="{FF2B5EF4-FFF2-40B4-BE49-F238E27FC236}">
-                <a16:creationId xmlns:a16="http://schemas.microsoft.com/office/drawing/2014/main" id="{7433824F-6BD4-4DA2-B904-16534AA70EBC}"/>
+                <a16:creationId xmlns:a16="http://schemas.microsoft.com/office/drawing/2014/main" id="{4B1CE67F-B689-4CC8-978A-5D624F2A6A8E}"/>
               </a:ext>
             </a:extLst>
           </p:cNvPr>
@@ -21792,7 +21647,7 @@
           <p:cNvPr id="17" name="">
             <a:extLst xmlns:a="http://schemas.openxmlformats.org/drawingml/2006/main">
               <a:ext uri="{FF2B5EF4-FFF2-40B4-BE49-F238E27FC236}">
-                <a16:creationId xmlns:a16="http://schemas.microsoft.com/office/drawing/2014/main" id="{95F7689E-101E-40A7-AE85-3ED508751B0C}"/>
+                <a16:creationId xmlns:a16="http://schemas.microsoft.com/office/drawing/2014/main" id="{F6D10EC4-E839-4BB1-8A41-96819608CB6C}"/>
               </a:ext>
             </a:extLst>
           </p:cNvPr>
@@ -21827,7 +21682,7 @@
           <p:cNvPr id="18" name="">
             <a:extLst xmlns:a="http://schemas.openxmlformats.org/drawingml/2006/main">
               <a:ext uri="{FF2B5EF4-FFF2-40B4-BE49-F238E27FC236}">
-                <a16:creationId xmlns:a16="http://schemas.microsoft.com/office/drawing/2014/main" id="{EAE959B5-635A-4ADF-869C-404A4CCBBC20}"/>
+                <a16:creationId xmlns:a16="http://schemas.microsoft.com/office/drawing/2014/main" id="{A40A86E9-72DE-474F-B559-3431928B946A}"/>
               </a:ext>
             </a:extLst>
           </p:cNvPr>
@@ -21860,7 +21715,7 @@
           <p:cNvPr id="19" name="">
             <a:extLst xmlns:a="http://schemas.openxmlformats.org/drawingml/2006/main">
               <a:ext uri="{FF2B5EF4-FFF2-40B4-BE49-F238E27FC236}">
-                <a16:creationId xmlns:a16="http://schemas.microsoft.com/office/drawing/2014/main" id="{AFF62130-E7AD-4407-A18E-6577B06CBA90}"/>
+                <a16:creationId xmlns:a16="http://schemas.microsoft.com/office/drawing/2014/main" id="{CED1D6D4-7B4B-4135-94DD-C7A7B67FF3CC}"/>
               </a:ext>
             </a:extLst>
           </p:cNvPr>
@@ -21924,7 +21779,7 @@
           <p:cNvPr id="20" name="">
             <a:extLst xmlns:a="http://schemas.openxmlformats.org/drawingml/2006/main">
               <a:ext uri="{FF2B5EF4-FFF2-40B4-BE49-F238E27FC236}">
-                <a16:creationId xmlns:a16="http://schemas.microsoft.com/office/drawing/2014/main" id="{C560C003-9AE4-4478-8AA5-6F4D6D109FA9}"/>
+                <a16:creationId xmlns:a16="http://schemas.microsoft.com/office/drawing/2014/main" id="{7EACB7CD-B7EE-4689-A069-D992C0AA154A}"/>
               </a:ext>
             </a:extLst>
           </p:cNvPr>
@@ -21988,7 +21843,7 @@
           <p:cNvPr id="21" name="">
             <a:extLst xmlns:a="http://schemas.openxmlformats.org/drawingml/2006/main">
               <a:ext uri="{FF2B5EF4-FFF2-40B4-BE49-F238E27FC236}">
-                <a16:creationId xmlns:a16="http://schemas.microsoft.com/office/drawing/2014/main" id="{0A3C6148-1DC9-46A0-AB7F-1ECBAE3CB444}"/>
+                <a16:creationId xmlns:a16="http://schemas.microsoft.com/office/drawing/2014/main" id="{DC99DB5A-4D85-41B6-AB15-7B350E78F9FB}"/>
               </a:ext>
             </a:extLst>
           </p:cNvPr>
@@ -22023,7 +21878,7 @@
           <p:cNvPr id="22" name="">
             <a:extLst xmlns:a="http://schemas.openxmlformats.org/drawingml/2006/main">
               <a:ext uri="{FF2B5EF4-FFF2-40B4-BE49-F238E27FC236}">
-                <a16:creationId xmlns:a16="http://schemas.microsoft.com/office/drawing/2014/main" id="{578ED65B-AB02-426F-BA2C-C19C00E006D0}"/>
+                <a16:creationId xmlns:a16="http://schemas.microsoft.com/office/drawing/2014/main" id="{B259230A-3125-4162-8CF2-AC57F273AD05}"/>
               </a:ext>
             </a:extLst>
           </p:cNvPr>
@@ -22056,7 +21911,7 @@
           <p:cNvPr id="23" name="">
             <a:extLst xmlns:a="http://schemas.openxmlformats.org/drawingml/2006/main">
               <a:ext uri="{FF2B5EF4-FFF2-40B4-BE49-F238E27FC236}">
-                <a16:creationId xmlns:a16="http://schemas.microsoft.com/office/drawing/2014/main" id="{1B59C5AB-F5E7-4960-AE5F-AC1DDF81D869}"/>
+                <a16:creationId xmlns:a16="http://schemas.microsoft.com/office/drawing/2014/main" id="{A001A8C2-7751-490F-91CB-93F954757AE2}"/>
               </a:ext>
             </a:extLst>
           </p:cNvPr>
@@ -22120,7 +21975,7 @@
           <p:cNvPr id="24" name="">
             <a:extLst xmlns:a="http://schemas.openxmlformats.org/drawingml/2006/main">
               <a:ext uri="{FF2B5EF4-FFF2-40B4-BE49-F238E27FC236}">
-                <a16:creationId xmlns:a16="http://schemas.microsoft.com/office/drawing/2014/main" id="{C2F9AE7C-F901-4B69-B59A-D56441858D13}"/>
+                <a16:creationId xmlns:a16="http://schemas.microsoft.com/office/drawing/2014/main" id="{761D4F71-DE18-43CA-8AFB-E641F69001BF}"/>
               </a:ext>
             </a:extLst>
           </p:cNvPr>
@@ -22184,7 +22039,7 @@
           <p:cNvPr id="25" name="">
             <a:extLst xmlns:a="http://schemas.openxmlformats.org/drawingml/2006/main">
               <a:ext uri="{FF2B5EF4-FFF2-40B4-BE49-F238E27FC236}">
-                <a16:creationId xmlns:a16="http://schemas.microsoft.com/office/drawing/2014/main" id="{55E72CA3-920E-43D7-8615-7A7F429912DC}"/>
+                <a16:creationId xmlns:a16="http://schemas.microsoft.com/office/drawing/2014/main" id="{5FB95833-0FEA-4ABC-9170-54BC5D0CC977}"/>
               </a:ext>
             </a:extLst>
           </p:cNvPr>
@@ -22217,7 +22072,7 @@
           <p:cNvPr id="26" name="">
             <a:extLst xmlns:a="http://schemas.openxmlformats.org/drawingml/2006/main">
               <a:ext uri="{FF2B5EF4-FFF2-40B4-BE49-F238E27FC236}">
-                <a16:creationId xmlns:a16="http://schemas.microsoft.com/office/drawing/2014/main" id="{3E6AC004-E840-4371-8B48-0AFB2C6AFB02}"/>
+                <a16:creationId xmlns:a16="http://schemas.microsoft.com/office/drawing/2014/main" id="{68247CBA-4B60-4947-A6E4-063EE3A7C4A0}"/>
               </a:ext>
             </a:extLst>
           </p:cNvPr>
@@ -22252,7 +22107,7 @@
           <p:cNvPr id="27" name="">
             <a:extLst xmlns:a="http://schemas.openxmlformats.org/drawingml/2006/main">
               <a:ext uri="{FF2B5EF4-FFF2-40B4-BE49-F238E27FC236}">
-                <a16:creationId xmlns:a16="http://schemas.microsoft.com/office/drawing/2014/main" id="{4F041908-236C-4C59-BA1D-1AC8139A2D26}"/>
+                <a16:creationId xmlns:a16="http://schemas.microsoft.com/office/drawing/2014/main" id="{D2DA249A-8095-4DAB-830D-F873799F2641}"/>
               </a:ext>
             </a:extLst>
           </p:cNvPr>
@@ -22316,7 +22171,7 @@
           <p:cNvPr id="28" name="">
             <a:extLst xmlns:a="http://schemas.openxmlformats.org/drawingml/2006/main">
               <a:ext uri="{FF2B5EF4-FFF2-40B4-BE49-F238E27FC236}">
-                <a16:creationId xmlns:a16="http://schemas.microsoft.com/office/drawing/2014/main" id="{0586428B-71E1-4095-9C3D-8C0EABA202DB}"/>
+                <a16:creationId xmlns:a16="http://schemas.microsoft.com/office/drawing/2014/main" id="{A2D1BF37-E794-474F-98B3-4ED5E56DEADE}"/>
               </a:ext>
             </a:extLst>
           </p:cNvPr>
@@ -22380,7 +22235,7 @@
           <p:cNvPr id="29" name="">
             <a:extLst xmlns:a="http://schemas.openxmlformats.org/drawingml/2006/main">
               <a:ext uri="{FF2B5EF4-FFF2-40B4-BE49-F238E27FC236}">
-                <a16:creationId xmlns:a16="http://schemas.microsoft.com/office/drawing/2014/main" id="{812D32F6-161E-4D56-AE85-ED6E87538A46}"/>
+                <a16:creationId xmlns:a16="http://schemas.microsoft.com/office/drawing/2014/main" id="{2626B926-0FAB-4EEB-AB36-CAA2E3190EBB}"/>
               </a:ext>
             </a:extLst>
           </p:cNvPr>
@@ -22413,7 +22268,7 @@
           <p:cNvPr id="30" name="">
             <a:extLst xmlns:a="http://schemas.openxmlformats.org/drawingml/2006/main">
               <a:ext uri="{FF2B5EF4-FFF2-40B4-BE49-F238E27FC236}">
-                <a16:creationId xmlns:a16="http://schemas.microsoft.com/office/drawing/2014/main" id="{DD91532D-0A07-4F85-835E-9CA9BBB0D9F7}"/>
+                <a16:creationId xmlns:a16="http://schemas.microsoft.com/office/drawing/2014/main" id="{6D66ED90-C7BC-4771-AF9F-2C8CCD24B9F0}"/>
               </a:ext>
             </a:extLst>
           </p:cNvPr>
@@ -22448,7 +22303,7 @@
           <p:cNvPr id="31" name="">
             <a:extLst xmlns:a="http://schemas.openxmlformats.org/drawingml/2006/main">
               <a:ext uri="{FF2B5EF4-FFF2-40B4-BE49-F238E27FC236}">
-                <a16:creationId xmlns:a16="http://schemas.microsoft.com/office/drawing/2014/main" id="{FC72F0DB-B633-4E6B-A05D-140C9E8FB888}"/>
+                <a16:creationId xmlns:a16="http://schemas.microsoft.com/office/drawing/2014/main" id="{4A2630A5-3B0C-4598-8B66-BBE8B204F0F5}"/>
               </a:ext>
             </a:extLst>
           </p:cNvPr>
@@ -22512,7 +22367,7 @@
           <p:cNvPr id="32" name="">
             <a:extLst xmlns:a="http://schemas.openxmlformats.org/drawingml/2006/main">
               <a:ext uri="{FF2B5EF4-FFF2-40B4-BE49-F238E27FC236}">
-                <a16:creationId xmlns:a16="http://schemas.microsoft.com/office/drawing/2014/main" id="{0271A840-4CEB-4A01-9E94-7BFC4B1956C5}"/>
+                <a16:creationId xmlns:a16="http://schemas.microsoft.com/office/drawing/2014/main" id="{F9920072-4D95-4388-BA4D-138192AE018C}"/>
               </a:ext>
             </a:extLst>
           </p:cNvPr>
@@ -22576,7 +22431,7 @@
           <p:cNvPr id="33" name="">
             <a:extLst xmlns:a="http://schemas.openxmlformats.org/drawingml/2006/main">
               <a:ext uri="{FF2B5EF4-FFF2-40B4-BE49-F238E27FC236}">
-                <a16:creationId xmlns:a16="http://schemas.microsoft.com/office/drawing/2014/main" id="{8C165F84-5A76-4A8E-9425-19886551BB16}"/>
+                <a16:creationId xmlns:a16="http://schemas.microsoft.com/office/drawing/2014/main" id="{AF804FEB-EBE7-44B9-8919-F247C3CC68C9}"/>
               </a:ext>
             </a:extLst>
           </p:cNvPr>
@@ -22609,7 +22464,7 @@
           <p:cNvPr id="34" name="">
             <a:extLst xmlns:a="http://schemas.openxmlformats.org/drawingml/2006/main">
               <a:ext uri="{FF2B5EF4-FFF2-40B4-BE49-F238E27FC236}">
-                <a16:creationId xmlns:a16="http://schemas.microsoft.com/office/drawing/2014/main" id="{9CEA9729-D6DB-4F92-859F-F4D27B4A908A}"/>
+                <a16:creationId xmlns:a16="http://schemas.microsoft.com/office/drawing/2014/main" id="{E0CB02DA-9A71-4A44-996A-58AEBD01565D}"/>
               </a:ext>
             </a:extLst>
           </p:cNvPr>
@@ -22644,7 +22499,7 @@
           <p:cNvPr id="35" name="">
             <a:extLst xmlns:a="http://schemas.openxmlformats.org/drawingml/2006/main">
               <a:ext uri="{FF2B5EF4-FFF2-40B4-BE49-F238E27FC236}">
-                <a16:creationId xmlns:a16="http://schemas.microsoft.com/office/drawing/2014/main" id="{EC449ACB-D61B-4C6A-BBA4-C8446168E09B}"/>
+                <a16:creationId xmlns:a16="http://schemas.microsoft.com/office/drawing/2014/main" id="{A63EFAFB-6B30-4E12-9A4B-803D55017FC5}"/>
               </a:ext>
             </a:extLst>
           </p:cNvPr>
@@ -22708,7 +22563,7 @@
           <p:cNvPr id="36" name="">
             <a:extLst xmlns:a="http://schemas.openxmlformats.org/drawingml/2006/main">
               <a:ext uri="{FF2B5EF4-FFF2-40B4-BE49-F238E27FC236}">
-                <a16:creationId xmlns:a16="http://schemas.microsoft.com/office/drawing/2014/main" id="{0CCEB05F-62EC-47E5-9FC1-4EDA552DA149}"/>
+                <a16:creationId xmlns:a16="http://schemas.microsoft.com/office/drawing/2014/main" id="{D654CAB4-B8FC-4BDF-A1BF-C139040630FA}"/>
               </a:ext>
             </a:extLst>
           </p:cNvPr>
@@ -22770,7 +22625,7 @@
     </p:spTree>
     <p:extLst>
       <p:ext uri="{BB962C8B-B14F-4D97-AF65-F5344CB8AC3E}">
-        <p14:creationId xmlns:p14="http://schemas.microsoft.com/office/powerpoint/2010/main" val="390113100"/>
+        <p14:creationId xmlns:p14="http://schemas.microsoft.com/office/powerpoint/2010/main" val="584331891"/>
       </p:ext>
     </p:extLst>
   </p:cSld>
@@ -22801,7 +22656,7 @@
           <p:cNvPr id="1" name="">
             <a:extLst xmlns:a="http://schemas.openxmlformats.org/drawingml/2006/main">
               <a:ext uri="{FF2B5EF4-FFF2-40B4-BE49-F238E27FC236}">
-                <a16:creationId xmlns:a16="http://schemas.microsoft.com/office/drawing/2014/main" id="{D0139877-F88D-4AF2-8F25-ADC3454F52E7}"/>
+                <a16:creationId xmlns:a16="http://schemas.microsoft.com/office/drawing/2014/main" id="{974F1C93-4533-4141-ABA3-0BB4B35AFB28}"/>
               </a:ext>
             </a:extLst>
           </p:cNvPr>
@@ -22836,7 +22691,7 @@
           <p:cNvPr id="2" name="">
             <a:extLst xmlns:a="http://schemas.openxmlformats.org/drawingml/2006/main">
               <a:ext uri="{FF2B5EF4-FFF2-40B4-BE49-F238E27FC236}">
-                <a16:creationId xmlns:a16="http://schemas.microsoft.com/office/drawing/2014/main" id="{87142063-5CFC-47DB-BFBF-E0EC111C8B17}"/>
+                <a16:creationId xmlns:a16="http://schemas.microsoft.com/office/drawing/2014/main" id="{9C43E557-1123-4D6C-9ACF-0DF30500E530}"/>
               </a:ext>
             </a:extLst>
           </p:cNvPr>
@@ -22900,7 +22755,7 @@
           <p:cNvPr id="3" name="">
             <a:extLst xmlns:a="http://schemas.openxmlformats.org/drawingml/2006/main">
               <a:ext uri="{FF2B5EF4-FFF2-40B4-BE49-F238E27FC236}">
-                <a16:creationId xmlns:a16="http://schemas.microsoft.com/office/drawing/2014/main" id="{7BC2049F-125B-4918-AAE8-039474FDEBDE}"/>
+                <a16:creationId xmlns:a16="http://schemas.microsoft.com/office/drawing/2014/main" id="{456DFE97-72BA-4AC1-BD54-74CD2A2E4E8E}"/>
               </a:ext>
             </a:extLst>
           </p:cNvPr>
@@ -22964,7 +22819,7 @@
           <p:cNvPr id="4" name="">
             <a:extLst xmlns:a="http://schemas.openxmlformats.org/drawingml/2006/main">
               <a:ext uri="{FF2B5EF4-FFF2-40B4-BE49-F238E27FC236}">
-                <a16:creationId xmlns:a16="http://schemas.microsoft.com/office/drawing/2014/main" id="{B59D1C61-0C93-4F47-9CCD-4111AC4E3197}"/>
+                <a16:creationId xmlns:a16="http://schemas.microsoft.com/office/drawing/2014/main" id="{8AD58337-1C9B-4A66-869E-9FA93CF2BFCD}"/>
               </a:ext>
             </a:extLst>
           </p:cNvPr>
@@ -23028,7 +22883,7 @@
           <p:cNvPr id="5" name="">
             <a:extLst xmlns:a="http://schemas.openxmlformats.org/drawingml/2006/main">
               <a:ext uri="{FF2B5EF4-FFF2-40B4-BE49-F238E27FC236}">
-                <a16:creationId xmlns:a16="http://schemas.microsoft.com/office/drawing/2014/main" id="{45CFAA1B-CEF5-4A56-98C2-81D84AE55710}"/>
+                <a16:creationId xmlns:a16="http://schemas.microsoft.com/office/drawing/2014/main" id="{38801C9C-E022-445E-BC31-73F7895B7435}"/>
               </a:ext>
             </a:extLst>
           </p:cNvPr>
@@ -23092,7 +22947,7 @@
           <p:cNvPr id="6" name="">
             <a:extLst xmlns:a="http://schemas.openxmlformats.org/drawingml/2006/main">
               <a:ext uri="{FF2B5EF4-FFF2-40B4-BE49-F238E27FC236}">
-                <a16:creationId xmlns:a16="http://schemas.microsoft.com/office/drawing/2014/main" id="{06A5420D-EECF-4597-BAFD-DC325E4A5EB7}"/>
+                <a16:creationId xmlns:a16="http://schemas.microsoft.com/office/drawing/2014/main" id="{914A7830-B2CB-450A-9D38-B9B89B13BB9C}"/>
               </a:ext>
             </a:extLst>
           </p:cNvPr>
@@ -23125,7 +22980,7 @@
           <p:cNvPr id="7" name="">
             <a:extLst xmlns:a="http://schemas.openxmlformats.org/drawingml/2006/main">
               <a:ext uri="{FF2B5EF4-FFF2-40B4-BE49-F238E27FC236}">
-                <a16:creationId xmlns:a16="http://schemas.microsoft.com/office/drawing/2014/main" id="{CDF779E7-D238-4364-859A-0F8B852F26D0}"/>
+                <a16:creationId xmlns:a16="http://schemas.microsoft.com/office/drawing/2014/main" id="{0D962F80-0652-49D3-BB7A-99C32A7076B1}"/>
               </a:ext>
             </a:extLst>
           </p:cNvPr>
@@ -23160,7 +23015,7 @@
           <p:cNvPr id="8" name="">
             <a:extLst xmlns:a="http://schemas.openxmlformats.org/drawingml/2006/main">
               <a:ext uri="{FF2B5EF4-FFF2-40B4-BE49-F238E27FC236}">
-                <a16:creationId xmlns:a16="http://schemas.microsoft.com/office/drawing/2014/main" id="{38D436CE-396C-497B-8148-470494C7E5C6}"/>
+                <a16:creationId xmlns:a16="http://schemas.microsoft.com/office/drawing/2014/main" id="{BB14D0CC-9740-4E2A-BB45-ECA729EC6E98}"/>
               </a:ext>
             </a:extLst>
           </p:cNvPr>
@@ -23224,7 +23079,7 @@
           <p:cNvPr id="9" name="">
             <a:extLst xmlns:a="http://schemas.openxmlformats.org/drawingml/2006/main">
               <a:ext uri="{FF2B5EF4-FFF2-40B4-BE49-F238E27FC236}">
-                <a16:creationId xmlns:a16="http://schemas.microsoft.com/office/drawing/2014/main" id="{53D0C14C-AC8C-4946-8736-977201EF3207}"/>
+                <a16:creationId xmlns:a16="http://schemas.microsoft.com/office/drawing/2014/main" id="{2CBD8F62-D297-4D25-A54C-1987B3AA5080}"/>
               </a:ext>
             </a:extLst>
           </p:cNvPr>
@@ -23334,7 +23189,7 @@
           <p:cNvPr id="10" name="">
             <a:extLst xmlns:a="http://schemas.openxmlformats.org/drawingml/2006/main">
               <a:ext uri="{FF2B5EF4-FFF2-40B4-BE49-F238E27FC236}">
-                <a16:creationId xmlns:a16="http://schemas.microsoft.com/office/drawing/2014/main" id="{9B38219A-E6DE-4A96-898C-1664DF312065}"/>
+                <a16:creationId xmlns:a16="http://schemas.microsoft.com/office/drawing/2014/main" id="{49A7AD47-0E71-463A-BE39-6FF0A53401D3}"/>
               </a:ext>
             </a:extLst>
           </p:cNvPr>
@@ -23367,7 +23222,7 @@
           <p:cNvPr id="11" name="">
             <a:extLst xmlns:a="http://schemas.openxmlformats.org/drawingml/2006/main">
               <a:ext uri="{FF2B5EF4-FFF2-40B4-BE49-F238E27FC236}">
-                <a16:creationId xmlns:a16="http://schemas.microsoft.com/office/drawing/2014/main" id="{249EB44F-3306-428A-8CA1-94565D380088}"/>
+                <a16:creationId xmlns:a16="http://schemas.microsoft.com/office/drawing/2014/main" id="{34C1220B-627F-4D7A-A867-D4E5C47D3515}"/>
               </a:ext>
             </a:extLst>
           </p:cNvPr>
@@ -23402,7 +23257,7 @@
           <p:cNvPr id="12" name="">
             <a:extLst xmlns:a="http://schemas.openxmlformats.org/drawingml/2006/main">
               <a:ext uri="{FF2B5EF4-FFF2-40B4-BE49-F238E27FC236}">
-                <a16:creationId xmlns:a16="http://schemas.microsoft.com/office/drawing/2014/main" id="{5B55C754-B3CF-4903-8364-19BEC64AB176}"/>
+                <a16:creationId xmlns:a16="http://schemas.microsoft.com/office/drawing/2014/main" id="{538A338F-FCD1-487E-8B9E-D2A501A70EA6}"/>
               </a:ext>
             </a:extLst>
           </p:cNvPr>
@@ -23466,7 +23321,7 @@
           <p:cNvPr id="13" name="">
             <a:extLst xmlns:a="http://schemas.openxmlformats.org/drawingml/2006/main">
               <a:ext uri="{FF2B5EF4-FFF2-40B4-BE49-F238E27FC236}">
-                <a16:creationId xmlns:a16="http://schemas.microsoft.com/office/drawing/2014/main" id="{A8B67D20-347A-47E9-9485-9F521E8CF21E}"/>
+                <a16:creationId xmlns:a16="http://schemas.microsoft.com/office/drawing/2014/main" id="{42D3A5E8-03A6-47C5-987F-2C36E94638BF}"/>
               </a:ext>
             </a:extLst>
           </p:cNvPr>
@@ -23576,7 +23431,7 @@
           <p:cNvPr id="14" name="">
             <a:extLst xmlns:a="http://schemas.openxmlformats.org/drawingml/2006/main">
               <a:ext uri="{FF2B5EF4-FFF2-40B4-BE49-F238E27FC236}">
-                <a16:creationId xmlns:a16="http://schemas.microsoft.com/office/drawing/2014/main" id="{0C1E921B-8EF4-4A6E-AE11-EED5E89E1DA6}"/>
+                <a16:creationId xmlns:a16="http://schemas.microsoft.com/office/drawing/2014/main" id="{0B169C11-E7F3-428A-8B4D-52DE00BEFFB3}"/>
               </a:ext>
             </a:extLst>
           </p:cNvPr>
@@ -23609,7 +23464,7 @@
           <p:cNvPr id="15" name="">
             <a:extLst xmlns:a="http://schemas.openxmlformats.org/drawingml/2006/main">
               <a:ext uri="{FF2B5EF4-FFF2-40B4-BE49-F238E27FC236}">
-                <a16:creationId xmlns:a16="http://schemas.microsoft.com/office/drawing/2014/main" id="{451ADA70-234A-4B14-AE0B-C016B6EDDC9F}"/>
+                <a16:creationId xmlns:a16="http://schemas.microsoft.com/office/drawing/2014/main" id="{D46461DD-8353-4D66-9408-7589AB132A44}"/>
               </a:ext>
             </a:extLst>
           </p:cNvPr>
@@ -23644,7 +23499,7 @@
           <p:cNvPr id="16" name="">
             <a:extLst xmlns:a="http://schemas.openxmlformats.org/drawingml/2006/main">
               <a:ext uri="{FF2B5EF4-FFF2-40B4-BE49-F238E27FC236}">
-                <a16:creationId xmlns:a16="http://schemas.microsoft.com/office/drawing/2014/main" id="{096D0ECF-F808-436A-B711-B6426D148C8A}"/>
+                <a16:creationId xmlns:a16="http://schemas.microsoft.com/office/drawing/2014/main" id="{5924E7F5-02A8-440E-8E69-5B5429D82D46}"/>
               </a:ext>
             </a:extLst>
           </p:cNvPr>
@@ -23708,7 +23563,7 @@
           <p:cNvPr id="17" name="">
             <a:extLst xmlns:a="http://schemas.openxmlformats.org/drawingml/2006/main">
               <a:ext uri="{FF2B5EF4-FFF2-40B4-BE49-F238E27FC236}">
-                <a16:creationId xmlns:a16="http://schemas.microsoft.com/office/drawing/2014/main" id="{6CE33ECA-0A39-4201-915C-0FDA31EF904B}"/>
+                <a16:creationId xmlns:a16="http://schemas.microsoft.com/office/drawing/2014/main" id="{14C43151-B6C2-43B7-ABEB-5D05F4C4C527}"/>
               </a:ext>
             </a:extLst>
           </p:cNvPr>
@@ -23841,7 +23696,7 @@
           <p:cNvPr id="18" name="">
             <a:extLst xmlns:a="http://schemas.openxmlformats.org/drawingml/2006/main">
               <a:ext uri="{FF2B5EF4-FFF2-40B4-BE49-F238E27FC236}">
-                <a16:creationId xmlns:a16="http://schemas.microsoft.com/office/drawing/2014/main" id="{8D0AB76C-35F4-4115-AF68-B5DFC9659211}"/>
+                <a16:creationId xmlns:a16="http://schemas.microsoft.com/office/drawing/2014/main" id="{E235DF00-57C7-43B7-BC7D-41A633ADA61B}"/>
               </a:ext>
             </a:extLst>
           </p:cNvPr>
@@ -23874,7 +23729,7 @@
           <p:cNvPr id="19" name="">
             <a:extLst xmlns:a="http://schemas.openxmlformats.org/drawingml/2006/main">
               <a:ext uri="{FF2B5EF4-FFF2-40B4-BE49-F238E27FC236}">
-                <a16:creationId xmlns:a16="http://schemas.microsoft.com/office/drawing/2014/main" id="{E62A5933-F155-4A0D-971B-D2F62C2684C6}"/>
+                <a16:creationId xmlns:a16="http://schemas.microsoft.com/office/drawing/2014/main" id="{79E68136-72A0-4F5F-8EE2-5BA636E9EBD9}"/>
               </a:ext>
             </a:extLst>
           </p:cNvPr>
@@ -23909,7 +23764,7 @@
           <p:cNvPr id="20" name="">
             <a:extLst xmlns:a="http://schemas.openxmlformats.org/drawingml/2006/main">
               <a:ext uri="{FF2B5EF4-FFF2-40B4-BE49-F238E27FC236}">
-                <a16:creationId xmlns:a16="http://schemas.microsoft.com/office/drawing/2014/main" id="{681258F2-1BE8-45A6-A81E-6A685EE9F773}"/>
+                <a16:creationId xmlns:a16="http://schemas.microsoft.com/office/drawing/2014/main" id="{1DE5EC8D-07C8-4DC7-8372-8CB4E170F2D6}"/>
               </a:ext>
             </a:extLst>
           </p:cNvPr>
@@ -23973,7 +23828,7 @@
           <p:cNvPr id="21" name="">
             <a:extLst xmlns:a="http://schemas.openxmlformats.org/drawingml/2006/main">
               <a:ext uri="{FF2B5EF4-FFF2-40B4-BE49-F238E27FC236}">
-                <a16:creationId xmlns:a16="http://schemas.microsoft.com/office/drawing/2014/main" id="{B7A144F4-1C0A-45BF-9829-13791FDBB094}"/>
+                <a16:creationId xmlns:a16="http://schemas.microsoft.com/office/drawing/2014/main" id="{DA6D729D-B218-419F-BCE5-E1932AC07134}"/>
               </a:ext>
             </a:extLst>
           </p:cNvPr>
@@ -24060,7 +23915,7 @@
           <p:cNvPr id="22" name="">
             <a:extLst xmlns:a="http://schemas.openxmlformats.org/drawingml/2006/main">
               <a:ext uri="{FF2B5EF4-FFF2-40B4-BE49-F238E27FC236}">
-                <a16:creationId xmlns:a16="http://schemas.microsoft.com/office/drawing/2014/main" id="{F15E4077-6B97-447A-938F-B74C7FEC3271}"/>
+                <a16:creationId xmlns:a16="http://schemas.microsoft.com/office/drawing/2014/main" id="{5EBEB931-C902-4071-B737-6075824FE651}"/>
               </a:ext>
             </a:extLst>
           </p:cNvPr>
@@ -24093,7 +23948,7 @@
           <p:cNvPr id="23" name="">
             <a:extLst xmlns:a="http://schemas.openxmlformats.org/drawingml/2006/main">
               <a:ext uri="{FF2B5EF4-FFF2-40B4-BE49-F238E27FC236}">
-                <a16:creationId xmlns:a16="http://schemas.microsoft.com/office/drawing/2014/main" id="{F8869DFD-2D1B-4180-8BB8-4C8E95667596}"/>
+                <a16:creationId xmlns:a16="http://schemas.microsoft.com/office/drawing/2014/main" id="{B2BDCFA6-0ADC-4282-A690-9F598E4C38B3}"/>
               </a:ext>
             </a:extLst>
           </p:cNvPr>
@@ -24128,7 +23983,7 @@
           <p:cNvPr id="24" name="">
             <a:extLst xmlns:a="http://schemas.openxmlformats.org/drawingml/2006/main">
               <a:ext uri="{FF2B5EF4-FFF2-40B4-BE49-F238E27FC236}">
-                <a16:creationId xmlns:a16="http://schemas.microsoft.com/office/drawing/2014/main" id="{3004C8E7-6C65-45AE-9907-A3FB1A4C993D}"/>
+                <a16:creationId xmlns:a16="http://schemas.microsoft.com/office/drawing/2014/main" id="{DFA5F278-8C9F-436B-B78E-A511DD490033}"/>
               </a:ext>
             </a:extLst>
           </p:cNvPr>
@@ -24192,7 +24047,7 @@
           <p:cNvPr id="25" name="">
             <a:extLst xmlns:a="http://schemas.openxmlformats.org/drawingml/2006/main">
               <a:ext uri="{FF2B5EF4-FFF2-40B4-BE49-F238E27FC236}">
-                <a16:creationId xmlns:a16="http://schemas.microsoft.com/office/drawing/2014/main" id="{AF2DF9BA-A233-4779-80A8-01680C659F2E}"/>
+                <a16:creationId xmlns:a16="http://schemas.microsoft.com/office/drawing/2014/main" id="{1DBF977F-33B1-4390-8A68-1715ABA5468C}"/>
               </a:ext>
             </a:extLst>
           </p:cNvPr>
@@ -24254,7 +24109,7 @@
     </p:spTree>
     <p:extLst>
       <p:ext uri="{BB962C8B-B14F-4D97-AF65-F5344CB8AC3E}">
-        <p14:creationId xmlns:p14="http://schemas.microsoft.com/office/powerpoint/2010/main" val="1781323338"/>
+        <p14:creationId xmlns:p14="http://schemas.microsoft.com/office/powerpoint/2010/main" val="124695839"/>
       </p:ext>
     </p:extLst>
   </p:cSld>
@@ -24285,7 +24140,7 @@
           <p:cNvPr id="1" name="">
             <a:extLst xmlns:a="http://schemas.openxmlformats.org/drawingml/2006/main">
               <a:ext uri="{FF2B5EF4-FFF2-40B4-BE49-F238E27FC236}">
-                <a16:creationId xmlns:a16="http://schemas.microsoft.com/office/drawing/2014/main" id="{D45C1574-9763-4CC9-A92B-85B94E66711C}"/>
+                <a16:creationId xmlns:a16="http://schemas.microsoft.com/office/drawing/2014/main" id="{2732C341-D8A1-4AB0-91C4-6D59BBB6DE93}"/>
               </a:ext>
             </a:extLst>
           </p:cNvPr>
@@ -24320,7 +24175,7 @@
           <p:cNvPr id="2" name="">
             <a:extLst xmlns:a="http://schemas.openxmlformats.org/drawingml/2006/main">
               <a:ext uri="{FF2B5EF4-FFF2-40B4-BE49-F238E27FC236}">
-                <a16:creationId xmlns:a16="http://schemas.microsoft.com/office/drawing/2014/main" id="{F5DACD6A-1DC7-44C8-9F34-35F6ED6126E5}"/>
+                <a16:creationId xmlns:a16="http://schemas.microsoft.com/office/drawing/2014/main" id="{7AE27CAF-6B80-48AE-8B95-BAE69EE0A1E9}"/>
               </a:ext>
             </a:extLst>
           </p:cNvPr>
@@ -24384,7 +24239,7 @@
           <p:cNvPr id="3" name="">
             <a:extLst xmlns:a="http://schemas.openxmlformats.org/drawingml/2006/main">
               <a:ext uri="{FF2B5EF4-FFF2-40B4-BE49-F238E27FC236}">
-                <a16:creationId xmlns:a16="http://schemas.microsoft.com/office/drawing/2014/main" id="{8D559C09-4EAF-4549-8309-6EBF83400C33}"/>
+                <a16:creationId xmlns:a16="http://schemas.microsoft.com/office/drawing/2014/main" id="{E0E2BFF7-9A6B-4FF1-A59B-1AE4C1E0D6B5}"/>
               </a:ext>
             </a:extLst>
           </p:cNvPr>
@@ -24448,7 +24303,7 @@
           <p:cNvPr id="4" name="">
             <a:extLst xmlns:a="http://schemas.openxmlformats.org/drawingml/2006/main">
               <a:ext uri="{FF2B5EF4-FFF2-40B4-BE49-F238E27FC236}">
-                <a16:creationId xmlns:a16="http://schemas.microsoft.com/office/drawing/2014/main" id="{47C4E8FB-8F3B-49F0-998D-05D0933AB356}"/>
+                <a16:creationId xmlns:a16="http://schemas.microsoft.com/office/drawing/2014/main" id="{69C54BD7-007E-418C-AEF5-E3B378A78DFA}"/>
               </a:ext>
             </a:extLst>
           </p:cNvPr>
@@ -24512,7 +24367,7 @@
           <p:cNvPr id="5" name="">
             <a:extLst xmlns:a="http://schemas.openxmlformats.org/drawingml/2006/main">
               <a:ext uri="{FF2B5EF4-FFF2-40B4-BE49-F238E27FC236}">
-                <a16:creationId xmlns:a16="http://schemas.microsoft.com/office/drawing/2014/main" id="{23EEE3CD-DCDF-4D96-A55E-0DD18FA2F8E7}"/>
+                <a16:creationId xmlns:a16="http://schemas.microsoft.com/office/drawing/2014/main" id="{3ED4EE35-02AD-4946-9B93-AA7516F5EA0E}"/>
               </a:ext>
             </a:extLst>
           </p:cNvPr>
@@ -24576,7 +24431,7 @@
           <p:cNvPr id="6" name="">
             <a:extLst xmlns:a="http://schemas.openxmlformats.org/drawingml/2006/main">
               <a:ext uri="{FF2B5EF4-FFF2-40B4-BE49-F238E27FC236}">
-                <a16:creationId xmlns:a16="http://schemas.microsoft.com/office/drawing/2014/main" id="{6D7C4CDD-74AB-45CA-982A-2AAEC8FAB5EC}"/>
+                <a16:creationId xmlns:a16="http://schemas.microsoft.com/office/drawing/2014/main" id="{D7BBDCA2-F350-4FD4-9CD6-B33F3D7E92AC}"/>
               </a:ext>
             </a:extLst>
           </p:cNvPr>
@@ -24609,7 +24464,7 @@
           <p:cNvPr id="7" name="">
             <a:extLst xmlns:a="http://schemas.openxmlformats.org/drawingml/2006/main">
               <a:ext uri="{FF2B5EF4-FFF2-40B4-BE49-F238E27FC236}">
-                <a16:creationId xmlns:a16="http://schemas.microsoft.com/office/drawing/2014/main" id="{60AFAF90-A7DA-41AE-BD98-F9CBF12E3697}"/>
+                <a16:creationId xmlns:a16="http://schemas.microsoft.com/office/drawing/2014/main" id="{61778F10-78B0-4986-AB92-0A5EF23D3E47}"/>
               </a:ext>
             </a:extLst>
           </p:cNvPr>
@@ -24644,7 +24499,7 @@
           <p:cNvPr id="8" name="">
             <a:extLst xmlns:a="http://schemas.openxmlformats.org/drawingml/2006/main">
               <a:ext uri="{FF2B5EF4-FFF2-40B4-BE49-F238E27FC236}">
-                <a16:creationId xmlns:a16="http://schemas.microsoft.com/office/drawing/2014/main" id="{8A31BA01-EC92-4449-ADA4-8C7F324EC4CF}"/>
+                <a16:creationId xmlns:a16="http://schemas.microsoft.com/office/drawing/2014/main" id="{075D0556-38CE-4A9B-A2FF-3CC7B1435EDF}"/>
               </a:ext>
             </a:extLst>
           </p:cNvPr>
@@ -24708,7 +24563,7 @@
           <p:cNvPr id="9" name="">
             <a:extLst xmlns:a="http://schemas.openxmlformats.org/drawingml/2006/main">
               <a:ext uri="{FF2B5EF4-FFF2-40B4-BE49-F238E27FC236}">
-                <a16:creationId xmlns:a16="http://schemas.microsoft.com/office/drawing/2014/main" id="{2901B194-B2F0-4E66-A43C-E31D41550574}"/>
+                <a16:creationId xmlns:a16="http://schemas.microsoft.com/office/drawing/2014/main" id="{6200AFCD-C056-46C0-95D3-68B045AF1896}"/>
               </a:ext>
             </a:extLst>
           </p:cNvPr>
@@ -24772,7 +24627,7 @@
           <p:cNvPr id="10" name="">
             <a:extLst xmlns:a="http://schemas.openxmlformats.org/drawingml/2006/main">
               <a:ext uri="{FF2B5EF4-FFF2-40B4-BE49-F238E27FC236}">
-                <a16:creationId xmlns:a16="http://schemas.microsoft.com/office/drawing/2014/main" id="{8337BF57-FAD3-42E7-AC78-6F81BB9D8473}"/>
+                <a16:creationId xmlns:a16="http://schemas.microsoft.com/office/drawing/2014/main" id="{594188F4-D977-406B-89AD-CF0258F6B382}"/>
               </a:ext>
             </a:extLst>
           </p:cNvPr>
@@ -24805,7 +24660,7 @@
           <p:cNvPr id="11" name="">
             <a:extLst xmlns:a="http://schemas.openxmlformats.org/drawingml/2006/main">
               <a:ext uri="{FF2B5EF4-FFF2-40B4-BE49-F238E27FC236}">
-                <a16:creationId xmlns:a16="http://schemas.microsoft.com/office/drawing/2014/main" id="{D4A58222-DE04-4CFD-A2CE-655ABA885197}"/>
+                <a16:creationId xmlns:a16="http://schemas.microsoft.com/office/drawing/2014/main" id="{8F08E15A-1C56-4AA7-A5B5-C37A901426D2}"/>
               </a:ext>
             </a:extLst>
           </p:cNvPr>
@@ -24840,7 +24695,7 @@
           <p:cNvPr id="12" name="">
             <a:extLst xmlns:a="http://schemas.openxmlformats.org/drawingml/2006/main">
               <a:ext uri="{FF2B5EF4-FFF2-40B4-BE49-F238E27FC236}">
-                <a16:creationId xmlns:a16="http://schemas.microsoft.com/office/drawing/2014/main" id="{3B809BC1-E66A-44CD-B698-5941634013B1}"/>
+                <a16:creationId xmlns:a16="http://schemas.microsoft.com/office/drawing/2014/main" id="{F5432741-58F1-4B27-B082-6D1E85F5B229}"/>
               </a:ext>
             </a:extLst>
           </p:cNvPr>
@@ -24904,7 +24759,7 @@
           <p:cNvPr id="13" name="">
             <a:extLst xmlns:a="http://schemas.openxmlformats.org/drawingml/2006/main">
               <a:ext uri="{FF2B5EF4-FFF2-40B4-BE49-F238E27FC236}">
-                <a16:creationId xmlns:a16="http://schemas.microsoft.com/office/drawing/2014/main" id="{E3BA82AB-0E23-4D69-B761-51A210C206FB}"/>
+                <a16:creationId xmlns:a16="http://schemas.microsoft.com/office/drawing/2014/main" id="{4BF3B84A-19CF-492B-BC10-4127850E67F6}"/>
               </a:ext>
             </a:extLst>
           </p:cNvPr>
@@ -24968,7 +24823,7 @@
           <p:cNvPr id="14" name="">
             <a:extLst xmlns:a="http://schemas.openxmlformats.org/drawingml/2006/main">
               <a:ext uri="{FF2B5EF4-FFF2-40B4-BE49-F238E27FC236}">
-                <a16:creationId xmlns:a16="http://schemas.microsoft.com/office/drawing/2014/main" id="{E51A0C87-DFCD-447A-ADAE-788A718F6A10}"/>
+                <a16:creationId xmlns:a16="http://schemas.microsoft.com/office/drawing/2014/main" id="{4BCAD155-AB22-4944-869C-D544E177402A}"/>
               </a:ext>
             </a:extLst>
           </p:cNvPr>
@@ -25001,7 +24856,7 @@
           <p:cNvPr id="15" name="">
             <a:extLst xmlns:a="http://schemas.openxmlformats.org/drawingml/2006/main">
               <a:ext uri="{FF2B5EF4-FFF2-40B4-BE49-F238E27FC236}">
-                <a16:creationId xmlns:a16="http://schemas.microsoft.com/office/drawing/2014/main" id="{CE1B8C5E-04D9-4BED-B136-CADB30305D9C}"/>
+                <a16:creationId xmlns:a16="http://schemas.microsoft.com/office/drawing/2014/main" id="{C0375157-49DA-4A11-939A-CC12A3D23139}"/>
               </a:ext>
             </a:extLst>
           </p:cNvPr>
@@ -25036,7 +24891,7 @@
           <p:cNvPr id="16" name="">
             <a:extLst xmlns:a="http://schemas.openxmlformats.org/drawingml/2006/main">
               <a:ext uri="{FF2B5EF4-FFF2-40B4-BE49-F238E27FC236}">
-                <a16:creationId xmlns:a16="http://schemas.microsoft.com/office/drawing/2014/main" id="{D8CD7E26-C76A-4ED9-A37E-1FE8DF4DAF35}"/>
+                <a16:creationId xmlns:a16="http://schemas.microsoft.com/office/drawing/2014/main" id="{C12D5898-B7E3-4C72-BD44-D79233D4F008}"/>
               </a:ext>
             </a:extLst>
           </p:cNvPr>
@@ -25100,7 +24955,7 @@
           <p:cNvPr id="17" name="">
             <a:extLst xmlns:a="http://schemas.openxmlformats.org/drawingml/2006/main">
               <a:ext uri="{FF2B5EF4-FFF2-40B4-BE49-F238E27FC236}">
-                <a16:creationId xmlns:a16="http://schemas.microsoft.com/office/drawing/2014/main" id="{B66EB2CE-E67A-4176-AB2B-13C1BE99B0E5}"/>
+                <a16:creationId xmlns:a16="http://schemas.microsoft.com/office/drawing/2014/main" id="{279123A6-A9B7-4CB7-A249-78BC118E8733}"/>
               </a:ext>
             </a:extLst>
           </p:cNvPr>
@@ -25164,7 +25019,7 @@
           <p:cNvPr id="18" name="">
             <a:extLst xmlns:a="http://schemas.openxmlformats.org/drawingml/2006/main">
               <a:ext uri="{FF2B5EF4-FFF2-40B4-BE49-F238E27FC236}">
-                <a16:creationId xmlns:a16="http://schemas.microsoft.com/office/drawing/2014/main" id="{EE7049AE-7FB2-4A95-B0BE-998B9B6C4285}"/>
+                <a16:creationId xmlns:a16="http://schemas.microsoft.com/office/drawing/2014/main" id="{1CCC1C68-8FC8-46E0-9F82-136A2D71CBF6}"/>
               </a:ext>
             </a:extLst>
           </p:cNvPr>
@@ -25199,7 +25054,7 @@
           <p:cNvPr id="19" name="">
             <a:extLst xmlns:a="http://schemas.openxmlformats.org/drawingml/2006/main">
               <a:ext uri="{FF2B5EF4-FFF2-40B4-BE49-F238E27FC236}">
-                <a16:creationId xmlns:a16="http://schemas.microsoft.com/office/drawing/2014/main" id="{125BE1C7-BF45-4580-8CC6-6AD131E1BC51}"/>
+                <a16:creationId xmlns:a16="http://schemas.microsoft.com/office/drawing/2014/main" id="{B3DCA712-2617-4B30-BAC1-0D8621DB40D5}"/>
               </a:ext>
             </a:extLst>
           </p:cNvPr>
@@ -25263,7 +25118,7 @@
           <p:cNvPr id="20" name="">
             <a:extLst xmlns:a="http://schemas.openxmlformats.org/drawingml/2006/main">
               <a:ext uri="{FF2B5EF4-FFF2-40B4-BE49-F238E27FC236}">
-                <a16:creationId xmlns:a16="http://schemas.microsoft.com/office/drawing/2014/main" id="{ECC2089F-DF82-4C6A-A1CA-0A652B349EE4}"/>
+                <a16:creationId xmlns:a16="http://schemas.microsoft.com/office/drawing/2014/main" id="{6598A77F-09E9-4C2E-96BB-F8EC62F43972}"/>
               </a:ext>
             </a:extLst>
           </p:cNvPr>
@@ -25298,7 +25153,7 @@
           <p:cNvPr id="21" name="">
             <a:extLst xmlns:a="http://schemas.openxmlformats.org/drawingml/2006/main">
               <a:ext uri="{FF2B5EF4-FFF2-40B4-BE49-F238E27FC236}">
-                <a16:creationId xmlns:a16="http://schemas.microsoft.com/office/drawing/2014/main" id="{19B691D3-7957-499E-B251-F6FEBD188A3E}"/>
+                <a16:creationId xmlns:a16="http://schemas.microsoft.com/office/drawing/2014/main" id="{5C8E897B-97D5-4B13-8A59-DB5010F3C168}"/>
               </a:ext>
             </a:extLst>
           </p:cNvPr>
@@ -25360,7 +25215,7 @@
     </p:spTree>
     <p:extLst>
       <p:ext uri="{BB962C8B-B14F-4D97-AF65-F5344CB8AC3E}">
-        <p14:creationId xmlns:p14="http://schemas.microsoft.com/office/powerpoint/2010/main" val="1914962973"/>
+        <p14:creationId xmlns:p14="http://schemas.microsoft.com/office/powerpoint/2010/main" val="38416975"/>
       </p:ext>
     </p:extLst>
   </p:cSld>
@@ -25391,7 +25246,7 @@
           <p:cNvPr id="1" name="">
             <a:extLst xmlns:a="http://schemas.openxmlformats.org/drawingml/2006/main">
               <a:ext uri="{FF2B5EF4-FFF2-40B4-BE49-F238E27FC236}">
-                <a16:creationId xmlns:a16="http://schemas.microsoft.com/office/drawing/2014/main" id="{33E7E2A6-BB58-479B-BAE5-23C0C9FB8D3E}"/>
+                <a16:creationId xmlns:a16="http://schemas.microsoft.com/office/drawing/2014/main" id="{DE96ABEF-A8DF-4226-8ABF-FF8C5E7FC078}"/>
               </a:ext>
             </a:extLst>
           </p:cNvPr>
@@ -25426,7 +25281,7 @@
           <p:cNvPr id="2" name="">
             <a:extLst xmlns:a="http://schemas.openxmlformats.org/drawingml/2006/main">
               <a:ext uri="{FF2B5EF4-FFF2-40B4-BE49-F238E27FC236}">
-                <a16:creationId xmlns:a16="http://schemas.microsoft.com/office/drawing/2014/main" id="{9BD4DE04-EB4D-4556-A7D7-841C5BFE3229}"/>
+                <a16:creationId xmlns:a16="http://schemas.microsoft.com/office/drawing/2014/main" id="{5075FFB3-9912-45C7-B001-FF8706C4B197}"/>
               </a:ext>
             </a:extLst>
           </p:cNvPr>
@@ -25490,7 +25345,7 @@
           <p:cNvPr id="3" name="">
             <a:extLst xmlns:a="http://schemas.openxmlformats.org/drawingml/2006/main">
               <a:ext uri="{FF2B5EF4-FFF2-40B4-BE49-F238E27FC236}">
-                <a16:creationId xmlns:a16="http://schemas.microsoft.com/office/drawing/2014/main" id="{AB72CBEC-B408-4907-B76C-7D1E2E0C46E4}"/>
+                <a16:creationId xmlns:a16="http://schemas.microsoft.com/office/drawing/2014/main" id="{731562C4-7BC0-47EB-BFF3-3AAF6C52A54F}"/>
               </a:ext>
             </a:extLst>
           </p:cNvPr>
@@ -25554,7 +25409,7 @@
           <p:cNvPr id="4" name="">
             <a:extLst xmlns:a="http://schemas.openxmlformats.org/drawingml/2006/main">
               <a:ext uri="{FF2B5EF4-FFF2-40B4-BE49-F238E27FC236}">
-                <a16:creationId xmlns:a16="http://schemas.microsoft.com/office/drawing/2014/main" id="{8BA7BBA6-B30F-4735-9B79-D117BA671355}"/>
+                <a16:creationId xmlns:a16="http://schemas.microsoft.com/office/drawing/2014/main" id="{1DF9A267-F29F-430D-9164-64C03410487E}"/>
               </a:ext>
             </a:extLst>
           </p:cNvPr>
@@ -25618,7 +25473,7 @@
           <p:cNvPr id="5" name="">
             <a:extLst xmlns:a="http://schemas.openxmlformats.org/drawingml/2006/main">
               <a:ext uri="{FF2B5EF4-FFF2-40B4-BE49-F238E27FC236}">
-                <a16:creationId xmlns:a16="http://schemas.microsoft.com/office/drawing/2014/main" id="{8B13498A-0403-479B-A1A7-6B30B873CA92}"/>
+                <a16:creationId xmlns:a16="http://schemas.microsoft.com/office/drawing/2014/main" id="{70808EA9-D950-4627-BF22-DAC86EFE83E6}"/>
               </a:ext>
             </a:extLst>
           </p:cNvPr>
@@ -25682,7 +25537,7 @@
           <p:cNvPr id="6" name="">
             <a:extLst xmlns:a="http://schemas.openxmlformats.org/drawingml/2006/main">
               <a:ext uri="{FF2B5EF4-FFF2-40B4-BE49-F238E27FC236}">
-                <a16:creationId xmlns:a16="http://schemas.microsoft.com/office/drawing/2014/main" id="{CBCCA103-5029-42E4-9941-BE30860AF510}"/>
+                <a16:creationId xmlns:a16="http://schemas.microsoft.com/office/drawing/2014/main" id="{C83D6679-7457-4ABD-9036-C0400C77B3E1}"/>
               </a:ext>
             </a:extLst>
           </p:cNvPr>
@@ -25715,7 +25570,7 @@
           <p:cNvPr id="7" name="">
             <a:extLst xmlns:a="http://schemas.openxmlformats.org/drawingml/2006/main">
               <a:ext uri="{FF2B5EF4-FFF2-40B4-BE49-F238E27FC236}">
-                <a16:creationId xmlns:a16="http://schemas.microsoft.com/office/drawing/2014/main" id="{D34A64F4-6F32-4F1E-B34D-6A169357BE0F}"/>
+                <a16:creationId xmlns:a16="http://schemas.microsoft.com/office/drawing/2014/main" id="{5AB5161A-F358-4764-BFBC-DFEFC20D6276}"/>
               </a:ext>
             </a:extLst>
           </p:cNvPr>
@@ -25750,7 +25605,7 @@
           <p:cNvPr id="8" name="">
             <a:extLst xmlns:a="http://schemas.openxmlformats.org/drawingml/2006/main">
               <a:ext uri="{FF2B5EF4-FFF2-40B4-BE49-F238E27FC236}">
-                <a16:creationId xmlns:a16="http://schemas.microsoft.com/office/drawing/2014/main" id="{83BAED9A-69CB-4192-9E0C-6793F6D6F432}"/>
+                <a16:creationId xmlns:a16="http://schemas.microsoft.com/office/drawing/2014/main" id="{518F05BD-6E35-4470-9D51-444684C77214}"/>
               </a:ext>
             </a:extLst>
           </p:cNvPr>
@@ -25814,7 +25669,7 @@
           <p:cNvPr id="9" name="">
             <a:extLst xmlns:a="http://schemas.openxmlformats.org/drawingml/2006/main">
               <a:ext uri="{FF2B5EF4-FFF2-40B4-BE49-F238E27FC236}">
-                <a16:creationId xmlns:a16="http://schemas.microsoft.com/office/drawing/2014/main" id="{293BEA13-C40B-4B9A-B35C-E5007CE902C1}"/>
+                <a16:creationId xmlns:a16="http://schemas.microsoft.com/office/drawing/2014/main" id="{07BC10FE-2D90-4EFF-8795-30B12404152B}"/>
               </a:ext>
             </a:extLst>
           </p:cNvPr>
@@ -25860,7 +25715,7 @@
           <p:cNvPr id="10" name="">
             <a:extLst xmlns:a="http://schemas.openxmlformats.org/drawingml/2006/main">
               <a:ext uri="{FF2B5EF4-FFF2-40B4-BE49-F238E27FC236}">
-                <a16:creationId xmlns:a16="http://schemas.microsoft.com/office/drawing/2014/main" id="{C6DDD022-CB19-43F9-9760-F64EDE391E44}"/>
+                <a16:creationId xmlns:a16="http://schemas.microsoft.com/office/drawing/2014/main" id="{28B4F6B3-FA1B-4CD6-8C08-397E84E4DBAC}"/>
               </a:ext>
             </a:extLst>
           </p:cNvPr>
@@ -25893,7 +25748,7 @@
           <p:cNvPr id="11" name="">
             <a:extLst xmlns:a="http://schemas.openxmlformats.org/drawingml/2006/main">
               <a:ext uri="{FF2B5EF4-FFF2-40B4-BE49-F238E27FC236}">
-                <a16:creationId xmlns:a16="http://schemas.microsoft.com/office/drawing/2014/main" id="{7232C1F4-E85E-409B-BC93-441296EBF418}"/>
+                <a16:creationId xmlns:a16="http://schemas.microsoft.com/office/drawing/2014/main" id="{190D1C0E-DEF0-4889-B30E-0312A1AFAE39}"/>
               </a:ext>
             </a:extLst>
           </p:cNvPr>
@@ -25928,7 +25783,7 @@
           <p:cNvPr id="12" name="">
             <a:extLst xmlns:a="http://schemas.openxmlformats.org/drawingml/2006/main">
               <a:ext uri="{FF2B5EF4-FFF2-40B4-BE49-F238E27FC236}">
-                <a16:creationId xmlns:a16="http://schemas.microsoft.com/office/drawing/2014/main" id="{4197E9FA-58E0-4520-93C9-66A6115646B4}"/>
+                <a16:creationId xmlns:a16="http://schemas.microsoft.com/office/drawing/2014/main" id="{DF8F707F-A146-469C-834F-C43BAD00B535}"/>
               </a:ext>
             </a:extLst>
           </p:cNvPr>
@@ -25992,7 +25847,7 @@
           <p:cNvPr id="13" name="">
             <a:extLst xmlns:a="http://schemas.openxmlformats.org/drawingml/2006/main">
               <a:ext uri="{FF2B5EF4-FFF2-40B4-BE49-F238E27FC236}">
-                <a16:creationId xmlns:a16="http://schemas.microsoft.com/office/drawing/2014/main" id="{9121D994-A889-4FAD-A950-EB78CC4A3728}"/>
+                <a16:creationId xmlns:a16="http://schemas.microsoft.com/office/drawing/2014/main" id="{EDEAAA25-6187-4808-B568-915C836CBA60}"/>
               </a:ext>
             </a:extLst>
           </p:cNvPr>
@@ -26038,7 +25893,7 @@
           <p:cNvPr id="14" name="">
             <a:extLst xmlns:a="http://schemas.openxmlformats.org/drawingml/2006/main">
               <a:ext uri="{FF2B5EF4-FFF2-40B4-BE49-F238E27FC236}">
-                <a16:creationId xmlns:a16="http://schemas.microsoft.com/office/drawing/2014/main" id="{4BDBCBA7-B58D-4E5E-B0A3-91B2D2CDFCDA}"/>
+                <a16:creationId xmlns:a16="http://schemas.microsoft.com/office/drawing/2014/main" id="{81A33532-C0BA-45A9-988D-6505AA2C4973}"/>
               </a:ext>
             </a:extLst>
           </p:cNvPr>
@@ -26073,7 +25928,7 @@
           <p:cNvPr id="15" name="">
             <a:extLst xmlns:a="http://schemas.openxmlformats.org/drawingml/2006/main">
               <a:ext uri="{FF2B5EF4-FFF2-40B4-BE49-F238E27FC236}">
-                <a16:creationId xmlns:a16="http://schemas.microsoft.com/office/drawing/2014/main" id="{F8329FCD-F249-44AA-A8CB-265ADC1D4EA8}"/>
+                <a16:creationId xmlns:a16="http://schemas.microsoft.com/office/drawing/2014/main" id="{584A5CD9-BA80-4F1D-9A3B-331E86147448}"/>
               </a:ext>
             </a:extLst>
           </p:cNvPr>
@@ -26137,7 +25992,7 @@
           <p:cNvPr id="16" name="">
             <a:extLst xmlns:a="http://schemas.openxmlformats.org/drawingml/2006/main">
               <a:ext uri="{FF2B5EF4-FFF2-40B4-BE49-F238E27FC236}">
-                <a16:creationId xmlns:a16="http://schemas.microsoft.com/office/drawing/2014/main" id="{9A30F25F-4F98-4C17-95DA-DF823D3EC6E9}"/>
+                <a16:creationId xmlns:a16="http://schemas.microsoft.com/office/drawing/2014/main" id="{866E96A4-C574-4543-BD6B-E79AF13456B4}"/>
               </a:ext>
             </a:extLst>
           </p:cNvPr>
@@ -26172,7 +26027,7 @@
           <p:cNvPr id="17" name="">
             <a:extLst xmlns:a="http://schemas.openxmlformats.org/drawingml/2006/main">
               <a:ext uri="{FF2B5EF4-FFF2-40B4-BE49-F238E27FC236}">
-                <a16:creationId xmlns:a16="http://schemas.microsoft.com/office/drawing/2014/main" id="{FF43855A-A2AB-41F8-A0AB-EB103E7A0F06}"/>
+                <a16:creationId xmlns:a16="http://schemas.microsoft.com/office/drawing/2014/main" id="{767DA9CC-E1CF-4531-B7D7-F071FCEF1680}"/>
               </a:ext>
             </a:extLst>
           </p:cNvPr>
@@ -26236,7 +26091,7 @@
           <p:cNvPr id="18" name="">
             <a:extLst xmlns:a="http://schemas.openxmlformats.org/drawingml/2006/main">
               <a:ext uri="{FF2B5EF4-FFF2-40B4-BE49-F238E27FC236}">
-                <a16:creationId xmlns:a16="http://schemas.microsoft.com/office/drawing/2014/main" id="{94FC66D6-8768-467E-B0A6-2C061C64D8C5}"/>
+                <a16:creationId xmlns:a16="http://schemas.microsoft.com/office/drawing/2014/main" id="{0586EFE1-F348-4A30-A103-CB6991175375}"/>
               </a:ext>
             </a:extLst>
           </p:cNvPr>
@@ -26271,7 +26126,7 @@
           <p:cNvPr id="19" name="">
             <a:extLst xmlns:a="http://schemas.openxmlformats.org/drawingml/2006/main">
               <a:ext uri="{FF2B5EF4-FFF2-40B4-BE49-F238E27FC236}">
-                <a16:creationId xmlns:a16="http://schemas.microsoft.com/office/drawing/2014/main" id="{A68A424D-C8A1-41DC-8237-F39CABBF2470}"/>
+                <a16:creationId xmlns:a16="http://schemas.microsoft.com/office/drawing/2014/main" id="{7EC5552F-E5A8-4E75-A1CD-C7B436EF8FDE}"/>
               </a:ext>
             </a:extLst>
           </p:cNvPr>
@@ -26335,7 +26190,7 @@
           <p:cNvPr id="20" name="">
             <a:extLst xmlns:a="http://schemas.openxmlformats.org/drawingml/2006/main">
               <a:ext uri="{FF2B5EF4-FFF2-40B4-BE49-F238E27FC236}">
-                <a16:creationId xmlns:a16="http://schemas.microsoft.com/office/drawing/2014/main" id="{4C77331E-00C8-4A66-9AA9-F9CCD63B0357}"/>
+                <a16:creationId xmlns:a16="http://schemas.microsoft.com/office/drawing/2014/main" id="{342675E2-9690-4B43-AB0F-82D341539C39}"/>
               </a:ext>
             </a:extLst>
           </p:cNvPr>
@@ -26370,7 +26225,7 @@
           <p:cNvPr id="21" name="">
             <a:extLst xmlns:a="http://schemas.openxmlformats.org/drawingml/2006/main">
               <a:ext uri="{FF2B5EF4-FFF2-40B4-BE49-F238E27FC236}">
-                <a16:creationId xmlns:a16="http://schemas.microsoft.com/office/drawing/2014/main" id="{25572CD6-1174-42F8-960B-A3A442E4DECE}"/>
+                <a16:creationId xmlns:a16="http://schemas.microsoft.com/office/drawing/2014/main" id="{C286DDBB-E26E-470C-9DC2-7389364109A0}"/>
               </a:ext>
             </a:extLst>
           </p:cNvPr>
@@ -26434,7 +26289,7 @@
           <p:cNvPr id="22" name="">
             <a:extLst xmlns:a="http://schemas.openxmlformats.org/drawingml/2006/main">
               <a:ext uri="{FF2B5EF4-FFF2-40B4-BE49-F238E27FC236}">
-                <a16:creationId xmlns:a16="http://schemas.microsoft.com/office/drawing/2014/main" id="{44B627EC-B069-4427-85C6-037280CA78D0}"/>
+                <a16:creationId xmlns:a16="http://schemas.microsoft.com/office/drawing/2014/main" id="{1DFF055D-0F84-4D69-A99A-86637A912821}"/>
               </a:ext>
             </a:extLst>
           </p:cNvPr>
@@ -26469,7 +26324,7 @@
           <p:cNvPr id="23" name="">
             <a:extLst xmlns:a="http://schemas.openxmlformats.org/drawingml/2006/main">
               <a:ext uri="{FF2B5EF4-FFF2-40B4-BE49-F238E27FC236}">
-                <a16:creationId xmlns:a16="http://schemas.microsoft.com/office/drawing/2014/main" id="{09BEEAE8-DE55-484C-B8AC-D0D8AD05F8D4}"/>
+                <a16:creationId xmlns:a16="http://schemas.microsoft.com/office/drawing/2014/main" id="{D2094B66-BB0F-49F6-871E-00A11AE49613}"/>
               </a:ext>
             </a:extLst>
           </p:cNvPr>
@@ -26533,7 +26388,7 @@
           <p:cNvPr id="24" name="">
             <a:extLst xmlns:a="http://schemas.openxmlformats.org/drawingml/2006/main">
               <a:ext uri="{FF2B5EF4-FFF2-40B4-BE49-F238E27FC236}">
-                <a16:creationId xmlns:a16="http://schemas.microsoft.com/office/drawing/2014/main" id="{87636690-80AB-48D3-88F5-8E509679F5B3}"/>
+                <a16:creationId xmlns:a16="http://schemas.microsoft.com/office/drawing/2014/main" id="{27A98B5C-202A-4A70-BD33-93F8FDE3E93F}"/>
               </a:ext>
             </a:extLst>
           </p:cNvPr>
@@ -26593,7 +26448,7 @@
     </p:spTree>
     <p:extLst>
       <p:ext uri="{BB962C8B-B14F-4D97-AF65-F5344CB8AC3E}">
-        <p14:creationId xmlns:p14="http://schemas.microsoft.com/office/powerpoint/2010/main" val="1583635596"/>
+        <p14:creationId xmlns:p14="http://schemas.microsoft.com/office/powerpoint/2010/main" val="1829926095"/>
       </p:ext>
     </p:extLst>
   </p:cSld>
@@ -26624,7 +26479,7 @@
           <p:cNvPr id="1" name="">
             <a:extLst xmlns:a="http://schemas.openxmlformats.org/drawingml/2006/main">
               <a:ext uri="{FF2B5EF4-FFF2-40B4-BE49-F238E27FC236}">
-                <a16:creationId xmlns:a16="http://schemas.microsoft.com/office/drawing/2014/main" id="{3F51A380-841D-47BC-8595-EA2156020F25}"/>
+                <a16:creationId xmlns:a16="http://schemas.microsoft.com/office/drawing/2014/main" id="{A23E9FDA-6A4A-4882-A892-F2CC391D6F92}"/>
               </a:ext>
             </a:extLst>
           </p:cNvPr>
@@ -26659,7 +26514,7 @@
           <p:cNvPr id="2" name="">
             <a:extLst xmlns:a="http://schemas.openxmlformats.org/drawingml/2006/main">
               <a:ext uri="{FF2B5EF4-FFF2-40B4-BE49-F238E27FC236}">
-                <a16:creationId xmlns:a16="http://schemas.microsoft.com/office/drawing/2014/main" id="{7D5FF0EE-485A-43D1-AEB2-601F114A96FD}"/>
+                <a16:creationId xmlns:a16="http://schemas.microsoft.com/office/drawing/2014/main" id="{D2F30D8C-4C84-40E5-9E4B-AEB044ED03C3}"/>
               </a:ext>
             </a:extLst>
           </p:cNvPr>
@@ -26723,7 +26578,7 @@
           <p:cNvPr id="3" name="">
             <a:extLst xmlns:a="http://schemas.openxmlformats.org/drawingml/2006/main">
               <a:ext uri="{FF2B5EF4-FFF2-40B4-BE49-F238E27FC236}">
-                <a16:creationId xmlns:a16="http://schemas.microsoft.com/office/drawing/2014/main" id="{FC38E8D9-4DA8-421B-98A9-9CE4B930622B}"/>
+                <a16:creationId xmlns:a16="http://schemas.microsoft.com/office/drawing/2014/main" id="{76B191BD-F6AE-471D-9241-1A7ADCA513E0}"/>
               </a:ext>
             </a:extLst>
           </p:cNvPr>
@@ -26787,7 +26642,7 @@
           <p:cNvPr id="4" name="">
             <a:extLst xmlns:a="http://schemas.openxmlformats.org/drawingml/2006/main">
               <a:ext uri="{FF2B5EF4-FFF2-40B4-BE49-F238E27FC236}">
-                <a16:creationId xmlns:a16="http://schemas.microsoft.com/office/drawing/2014/main" id="{616631FC-A89A-4D2C-98E9-409DD5BDB426}"/>
+                <a16:creationId xmlns:a16="http://schemas.microsoft.com/office/drawing/2014/main" id="{370D88AE-6F3C-417A-BCAB-9B693919D0FF}"/>
               </a:ext>
             </a:extLst>
           </p:cNvPr>
@@ -26851,7 +26706,7 @@
           <p:cNvPr id="5" name="">
             <a:extLst xmlns:a="http://schemas.openxmlformats.org/drawingml/2006/main">
               <a:ext uri="{FF2B5EF4-FFF2-40B4-BE49-F238E27FC236}">
-                <a16:creationId xmlns:a16="http://schemas.microsoft.com/office/drawing/2014/main" id="{75E19066-E2D5-4CD4-82CC-E8DD2957C877}"/>
+                <a16:creationId xmlns:a16="http://schemas.microsoft.com/office/drawing/2014/main" id="{640B2BB8-1ADB-4978-8701-35C28958DE3C}"/>
               </a:ext>
             </a:extLst>
           </p:cNvPr>
@@ -26915,7 +26770,7 @@
           <p:cNvPr id="6" name="">
             <a:extLst xmlns:a="http://schemas.openxmlformats.org/drawingml/2006/main">
               <a:ext uri="{FF2B5EF4-FFF2-40B4-BE49-F238E27FC236}">
-                <a16:creationId xmlns:a16="http://schemas.microsoft.com/office/drawing/2014/main" id="{5170FA70-909B-4845-B411-E4294FAEF8EB}"/>
+                <a16:creationId xmlns:a16="http://schemas.microsoft.com/office/drawing/2014/main" id="{A12FADAA-6980-4A26-B09C-18C8ABAB4D48}"/>
               </a:ext>
             </a:extLst>
           </p:cNvPr>
@@ -26948,7 +26803,7 @@
           <p:cNvPr id="7" name="">
             <a:extLst xmlns:a="http://schemas.openxmlformats.org/drawingml/2006/main">
               <a:ext uri="{FF2B5EF4-FFF2-40B4-BE49-F238E27FC236}">
-                <a16:creationId xmlns:a16="http://schemas.microsoft.com/office/drawing/2014/main" id="{76286C19-70F6-425D-AE93-41C052A210F1}"/>
+                <a16:creationId xmlns:a16="http://schemas.microsoft.com/office/drawing/2014/main" id="{4A5A77D3-5318-4762-BD2A-653800F515B6}"/>
               </a:ext>
             </a:extLst>
           </p:cNvPr>
@@ -26983,7 +26838,7 @@
           <p:cNvPr id="8" name="">
             <a:extLst xmlns:a="http://schemas.openxmlformats.org/drawingml/2006/main">
               <a:ext uri="{FF2B5EF4-FFF2-40B4-BE49-F238E27FC236}">
-                <a16:creationId xmlns:a16="http://schemas.microsoft.com/office/drawing/2014/main" id="{84AF2E07-DDBB-4CA8-93EC-EB9E95C07632}"/>
+                <a16:creationId xmlns:a16="http://schemas.microsoft.com/office/drawing/2014/main" id="{09487EA2-813D-4D77-B15C-E253D06A2A42}"/>
               </a:ext>
             </a:extLst>
           </p:cNvPr>
@@ -27047,7 +26902,7 @@
           <p:cNvPr id="9" name="">
             <a:extLst xmlns:a="http://schemas.openxmlformats.org/drawingml/2006/main">
               <a:ext uri="{FF2B5EF4-FFF2-40B4-BE49-F238E27FC236}">
-                <a16:creationId xmlns:a16="http://schemas.microsoft.com/office/drawing/2014/main" id="{7AB55905-D975-4C98-B89B-D5A7D268E8CA}"/>
+                <a16:creationId xmlns:a16="http://schemas.microsoft.com/office/drawing/2014/main" id="{0E2A731D-F6E1-4043-970A-AB8F84964265}"/>
               </a:ext>
             </a:extLst>
           </p:cNvPr>
@@ -27111,7 +26966,7 @@
           <p:cNvPr id="10" name="">
             <a:extLst xmlns:a="http://schemas.openxmlformats.org/drawingml/2006/main">
               <a:ext uri="{FF2B5EF4-FFF2-40B4-BE49-F238E27FC236}">
-                <a16:creationId xmlns:a16="http://schemas.microsoft.com/office/drawing/2014/main" id="{F0156829-7EB6-4FAE-8F63-0DF9CE8E8E90}"/>
+                <a16:creationId xmlns:a16="http://schemas.microsoft.com/office/drawing/2014/main" id="{1D22D620-D6AD-4379-9A22-02AF5E45A18E}"/>
               </a:ext>
             </a:extLst>
           </p:cNvPr>
@@ -27144,7 +26999,7 @@
           <p:cNvPr id="11" name="">
             <a:extLst xmlns:a="http://schemas.openxmlformats.org/drawingml/2006/main">
               <a:ext uri="{FF2B5EF4-FFF2-40B4-BE49-F238E27FC236}">
-                <a16:creationId xmlns:a16="http://schemas.microsoft.com/office/drawing/2014/main" id="{ACCCD362-23B4-4D47-8179-8898A811A53E}"/>
+                <a16:creationId xmlns:a16="http://schemas.microsoft.com/office/drawing/2014/main" id="{238F8FBD-B71F-42D9-9DA7-BDDDDCDBB2BF}"/>
               </a:ext>
             </a:extLst>
           </p:cNvPr>
@@ -27179,7 +27034,7 @@
           <p:cNvPr id="12" name="">
             <a:extLst xmlns:a="http://schemas.openxmlformats.org/drawingml/2006/main">
               <a:ext uri="{FF2B5EF4-FFF2-40B4-BE49-F238E27FC236}">
-                <a16:creationId xmlns:a16="http://schemas.microsoft.com/office/drawing/2014/main" id="{1DBC3125-DD5F-4B19-85D8-C7A240DD0090}"/>
+                <a16:creationId xmlns:a16="http://schemas.microsoft.com/office/drawing/2014/main" id="{E04A6454-DB55-415F-B13F-AA8B587D0D42}"/>
               </a:ext>
             </a:extLst>
           </p:cNvPr>
@@ -27243,7 +27098,7 @@
           <p:cNvPr id="13" name="">
             <a:extLst xmlns:a="http://schemas.openxmlformats.org/drawingml/2006/main">
               <a:ext uri="{FF2B5EF4-FFF2-40B4-BE49-F238E27FC236}">
-                <a16:creationId xmlns:a16="http://schemas.microsoft.com/office/drawing/2014/main" id="{BE39BFA6-BAD7-4644-9A44-B15FBF33F386}"/>
+                <a16:creationId xmlns:a16="http://schemas.microsoft.com/office/drawing/2014/main" id="{D663C109-27DA-4430-B38A-7DB088767AA1}"/>
               </a:ext>
             </a:extLst>
           </p:cNvPr>
@@ -27307,7 +27162,7 @@
           <p:cNvPr id="14" name="">
             <a:extLst xmlns:a="http://schemas.openxmlformats.org/drawingml/2006/main">
               <a:ext uri="{FF2B5EF4-FFF2-40B4-BE49-F238E27FC236}">
-                <a16:creationId xmlns:a16="http://schemas.microsoft.com/office/drawing/2014/main" id="{CC150D38-6468-4375-BCE0-6429D1200879}"/>
+                <a16:creationId xmlns:a16="http://schemas.microsoft.com/office/drawing/2014/main" id="{6EBCE00D-25E0-4AE2-AEDC-5A3C8135EC38}"/>
               </a:ext>
             </a:extLst>
           </p:cNvPr>
@@ -27340,7 +27195,7 @@
           <p:cNvPr id="15" name="">
             <a:extLst xmlns:a="http://schemas.openxmlformats.org/drawingml/2006/main">
               <a:ext uri="{FF2B5EF4-FFF2-40B4-BE49-F238E27FC236}">
-                <a16:creationId xmlns:a16="http://schemas.microsoft.com/office/drawing/2014/main" id="{09CB4338-6217-4A1E-B06A-ECA5A6BBF5C2}"/>
+                <a16:creationId xmlns:a16="http://schemas.microsoft.com/office/drawing/2014/main" id="{877E280A-190B-4390-8561-7B6FD1658D64}"/>
               </a:ext>
             </a:extLst>
           </p:cNvPr>
@@ -27375,7 +27230,7 @@
           <p:cNvPr id="16" name="">
             <a:extLst xmlns:a="http://schemas.openxmlformats.org/drawingml/2006/main">
               <a:ext uri="{FF2B5EF4-FFF2-40B4-BE49-F238E27FC236}">
-                <a16:creationId xmlns:a16="http://schemas.microsoft.com/office/drawing/2014/main" id="{62DC5689-69B9-4ECD-9C75-E96CFA210589}"/>
+                <a16:creationId xmlns:a16="http://schemas.microsoft.com/office/drawing/2014/main" id="{2ED983D4-5696-4655-9DD4-4BF899B70E4B}"/>
               </a:ext>
             </a:extLst>
           </p:cNvPr>
@@ -27439,7 +27294,7 @@
           <p:cNvPr id="17" name="">
             <a:extLst xmlns:a="http://schemas.openxmlformats.org/drawingml/2006/main">
               <a:ext uri="{FF2B5EF4-FFF2-40B4-BE49-F238E27FC236}">
-                <a16:creationId xmlns:a16="http://schemas.microsoft.com/office/drawing/2014/main" id="{996CE7C3-FA9D-4C66-9F3F-FF31EBAE9535}"/>
+                <a16:creationId xmlns:a16="http://schemas.microsoft.com/office/drawing/2014/main" id="{B286E157-BD49-4ED6-985F-B23A2C6C16F5}"/>
               </a:ext>
             </a:extLst>
           </p:cNvPr>
@@ -27503,7 +27358,7 @@
           <p:cNvPr id="18" name="">
             <a:extLst xmlns:a="http://schemas.openxmlformats.org/drawingml/2006/main">
               <a:ext uri="{FF2B5EF4-FFF2-40B4-BE49-F238E27FC236}">
-                <a16:creationId xmlns:a16="http://schemas.microsoft.com/office/drawing/2014/main" id="{35C4E7A8-CA56-447C-961B-D5667CA23B25}"/>
+                <a16:creationId xmlns:a16="http://schemas.microsoft.com/office/drawing/2014/main" id="{9C23F94D-FEC7-45B8-9E3A-0A00DE81A688}"/>
               </a:ext>
             </a:extLst>
           </p:cNvPr>
@@ -27538,7 +27393,7 @@
           <p:cNvPr id="19" name="">
             <a:extLst xmlns:a="http://schemas.openxmlformats.org/drawingml/2006/main">
               <a:ext uri="{FF2B5EF4-FFF2-40B4-BE49-F238E27FC236}">
-                <a16:creationId xmlns:a16="http://schemas.microsoft.com/office/drawing/2014/main" id="{2626B94E-CBA6-4DEE-A0AB-99AA58D75C41}"/>
+                <a16:creationId xmlns:a16="http://schemas.microsoft.com/office/drawing/2014/main" id="{11F50763-2BC4-4998-9D7A-C7C25D92DA05}"/>
               </a:ext>
             </a:extLst>
           </p:cNvPr>
@@ -27602,7 +27457,7 @@
           <p:cNvPr id="20" name="">
             <a:extLst xmlns:a="http://schemas.openxmlformats.org/drawingml/2006/main">
               <a:ext uri="{FF2B5EF4-FFF2-40B4-BE49-F238E27FC236}">
-                <a16:creationId xmlns:a16="http://schemas.microsoft.com/office/drawing/2014/main" id="{0B9849CA-826F-4D9F-AC65-8C54DA5F4DEF}"/>
+                <a16:creationId xmlns:a16="http://schemas.microsoft.com/office/drawing/2014/main" id="{D3FD06DB-8F06-49AF-AED1-F57CA8CA64FE}"/>
               </a:ext>
             </a:extLst>
           </p:cNvPr>
@@ -27637,7 +27492,7 @@
           <p:cNvPr id="21" name="">
             <a:extLst xmlns:a="http://schemas.openxmlformats.org/drawingml/2006/main">
               <a:ext uri="{FF2B5EF4-FFF2-40B4-BE49-F238E27FC236}">
-                <a16:creationId xmlns:a16="http://schemas.microsoft.com/office/drawing/2014/main" id="{CBD2212C-959E-4359-8A9C-829586D9616D}"/>
+                <a16:creationId xmlns:a16="http://schemas.microsoft.com/office/drawing/2014/main" id="{9ECA939C-263E-4AC8-8DC7-76F45629F687}"/>
               </a:ext>
             </a:extLst>
           </p:cNvPr>
@@ -27699,7 +27554,7 @@
     </p:spTree>
     <p:extLst>
       <p:ext uri="{BB962C8B-B14F-4D97-AF65-F5344CB8AC3E}">
-        <p14:creationId xmlns:p14="http://schemas.microsoft.com/office/powerpoint/2010/main" val="843375931"/>
+        <p14:creationId xmlns:p14="http://schemas.microsoft.com/office/powerpoint/2010/main" val="1585488738"/>
       </p:ext>
     </p:extLst>
   </p:cSld>
